--- a/deck/Pitch_Deck_AthenaRun_v2.pptx
+++ b/deck/Pitch_Deck_AthenaRun_v2.pptx
@@ -2778,6 +2778,41 @@
           </a:ln>
         </p:spPr>
       </p:pic>
+      <p:sp>
+        <p:nvSpPr>
+          <p:cNvPr id="95" name="TextBox 94"/>
+          <p:cNvSpPr txBox="1"/>
+          <p:nvPr/>
+        </p:nvSpPr>
+        <p:spPr>
+          <a:xfrm>
+            <a:off x="736600" y="4610100"/>
+            <a:ext cx="7620000" cy="279400"/>
+          </a:xfrm>
+          <a:prstGeom prst="rect">
+            <a:avLst/>
+          </a:prstGeom>
+          <a:noFill/>
+        </p:spPr>
+        <p:txBody>
+          <a:bodyPr wrap="square" lIns="0" rIns="0" tIns="0" bIns="0" anchor="ctr">
+            <a:spAutoFit/>
+          </a:bodyPr>
+          <a:lstStyle/>
+          <a:p>
+            <a:pPr algn="l"/>
+            <a:r>
+              <a:rPr sz="1700" b="0">
+                <a:solidFill>
+                  <a:srgbClr val="FF6B3D"/>
+                </a:solidFill>
+                <a:latin typeface="Arial"/>
+              </a:rPr>
+              <a:t>We build the chain, not the generator.</a:t>
+            </a:r>
+          </a:p>
+        </p:txBody>
+      </p:sp>
     </p:spTree>
   </p:cSld>
   <p:clrMapOvr>
@@ -2829,8 +2864,8 @@
         </p:nvSpPr>
         <p:spPr>
           <a:xfrm>
-            <a:off x="698500" y="609600"/>
-            <a:ext cx="8890000" cy="317500"/>
+            <a:off x="698500" y="571500"/>
+            <a:ext cx="9906000" cy="393700"/>
           </a:xfrm>
           <a:prstGeom prst="rect">
             <a:avLst/>
@@ -2845,16 +2880,16 @@
           <a:p>
             <a:pPr algn="l"/>
             <a:r>
-              <a:rPr sz="2300" b="1">
+              <a:rPr sz="2800" b="1">
                 <a:solidFill>
                   <a:srgbClr val="ECECEE"/>
                 </a:solidFill>
                 <a:latin typeface="Arial"/>
               </a:rPr>
-              <a:t>From idea to running software.</a:t>
-            </a:r>
-            <a:r>
-              <a:rPr sz="2300" b="0">
+              <a:t>From package to running software.</a:t>
+            </a:r>
+            <a:r>
+              <a:rPr sz="2800" b="0">
                 <a:solidFill>
                   <a:srgbClr val="9A9AA2"/>
                 </a:solidFill>
@@ -2895,7 +2930,7 @@
                 </a:solidFill>
                 <a:latin typeface="Courier New"/>
               </a:rPr>
-              <a:t>04 — The chain, part 2</a:t>
+              <a:t>04 — The chain</a:t>
             </a:r>
           </a:p>
         </p:txBody>
@@ -2952,8 +2987,8 @@
         </p:nvSpPr>
         <p:spPr>
           <a:xfrm>
-            <a:off x="698500" y="1016000"/>
-            <a:ext cx="9398000" cy="647700"/>
+            <a:off x="698500" y="1244600"/>
+            <a:ext cx="9398000" cy="482600"/>
           </a:xfrm>
           <a:prstGeom prst="rect">
             <a:avLst/>
@@ -2968,11 +3003,11 @@
           <a:p>
             <a:pPr algn="l">
               <a:lnSpc>
-                <a:spcPts val="1700"/>
+                <a:spcPts val="1900"/>
               </a:lnSpc>
             </a:pPr>
             <a:r>
-              <a:rPr sz="1200" b="0">
+              <a:rPr sz="1400" b="0">
                 <a:solidFill>
                   <a:srgbClr val="9A9AA2"/>
                 </a:solidFill>
@@ -2981,7 +3016,7 @@
               <a:t>The package is approved. </a:t>
             </a:r>
             <a:r>
-              <a:rPr sz="1200" b="1">
+              <a:rPr sz="1400" b="1">
                 <a:solidFill>
                   <a:srgbClr val="ECECEE"/>
                 </a:solidFill>
@@ -2990,7 +3025,7 @@
               <a:t>Build through Operate</a:t>
             </a:r>
             <a:r>
-              <a:rPr sz="1200" b="0">
+              <a:rPr sz="1400" b="0">
                 <a:solidFill>
                   <a:srgbClr val="9A9AA2"/>
                 </a:solidFill>
@@ -3003,14 +3038,358 @@
       </p:sp>
       <p:sp>
         <p:nvSpPr>
-          <p:cNvPr id="7" name="Rectangle 6"/>
+          <p:cNvPr id="7" name="TextBox 6"/>
+          <p:cNvSpPr txBox="1"/>
+          <p:nvPr/>
+        </p:nvSpPr>
+        <p:spPr>
+          <a:xfrm>
+            <a:off x="698500" y="2387600"/>
+            <a:ext cx="5715000" cy="177800"/>
+          </a:xfrm>
+          <a:prstGeom prst="rect">
+            <a:avLst/>
+          </a:prstGeom>
+          <a:noFill/>
+        </p:spPr>
+        <p:txBody>
+          <a:bodyPr wrap="square" lIns="0" rIns="0" tIns="0" bIns="0" anchor="ctr">
+            <a:spAutoFit/>
+          </a:bodyPr>
+          <a:lstStyle/>
+          <a:p>
+            <a:pPr algn="l"/>
+            <a:r>
+              <a:rPr sz="1100" b="0" spc="300">
+                <a:solidFill>
+                  <a:srgbClr val="9A9AA2"/>
+                </a:solidFill>
+                <a:latin typeface="Courier New"/>
+              </a:rPr>
+              <a:t>PACKAGE TO RUNNING SOFTWARE</a:t>
+            </a:r>
+          </a:p>
+        </p:txBody>
+      </p:sp>
+      <p:sp>
+        <p:nvSpPr>
+          <p:cNvPr id="8" name="Rectangle 7"/>
           <p:cNvSpPr/>
           <p:nvPr/>
         </p:nvSpPr>
         <p:spPr>
           <a:xfrm>
-            <a:off x="698500" y="3429000"/>
-            <a:ext cx="10788650" cy="6350"/>
+            <a:off x="889000" y="3556000"/>
+            <a:ext cx="2540000" cy="6350"/>
+          </a:xfrm>
+          <a:prstGeom prst="rect">
+            <a:avLst/>
+          </a:prstGeom>
+          <a:solidFill>
+            <a:srgbClr val="1F1F22"/>
+          </a:solidFill>
+          <a:ln>
+            <a:noFill/>
+          </a:ln>
+          <a:effectLst/>
+        </p:spPr>
+        <p:style>
+          <a:lnRef idx="1">
+            <a:schemeClr val="accent1"/>
+          </a:lnRef>
+          <a:fillRef idx="3">
+            <a:schemeClr val="accent1"/>
+          </a:fillRef>
+          <a:effectRef idx="2">
+            <a:schemeClr val="accent1"/>
+          </a:effectRef>
+          <a:fontRef idx="minor">
+            <a:schemeClr val="lt1"/>
+          </a:fontRef>
+        </p:style>
+        <p:txBody>
+          <a:bodyPr rtlCol="0" anchor="ctr"/>
+          <a:lstStyle/>
+          <a:p>
+            <a:pPr algn="ctr"/>
+          </a:p>
+        </p:txBody>
+      </p:sp>
+      <p:sp>
+        <p:nvSpPr>
+          <p:cNvPr id="9" name="Oval 8"/>
+          <p:cNvSpPr/>
+          <p:nvPr/>
+        </p:nvSpPr>
+        <p:spPr>
+          <a:xfrm>
+            <a:off x="844550" y="3511550"/>
+            <a:ext cx="88900" cy="88900"/>
+          </a:xfrm>
+          <a:prstGeom prst="ellipse">
+            <a:avLst/>
+          </a:prstGeom>
+          <a:solidFill>
+            <a:srgbClr val="0E0E11"/>
+          </a:solidFill>
+          <a:ln w="12700">
+            <a:solidFill>
+              <a:srgbClr val="5A5A60"/>
+            </a:solidFill>
+          </a:ln>
+          <a:effectLst/>
+        </p:spPr>
+        <p:style>
+          <a:lnRef idx="1">
+            <a:schemeClr val="accent1"/>
+          </a:lnRef>
+          <a:fillRef idx="3">
+            <a:schemeClr val="accent1"/>
+          </a:fillRef>
+          <a:effectRef idx="2">
+            <a:schemeClr val="accent1"/>
+          </a:effectRef>
+          <a:fontRef idx="minor">
+            <a:schemeClr val="lt1"/>
+          </a:fontRef>
+        </p:style>
+        <p:txBody>
+          <a:bodyPr rtlCol="0" anchor="ctr"/>
+          <a:lstStyle/>
+          <a:p>
+            <a:pPr algn="ctr"/>
+          </a:p>
+        </p:txBody>
+      </p:sp>
+      <p:sp>
+        <p:nvSpPr>
+          <p:cNvPr id="10" name="Oval 9"/>
+          <p:cNvSpPr/>
+          <p:nvPr/>
+        </p:nvSpPr>
+        <p:spPr>
+          <a:xfrm>
+            <a:off x="1479550" y="3511550"/>
+            <a:ext cx="88900" cy="88900"/>
+          </a:xfrm>
+          <a:prstGeom prst="ellipse">
+            <a:avLst/>
+          </a:prstGeom>
+          <a:solidFill>
+            <a:srgbClr val="0E0E11"/>
+          </a:solidFill>
+          <a:ln w="12700">
+            <a:solidFill>
+              <a:srgbClr val="5A5A60"/>
+            </a:solidFill>
+          </a:ln>
+          <a:effectLst/>
+        </p:spPr>
+        <p:style>
+          <a:lnRef idx="1">
+            <a:schemeClr val="accent1"/>
+          </a:lnRef>
+          <a:fillRef idx="3">
+            <a:schemeClr val="accent1"/>
+          </a:fillRef>
+          <a:effectRef idx="2">
+            <a:schemeClr val="accent1"/>
+          </a:effectRef>
+          <a:fontRef idx="minor">
+            <a:schemeClr val="lt1"/>
+          </a:fontRef>
+        </p:style>
+        <p:txBody>
+          <a:bodyPr rtlCol="0" anchor="ctr"/>
+          <a:lstStyle/>
+          <a:p>
+            <a:pPr algn="ctr"/>
+          </a:p>
+        </p:txBody>
+      </p:sp>
+      <p:sp>
+        <p:nvSpPr>
+          <p:cNvPr id="11" name="Oval 10"/>
+          <p:cNvSpPr/>
+          <p:nvPr/>
+        </p:nvSpPr>
+        <p:spPr>
+          <a:xfrm>
+            <a:off x="2114550" y="3511550"/>
+            <a:ext cx="88900" cy="88900"/>
+          </a:xfrm>
+          <a:prstGeom prst="ellipse">
+            <a:avLst/>
+          </a:prstGeom>
+          <a:solidFill>
+            <a:srgbClr val="0E0E11"/>
+          </a:solidFill>
+          <a:ln w="12700">
+            <a:solidFill>
+              <a:srgbClr val="5A5A60"/>
+            </a:solidFill>
+          </a:ln>
+          <a:effectLst/>
+        </p:spPr>
+        <p:style>
+          <a:lnRef idx="1">
+            <a:schemeClr val="accent1"/>
+          </a:lnRef>
+          <a:fillRef idx="3">
+            <a:schemeClr val="accent1"/>
+          </a:fillRef>
+          <a:effectRef idx="2">
+            <a:schemeClr val="accent1"/>
+          </a:effectRef>
+          <a:fontRef idx="minor">
+            <a:schemeClr val="lt1"/>
+          </a:fontRef>
+        </p:style>
+        <p:txBody>
+          <a:bodyPr rtlCol="0" anchor="ctr"/>
+          <a:lstStyle/>
+          <a:p>
+            <a:pPr algn="ctr"/>
+          </a:p>
+        </p:txBody>
+      </p:sp>
+      <p:sp>
+        <p:nvSpPr>
+          <p:cNvPr id="12" name="Oval 11"/>
+          <p:cNvSpPr/>
+          <p:nvPr/>
+        </p:nvSpPr>
+        <p:spPr>
+          <a:xfrm>
+            <a:off x="2749550" y="3511550"/>
+            <a:ext cx="88900" cy="88900"/>
+          </a:xfrm>
+          <a:prstGeom prst="ellipse">
+            <a:avLst/>
+          </a:prstGeom>
+          <a:solidFill>
+            <a:srgbClr val="0E0E11"/>
+          </a:solidFill>
+          <a:ln w="12700">
+            <a:solidFill>
+              <a:srgbClr val="5A5A60"/>
+            </a:solidFill>
+          </a:ln>
+          <a:effectLst/>
+        </p:spPr>
+        <p:style>
+          <a:lnRef idx="1">
+            <a:schemeClr val="accent1"/>
+          </a:lnRef>
+          <a:fillRef idx="3">
+            <a:schemeClr val="accent1"/>
+          </a:fillRef>
+          <a:effectRef idx="2">
+            <a:schemeClr val="accent1"/>
+          </a:effectRef>
+          <a:fontRef idx="minor">
+            <a:schemeClr val="lt1"/>
+          </a:fontRef>
+        </p:style>
+        <p:txBody>
+          <a:bodyPr rtlCol="0" anchor="ctr"/>
+          <a:lstStyle/>
+          <a:p>
+            <a:pPr algn="ctr"/>
+          </a:p>
+        </p:txBody>
+      </p:sp>
+      <p:sp>
+        <p:nvSpPr>
+          <p:cNvPr id="13" name="Oval 12"/>
+          <p:cNvSpPr/>
+          <p:nvPr/>
+        </p:nvSpPr>
+        <p:spPr>
+          <a:xfrm>
+            <a:off x="3384550" y="3511550"/>
+            <a:ext cx="88900" cy="88900"/>
+          </a:xfrm>
+          <a:prstGeom prst="ellipse">
+            <a:avLst/>
+          </a:prstGeom>
+          <a:solidFill>
+            <a:srgbClr val="0E0E11"/>
+          </a:solidFill>
+          <a:ln w="12700">
+            <a:solidFill>
+              <a:srgbClr val="5A5A60"/>
+            </a:solidFill>
+          </a:ln>
+          <a:effectLst/>
+        </p:spPr>
+        <p:style>
+          <a:lnRef idx="1">
+            <a:schemeClr val="accent1"/>
+          </a:lnRef>
+          <a:fillRef idx="3">
+            <a:schemeClr val="accent1"/>
+          </a:fillRef>
+          <a:effectRef idx="2">
+            <a:schemeClr val="accent1"/>
+          </a:effectRef>
+          <a:fontRef idx="minor">
+            <a:schemeClr val="lt1"/>
+          </a:fontRef>
+        </p:style>
+        <p:txBody>
+          <a:bodyPr rtlCol="0" anchor="ctr"/>
+          <a:lstStyle/>
+          <a:p>
+            <a:pPr algn="ctr"/>
+          </a:p>
+        </p:txBody>
+      </p:sp>
+      <p:sp>
+        <p:nvSpPr>
+          <p:cNvPr id="14" name="TextBox 13"/>
+          <p:cNvSpPr txBox="1"/>
+          <p:nvPr/>
+        </p:nvSpPr>
+        <p:spPr>
+          <a:xfrm>
+            <a:off x="698500" y="3784600"/>
+            <a:ext cx="2921000" cy="139700"/>
+          </a:xfrm>
+          <a:prstGeom prst="rect">
+            <a:avLst/>
+          </a:prstGeom>
+          <a:noFill/>
+        </p:spPr>
+        <p:txBody>
+          <a:bodyPr wrap="square" lIns="0" rIns="0" tIns="0" bIns="0" anchor="ctr">
+            <a:spAutoFit/>
+          </a:bodyPr>
+          <a:lstStyle/>
+          <a:p>
+            <a:pPr algn="ctr"/>
+            <a:r>
+              <a:rPr sz="1000" b="0" spc="100">
+                <a:solidFill>
+                  <a:srgbClr val="5A5A60"/>
+                </a:solidFill>
+                <a:latin typeface="Courier New"/>
+              </a:rPr>
+              <a:t>01–05 · build-ready package</a:t>
+            </a:r>
+          </a:p>
+        </p:txBody>
+      </p:sp>
+      <p:sp>
+        <p:nvSpPr>
+          <p:cNvPr id="15" name="Rectangle 14"/>
+          <p:cNvSpPr/>
+          <p:nvPr/>
+        </p:nvSpPr>
+        <p:spPr>
+          <a:xfrm>
+            <a:off x="3429000" y="3556000"/>
+            <a:ext cx="381000" cy="6350"/>
           </a:xfrm>
           <a:prstGeom prst="rect">
             <a:avLst/>
@@ -3047,523 +3426,14 @@
       </p:sp>
       <p:sp>
         <p:nvSpPr>
-          <p:cNvPr id="8" name="Rectangle 7"/>
-          <p:cNvSpPr/>
-          <p:nvPr/>
-        </p:nvSpPr>
-        <p:spPr>
-          <a:xfrm>
-            <a:off x="698500" y="3435350"/>
-            <a:ext cx="10788650" cy="6350"/>
-          </a:xfrm>
-          <a:prstGeom prst="rect">
-            <a:avLst/>
-          </a:prstGeom>
-          <a:solidFill>
-            <a:srgbClr val="9A9AA2"/>
-          </a:solidFill>
-          <a:ln>
-            <a:noFill/>
-          </a:ln>
-          <a:effectLst/>
-        </p:spPr>
-        <p:style>
-          <a:lnRef idx="1">
-            <a:schemeClr val="accent1"/>
-          </a:lnRef>
-          <a:fillRef idx="3">
-            <a:schemeClr val="accent1"/>
-          </a:fillRef>
-          <a:effectRef idx="2">
-            <a:schemeClr val="accent1"/>
-          </a:effectRef>
-          <a:fontRef idx="minor">
-            <a:schemeClr val="lt1"/>
-          </a:fontRef>
-        </p:style>
-        <p:txBody>
-          <a:bodyPr rtlCol="0" anchor="ctr"/>
-          <a:lstStyle/>
-          <a:p>
-            <a:pPr algn="ctr"/>
-          </a:p>
-        </p:txBody>
-      </p:sp>
-      <p:sp>
-        <p:nvSpPr>
-          <p:cNvPr id="9" name="Rectangle 8"/>
-          <p:cNvSpPr/>
-          <p:nvPr/>
-        </p:nvSpPr>
-        <p:spPr>
-          <a:xfrm>
-            <a:off x="698500" y="3429000"/>
-            <a:ext cx="279400" cy="25400"/>
-          </a:xfrm>
-          <a:prstGeom prst="rect">
-            <a:avLst/>
-          </a:prstGeom>
-          <a:solidFill>
-            <a:srgbClr val="9A9AA2"/>
-          </a:solidFill>
-          <a:ln>
-            <a:noFill/>
-          </a:ln>
-          <a:effectLst/>
-        </p:spPr>
-        <p:style>
-          <a:lnRef idx="1">
-            <a:schemeClr val="accent1"/>
-          </a:lnRef>
-          <a:fillRef idx="3">
-            <a:schemeClr val="accent1"/>
-          </a:fillRef>
-          <a:effectRef idx="2">
-            <a:schemeClr val="accent1"/>
-          </a:effectRef>
-          <a:fontRef idx="minor">
-            <a:schemeClr val="lt1"/>
-          </a:fontRef>
-        </p:style>
-        <p:txBody>
-          <a:bodyPr rtlCol="0" anchor="ctr"/>
-          <a:lstStyle/>
-          <a:p>
-            <a:pPr algn="ctr"/>
-          </a:p>
-        </p:txBody>
-      </p:sp>
-      <p:sp>
-        <p:nvSpPr>
-          <p:cNvPr id="10" name="TextBox 9"/>
-          <p:cNvSpPr txBox="1"/>
-          <p:nvPr/>
-        </p:nvSpPr>
-        <p:spPr>
-          <a:xfrm>
-            <a:off x="698500" y="3619500"/>
-            <a:ext cx="3441700" cy="165100"/>
-          </a:xfrm>
-          <a:prstGeom prst="rect">
-            <a:avLst/>
-          </a:prstGeom>
-          <a:noFill/>
-        </p:spPr>
-        <p:txBody>
-          <a:bodyPr wrap="square" lIns="0" rIns="0" tIns="0" bIns="0" anchor="ctr">
-            <a:spAutoFit/>
-          </a:bodyPr>
-          <a:lstStyle/>
-          <a:p>
-            <a:pPr algn="l"/>
-            <a:r>
-              <a:rPr sz="1300" b="0">
-                <a:solidFill>
-                  <a:srgbClr val="ECECEE"/>
-                </a:solidFill>
-                <a:latin typeface="Arial"/>
-              </a:rPr>
-              <a:t>Build</a:t>
-            </a:r>
-          </a:p>
-        </p:txBody>
-      </p:sp>
-      <p:sp>
-        <p:nvSpPr>
-          <p:cNvPr id="11" name="TextBox 10"/>
-          <p:cNvSpPr txBox="1"/>
-          <p:nvPr/>
-        </p:nvSpPr>
-        <p:spPr>
-          <a:xfrm>
-            <a:off x="698500" y="3822700"/>
-            <a:ext cx="3441700" cy="139700"/>
-          </a:xfrm>
-          <a:prstGeom prst="rect">
-            <a:avLst/>
-          </a:prstGeom>
-          <a:noFill/>
-        </p:spPr>
-        <p:txBody>
-          <a:bodyPr wrap="square" lIns="0" rIns="0" tIns="0" bIns="0" anchor="ctr">
-            <a:spAutoFit/>
-          </a:bodyPr>
-          <a:lstStyle/>
-          <a:p>
-            <a:pPr algn="l"/>
-            <a:r>
-              <a:rPr sz="1000" b="0">
-                <a:solidFill>
-                  <a:srgbClr val="9A9AA2"/>
-                </a:solidFill>
-                <a:latin typeface="Arial"/>
-              </a:rPr>
-              <a:t>code + review</a:t>
-            </a:r>
-          </a:p>
-        </p:txBody>
-      </p:sp>
-      <p:sp>
-        <p:nvSpPr>
-          <p:cNvPr id="12" name="Rectangle 11"/>
-          <p:cNvSpPr/>
-          <p:nvPr/>
-        </p:nvSpPr>
-        <p:spPr>
-          <a:xfrm>
-            <a:off x="4292600" y="3429000"/>
-            <a:ext cx="279400" cy="25400"/>
-          </a:xfrm>
-          <a:prstGeom prst="rect">
-            <a:avLst/>
-          </a:prstGeom>
-          <a:solidFill>
-            <a:srgbClr val="9A9AA2"/>
-          </a:solidFill>
-          <a:ln>
-            <a:noFill/>
-          </a:ln>
-          <a:effectLst/>
-        </p:spPr>
-        <p:style>
-          <a:lnRef idx="1">
-            <a:schemeClr val="accent1"/>
-          </a:lnRef>
-          <a:fillRef idx="3">
-            <a:schemeClr val="accent1"/>
-          </a:fillRef>
-          <a:effectRef idx="2">
-            <a:schemeClr val="accent1"/>
-          </a:effectRef>
-          <a:fontRef idx="minor">
-            <a:schemeClr val="lt1"/>
-          </a:fontRef>
-        </p:style>
-        <p:txBody>
-          <a:bodyPr rtlCol="0" anchor="ctr"/>
-          <a:lstStyle/>
-          <a:p>
-            <a:pPr algn="ctr"/>
-          </a:p>
-        </p:txBody>
-      </p:sp>
-      <p:sp>
-        <p:nvSpPr>
-          <p:cNvPr id="13" name="Rectangle 12"/>
-          <p:cNvSpPr/>
-          <p:nvPr/>
-        </p:nvSpPr>
-        <p:spPr>
-          <a:xfrm>
-            <a:off x="4038600" y="3454400"/>
-            <a:ext cx="6350" cy="635000"/>
-          </a:xfrm>
-          <a:prstGeom prst="rect">
-            <a:avLst/>
-          </a:prstGeom>
-          <a:solidFill>
-            <a:srgbClr val="1F1F22"/>
-          </a:solidFill>
-          <a:ln>
-            <a:noFill/>
-          </a:ln>
-          <a:effectLst/>
-        </p:spPr>
-        <p:style>
-          <a:lnRef idx="1">
-            <a:schemeClr val="accent1"/>
-          </a:lnRef>
-          <a:fillRef idx="3">
-            <a:schemeClr val="accent1"/>
-          </a:fillRef>
-          <a:effectRef idx="2">
-            <a:schemeClr val="accent1"/>
-          </a:effectRef>
-          <a:fontRef idx="minor">
-            <a:schemeClr val="lt1"/>
-          </a:fontRef>
-        </p:style>
-        <p:txBody>
-          <a:bodyPr rtlCol="0" anchor="ctr"/>
-          <a:lstStyle/>
-          <a:p>
-            <a:pPr algn="ctr"/>
-          </a:p>
-        </p:txBody>
-      </p:sp>
-      <p:sp>
-        <p:nvSpPr>
-          <p:cNvPr id="14" name="TextBox 13"/>
-          <p:cNvSpPr txBox="1"/>
-          <p:nvPr/>
-        </p:nvSpPr>
-        <p:spPr>
-          <a:xfrm>
-            <a:off x="4292600" y="3619500"/>
-            <a:ext cx="3441700" cy="165100"/>
-          </a:xfrm>
-          <a:prstGeom prst="rect">
-            <a:avLst/>
-          </a:prstGeom>
-          <a:noFill/>
-        </p:spPr>
-        <p:txBody>
-          <a:bodyPr wrap="square" lIns="0" rIns="0" tIns="0" bIns="0" anchor="ctr">
-            <a:spAutoFit/>
-          </a:bodyPr>
-          <a:lstStyle/>
-          <a:p>
-            <a:pPr algn="l"/>
-            <a:r>
-              <a:rPr sz="1300" b="0">
-                <a:solidFill>
-                  <a:srgbClr val="ECECEE"/>
-                </a:solidFill>
-                <a:latin typeface="Arial"/>
-              </a:rPr>
-              <a:t>Release</a:t>
-            </a:r>
-          </a:p>
-        </p:txBody>
-      </p:sp>
-      <p:sp>
-        <p:nvSpPr>
-          <p:cNvPr id="15" name="TextBox 14"/>
-          <p:cNvSpPr txBox="1"/>
-          <p:nvPr/>
-        </p:nvSpPr>
-        <p:spPr>
-          <a:xfrm>
-            <a:off x="4292600" y="3822700"/>
-            <a:ext cx="3441700" cy="139700"/>
-          </a:xfrm>
-          <a:prstGeom prst="rect">
-            <a:avLst/>
-          </a:prstGeom>
-          <a:noFill/>
-        </p:spPr>
-        <p:txBody>
-          <a:bodyPr wrap="square" lIns="0" rIns="0" tIns="0" bIns="0" anchor="ctr">
-            <a:spAutoFit/>
-          </a:bodyPr>
-          <a:lstStyle/>
-          <a:p>
-            <a:pPr algn="l"/>
-            <a:r>
-              <a:rPr sz="1000" b="0">
-                <a:solidFill>
-                  <a:srgbClr val="9A9AA2"/>
-                </a:solidFill>
-                <a:latin typeface="Arial"/>
-              </a:rPr>
-              <a:t>human approval</a:t>
-            </a:r>
-          </a:p>
-        </p:txBody>
-      </p:sp>
-      <p:sp>
-        <p:nvSpPr>
           <p:cNvPr id="16" name="Rectangle 15"/>
           <p:cNvSpPr/>
           <p:nvPr/>
         </p:nvSpPr>
         <p:spPr>
           <a:xfrm>
-            <a:off x="7886700" y="3429000"/>
-            <a:ext cx="279400" cy="25400"/>
-          </a:xfrm>
-          <a:prstGeom prst="rect">
-            <a:avLst/>
-          </a:prstGeom>
-          <a:solidFill>
-            <a:srgbClr val="9A9AA2"/>
-          </a:solidFill>
-          <a:ln>
-            <a:noFill/>
-          </a:ln>
-          <a:effectLst/>
-        </p:spPr>
-        <p:style>
-          <a:lnRef idx="1">
-            <a:schemeClr val="accent1"/>
-          </a:lnRef>
-          <a:fillRef idx="3">
-            <a:schemeClr val="accent1"/>
-          </a:fillRef>
-          <a:effectRef idx="2">
-            <a:schemeClr val="accent1"/>
-          </a:effectRef>
-          <a:fontRef idx="minor">
-            <a:schemeClr val="lt1"/>
-          </a:fontRef>
-        </p:style>
-        <p:txBody>
-          <a:bodyPr rtlCol="0" anchor="ctr"/>
-          <a:lstStyle/>
-          <a:p>
-            <a:pPr algn="ctr"/>
-          </a:p>
-        </p:txBody>
-      </p:sp>
-      <p:sp>
-        <p:nvSpPr>
-          <p:cNvPr id="17" name="Rectangle 16"/>
-          <p:cNvSpPr/>
-          <p:nvPr/>
-        </p:nvSpPr>
-        <p:spPr>
-          <a:xfrm>
-            <a:off x="7632700" y="3454400"/>
-            <a:ext cx="6350" cy="635000"/>
-          </a:xfrm>
-          <a:prstGeom prst="rect">
-            <a:avLst/>
-          </a:prstGeom>
-          <a:solidFill>
-            <a:srgbClr val="1F1F22"/>
-          </a:solidFill>
-          <a:ln>
-            <a:noFill/>
-          </a:ln>
-          <a:effectLst/>
-        </p:spPr>
-        <p:style>
-          <a:lnRef idx="1">
-            <a:schemeClr val="accent1"/>
-          </a:lnRef>
-          <a:fillRef idx="3">
-            <a:schemeClr val="accent1"/>
-          </a:fillRef>
-          <a:effectRef idx="2">
-            <a:schemeClr val="accent1"/>
-          </a:effectRef>
-          <a:fontRef idx="minor">
-            <a:schemeClr val="lt1"/>
-          </a:fontRef>
-        </p:style>
-        <p:txBody>
-          <a:bodyPr rtlCol="0" anchor="ctr"/>
-          <a:lstStyle/>
-          <a:p>
-            <a:pPr algn="ctr"/>
-          </a:p>
-        </p:txBody>
-      </p:sp>
-      <p:sp>
-        <p:nvSpPr>
-          <p:cNvPr id="18" name="TextBox 17"/>
-          <p:cNvSpPr txBox="1"/>
-          <p:nvPr/>
-        </p:nvSpPr>
-        <p:spPr>
-          <a:xfrm>
-            <a:off x="7886700" y="3619500"/>
-            <a:ext cx="3441700" cy="165100"/>
-          </a:xfrm>
-          <a:prstGeom prst="rect">
-            <a:avLst/>
-          </a:prstGeom>
-          <a:noFill/>
-        </p:spPr>
-        <p:txBody>
-          <a:bodyPr wrap="square" lIns="0" rIns="0" tIns="0" bIns="0" anchor="ctr">
-            <a:spAutoFit/>
-          </a:bodyPr>
-          <a:lstStyle/>
-          <a:p>
-            <a:pPr algn="l"/>
-            <a:r>
-              <a:rPr sz="1300" b="0">
-                <a:solidFill>
-                  <a:srgbClr val="ECECEE"/>
-                </a:solidFill>
-                <a:latin typeface="Arial"/>
-              </a:rPr>
-              <a:t>Operate</a:t>
-            </a:r>
-          </a:p>
-        </p:txBody>
-      </p:sp>
-      <p:sp>
-        <p:nvSpPr>
-          <p:cNvPr id="19" name="TextBox 18"/>
-          <p:cNvSpPr txBox="1"/>
-          <p:nvPr/>
-        </p:nvSpPr>
-        <p:spPr>
-          <a:xfrm>
-            <a:off x="7886700" y="3822700"/>
-            <a:ext cx="3441700" cy="139700"/>
-          </a:xfrm>
-          <a:prstGeom prst="rect">
-            <a:avLst/>
-          </a:prstGeom>
-          <a:noFill/>
-        </p:spPr>
-        <p:txBody>
-          <a:bodyPr wrap="square" lIns="0" rIns="0" tIns="0" bIns="0" anchor="ctr">
-            <a:spAutoFit/>
-          </a:bodyPr>
-          <a:lstStyle/>
-          <a:p>
-            <a:pPr algn="l"/>
-            <a:r>
-              <a:rPr sz="1000" b="0">
-                <a:solidFill>
-                  <a:srgbClr val="9A9AA2"/>
-                </a:solidFill>
-                <a:latin typeface="Arial"/>
-              </a:rPr>
-              <a:t>monitoring</a:t>
-            </a:r>
-          </a:p>
-        </p:txBody>
-      </p:sp>
-      <p:sp>
-        <p:nvSpPr>
-          <p:cNvPr id="20" name="TextBox 19"/>
-          <p:cNvSpPr txBox="1"/>
-          <p:nvPr/>
-        </p:nvSpPr>
-        <p:spPr>
-          <a:xfrm>
-            <a:off x="698500" y="4445000"/>
-            <a:ext cx="5715000" cy="127000"/>
-          </a:xfrm>
-          <a:prstGeom prst="rect">
-            <a:avLst/>
-          </a:prstGeom>
-          <a:noFill/>
-        </p:spPr>
-        <p:txBody>
-          <a:bodyPr wrap="square" lIns="0" rIns="0" tIns="0" bIns="0" anchor="ctr">
-            <a:spAutoFit/>
-          </a:bodyPr>
-          <a:lstStyle/>
-          <a:p>
-            <a:pPr algn="l"/>
-            <a:r>
-              <a:rPr sz="1100" b="0" spc="300">
-                <a:solidFill>
-                  <a:srgbClr val="9A9AA2"/>
-                </a:solidFill>
-                <a:latin typeface="Courier New"/>
-              </a:rPr>
-              <a:t>PACKAGE TO RUNNING SOFTWARE</a:t>
-            </a:r>
-          </a:p>
-        </p:txBody>
-      </p:sp>
-      <p:sp>
-        <p:nvSpPr>
-          <p:cNvPr id="21" name="Rectangle 20"/>
-          <p:cNvSpPr/>
-          <p:nvPr/>
-        </p:nvSpPr>
-        <p:spPr>
-          <a:xfrm>
-            <a:off x="698500" y="4889500"/>
-            <a:ext cx="10788650" cy="6350"/>
+            <a:off x="3810000" y="3556000"/>
+            <a:ext cx="7677150" cy="6350"/>
           </a:xfrm>
           <a:prstGeom prst="rect">
             <a:avLst/>
@@ -3600,14 +3470,192 @@
       </p:sp>
       <p:sp>
         <p:nvSpPr>
-          <p:cNvPr id="22" name="TextBox 21"/>
-          <p:cNvSpPr txBox="1"/>
-          <p:nvPr/>
-        </p:nvSpPr>
-        <p:spPr>
-          <a:xfrm>
-            <a:off x="698500" y="5080000"/>
-            <a:ext cx="9525000" cy="165100"/>
+          <p:cNvPr id="17" name="Diamond 16"/>
+          <p:cNvSpPr/>
+          <p:nvPr/>
+        </p:nvSpPr>
+        <p:spPr>
+          <a:xfrm>
+            <a:off x="3810000" y="3505200"/>
+            <a:ext cx="101600" cy="101600"/>
+          </a:xfrm>
+          <a:prstGeom prst="diamond">
+            <a:avLst/>
+          </a:prstGeom>
+          <a:solidFill>
+            <a:srgbClr val="FF6B3D"/>
+          </a:solidFill>
+          <a:ln>
+            <a:noFill/>
+          </a:ln>
+          <a:effectLst/>
+        </p:spPr>
+        <p:style>
+          <a:lnRef idx="1">
+            <a:schemeClr val="accent1"/>
+          </a:lnRef>
+          <a:fillRef idx="3">
+            <a:schemeClr val="accent1"/>
+          </a:fillRef>
+          <a:effectRef idx="2">
+            <a:schemeClr val="accent1"/>
+          </a:effectRef>
+          <a:fontRef idx="minor">
+            <a:schemeClr val="lt1"/>
+          </a:fontRef>
+        </p:style>
+        <p:txBody>
+          <a:bodyPr rtlCol="0" anchor="ctr"/>
+          <a:lstStyle/>
+          <a:p>
+            <a:pPr algn="ctr"/>
+          </a:p>
+        </p:txBody>
+      </p:sp>
+      <p:sp>
+        <p:nvSpPr>
+          <p:cNvPr id="18" name="Diamond 17"/>
+          <p:cNvSpPr/>
+          <p:nvPr/>
+        </p:nvSpPr>
+        <p:spPr>
+          <a:xfrm>
+            <a:off x="6311900" y="3505200"/>
+            <a:ext cx="101600" cy="101600"/>
+          </a:xfrm>
+          <a:prstGeom prst="diamond">
+            <a:avLst/>
+          </a:prstGeom>
+          <a:solidFill>
+            <a:srgbClr val="FF6B3D"/>
+          </a:solidFill>
+          <a:ln>
+            <a:noFill/>
+          </a:ln>
+          <a:effectLst/>
+        </p:spPr>
+        <p:style>
+          <a:lnRef idx="1">
+            <a:schemeClr val="accent1"/>
+          </a:lnRef>
+          <a:fillRef idx="3">
+            <a:schemeClr val="accent1"/>
+          </a:fillRef>
+          <a:effectRef idx="2">
+            <a:schemeClr val="accent1"/>
+          </a:effectRef>
+          <a:fontRef idx="minor">
+            <a:schemeClr val="lt1"/>
+          </a:fontRef>
+        </p:style>
+        <p:txBody>
+          <a:bodyPr rtlCol="0" anchor="ctr"/>
+          <a:lstStyle/>
+          <a:p>
+            <a:pPr algn="ctr"/>
+          </a:p>
+        </p:txBody>
+      </p:sp>
+      <p:sp>
+        <p:nvSpPr>
+          <p:cNvPr id="19" name="Diamond 18"/>
+          <p:cNvSpPr/>
+          <p:nvPr/>
+        </p:nvSpPr>
+        <p:spPr>
+          <a:xfrm>
+            <a:off x="8870950" y="3505200"/>
+            <a:ext cx="101600" cy="101600"/>
+          </a:xfrm>
+          <a:prstGeom prst="diamond">
+            <a:avLst/>
+          </a:prstGeom>
+          <a:solidFill>
+            <a:srgbClr val="FF6B3D"/>
+          </a:solidFill>
+          <a:ln>
+            <a:noFill/>
+          </a:ln>
+          <a:effectLst/>
+        </p:spPr>
+        <p:style>
+          <a:lnRef idx="1">
+            <a:schemeClr val="accent1"/>
+          </a:lnRef>
+          <a:fillRef idx="3">
+            <a:schemeClr val="accent1"/>
+          </a:fillRef>
+          <a:effectRef idx="2">
+            <a:schemeClr val="accent1"/>
+          </a:effectRef>
+          <a:fontRef idx="minor">
+            <a:schemeClr val="lt1"/>
+          </a:fontRef>
+        </p:style>
+        <p:txBody>
+          <a:bodyPr rtlCol="0" anchor="ctr"/>
+          <a:lstStyle/>
+          <a:p>
+            <a:pPr algn="ctr"/>
+          </a:p>
+        </p:txBody>
+      </p:sp>
+      <p:sp>
+        <p:nvSpPr>
+          <p:cNvPr id="20" name="Oval 19"/>
+          <p:cNvSpPr/>
+          <p:nvPr/>
+        </p:nvSpPr>
+        <p:spPr>
+          <a:xfrm>
+            <a:off x="4883150" y="3352800"/>
+            <a:ext cx="406400" cy="406400"/>
+          </a:xfrm>
+          <a:prstGeom prst="ellipse">
+            <a:avLst/>
+          </a:prstGeom>
+          <a:solidFill>
+            <a:srgbClr val="0E0E11"/>
+          </a:solidFill>
+          <a:ln w="19050">
+            <a:solidFill>
+              <a:srgbClr val="9A9AA2"/>
+            </a:solidFill>
+          </a:ln>
+          <a:effectLst/>
+        </p:spPr>
+        <p:style>
+          <a:lnRef idx="1">
+            <a:schemeClr val="accent1"/>
+          </a:lnRef>
+          <a:fillRef idx="3">
+            <a:schemeClr val="accent1"/>
+          </a:fillRef>
+          <a:effectRef idx="2">
+            <a:schemeClr val="accent1"/>
+          </a:effectRef>
+          <a:fontRef idx="minor">
+            <a:schemeClr val="lt1"/>
+          </a:fontRef>
+        </p:style>
+        <p:txBody>
+          <a:bodyPr rtlCol="0" anchor="ctr"/>
+          <a:lstStyle/>
+          <a:p>
+            <a:pPr algn="ctr"/>
+          </a:p>
+        </p:txBody>
+      </p:sp>
+      <p:sp>
+        <p:nvSpPr>
+          <p:cNvPr id="21" name="TextBox 20"/>
+          <p:cNvSpPr txBox="1"/>
+          <p:nvPr/>
+        </p:nvSpPr>
+        <p:spPr>
+          <a:xfrm>
+            <a:off x="4832350" y="3454400"/>
+            <a:ext cx="508000" cy="203200"/>
           </a:xfrm>
           <a:prstGeom prst="rect">
             <a:avLst/>
@@ -3620,31 +3668,394 @@
           </a:bodyPr>
           <a:lstStyle/>
           <a:p>
-            <a:pPr algn="l"/>
-            <a:r>
-              <a:rPr sz="1100" b="0" spc="150">
-                <a:solidFill>
-                  <a:srgbClr val="FF6B3D"/>
+            <a:pPr algn="ctr"/>
+            <a:r>
+              <a:rPr sz="1300" b="0" spc="100">
+                <a:solidFill>
+                  <a:srgbClr val="9A9AA2"/>
                 </a:solidFill>
                 <a:latin typeface="Courier New"/>
               </a:rPr>
-              <a:t>LEARN</a:t>
-            </a:r>
-            <a:r>
-              <a:rPr sz="1100" b="0" spc="150">
+              <a:t>06</a:t>
+            </a:r>
+          </a:p>
+        </p:txBody>
+      </p:sp>
+      <p:sp>
+        <p:nvSpPr>
+          <p:cNvPr id="22" name="TextBox 21"/>
+          <p:cNvSpPr txBox="1"/>
+          <p:nvPr/>
+        </p:nvSpPr>
+        <p:spPr>
+          <a:xfrm>
+            <a:off x="4133850" y="3860800"/>
+            <a:ext cx="1905000" cy="215900"/>
+          </a:xfrm>
+          <a:prstGeom prst="rect">
+            <a:avLst/>
+          </a:prstGeom>
+          <a:noFill/>
+        </p:spPr>
+        <p:txBody>
+          <a:bodyPr wrap="square" lIns="0" rIns="0" tIns="0" bIns="0" anchor="ctr">
+            <a:spAutoFit/>
+          </a:bodyPr>
+          <a:lstStyle/>
+          <a:p>
+            <a:pPr algn="ctr"/>
+            <a:r>
+              <a:rPr sz="1600" b="0">
+                <a:solidFill>
+                  <a:srgbClr val="ECECEE"/>
+                </a:solidFill>
+                <a:latin typeface="Arial"/>
+              </a:rPr>
+              <a:t>Build</a:t>
+            </a:r>
+          </a:p>
+        </p:txBody>
+      </p:sp>
+      <p:sp>
+        <p:nvSpPr>
+          <p:cNvPr id="23" name="TextBox 22"/>
+          <p:cNvSpPr txBox="1"/>
+          <p:nvPr/>
+        </p:nvSpPr>
+        <p:spPr>
+          <a:xfrm>
+            <a:off x="4133850" y="4089400"/>
+            <a:ext cx="1905000" cy="165100"/>
+          </a:xfrm>
+          <a:prstGeom prst="rect">
+            <a:avLst/>
+          </a:prstGeom>
+          <a:noFill/>
+        </p:spPr>
+        <p:txBody>
+          <a:bodyPr wrap="square" lIns="0" rIns="0" tIns="0" bIns="0" anchor="ctr">
+            <a:spAutoFit/>
+          </a:bodyPr>
+          <a:lstStyle/>
+          <a:p>
+            <a:pPr algn="ctr"/>
+            <a:r>
+              <a:rPr sz="1200" b="0">
                 <a:solidFill>
                   <a:srgbClr val="9A9AA2"/>
                 </a:solidFill>
+                <a:latin typeface="Arial"/>
+              </a:rPr>
+              <a:t>code + review</a:t>
+            </a:r>
+          </a:p>
+        </p:txBody>
+      </p:sp>
+      <p:sp>
+        <p:nvSpPr>
+          <p:cNvPr id="24" name="Oval 23"/>
+          <p:cNvSpPr/>
+          <p:nvPr/>
+        </p:nvSpPr>
+        <p:spPr>
+          <a:xfrm>
+            <a:off x="7442200" y="3352800"/>
+            <a:ext cx="406400" cy="406400"/>
+          </a:xfrm>
+          <a:prstGeom prst="ellipse">
+            <a:avLst/>
+          </a:prstGeom>
+          <a:solidFill>
+            <a:srgbClr val="0E0E11"/>
+          </a:solidFill>
+          <a:ln w="19050">
+            <a:solidFill>
+              <a:srgbClr val="9A9AA2"/>
+            </a:solidFill>
+          </a:ln>
+          <a:effectLst/>
+        </p:spPr>
+        <p:style>
+          <a:lnRef idx="1">
+            <a:schemeClr val="accent1"/>
+          </a:lnRef>
+          <a:fillRef idx="3">
+            <a:schemeClr val="accent1"/>
+          </a:fillRef>
+          <a:effectRef idx="2">
+            <a:schemeClr val="accent1"/>
+          </a:effectRef>
+          <a:fontRef idx="minor">
+            <a:schemeClr val="lt1"/>
+          </a:fontRef>
+        </p:style>
+        <p:txBody>
+          <a:bodyPr rtlCol="0" anchor="ctr"/>
+          <a:lstStyle/>
+          <a:p>
+            <a:pPr algn="ctr"/>
+          </a:p>
+        </p:txBody>
+      </p:sp>
+      <p:sp>
+        <p:nvSpPr>
+          <p:cNvPr id="25" name="TextBox 24"/>
+          <p:cNvSpPr txBox="1"/>
+          <p:nvPr/>
+        </p:nvSpPr>
+        <p:spPr>
+          <a:xfrm>
+            <a:off x="7391400" y="3454400"/>
+            <a:ext cx="508000" cy="203200"/>
+          </a:xfrm>
+          <a:prstGeom prst="rect">
+            <a:avLst/>
+          </a:prstGeom>
+          <a:noFill/>
+        </p:spPr>
+        <p:txBody>
+          <a:bodyPr wrap="square" lIns="0" rIns="0" tIns="0" bIns="0" anchor="ctr">
+            <a:spAutoFit/>
+          </a:bodyPr>
+          <a:lstStyle/>
+          <a:p>
+            <a:pPr algn="ctr"/>
+            <a:r>
+              <a:rPr sz="1300" b="0" spc="100">
+                <a:solidFill>
+                  <a:srgbClr val="9A9AA2"/>
+                </a:solidFill>
                 <a:latin typeface="Courier New"/>
               </a:rPr>
-              <a:t>   ·   validated patterns from every project carry into the next build</a:t>
+              <a:t>07</a:t>
+            </a:r>
+          </a:p>
+        </p:txBody>
+      </p:sp>
+      <p:sp>
+        <p:nvSpPr>
+          <p:cNvPr id="26" name="TextBox 25"/>
+          <p:cNvSpPr txBox="1"/>
+          <p:nvPr/>
+        </p:nvSpPr>
+        <p:spPr>
+          <a:xfrm>
+            <a:off x="6692900" y="3860800"/>
+            <a:ext cx="1905000" cy="215900"/>
+          </a:xfrm>
+          <a:prstGeom prst="rect">
+            <a:avLst/>
+          </a:prstGeom>
+          <a:noFill/>
+        </p:spPr>
+        <p:txBody>
+          <a:bodyPr wrap="square" lIns="0" rIns="0" tIns="0" bIns="0" anchor="ctr">
+            <a:spAutoFit/>
+          </a:bodyPr>
+          <a:lstStyle/>
+          <a:p>
+            <a:pPr algn="ctr"/>
+            <a:r>
+              <a:rPr sz="1600" b="0">
+                <a:solidFill>
+                  <a:srgbClr val="ECECEE"/>
+                </a:solidFill>
+                <a:latin typeface="Arial"/>
+              </a:rPr>
+              <a:t>Release</a:t>
+            </a:r>
+          </a:p>
+        </p:txBody>
+      </p:sp>
+      <p:sp>
+        <p:nvSpPr>
+          <p:cNvPr id="27" name="TextBox 26"/>
+          <p:cNvSpPr txBox="1"/>
+          <p:nvPr/>
+        </p:nvSpPr>
+        <p:spPr>
+          <a:xfrm>
+            <a:off x="6692900" y="4089400"/>
+            <a:ext cx="1905000" cy="165100"/>
+          </a:xfrm>
+          <a:prstGeom prst="rect">
+            <a:avLst/>
+          </a:prstGeom>
+          <a:noFill/>
+        </p:spPr>
+        <p:txBody>
+          <a:bodyPr wrap="square" lIns="0" rIns="0" tIns="0" bIns="0" anchor="ctr">
+            <a:spAutoFit/>
+          </a:bodyPr>
+          <a:lstStyle/>
+          <a:p>
+            <a:pPr algn="ctr"/>
+            <a:r>
+              <a:rPr sz="1200" b="0">
+                <a:solidFill>
+                  <a:srgbClr val="9A9AA2"/>
+                </a:solidFill>
+                <a:latin typeface="Arial"/>
+              </a:rPr>
+              <a:t>human approval</a:t>
+            </a:r>
+          </a:p>
+        </p:txBody>
+      </p:sp>
+      <p:sp>
+        <p:nvSpPr>
+          <p:cNvPr id="28" name="Oval 27"/>
+          <p:cNvSpPr/>
+          <p:nvPr/>
+        </p:nvSpPr>
+        <p:spPr>
+          <a:xfrm>
+            <a:off x="10001250" y="3352800"/>
+            <a:ext cx="406400" cy="406400"/>
+          </a:xfrm>
+          <a:prstGeom prst="ellipse">
+            <a:avLst/>
+          </a:prstGeom>
+          <a:solidFill>
+            <a:srgbClr val="0E0E11"/>
+          </a:solidFill>
+          <a:ln w="19050">
+            <a:solidFill>
+              <a:srgbClr val="9A9AA2"/>
+            </a:solidFill>
+          </a:ln>
+          <a:effectLst/>
+        </p:spPr>
+        <p:style>
+          <a:lnRef idx="1">
+            <a:schemeClr val="accent1"/>
+          </a:lnRef>
+          <a:fillRef idx="3">
+            <a:schemeClr val="accent1"/>
+          </a:fillRef>
+          <a:effectRef idx="2">
+            <a:schemeClr val="accent1"/>
+          </a:effectRef>
+          <a:fontRef idx="minor">
+            <a:schemeClr val="lt1"/>
+          </a:fontRef>
+        </p:style>
+        <p:txBody>
+          <a:bodyPr rtlCol="0" anchor="ctr"/>
+          <a:lstStyle/>
+          <a:p>
+            <a:pPr algn="ctr"/>
+          </a:p>
+        </p:txBody>
+      </p:sp>
+      <p:sp>
+        <p:nvSpPr>
+          <p:cNvPr id="29" name="TextBox 28"/>
+          <p:cNvSpPr txBox="1"/>
+          <p:nvPr/>
+        </p:nvSpPr>
+        <p:spPr>
+          <a:xfrm>
+            <a:off x="9950450" y="3454400"/>
+            <a:ext cx="508000" cy="203200"/>
+          </a:xfrm>
+          <a:prstGeom prst="rect">
+            <a:avLst/>
+          </a:prstGeom>
+          <a:noFill/>
+        </p:spPr>
+        <p:txBody>
+          <a:bodyPr wrap="square" lIns="0" rIns="0" tIns="0" bIns="0" anchor="ctr">
+            <a:spAutoFit/>
+          </a:bodyPr>
+          <a:lstStyle/>
+          <a:p>
+            <a:pPr algn="ctr"/>
+            <a:r>
+              <a:rPr sz="1300" b="0" spc="100">
+                <a:solidFill>
+                  <a:srgbClr val="9A9AA2"/>
+                </a:solidFill>
+                <a:latin typeface="Courier New"/>
+              </a:rPr>
+              <a:t>08</a:t>
+            </a:r>
+          </a:p>
+        </p:txBody>
+      </p:sp>
+      <p:sp>
+        <p:nvSpPr>
+          <p:cNvPr id="30" name="TextBox 29"/>
+          <p:cNvSpPr txBox="1"/>
+          <p:nvPr/>
+        </p:nvSpPr>
+        <p:spPr>
+          <a:xfrm>
+            <a:off x="9251950" y="3860800"/>
+            <a:ext cx="1905000" cy="215900"/>
+          </a:xfrm>
+          <a:prstGeom prst="rect">
+            <a:avLst/>
+          </a:prstGeom>
+          <a:noFill/>
+        </p:spPr>
+        <p:txBody>
+          <a:bodyPr wrap="square" lIns="0" rIns="0" tIns="0" bIns="0" anchor="ctr">
+            <a:spAutoFit/>
+          </a:bodyPr>
+          <a:lstStyle/>
+          <a:p>
+            <a:pPr algn="ctr"/>
+            <a:r>
+              <a:rPr sz="1600" b="0">
+                <a:solidFill>
+                  <a:srgbClr val="ECECEE"/>
+                </a:solidFill>
+                <a:latin typeface="Arial"/>
+              </a:rPr>
+              <a:t>Operate</a:t>
+            </a:r>
+          </a:p>
+        </p:txBody>
+      </p:sp>
+      <p:sp>
+        <p:nvSpPr>
+          <p:cNvPr id="31" name="TextBox 30"/>
+          <p:cNvSpPr txBox="1"/>
+          <p:nvPr/>
+        </p:nvSpPr>
+        <p:spPr>
+          <a:xfrm>
+            <a:off x="9251950" y="4089400"/>
+            <a:ext cx="1905000" cy="165100"/>
+          </a:xfrm>
+          <a:prstGeom prst="rect">
+            <a:avLst/>
+          </a:prstGeom>
+          <a:noFill/>
+        </p:spPr>
+        <p:txBody>
+          <a:bodyPr wrap="square" lIns="0" rIns="0" tIns="0" bIns="0" anchor="ctr">
+            <a:spAutoFit/>
+          </a:bodyPr>
+          <a:lstStyle/>
+          <a:p>
+            <a:pPr algn="ctr"/>
+            <a:r>
+              <a:rPr sz="1200" b="0">
+                <a:solidFill>
+                  <a:srgbClr val="9A9AA2"/>
+                </a:solidFill>
+                <a:latin typeface="Arial"/>
+              </a:rPr>
+              <a:t>monitoring</a:t>
             </a:r>
           </a:p>
         </p:txBody>
       </p:sp>
       <p:pic>
         <p:nvPicPr>
-          <p:cNvPr id="23" name="Picture 22" descr="logo.png"/>
+          <p:cNvPr id="32" name="Picture 31" descr="ic-arc.png"/>
           <p:cNvPicPr>
             <a:picLocks noChangeAspect="1"/>
           </p:cNvPicPr>
@@ -3652,6 +4063,74 @@
         </p:nvPicPr>
         <p:blipFill>
           <a:blip r:embed="rId3"/>
+          <a:stretch>
+            <a:fillRect/>
+          </a:stretch>
+        </p:blipFill>
+        <p:spPr>
+          <a:xfrm>
+            <a:off x="2095500" y="4064000"/>
+            <a:ext cx="8128000" cy="1079500"/>
+          </a:xfrm>
+          <a:prstGeom prst="rect">
+            <a:avLst/>
+          </a:prstGeom>
+        </p:spPr>
+      </p:pic>
+      <p:sp>
+        <p:nvSpPr>
+          <p:cNvPr id="33" name="TextBox 32"/>
+          <p:cNvSpPr txBox="1"/>
+          <p:nvPr/>
+        </p:nvSpPr>
+        <p:spPr>
+          <a:xfrm>
+            <a:off x="1968500" y="5270500"/>
+            <a:ext cx="8255000" cy="165100"/>
+          </a:xfrm>
+          <a:prstGeom prst="rect">
+            <a:avLst/>
+          </a:prstGeom>
+          <a:noFill/>
+        </p:spPr>
+        <p:txBody>
+          <a:bodyPr wrap="square" lIns="0" rIns="0" tIns="0" bIns="0" anchor="ctr">
+            <a:spAutoFit/>
+          </a:bodyPr>
+          <a:lstStyle/>
+          <a:p>
+            <a:pPr algn="ctr"/>
+            <a:r>
+              <a:rPr sz="1100" b="0" spc="200">
+                <a:solidFill>
+                  <a:srgbClr val="FF6B3D"/>
+                </a:solidFill>
+                <a:latin typeface="Courier New"/>
+              </a:rPr>
+              <a:t>LEARN</a:t>
+            </a:r>
+            <a:r>
+              <a:rPr sz="1100" b="0" spc="150">
+                <a:solidFill>
+                  <a:srgbClr val="9A9AA2"/>
+                </a:solidFill>
+                <a:latin typeface="Courier New"/>
+              </a:rPr>
+              <a:t>  ·  validated patterns from every build carry into the next</a:t>
+            </a:r>
+          </a:p>
+        </p:txBody>
+      </p:sp>
+      <p:pic>
+        <p:nvPicPr>
+          <p:cNvPr id="34" name="Picture 33" descr="logo.png"/>
+          <p:cNvPicPr>
+            <a:picLocks noChangeAspect="1"/>
+          </p:cNvPicPr>
+          <p:nvPr/>
+        </p:nvPicPr>
+        <p:blipFill>
+          <a:blip r:embed="rId4"/>
           <a:stretch>
             <a:fillRect/>
           </a:stretch>
@@ -3716,8 +4195,8 @@
         </p:nvSpPr>
         <p:spPr>
           <a:xfrm>
-            <a:off x="698500" y="609600"/>
-            <a:ext cx="8890000" cy="317500"/>
+            <a:off x="698500" y="571500"/>
+            <a:ext cx="9906000" cy="393700"/>
           </a:xfrm>
           <a:prstGeom prst="rect">
             <a:avLst/>
@@ -3732,7 +4211,7 @@
           <a:p>
             <a:pPr algn="l"/>
             <a:r>
-              <a:rPr sz="2300" b="1">
+              <a:rPr sz="2800" b="1">
                 <a:solidFill>
                   <a:srgbClr val="ECECEE"/>
                 </a:solidFill>
@@ -3741,7 +4220,7 @@
               <a:t>References.</a:t>
             </a:r>
             <a:r>
-              <a:rPr sz="2300" b="0">
+              <a:rPr sz="2800" b="0">
                 <a:solidFill>
                   <a:srgbClr val="9A9AA2"/>
                 </a:solidFill>
@@ -3839,7 +4318,7 @@
         </p:nvSpPr>
         <p:spPr>
           <a:xfrm>
-            <a:off x="698500" y="1270000"/>
+            <a:off x="698500" y="1320800"/>
             <a:ext cx="8890000" cy="190500"/>
           </a:xfrm>
           <a:prstGeom prst="rect">
@@ -3855,7 +4334,7 @@
           <a:p>
             <a:pPr algn="l"/>
             <a:r>
-              <a:rPr sz="1200" b="0">
+              <a:rPr sz="1400" b="0">
                 <a:solidFill>
                   <a:srgbClr val="9A9AA2"/>
                 </a:solidFill>
@@ -3874,7 +4353,7 @@
         </p:nvSpPr>
         <p:spPr>
           <a:xfrm>
-            <a:off x="698500" y="1905000"/>
+            <a:off x="698500" y="1828800"/>
             <a:ext cx="10788650" cy="6350"/>
           </a:xfrm>
           <a:prstGeom prst="rect">
@@ -3918,8 +4397,8 @@
         </p:nvSpPr>
         <p:spPr>
           <a:xfrm>
-            <a:off x="698500" y="2286000"/>
-            <a:ext cx="3302000" cy="2730500"/>
+            <a:off x="698500" y="2159000"/>
+            <a:ext cx="3302000" cy="2857500"/>
           </a:xfrm>
           <a:prstGeom prst="rect">
             <a:avLst/>
@@ -3954,50 +4433,30 @@
           </a:p>
         </p:txBody>
       </p:sp>
-      <p:sp>
-        <p:nvSpPr>
-          <p:cNvPr id="9" name="Rectangle 8"/>
-          <p:cNvSpPr/>
-          <p:nvPr/>
-        </p:nvSpPr>
-        <p:spPr>
-          <a:xfrm>
-            <a:off x="952500" y="2540000"/>
-            <a:ext cx="279400" cy="25400"/>
-          </a:xfrm>
-          <a:prstGeom prst="rect">
-            <a:avLst/>
-          </a:prstGeom>
-          <a:solidFill>
-            <a:srgbClr val="9A9AA2"/>
-          </a:solidFill>
-          <a:ln>
-            <a:noFill/>
-          </a:ln>
-          <a:effectLst/>
-        </p:spPr>
-        <p:style>
-          <a:lnRef idx="1">
-            <a:schemeClr val="accent1"/>
-          </a:lnRef>
-          <a:fillRef idx="3">
-            <a:schemeClr val="accent1"/>
-          </a:fillRef>
-          <a:effectRef idx="2">
-            <a:schemeClr val="accent1"/>
-          </a:effectRef>
-          <a:fontRef idx="minor">
-            <a:schemeClr val="lt1"/>
-          </a:fontRef>
-        </p:style>
-        <p:txBody>
-          <a:bodyPr rtlCol="0" anchor="ctr"/>
-          <a:lstStyle/>
-          <a:p>
-            <a:pPr algn="ctr"/>
-          </a:p>
-        </p:txBody>
-      </p:sp>
+      <p:pic>
+        <p:nvPicPr>
+          <p:cNvPr id="9" name="Picture 8" descr="ic-chart.png"/>
+          <p:cNvPicPr>
+            <a:picLocks noChangeAspect="1"/>
+          </p:cNvPicPr>
+          <p:nvPr/>
+        </p:nvPicPr>
+        <p:blipFill>
+          <a:blip r:embed="rId3"/>
+          <a:stretch>
+            <a:fillRect/>
+          </a:stretch>
+        </p:blipFill>
+        <p:spPr>
+          <a:xfrm>
+            <a:off x="952500" y="2400300"/>
+            <a:ext cx="228600" cy="228600"/>
+          </a:xfrm>
+          <a:prstGeom prst="rect">
+            <a:avLst/>
+          </a:prstGeom>
+        </p:spPr>
+      </p:pic>
       <p:sp>
         <p:nvSpPr>
           <p:cNvPr id="10" name="TextBox 9"/>
@@ -4022,7 +4481,7 @@
           <a:p>
             <a:pPr algn="l"/>
             <a:r>
-              <a:rPr sz="1900" b="0">
+              <a:rPr sz="2000" b="0">
                 <a:solidFill>
                   <a:srgbClr val="ECECEE"/>
                 </a:solidFill>
@@ -4041,7 +4500,7 @@
         </p:nvSpPr>
         <p:spPr>
           <a:xfrm>
-            <a:off x="952500" y="3206750"/>
+            <a:off x="952500" y="3175000"/>
             <a:ext cx="2794000" cy="114300"/>
           </a:xfrm>
           <a:prstGeom prst="rect">
@@ -4057,7 +4516,7 @@
           <a:p>
             <a:pPr algn="l"/>
             <a:r>
-              <a:rPr sz="800" b="0" spc="200">
+              <a:rPr sz="900" b="0" spc="200">
                 <a:solidFill>
                   <a:srgbClr val="9A9AA2"/>
                 </a:solidFill>
@@ -4076,8 +4535,8 @@
         </p:nvSpPr>
         <p:spPr>
           <a:xfrm>
-            <a:off x="952500" y="3359150"/>
-            <a:ext cx="2794000" cy="381000"/>
+            <a:off x="952500" y="3327400"/>
+            <a:ext cx="2794000" cy="355600"/>
           </a:xfrm>
           <a:prstGeom prst="rect">
             <a:avLst/>
@@ -4092,11 +4551,11 @@
           <a:p>
             <a:pPr algn="l">
               <a:lnSpc>
-                <a:spcPts val="1500"/>
+                <a:spcPts val="1600"/>
               </a:lnSpc>
             </a:pPr>
             <a:r>
-              <a:rPr sz="1200" b="0">
+              <a:rPr sz="1300" b="0">
                 <a:solidFill>
                   <a:srgbClr val="FF6B3D"/>
                 </a:solidFill>
@@ -4115,7 +4574,7 @@
         </p:nvSpPr>
         <p:spPr>
           <a:xfrm>
-            <a:off x="952500" y="3765550"/>
+            <a:off x="952500" y="3759200"/>
             <a:ext cx="2794000" cy="114300"/>
           </a:xfrm>
           <a:prstGeom prst="rect">
@@ -4131,7 +4590,7 @@
           <a:p>
             <a:pPr algn="l"/>
             <a:r>
-              <a:rPr sz="800" b="0" spc="200">
+              <a:rPr sz="900" b="0" spc="200">
                 <a:solidFill>
                   <a:srgbClr val="9A9AA2"/>
                 </a:solidFill>
@@ -4150,8 +4609,8 @@
         </p:nvSpPr>
         <p:spPr>
           <a:xfrm>
-            <a:off x="952500" y="3917950"/>
-            <a:ext cx="2794000" cy="381000"/>
+            <a:off x="952500" y="3911600"/>
+            <a:ext cx="2794000" cy="355600"/>
           </a:xfrm>
           <a:prstGeom prst="rect">
             <a:avLst/>
@@ -4166,11 +4625,11 @@
           <a:p>
             <a:pPr algn="l">
               <a:lnSpc>
-                <a:spcPts val="1500"/>
+                <a:spcPts val="1600"/>
               </a:lnSpc>
             </a:pPr>
             <a:r>
-              <a:rPr sz="1200" b="0">
+              <a:rPr sz="1300" b="0">
                 <a:solidFill>
                   <a:srgbClr val="FF6B3D"/>
                 </a:solidFill>
@@ -4189,7 +4648,7 @@
         </p:nvSpPr>
         <p:spPr>
           <a:xfrm>
-            <a:off x="952500" y="4324350"/>
+            <a:off x="952500" y="4343400"/>
             <a:ext cx="2794000" cy="114300"/>
           </a:xfrm>
           <a:prstGeom prst="rect">
@@ -4205,7 +4664,7 @@
           <a:p>
             <a:pPr algn="l"/>
             <a:r>
-              <a:rPr sz="800" b="0" spc="200">
+              <a:rPr sz="900" b="0" spc="200">
                 <a:solidFill>
                   <a:srgbClr val="9A9AA2"/>
                 </a:solidFill>
@@ -4224,8 +4683,8 @@
         </p:nvSpPr>
         <p:spPr>
           <a:xfrm>
-            <a:off x="952500" y="4476750"/>
-            <a:ext cx="2794000" cy="381000"/>
+            <a:off x="952500" y="4495800"/>
+            <a:ext cx="2794000" cy="355600"/>
           </a:xfrm>
           <a:prstGeom prst="rect">
             <a:avLst/>
@@ -4240,11 +4699,11 @@
           <a:p>
             <a:pPr algn="l">
               <a:lnSpc>
-                <a:spcPts val="1500"/>
+                <a:spcPts val="1600"/>
               </a:lnSpc>
             </a:pPr>
             <a:r>
-              <a:rPr sz="1200" b="0">
+              <a:rPr sz="1300" b="0">
                 <a:solidFill>
                   <a:srgbClr val="FF6B3D"/>
                 </a:solidFill>
@@ -4263,8 +4722,8 @@
         </p:nvSpPr>
         <p:spPr>
           <a:xfrm>
-            <a:off x="4318000" y="2286000"/>
-            <a:ext cx="3302000" cy="2730500"/>
+            <a:off x="4318000" y="2159000"/>
+            <a:ext cx="3302000" cy="2857500"/>
           </a:xfrm>
           <a:prstGeom prst="rect">
             <a:avLst/>
@@ -4299,50 +4758,30 @@
           </a:p>
         </p:txBody>
       </p:sp>
-      <p:sp>
-        <p:nvSpPr>
-          <p:cNvPr id="18" name="Rectangle 17"/>
-          <p:cNvSpPr/>
-          <p:nvPr/>
-        </p:nvSpPr>
-        <p:spPr>
-          <a:xfrm>
-            <a:off x="4572000" y="2540000"/>
-            <a:ext cx="279400" cy="25400"/>
-          </a:xfrm>
-          <a:prstGeom prst="rect">
-            <a:avLst/>
-          </a:prstGeom>
-          <a:solidFill>
-            <a:srgbClr val="9A9AA2"/>
-          </a:solidFill>
-          <a:ln>
-            <a:noFill/>
-          </a:ln>
-          <a:effectLst/>
-        </p:spPr>
-        <p:style>
-          <a:lnRef idx="1">
-            <a:schemeClr val="accent1"/>
-          </a:lnRef>
-          <a:fillRef idx="3">
-            <a:schemeClr val="accent1"/>
-          </a:fillRef>
-          <a:effectRef idx="2">
-            <a:schemeClr val="accent1"/>
-          </a:effectRef>
-          <a:fontRef idx="minor">
-            <a:schemeClr val="lt1"/>
-          </a:fontRef>
-        </p:style>
-        <p:txBody>
-          <a:bodyPr rtlCol="0" anchor="ctr"/>
-          <a:lstStyle/>
-          <a:p>
-            <a:pPr algn="ctr"/>
-          </a:p>
-        </p:txBody>
-      </p:sp>
+      <p:pic>
+        <p:nvPicPr>
+          <p:cNvPr id="18" name="Picture 17" descr="ic-funnel.png"/>
+          <p:cNvPicPr>
+            <a:picLocks noChangeAspect="1"/>
+          </p:cNvPicPr>
+          <p:nvPr/>
+        </p:nvPicPr>
+        <p:blipFill>
+          <a:blip r:embed="rId4"/>
+          <a:stretch>
+            <a:fillRect/>
+          </a:stretch>
+        </p:blipFill>
+        <p:spPr>
+          <a:xfrm>
+            <a:off x="4572000" y="2400300"/>
+            <a:ext cx="228600" cy="228600"/>
+          </a:xfrm>
+          <a:prstGeom prst="rect">
+            <a:avLst/>
+          </a:prstGeom>
+        </p:spPr>
+      </p:pic>
       <p:sp>
         <p:nvSpPr>
           <p:cNvPr id="19" name="TextBox 18"/>
@@ -4367,7 +4806,7 @@
           <a:p>
             <a:pPr algn="l"/>
             <a:r>
-              <a:rPr sz="1900" b="0">
+              <a:rPr sz="2000" b="0">
                 <a:solidFill>
                   <a:srgbClr val="ECECEE"/>
                 </a:solidFill>
@@ -4386,7 +4825,7 @@
         </p:nvSpPr>
         <p:spPr>
           <a:xfrm>
-            <a:off x="4572000" y="3206750"/>
+            <a:off x="4572000" y="3175000"/>
             <a:ext cx="2794000" cy="114300"/>
           </a:xfrm>
           <a:prstGeom prst="rect">
@@ -4402,7 +4841,7 @@
           <a:p>
             <a:pPr algn="l"/>
             <a:r>
-              <a:rPr sz="800" b="0" spc="200">
+              <a:rPr sz="900" b="0" spc="200">
                 <a:solidFill>
                   <a:srgbClr val="9A9AA2"/>
                 </a:solidFill>
@@ -4421,8 +4860,8 @@
         </p:nvSpPr>
         <p:spPr>
           <a:xfrm>
-            <a:off x="4572000" y="3359150"/>
-            <a:ext cx="2794000" cy="381000"/>
+            <a:off x="4572000" y="3327400"/>
+            <a:ext cx="2794000" cy="355600"/>
           </a:xfrm>
           <a:prstGeom prst="rect">
             <a:avLst/>
@@ -4437,11 +4876,11 @@
           <a:p>
             <a:pPr algn="l">
               <a:lnSpc>
-                <a:spcPts val="1500"/>
+                <a:spcPts val="1600"/>
               </a:lnSpc>
             </a:pPr>
             <a:r>
-              <a:rPr sz="1200" b="0">
+              <a:rPr sz="1300" b="0">
                 <a:solidFill>
                   <a:srgbClr val="FF6B3D"/>
                 </a:solidFill>
@@ -4460,7 +4899,7 @@
         </p:nvSpPr>
         <p:spPr>
           <a:xfrm>
-            <a:off x="4572000" y="3765550"/>
+            <a:off x="4572000" y="3759200"/>
             <a:ext cx="2794000" cy="114300"/>
           </a:xfrm>
           <a:prstGeom prst="rect">
@@ -4476,7 +4915,7 @@
           <a:p>
             <a:pPr algn="l"/>
             <a:r>
-              <a:rPr sz="800" b="0" spc="200">
+              <a:rPr sz="900" b="0" spc="200">
                 <a:solidFill>
                   <a:srgbClr val="9A9AA2"/>
                 </a:solidFill>
@@ -4495,8 +4934,8 @@
         </p:nvSpPr>
         <p:spPr>
           <a:xfrm>
-            <a:off x="4572000" y="3917950"/>
-            <a:ext cx="2794000" cy="381000"/>
+            <a:off x="4572000" y="3911600"/>
+            <a:ext cx="2794000" cy="355600"/>
           </a:xfrm>
           <a:prstGeom prst="rect">
             <a:avLst/>
@@ -4511,11 +4950,11 @@
           <a:p>
             <a:pPr algn="l">
               <a:lnSpc>
-                <a:spcPts val="1500"/>
+                <a:spcPts val="1600"/>
               </a:lnSpc>
             </a:pPr>
             <a:r>
-              <a:rPr sz="1200" b="0">
+              <a:rPr sz="1300" b="0">
                 <a:solidFill>
                   <a:srgbClr val="FF6B3D"/>
                 </a:solidFill>
@@ -4534,7 +4973,7 @@
         </p:nvSpPr>
         <p:spPr>
           <a:xfrm>
-            <a:off x="4572000" y="4324350"/>
+            <a:off x="4572000" y="4343400"/>
             <a:ext cx="2794000" cy="114300"/>
           </a:xfrm>
           <a:prstGeom prst="rect">
@@ -4550,7 +4989,7 @@
           <a:p>
             <a:pPr algn="l"/>
             <a:r>
-              <a:rPr sz="800" b="0" spc="200">
+              <a:rPr sz="900" b="0" spc="200">
                 <a:solidFill>
                   <a:srgbClr val="9A9AA2"/>
                 </a:solidFill>
@@ -4569,8 +5008,8 @@
         </p:nvSpPr>
         <p:spPr>
           <a:xfrm>
-            <a:off x="4572000" y="4476750"/>
-            <a:ext cx="2794000" cy="381000"/>
+            <a:off x="4572000" y="4495800"/>
+            <a:ext cx="2794000" cy="355600"/>
           </a:xfrm>
           <a:prstGeom prst="rect">
             <a:avLst/>
@@ -4585,11 +5024,11 @@
           <a:p>
             <a:pPr algn="l">
               <a:lnSpc>
-                <a:spcPts val="1500"/>
+                <a:spcPts val="1600"/>
               </a:lnSpc>
             </a:pPr>
             <a:r>
-              <a:rPr sz="1200" b="0">
+              <a:rPr sz="1300" b="0">
                 <a:solidFill>
                   <a:srgbClr val="FF6B3D"/>
                 </a:solidFill>
@@ -4608,8 +5047,8 @@
         </p:nvSpPr>
         <p:spPr>
           <a:xfrm>
-            <a:off x="7937500" y="2286000"/>
-            <a:ext cx="3302000" cy="2730500"/>
+            <a:off x="7937500" y="2159000"/>
+            <a:ext cx="3302000" cy="2857500"/>
           </a:xfrm>
           <a:prstGeom prst="rect">
             <a:avLst/>
@@ -4644,50 +5083,30 @@
           </a:p>
         </p:txBody>
       </p:sp>
-      <p:sp>
-        <p:nvSpPr>
-          <p:cNvPr id="27" name="Rectangle 26"/>
-          <p:cNvSpPr/>
-          <p:nvPr/>
-        </p:nvSpPr>
-        <p:spPr>
-          <a:xfrm>
-            <a:off x="8191500" y="2540000"/>
-            <a:ext cx="279400" cy="25400"/>
-          </a:xfrm>
-          <a:prstGeom prst="rect">
-            <a:avLst/>
-          </a:prstGeom>
-          <a:solidFill>
-            <a:srgbClr val="9A9AA2"/>
-          </a:solidFill>
-          <a:ln>
-            <a:noFill/>
-          </a:ln>
-          <a:effectLst/>
-        </p:spPr>
-        <p:style>
-          <a:lnRef idx="1">
-            <a:schemeClr val="accent1"/>
-          </a:lnRef>
-          <a:fillRef idx="3">
-            <a:schemeClr val="accent1"/>
-          </a:fillRef>
-          <a:effectRef idx="2">
-            <a:schemeClr val="accent1"/>
-          </a:effectRef>
-          <a:fontRef idx="minor">
-            <a:schemeClr val="lt1"/>
-          </a:fontRef>
-        </p:style>
-        <p:txBody>
-          <a:bodyPr rtlCol="0" anchor="ctr"/>
-          <a:lstStyle/>
-          <a:p>
-            <a:pPr algn="ctr"/>
-          </a:p>
-        </p:txBody>
-      </p:sp>
+      <p:pic>
+        <p:nvPicPr>
+          <p:cNvPr id="27" name="Picture 26" descr="ic-bubble.png"/>
+          <p:cNvPicPr>
+            <a:picLocks noChangeAspect="1"/>
+          </p:cNvPicPr>
+          <p:nvPr/>
+        </p:nvPicPr>
+        <p:blipFill>
+          <a:blip r:embed="rId5"/>
+          <a:stretch>
+            <a:fillRect/>
+          </a:stretch>
+        </p:blipFill>
+        <p:spPr>
+          <a:xfrm>
+            <a:off x="8191500" y="2400300"/>
+            <a:ext cx="228600" cy="228600"/>
+          </a:xfrm>
+          <a:prstGeom prst="rect">
+            <a:avLst/>
+          </a:prstGeom>
+        </p:spPr>
+      </p:pic>
       <p:sp>
         <p:nvSpPr>
           <p:cNvPr id="28" name="TextBox 27"/>
@@ -4712,7 +5131,7 @@
           <a:p>
             <a:pPr algn="l"/>
             <a:r>
-              <a:rPr sz="1900" b="0">
+              <a:rPr sz="2000" b="0">
                 <a:solidFill>
                   <a:srgbClr val="ECECEE"/>
                 </a:solidFill>
@@ -4731,7 +5150,7 @@
         </p:nvSpPr>
         <p:spPr>
           <a:xfrm>
-            <a:off x="8191500" y="3206750"/>
+            <a:off x="8191500" y="3175000"/>
             <a:ext cx="2794000" cy="114300"/>
           </a:xfrm>
           <a:prstGeom prst="rect">
@@ -4747,7 +5166,7 @@
           <a:p>
             <a:pPr algn="l"/>
             <a:r>
-              <a:rPr sz="800" b="0" spc="200">
+              <a:rPr sz="900" b="0" spc="200">
                 <a:solidFill>
                   <a:srgbClr val="9A9AA2"/>
                 </a:solidFill>
@@ -4766,8 +5185,8 @@
         </p:nvSpPr>
         <p:spPr>
           <a:xfrm>
-            <a:off x="8191500" y="3359150"/>
-            <a:ext cx="2794000" cy="381000"/>
+            <a:off x="8191500" y="3327400"/>
+            <a:ext cx="2794000" cy="355600"/>
           </a:xfrm>
           <a:prstGeom prst="rect">
             <a:avLst/>
@@ -4782,11 +5201,11 @@
           <a:p>
             <a:pPr algn="l">
               <a:lnSpc>
-                <a:spcPts val="1500"/>
+                <a:spcPts val="1600"/>
               </a:lnSpc>
             </a:pPr>
             <a:r>
-              <a:rPr sz="1200" b="0">
+              <a:rPr sz="1300" b="0">
                 <a:solidFill>
                   <a:srgbClr val="FF6B3D"/>
                 </a:solidFill>
@@ -4805,7 +5224,7 @@
         </p:nvSpPr>
         <p:spPr>
           <a:xfrm>
-            <a:off x="8191500" y="3765550"/>
+            <a:off x="8191500" y="3759200"/>
             <a:ext cx="2794000" cy="114300"/>
           </a:xfrm>
           <a:prstGeom prst="rect">
@@ -4821,7 +5240,7 @@
           <a:p>
             <a:pPr algn="l"/>
             <a:r>
-              <a:rPr sz="800" b="0" spc="200">
+              <a:rPr sz="900" b="0" spc="200">
                 <a:solidFill>
                   <a:srgbClr val="9A9AA2"/>
                 </a:solidFill>
@@ -4840,8 +5259,8 @@
         </p:nvSpPr>
         <p:spPr>
           <a:xfrm>
-            <a:off x="8191500" y="3917950"/>
-            <a:ext cx="2794000" cy="381000"/>
+            <a:off x="8191500" y="3911600"/>
+            <a:ext cx="2794000" cy="355600"/>
           </a:xfrm>
           <a:prstGeom prst="rect">
             <a:avLst/>
@@ -4856,11 +5275,11 @@
           <a:p>
             <a:pPr algn="l">
               <a:lnSpc>
-                <a:spcPts val="1500"/>
+                <a:spcPts val="1600"/>
               </a:lnSpc>
             </a:pPr>
             <a:r>
-              <a:rPr sz="1200" b="0">
+              <a:rPr sz="1300" b="0">
                 <a:solidFill>
                   <a:srgbClr val="FF6B3D"/>
                 </a:solidFill>
@@ -4879,7 +5298,7 @@
         </p:nvSpPr>
         <p:spPr>
           <a:xfrm>
-            <a:off x="8191500" y="4324350"/>
+            <a:off x="8191500" y="4343400"/>
             <a:ext cx="2794000" cy="114300"/>
           </a:xfrm>
           <a:prstGeom prst="rect">
@@ -4895,7 +5314,7 @@
           <a:p>
             <a:pPr algn="l"/>
             <a:r>
-              <a:rPr sz="800" b="0" spc="200">
+              <a:rPr sz="900" b="0" spc="200">
                 <a:solidFill>
                   <a:srgbClr val="9A9AA2"/>
                 </a:solidFill>
@@ -4914,8 +5333,8 @@
         </p:nvSpPr>
         <p:spPr>
           <a:xfrm>
-            <a:off x="8191500" y="4476750"/>
-            <a:ext cx="2794000" cy="381000"/>
+            <a:off x="8191500" y="4495800"/>
+            <a:ext cx="2794000" cy="355600"/>
           </a:xfrm>
           <a:prstGeom prst="rect">
             <a:avLst/>
@@ -4930,11 +5349,11 @@
           <a:p>
             <a:pPr algn="l">
               <a:lnSpc>
-                <a:spcPts val="1500"/>
+                <a:spcPts val="1600"/>
               </a:lnSpc>
             </a:pPr>
             <a:r>
-              <a:rPr sz="1200" b="0">
+              <a:rPr sz="1300" b="0">
                 <a:solidFill>
                   <a:srgbClr val="FF6B3D"/>
                 </a:solidFill>
@@ -4953,8 +5372,8 @@
         </p:nvSpPr>
         <p:spPr>
           <a:xfrm>
-            <a:off x="698500" y="5270500"/>
-            <a:ext cx="9525000" cy="139700"/>
+            <a:off x="698500" y="5257800"/>
+            <a:ext cx="9525000" cy="152400"/>
           </a:xfrm>
           <a:prstGeom prst="rect">
             <a:avLst/>
@@ -4969,7 +5388,7 @@
           <a:p>
             <a:pPr algn="l"/>
             <a:r>
-              <a:rPr sz="800" b="0">
+              <a:rPr sz="1000" b="0">
                 <a:solidFill>
                   <a:srgbClr val="FF6B3D"/>
                 </a:solidFill>
@@ -4989,7 +5408,7 @@
           <p:nvPr/>
         </p:nvPicPr>
         <p:blipFill>
-          <a:blip r:embed="rId3"/>
+          <a:blip r:embed="rId6"/>
           <a:stretch>
             <a:fillRect/>
           </a:stretch>
@@ -5054,8 +5473,8 @@
         </p:nvSpPr>
         <p:spPr>
           <a:xfrm>
-            <a:off x="698500" y="609600"/>
-            <a:ext cx="8890000" cy="317500"/>
+            <a:off x="698500" y="571500"/>
+            <a:ext cx="9906000" cy="393700"/>
           </a:xfrm>
           <a:prstGeom prst="rect">
             <a:avLst/>
@@ -5070,16 +5489,16 @@
           <a:p>
             <a:pPr algn="l"/>
             <a:r>
-              <a:rPr sz="2300" b="1">
+              <a:rPr sz="2800" b="1">
                 <a:solidFill>
                   <a:srgbClr val="ECECEE"/>
                 </a:solidFill>
                 <a:latin typeface="Arial"/>
               </a:rPr>
-              <a:t>The ask.</a:t>
-            </a:r>
-            <a:r>
-              <a:rPr sz="2300" b="0">
+              <a:t>One question.</a:t>
+            </a:r>
+            <a:r>
+              <a:rPr sz="2800" b="0">
                 <a:solidFill>
                   <a:srgbClr val="9A9AA2"/>
                 </a:solidFill>
@@ -5120,7 +5539,7 @@
                 </a:solidFill>
                 <a:latin typeface="Courier New"/>
               </a:rPr>
-              <a:t>07 — The ask</a:t>
+              <a:t>07 — One question</a:t>
             </a:r>
           </a:p>
         </p:txBody>
@@ -5177,8 +5596,8 @@
         </p:nvSpPr>
         <p:spPr>
           <a:xfrm>
-            <a:off x="698500" y="1905000"/>
-            <a:ext cx="8890000" cy="190500"/>
+            <a:off x="698500" y="1854200"/>
+            <a:ext cx="8890000" cy="203200"/>
           </a:xfrm>
           <a:prstGeom prst="rect">
             <a:avLst/>
@@ -5212,8 +5631,8 @@
         </p:nvSpPr>
         <p:spPr>
           <a:xfrm>
-            <a:off x="698500" y="2235200"/>
-            <a:ext cx="10287000" cy="1600200"/>
+            <a:off x="698500" y="2209800"/>
+            <a:ext cx="10287000" cy="1625600"/>
           </a:xfrm>
           <a:prstGeom prst="rect">
             <a:avLst/>
@@ -5238,7 +5657,25 @@
                 </a:solidFill>
                 <a:latin typeface="Arial"/>
               </a:rPr>
-              <a:t>Welcher Prozess bei Ihnen läuft heute in Excel und sollte es seit einem Jahr nicht mehr?</a:t>
+              <a:t>Welcher Prozess bei Ihnen läuft heute in </a:t>
+            </a:r>
+            <a:r>
+              <a:rPr sz="3400" b="0">
+                <a:solidFill>
+                  <a:srgbClr val="FF6B3D"/>
+                </a:solidFill>
+                <a:latin typeface="Arial"/>
+              </a:rPr>
+              <a:t>Excel</a:t>
+            </a:r>
+            <a:r>
+              <a:rPr sz="3400" b="0">
+                <a:solidFill>
+                  <a:srgbClr val="ECECEE"/>
+                </a:solidFill>
+                <a:latin typeface="Arial"/>
+              </a:rPr>
+              <a:t> und sollte es seit einem Jahr nicht mehr?</a:t>
             </a:r>
           </a:p>
         </p:txBody>
@@ -5251,8 +5688,8 @@
         </p:nvSpPr>
         <p:spPr>
           <a:xfrm>
-            <a:off x="698500" y="4203700"/>
-            <a:ext cx="8890000" cy="685800"/>
+            <a:off x="698500" y="4216400"/>
+            <a:ext cx="8890000" cy="482600"/>
           </a:xfrm>
           <a:prstGeom prst="rect">
             <a:avLst/>
@@ -5267,24 +5704,59 @@
           <a:p>
             <a:pPr algn="l">
               <a:lnSpc>
-                <a:spcPts val="1800"/>
+                <a:spcPts val="1600"/>
               </a:lnSpc>
             </a:pPr>
             <a:r>
-              <a:rPr sz="1300" b="0">
+              <a:rPr sz="1200" b="0">
                 <a:solidFill>
                   <a:srgbClr val="9A9AA2"/>
                 </a:solidFill>
                 <a:latin typeface="Arial"/>
               </a:rPr>
               <a:t>Wenn Ihnen dazu gerade etwas eingefallen ist — sprechen Sie mich an. Wir machen daraus eine Anwendung. Und wenn Ihnen zwanzig einfallen, reden wir über die Plattform statt über die Anwendung.</a:t>
+            </a:r>
+          </a:p>
+        </p:txBody>
+      </p:sp>
+      <p:sp>
+        <p:nvSpPr>
+          <p:cNvPr id="9" name="TextBox 8"/>
+          <p:cNvSpPr txBox="1"/>
+          <p:nvPr/>
+        </p:nvSpPr>
+        <p:spPr>
+          <a:xfrm>
+            <a:off x="7042150" y="6032500"/>
+            <a:ext cx="4445000" cy="152400"/>
+          </a:xfrm>
+          <a:prstGeom prst="rect">
+            <a:avLst/>
+          </a:prstGeom>
+          <a:noFill/>
+        </p:spPr>
+        <p:txBody>
+          <a:bodyPr wrap="square" lIns="0" rIns="0" tIns="0" bIns="0" anchor="ctr">
+            <a:spAutoFit/>
+          </a:bodyPr>
+          <a:lstStyle/>
+          <a:p>
+            <a:pPr algn="r"/>
+            <a:r>
+              <a:rPr sz="1000" b="0">
+                <a:solidFill>
+                  <a:srgbClr val="FF6B3D"/>
+                </a:solidFill>
+                <a:latin typeface="Courier New"/>
+              </a:rPr>
+              <a:t>⟨Name · E-Mail · Telefon⟩</a:t>
             </a:r>
           </a:p>
         </p:txBody>
       </p:sp>
       <p:pic>
         <p:nvPicPr>
-          <p:cNvPr id="9" name="Picture 8" descr="logo.png"/>
+          <p:cNvPr id="10" name="Picture 9" descr="logo.png"/>
           <p:cNvPicPr>
             <a:picLocks noChangeAspect="1"/>
           </p:cNvPicPr>
@@ -5356,8 +5828,8 @@
         </p:nvSpPr>
         <p:spPr>
           <a:xfrm>
-            <a:off x="698500" y="609600"/>
-            <a:ext cx="8890000" cy="317500"/>
+            <a:off x="698500" y="571500"/>
+            <a:ext cx="9906000" cy="393700"/>
           </a:xfrm>
           <a:prstGeom prst="rect">
             <a:avLst/>
@@ -5372,7 +5844,7 @@
           <a:p>
             <a:pPr algn="l"/>
             <a:r>
-              <a:rPr sz="2300" b="1">
+              <a:rPr sz="2800" b="1">
                 <a:solidFill>
                   <a:srgbClr val="ECECEE"/>
                 </a:solidFill>
@@ -5381,7 +5853,7 @@
               <a:t>Further questions.</a:t>
             </a:r>
             <a:r>
-              <a:rPr sz="2300" b="0">
+              <a:rPr sz="2800" b="0">
                 <a:solidFill>
                   <a:srgbClr val="9A9AA2"/>
                 </a:solidFill>
@@ -5557,8 +6029,8 @@
         </p:nvSpPr>
         <p:spPr>
           <a:xfrm>
-            <a:off x="698500" y="609600"/>
-            <a:ext cx="8890000" cy="317500"/>
+            <a:off x="698500" y="571500"/>
+            <a:ext cx="9906000" cy="393700"/>
           </a:xfrm>
           <a:prstGeom prst="rect">
             <a:avLst/>
@@ -5573,7 +6045,7 @@
           <a:p>
             <a:pPr algn="l"/>
             <a:r>
-              <a:rPr sz="2300" b="1">
+              <a:rPr sz="2800" b="1">
                 <a:solidFill>
                   <a:srgbClr val="ECECEE"/>
                 </a:solidFill>
@@ -5582,7 +6054,7 @@
               <a:t>Still manual.</a:t>
             </a:r>
             <a:r>
-              <a:rPr sz="2300" b="0">
+              <a:rPr sz="2800" b="0">
                 <a:solidFill>
                   <a:srgbClr val="9A9AA2"/>
                 </a:solidFill>
@@ -5680,8 +6152,8 @@
         </p:nvSpPr>
         <p:spPr>
           <a:xfrm>
-            <a:off x="698500" y="1841500"/>
-            <a:ext cx="3810000" cy="127000"/>
+            <a:off x="698500" y="1536700"/>
+            <a:ext cx="3810000" cy="177800"/>
           </a:xfrm>
           <a:prstGeom prst="rect">
             <a:avLst/>
@@ -5715,7 +6187,7 @@
         </p:nvSpPr>
         <p:spPr>
           <a:xfrm>
-            <a:off x="698500" y="2159000"/>
+            <a:off x="698500" y="1905000"/>
             <a:ext cx="10788650" cy="6350"/>
           </a:xfrm>
           <a:prstGeom prst="rect">
@@ -5759,7 +6231,7 @@
         </p:nvSpPr>
         <p:spPr>
           <a:xfrm>
-            <a:off x="698500" y="2165350"/>
+            <a:off x="698500" y="1911350"/>
             <a:ext cx="10788650" cy="6350"/>
           </a:xfrm>
           <a:prstGeom prst="rect">
@@ -5803,7 +6275,7 @@
         </p:nvSpPr>
         <p:spPr>
           <a:xfrm>
-            <a:off x="698500" y="2159000"/>
+            <a:off x="698500" y="1905000"/>
             <a:ext cx="406400" cy="38100"/>
           </a:xfrm>
           <a:prstGeom prst="rect">
@@ -5847,8 +6319,8 @@
         </p:nvSpPr>
         <p:spPr>
           <a:xfrm>
-            <a:off x="698500" y="2374900"/>
-            <a:ext cx="2000250" cy="292100"/>
+            <a:off x="698500" y="2133600"/>
+            <a:ext cx="1492250" cy="317500"/>
           </a:xfrm>
           <a:prstGeom prst="rect">
             <a:avLst/>
@@ -5882,7 +6354,7 @@
         </p:nvSpPr>
         <p:spPr>
           <a:xfrm>
-            <a:off x="2851150" y="2159000"/>
+            <a:off x="2851150" y="1905000"/>
             <a:ext cx="406400" cy="38100"/>
           </a:xfrm>
           <a:prstGeom prst="rect">
@@ -5920,58 +6392,14 @@
       </p:sp>
       <p:sp>
         <p:nvSpPr>
-          <p:cNvPr id="106" name="Rectangle 105"/>
-          <p:cNvSpPr/>
-          <p:nvPr/>
-        </p:nvSpPr>
-        <p:spPr>
-          <a:xfrm>
-            <a:off x="2597150" y="2197100"/>
-            <a:ext cx="6350" cy="825500"/>
-          </a:xfrm>
-          <a:prstGeom prst="rect">
-            <a:avLst/>
-          </a:prstGeom>
-          <a:solidFill>
-            <a:srgbClr val="1F1F22"/>
-          </a:solidFill>
-          <a:ln>
-            <a:noFill/>
-          </a:ln>
-          <a:effectLst/>
-        </p:spPr>
-        <p:style>
-          <a:lnRef idx="1">
-            <a:schemeClr val="accent1"/>
-          </a:lnRef>
-          <a:fillRef idx="3">
-            <a:schemeClr val="accent1"/>
-          </a:fillRef>
-          <a:effectRef idx="2">
-            <a:schemeClr val="accent1"/>
-          </a:effectRef>
-          <a:fontRef idx="minor">
-            <a:schemeClr val="lt1"/>
-          </a:fontRef>
-        </p:style>
-        <p:txBody>
-          <a:bodyPr rtlCol="0" anchor="ctr"/>
-          <a:lstStyle/>
-          <a:p>
-            <a:pPr algn="ctr"/>
-          </a:p>
-        </p:txBody>
-      </p:sp>
-      <p:sp>
-        <p:nvSpPr>
-          <p:cNvPr id="107" name="TextBox 106"/>
-          <p:cNvSpPr txBox="1"/>
-          <p:nvPr/>
-        </p:nvSpPr>
-        <p:spPr>
-          <a:xfrm>
-            <a:off x="2851150" y="2374900"/>
-            <a:ext cx="2000250" cy="292100"/>
+          <p:cNvPr id="106" name="TextBox 105"/>
+          <p:cNvSpPr txBox="1"/>
+          <p:nvPr/>
+        </p:nvSpPr>
+        <p:spPr>
+          <a:xfrm>
+            <a:off x="2851150" y="2133600"/>
+            <a:ext cx="1492250" cy="317500"/>
           </a:xfrm>
           <a:prstGeom prst="rect">
             <a:avLst/>
@@ -5997,15 +6425,87 @@
           </a:p>
         </p:txBody>
       </p:sp>
-      <p:sp>
-        <p:nvSpPr>
-          <p:cNvPr id="108" name="Rectangle 107"/>
+      <p:pic>
+        <p:nvPicPr>
+          <p:cNvPr id="107" name="Picture 106" descr="ic-handoff.png"/>
+          <p:cNvPicPr>
+            <a:picLocks noChangeAspect="1"/>
+          </p:cNvPicPr>
+          <p:nvPr/>
+        </p:nvPicPr>
+        <p:blipFill>
+          <a:blip r:embed="rId3"/>
+          <a:stretch>
+            <a:fillRect/>
+          </a:stretch>
+        </p:blipFill>
+        <p:spPr>
+          <a:xfrm>
+            <a:off x="2406650" y="2133600"/>
+            <a:ext cx="177800" cy="177800"/>
+          </a:xfrm>
+          <a:prstGeom prst="rect">
+            <a:avLst/>
+          </a:prstGeom>
+        </p:spPr>
+      </p:pic>
+      <p:pic>
+        <p:nvPicPr>
+          <p:cNvPr id="108" name="Picture 107" descr="ic-doc.png"/>
+          <p:cNvPicPr>
+            <a:picLocks noChangeAspect="1"/>
+          </p:cNvPicPr>
+          <p:nvPr/>
+        </p:nvPicPr>
+        <p:blipFill>
+          <a:blip r:embed="rId4"/>
+          <a:stretch>
+            <a:fillRect/>
+          </a:stretch>
+        </p:blipFill>
+        <p:spPr>
+          <a:xfrm>
+            <a:off x="2406650" y="2387600"/>
+            <a:ext cx="177800" cy="177800"/>
+          </a:xfrm>
+          <a:prstGeom prst="rect">
+            <a:avLst/>
+          </a:prstGeom>
+        </p:spPr>
+      </p:pic>
+      <p:pic>
+        <p:nvPicPr>
+          <p:cNvPr id="109" name="Picture 108" descr="ic-wait.png"/>
+          <p:cNvPicPr>
+            <a:picLocks noChangeAspect="1"/>
+          </p:cNvPicPr>
+          <p:nvPr/>
+        </p:nvPicPr>
+        <p:blipFill>
+          <a:blip r:embed="rId5"/>
+          <a:stretch>
+            <a:fillRect/>
+          </a:stretch>
+        </p:blipFill>
+        <p:spPr>
+          <a:xfrm>
+            <a:off x="2406650" y="2641600"/>
+            <a:ext cx="177800" cy="177800"/>
+          </a:xfrm>
+          <a:prstGeom prst="rect">
+            <a:avLst/>
+          </a:prstGeom>
+        </p:spPr>
+      </p:pic>
+      <p:sp>
+        <p:nvSpPr>
+          <p:cNvPr id="110" name="Rectangle 109"/>
           <p:cNvSpPr/>
           <p:nvPr/>
         </p:nvSpPr>
         <p:spPr>
           <a:xfrm>
-            <a:off x="5010150" y="2159000"/>
+            <a:off x="5010150" y="1905000"/>
             <a:ext cx="406400" cy="38100"/>
           </a:xfrm>
           <a:prstGeom prst="rect">
@@ -6043,58 +6543,14 @@
       </p:sp>
       <p:sp>
         <p:nvSpPr>
-          <p:cNvPr id="109" name="Rectangle 108"/>
-          <p:cNvSpPr/>
-          <p:nvPr/>
-        </p:nvSpPr>
-        <p:spPr>
-          <a:xfrm>
-            <a:off x="4756150" y="2197100"/>
-            <a:ext cx="6350" cy="825500"/>
-          </a:xfrm>
-          <a:prstGeom prst="rect">
-            <a:avLst/>
-          </a:prstGeom>
-          <a:solidFill>
-            <a:srgbClr val="1F1F22"/>
-          </a:solidFill>
-          <a:ln>
-            <a:noFill/>
-          </a:ln>
-          <a:effectLst/>
-        </p:spPr>
-        <p:style>
-          <a:lnRef idx="1">
-            <a:schemeClr val="accent1"/>
-          </a:lnRef>
-          <a:fillRef idx="3">
-            <a:schemeClr val="accent1"/>
-          </a:fillRef>
-          <a:effectRef idx="2">
-            <a:schemeClr val="accent1"/>
-          </a:effectRef>
-          <a:fontRef idx="minor">
-            <a:schemeClr val="lt1"/>
-          </a:fontRef>
-        </p:style>
-        <p:txBody>
-          <a:bodyPr rtlCol="0" anchor="ctr"/>
-          <a:lstStyle/>
-          <a:p>
-            <a:pPr algn="ctr"/>
-          </a:p>
-        </p:txBody>
-      </p:sp>
-      <p:sp>
-        <p:nvSpPr>
-          <p:cNvPr id="110" name="TextBox 109"/>
-          <p:cNvSpPr txBox="1"/>
-          <p:nvPr/>
-        </p:nvSpPr>
-        <p:spPr>
-          <a:xfrm>
-            <a:off x="5010150" y="2374900"/>
-            <a:ext cx="2000250" cy="292100"/>
+          <p:cNvPr id="111" name="TextBox 110"/>
+          <p:cNvSpPr txBox="1"/>
+          <p:nvPr/>
+        </p:nvSpPr>
+        <p:spPr>
+          <a:xfrm>
+            <a:off x="5010150" y="2133600"/>
+            <a:ext cx="1492250" cy="317500"/>
           </a:xfrm>
           <a:prstGeom prst="rect">
             <a:avLst/>
@@ -6120,15 +6576,87 @@
           </a:p>
         </p:txBody>
       </p:sp>
-      <p:sp>
-        <p:nvSpPr>
-          <p:cNvPr id="111" name="Rectangle 110"/>
+      <p:pic>
+        <p:nvPicPr>
+          <p:cNvPr id="112" name="Picture 111" descr="ic-handoff.png"/>
+          <p:cNvPicPr>
+            <a:picLocks noChangeAspect="1"/>
+          </p:cNvPicPr>
+          <p:nvPr/>
+        </p:nvPicPr>
+        <p:blipFill>
+          <a:blip r:embed="rId3"/>
+          <a:stretch>
+            <a:fillRect/>
+          </a:stretch>
+        </p:blipFill>
+        <p:spPr>
+          <a:xfrm>
+            <a:off x="4565650" y="2133600"/>
+            <a:ext cx="177800" cy="177800"/>
+          </a:xfrm>
+          <a:prstGeom prst="rect">
+            <a:avLst/>
+          </a:prstGeom>
+        </p:spPr>
+      </p:pic>
+      <p:pic>
+        <p:nvPicPr>
+          <p:cNvPr id="113" name="Picture 112" descr="ic-doc.png"/>
+          <p:cNvPicPr>
+            <a:picLocks noChangeAspect="1"/>
+          </p:cNvPicPr>
+          <p:nvPr/>
+        </p:nvPicPr>
+        <p:blipFill>
+          <a:blip r:embed="rId4"/>
+          <a:stretch>
+            <a:fillRect/>
+          </a:stretch>
+        </p:blipFill>
+        <p:spPr>
+          <a:xfrm>
+            <a:off x="4565650" y="2387600"/>
+            <a:ext cx="177800" cy="177800"/>
+          </a:xfrm>
+          <a:prstGeom prst="rect">
+            <a:avLst/>
+          </a:prstGeom>
+        </p:spPr>
+      </p:pic>
+      <p:pic>
+        <p:nvPicPr>
+          <p:cNvPr id="114" name="Picture 113" descr="ic-wait.png"/>
+          <p:cNvPicPr>
+            <a:picLocks noChangeAspect="1"/>
+          </p:cNvPicPr>
+          <p:nvPr/>
+        </p:nvPicPr>
+        <p:blipFill>
+          <a:blip r:embed="rId5"/>
+          <a:stretch>
+            <a:fillRect/>
+          </a:stretch>
+        </p:blipFill>
+        <p:spPr>
+          <a:xfrm>
+            <a:off x="4565650" y="2641600"/>
+            <a:ext cx="177800" cy="177800"/>
+          </a:xfrm>
+          <a:prstGeom prst="rect">
+            <a:avLst/>
+          </a:prstGeom>
+        </p:spPr>
+      </p:pic>
+      <p:sp>
+        <p:nvSpPr>
+          <p:cNvPr id="115" name="Rectangle 114"/>
           <p:cNvSpPr/>
           <p:nvPr/>
         </p:nvSpPr>
         <p:spPr>
           <a:xfrm>
-            <a:off x="7169150" y="2159000"/>
+            <a:off x="7169150" y="1905000"/>
             <a:ext cx="406400" cy="38100"/>
           </a:xfrm>
           <a:prstGeom prst="rect">
@@ -6166,58 +6694,14 @@
       </p:sp>
       <p:sp>
         <p:nvSpPr>
-          <p:cNvPr id="112" name="Rectangle 111"/>
-          <p:cNvSpPr/>
-          <p:nvPr/>
-        </p:nvSpPr>
-        <p:spPr>
-          <a:xfrm>
-            <a:off x="6915150" y="2197100"/>
-            <a:ext cx="6350" cy="825500"/>
-          </a:xfrm>
-          <a:prstGeom prst="rect">
-            <a:avLst/>
-          </a:prstGeom>
-          <a:solidFill>
-            <a:srgbClr val="1F1F22"/>
-          </a:solidFill>
-          <a:ln>
-            <a:noFill/>
-          </a:ln>
-          <a:effectLst/>
-        </p:spPr>
-        <p:style>
-          <a:lnRef idx="1">
-            <a:schemeClr val="accent1"/>
-          </a:lnRef>
-          <a:fillRef idx="3">
-            <a:schemeClr val="accent1"/>
-          </a:fillRef>
-          <a:effectRef idx="2">
-            <a:schemeClr val="accent1"/>
-          </a:effectRef>
-          <a:fontRef idx="minor">
-            <a:schemeClr val="lt1"/>
-          </a:fontRef>
-        </p:style>
-        <p:txBody>
-          <a:bodyPr rtlCol="0" anchor="ctr"/>
-          <a:lstStyle/>
-          <a:p>
-            <a:pPr algn="ctr"/>
-          </a:p>
-        </p:txBody>
-      </p:sp>
-      <p:sp>
-        <p:nvSpPr>
-          <p:cNvPr id="113" name="TextBox 112"/>
-          <p:cNvSpPr txBox="1"/>
-          <p:nvPr/>
-        </p:nvSpPr>
-        <p:spPr>
-          <a:xfrm>
-            <a:off x="7169150" y="2374900"/>
-            <a:ext cx="2000250" cy="292100"/>
+          <p:cNvPr id="116" name="TextBox 115"/>
+          <p:cNvSpPr txBox="1"/>
+          <p:nvPr/>
+        </p:nvSpPr>
+        <p:spPr>
+          <a:xfrm>
+            <a:off x="7169150" y="2133600"/>
+            <a:ext cx="1492250" cy="317500"/>
           </a:xfrm>
           <a:prstGeom prst="rect">
             <a:avLst/>
@@ -6243,15 +6727,87 @@
           </a:p>
         </p:txBody>
       </p:sp>
-      <p:sp>
-        <p:nvSpPr>
-          <p:cNvPr id="114" name="Rectangle 113"/>
+      <p:pic>
+        <p:nvPicPr>
+          <p:cNvPr id="117" name="Picture 116" descr="ic-handoff.png"/>
+          <p:cNvPicPr>
+            <a:picLocks noChangeAspect="1"/>
+          </p:cNvPicPr>
+          <p:nvPr/>
+        </p:nvPicPr>
+        <p:blipFill>
+          <a:blip r:embed="rId3"/>
+          <a:stretch>
+            <a:fillRect/>
+          </a:stretch>
+        </p:blipFill>
+        <p:spPr>
+          <a:xfrm>
+            <a:off x="6724650" y="2133600"/>
+            <a:ext cx="177800" cy="177800"/>
+          </a:xfrm>
+          <a:prstGeom prst="rect">
+            <a:avLst/>
+          </a:prstGeom>
+        </p:spPr>
+      </p:pic>
+      <p:pic>
+        <p:nvPicPr>
+          <p:cNvPr id="118" name="Picture 117" descr="ic-doc.png"/>
+          <p:cNvPicPr>
+            <a:picLocks noChangeAspect="1"/>
+          </p:cNvPicPr>
+          <p:nvPr/>
+        </p:nvPicPr>
+        <p:blipFill>
+          <a:blip r:embed="rId4"/>
+          <a:stretch>
+            <a:fillRect/>
+          </a:stretch>
+        </p:blipFill>
+        <p:spPr>
+          <a:xfrm>
+            <a:off x="6724650" y="2387600"/>
+            <a:ext cx="177800" cy="177800"/>
+          </a:xfrm>
+          <a:prstGeom prst="rect">
+            <a:avLst/>
+          </a:prstGeom>
+        </p:spPr>
+      </p:pic>
+      <p:pic>
+        <p:nvPicPr>
+          <p:cNvPr id="119" name="Picture 118" descr="ic-wait.png"/>
+          <p:cNvPicPr>
+            <a:picLocks noChangeAspect="1"/>
+          </p:cNvPicPr>
+          <p:nvPr/>
+        </p:nvPicPr>
+        <p:blipFill>
+          <a:blip r:embed="rId5"/>
+          <a:stretch>
+            <a:fillRect/>
+          </a:stretch>
+        </p:blipFill>
+        <p:spPr>
+          <a:xfrm>
+            <a:off x="6724650" y="2641600"/>
+            <a:ext cx="177800" cy="177800"/>
+          </a:xfrm>
+          <a:prstGeom prst="rect">
+            <a:avLst/>
+          </a:prstGeom>
+        </p:spPr>
+      </p:pic>
+      <p:sp>
+        <p:nvSpPr>
+          <p:cNvPr id="120" name="Rectangle 119"/>
           <p:cNvSpPr/>
           <p:nvPr/>
         </p:nvSpPr>
         <p:spPr>
           <a:xfrm>
-            <a:off x="9328150" y="2159000"/>
+            <a:off x="9328150" y="1905000"/>
             <a:ext cx="406400" cy="38100"/>
           </a:xfrm>
           <a:prstGeom prst="rect">
@@ -6289,58 +6845,14 @@
       </p:sp>
       <p:sp>
         <p:nvSpPr>
-          <p:cNvPr id="115" name="Rectangle 114"/>
-          <p:cNvSpPr/>
-          <p:nvPr/>
-        </p:nvSpPr>
-        <p:spPr>
-          <a:xfrm>
-            <a:off x="9074150" y="2197100"/>
-            <a:ext cx="6350" cy="825500"/>
-          </a:xfrm>
-          <a:prstGeom prst="rect">
-            <a:avLst/>
-          </a:prstGeom>
-          <a:solidFill>
-            <a:srgbClr val="1F1F22"/>
-          </a:solidFill>
-          <a:ln>
-            <a:noFill/>
-          </a:ln>
-          <a:effectLst/>
-        </p:spPr>
-        <p:style>
-          <a:lnRef idx="1">
-            <a:schemeClr val="accent1"/>
-          </a:lnRef>
-          <a:fillRef idx="3">
-            <a:schemeClr val="accent1"/>
-          </a:fillRef>
-          <a:effectRef idx="2">
-            <a:schemeClr val="accent1"/>
-          </a:effectRef>
-          <a:fontRef idx="minor">
-            <a:schemeClr val="lt1"/>
-          </a:fontRef>
-        </p:style>
-        <p:txBody>
-          <a:bodyPr rtlCol="0" anchor="ctr"/>
-          <a:lstStyle/>
-          <a:p>
-            <a:pPr algn="ctr"/>
-          </a:p>
-        </p:txBody>
-      </p:sp>
-      <p:sp>
-        <p:nvSpPr>
-          <p:cNvPr id="116" name="TextBox 115"/>
-          <p:cNvSpPr txBox="1"/>
-          <p:nvPr/>
-        </p:nvSpPr>
-        <p:spPr>
-          <a:xfrm>
-            <a:off x="9328150" y="2374900"/>
-            <a:ext cx="2000250" cy="292100"/>
+          <p:cNvPr id="121" name="TextBox 120"/>
+          <p:cNvSpPr txBox="1"/>
+          <p:nvPr/>
+        </p:nvSpPr>
+        <p:spPr>
+          <a:xfrm>
+            <a:off x="9328150" y="2133600"/>
+            <a:ext cx="1492250" cy="317500"/>
           </a:xfrm>
           <a:prstGeom prst="rect">
             <a:avLst/>
@@ -6366,16 +6878,88 @@
           </a:p>
         </p:txBody>
       </p:sp>
-      <p:sp>
-        <p:nvSpPr>
-          <p:cNvPr id="117" name="TextBox 116"/>
-          <p:cNvSpPr txBox="1"/>
-          <p:nvPr/>
-        </p:nvSpPr>
-        <p:spPr>
-          <a:xfrm>
-            <a:off x="698500" y="3175000"/>
-            <a:ext cx="8890000" cy="190500"/>
+      <p:pic>
+        <p:nvPicPr>
+          <p:cNvPr id="122" name="Picture 121" descr="ic-handoff.png"/>
+          <p:cNvPicPr>
+            <a:picLocks noChangeAspect="1"/>
+          </p:cNvPicPr>
+          <p:nvPr/>
+        </p:nvPicPr>
+        <p:blipFill>
+          <a:blip r:embed="rId3"/>
+          <a:stretch>
+            <a:fillRect/>
+          </a:stretch>
+        </p:blipFill>
+        <p:spPr>
+          <a:xfrm>
+            <a:off x="8883650" y="2133600"/>
+            <a:ext cx="177800" cy="177800"/>
+          </a:xfrm>
+          <a:prstGeom prst="rect">
+            <a:avLst/>
+          </a:prstGeom>
+        </p:spPr>
+      </p:pic>
+      <p:pic>
+        <p:nvPicPr>
+          <p:cNvPr id="123" name="Picture 122" descr="ic-doc.png"/>
+          <p:cNvPicPr>
+            <a:picLocks noChangeAspect="1"/>
+          </p:cNvPicPr>
+          <p:nvPr/>
+        </p:nvPicPr>
+        <p:blipFill>
+          <a:blip r:embed="rId4"/>
+          <a:stretch>
+            <a:fillRect/>
+          </a:stretch>
+        </p:blipFill>
+        <p:spPr>
+          <a:xfrm>
+            <a:off x="8883650" y="2387600"/>
+            <a:ext cx="177800" cy="177800"/>
+          </a:xfrm>
+          <a:prstGeom prst="rect">
+            <a:avLst/>
+          </a:prstGeom>
+        </p:spPr>
+      </p:pic>
+      <p:pic>
+        <p:nvPicPr>
+          <p:cNvPr id="124" name="Picture 123" descr="ic-wait.png"/>
+          <p:cNvPicPr>
+            <a:picLocks noChangeAspect="1"/>
+          </p:cNvPicPr>
+          <p:nvPr/>
+        </p:nvPicPr>
+        <p:blipFill>
+          <a:blip r:embed="rId5"/>
+          <a:stretch>
+            <a:fillRect/>
+          </a:stretch>
+        </p:blipFill>
+        <p:spPr>
+          <a:xfrm>
+            <a:off x="8883650" y="2641600"/>
+            <a:ext cx="177800" cy="177800"/>
+          </a:xfrm>
+          <a:prstGeom prst="rect">
+            <a:avLst/>
+          </a:prstGeom>
+        </p:spPr>
+      </p:pic>
+      <p:sp>
+        <p:nvSpPr>
+          <p:cNvPr id="125" name="TextBox 124"/>
+          <p:cNvSpPr txBox="1"/>
+          <p:nvPr/>
+        </p:nvSpPr>
+        <p:spPr>
+          <a:xfrm>
+            <a:off x="698500" y="3048000"/>
+            <a:ext cx="9525000" cy="190500"/>
           </a:xfrm>
           <a:prstGeom prst="rect">
             <a:avLst/>
@@ -6390,7 +6974,7 @@
           <a:p>
             <a:pPr algn="l"/>
             <a:r>
-              <a:rPr sz="1300" b="0">
+              <a:rPr sz="1400" b="0">
                 <a:solidFill>
                   <a:srgbClr val="9A9AA2"/>
                 </a:solidFill>
@@ -6403,13 +6987,13 @@
       </p:sp>
       <p:sp>
         <p:nvSpPr>
-          <p:cNvPr id="118" name="Rectangle 117"/>
+          <p:cNvPr id="126" name="Rectangle 125"/>
           <p:cNvSpPr/>
           <p:nvPr/>
         </p:nvSpPr>
         <p:spPr>
           <a:xfrm>
-            <a:off x="698500" y="3683000"/>
+            <a:off x="698500" y="3530600"/>
             <a:ext cx="10788650" cy="6350"/>
           </a:xfrm>
           <a:prstGeom prst="rect">
@@ -6447,14 +7031,14 @@
       </p:sp>
       <p:sp>
         <p:nvSpPr>
-          <p:cNvPr id="119" name="TextBox 118"/>
-          <p:cNvSpPr txBox="1"/>
-          <p:nvPr/>
-        </p:nvSpPr>
-        <p:spPr>
-          <a:xfrm>
-            <a:off x="698500" y="4000500"/>
-            <a:ext cx="5715000" cy="698500"/>
+          <p:cNvPr id="127" name="TextBox 126"/>
+          <p:cNvSpPr txBox="1"/>
+          <p:nvPr/>
+        </p:nvSpPr>
+        <p:spPr>
+          <a:xfrm>
+            <a:off x="698500" y="3733800"/>
+            <a:ext cx="9525000" cy="177800"/>
           </a:xfrm>
           <a:prstGeom prst="rect">
             <a:avLst/>
@@ -6467,37 +7051,29 @@
           </a:bodyPr>
           <a:lstStyle/>
           <a:p>
-            <a:r>
-              <a:rPr sz="6400" b="0">
-                <a:solidFill>
-                  <a:srgbClr val="ECECEE"/>
-                </a:solidFill>
-                <a:latin typeface="Arial"/>
-              </a:rPr>
-              <a:t>39</a:t>
-            </a:r>
-            <a:r>
-              <a:rPr sz="2600" b="0">
+            <a:pPr algn="l"/>
+            <a:r>
+              <a:rPr sz="1100" b="0" spc="200">
                 <a:solidFill>
                   <a:srgbClr val="9A9AA2"/>
                 </a:solidFill>
-                <a:latin typeface="Arial"/>
-              </a:rPr>
-              <a:t>%</a:t>
-            </a:r>
-          </a:p>
-        </p:txBody>
-      </p:sp>
-      <p:sp>
-        <p:nvSpPr>
-          <p:cNvPr id="120" name="TextBox 119"/>
-          <p:cNvSpPr txBox="1"/>
-          <p:nvPr/>
-        </p:nvSpPr>
-        <p:spPr>
-          <a:xfrm>
-            <a:off x="698500" y="4838700"/>
-            <a:ext cx="7620000" cy="165100"/>
+                <a:latin typeface="Courier New"/>
+              </a:rPr>
+              <a:t>THEY BOUGHT THE GENERATOR — THE CHAIN AROUND IT IS STILL MANUAL</a:t>
+            </a:r>
+          </a:p>
+        </p:txBody>
+      </p:sp>
+      <p:sp>
+        <p:nvSpPr>
+          <p:cNvPr id="128" name="TextBox 127"/>
+          <p:cNvSpPr txBox="1"/>
+          <p:nvPr/>
+        </p:nvSpPr>
+        <p:spPr>
+          <a:xfrm>
+            <a:off x="698500" y="3975100"/>
+            <a:ext cx="5715000" cy="825500"/>
           </a:xfrm>
           <a:prstGeom prst="rect">
             <a:avLst/>
@@ -6510,22 +7086,65 @@
           </a:bodyPr>
           <a:lstStyle/>
           <a:p>
+            <a:r>
+              <a:rPr sz="6400" b="0">
+                <a:solidFill>
+                  <a:srgbClr val="FF6B3D"/>
+                </a:solidFill>
+                <a:latin typeface="Arial"/>
+              </a:rPr>
+              <a:t>61</a:t>
+            </a:r>
+            <a:r>
+              <a:rPr sz="2600" b="0">
+                <a:solidFill>
+                  <a:srgbClr val="9A9AA2"/>
+                </a:solidFill>
+                <a:latin typeface="Arial"/>
+              </a:rPr>
+              <a:t>%</a:t>
+            </a:r>
+          </a:p>
+        </p:txBody>
+      </p:sp>
+      <p:sp>
+        <p:nvSpPr>
+          <p:cNvPr id="129" name="TextBox 128"/>
+          <p:cNvSpPr txBox="1"/>
+          <p:nvPr/>
+        </p:nvSpPr>
+        <p:spPr>
+          <a:xfrm>
+            <a:off x="698500" y="4864100"/>
+            <a:ext cx="7620000" cy="190500"/>
+          </a:xfrm>
+          <a:prstGeom prst="rect">
+            <a:avLst/>
+          </a:prstGeom>
+          <a:noFill/>
+        </p:spPr>
+        <p:txBody>
+          <a:bodyPr wrap="square" lIns="0" rIns="0" tIns="0" bIns="0" anchor="ctr">
+            <a:spAutoFit/>
+          </a:bodyPr>
+          <a:lstStyle/>
+          <a:p>
             <a:pPr algn="l"/>
             <a:r>
-              <a:rPr sz="1200" b="0">
+              <a:rPr sz="1400" b="0">
                 <a:solidFill>
                   <a:srgbClr val="9A9AA2"/>
                 </a:solidFill>
                 <a:latin typeface="Arial"/>
               </a:rPr>
-              <a:t>of organizations report any EBIT impact from AI</a:t>
-            </a:r>
-          </a:p>
-        </p:txBody>
-      </p:sp>
-      <p:sp>
-        <p:nvSpPr>
-          <p:cNvPr id="121" name="Rectangle 120"/>
+              <a:t>of organizations see no EBIT impact from AI</a:t>
+            </a:r>
+          </a:p>
+        </p:txBody>
+      </p:sp>
+      <p:sp>
+        <p:nvSpPr>
+          <p:cNvPr id="130" name="Rectangle 129"/>
           <p:cNvSpPr/>
           <p:nvPr/>
         </p:nvSpPr>
@@ -6569,14 +7188,14 @@
       </p:sp>
       <p:sp>
         <p:nvSpPr>
-          <p:cNvPr id="122" name="TextBox 121"/>
-          <p:cNvSpPr txBox="1"/>
-          <p:nvPr/>
-        </p:nvSpPr>
-        <p:spPr>
-          <a:xfrm>
-            <a:off x="698500" y="5499100"/>
-            <a:ext cx="9525000" cy="203200"/>
+          <p:cNvPr id="131" name="TextBox 130"/>
+          <p:cNvSpPr txBox="1"/>
+          <p:nvPr/>
+        </p:nvSpPr>
+        <p:spPr>
+          <a:xfrm>
+            <a:off x="698500" y="5473700"/>
+            <a:ext cx="9906000" cy="215900"/>
           </a:xfrm>
           <a:prstGeom prst="rect">
             <a:avLst/>
@@ -6591,7 +7210,7 @@
           <a:p>
             <a:pPr algn="l"/>
             <a:r>
-              <a:rPr sz="1400" b="1">
+              <a:rPr sz="1600" b="1">
                 <a:solidFill>
                   <a:srgbClr val="ECECEE"/>
                 </a:solidFill>
@@ -6600,7 +7219,7 @@
               <a:t>The expensive failures happen before a line of code.</a:t>
             </a:r>
             <a:r>
-              <a:rPr sz="1400" b="0">
+              <a:rPr sz="1600" b="0">
                 <a:solidFill>
                   <a:srgbClr val="9A9AA2"/>
                 </a:solidFill>
@@ -6613,14 +7232,14 @@
       </p:sp>
       <p:sp>
         <p:nvSpPr>
-          <p:cNvPr id="123" name="TextBox 122"/>
+          <p:cNvPr id="132" name="TextBox 131"/>
           <p:cNvSpPr txBox="1"/>
           <p:nvPr/>
         </p:nvSpPr>
         <p:spPr>
           <a:xfrm>
             <a:off x="698500" y="5765800"/>
-            <a:ext cx="8890000" cy="127000"/>
+            <a:ext cx="9525000" cy="152400"/>
           </a:xfrm>
           <a:prstGeom prst="rect">
             <a:avLst/>
@@ -6635,27 +7254,27 @@
           <a:p>
             <a:pPr algn="l"/>
             <a:r>
-              <a:rPr sz="800" b="0">
+              <a:rPr sz="1000" b="0">
                 <a:solidFill>
                   <a:srgbClr val="9A9AA2"/>
                 </a:solidFill>
                 <a:latin typeface="Courier New"/>
               </a:rPr>
-              <a:t>Source: McKinsey, The State of AI in 2025</a:t>
+              <a:t>Source: McKinsey, The State of AI in 2025 — 39% attribute any EBIT impact to AI</a:t>
             </a:r>
           </a:p>
         </p:txBody>
       </p:sp>
       <p:pic>
         <p:nvPicPr>
-          <p:cNvPr id="124" name="Picture 123" descr="logo.png"/>
+          <p:cNvPr id="133" name="Picture 132" descr="logo.png"/>
           <p:cNvPicPr>
             <a:picLocks noChangeAspect="1"/>
           </p:cNvPicPr>
           <p:nvPr/>
         </p:nvPicPr>
         <p:blipFill>
-          <a:blip r:embed="rId3"/>
+          <a:blip r:embed="rId6"/>
           <a:stretch>
             <a:fillRect/>
           </a:stretch>
@@ -6733,8 +7352,8 @@
         </p:nvSpPr>
         <p:spPr>
           <a:xfrm>
-            <a:off x="698500" y="609600"/>
-            <a:ext cx="8890000" cy="317500"/>
+            <a:off x="698500" y="571500"/>
+            <a:ext cx="9906000" cy="393700"/>
           </a:xfrm>
           <a:prstGeom prst="rect">
             <a:avLst/>
@@ -6749,16 +7368,16 @@
           <a:p>
             <a:pPr algn="l"/>
             <a:r>
-              <a:rPr sz="2300" b="1">
+              <a:rPr sz="2800" b="1">
                 <a:solidFill>
                   <a:srgbClr val="ECECEE"/>
                 </a:solidFill>
                 <a:latin typeface="Arial"/>
               </a:rPr>
-              <a:t>From idea to running software.</a:t>
-            </a:r>
-            <a:r>
-              <a:rPr sz="2300" b="0">
+              <a:t>From idea to build-ready package.</a:t>
+            </a:r>
+            <a:r>
+              <a:rPr sz="2800" b="0">
                 <a:solidFill>
                   <a:srgbClr val="9A9AA2"/>
                 </a:solidFill>
@@ -6799,7 +7418,7 @@
                 </a:solidFill>
                 <a:latin typeface="Courier New"/>
               </a:rPr>
-              <a:t>03 — The chain, part 1</a:t>
+              <a:t>03 — The chain</a:t>
             </a:r>
           </a:p>
         </p:txBody>
@@ -6856,8 +7475,8 @@
         </p:nvSpPr>
         <p:spPr>
           <a:xfrm>
-            <a:off x="698500" y="1016000"/>
-            <a:ext cx="9398000" cy="647700"/>
+            <a:off x="698500" y="1244600"/>
+            <a:ext cx="9398000" cy="482600"/>
           </a:xfrm>
           <a:prstGeom prst="rect">
             <a:avLst/>
@@ -6872,11 +7491,11 @@
           <a:p>
             <a:pPr algn="l">
               <a:lnSpc>
-                <a:spcPts val="1700"/>
+                <a:spcPts val="1900"/>
               </a:lnSpc>
             </a:pPr>
             <a:r>
-              <a:rPr sz="1200" b="0">
+              <a:rPr sz="1400" b="0">
                 <a:solidFill>
                   <a:srgbClr val="9A9AA2"/>
                 </a:solidFill>
@@ -6885,7 +7504,7 @@
               <a:t>One line, a human gate at every step. AI agents support every stage, </a:t>
             </a:r>
             <a:r>
-              <a:rPr sz="1200" b="1">
+              <a:rPr sz="1400" b="1">
                 <a:solidFill>
                   <a:srgbClr val="ECECEE"/>
                 </a:solidFill>
@@ -6894,7 +7513,7 @@
               <a:t>Discover through AI Memory</a:t>
             </a:r>
             <a:r>
-              <a:rPr sz="1200" b="0">
+              <a:rPr sz="1400" b="0">
                 <a:solidFill>
                   <a:srgbClr val="9A9AA2"/>
                 </a:solidFill>
@@ -6907,13 +7526,48 @@
       </p:sp>
       <p:sp>
         <p:nvSpPr>
-          <p:cNvPr id="103" name="Rectangle 102"/>
+          <p:cNvPr id="103" name="TextBox 102"/>
+          <p:cNvSpPr txBox="1"/>
+          <p:nvPr/>
+        </p:nvSpPr>
+        <p:spPr>
+          <a:xfrm>
+            <a:off x="698500" y="2387600"/>
+            <a:ext cx="5715000" cy="177800"/>
+          </a:xfrm>
+          <a:prstGeom prst="rect">
+            <a:avLst/>
+          </a:prstGeom>
+          <a:noFill/>
+        </p:spPr>
+        <p:txBody>
+          <a:bodyPr wrap="square" lIns="0" rIns="0" tIns="0" bIns="0" anchor="ctr">
+            <a:spAutoFit/>
+          </a:bodyPr>
+          <a:lstStyle/>
+          <a:p>
+            <a:pPr algn="l"/>
+            <a:r>
+              <a:rPr sz="1100" b="0" spc="300">
+                <a:solidFill>
+                  <a:srgbClr val="9A9AA2"/>
+                </a:solidFill>
+                <a:latin typeface="Courier New"/>
+              </a:rPr>
+              <a:t>IDEA TO BUILD-READY PACKAGE</a:t>
+            </a:r>
+          </a:p>
+        </p:txBody>
+      </p:sp>
+      <p:sp>
+        <p:nvSpPr>
+          <p:cNvPr id="104" name="Rectangle 103"/>
           <p:cNvSpPr/>
           <p:nvPr/>
         </p:nvSpPr>
         <p:spPr>
           <a:xfrm>
-            <a:off x="698500" y="3429000"/>
+            <a:off x="698500" y="3556000"/>
             <a:ext cx="10788650" cy="6350"/>
           </a:xfrm>
           <a:prstGeom prst="rect">
@@ -6951,20 +7605,20 @@
       </p:sp>
       <p:sp>
         <p:nvSpPr>
-          <p:cNvPr id="104" name="Rectangle 103"/>
+          <p:cNvPr id="105" name="Diamond 104"/>
           <p:cNvSpPr/>
           <p:nvPr/>
         </p:nvSpPr>
         <p:spPr>
           <a:xfrm>
-            <a:off x="698500" y="3435350"/>
-            <a:ext cx="10788650" cy="6350"/>
-          </a:xfrm>
-          <a:prstGeom prst="rect">
+            <a:off x="2800350" y="3505200"/>
+            <a:ext cx="101600" cy="101600"/>
+          </a:xfrm>
+          <a:prstGeom prst="diamond">
             <a:avLst/>
           </a:prstGeom>
           <a:solidFill>
-            <a:srgbClr val="9A9AA2"/>
+            <a:srgbClr val="FF6B3D"/>
           </a:solidFill>
           <a:ln>
             <a:noFill/>
@@ -6995,20 +7649,20 @@
       </p:sp>
       <p:sp>
         <p:nvSpPr>
-          <p:cNvPr id="105" name="Rectangle 104"/>
+          <p:cNvPr id="106" name="Diamond 105"/>
           <p:cNvSpPr/>
           <p:nvPr/>
         </p:nvSpPr>
         <p:spPr>
           <a:xfrm>
-            <a:off x="698500" y="3429000"/>
-            <a:ext cx="279400" cy="25400"/>
-          </a:xfrm>
-          <a:prstGeom prst="rect">
+            <a:off x="4959350" y="3505200"/>
+            <a:ext cx="101600" cy="101600"/>
+          </a:xfrm>
+          <a:prstGeom prst="diamond">
             <a:avLst/>
           </a:prstGeom>
           <a:solidFill>
-            <a:srgbClr val="9A9AA2"/>
+            <a:srgbClr val="FF6B3D"/>
           </a:solidFill>
           <a:ln>
             <a:noFill/>
@@ -7039,90 +7693,20 @@
       </p:sp>
       <p:sp>
         <p:nvSpPr>
-          <p:cNvPr id="106" name="TextBox 105"/>
-          <p:cNvSpPr txBox="1"/>
-          <p:nvPr/>
-        </p:nvSpPr>
-        <p:spPr>
-          <a:xfrm>
-            <a:off x="698500" y="3619500"/>
-            <a:ext cx="2000250" cy="165100"/>
-          </a:xfrm>
-          <a:prstGeom prst="rect">
-            <a:avLst/>
-          </a:prstGeom>
-          <a:noFill/>
-        </p:spPr>
-        <p:txBody>
-          <a:bodyPr wrap="square" lIns="0" rIns="0" tIns="0" bIns="0" anchor="ctr">
-            <a:spAutoFit/>
-          </a:bodyPr>
-          <a:lstStyle/>
-          <a:p>
-            <a:pPr algn="l"/>
-            <a:r>
-              <a:rPr sz="1300" b="0">
-                <a:solidFill>
-                  <a:srgbClr val="ECECEE"/>
-                </a:solidFill>
-                <a:latin typeface="Arial"/>
-              </a:rPr>
-              <a:t>Discover</a:t>
-            </a:r>
-          </a:p>
-        </p:txBody>
-      </p:sp>
-      <p:sp>
-        <p:nvSpPr>
-          <p:cNvPr id="107" name="TextBox 106"/>
-          <p:cNvSpPr txBox="1"/>
-          <p:nvPr/>
-        </p:nvSpPr>
-        <p:spPr>
-          <a:xfrm>
-            <a:off x="698500" y="3822700"/>
-            <a:ext cx="2000250" cy="139700"/>
-          </a:xfrm>
-          <a:prstGeom prst="rect">
-            <a:avLst/>
-          </a:prstGeom>
-          <a:noFill/>
-        </p:spPr>
-        <p:txBody>
-          <a:bodyPr wrap="square" lIns="0" rIns="0" tIns="0" bIns="0" anchor="ctr">
-            <a:spAutoFit/>
-          </a:bodyPr>
-          <a:lstStyle/>
-          <a:p>
-            <a:pPr algn="l"/>
-            <a:r>
-              <a:rPr sz="1000" b="0">
-                <a:solidFill>
-                  <a:srgbClr val="9A9AA2"/>
-                </a:solidFill>
-                <a:latin typeface="Arial"/>
-              </a:rPr>
-              <a:t>from conversation</a:t>
-            </a:r>
-          </a:p>
-        </p:txBody>
-      </p:sp>
-      <p:sp>
-        <p:nvSpPr>
-          <p:cNvPr id="108" name="Rectangle 107"/>
+          <p:cNvPr id="107" name="Diamond 106"/>
           <p:cNvSpPr/>
           <p:nvPr/>
         </p:nvSpPr>
         <p:spPr>
           <a:xfrm>
-            <a:off x="2851150" y="3429000"/>
-            <a:ext cx="279400" cy="25400"/>
-          </a:xfrm>
-          <a:prstGeom prst="rect">
+            <a:off x="7118350" y="3505200"/>
+            <a:ext cx="101600" cy="101600"/>
+          </a:xfrm>
+          <a:prstGeom prst="diamond">
             <a:avLst/>
           </a:prstGeom>
           <a:solidFill>
-            <a:srgbClr val="9A9AA2"/>
+            <a:srgbClr val="FF6B3D"/>
           </a:solidFill>
           <a:ln>
             <a:noFill/>
@@ -7153,20 +7737,20 @@
       </p:sp>
       <p:sp>
         <p:nvSpPr>
-          <p:cNvPr id="109" name="Rectangle 108"/>
+          <p:cNvPr id="108" name="Diamond 107"/>
           <p:cNvSpPr/>
           <p:nvPr/>
         </p:nvSpPr>
         <p:spPr>
           <a:xfrm>
-            <a:off x="2597150" y="3454400"/>
-            <a:ext cx="6350" cy="635000"/>
-          </a:xfrm>
-          <a:prstGeom prst="rect">
+            <a:off x="9277350" y="3505200"/>
+            <a:ext cx="101600" cy="101600"/>
+          </a:xfrm>
+          <a:prstGeom prst="diamond">
             <a:avLst/>
           </a:prstGeom>
           <a:solidFill>
-            <a:srgbClr val="1F1F22"/>
+            <a:srgbClr val="FF6B3D"/>
           </a:solidFill>
           <a:ln>
             <a:noFill/>
@@ -7197,93 +7781,25 @@
       </p:sp>
       <p:sp>
         <p:nvSpPr>
-          <p:cNvPr id="110" name="TextBox 109"/>
-          <p:cNvSpPr txBox="1"/>
-          <p:nvPr/>
-        </p:nvSpPr>
-        <p:spPr>
-          <a:xfrm>
-            <a:off x="2851150" y="3619500"/>
-            <a:ext cx="2000250" cy="165100"/>
-          </a:xfrm>
-          <a:prstGeom prst="rect">
-            <a:avLst/>
-          </a:prstGeom>
-          <a:noFill/>
-        </p:spPr>
-        <p:txBody>
-          <a:bodyPr wrap="square" lIns="0" rIns="0" tIns="0" bIns="0" anchor="ctr">
-            <a:spAutoFit/>
-          </a:bodyPr>
-          <a:lstStyle/>
-          <a:p>
-            <a:pPr algn="l"/>
-            <a:r>
-              <a:rPr sz="1300" b="0">
-                <a:solidFill>
-                  <a:srgbClr val="ECECEE"/>
-                </a:solidFill>
-                <a:latin typeface="Arial"/>
-              </a:rPr>
-              <a:t>Analyze</a:t>
-            </a:r>
-          </a:p>
-        </p:txBody>
-      </p:sp>
-      <p:sp>
-        <p:nvSpPr>
-          <p:cNvPr id="111" name="TextBox 110"/>
-          <p:cNvSpPr txBox="1"/>
-          <p:nvPr/>
-        </p:nvSpPr>
-        <p:spPr>
-          <a:xfrm>
-            <a:off x="2851150" y="3822700"/>
-            <a:ext cx="2000250" cy="139700"/>
-          </a:xfrm>
-          <a:prstGeom prst="rect">
-            <a:avLst/>
-          </a:prstGeom>
-          <a:noFill/>
-        </p:spPr>
-        <p:txBody>
-          <a:bodyPr wrap="square" lIns="0" rIns="0" tIns="0" bIns="0" anchor="ctr">
-            <a:spAutoFit/>
-          </a:bodyPr>
-          <a:lstStyle/>
-          <a:p>
-            <a:pPr algn="l"/>
-            <a:r>
-              <a:rPr sz="1000" b="0">
-                <a:solidFill>
-                  <a:srgbClr val="9A9AA2"/>
-                </a:solidFill>
-                <a:latin typeface="Arial"/>
-              </a:rPr>
-              <a:t>scope + fit</a:t>
-            </a:r>
-          </a:p>
-        </p:txBody>
-      </p:sp>
-      <p:sp>
-        <p:nvSpPr>
-          <p:cNvPr id="112" name="Rectangle 111"/>
+          <p:cNvPr id="109" name="Oval 108"/>
           <p:cNvSpPr/>
           <p:nvPr/>
         </p:nvSpPr>
         <p:spPr>
           <a:xfrm>
-            <a:off x="5010150" y="3429000"/>
-            <a:ext cx="279400" cy="25400"/>
-          </a:xfrm>
-          <a:prstGeom prst="rect">
+            <a:off x="1568450" y="3352800"/>
+            <a:ext cx="406400" cy="406400"/>
+          </a:xfrm>
+          <a:prstGeom prst="ellipse">
             <a:avLst/>
           </a:prstGeom>
           <a:solidFill>
-            <a:srgbClr val="9A9AA2"/>
+            <a:srgbClr val="0E0E11"/>
           </a:solidFill>
-          <a:ln>
-            <a:noFill/>
+          <a:ln w="19050">
+            <a:solidFill>
+              <a:srgbClr val="9A9AA2"/>
+            </a:solidFill>
           </a:ln>
           <a:effectLst/>
         </p:spPr>
@@ -7311,23 +7827,130 @@
       </p:sp>
       <p:sp>
         <p:nvSpPr>
-          <p:cNvPr id="113" name="Rectangle 112"/>
+          <p:cNvPr id="110" name="TextBox 109"/>
+          <p:cNvSpPr txBox="1"/>
+          <p:nvPr/>
+        </p:nvSpPr>
+        <p:spPr>
+          <a:xfrm>
+            <a:off x="1517650" y="3454400"/>
+            <a:ext cx="508000" cy="203200"/>
+          </a:xfrm>
+          <a:prstGeom prst="rect">
+            <a:avLst/>
+          </a:prstGeom>
+          <a:noFill/>
+        </p:spPr>
+        <p:txBody>
+          <a:bodyPr wrap="square" lIns="0" rIns="0" tIns="0" bIns="0" anchor="ctr">
+            <a:spAutoFit/>
+          </a:bodyPr>
+          <a:lstStyle/>
+          <a:p>
+            <a:pPr algn="ctr"/>
+            <a:r>
+              <a:rPr sz="1300" b="0" spc="100">
+                <a:solidFill>
+                  <a:srgbClr val="9A9AA2"/>
+                </a:solidFill>
+                <a:latin typeface="Courier New"/>
+              </a:rPr>
+              <a:t>01</a:t>
+            </a:r>
+          </a:p>
+        </p:txBody>
+      </p:sp>
+      <p:sp>
+        <p:nvSpPr>
+          <p:cNvPr id="111" name="TextBox 110"/>
+          <p:cNvSpPr txBox="1"/>
+          <p:nvPr/>
+        </p:nvSpPr>
+        <p:spPr>
+          <a:xfrm>
+            <a:off x="819150" y="3860800"/>
+            <a:ext cx="1905000" cy="215900"/>
+          </a:xfrm>
+          <a:prstGeom prst="rect">
+            <a:avLst/>
+          </a:prstGeom>
+          <a:noFill/>
+        </p:spPr>
+        <p:txBody>
+          <a:bodyPr wrap="square" lIns="0" rIns="0" tIns="0" bIns="0" anchor="ctr">
+            <a:spAutoFit/>
+          </a:bodyPr>
+          <a:lstStyle/>
+          <a:p>
+            <a:pPr algn="ctr"/>
+            <a:r>
+              <a:rPr sz="1600" b="0">
+                <a:solidFill>
+                  <a:srgbClr val="ECECEE"/>
+                </a:solidFill>
+                <a:latin typeface="Arial"/>
+              </a:rPr>
+              <a:t>Discover</a:t>
+            </a:r>
+          </a:p>
+        </p:txBody>
+      </p:sp>
+      <p:sp>
+        <p:nvSpPr>
+          <p:cNvPr id="112" name="TextBox 111"/>
+          <p:cNvSpPr txBox="1"/>
+          <p:nvPr/>
+        </p:nvSpPr>
+        <p:spPr>
+          <a:xfrm>
+            <a:off x="819150" y="4089400"/>
+            <a:ext cx="1905000" cy="165100"/>
+          </a:xfrm>
+          <a:prstGeom prst="rect">
+            <a:avLst/>
+          </a:prstGeom>
+          <a:noFill/>
+        </p:spPr>
+        <p:txBody>
+          <a:bodyPr wrap="square" lIns="0" rIns="0" tIns="0" bIns="0" anchor="ctr">
+            <a:spAutoFit/>
+          </a:bodyPr>
+          <a:lstStyle/>
+          <a:p>
+            <a:pPr algn="ctr"/>
+            <a:r>
+              <a:rPr sz="1200" b="0">
+                <a:solidFill>
+                  <a:srgbClr val="9A9AA2"/>
+                </a:solidFill>
+                <a:latin typeface="Arial"/>
+              </a:rPr>
+              <a:t>from conversation</a:t>
+            </a:r>
+          </a:p>
+        </p:txBody>
+      </p:sp>
+      <p:sp>
+        <p:nvSpPr>
+          <p:cNvPr id="113" name="Oval 112"/>
           <p:cNvSpPr/>
           <p:nvPr/>
         </p:nvSpPr>
         <p:spPr>
           <a:xfrm>
-            <a:off x="4756150" y="3454400"/>
-            <a:ext cx="6350" cy="635000"/>
-          </a:xfrm>
-          <a:prstGeom prst="rect">
+            <a:off x="3727450" y="3352800"/>
+            <a:ext cx="406400" cy="406400"/>
+          </a:xfrm>
+          <a:prstGeom prst="ellipse">
             <a:avLst/>
           </a:prstGeom>
           <a:solidFill>
-            <a:srgbClr val="1F1F22"/>
+            <a:srgbClr val="0E0E11"/>
           </a:solidFill>
-          <a:ln>
-            <a:noFill/>
+          <a:ln w="19050">
+            <a:solidFill>
+              <a:srgbClr val="9A9AA2"/>
+            </a:solidFill>
           </a:ln>
           <a:effectLst/>
         </p:spPr>
@@ -7361,8 +7984,8 @@
         </p:nvSpPr>
         <p:spPr>
           <a:xfrm>
-            <a:off x="5010150" y="3619500"/>
-            <a:ext cx="2000250" cy="165100"/>
+            <a:off x="3676650" y="3454400"/>
+            <a:ext cx="508000" cy="203200"/>
           </a:xfrm>
           <a:prstGeom prst="rect">
             <a:avLst/>
@@ -7375,15 +7998,15 @@
           </a:bodyPr>
           <a:lstStyle/>
           <a:p>
-            <a:pPr algn="l"/>
-            <a:r>
-              <a:rPr sz="1300" b="0">
-                <a:solidFill>
-                  <a:srgbClr val="ECECEE"/>
-                </a:solidFill>
-                <a:latin typeface="Arial"/>
-              </a:rPr>
-              <a:t>Research</a:t>
+            <a:pPr algn="ctr"/>
+            <a:r>
+              <a:rPr sz="1300" b="0" spc="100">
+                <a:solidFill>
+                  <a:srgbClr val="9A9AA2"/>
+                </a:solidFill>
+                <a:latin typeface="Courier New"/>
+              </a:rPr>
+              <a:t>02</a:t>
             </a:r>
           </a:p>
         </p:txBody>
@@ -7396,8 +8019,8 @@
         </p:nvSpPr>
         <p:spPr>
           <a:xfrm>
-            <a:off x="5010150" y="3822700"/>
-            <a:ext cx="2000250" cy="139700"/>
+            <a:off x="2978150" y="3860800"/>
+            <a:ext cx="1905000" cy="215900"/>
           </a:xfrm>
           <a:prstGeom prst="rect">
             <a:avLst/>
@@ -7410,38 +8033,75 @@
           </a:bodyPr>
           <a:lstStyle/>
           <a:p>
-            <a:pPr algn="l"/>
-            <a:r>
-              <a:rPr sz="1000" b="0">
+            <a:pPr algn="ctr"/>
+            <a:r>
+              <a:rPr sz="1600" b="0">
+                <a:solidFill>
+                  <a:srgbClr val="ECECEE"/>
+                </a:solidFill>
+                <a:latin typeface="Arial"/>
+              </a:rPr>
+              <a:t>Analyze</a:t>
+            </a:r>
+          </a:p>
+        </p:txBody>
+      </p:sp>
+      <p:sp>
+        <p:nvSpPr>
+          <p:cNvPr id="116" name="TextBox 115"/>
+          <p:cNvSpPr txBox="1"/>
+          <p:nvPr/>
+        </p:nvSpPr>
+        <p:spPr>
+          <a:xfrm>
+            <a:off x="2978150" y="4089400"/>
+            <a:ext cx="1905000" cy="165100"/>
+          </a:xfrm>
+          <a:prstGeom prst="rect">
+            <a:avLst/>
+          </a:prstGeom>
+          <a:noFill/>
+        </p:spPr>
+        <p:txBody>
+          <a:bodyPr wrap="square" lIns="0" rIns="0" tIns="0" bIns="0" anchor="ctr">
+            <a:spAutoFit/>
+          </a:bodyPr>
+          <a:lstStyle/>
+          <a:p>
+            <a:pPr algn="ctr"/>
+            <a:r>
+              <a:rPr sz="1200" b="0">
                 <a:solidFill>
                   <a:srgbClr val="9A9AA2"/>
                 </a:solidFill>
                 <a:latin typeface="Arial"/>
               </a:rPr>
-              <a:t>cited, deep</a:t>
-            </a:r>
-          </a:p>
-        </p:txBody>
-      </p:sp>
-      <p:sp>
-        <p:nvSpPr>
-          <p:cNvPr id="116" name="Rectangle 115"/>
+              <a:t>scope + fit</a:t>
+            </a:r>
+          </a:p>
+        </p:txBody>
+      </p:sp>
+      <p:sp>
+        <p:nvSpPr>
+          <p:cNvPr id="117" name="Oval 116"/>
           <p:cNvSpPr/>
           <p:nvPr/>
         </p:nvSpPr>
         <p:spPr>
           <a:xfrm>
-            <a:off x="7169150" y="3429000"/>
-            <a:ext cx="279400" cy="25400"/>
-          </a:xfrm>
-          <a:prstGeom prst="rect">
+            <a:off x="5886450" y="3352800"/>
+            <a:ext cx="406400" cy="406400"/>
+          </a:xfrm>
+          <a:prstGeom prst="ellipse">
             <a:avLst/>
           </a:prstGeom>
           <a:solidFill>
-            <a:srgbClr val="9A9AA2"/>
+            <a:srgbClr val="0E0E11"/>
           </a:solidFill>
-          <a:ln>
-            <a:noFill/>
+          <a:ln w="19050">
+            <a:solidFill>
+              <a:srgbClr val="9A9AA2"/>
+            </a:solidFill>
           </a:ln>
           <a:effectLst/>
         </p:spPr>
@@ -7469,23 +8129,130 @@
       </p:sp>
       <p:sp>
         <p:nvSpPr>
-          <p:cNvPr id="117" name="Rectangle 116"/>
+          <p:cNvPr id="118" name="TextBox 117"/>
+          <p:cNvSpPr txBox="1"/>
+          <p:nvPr/>
+        </p:nvSpPr>
+        <p:spPr>
+          <a:xfrm>
+            <a:off x="5835650" y="3454400"/>
+            <a:ext cx="508000" cy="203200"/>
+          </a:xfrm>
+          <a:prstGeom prst="rect">
+            <a:avLst/>
+          </a:prstGeom>
+          <a:noFill/>
+        </p:spPr>
+        <p:txBody>
+          <a:bodyPr wrap="square" lIns="0" rIns="0" tIns="0" bIns="0" anchor="ctr">
+            <a:spAutoFit/>
+          </a:bodyPr>
+          <a:lstStyle/>
+          <a:p>
+            <a:pPr algn="ctr"/>
+            <a:r>
+              <a:rPr sz="1300" b="0" spc="100">
+                <a:solidFill>
+                  <a:srgbClr val="9A9AA2"/>
+                </a:solidFill>
+                <a:latin typeface="Courier New"/>
+              </a:rPr>
+              <a:t>03</a:t>
+            </a:r>
+          </a:p>
+        </p:txBody>
+      </p:sp>
+      <p:sp>
+        <p:nvSpPr>
+          <p:cNvPr id="119" name="TextBox 118"/>
+          <p:cNvSpPr txBox="1"/>
+          <p:nvPr/>
+        </p:nvSpPr>
+        <p:spPr>
+          <a:xfrm>
+            <a:off x="5137150" y="3860800"/>
+            <a:ext cx="1905000" cy="215900"/>
+          </a:xfrm>
+          <a:prstGeom prst="rect">
+            <a:avLst/>
+          </a:prstGeom>
+          <a:noFill/>
+        </p:spPr>
+        <p:txBody>
+          <a:bodyPr wrap="square" lIns="0" rIns="0" tIns="0" bIns="0" anchor="ctr">
+            <a:spAutoFit/>
+          </a:bodyPr>
+          <a:lstStyle/>
+          <a:p>
+            <a:pPr algn="ctr"/>
+            <a:r>
+              <a:rPr sz="1600" b="0">
+                <a:solidFill>
+                  <a:srgbClr val="ECECEE"/>
+                </a:solidFill>
+                <a:latin typeface="Arial"/>
+              </a:rPr>
+              <a:t>Research</a:t>
+            </a:r>
+          </a:p>
+        </p:txBody>
+      </p:sp>
+      <p:sp>
+        <p:nvSpPr>
+          <p:cNvPr id="120" name="TextBox 119"/>
+          <p:cNvSpPr txBox="1"/>
+          <p:nvPr/>
+        </p:nvSpPr>
+        <p:spPr>
+          <a:xfrm>
+            <a:off x="5137150" y="4089400"/>
+            <a:ext cx="1905000" cy="165100"/>
+          </a:xfrm>
+          <a:prstGeom prst="rect">
+            <a:avLst/>
+          </a:prstGeom>
+          <a:noFill/>
+        </p:spPr>
+        <p:txBody>
+          <a:bodyPr wrap="square" lIns="0" rIns="0" tIns="0" bIns="0" anchor="ctr">
+            <a:spAutoFit/>
+          </a:bodyPr>
+          <a:lstStyle/>
+          <a:p>
+            <a:pPr algn="ctr"/>
+            <a:r>
+              <a:rPr sz="1200" b="0">
+                <a:solidFill>
+                  <a:srgbClr val="9A9AA2"/>
+                </a:solidFill>
+                <a:latin typeface="Arial"/>
+              </a:rPr>
+              <a:t>cited, deep</a:t>
+            </a:r>
+          </a:p>
+        </p:txBody>
+      </p:sp>
+      <p:sp>
+        <p:nvSpPr>
+          <p:cNvPr id="121" name="Oval 120"/>
           <p:cNvSpPr/>
           <p:nvPr/>
         </p:nvSpPr>
         <p:spPr>
           <a:xfrm>
-            <a:off x="6915150" y="3454400"/>
-            <a:ext cx="6350" cy="635000"/>
-          </a:xfrm>
-          <a:prstGeom prst="rect">
+            <a:off x="8045450" y="3352800"/>
+            <a:ext cx="406400" cy="406400"/>
+          </a:xfrm>
+          <a:prstGeom prst="ellipse">
             <a:avLst/>
           </a:prstGeom>
           <a:solidFill>
-            <a:srgbClr val="1F1F22"/>
+            <a:srgbClr val="0E0E11"/>
           </a:solidFill>
-          <a:ln>
-            <a:noFill/>
+          <a:ln w="19050">
+            <a:solidFill>
+              <a:srgbClr val="9A9AA2"/>
+            </a:solidFill>
           </a:ln>
           <a:effectLst/>
         </p:spPr>
@@ -7513,14 +8280,14 @@
       </p:sp>
       <p:sp>
         <p:nvSpPr>
-          <p:cNvPr id="118" name="TextBox 117"/>
-          <p:cNvSpPr txBox="1"/>
-          <p:nvPr/>
-        </p:nvSpPr>
-        <p:spPr>
-          <a:xfrm>
-            <a:off x="7169150" y="3619500"/>
-            <a:ext cx="2000250" cy="165100"/>
+          <p:cNvPr id="122" name="TextBox 121"/>
+          <p:cNvSpPr txBox="1"/>
+          <p:nvPr/>
+        </p:nvSpPr>
+        <p:spPr>
+          <a:xfrm>
+            <a:off x="7994650" y="3454400"/>
+            <a:ext cx="508000" cy="203200"/>
           </a:xfrm>
           <a:prstGeom prst="rect">
             <a:avLst/>
@@ -7533,29 +8300,29 @@
           </a:bodyPr>
           <a:lstStyle/>
           <a:p>
-            <a:pPr algn="l"/>
-            <a:r>
-              <a:rPr sz="1300" b="0">
-                <a:solidFill>
-                  <a:srgbClr val="ECECEE"/>
-                </a:solidFill>
-                <a:latin typeface="Arial"/>
-              </a:rPr>
-              <a:t>Compliance</a:t>
-            </a:r>
-          </a:p>
-        </p:txBody>
-      </p:sp>
-      <p:sp>
-        <p:nvSpPr>
-          <p:cNvPr id="119" name="TextBox 118"/>
-          <p:cNvSpPr txBox="1"/>
-          <p:nvPr/>
-        </p:nvSpPr>
-        <p:spPr>
-          <a:xfrm>
-            <a:off x="7169150" y="3822700"/>
-            <a:ext cx="2000250" cy="139700"/>
+            <a:pPr algn="ctr"/>
+            <a:r>
+              <a:rPr sz="1300" b="0" spc="100">
+                <a:solidFill>
+                  <a:srgbClr val="9A9AA2"/>
+                </a:solidFill>
+                <a:latin typeface="Courier New"/>
+              </a:rPr>
+              <a:t>04</a:t>
+            </a:r>
+          </a:p>
+        </p:txBody>
+      </p:sp>
+      <p:sp>
+        <p:nvSpPr>
+          <p:cNvPr id="123" name="TextBox 122"/>
+          <p:cNvSpPr txBox="1"/>
+          <p:nvPr/>
+        </p:nvSpPr>
+        <p:spPr>
+          <a:xfrm>
+            <a:off x="7296150" y="3860800"/>
+            <a:ext cx="1905000" cy="215900"/>
           </a:xfrm>
           <a:prstGeom prst="rect">
             <a:avLst/>
@@ -7568,9 +8335,44 @@
           </a:bodyPr>
           <a:lstStyle/>
           <a:p>
-            <a:pPr algn="l"/>
-            <a:r>
-              <a:rPr sz="1000" b="0">
+            <a:pPr algn="ctr"/>
+            <a:r>
+              <a:rPr sz="1600" b="0">
+                <a:solidFill>
+                  <a:srgbClr val="ECECEE"/>
+                </a:solidFill>
+                <a:latin typeface="Arial"/>
+              </a:rPr>
+              <a:t>Compliance</a:t>
+            </a:r>
+          </a:p>
+        </p:txBody>
+      </p:sp>
+      <p:sp>
+        <p:nvSpPr>
+          <p:cNvPr id="124" name="TextBox 123"/>
+          <p:cNvSpPr txBox="1"/>
+          <p:nvPr/>
+        </p:nvSpPr>
+        <p:spPr>
+          <a:xfrm>
+            <a:off x="7296150" y="4089400"/>
+            <a:ext cx="1905000" cy="165100"/>
+          </a:xfrm>
+          <a:prstGeom prst="rect">
+            <a:avLst/>
+          </a:prstGeom>
+          <a:noFill/>
+        </p:spPr>
+        <p:txBody>
+          <a:bodyPr wrap="square" lIns="0" rIns="0" tIns="0" bIns="0" anchor="ctr">
+            <a:spAutoFit/>
+          </a:bodyPr>
+          <a:lstStyle/>
+          <a:p>
+            <a:pPr algn="ctr"/>
+            <a:r>
+              <a:rPr sz="1200" b="0">
                 <a:solidFill>
                   <a:srgbClr val="9A9AA2"/>
                 </a:solidFill>
@@ -7583,23 +8385,25 @@
       </p:sp>
       <p:sp>
         <p:nvSpPr>
-          <p:cNvPr id="120" name="Rectangle 119"/>
+          <p:cNvPr id="125" name="Oval 124"/>
           <p:cNvSpPr/>
           <p:nvPr/>
         </p:nvSpPr>
         <p:spPr>
           <a:xfrm>
-            <a:off x="9328150" y="3429000"/>
-            <a:ext cx="279400" cy="25400"/>
-          </a:xfrm>
-          <a:prstGeom prst="rect">
+            <a:off x="10204450" y="3352800"/>
+            <a:ext cx="406400" cy="406400"/>
+          </a:xfrm>
+          <a:prstGeom prst="ellipse">
             <a:avLst/>
           </a:prstGeom>
           <a:solidFill>
-            <a:srgbClr val="9A9AA2"/>
+            <a:srgbClr val="0E0E11"/>
           </a:solidFill>
-          <a:ln>
-            <a:noFill/>
+          <a:ln w="19050">
+            <a:solidFill>
+              <a:srgbClr val="9A9AA2"/>
+            </a:solidFill>
           </a:ln>
           <a:effectLst/>
         </p:spPr>
@@ -7627,58 +8431,14 @@
       </p:sp>
       <p:sp>
         <p:nvSpPr>
-          <p:cNvPr id="121" name="Rectangle 120"/>
-          <p:cNvSpPr/>
-          <p:nvPr/>
-        </p:nvSpPr>
-        <p:spPr>
-          <a:xfrm>
-            <a:off x="9074150" y="3454400"/>
-            <a:ext cx="6350" cy="635000"/>
-          </a:xfrm>
-          <a:prstGeom prst="rect">
-            <a:avLst/>
-          </a:prstGeom>
-          <a:solidFill>
-            <a:srgbClr val="1F1F22"/>
-          </a:solidFill>
-          <a:ln>
-            <a:noFill/>
-          </a:ln>
-          <a:effectLst/>
-        </p:spPr>
-        <p:style>
-          <a:lnRef idx="1">
-            <a:schemeClr val="accent1"/>
-          </a:lnRef>
-          <a:fillRef idx="3">
-            <a:schemeClr val="accent1"/>
-          </a:fillRef>
-          <a:effectRef idx="2">
-            <a:schemeClr val="accent1"/>
-          </a:effectRef>
-          <a:fontRef idx="minor">
-            <a:schemeClr val="lt1"/>
-          </a:fontRef>
-        </p:style>
-        <p:txBody>
-          <a:bodyPr rtlCol="0" anchor="ctr"/>
-          <a:lstStyle/>
-          <a:p>
-            <a:pPr algn="ctr"/>
-          </a:p>
-        </p:txBody>
-      </p:sp>
-      <p:sp>
-        <p:nvSpPr>
-          <p:cNvPr id="122" name="TextBox 121"/>
-          <p:cNvSpPr txBox="1"/>
-          <p:nvPr/>
-        </p:nvSpPr>
-        <p:spPr>
-          <a:xfrm>
-            <a:off x="9328150" y="3619500"/>
-            <a:ext cx="2000250" cy="165100"/>
+          <p:cNvPr id="126" name="TextBox 125"/>
+          <p:cNvSpPr txBox="1"/>
+          <p:nvPr/>
+        </p:nvSpPr>
+        <p:spPr>
+          <a:xfrm>
+            <a:off x="10153650" y="3454400"/>
+            <a:ext cx="508000" cy="203200"/>
           </a:xfrm>
           <a:prstGeom prst="rect">
             <a:avLst/>
@@ -7691,29 +8451,29 @@
           </a:bodyPr>
           <a:lstStyle/>
           <a:p>
-            <a:pPr algn="l"/>
-            <a:r>
-              <a:rPr sz="1300" b="0">
-                <a:solidFill>
-                  <a:srgbClr val="ECECEE"/>
-                </a:solidFill>
-                <a:latin typeface="Arial"/>
-              </a:rPr>
-              <a:t>AI Memory</a:t>
-            </a:r>
-          </a:p>
-        </p:txBody>
-      </p:sp>
-      <p:sp>
-        <p:nvSpPr>
-          <p:cNvPr id="123" name="TextBox 122"/>
-          <p:cNvSpPr txBox="1"/>
-          <p:nvPr/>
-        </p:nvSpPr>
-        <p:spPr>
-          <a:xfrm>
-            <a:off x="9328150" y="3822700"/>
-            <a:ext cx="2000250" cy="139700"/>
+            <a:pPr algn="ctr"/>
+            <a:r>
+              <a:rPr sz="1300" b="0" spc="100">
+                <a:solidFill>
+                  <a:srgbClr val="9A9AA2"/>
+                </a:solidFill>
+                <a:latin typeface="Courier New"/>
+              </a:rPr>
+              <a:t>05</a:t>
+            </a:r>
+          </a:p>
+        </p:txBody>
+      </p:sp>
+      <p:sp>
+        <p:nvSpPr>
+          <p:cNvPr id="127" name="TextBox 126"/>
+          <p:cNvSpPr txBox="1"/>
+          <p:nvPr/>
+        </p:nvSpPr>
+        <p:spPr>
+          <a:xfrm>
+            <a:off x="9455150" y="3860800"/>
+            <a:ext cx="1905000" cy="215900"/>
           </a:xfrm>
           <a:prstGeom prst="rect">
             <a:avLst/>
@@ -7726,29 +8486,29 @@
           </a:bodyPr>
           <a:lstStyle/>
           <a:p>
-            <a:pPr algn="l"/>
-            <a:r>
-              <a:rPr sz="1000" b="0">
-                <a:solidFill>
-                  <a:srgbClr val="9A9AA2"/>
+            <a:pPr algn="ctr"/>
+            <a:r>
+              <a:rPr sz="1600" b="0">
+                <a:solidFill>
+                  <a:srgbClr val="ECECEE"/>
                 </a:solidFill>
                 <a:latin typeface="Arial"/>
               </a:rPr>
-              <a:t>patterns carried in</a:t>
-            </a:r>
-          </a:p>
-        </p:txBody>
-      </p:sp>
-      <p:sp>
-        <p:nvSpPr>
-          <p:cNvPr id="124" name="TextBox 123"/>
-          <p:cNvSpPr txBox="1"/>
-          <p:nvPr/>
-        </p:nvSpPr>
-        <p:spPr>
-          <a:xfrm>
-            <a:off x="698500" y="4445000"/>
-            <a:ext cx="5715000" cy="127000"/>
+              <a:t>AI Memory</a:t>
+            </a:r>
+          </a:p>
+        </p:txBody>
+      </p:sp>
+      <p:sp>
+        <p:nvSpPr>
+          <p:cNvPr id="128" name="TextBox 127"/>
+          <p:cNvSpPr txBox="1"/>
+          <p:nvPr/>
+        </p:nvSpPr>
+        <p:spPr>
+          <a:xfrm>
+            <a:off x="9455150" y="4089400"/>
+            <a:ext cx="1905000" cy="165100"/>
           </a:xfrm>
           <a:prstGeom prst="rect">
             <a:avLst/>
@@ -7761,22 +8521,66 @@
           </a:bodyPr>
           <a:lstStyle/>
           <a:p>
+            <a:pPr algn="ctr"/>
+            <a:r>
+              <a:rPr sz="1200" b="0">
+                <a:solidFill>
+                  <a:srgbClr val="9A9AA2"/>
+                </a:solidFill>
+                <a:latin typeface="Arial"/>
+              </a:rPr>
+              <a:t>patterns carried in</a:t>
+            </a:r>
+          </a:p>
+        </p:txBody>
+      </p:sp>
+      <p:sp>
+        <p:nvSpPr>
+          <p:cNvPr id="129" name="TextBox 128"/>
+          <p:cNvSpPr txBox="1"/>
+          <p:nvPr/>
+        </p:nvSpPr>
+        <p:spPr>
+          <a:xfrm>
+            <a:off x="698500" y="4699000"/>
+            <a:ext cx="7620000" cy="165100"/>
+          </a:xfrm>
+          <a:prstGeom prst="rect">
+            <a:avLst/>
+          </a:prstGeom>
+          <a:noFill/>
+        </p:spPr>
+        <p:txBody>
+          <a:bodyPr wrap="square" lIns="0" rIns="0" tIns="0" bIns="0" anchor="ctr">
+            <a:spAutoFit/>
+          </a:bodyPr>
+          <a:lstStyle/>
+          <a:p>
             <a:pPr algn="l"/>
             <a:r>
-              <a:rPr sz="1100" b="0" spc="300">
+              <a:rPr sz="1200" b="0">
+                <a:solidFill>
+                  <a:srgbClr val="FF6B3D"/>
+                </a:solidFill>
+                <a:latin typeface="Arial"/>
+              </a:rPr>
+              <a:t>◆</a:t>
+            </a:r>
+            <a:r>
+              <a:rPr sz="1100" b="0" spc="150">
                 <a:solidFill>
                   <a:srgbClr val="9A9AA2"/>
                 </a:solidFill>
                 <a:latin typeface="Courier New"/>
               </a:rPr>
-              <a:t>IDEA TO BUILD-READY PACKAGE</a:t>
+              <a:t>   human gate at every transition</a:t>
             </a:r>
           </a:p>
         </p:txBody>
       </p:sp>
       <p:pic>
         <p:nvPicPr>
-          <p:cNvPr id="125" name="Picture 124" descr="logo.png"/>
+          <p:cNvPr id="130" name="Picture 129" descr="logo.png"/>
           <p:cNvPicPr>
             <a:picLocks noChangeAspect="1"/>
           </p:cNvPicPr>
@@ -7861,8 +8665,8 @@
         </p:nvSpPr>
         <p:spPr>
           <a:xfrm>
-            <a:off x="698500" y="609600"/>
-            <a:ext cx="8890000" cy="317500"/>
+            <a:off x="698500" y="571500"/>
+            <a:ext cx="9906000" cy="393700"/>
           </a:xfrm>
           <a:prstGeom prst="rect">
             <a:avLst/>
@@ -7877,7 +8681,7 @@
           <a:p>
             <a:pPr algn="l"/>
             <a:r>
-              <a:rPr sz="2300" b="1">
+              <a:rPr sz="2800" b="1">
                 <a:solidFill>
                   <a:srgbClr val="ECECEE"/>
                 </a:solidFill>
@@ -7886,7 +8690,7 @@
               <a:t>Our moat.</a:t>
             </a:r>
             <a:r>
-              <a:rPr sz="2300" b="0">
+              <a:rPr sz="2800" b="0">
                 <a:solidFill>
                   <a:srgbClr val="9A9AA2"/>
                 </a:solidFill>
@@ -7984,7 +8788,7 @@
         </p:nvSpPr>
         <p:spPr>
           <a:xfrm>
-            <a:off x="698500" y="1714500"/>
+            <a:off x="698500" y="1498600"/>
             <a:ext cx="5715000" cy="317500"/>
           </a:xfrm>
           <a:prstGeom prst="rect">
@@ -8009,13 +8813,31 @@
               <a:t>Build</a:t>
             </a:r>
             <a:r>
+              <a:rPr sz="1600" b="0">
+                <a:solidFill>
+                  <a:srgbClr val="9A9AA2"/>
+                </a:solidFill>
+                <a:latin typeface="Arial"/>
+              </a:rPr>
+              <a:t>  ►  </a:t>
+            </a:r>
+            <a:r>
               <a:rPr sz="2200" b="0">
                 <a:solidFill>
+                  <a:srgbClr val="ECECEE"/>
+                </a:solidFill>
+                <a:latin typeface="Arial"/>
+              </a:rPr>
+              <a:t>Capture</a:t>
+            </a:r>
+            <a:r>
+              <a:rPr sz="1600" b="0">
+                <a:solidFill>
                   <a:srgbClr val="9A9AA2"/>
                 </a:solidFill>
                 <a:latin typeface="Arial"/>
               </a:rPr>
-              <a:t>   →   </a:t>
+              <a:t>  ►  </a:t>
             </a:r>
             <a:r>
               <a:rPr sz="2200" b="0">
@@ -8024,24 +8846,6 @@
                 </a:solidFill>
                 <a:latin typeface="Arial"/>
               </a:rPr>
-              <a:t>Capture</a:t>
-            </a:r>
-            <a:r>
-              <a:rPr sz="2200" b="0">
-                <a:solidFill>
-                  <a:srgbClr val="9A9AA2"/>
-                </a:solidFill>
-                <a:latin typeface="Arial"/>
-              </a:rPr>
-              <a:t>   →   </a:t>
-            </a:r>
-            <a:r>
-              <a:rPr sz="2200" b="0">
-                <a:solidFill>
-                  <a:srgbClr val="ECECEE"/>
-                </a:solidFill>
-                <a:latin typeface="Arial"/>
-              </a:rPr>
               <a:t>Reuse</a:t>
             </a:r>
           </a:p>
@@ -8055,8 +8859,8 @@
         </p:nvSpPr>
         <p:spPr>
           <a:xfrm>
-            <a:off x="698500" y="2209800"/>
-            <a:ext cx="6858000" cy="647700"/>
+            <a:off x="698500" y="1943100"/>
+            <a:ext cx="6858000" cy="787400"/>
           </a:xfrm>
           <a:prstGeom prst="rect">
             <a:avLst/>
@@ -8071,11 +8875,11 @@
           <a:p>
             <a:pPr algn="l">
               <a:lnSpc>
-                <a:spcPts val="1700"/>
+                <a:spcPts val="1900"/>
               </a:lnSpc>
             </a:pPr>
             <a:r>
-              <a:rPr sz="1200" b="0">
+              <a:rPr sz="1400" b="0">
                 <a:solidFill>
                   <a:srgbClr val="9A9AA2"/>
                 </a:solidFill>
@@ -8094,7 +8898,7 @@
         </p:nvSpPr>
         <p:spPr>
           <a:xfrm>
-            <a:off x="698500" y="3098800"/>
+            <a:off x="698500" y="2870200"/>
             <a:ext cx="10788650" cy="6350"/>
           </a:xfrm>
           <a:prstGeom prst="rect">
@@ -8138,8 +8942,8 @@
         </p:nvSpPr>
         <p:spPr>
           <a:xfrm>
-            <a:off x="698500" y="3314700"/>
-            <a:ext cx="4445000" cy="127000"/>
+            <a:off x="698500" y="3060700"/>
+            <a:ext cx="4445000" cy="177800"/>
           </a:xfrm>
           <a:prstGeom prst="rect">
             <a:avLst/>
@@ -8173,8 +8977,8 @@
         </p:nvSpPr>
         <p:spPr>
           <a:xfrm>
-            <a:off x="698500" y="3657600"/>
-            <a:ext cx="2921000" cy="584200"/>
+            <a:off x="698500" y="3365500"/>
+            <a:ext cx="2921000" cy="558800"/>
           </a:xfrm>
           <a:prstGeom prst="rect">
             <a:avLst/>
@@ -8208,8 +9012,8 @@
         </p:nvSpPr>
         <p:spPr>
           <a:xfrm>
-            <a:off x="698500" y="4368800"/>
-            <a:ext cx="2921000" cy="139700"/>
+            <a:off x="698500" y="3975100"/>
+            <a:ext cx="2921000" cy="190500"/>
           </a:xfrm>
           <a:prstGeom prst="rect">
             <a:avLst/>
@@ -8224,13 +9028,13 @@
           <a:p>
             <a:pPr algn="l"/>
             <a:r>
-              <a:rPr sz="1100" b="0" spc="250">
-                <a:solidFill>
-                  <a:srgbClr val="9A9AA2"/>
-                </a:solidFill>
-                <a:latin typeface="Courier New"/>
-              </a:rPr>
-              <a:t>VALIDATED PATTERNS</a:t>
+              <a:rPr sz="1400" b="0">
+                <a:solidFill>
+                  <a:srgbClr val="ECECEE"/>
+                </a:solidFill>
+                <a:latin typeface="Arial"/>
+              </a:rPr>
+              <a:t>validated patterns</a:t>
             </a:r>
           </a:p>
         </p:txBody>
@@ -8243,8 +9047,8 @@
         </p:nvSpPr>
         <p:spPr>
           <a:xfrm>
-            <a:off x="3746500" y="3657600"/>
-            <a:ext cx="2921000" cy="584200"/>
+            <a:off x="3746500" y="3365500"/>
+            <a:ext cx="3048000" cy="558800"/>
           </a:xfrm>
           <a:prstGeom prst="rect">
             <a:avLst/>
@@ -8278,8 +9082,8 @@
         </p:nvSpPr>
         <p:spPr>
           <a:xfrm>
-            <a:off x="3746500" y="4368800"/>
-            <a:ext cx="2921000" cy="139700"/>
+            <a:off x="3746500" y="3975100"/>
+            <a:ext cx="3048000" cy="190500"/>
           </a:xfrm>
           <a:prstGeom prst="rect">
             <a:avLst/>
@@ -8294,27 +9098,62 @@
           <a:p>
             <a:pPr algn="l"/>
             <a:r>
-              <a:rPr sz="1100" b="0" spc="250">
+              <a:rPr sz="1400" b="0">
+                <a:solidFill>
+                  <a:srgbClr val="ECECEE"/>
+                </a:solidFill>
+                <a:latin typeface="Arial"/>
+              </a:rPr>
+              <a:t>documented anti-patterns</a:t>
+            </a:r>
+          </a:p>
+        </p:txBody>
+      </p:sp>
+      <p:sp>
+        <p:nvSpPr>
+          <p:cNvPr id="112" name="TextBox 111"/>
+          <p:cNvSpPr txBox="1"/>
+          <p:nvPr/>
+        </p:nvSpPr>
+        <p:spPr>
+          <a:xfrm>
+            <a:off x="698500" y="4381500"/>
+            <a:ext cx="6096000" cy="177800"/>
+          </a:xfrm>
+          <a:prstGeom prst="rect">
+            <a:avLst/>
+          </a:prstGeom>
+          <a:noFill/>
+        </p:spPr>
+        <p:txBody>
+          <a:bodyPr wrap="square" lIns="0" rIns="0" tIns="0" bIns="0" anchor="ctr">
+            <a:spAutoFit/>
+          </a:bodyPr>
+          <a:lstStyle/>
+          <a:p>
+            <a:pPr algn="l"/>
+            <a:r>
+              <a:rPr sz="1200" b="0">
                 <a:solidFill>
                   <a:srgbClr val="9A9AA2"/>
                 </a:solidFill>
-                <a:latin typeface="Courier New"/>
-              </a:rPr>
-              <a:t>DOCUMENTED ANTI-PATTERNS</a:t>
-            </a:r>
-          </a:p>
-        </p:txBody>
-      </p:sp>
-      <p:sp>
-        <p:nvSpPr>
-          <p:cNvPr id="112" name="Rectangle 111"/>
+                <a:latin typeface="Arial"/>
+              </a:rPr>
+              <a:t>The LEARN loop from the chain is what fills this library.</a:t>
+            </a:r>
+          </a:p>
+        </p:txBody>
+      </p:sp>
+      <p:sp>
+        <p:nvSpPr>
+          <p:cNvPr id="113" name="Rectangle 112"/>
           <p:cNvSpPr/>
           <p:nvPr/>
         </p:nvSpPr>
         <p:spPr>
           <a:xfrm>
-            <a:off x="6934200" y="3429000"/>
-            <a:ext cx="6350" cy="2286000"/>
+            <a:off x="6934200" y="2984500"/>
+            <a:ext cx="6350" cy="2667000"/>
           </a:xfrm>
           <a:prstGeom prst="rect">
             <a:avLst/>
@@ -8351,14 +9190,14 @@
       </p:sp>
       <p:sp>
         <p:nvSpPr>
-          <p:cNvPr id="113" name="Rectangle 112"/>
+          <p:cNvPr id="114" name="Rectangle 113"/>
           <p:cNvSpPr/>
           <p:nvPr/>
         </p:nvSpPr>
         <p:spPr>
           <a:xfrm>
-            <a:off x="7239000" y="3429000"/>
-            <a:ext cx="4248150" cy="2286000"/>
+            <a:off x="7239000" y="2984500"/>
+            <a:ext cx="4248150" cy="2667000"/>
           </a:xfrm>
           <a:prstGeom prst="rect">
             <a:avLst/>
@@ -8395,13 +9234,13 @@
       </p:sp>
       <p:sp>
         <p:nvSpPr>
-          <p:cNvPr id="114" name="TextBox 113"/>
-          <p:cNvSpPr txBox="1"/>
-          <p:nvPr/>
-        </p:nvSpPr>
-        <p:spPr>
-          <a:xfrm>
-            <a:off x="7493000" y="3670300"/>
+          <p:cNvPr id="115" name="TextBox 114"/>
+          <p:cNvSpPr txBox="1"/>
+          <p:nvPr/>
+        </p:nvSpPr>
+        <p:spPr>
+          <a:xfrm>
+            <a:off x="7493000" y="3187700"/>
             <a:ext cx="3683000" cy="139700"/>
           </a:xfrm>
           <a:prstGeom prst="rect">
@@ -8430,14 +9269,14 @@
       </p:sp>
       <p:sp>
         <p:nvSpPr>
-          <p:cNvPr id="115" name="TextBox 114"/>
-          <p:cNvSpPr txBox="1"/>
-          <p:nvPr/>
-        </p:nvSpPr>
-        <p:spPr>
-          <a:xfrm>
-            <a:off x="7493000" y="4000500"/>
-            <a:ext cx="3683000" cy="152400"/>
+          <p:cNvPr id="116" name="TextBox 115"/>
+          <p:cNvSpPr txBox="1"/>
+          <p:nvPr/>
+        </p:nvSpPr>
+        <p:spPr>
+          <a:xfrm>
+            <a:off x="7493000" y="3479800"/>
+            <a:ext cx="3683000" cy="177800"/>
           </a:xfrm>
           <a:prstGeom prst="rect">
             <a:avLst/>
@@ -8452,9 +9291,9 @@
           <a:p>
             <a:pPr algn="l"/>
             <a:r>
-              <a:rPr sz="1200" b="1">
-                <a:solidFill>
-                  <a:srgbClr val="ECECEE"/>
+              <a:rPr sz="1300" b="1">
+                <a:solidFill>
+                  <a:srgbClr val="FF6B3D"/>
                 </a:solidFill>
                 <a:latin typeface="Arial"/>
               </a:rPr>
@@ -8465,14 +9304,14 @@
       </p:sp>
       <p:sp>
         <p:nvSpPr>
-          <p:cNvPr id="116" name="TextBox 115"/>
-          <p:cNvSpPr txBox="1"/>
-          <p:nvPr/>
-        </p:nvSpPr>
-        <p:spPr>
-          <a:xfrm>
-            <a:off x="7493000" y="4178300"/>
-            <a:ext cx="3683000" cy="330200"/>
+          <p:cNvPr id="117" name="TextBox 116"/>
+          <p:cNvSpPr txBox="1"/>
+          <p:nvPr/>
+        </p:nvSpPr>
+        <p:spPr>
+          <a:xfrm>
+            <a:off x="7493000" y="3683000"/>
+            <a:ext cx="3683000" cy="368300"/>
           </a:xfrm>
           <a:prstGeom prst="rect">
             <a:avLst/>
@@ -8487,11 +9326,11 @@
           <a:p>
             <a:pPr algn="l">
               <a:lnSpc>
-                <a:spcPts val="1300"/>
+                <a:spcPts val="1500"/>
               </a:lnSpc>
             </a:pPr>
             <a:r>
-              <a:rPr sz="1000" b="0">
+              <a:rPr sz="1100" b="0">
                 <a:solidFill>
                   <a:srgbClr val="9A9AA2"/>
                 </a:solidFill>
@@ -8504,14 +9343,14 @@
       </p:sp>
       <p:sp>
         <p:nvSpPr>
-          <p:cNvPr id="117" name="TextBox 116"/>
-          <p:cNvSpPr txBox="1"/>
-          <p:nvPr/>
-        </p:nvSpPr>
-        <p:spPr>
-          <a:xfrm>
-            <a:off x="7493000" y="4559300"/>
-            <a:ext cx="3683000" cy="152400"/>
+          <p:cNvPr id="118" name="TextBox 117"/>
+          <p:cNvSpPr txBox="1"/>
+          <p:nvPr/>
+        </p:nvSpPr>
+        <p:spPr>
+          <a:xfrm>
+            <a:off x="7493000" y="4165600"/>
+            <a:ext cx="3683000" cy="177800"/>
           </a:xfrm>
           <a:prstGeom prst="rect">
             <a:avLst/>
@@ -8526,9 +9365,9 @@
           <a:p>
             <a:pPr algn="l"/>
             <a:r>
-              <a:rPr sz="1200" b="1">
-                <a:solidFill>
-                  <a:srgbClr val="ECECEE"/>
+              <a:rPr sz="1300" b="1">
+                <a:solidFill>
+                  <a:srgbClr val="FF6B3D"/>
                 </a:solidFill>
                 <a:latin typeface="Arial"/>
               </a:rPr>
@@ -8539,14 +9378,14 @@
       </p:sp>
       <p:sp>
         <p:nvSpPr>
-          <p:cNvPr id="118" name="TextBox 117"/>
-          <p:cNvSpPr txBox="1"/>
-          <p:nvPr/>
-        </p:nvSpPr>
-        <p:spPr>
-          <a:xfrm>
-            <a:off x="7493000" y="4737100"/>
-            <a:ext cx="3683000" cy="330200"/>
+          <p:cNvPr id="119" name="TextBox 118"/>
+          <p:cNvSpPr txBox="1"/>
+          <p:nvPr/>
+        </p:nvSpPr>
+        <p:spPr>
+          <a:xfrm>
+            <a:off x="7493000" y="4368800"/>
+            <a:ext cx="3683000" cy="368300"/>
           </a:xfrm>
           <a:prstGeom prst="rect">
             <a:avLst/>
@@ -8561,11 +9400,11 @@
           <a:p>
             <a:pPr algn="l">
               <a:lnSpc>
-                <a:spcPts val="1300"/>
+                <a:spcPts val="1500"/>
               </a:lnSpc>
             </a:pPr>
             <a:r>
-              <a:rPr sz="1000" b="0">
+              <a:rPr sz="1100" b="0">
                 <a:solidFill>
                   <a:srgbClr val="9A9AA2"/>
                 </a:solidFill>
@@ -8578,14 +9417,14 @@
       </p:sp>
       <p:sp>
         <p:nvSpPr>
-          <p:cNvPr id="119" name="TextBox 118"/>
-          <p:cNvSpPr txBox="1"/>
-          <p:nvPr/>
-        </p:nvSpPr>
-        <p:spPr>
-          <a:xfrm>
-            <a:off x="7493000" y="5118100"/>
-            <a:ext cx="3683000" cy="152400"/>
+          <p:cNvPr id="120" name="TextBox 119"/>
+          <p:cNvSpPr txBox="1"/>
+          <p:nvPr/>
+        </p:nvSpPr>
+        <p:spPr>
+          <a:xfrm>
+            <a:off x="7493000" y="4851400"/>
+            <a:ext cx="3683000" cy="177800"/>
           </a:xfrm>
           <a:prstGeom prst="rect">
             <a:avLst/>
@@ -8600,9 +9439,9 @@
           <a:p>
             <a:pPr algn="l"/>
             <a:r>
-              <a:rPr sz="1200" b="1">
-                <a:solidFill>
-                  <a:srgbClr val="ECECEE"/>
+              <a:rPr sz="1300" b="1">
+                <a:solidFill>
+                  <a:srgbClr val="FF6B3D"/>
                 </a:solidFill>
                 <a:latin typeface="Arial"/>
               </a:rPr>
@@ -8613,14 +9452,14 @@
       </p:sp>
       <p:sp>
         <p:nvSpPr>
-          <p:cNvPr id="120" name="TextBox 119"/>
-          <p:cNvSpPr txBox="1"/>
-          <p:nvPr/>
-        </p:nvSpPr>
-        <p:spPr>
-          <a:xfrm>
-            <a:off x="7493000" y="5295900"/>
-            <a:ext cx="3683000" cy="330200"/>
+          <p:cNvPr id="121" name="TextBox 120"/>
+          <p:cNvSpPr txBox="1"/>
+          <p:nvPr/>
+        </p:nvSpPr>
+        <p:spPr>
+          <a:xfrm>
+            <a:off x="7493000" y="5054600"/>
+            <a:ext cx="3683000" cy="368300"/>
           </a:xfrm>
           <a:prstGeom prst="rect">
             <a:avLst/>
@@ -8635,11 +9474,11 @@
           <a:p>
             <a:pPr algn="l">
               <a:lnSpc>
-                <a:spcPts val="1300"/>
+                <a:spcPts val="1500"/>
               </a:lnSpc>
             </a:pPr>
             <a:r>
-              <a:rPr sz="1000" b="0">
+              <a:rPr sz="1100" b="0">
                 <a:solidFill>
                   <a:srgbClr val="9A9AA2"/>
                 </a:solidFill>
@@ -8652,7 +9491,7 @@
       </p:sp>
       <p:pic>
         <p:nvPicPr>
-          <p:cNvPr id="121" name="Picture 120" descr="logo.png"/>
+          <p:cNvPr id="122" name="Picture 121" descr="logo.png"/>
           <p:cNvPicPr>
             <a:picLocks noChangeAspect="1"/>
           </p:cNvPicPr>

--- a/deck/Pitch_Deck_AthenaRun_v2.pptx
+++ b/deck/Pitch_Deck_AthenaRun_v2.pptx
@@ -2806,7 +2806,7 @@
                 <a:solidFill>
                   <a:srgbClr val="FF6B3D"/>
                 </a:solidFill>
-                <a:latin typeface="Arial"/>
+                <a:latin typeface="Poppins"/>
               </a:rPr>
               <a:t>We build the chain, not the generator.</a:t>
             </a:r>
@@ -2880,20 +2880,20 @@
           <a:p>
             <a:pPr algn="l"/>
             <a:r>
-              <a:rPr sz="2800" b="1">
+              <a:rPr sz="2700" b="1">
                 <a:solidFill>
                   <a:srgbClr val="ECECEE"/>
                 </a:solidFill>
-                <a:latin typeface="Arial"/>
+                <a:latin typeface="Poppins"/>
               </a:rPr>
               <a:t>From package to running software.</a:t>
             </a:r>
             <a:r>
-              <a:rPr sz="2800" b="0">
+              <a:rPr sz="2700" b="0">
                 <a:solidFill>
                   <a:srgbClr val="9A9AA2"/>
                 </a:solidFill>
-                <a:latin typeface="Arial"/>
+                <a:latin typeface="Poppins"/>
               </a:rPr>
               <a:t> </a:t>
             </a:r>
@@ -2909,7 +2909,7 @@
         <p:spPr>
           <a:xfrm>
             <a:off x="8312150" y="622300"/>
-            <a:ext cx="3175000" cy="139700"/>
+            <a:ext cx="3175000" cy="152400"/>
           </a:xfrm>
           <a:prstGeom prst="rect">
             <a:avLst/>
@@ -3011,7 +3011,7 @@
                 <a:solidFill>
                   <a:srgbClr val="9A9AA2"/>
                 </a:solidFill>
-                <a:latin typeface="Arial"/>
+                <a:latin typeface="Poppins"/>
               </a:rPr>
               <a:t>The package is approved. </a:t>
             </a:r>
@@ -3020,7 +3020,7 @@
                 <a:solidFill>
                   <a:srgbClr val="ECECEE"/>
                 </a:solidFill>
-                <a:latin typeface="Arial"/>
+                <a:latin typeface="Poppins"/>
               </a:rPr>
               <a:t>Build through Operate</a:t>
             </a:r>
@@ -3029,7 +3029,7 @@
                 <a:solidFill>
                   <a:srgbClr val="9A9AA2"/>
                 </a:solidFill>
-                <a:latin typeface="Arial"/>
+                <a:latin typeface="Poppins"/>
               </a:rPr>
               <a:t> — from approved package to software running in production. Every decision that matters stays with a person.</a:t>
             </a:r>
@@ -3038,49 +3038,14 @@
       </p:sp>
       <p:sp>
         <p:nvSpPr>
-          <p:cNvPr id="7" name="TextBox 6"/>
-          <p:cNvSpPr txBox="1"/>
-          <p:nvPr/>
-        </p:nvSpPr>
-        <p:spPr>
-          <a:xfrm>
-            <a:off x="698500" y="2387600"/>
-            <a:ext cx="5715000" cy="177800"/>
-          </a:xfrm>
-          <a:prstGeom prst="rect">
-            <a:avLst/>
-          </a:prstGeom>
-          <a:noFill/>
-        </p:spPr>
-        <p:txBody>
-          <a:bodyPr wrap="square" lIns="0" rIns="0" tIns="0" bIns="0" anchor="ctr">
-            <a:spAutoFit/>
-          </a:bodyPr>
-          <a:lstStyle/>
-          <a:p>
-            <a:pPr algn="l"/>
-            <a:r>
-              <a:rPr sz="1100" b="0" spc="300">
-                <a:solidFill>
-                  <a:srgbClr val="9A9AA2"/>
-                </a:solidFill>
-                <a:latin typeface="Courier New"/>
-              </a:rPr>
-              <a:t>PACKAGE TO RUNNING SOFTWARE</a:t>
-            </a:r>
-          </a:p>
-        </p:txBody>
-      </p:sp>
-      <p:sp>
-        <p:nvSpPr>
-          <p:cNvPr id="8" name="Rectangle 7"/>
+          <p:cNvPr id="7" name="Rectangle 6"/>
           <p:cNvSpPr/>
           <p:nvPr/>
         </p:nvSpPr>
         <p:spPr>
           <a:xfrm>
-            <a:off x="889000" y="3556000"/>
-            <a:ext cx="2540000" cy="6350"/>
+            <a:off x="952500" y="2794000"/>
+            <a:ext cx="1905000" cy="6350"/>
           </a:xfrm>
           <a:prstGeom prst="rect">
             <a:avLst/>
@@ -3117,13 +3082,13 @@
       </p:sp>
       <p:sp>
         <p:nvSpPr>
-          <p:cNvPr id="9" name="Oval 8"/>
+          <p:cNvPr id="8" name="Oval 7"/>
           <p:cNvSpPr/>
           <p:nvPr/>
         </p:nvSpPr>
         <p:spPr>
           <a:xfrm>
-            <a:off x="844550" y="3511550"/>
+            <a:off x="908050" y="2749550"/>
             <a:ext cx="88900" cy="88900"/>
           </a:xfrm>
           <a:prstGeom prst="ellipse">
@@ -3163,13 +3128,13 @@
       </p:sp>
       <p:sp>
         <p:nvSpPr>
-          <p:cNvPr id="10" name="Oval 9"/>
+          <p:cNvPr id="9" name="Oval 8"/>
           <p:cNvSpPr/>
           <p:nvPr/>
         </p:nvSpPr>
         <p:spPr>
           <a:xfrm>
-            <a:off x="1479550" y="3511550"/>
+            <a:off x="1384300" y="2749550"/>
             <a:ext cx="88900" cy="88900"/>
           </a:xfrm>
           <a:prstGeom prst="ellipse">
@@ -3209,13 +3174,13 @@
       </p:sp>
       <p:sp>
         <p:nvSpPr>
-          <p:cNvPr id="11" name="Oval 10"/>
+          <p:cNvPr id="10" name="Oval 9"/>
           <p:cNvSpPr/>
           <p:nvPr/>
         </p:nvSpPr>
         <p:spPr>
           <a:xfrm>
-            <a:off x="2114550" y="3511550"/>
+            <a:off x="1860550" y="2749550"/>
             <a:ext cx="88900" cy="88900"/>
           </a:xfrm>
           <a:prstGeom prst="ellipse">
@@ -3255,13 +3220,13 @@
       </p:sp>
       <p:sp>
         <p:nvSpPr>
-          <p:cNvPr id="12" name="Oval 11"/>
+          <p:cNvPr id="11" name="Oval 10"/>
           <p:cNvSpPr/>
           <p:nvPr/>
         </p:nvSpPr>
         <p:spPr>
           <a:xfrm>
-            <a:off x="2749550" y="3511550"/>
+            <a:off x="2336800" y="2749550"/>
             <a:ext cx="88900" cy="88900"/>
           </a:xfrm>
           <a:prstGeom prst="ellipse">
@@ -3301,13 +3266,13 @@
       </p:sp>
       <p:sp>
         <p:nvSpPr>
-          <p:cNvPr id="13" name="Oval 12"/>
+          <p:cNvPr id="12" name="Oval 11"/>
           <p:cNvSpPr/>
           <p:nvPr/>
         </p:nvSpPr>
         <p:spPr>
           <a:xfrm>
-            <a:off x="3384550" y="3511550"/>
+            <a:off x="2813050" y="2749550"/>
             <a:ext cx="88900" cy="88900"/>
           </a:xfrm>
           <a:prstGeom prst="ellipse">
@@ -3347,14 +3312,14 @@
       </p:sp>
       <p:sp>
         <p:nvSpPr>
-          <p:cNvPr id="14" name="TextBox 13"/>
-          <p:cNvSpPr txBox="1"/>
-          <p:nvPr/>
-        </p:nvSpPr>
-        <p:spPr>
-          <a:xfrm>
-            <a:off x="698500" y="3784600"/>
-            <a:ext cx="2921000" cy="139700"/>
+          <p:cNvPr id="13" name="TextBox 12"/>
+          <p:cNvSpPr txBox="1"/>
+          <p:nvPr/>
+        </p:nvSpPr>
+        <p:spPr>
+          <a:xfrm>
+            <a:off x="698500" y="2997200"/>
+            <a:ext cx="2413000" cy="152400"/>
           </a:xfrm>
           <a:prstGeom prst="rect">
             <a:avLst/>
@@ -3382,14 +3347,14 @@
       </p:sp>
       <p:sp>
         <p:nvSpPr>
-          <p:cNvPr id="15" name="Rectangle 14"/>
+          <p:cNvPr id="14" name="Rectangle 13"/>
           <p:cNvSpPr/>
           <p:nvPr/>
         </p:nvSpPr>
         <p:spPr>
           <a:xfrm>
-            <a:off x="3429000" y="3556000"/>
-            <a:ext cx="381000" cy="6350"/>
+            <a:off x="3302000" y="2794000"/>
+            <a:ext cx="8185150" cy="6350"/>
           </a:xfrm>
           <a:prstGeom prst="rect">
             <a:avLst/>
@@ -3426,14 +3391,819 @@
       </p:sp>
       <p:sp>
         <p:nvSpPr>
-          <p:cNvPr id="16" name="Rectangle 15"/>
+          <p:cNvPr id="15" name="Oval 14"/>
           <p:cNvSpPr/>
           <p:nvPr/>
         </p:nvSpPr>
         <p:spPr>
           <a:xfrm>
-            <a:off x="3810000" y="3556000"/>
-            <a:ext cx="7677150" cy="6350"/>
+            <a:off x="4419600" y="2552700"/>
+            <a:ext cx="482600" cy="482600"/>
+          </a:xfrm>
+          <a:prstGeom prst="ellipse">
+            <a:avLst/>
+          </a:prstGeom>
+          <a:solidFill>
+            <a:srgbClr val="0E0E11"/>
+          </a:solidFill>
+          <a:ln w="15875">
+            <a:solidFill>
+              <a:srgbClr val="9A9AA2"/>
+            </a:solidFill>
+          </a:ln>
+          <a:effectLst/>
+        </p:spPr>
+        <p:style>
+          <a:lnRef idx="1">
+            <a:schemeClr val="accent1"/>
+          </a:lnRef>
+          <a:fillRef idx="3">
+            <a:schemeClr val="accent1"/>
+          </a:fillRef>
+          <a:effectRef idx="2">
+            <a:schemeClr val="accent1"/>
+          </a:effectRef>
+          <a:fontRef idx="minor">
+            <a:schemeClr val="lt1"/>
+          </a:fontRef>
+        </p:style>
+        <p:txBody>
+          <a:bodyPr rtlCol="0" anchor="ctr"/>
+          <a:lstStyle/>
+          <a:p>
+            <a:pPr algn="ctr"/>
+          </a:p>
+        </p:txBody>
+      </p:sp>
+      <p:sp>
+        <p:nvSpPr>
+          <p:cNvPr id="16" name="TextBox 15"/>
+          <p:cNvSpPr txBox="1"/>
+          <p:nvPr/>
+        </p:nvSpPr>
+        <p:spPr>
+          <a:xfrm>
+            <a:off x="4406900" y="2698750"/>
+            <a:ext cx="508000" cy="190500"/>
+          </a:xfrm>
+          <a:prstGeom prst="rect">
+            <a:avLst/>
+          </a:prstGeom>
+          <a:noFill/>
+        </p:spPr>
+        <p:txBody>
+          <a:bodyPr wrap="square" lIns="0" rIns="0" tIns="0" bIns="0" anchor="ctr">
+            <a:spAutoFit/>
+          </a:bodyPr>
+          <a:lstStyle/>
+          <a:p>
+            <a:pPr algn="ctr"/>
+            <a:r>
+              <a:rPr sz="1300" b="0" spc="80">
+                <a:solidFill>
+                  <a:srgbClr val="9A9AA2"/>
+                </a:solidFill>
+                <a:latin typeface="Courier New"/>
+              </a:rPr>
+              <a:t>06</a:t>
+            </a:r>
+          </a:p>
+        </p:txBody>
+      </p:sp>
+      <p:sp>
+        <p:nvSpPr>
+          <p:cNvPr id="17" name="Diamond 16"/>
+          <p:cNvSpPr/>
+          <p:nvPr/>
+        </p:nvSpPr>
+        <p:spPr>
+          <a:xfrm>
+            <a:off x="5975350" y="2743200"/>
+            <a:ext cx="95250" cy="95250"/>
+          </a:xfrm>
+          <a:prstGeom prst="diamond">
+            <a:avLst/>
+          </a:prstGeom>
+          <a:solidFill>
+            <a:srgbClr val="FF6B3D"/>
+          </a:solidFill>
+          <a:ln>
+            <a:noFill/>
+          </a:ln>
+          <a:effectLst/>
+        </p:spPr>
+        <p:style>
+          <a:lnRef idx="1">
+            <a:schemeClr val="accent1"/>
+          </a:lnRef>
+          <a:fillRef idx="3">
+            <a:schemeClr val="accent1"/>
+          </a:fillRef>
+          <a:effectRef idx="2">
+            <a:schemeClr val="accent1"/>
+          </a:effectRef>
+          <a:fontRef idx="minor">
+            <a:schemeClr val="lt1"/>
+          </a:fontRef>
+        </p:style>
+        <p:txBody>
+          <a:bodyPr rtlCol="0" anchor="ctr"/>
+          <a:lstStyle/>
+          <a:p>
+            <a:pPr algn="ctr"/>
+          </a:p>
+        </p:txBody>
+      </p:sp>
+      <p:sp>
+        <p:nvSpPr>
+          <p:cNvPr id="18" name="Oval 17"/>
+          <p:cNvSpPr/>
+          <p:nvPr/>
+        </p:nvSpPr>
+        <p:spPr>
+          <a:xfrm>
+            <a:off x="7150100" y="2552700"/>
+            <a:ext cx="482600" cy="482600"/>
+          </a:xfrm>
+          <a:prstGeom prst="ellipse">
+            <a:avLst/>
+          </a:prstGeom>
+          <a:solidFill>
+            <a:srgbClr val="0E0E11"/>
+          </a:solidFill>
+          <a:ln w="15875">
+            <a:solidFill>
+              <a:srgbClr val="9A9AA2"/>
+            </a:solidFill>
+          </a:ln>
+          <a:effectLst/>
+        </p:spPr>
+        <p:style>
+          <a:lnRef idx="1">
+            <a:schemeClr val="accent1"/>
+          </a:lnRef>
+          <a:fillRef idx="3">
+            <a:schemeClr val="accent1"/>
+          </a:fillRef>
+          <a:effectRef idx="2">
+            <a:schemeClr val="accent1"/>
+          </a:effectRef>
+          <a:fontRef idx="minor">
+            <a:schemeClr val="lt1"/>
+          </a:fontRef>
+        </p:style>
+        <p:txBody>
+          <a:bodyPr rtlCol="0" anchor="ctr"/>
+          <a:lstStyle/>
+          <a:p>
+            <a:pPr algn="ctr"/>
+          </a:p>
+        </p:txBody>
+      </p:sp>
+      <p:sp>
+        <p:nvSpPr>
+          <p:cNvPr id="19" name="TextBox 18"/>
+          <p:cNvSpPr txBox="1"/>
+          <p:nvPr/>
+        </p:nvSpPr>
+        <p:spPr>
+          <a:xfrm>
+            <a:off x="7137400" y="2698750"/>
+            <a:ext cx="508000" cy="190500"/>
+          </a:xfrm>
+          <a:prstGeom prst="rect">
+            <a:avLst/>
+          </a:prstGeom>
+          <a:noFill/>
+        </p:spPr>
+        <p:txBody>
+          <a:bodyPr wrap="square" lIns="0" rIns="0" tIns="0" bIns="0" anchor="ctr">
+            <a:spAutoFit/>
+          </a:bodyPr>
+          <a:lstStyle/>
+          <a:p>
+            <a:pPr algn="ctr"/>
+            <a:r>
+              <a:rPr sz="1300" b="0" spc="80">
+                <a:solidFill>
+                  <a:srgbClr val="9A9AA2"/>
+                </a:solidFill>
+                <a:latin typeface="Courier New"/>
+              </a:rPr>
+              <a:t>07</a:t>
+            </a:r>
+          </a:p>
+        </p:txBody>
+      </p:sp>
+      <p:sp>
+        <p:nvSpPr>
+          <p:cNvPr id="20" name="Diamond 19"/>
+          <p:cNvSpPr/>
+          <p:nvPr/>
+        </p:nvSpPr>
+        <p:spPr>
+          <a:xfrm>
+            <a:off x="8705850" y="2743200"/>
+            <a:ext cx="95250" cy="95250"/>
+          </a:xfrm>
+          <a:prstGeom prst="diamond">
+            <a:avLst/>
+          </a:prstGeom>
+          <a:solidFill>
+            <a:srgbClr val="FF6B3D"/>
+          </a:solidFill>
+          <a:ln>
+            <a:noFill/>
+          </a:ln>
+          <a:effectLst/>
+        </p:spPr>
+        <p:style>
+          <a:lnRef idx="1">
+            <a:schemeClr val="accent1"/>
+          </a:lnRef>
+          <a:fillRef idx="3">
+            <a:schemeClr val="accent1"/>
+          </a:fillRef>
+          <a:effectRef idx="2">
+            <a:schemeClr val="accent1"/>
+          </a:effectRef>
+          <a:fontRef idx="minor">
+            <a:schemeClr val="lt1"/>
+          </a:fontRef>
+        </p:style>
+        <p:txBody>
+          <a:bodyPr rtlCol="0" anchor="ctr"/>
+          <a:lstStyle/>
+          <a:p>
+            <a:pPr algn="ctr"/>
+          </a:p>
+        </p:txBody>
+      </p:sp>
+      <p:sp>
+        <p:nvSpPr>
+          <p:cNvPr id="21" name="Oval 20"/>
+          <p:cNvSpPr/>
+          <p:nvPr/>
+        </p:nvSpPr>
+        <p:spPr>
+          <a:xfrm>
+            <a:off x="9880600" y="2552700"/>
+            <a:ext cx="482600" cy="482600"/>
+          </a:xfrm>
+          <a:prstGeom prst="ellipse">
+            <a:avLst/>
+          </a:prstGeom>
+          <a:solidFill>
+            <a:srgbClr val="0E0E11"/>
+          </a:solidFill>
+          <a:ln w="15875">
+            <a:solidFill>
+              <a:srgbClr val="9A9AA2"/>
+            </a:solidFill>
+          </a:ln>
+          <a:effectLst/>
+        </p:spPr>
+        <p:style>
+          <a:lnRef idx="1">
+            <a:schemeClr val="accent1"/>
+          </a:lnRef>
+          <a:fillRef idx="3">
+            <a:schemeClr val="accent1"/>
+          </a:fillRef>
+          <a:effectRef idx="2">
+            <a:schemeClr val="accent1"/>
+          </a:effectRef>
+          <a:fontRef idx="minor">
+            <a:schemeClr val="lt1"/>
+          </a:fontRef>
+        </p:style>
+        <p:txBody>
+          <a:bodyPr rtlCol="0" anchor="ctr"/>
+          <a:lstStyle/>
+          <a:p>
+            <a:pPr algn="ctr"/>
+          </a:p>
+        </p:txBody>
+      </p:sp>
+      <p:sp>
+        <p:nvSpPr>
+          <p:cNvPr id="22" name="TextBox 21"/>
+          <p:cNvSpPr txBox="1"/>
+          <p:nvPr/>
+        </p:nvSpPr>
+        <p:spPr>
+          <a:xfrm>
+            <a:off x="9867900" y="2698750"/>
+            <a:ext cx="508000" cy="190500"/>
+          </a:xfrm>
+          <a:prstGeom prst="rect">
+            <a:avLst/>
+          </a:prstGeom>
+          <a:noFill/>
+        </p:spPr>
+        <p:txBody>
+          <a:bodyPr wrap="square" lIns="0" rIns="0" tIns="0" bIns="0" anchor="ctr">
+            <a:spAutoFit/>
+          </a:bodyPr>
+          <a:lstStyle/>
+          <a:p>
+            <a:pPr algn="ctr"/>
+            <a:r>
+              <a:rPr sz="1300" b="0" spc="80">
+                <a:solidFill>
+                  <a:srgbClr val="9A9AA2"/>
+                </a:solidFill>
+                <a:latin typeface="Courier New"/>
+              </a:rPr>
+              <a:t>08</a:t>
+            </a:r>
+          </a:p>
+        </p:txBody>
+      </p:sp>
+      <p:sp>
+        <p:nvSpPr>
+          <p:cNvPr id="23" name="TextBox 22"/>
+          <p:cNvSpPr txBox="1"/>
+          <p:nvPr/>
+        </p:nvSpPr>
+        <p:spPr>
+          <a:xfrm>
+            <a:off x="3644900" y="3175000"/>
+            <a:ext cx="2032000" cy="215900"/>
+          </a:xfrm>
+          <a:prstGeom prst="rect">
+            <a:avLst/>
+          </a:prstGeom>
+          <a:noFill/>
+        </p:spPr>
+        <p:txBody>
+          <a:bodyPr wrap="square" lIns="0" rIns="0" tIns="0" bIns="0" anchor="ctr">
+            <a:spAutoFit/>
+          </a:bodyPr>
+          <a:lstStyle/>
+          <a:p>
+            <a:pPr algn="ctr"/>
+            <a:r>
+              <a:rPr sz="1700" b="0">
+                <a:solidFill>
+                  <a:srgbClr val="ECECEE"/>
+                </a:solidFill>
+                <a:latin typeface="Poppins"/>
+              </a:rPr>
+              <a:t>Build</a:t>
+            </a:r>
+          </a:p>
+        </p:txBody>
+      </p:sp>
+      <p:sp>
+        <p:nvSpPr>
+          <p:cNvPr id="24" name="TextBox 23"/>
+          <p:cNvSpPr txBox="1"/>
+          <p:nvPr/>
+        </p:nvSpPr>
+        <p:spPr>
+          <a:xfrm>
+            <a:off x="3644900" y="3403600"/>
+            <a:ext cx="2032000" cy="165100"/>
+          </a:xfrm>
+          <a:prstGeom prst="rect">
+            <a:avLst/>
+          </a:prstGeom>
+          <a:noFill/>
+        </p:spPr>
+        <p:txBody>
+          <a:bodyPr wrap="square" lIns="0" rIns="0" tIns="0" bIns="0" anchor="ctr">
+            <a:spAutoFit/>
+          </a:bodyPr>
+          <a:lstStyle/>
+          <a:p>
+            <a:pPr algn="ctr"/>
+            <a:r>
+              <a:rPr sz="1200" b="0">
+                <a:solidFill>
+                  <a:srgbClr val="9A9AA2"/>
+                </a:solidFill>
+                <a:latin typeface="Poppins"/>
+              </a:rPr>
+              <a:t>code + review</a:t>
+            </a:r>
+          </a:p>
+        </p:txBody>
+      </p:sp>
+      <p:sp>
+        <p:nvSpPr>
+          <p:cNvPr id="25" name="TextBox 24"/>
+          <p:cNvSpPr txBox="1"/>
+          <p:nvPr/>
+        </p:nvSpPr>
+        <p:spPr>
+          <a:xfrm>
+            <a:off x="6375400" y="3175000"/>
+            <a:ext cx="2032000" cy="215900"/>
+          </a:xfrm>
+          <a:prstGeom prst="rect">
+            <a:avLst/>
+          </a:prstGeom>
+          <a:noFill/>
+        </p:spPr>
+        <p:txBody>
+          <a:bodyPr wrap="square" lIns="0" rIns="0" tIns="0" bIns="0" anchor="ctr">
+            <a:spAutoFit/>
+          </a:bodyPr>
+          <a:lstStyle/>
+          <a:p>
+            <a:pPr algn="ctr"/>
+            <a:r>
+              <a:rPr sz="1700" b="0">
+                <a:solidFill>
+                  <a:srgbClr val="ECECEE"/>
+                </a:solidFill>
+                <a:latin typeface="Poppins"/>
+              </a:rPr>
+              <a:t>Release</a:t>
+            </a:r>
+          </a:p>
+        </p:txBody>
+      </p:sp>
+      <p:sp>
+        <p:nvSpPr>
+          <p:cNvPr id="26" name="TextBox 25"/>
+          <p:cNvSpPr txBox="1"/>
+          <p:nvPr/>
+        </p:nvSpPr>
+        <p:spPr>
+          <a:xfrm>
+            <a:off x="6375400" y="3403600"/>
+            <a:ext cx="2032000" cy="165100"/>
+          </a:xfrm>
+          <a:prstGeom prst="rect">
+            <a:avLst/>
+          </a:prstGeom>
+          <a:noFill/>
+        </p:spPr>
+        <p:txBody>
+          <a:bodyPr wrap="square" lIns="0" rIns="0" tIns="0" bIns="0" anchor="ctr">
+            <a:spAutoFit/>
+          </a:bodyPr>
+          <a:lstStyle/>
+          <a:p>
+            <a:pPr algn="ctr"/>
+            <a:r>
+              <a:rPr sz="1200" b="0">
+                <a:solidFill>
+                  <a:srgbClr val="9A9AA2"/>
+                </a:solidFill>
+                <a:latin typeface="Poppins"/>
+              </a:rPr>
+              <a:t>human approval</a:t>
+            </a:r>
+          </a:p>
+        </p:txBody>
+      </p:sp>
+      <p:sp>
+        <p:nvSpPr>
+          <p:cNvPr id="27" name="TextBox 26"/>
+          <p:cNvSpPr txBox="1"/>
+          <p:nvPr/>
+        </p:nvSpPr>
+        <p:spPr>
+          <a:xfrm>
+            <a:off x="9105900" y="3175000"/>
+            <a:ext cx="2032000" cy="215900"/>
+          </a:xfrm>
+          <a:prstGeom prst="rect">
+            <a:avLst/>
+          </a:prstGeom>
+          <a:noFill/>
+        </p:spPr>
+        <p:txBody>
+          <a:bodyPr wrap="square" lIns="0" rIns="0" tIns="0" bIns="0" anchor="ctr">
+            <a:spAutoFit/>
+          </a:bodyPr>
+          <a:lstStyle/>
+          <a:p>
+            <a:pPr algn="ctr"/>
+            <a:r>
+              <a:rPr sz="1700" b="0">
+                <a:solidFill>
+                  <a:srgbClr val="ECECEE"/>
+                </a:solidFill>
+                <a:latin typeface="Poppins"/>
+              </a:rPr>
+              <a:t>Operate</a:t>
+            </a:r>
+          </a:p>
+        </p:txBody>
+      </p:sp>
+      <p:sp>
+        <p:nvSpPr>
+          <p:cNvPr id="28" name="TextBox 27"/>
+          <p:cNvSpPr txBox="1"/>
+          <p:nvPr/>
+        </p:nvSpPr>
+        <p:spPr>
+          <a:xfrm>
+            <a:off x="9105900" y="3403600"/>
+            <a:ext cx="2032000" cy="165100"/>
+          </a:xfrm>
+          <a:prstGeom prst="rect">
+            <a:avLst/>
+          </a:prstGeom>
+          <a:noFill/>
+        </p:spPr>
+        <p:txBody>
+          <a:bodyPr wrap="square" lIns="0" rIns="0" tIns="0" bIns="0" anchor="ctr">
+            <a:spAutoFit/>
+          </a:bodyPr>
+          <a:lstStyle/>
+          <a:p>
+            <a:pPr algn="ctr"/>
+            <a:r>
+              <a:rPr sz="1200" b="0">
+                <a:solidFill>
+                  <a:srgbClr val="9A9AA2"/>
+                </a:solidFill>
+                <a:latin typeface="Poppins"/>
+              </a:rPr>
+              <a:t>monitoring</a:t>
+            </a:r>
+          </a:p>
+        </p:txBody>
+      </p:sp>
+      <p:sp>
+        <p:nvSpPr>
+          <p:cNvPr id="29" name="Diamond 28"/>
+          <p:cNvSpPr/>
+          <p:nvPr/>
+        </p:nvSpPr>
+        <p:spPr>
+          <a:xfrm>
+            <a:off x="3302000" y="2743200"/>
+            <a:ext cx="95250" cy="95250"/>
+          </a:xfrm>
+          <a:prstGeom prst="diamond">
+            <a:avLst/>
+          </a:prstGeom>
+          <a:solidFill>
+            <a:srgbClr val="FF6B3D"/>
+          </a:solidFill>
+          <a:ln>
+            <a:noFill/>
+          </a:ln>
+          <a:effectLst/>
+        </p:spPr>
+        <p:style>
+          <a:lnRef idx="1">
+            <a:schemeClr val="accent1"/>
+          </a:lnRef>
+          <a:fillRef idx="3">
+            <a:schemeClr val="accent1"/>
+          </a:fillRef>
+          <a:effectRef idx="2">
+            <a:schemeClr val="accent1"/>
+          </a:effectRef>
+          <a:fontRef idx="minor">
+            <a:schemeClr val="lt1"/>
+          </a:fontRef>
+        </p:style>
+        <p:txBody>
+          <a:bodyPr rtlCol="0" anchor="ctr"/>
+          <a:lstStyle/>
+          <a:p>
+            <a:pPr algn="ctr"/>
+          </a:p>
+        </p:txBody>
+      </p:sp>
+      <p:sp>
+        <p:nvSpPr>
+          <p:cNvPr id="30" name="Rectangle 29"/>
+          <p:cNvSpPr/>
+          <p:nvPr/>
+        </p:nvSpPr>
+        <p:spPr>
+          <a:xfrm>
+            <a:off x="10121900" y="3657600"/>
+            <a:ext cx="12700" cy="381000"/>
+          </a:xfrm>
+          <a:prstGeom prst="rect">
+            <a:avLst/>
+          </a:prstGeom>
+          <a:solidFill>
+            <a:srgbClr val="FF6B3D"/>
+          </a:solidFill>
+          <a:ln>
+            <a:noFill/>
+          </a:ln>
+          <a:effectLst/>
+        </p:spPr>
+        <p:style>
+          <a:lnRef idx="1">
+            <a:schemeClr val="accent1"/>
+          </a:lnRef>
+          <a:fillRef idx="3">
+            <a:schemeClr val="accent1"/>
+          </a:fillRef>
+          <a:effectRef idx="2">
+            <a:schemeClr val="accent1"/>
+          </a:effectRef>
+          <a:fontRef idx="minor">
+            <a:schemeClr val="lt1"/>
+          </a:fontRef>
+        </p:style>
+        <p:txBody>
+          <a:bodyPr rtlCol="0" anchor="ctr"/>
+          <a:lstStyle/>
+          <a:p>
+            <a:pPr algn="ctr"/>
+          </a:p>
+        </p:txBody>
+      </p:sp>
+      <p:sp>
+        <p:nvSpPr>
+          <p:cNvPr id="31" name="Rectangle 30"/>
+          <p:cNvSpPr/>
+          <p:nvPr/>
+        </p:nvSpPr>
+        <p:spPr>
+          <a:xfrm>
+            <a:off x="1905000" y="4038600"/>
+            <a:ext cx="8216900" cy="12700"/>
+          </a:xfrm>
+          <a:prstGeom prst="rect">
+            <a:avLst/>
+          </a:prstGeom>
+          <a:solidFill>
+            <a:srgbClr val="FF6B3D"/>
+          </a:solidFill>
+          <a:ln>
+            <a:noFill/>
+          </a:ln>
+          <a:effectLst/>
+        </p:spPr>
+        <p:style>
+          <a:lnRef idx="1">
+            <a:schemeClr val="accent1"/>
+          </a:lnRef>
+          <a:fillRef idx="3">
+            <a:schemeClr val="accent1"/>
+          </a:fillRef>
+          <a:effectRef idx="2">
+            <a:schemeClr val="accent1"/>
+          </a:effectRef>
+          <a:fontRef idx="minor">
+            <a:schemeClr val="lt1"/>
+          </a:fontRef>
+        </p:style>
+        <p:txBody>
+          <a:bodyPr rtlCol="0" anchor="ctr"/>
+          <a:lstStyle/>
+          <a:p>
+            <a:pPr algn="ctr"/>
+          </a:p>
+        </p:txBody>
+      </p:sp>
+      <p:sp>
+        <p:nvSpPr>
+          <p:cNvPr id="32" name="Rectangle 31"/>
+          <p:cNvSpPr/>
+          <p:nvPr/>
+        </p:nvSpPr>
+        <p:spPr>
+          <a:xfrm>
+            <a:off x="1905000" y="3352800"/>
+            <a:ext cx="12700" cy="685800"/>
+          </a:xfrm>
+          <a:prstGeom prst="rect">
+            <a:avLst/>
+          </a:prstGeom>
+          <a:solidFill>
+            <a:srgbClr val="FF6B3D"/>
+          </a:solidFill>
+          <a:ln>
+            <a:noFill/>
+          </a:ln>
+          <a:effectLst/>
+        </p:spPr>
+        <p:style>
+          <a:lnRef idx="1">
+            <a:schemeClr val="accent1"/>
+          </a:lnRef>
+          <a:fillRef idx="3">
+            <a:schemeClr val="accent1"/>
+          </a:fillRef>
+          <a:effectRef idx="2">
+            <a:schemeClr val="accent1"/>
+          </a:effectRef>
+          <a:fontRef idx="minor">
+            <a:schemeClr val="lt1"/>
+          </a:fontRef>
+        </p:style>
+        <p:txBody>
+          <a:bodyPr rtlCol="0" anchor="ctr"/>
+          <a:lstStyle/>
+          <a:p>
+            <a:pPr algn="ctr"/>
+          </a:p>
+        </p:txBody>
+      </p:sp>
+      <p:sp>
+        <p:nvSpPr>
+          <p:cNvPr id="33" name="Isosceles Triangle 32"/>
+          <p:cNvSpPr/>
+          <p:nvPr/>
+        </p:nvSpPr>
+        <p:spPr>
+          <a:xfrm>
+            <a:off x="1854200" y="3225800"/>
+            <a:ext cx="114300" cy="139700"/>
+          </a:xfrm>
+          <a:prstGeom prst="triangle">
+            <a:avLst/>
+          </a:prstGeom>
+          <a:solidFill>
+            <a:srgbClr val="FF6B3D"/>
+          </a:solidFill>
+          <a:ln>
+            <a:noFill/>
+          </a:ln>
+          <a:effectLst/>
+        </p:spPr>
+        <p:style>
+          <a:lnRef idx="1">
+            <a:schemeClr val="accent1"/>
+          </a:lnRef>
+          <a:fillRef idx="3">
+            <a:schemeClr val="accent1"/>
+          </a:fillRef>
+          <a:effectRef idx="2">
+            <a:schemeClr val="accent1"/>
+          </a:effectRef>
+          <a:fontRef idx="minor">
+            <a:schemeClr val="lt1"/>
+          </a:fontRef>
+        </p:style>
+        <p:txBody>
+          <a:bodyPr rtlCol="0" anchor="ctr"/>
+          <a:lstStyle/>
+          <a:p>
+            <a:pPr algn="ctr"/>
+          </a:p>
+        </p:txBody>
+      </p:sp>
+      <p:sp>
+        <p:nvSpPr>
+          <p:cNvPr id="34" name="TextBox 33"/>
+          <p:cNvSpPr txBox="1"/>
+          <p:nvPr/>
+        </p:nvSpPr>
+        <p:spPr>
+          <a:xfrm>
+            <a:off x="2159000" y="4127500"/>
+            <a:ext cx="6985000" cy="165100"/>
+          </a:xfrm>
+          <a:prstGeom prst="rect">
+            <a:avLst/>
+          </a:prstGeom>
+          <a:noFill/>
+        </p:spPr>
+        <p:txBody>
+          <a:bodyPr wrap="square" lIns="0" rIns="0" tIns="0" bIns="0" anchor="ctr">
+            <a:spAutoFit/>
+          </a:bodyPr>
+          <a:lstStyle/>
+          <a:p>
+            <a:pPr algn="l"/>
+            <a:r>
+              <a:rPr sz="1100" b="0" spc="200">
+                <a:solidFill>
+                  <a:srgbClr val="FF6B3D"/>
+                </a:solidFill>
+                <a:latin typeface="Courier New"/>
+              </a:rPr>
+              <a:t>LEARN</a:t>
+            </a:r>
+            <a:r>
+              <a:rPr sz="1100" b="0" spc="150">
+                <a:solidFill>
+                  <a:srgbClr val="9A9AA2"/>
+                </a:solidFill>
+                <a:latin typeface="Courier New"/>
+              </a:rPr>
+              <a:t>  ·  validated patterns from every build carry into the next</a:t>
+            </a:r>
+          </a:p>
+        </p:txBody>
+      </p:sp>
+      <p:sp>
+        <p:nvSpPr>
+          <p:cNvPr id="35" name="Rectangle 34"/>
+          <p:cNvSpPr/>
+          <p:nvPr/>
+        </p:nvSpPr>
+        <p:spPr>
+          <a:xfrm>
+            <a:off x="698500" y="4483100"/>
+            <a:ext cx="10788650" cy="6350"/>
           </a:xfrm>
           <a:prstGeom prst="rect">
             <a:avLst/>
@@ -3470,192 +4240,14 @@
       </p:sp>
       <p:sp>
         <p:nvSpPr>
-          <p:cNvPr id="17" name="Diamond 16"/>
-          <p:cNvSpPr/>
-          <p:nvPr/>
-        </p:nvSpPr>
-        <p:spPr>
-          <a:xfrm>
-            <a:off x="3810000" y="3505200"/>
-            <a:ext cx="101600" cy="101600"/>
-          </a:xfrm>
-          <a:prstGeom prst="diamond">
-            <a:avLst/>
-          </a:prstGeom>
-          <a:solidFill>
-            <a:srgbClr val="FF6B3D"/>
-          </a:solidFill>
-          <a:ln>
-            <a:noFill/>
-          </a:ln>
-          <a:effectLst/>
-        </p:spPr>
-        <p:style>
-          <a:lnRef idx="1">
-            <a:schemeClr val="accent1"/>
-          </a:lnRef>
-          <a:fillRef idx="3">
-            <a:schemeClr val="accent1"/>
-          </a:fillRef>
-          <a:effectRef idx="2">
-            <a:schemeClr val="accent1"/>
-          </a:effectRef>
-          <a:fontRef idx="minor">
-            <a:schemeClr val="lt1"/>
-          </a:fontRef>
-        </p:style>
-        <p:txBody>
-          <a:bodyPr rtlCol="0" anchor="ctr"/>
-          <a:lstStyle/>
-          <a:p>
-            <a:pPr algn="ctr"/>
-          </a:p>
-        </p:txBody>
-      </p:sp>
-      <p:sp>
-        <p:nvSpPr>
-          <p:cNvPr id="18" name="Diamond 17"/>
-          <p:cNvSpPr/>
-          <p:nvPr/>
-        </p:nvSpPr>
-        <p:spPr>
-          <a:xfrm>
-            <a:off x="6311900" y="3505200"/>
-            <a:ext cx="101600" cy="101600"/>
-          </a:xfrm>
-          <a:prstGeom prst="diamond">
-            <a:avLst/>
-          </a:prstGeom>
-          <a:solidFill>
-            <a:srgbClr val="FF6B3D"/>
-          </a:solidFill>
-          <a:ln>
-            <a:noFill/>
-          </a:ln>
-          <a:effectLst/>
-        </p:spPr>
-        <p:style>
-          <a:lnRef idx="1">
-            <a:schemeClr val="accent1"/>
-          </a:lnRef>
-          <a:fillRef idx="3">
-            <a:schemeClr val="accent1"/>
-          </a:fillRef>
-          <a:effectRef idx="2">
-            <a:schemeClr val="accent1"/>
-          </a:effectRef>
-          <a:fontRef idx="minor">
-            <a:schemeClr val="lt1"/>
-          </a:fontRef>
-        </p:style>
-        <p:txBody>
-          <a:bodyPr rtlCol="0" anchor="ctr"/>
-          <a:lstStyle/>
-          <a:p>
-            <a:pPr algn="ctr"/>
-          </a:p>
-        </p:txBody>
-      </p:sp>
-      <p:sp>
-        <p:nvSpPr>
-          <p:cNvPr id="19" name="Diamond 18"/>
-          <p:cNvSpPr/>
-          <p:nvPr/>
-        </p:nvSpPr>
-        <p:spPr>
-          <a:xfrm>
-            <a:off x="8870950" y="3505200"/>
-            <a:ext cx="101600" cy="101600"/>
-          </a:xfrm>
-          <a:prstGeom prst="diamond">
-            <a:avLst/>
-          </a:prstGeom>
-          <a:solidFill>
-            <a:srgbClr val="FF6B3D"/>
-          </a:solidFill>
-          <a:ln>
-            <a:noFill/>
-          </a:ln>
-          <a:effectLst/>
-        </p:spPr>
-        <p:style>
-          <a:lnRef idx="1">
-            <a:schemeClr val="accent1"/>
-          </a:lnRef>
-          <a:fillRef idx="3">
-            <a:schemeClr val="accent1"/>
-          </a:fillRef>
-          <a:effectRef idx="2">
-            <a:schemeClr val="accent1"/>
-          </a:effectRef>
-          <a:fontRef idx="minor">
-            <a:schemeClr val="lt1"/>
-          </a:fontRef>
-        </p:style>
-        <p:txBody>
-          <a:bodyPr rtlCol="0" anchor="ctr"/>
-          <a:lstStyle/>
-          <a:p>
-            <a:pPr algn="ctr"/>
-          </a:p>
-        </p:txBody>
-      </p:sp>
-      <p:sp>
-        <p:nvSpPr>
-          <p:cNvPr id="20" name="Oval 19"/>
-          <p:cNvSpPr/>
-          <p:nvPr/>
-        </p:nvSpPr>
-        <p:spPr>
-          <a:xfrm>
-            <a:off x="4883150" y="3352800"/>
-            <a:ext cx="406400" cy="406400"/>
-          </a:xfrm>
-          <a:prstGeom prst="ellipse">
-            <a:avLst/>
-          </a:prstGeom>
-          <a:solidFill>
-            <a:srgbClr val="0E0E11"/>
-          </a:solidFill>
-          <a:ln w="19050">
-            <a:solidFill>
-              <a:srgbClr val="9A9AA2"/>
-            </a:solidFill>
-          </a:ln>
-          <a:effectLst/>
-        </p:spPr>
-        <p:style>
-          <a:lnRef idx="1">
-            <a:schemeClr val="accent1"/>
-          </a:lnRef>
-          <a:fillRef idx="3">
-            <a:schemeClr val="accent1"/>
-          </a:fillRef>
-          <a:effectRef idx="2">
-            <a:schemeClr val="accent1"/>
-          </a:effectRef>
-          <a:fontRef idx="minor">
-            <a:schemeClr val="lt1"/>
-          </a:fontRef>
-        </p:style>
-        <p:txBody>
-          <a:bodyPr rtlCol="0" anchor="ctr"/>
-          <a:lstStyle/>
-          <a:p>
-            <a:pPr algn="ctr"/>
-          </a:p>
-        </p:txBody>
-      </p:sp>
-      <p:sp>
-        <p:nvSpPr>
-          <p:cNvPr id="21" name="TextBox 20"/>
-          <p:cNvSpPr txBox="1"/>
-          <p:nvPr/>
-        </p:nvSpPr>
-        <p:spPr>
-          <a:xfrm>
-            <a:off x="4832350" y="3454400"/>
-            <a:ext cx="508000" cy="203200"/>
+          <p:cNvPr id="36" name="TextBox 35"/>
+          <p:cNvSpPr txBox="1"/>
+          <p:nvPr/>
+        </p:nvSpPr>
+        <p:spPr>
+          <a:xfrm>
+            <a:off x="698500" y="4673600"/>
+            <a:ext cx="5715000" cy="165100"/>
           </a:xfrm>
           <a:prstGeom prst="rect">
             <a:avLst/>
@@ -3668,394 +4260,22 @@
           </a:bodyPr>
           <a:lstStyle/>
           <a:p>
-            <a:pPr algn="ctr"/>
-            <a:r>
-              <a:rPr sz="1300" b="0" spc="100">
+            <a:pPr algn="l"/>
+            <a:r>
+              <a:rPr sz="1100" b="0" spc="300">
                 <a:solidFill>
                   <a:srgbClr val="9A9AA2"/>
                 </a:solidFill>
                 <a:latin typeface="Courier New"/>
               </a:rPr>
-              <a:t>06</a:t>
-            </a:r>
-          </a:p>
-        </p:txBody>
-      </p:sp>
-      <p:sp>
-        <p:nvSpPr>
-          <p:cNvPr id="22" name="TextBox 21"/>
-          <p:cNvSpPr txBox="1"/>
-          <p:nvPr/>
-        </p:nvSpPr>
-        <p:spPr>
-          <a:xfrm>
-            <a:off x="4133850" y="3860800"/>
-            <a:ext cx="1905000" cy="215900"/>
-          </a:xfrm>
-          <a:prstGeom prst="rect">
-            <a:avLst/>
-          </a:prstGeom>
-          <a:noFill/>
-        </p:spPr>
-        <p:txBody>
-          <a:bodyPr wrap="square" lIns="0" rIns="0" tIns="0" bIns="0" anchor="ctr">
-            <a:spAutoFit/>
-          </a:bodyPr>
-          <a:lstStyle/>
-          <a:p>
-            <a:pPr algn="ctr"/>
-            <a:r>
-              <a:rPr sz="1600" b="0">
-                <a:solidFill>
-                  <a:srgbClr val="ECECEE"/>
-                </a:solidFill>
-                <a:latin typeface="Arial"/>
-              </a:rPr>
-              <a:t>Build</a:t>
-            </a:r>
-          </a:p>
-        </p:txBody>
-      </p:sp>
-      <p:sp>
-        <p:nvSpPr>
-          <p:cNvPr id="23" name="TextBox 22"/>
-          <p:cNvSpPr txBox="1"/>
-          <p:nvPr/>
-        </p:nvSpPr>
-        <p:spPr>
-          <a:xfrm>
-            <a:off x="4133850" y="4089400"/>
-            <a:ext cx="1905000" cy="165100"/>
-          </a:xfrm>
-          <a:prstGeom prst="rect">
-            <a:avLst/>
-          </a:prstGeom>
-          <a:noFill/>
-        </p:spPr>
-        <p:txBody>
-          <a:bodyPr wrap="square" lIns="0" rIns="0" tIns="0" bIns="0" anchor="ctr">
-            <a:spAutoFit/>
-          </a:bodyPr>
-          <a:lstStyle/>
-          <a:p>
-            <a:pPr algn="ctr"/>
-            <a:r>
-              <a:rPr sz="1200" b="0">
-                <a:solidFill>
-                  <a:srgbClr val="9A9AA2"/>
-                </a:solidFill>
-                <a:latin typeface="Arial"/>
-              </a:rPr>
-              <a:t>code + review</a:t>
-            </a:r>
-          </a:p>
-        </p:txBody>
-      </p:sp>
-      <p:sp>
-        <p:nvSpPr>
-          <p:cNvPr id="24" name="Oval 23"/>
-          <p:cNvSpPr/>
-          <p:nvPr/>
-        </p:nvSpPr>
-        <p:spPr>
-          <a:xfrm>
-            <a:off x="7442200" y="3352800"/>
-            <a:ext cx="406400" cy="406400"/>
-          </a:xfrm>
-          <a:prstGeom prst="ellipse">
-            <a:avLst/>
-          </a:prstGeom>
-          <a:solidFill>
-            <a:srgbClr val="0E0E11"/>
-          </a:solidFill>
-          <a:ln w="19050">
-            <a:solidFill>
-              <a:srgbClr val="9A9AA2"/>
-            </a:solidFill>
-          </a:ln>
-          <a:effectLst/>
-        </p:spPr>
-        <p:style>
-          <a:lnRef idx="1">
-            <a:schemeClr val="accent1"/>
-          </a:lnRef>
-          <a:fillRef idx="3">
-            <a:schemeClr val="accent1"/>
-          </a:fillRef>
-          <a:effectRef idx="2">
-            <a:schemeClr val="accent1"/>
-          </a:effectRef>
-          <a:fontRef idx="minor">
-            <a:schemeClr val="lt1"/>
-          </a:fontRef>
-        </p:style>
-        <p:txBody>
-          <a:bodyPr rtlCol="0" anchor="ctr"/>
-          <a:lstStyle/>
-          <a:p>
-            <a:pPr algn="ctr"/>
-          </a:p>
-        </p:txBody>
-      </p:sp>
-      <p:sp>
-        <p:nvSpPr>
-          <p:cNvPr id="25" name="TextBox 24"/>
-          <p:cNvSpPr txBox="1"/>
-          <p:nvPr/>
-        </p:nvSpPr>
-        <p:spPr>
-          <a:xfrm>
-            <a:off x="7391400" y="3454400"/>
-            <a:ext cx="508000" cy="203200"/>
-          </a:xfrm>
-          <a:prstGeom prst="rect">
-            <a:avLst/>
-          </a:prstGeom>
-          <a:noFill/>
-        </p:spPr>
-        <p:txBody>
-          <a:bodyPr wrap="square" lIns="0" rIns="0" tIns="0" bIns="0" anchor="ctr">
-            <a:spAutoFit/>
-          </a:bodyPr>
-          <a:lstStyle/>
-          <a:p>
-            <a:pPr algn="ctr"/>
-            <a:r>
-              <a:rPr sz="1300" b="0" spc="100">
-                <a:solidFill>
-                  <a:srgbClr val="9A9AA2"/>
-                </a:solidFill>
-                <a:latin typeface="Courier New"/>
-              </a:rPr>
-              <a:t>07</a:t>
-            </a:r>
-          </a:p>
-        </p:txBody>
-      </p:sp>
-      <p:sp>
-        <p:nvSpPr>
-          <p:cNvPr id="26" name="TextBox 25"/>
-          <p:cNvSpPr txBox="1"/>
-          <p:nvPr/>
-        </p:nvSpPr>
-        <p:spPr>
-          <a:xfrm>
-            <a:off x="6692900" y="3860800"/>
-            <a:ext cx="1905000" cy="215900"/>
-          </a:xfrm>
-          <a:prstGeom prst="rect">
-            <a:avLst/>
-          </a:prstGeom>
-          <a:noFill/>
-        </p:spPr>
-        <p:txBody>
-          <a:bodyPr wrap="square" lIns="0" rIns="0" tIns="0" bIns="0" anchor="ctr">
-            <a:spAutoFit/>
-          </a:bodyPr>
-          <a:lstStyle/>
-          <a:p>
-            <a:pPr algn="ctr"/>
-            <a:r>
-              <a:rPr sz="1600" b="0">
-                <a:solidFill>
-                  <a:srgbClr val="ECECEE"/>
-                </a:solidFill>
-                <a:latin typeface="Arial"/>
-              </a:rPr>
-              <a:t>Release</a:t>
-            </a:r>
-          </a:p>
-        </p:txBody>
-      </p:sp>
-      <p:sp>
-        <p:nvSpPr>
-          <p:cNvPr id="27" name="TextBox 26"/>
-          <p:cNvSpPr txBox="1"/>
-          <p:nvPr/>
-        </p:nvSpPr>
-        <p:spPr>
-          <a:xfrm>
-            <a:off x="6692900" y="4089400"/>
-            <a:ext cx="1905000" cy="165100"/>
-          </a:xfrm>
-          <a:prstGeom prst="rect">
-            <a:avLst/>
-          </a:prstGeom>
-          <a:noFill/>
-        </p:spPr>
-        <p:txBody>
-          <a:bodyPr wrap="square" lIns="0" rIns="0" tIns="0" bIns="0" anchor="ctr">
-            <a:spAutoFit/>
-          </a:bodyPr>
-          <a:lstStyle/>
-          <a:p>
-            <a:pPr algn="ctr"/>
-            <a:r>
-              <a:rPr sz="1200" b="0">
-                <a:solidFill>
-                  <a:srgbClr val="9A9AA2"/>
-                </a:solidFill>
-                <a:latin typeface="Arial"/>
-              </a:rPr>
-              <a:t>human approval</a:t>
-            </a:r>
-          </a:p>
-        </p:txBody>
-      </p:sp>
-      <p:sp>
-        <p:nvSpPr>
-          <p:cNvPr id="28" name="Oval 27"/>
-          <p:cNvSpPr/>
-          <p:nvPr/>
-        </p:nvSpPr>
-        <p:spPr>
-          <a:xfrm>
-            <a:off x="10001250" y="3352800"/>
-            <a:ext cx="406400" cy="406400"/>
-          </a:xfrm>
-          <a:prstGeom prst="ellipse">
-            <a:avLst/>
-          </a:prstGeom>
-          <a:solidFill>
-            <a:srgbClr val="0E0E11"/>
-          </a:solidFill>
-          <a:ln w="19050">
-            <a:solidFill>
-              <a:srgbClr val="9A9AA2"/>
-            </a:solidFill>
-          </a:ln>
-          <a:effectLst/>
-        </p:spPr>
-        <p:style>
-          <a:lnRef idx="1">
-            <a:schemeClr val="accent1"/>
-          </a:lnRef>
-          <a:fillRef idx="3">
-            <a:schemeClr val="accent1"/>
-          </a:fillRef>
-          <a:effectRef idx="2">
-            <a:schemeClr val="accent1"/>
-          </a:effectRef>
-          <a:fontRef idx="minor">
-            <a:schemeClr val="lt1"/>
-          </a:fontRef>
-        </p:style>
-        <p:txBody>
-          <a:bodyPr rtlCol="0" anchor="ctr"/>
-          <a:lstStyle/>
-          <a:p>
-            <a:pPr algn="ctr"/>
-          </a:p>
-        </p:txBody>
-      </p:sp>
-      <p:sp>
-        <p:nvSpPr>
-          <p:cNvPr id="29" name="TextBox 28"/>
-          <p:cNvSpPr txBox="1"/>
-          <p:nvPr/>
-        </p:nvSpPr>
-        <p:spPr>
-          <a:xfrm>
-            <a:off x="9950450" y="3454400"/>
-            <a:ext cx="508000" cy="203200"/>
-          </a:xfrm>
-          <a:prstGeom prst="rect">
-            <a:avLst/>
-          </a:prstGeom>
-          <a:noFill/>
-        </p:spPr>
-        <p:txBody>
-          <a:bodyPr wrap="square" lIns="0" rIns="0" tIns="0" bIns="0" anchor="ctr">
-            <a:spAutoFit/>
-          </a:bodyPr>
-          <a:lstStyle/>
-          <a:p>
-            <a:pPr algn="ctr"/>
-            <a:r>
-              <a:rPr sz="1300" b="0" spc="100">
-                <a:solidFill>
-                  <a:srgbClr val="9A9AA2"/>
-                </a:solidFill>
-                <a:latin typeface="Courier New"/>
-              </a:rPr>
-              <a:t>08</a:t>
-            </a:r>
-          </a:p>
-        </p:txBody>
-      </p:sp>
-      <p:sp>
-        <p:nvSpPr>
-          <p:cNvPr id="30" name="TextBox 29"/>
-          <p:cNvSpPr txBox="1"/>
-          <p:nvPr/>
-        </p:nvSpPr>
-        <p:spPr>
-          <a:xfrm>
-            <a:off x="9251950" y="3860800"/>
-            <a:ext cx="1905000" cy="215900"/>
-          </a:xfrm>
-          <a:prstGeom prst="rect">
-            <a:avLst/>
-          </a:prstGeom>
-          <a:noFill/>
-        </p:spPr>
-        <p:txBody>
-          <a:bodyPr wrap="square" lIns="0" rIns="0" tIns="0" bIns="0" anchor="ctr">
-            <a:spAutoFit/>
-          </a:bodyPr>
-          <a:lstStyle/>
-          <a:p>
-            <a:pPr algn="ctr"/>
-            <a:r>
-              <a:rPr sz="1600" b="0">
-                <a:solidFill>
-                  <a:srgbClr val="ECECEE"/>
-                </a:solidFill>
-                <a:latin typeface="Arial"/>
-              </a:rPr>
-              <a:t>Operate</a:t>
-            </a:r>
-          </a:p>
-        </p:txBody>
-      </p:sp>
-      <p:sp>
-        <p:nvSpPr>
-          <p:cNvPr id="31" name="TextBox 30"/>
-          <p:cNvSpPr txBox="1"/>
-          <p:nvPr/>
-        </p:nvSpPr>
-        <p:spPr>
-          <a:xfrm>
-            <a:off x="9251950" y="4089400"/>
-            <a:ext cx="1905000" cy="165100"/>
-          </a:xfrm>
-          <a:prstGeom prst="rect">
-            <a:avLst/>
-          </a:prstGeom>
-          <a:noFill/>
-        </p:spPr>
-        <p:txBody>
-          <a:bodyPr wrap="square" lIns="0" rIns="0" tIns="0" bIns="0" anchor="ctr">
-            <a:spAutoFit/>
-          </a:bodyPr>
-          <a:lstStyle/>
-          <a:p>
-            <a:pPr algn="ctr"/>
-            <a:r>
-              <a:rPr sz="1200" b="0">
-                <a:solidFill>
-                  <a:srgbClr val="9A9AA2"/>
-                </a:solidFill>
-                <a:latin typeface="Arial"/>
-              </a:rPr>
-              <a:t>monitoring</a:t>
+              <a:t>PACKAGE TO RUNNING SOFTWARE</a:t>
             </a:r>
           </a:p>
         </p:txBody>
       </p:sp>
       <p:pic>
         <p:nvPicPr>
-          <p:cNvPr id="32" name="Picture 31" descr="ic-arc.png"/>
+          <p:cNvPr id="37" name="Picture 36" descr="logo.png"/>
           <p:cNvPicPr>
             <a:picLocks noChangeAspect="1"/>
           </p:cNvPicPr>
@@ -4063,74 +4283,6 @@
         </p:nvPicPr>
         <p:blipFill>
           <a:blip r:embed="rId3"/>
-          <a:stretch>
-            <a:fillRect/>
-          </a:stretch>
-        </p:blipFill>
-        <p:spPr>
-          <a:xfrm>
-            <a:off x="2095500" y="4064000"/>
-            <a:ext cx="8128000" cy="1079500"/>
-          </a:xfrm>
-          <a:prstGeom prst="rect">
-            <a:avLst/>
-          </a:prstGeom>
-        </p:spPr>
-      </p:pic>
-      <p:sp>
-        <p:nvSpPr>
-          <p:cNvPr id="33" name="TextBox 32"/>
-          <p:cNvSpPr txBox="1"/>
-          <p:nvPr/>
-        </p:nvSpPr>
-        <p:spPr>
-          <a:xfrm>
-            <a:off x="1968500" y="5270500"/>
-            <a:ext cx="8255000" cy="165100"/>
-          </a:xfrm>
-          <a:prstGeom prst="rect">
-            <a:avLst/>
-          </a:prstGeom>
-          <a:noFill/>
-        </p:spPr>
-        <p:txBody>
-          <a:bodyPr wrap="square" lIns="0" rIns="0" tIns="0" bIns="0" anchor="ctr">
-            <a:spAutoFit/>
-          </a:bodyPr>
-          <a:lstStyle/>
-          <a:p>
-            <a:pPr algn="ctr"/>
-            <a:r>
-              <a:rPr sz="1100" b="0" spc="200">
-                <a:solidFill>
-                  <a:srgbClr val="FF6B3D"/>
-                </a:solidFill>
-                <a:latin typeface="Courier New"/>
-              </a:rPr>
-              <a:t>LEARN</a:t>
-            </a:r>
-            <a:r>
-              <a:rPr sz="1100" b="0" spc="150">
-                <a:solidFill>
-                  <a:srgbClr val="9A9AA2"/>
-                </a:solidFill>
-                <a:latin typeface="Courier New"/>
-              </a:rPr>
-              <a:t>  ·  validated patterns from every build carry into the next</a:t>
-            </a:r>
-          </a:p>
-        </p:txBody>
-      </p:sp>
-      <p:pic>
-        <p:nvPicPr>
-          <p:cNvPr id="34" name="Picture 33" descr="logo.png"/>
-          <p:cNvPicPr>
-            <a:picLocks noChangeAspect="1"/>
-          </p:cNvPicPr>
-          <p:nvPr/>
-        </p:nvPicPr>
-        <p:blipFill>
-          <a:blip r:embed="rId4"/>
           <a:stretch>
             <a:fillRect/>
           </a:stretch>
@@ -4211,20 +4363,20 @@
           <a:p>
             <a:pPr algn="l"/>
             <a:r>
-              <a:rPr sz="2800" b="1">
+              <a:rPr sz="2700" b="1">
                 <a:solidFill>
                   <a:srgbClr val="ECECEE"/>
                 </a:solidFill>
-                <a:latin typeface="Arial"/>
+                <a:latin typeface="Poppins"/>
               </a:rPr>
               <a:t>References.</a:t>
             </a:r>
             <a:r>
-              <a:rPr sz="2800" b="0">
+              <a:rPr sz="2700" b="0">
                 <a:solidFill>
                   <a:srgbClr val="9A9AA2"/>
                 </a:solidFill>
-                <a:latin typeface="Arial"/>
+                <a:latin typeface="Poppins"/>
               </a:rPr>
               <a:t> Three builds, three problems.</a:t>
             </a:r>
@@ -4240,7 +4392,7 @@
         <p:spPr>
           <a:xfrm>
             <a:off x="8312150" y="622300"/>
-            <a:ext cx="3175000" cy="139700"/>
+            <a:ext cx="3175000" cy="152400"/>
           </a:xfrm>
           <a:prstGeom prst="rect">
             <a:avLst/>
@@ -4338,7 +4490,7 @@
                 <a:solidFill>
                   <a:srgbClr val="9A9AA2"/>
                 </a:solidFill>
-                <a:latin typeface="Arial"/>
+                <a:latin typeface="Poppins"/>
               </a:rPr>
               <a:t>Shipped software, not pilots. Each one replaced a process that was running manually.</a:t>
             </a:r>
@@ -4450,7 +4602,7 @@
         <p:spPr>
           <a:xfrm>
             <a:off x="952500" y="2400300"/>
-            <a:ext cx="228600" cy="228600"/>
+            <a:ext cx="215900" cy="215900"/>
           </a:xfrm>
           <a:prstGeom prst="rect">
             <a:avLst/>
@@ -4465,8 +4617,8 @@
         </p:nvSpPr>
         <p:spPr>
           <a:xfrm>
-            <a:off x="952500" y="2730500"/>
-            <a:ext cx="2794000" cy="254000"/>
+            <a:off x="952500" y="2717800"/>
+            <a:ext cx="2794000" cy="279400"/>
           </a:xfrm>
           <a:prstGeom prst="rect">
             <a:avLst/>
@@ -4485,7 +4637,7 @@
                 <a:solidFill>
                   <a:srgbClr val="ECECEE"/>
                 </a:solidFill>
-                <a:latin typeface="Arial"/>
+                <a:latin typeface="Poppins"/>
               </a:rPr>
               <a:t>CFO App</a:t>
             </a:r>
@@ -4501,7 +4653,7 @@
         <p:spPr>
           <a:xfrm>
             <a:off x="952500" y="3175000"/>
-            <a:ext cx="2794000" cy="114300"/>
+            <a:ext cx="2794000" cy="127000"/>
           </a:xfrm>
           <a:prstGeom prst="rect">
             <a:avLst/>
@@ -4535,8 +4687,8 @@
         </p:nvSpPr>
         <p:spPr>
           <a:xfrm>
-            <a:off x="952500" y="3327400"/>
-            <a:ext cx="2794000" cy="355600"/>
+            <a:off x="952500" y="3340100"/>
+            <a:ext cx="2794000" cy="342900"/>
           </a:xfrm>
           <a:prstGeom prst="rect">
             <a:avLst/>
@@ -4559,9 +4711,9 @@
                 <a:solidFill>
                   <a:srgbClr val="FF6B3D"/>
                 </a:solidFill>
-                <a:latin typeface="Arial"/>
+                <a:latin typeface="Poppins"/>
               </a:rPr>
-              <a:t>⟨Kunde oder Branche⟩</a:t>
+              <a:t>[Kunde oder Branche]</a:t>
             </a:r>
           </a:p>
         </p:txBody>
@@ -4575,7 +4727,7 @@
         <p:spPr>
           <a:xfrm>
             <a:off x="952500" y="3759200"/>
-            <a:ext cx="2794000" cy="114300"/>
+            <a:ext cx="2794000" cy="127000"/>
           </a:xfrm>
           <a:prstGeom prst="rect">
             <a:avLst/>
@@ -4609,8 +4761,8 @@
         </p:nvSpPr>
         <p:spPr>
           <a:xfrm>
-            <a:off x="952500" y="3911600"/>
-            <a:ext cx="2794000" cy="355600"/>
+            <a:off x="952500" y="3924300"/>
+            <a:ext cx="2794000" cy="342900"/>
           </a:xfrm>
           <a:prstGeom prst="rect">
             <a:avLst/>
@@ -4633,9 +4785,9 @@
                 <a:solidFill>
                   <a:srgbClr val="FF6B3D"/>
                 </a:solidFill>
-                <a:latin typeface="Arial"/>
+                <a:latin typeface="Poppins"/>
               </a:rPr>
-              <a:t>⟨was gebaut wurde⟩</a:t>
+              <a:t>[was gebaut wurde]</a:t>
             </a:r>
           </a:p>
         </p:txBody>
@@ -4649,7 +4801,7 @@
         <p:spPr>
           <a:xfrm>
             <a:off x="952500" y="4343400"/>
-            <a:ext cx="2794000" cy="114300"/>
+            <a:ext cx="2794000" cy="127000"/>
           </a:xfrm>
           <a:prstGeom prst="rect">
             <a:avLst/>
@@ -4683,8 +4835,8 @@
         </p:nvSpPr>
         <p:spPr>
           <a:xfrm>
-            <a:off x="952500" y="4495800"/>
-            <a:ext cx="2794000" cy="355600"/>
+            <a:off x="952500" y="4508500"/>
+            <a:ext cx="2794000" cy="342900"/>
           </a:xfrm>
           <a:prstGeom prst="rect">
             <a:avLst/>
@@ -4707,9 +4859,9 @@
                 <a:solidFill>
                   <a:srgbClr val="FF6B3D"/>
                 </a:solidFill>
-                <a:latin typeface="Arial"/>
+                <a:latin typeface="Poppins"/>
               </a:rPr>
-              <a:t>⟨Ergebnis in einer Zeile⟩</a:t>
+              <a:t>[Ergebnis in einer Zeile]</a:t>
             </a:r>
           </a:p>
         </p:txBody>
@@ -4775,7 +4927,7 @@
         <p:spPr>
           <a:xfrm>
             <a:off x="4572000" y="2400300"/>
-            <a:ext cx="228600" cy="228600"/>
+            <a:ext cx="215900" cy="215900"/>
           </a:xfrm>
           <a:prstGeom prst="rect">
             <a:avLst/>
@@ -4790,8 +4942,8 @@
         </p:nvSpPr>
         <p:spPr>
           <a:xfrm>
-            <a:off x="4572000" y="2730500"/>
-            <a:ext cx="2794000" cy="254000"/>
+            <a:off x="4572000" y="2717800"/>
+            <a:ext cx="2794000" cy="279400"/>
           </a:xfrm>
           <a:prstGeom prst="rect">
             <a:avLst/>
@@ -4810,7 +4962,7 @@
                 <a:solidFill>
                   <a:srgbClr val="ECECEE"/>
                 </a:solidFill>
-                <a:latin typeface="Arial"/>
+                <a:latin typeface="Poppins"/>
               </a:rPr>
               <a:t>Lead Generation</a:t>
             </a:r>
@@ -4826,7 +4978,7 @@
         <p:spPr>
           <a:xfrm>
             <a:off x="4572000" y="3175000"/>
-            <a:ext cx="2794000" cy="114300"/>
+            <a:ext cx="2794000" cy="127000"/>
           </a:xfrm>
           <a:prstGeom prst="rect">
             <a:avLst/>
@@ -4860,8 +5012,8 @@
         </p:nvSpPr>
         <p:spPr>
           <a:xfrm>
-            <a:off x="4572000" y="3327400"/>
-            <a:ext cx="2794000" cy="355600"/>
+            <a:off x="4572000" y="3340100"/>
+            <a:ext cx="2794000" cy="342900"/>
           </a:xfrm>
           <a:prstGeom prst="rect">
             <a:avLst/>
@@ -4884,9 +5036,9 @@
                 <a:solidFill>
                   <a:srgbClr val="FF6B3D"/>
                 </a:solidFill>
-                <a:latin typeface="Arial"/>
+                <a:latin typeface="Poppins"/>
               </a:rPr>
-              <a:t>⟨Kunde oder Branche⟩</a:t>
+              <a:t>[Kunde oder Branche]</a:t>
             </a:r>
           </a:p>
         </p:txBody>
@@ -4900,7 +5052,7 @@
         <p:spPr>
           <a:xfrm>
             <a:off x="4572000" y="3759200"/>
-            <a:ext cx="2794000" cy="114300"/>
+            <a:ext cx="2794000" cy="127000"/>
           </a:xfrm>
           <a:prstGeom prst="rect">
             <a:avLst/>
@@ -4934,8 +5086,8 @@
         </p:nvSpPr>
         <p:spPr>
           <a:xfrm>
-            <a:off x="4572000" y="3911600"/>
-            <a:ext cx="2794000" cy="355600"/>
+            <a:off x="4572000" y="3924300"/>
+            <a:ext cx="2794000" cy="342900"/>
           </a:xfrm>
           <a:prstGeom prst="rect">
             <a:avLst/>
@@ -4958,9 +5110,9 @@
                 <a:solidFill>
                   <a:srgbClr val="FF6B3D"/>
                 </a:solidFill>
-                <a:latin typeface="Arial"/>
+                <a:latin typeface="Poppins"/>
               </a:rPr>
-              <a:t>⟨was gebaut wurde⟩</a:t>
+              <a:t>[was gebaut wurde]</a:t>
             </a:r>
           </a:p>
         </p:txBody>
@@ -4974,7 +5126,7 @@
         <p:spPr>
           <a:xfrm>
             <a:off x="4572000" y="4343400"/>
-            <a:ext cx="2794000" cy="114300"/>
+            <a:ext cx="2794000" cy="127000"/>
           </a:xfrm>
           <a:prstGeom prst="rect">
             <a:avLst/>
@@ -5008,8 +5160,8 @@
         </p:nvSpPr>
         <p:spPr>
           <a:xfrm>
-            <a:off x="4572000" y="4495800"/>
-            <a:ext cx="2794000" cy="355600"/>
+            <a:off x="4572000" y="4508500"/>
+            <a:ext cx="2794000" cy="342900"/>
           </a:xfrm>
           <a:prstGeom prst="rect">
             <a:avLst/>
@@ -5032,9 +5184,9 @@
                 <a:solidFill>
                   <a:srgbClr val="FF6B3D"/>
                 </a:solidFill>
-                <a:latin typeface="Arial"/>
+                <a:latin typeface="Poppins"/>
               </a:rPr>
-              <a:t>⟨Ergebnis in einer Zeile⟩</a:t>
+              <a:t>[Ergebnis in einer Zeile]</a:t>
             </a:r>
           </a:p>
         </p:txBody>
@@ -5100,7 +5252,7 @@
         <p:spPr>
           <a:xfrm>
             <a:off x="8191500" y="2400300"/>
-            <a:ext cx="228600" cy="228600"/>
+            <a:ext cx="215900" cy="215900"/>
           </a:xfrm>
           <a:prstGeom prst="rect">
             <a:avLst/>
@@ -5115,8 +5267,8 @@
         </p:nvSpPr>
         <p:spPr>
           <a:xfrm>
-            <a:off x="8191500" y="2730500"/>
-            <a:ext cx="2794000" cy="254000"/>
+            <a:off x="8191500" y="2717800"/>
+            <a:ext cx="2794000" cy="279400"/>
           </a:xfrm>
           <a:prstGeom prst="rect">
             <a:avLst/>
@@ -5135,7 +5287,7 @@
                 <a:solidFill>
                   <a:srgbClr val="ECECEE"/>
                 </a:solidFill>
-                <a:latin typeface="Arial"/>
+                <a:latin typeface="Poppins"/>
               </a:rPr>
               <a:t>Board Assistant</a:t>
             </a:r>
@@ -5151,7 +5303,7 @@
         <p:spPr>
           <a:xfrm>
             <a:off x="8191500" y="3175000"/>
-            <a:ext cx="2794000" cy="114300"/>
+            <a:ext cx="2794000" cy="127000"/>
           </a:xfrm>
           <a:prstGeom prst="rect">
             <a:avLst/>
@@ -5185,8 +5337,8 @@
         </p:nvSpPr>
         <p:spPr>
           <a:xfrm>
-            <a:off x="8191500" y="3327400"/>
-            <a:ext cx="2794000" cy="355600"/>
+            <a:off x="8191500" y="3340100"/>
+            <a:ext cx="2794000" cy="342900"/>
           </a:xfrm>
           <a:prstGeom prst="rect">
             <a:avLst/>
@@ -5209,9 +5361,9 @@
                 <a:solidFill>
                   <a:srgbClr val="FF6B3D"/>
                 </a:solidFill>
-                <a:latin typeface="Arial"/>
+                <a:latin typeface="Poppins"/>
               </a:rPr>
-              <a:t>⟨Kunde oder Branche⟩</a:t>
+              <a:t>[Kunde oder Branche]</a:t>
             </a:r>
           </a:p>
         </p:txBody>
@@ -5225,7 +5377,7 @@
         <p:spPr>
           <a:xfrm>
             <a:off x="8191500" y="3759200"/>
-            <a:ext cx="2794000" cy="114300"/>
+            <a:ext cx="2794000" cy="127000"/>
           </a:xfrm>
           <a:prstGeom prst="rect">
             <a:avLst/>
@@ -5259,8 +5411,8 @@
         </p:nvSpPr>
         <p:spPr>
           <a:xfrm>
-            <a:off x="8191500" y="3911600"/>
-            <a:ext cx="2794000" cy="355600"/>
+            <a:off x="8191500" y="3924300"/>
+            <a:ext cx="2794000" cy="342900"/>
           </a:xfrm>
           <a:prstGeom prst="rect">
             <a:avLst/>
@@ -5283,9 +5435,9 @@
                 <a:solidFill>
                   <a:srgbClr val="FF6B3D"/>
                 </a:solidFill>
-                <a:latin typeface="Arial"/>
+                <a:latin typeface="Poppins"/>
               </a:rPr>
-              <a:t>⟨was gebaut wurde⟩</a:t>
+              <a:t>[was gebaut wurde]</a:t>
             </a:r>
           </a:p>
         </p:txBody>
@@ -5299,7 +5451,7 @@
         <p:spPr>
           <a:xfrm>
             <a:off x="8191500" y="4343400"/>
-            <a:ext cx="2794000" cy="114300"/>
+            <a:ext cx="2794000" cy="127000"/>
           </a:xfrm>
           <a:prstGeom prst="rect">
             <a:avLst/>
@@ -5333,8 +5485,8 @@
         </p:nvSpPr>
         <p:spPr>
           <a:xfrm>
-            <a:off x="8191500" y="4495800"/>
-            <a:ext cx="2794000" cy="355600"/>
+            <a:off x="8191500" y="4508500"/>
+            <a:ext cx="2794000" cy="342900"/>
           </a:xfrm>
           <a:prstGeom prst="rect">
             <a:avLst/>
@@ -5357,9 +5509,9 @@
                 <a:solidFill>
                   <a:srgbClr val="FF6B3D"/>
                 </a:solidFill>
-                <a:latin typeface="Arial"/>
+                <a:latin typeface="Poppins"/>
               </a:rPr>
-              <a:t>⟨Ergebnis in einer Zeile⟩</a:t>
+              <a:t>[Ergebnis in einer Zeile]</a:t>
             </a:r>
           </a:p>
         </p:txBody>
@@ -5489,20 +5641,20 @@
           <a:p>
             <a:pPr algn="l"/>
             <a:r>
-              <a:rPr sz="2800" b="1">
+              <a:rPr sz="2700" b="1">
                 <a:solidFill>
                   <a:srgbClr val="ECECEE"/>
                 </a:solidFill>
-                <a:latin typeface="Arial"/>
+                <a:latin typeface="Poppins"/>
               </a:rPr>
               <a:t>One question.</a:t>
             </a:r>
             <a:r>
-              <a:rPr sz="2800" b="0">
+              <a:rPr sz="2700" b="0">
                 <a:solidFill>
                   <a:srgbClr val="9A9AA2"/>
                 </a:solidFill>
-                <a:latin typeface="Arial"/>
+                <a:latin typeface="Poppins"/>
               </a:rPr>
               <a:t> </a:t>
             </a:r>
@@ -5518,7 +5670,7 @@
         <p:spPr>
           <a:xfrm>
             <a:off x="8312150" y="622300"/>
-            <a:ext cx="3175000" cy="139700"/>
+            <a:ext cx="3175000" cy="152400"/>
           </a:xfrm>
           <a:prstGeom prst="rect">
             <a:avLst/>
@@ -5616,7 +5768,7 @@
                 <a:solidFill>
                   <a:srgbClr val="9A9AA2"/>
                 </a:solidFill>
-                <a:latin typeface="Arial"/>
+                <a:latin typeface="Poppins"/>
               </a:rPr>
               <a:t>Ich lasse Ihnen eine Frage da, keinen Prospekt.</a:t>
             </a:r>
@@ -5632,7 +5784,7 @@
         <p:spPr>
           <a:xfrm>
             <a:off x="698500" y="2209800"/>
-            <a:ext cx="10287000" cy="1625600"/>
+            <a:ext cx="10287000" cy="1651000"/>
           </a:xfrm>
           <a:prstGeom prst="rect">
             <a:avLst/>
@@ -5647,33 +5799,33 @@
           <a:p>
             <a:pPr algn="l">
               <a:lnSpc>
-                <a:spcPts val="4200"/>
+                <a:spcPts val="4400"/>
               </a:lnSpc>
             </a:pPr>
             <a:r>
-              <a:rPr sz="3400" b="0">
+              <a:rPr sz="3300" b="0">
                 <a:solidFill>
                   <a:srgbClr val="ECECEE"/>
                 </a:solidFill>
-                <a:latin typeface="Arial"/>
+                <a:latin typeface="Poppins"/>
               </a:rPr>
               <a:t>Welcher Prozess bei Ihnen läuft heute in </a:t>
             </a:r>
             <a:r>
-              <a:rPr sz="3400" b="0">
+              <a:rPr sz="3300" b="0">
                 <a:solidFill>
                   <a:srgbClr val="FF6B3D"/>
                 </a:solidFill>
-                <a:latin typeface="Arial"/>
+                <a:latin typeface="Poppins"/>
               </a:rPr>
               <a:t>Excel</a:t>
             </a:r>
             <a:r>
-              <a:rPr sz="3400" b="0">
+              <a:rPr sz="3300" b="0">
                 <a:solidFill>
                   <a:srgbClr val="ECECEE"/>
                 </a:solidFill>
-                <a:latin typeface="Arial"/>
+                <a:latin typeface="Poppins"/>
               </a:rPr>
               <a:t> und sollte es seit einem Jahr nicht mehr?</a:t>
             </a:r>
@@ -5688,8 +5840,8 @@
         </p:nvSpPr>
         <p:spPr>
           <a:xfrm>
-            <a:off x="698500" y="4216400"/>
-            <a:ext cx="8890000" cy="482600"/>
+            <a:off x="698500" y="4241800"/>
+            <a:ext cx="8890000" cy="508000"/>
           </a:xfrm>
           <a:prstGeom prst="rect">
             <a:avLst/>
@@ -5712,7 +5864,7 @@
                 <a:solidFill>
                   <a:srgbClr val="9A9AA2"/>
                 </a:solidFill>
-                <a:latin typeface="Arial"/>
+                <a:latin typeface="Poppins"/>
               </a:rPr>
               <a:t>Wenn Ihnen dazu gerade etwas eingefallen ist — sprechen Sie mich an. Wir machen daraus eine Anwendung. Und wenn Ihnen zwanzig einfallen, reden wir über die Plattform statt über die Anwendung.</a:t>
             </a:r>
@@ -5728,7 +5880,7 @@
         <p:spPr>
           <a:xfrm>
             <a:off x="7042150" y="6032500"/>
-            <a:ext cx="4445000" cy="152400"/>
+            <a:ext cx="4445000" cy="165100"/>
           </a:xfrm>
           <a:prstGeom prst="rect">
             <a:avLst/>
@@ -5749,7 +5901,7 @@
                 </a:solidFill>
                 <a:latin typeface="Courier New"/>
               </a:rPr>
-              <a:t>⟨Name · E-Mail · Telefon⟩</a:t>
+              <a:t>[Name · E-Mail · Telefon]</a:t>
             </a:r>
           </a:p>
         </p:txBody>
@@ -5844,20 +5996,20 @@
           <a:p>
             <a:pPr algn="l"/>
             <a:r>
-              <a:rPr sz="2800" b="1">
+              <a:rPr sz="2700" b="1">
                 <a:solidFill>
                   <a:srgbClr val="ECECEE"/>
                 </a:solidFill>
-                <a:latin typeface="Arial"/>
+                <a:latin typeface="Poppins"/>
               </a:rPr>
               <a:t>Further questions.</a:t>
             </a:r>
             <a:r>
-              <a:rPr sz="2800" b="0">
+              <a:rPr sz="2700" b="0">
                 <a:solidFill>
                   <a:srgbClr val="9A9AA2"/>
                 </a:solidFill>
-                <a:latin typeface="Arial"/>
+                <a:latin typeface="Poppins"/>
               </a:rPr>
               <a:t> </a:t>
             </a:r>
@@ -5873,7 +6025,7 @@
         <p:spPr>
           <a:xfrm>
             <a:off x="8312150" y="622300"/>
-            <a:ext cx="3175000" cy="139700"/>
+            <a:ext cx="3175000" cy="152400"/>
           </a:xfrm>
           <a:prstGeom prst="rect">
             <a:avLst/>
@@ -6045,20 +6197,20 @@
           <a:p>
             <a:pPr algn="l"/>
             <a:r>
-              <a:rPr sz="2800" b="1">
+              <a:rPr sz="2700" b="1">
                 <a:solidFill>
                   <a:srgbClr val="ECECEE"/>
                 </a:solidFill>
-                <a:latin typeface="Arial"/>
+                <a:latin typeface="Poppins"/>
               </a:rPr>
               <a:t>Still manual.</a:t>
             </a:r>
             <a:r>
-              <a:rPr sz="2800" b="0">
+              <a:rPr sz="2700" b="0">
                 <a:solidFill>
                   <a:srgbClr val="9A9AA2"/>
                 </a:solidFill>
-                <a:latin typeface="Arial"/>
+                <a:latin typeface="Poppins"/>
               </a:rPr>
               <a:t> And that is where the money goes.</a:t>
             </a:r>
@@ -6074,7 +6226,7 @@
         <p:spPr>
           <a:xfrm>
             <a:off x="8312150" y="622300"/>
-            <a:ext cx="3175000" cy="139700"/>
+            <a:ext cx="3175000" cy="152400"/>
           </a:xfrm>
           <a:prstGeom prst="rect">
             <a:avLst/>
@@ -6152,8 +6304,8 @@
         </p:nvSpPr>
         <p:spPr>
           <a:xfrm>
-            <a:off x="698500" y="1536700"/>
-            <a:ext cx="3810000" cy="177800"/>
+            <a:off x="698500" y="1473200"/>
+            <a:ext cx="4445000" cy="165100"/>
           </a:xfrm>
           <a:prstGeom prst="rect">
             <a:avLst/>
@@ -6187,7 +6339,7 @@
         </p:nvSpPr>
         <p:spPr>
           <a:xfrm>
-            <a:off x="698500" y="1905000"/>
+            <a:off x="698500" y="2324100"/>
             <a:ext cx="10788650" cy="6350"/>
           </a:xfrm>
           <a:prstGeom prst="rect">
@@ -6225,23 +6377,25 @@
       </p:sp>
       <p:sp>
         <p:nvSpPr>
-          <p:cNvPr id="102" name="Rectangle 101"/>
+          <p:cNvPr id="102" name="Oval 101"/>
           <p:cNvSpPr/>
           <p:nvPr/>
         </p:nvSpPr>
         <p:spPr>
           <a:xfrm>
-            <a:off x="698500" y="1911350"/>
-            <a:ext cx="10788650" cy="6350"/>
-          </a:xfrm>
-          <a:prstGeom prst="rect">
+            <a:off x="1530350" y="2082800"/>
+            <a:ext cx="482600" cy="482600"/>
+          </a:xfrm>
+          <a:prstGeom prst="ellipse">
             <a:avLst/>
           </a:prstGeom>
           <a:solidFill>
-            <a:srgbClr val="9A9AA2"/>
+            <a:srgbClr val="0E0E11"/>
           </a:solidFill>
-          <a:ln>
-            <a:noFill/>
+          <a:ln w="15875">
+            <a:solidFill>
+              <a:srgbClr val="9A9AA2"/>
+            </a:solidFill>
           </a:ln>
           <a:effectLst/>
         </p:spPr>
@@ -6269,23 +6423,60 @@
       </p:sp>
       <p:sp>
         <p:nvSpPr>
-          <p:cNvPr id="103" name="Rectangle 102"/>
+          <p:cNvPr id="103" name="TextBox 102"/>
+          <p:cNvSpPr txBox="1"/>
+          <p:nvPr/>
+        </p:nvSpPr>
+        <p:spPr>
+          <a:xfrm>
+            <a:off x="1517650" y="2228850"/>
+            <a:ext cx="508000" cy="190500"/>
+          </a:xfrm>
+          <a:prstGeom prst="rect">
+            <a:avLst/>
+          </a:prstGeom>
+          <a:noFill/>
+        </p:spPr>
+        <p:txBody>
+          <a:bodyPr wrap="square" lIns="0" rIns="0" tIns="0" bIns="0" anchor="ctr">
+            <a:spAutoFit/>
+          </a:bodyPr>
+          <a:lstStyle/>
+          <a:p>
+            <a:pPr algn="ctr"/>
+            <a:r>
+              <a:rPr sz="1300" b="0" spc="80">
+                <a:solidFill>
+                  <a:srgbClr val="9A9AA2"/>
+                </a:solidFill>
+                <a:latin typeface="Courier New"/>
+              </a:rPr>
+              <a:t>01</a:t>
+            </a:r>
+          </a:p>
+        </p:txBody>
+      </p:sp>
+      <p:sp>
+        <p:nvSpPr>
+          <p:cNvPr id="104" name="Oval 103"/>
           <p:cNvSpPr/>
           <p:nvPr/>
         </p:nvSpPr>
         <p:spPr>
           <a:xfrm>
-            <a:off x="698500" y="1905000"/>
-            <a:ext cx="406400" cy="38100"/>
-          </a:xfrm>
-          <a:prstGeom prst="rect">
+            <a:off x="3689350" y="2082800"/>
+            <a:ext cx="482600" cy="482600"/>
+          </a:xfrm>
+          <a:prstGeom prst="ellipse">
             <a:avLst/>
           </a:prstGeom>
           <a:solidFill>
-            <a:srgbClr val="9A9AA2"/>
+            <a:srgbClr val="0E0E11"/>
           </a:solidFill>
-          <a:ln>
-            <a:noFill/>
+          <a:ln w="15875">
+            <a:solidFill>
+              <a:srgbClr val="9A9AA2"/>
+            </a:solidFill>
           </a:ln>
           <a:effectLst/>
         </p:spPr>
@@ -6313,14 +6504,14 @@
       </p:sp>
       <p:sp>
         <p:nvSpPr>
-          <p:cNvPr id="104" name="TextBox 103"/>
-          <p:cNvSpPr txBox="1"/>
-          <p:nvPr/>
-        </p:nvSpPr>
-        <p:spPr>
-          <a:xfrm>
-            <a:off x="698500" y="2133600"/>
-            <a:ext cx="1492250" cy="317500"/>
+          <p:cNvPr id="105" name="TextBox 104"/>
+          <p:cNvSpPr txBox="1"/>
+          <p:nvPr/>
+        </p:nvSpPr>
+        <p:spPr>
+          <a:xfrm>
+            <a:off x="3676650" y="2228850"/>
+            <a:ext cx="508000" cy="190500"/>
           </a:xfrm>
           <a:prstGeom prst="rect">
             <a:avLst/>
@@ -6333,38 +6524,40 @@
           </a:bodyPr>
           <a:lstStyle/>
           <a:p>
-            <a:pPr algn="l"/>
-            <a:r>
-              <a:rPr sz="1900" b="0">
-                <a:solidFill>
-                  <a:srgbClr val="ECECEE"/>
-                </a:solidFill>
-                <a:latin typeface="Arial"/>
+            <a:pPr algn="ctr"/>
+            <a:r>
+              <a:rPr sz="1300" b="0" spc="80">
+                <a:solidFill>
+                  <a:srgbClr val="9A9AA2"/>
+                </a:solidFill>
+                <a:latin typeface="Courier New"/>
               </a:rPr>
-              <a:t>Requirements</a:t>
-            </a:r>
-          </a:p>
-        </p:txBody>
-      </p:sp>
-      <p:sp>
-        <p:nvSpPr>
-          <p:cNvPr id="105" name="Rectangle 104"/>
+              <a:t>02</a:t>
+            </a:r>
+          </a:p>
+        </p:txBody>
+      </p:sp>
+      <p:sp>
+        <p:nvSpPr>
+          <p:cNvPr id="106" name="Oval 105"/>
           <p:cNvSpPr/>
           <p:nvPr/>
         </p:nvSpPr>
         <p:spPr>
           <a:xfrm>
-            <a:off x="2851150" y="1905000"/>
-            <a:ext cx="406400" cy="38100"/>
-          </a:xfrm>
-          <a:prstGeom prst="rect">
+            <a:off x="5848350" y="2082800"/>
+            <a:ext cx="482600" cy="482600"/>
+          </a:xfrm>
+          <a:prstGeom prst="ellipse">
             <a:avLst/>
           </a:prstGeom>
           <a:solidFill>
-            <a:srgbClr val="9A9AA2"/>
+            <a:srgbClr val="0E0E11"/>
           </a:solidFill>
-          <a:ln>
-            <a:noFill/>
+          <a:ln w="15875">
+            <a:solidFill>
+              <a:srgbClr val="9A9AA2"/>
+            </a:solidFill>
           </a:ln>
           <a:effectLst/>
         </p:spPr>
@@ -6392,14 +6585,14 @@
       </p:sp>
       <p:sp>
         <p:nvSpPr>
-          <p:cNvPr id="106" name="TextBox 105"/>
-          <p:cNvSpPr txBox="1"/>
-          <p:nvPr/>
-        </p:nvSpPr>
-        <p:spPr>
-          <a:xfrm>
-            <a:off x="2851150" y="2133600"/>
-            <a:ext cx="1492250" cy="317500"/>
+          <p:cNvPr id="107" name="TextBox 106"/>
+          <p:cNvSpPr txBox="1"/>
+          <p:nvPr/>
+        </p:nvSpPr>
+        <p:spPr>
+          <a:xfrm>
+            <a:off x="5835650" y="2228850"/>
+            <a:ext cx="508000" cy="190500"/>
           </a:xfrm>
           <a:prstGeom prst="rect">
             <a:avLst/>
@@ -6412,22 +6605,359 @@
           </a:bodyPr>
           <a:lstStyle/>
           <a:p>
-            <a:pPr algn="l"/>
-            <a:r>
-              <a:rPr sz="1900" b="0">
+            <a:pPr algn="ctr"/>
+            <a:r>
+              <a:rPr sz="1300" b="0" spc="80">
+                <a:solidFill>
+                  <a:srgbClr val="9A9AA2"/>
+                </a:solidFill>
+                <a:latin typeface="Courier New"/>
+              </a:rPr>
+              <a:t>03</a:t>
+            </a:r>
+          </a:p>
+        </p:txBody>
+      </p:sp>
+      <p:sp>
+        <p:nvSpPr>
+          <p:cNvPr id="108" name="Oval 107"/>
+          <p:cNvSpPr/>
+          <p:nvPr/>
+        </p:nvSpPr>
+        <p:spPr>
+          <a:xfrm>
+            <a:off x="8007350" y="2082800"/>
+            <a:ext cx="482600" cy="482600"/>
+          </a:xfrm>
+          <a:prstGeom prst="ellipse">
+            <a:avLst/>
+          </a:prstGeom>
+          <a:solidFill>
+            <a:srgbClr val="0E0E11"/>
+          </a:solidFill>
+          <a:ln w="15875">
+            <a:solidFill>
+              <a:srgbClr val="9A9AA2"/>
+            </a:solidFill>
+          </a:ln>
+          <a:effectLst/>
+        </p:spPr>
+        <p:style>
+          <a:lnRef idx="1">
+            <a:schemeClr val="accent1"/>
+          </a:lnRef>
+          <a:fillRef idx="3">
+            <a:schemeClr val="accent1"/>
+          </a:fillRef>
+          <a:effectRef idx="2">
+            <a:schemeClr val="accent1"/>
+          </a:effectRef>
+          <a:fontRef idx="minor">
+            <a:schemeClr val="lt1"/>
+          </a:fontRef>
+        </p:style>
+        <p:txBody>
+          <a:bodyPr rtlCol="0" anchor="ctr"/>
+          <a:lstStyle/>
+          <a:p>
+            <a:pPr algn="ctr"/>
+          </a:p>
+        </p:txBody>
+      </p:sp>
+      <p:sp>
+        <p:nvSpPr>
+          <p:cNvPr id="109" name="TextBox 108"/>
+          <p:cNvSpPr txBox="1"/>
+          <p:nvPr/>
+        </p:nvSpPr>
+        <p:spPr>
+          <a:xfrm>
+            <a:off x="7994650" y="2228850"/>
+            <a:ext cx="508000" cy="190500"/>
+          </a:xfrm>
+          <a:prstGeom prst="rect">
+            <a:avLst/>
+          </a:prstGeom>
+          <a:noFill/>
+        </p:spPr>
+        <p:txBody>
+          <a:bodyPr wrap="square" lIns="0" rIns="0" tIns="0" bIns="0" anchor="ctr">
+            <a:spAutoFit/>
+          </a:bodyPr>
+          <a:lstStyle/>
+          <a:p>
+            <a:pPr algn="ctr"/>
+            <a:r>
+              <a:rPr sz="1300" b="0" spc="80">
+                <a:solidFill>
+                  <a:srgbClr val="9A9AA2"/>
+                </a:solidFill>
+                <a:latin typeface="Courier New"/>
+              </a:rPr>
+              <a:t>04</a:t>
+            </a:r>
+          </a:p>
+        </p:txBody>
+      </p:sp>
+      <p:sp>
+        <p:nvSpPr>
+          <p:cNvPr id="110" name="Oval 109"/>
+          <p:cNvSpPr/>
+          <p:nvPr/>
+        </p:nvSpPr>
+        <p:spPr>
+          <a:xfrm>
+            <a:off x="10166350" y="2082800"/>
+            <a:ext cx="482600" cy="482600"/>
+          </a:xfrm>
+          <a:prstGeom prst="ellipse">
+            <a:avLst/>
+          </a:prstGeom>
+          <a:solidFill>
+            <a:srgbClr val="0E0E11"/>
+          </a:solidFill>
+          <a:ln w="15875">
+            <a:solidFill>
+              <a:srgbClr val="9A9AA2"/>
+            </a:solidFill>
+          </a:ln>
+          <a:effectLst/>
+        </p:spPr>
+        <p:style>
+          <a:lnRef idx="1">
+            <a:schemeClr val="accent1"/>
+          </a:lnRef>
+          <a:fillRef idx="3">
+            <a:schemeClr val="accent1"/>
+          </a:fillRef>
+          <a:effectRef idx="2">
+            <a:schemeClr val="accent1"/>
+          </a:effectRef>
+          <a:fontRef idx="minor">
+            <a:schemeClr val="lt1"/>
+          </a:fontRef>
+        </p:style>
+        <p:txBody>
+          <a:bodyPr rtlCol="0" anchor="ctr"/>
+          <a:lstStyle/>
+          <a:p>
+            <a:pPr algn="ctr"/>
+          </a:p>
+        </p:txBody>
+      </p:sp>
+      <p:sp>
+        <p:nvSpPr>
+          <p:cNvPr id="111" name="TextBox 110"/>
+          <p:cNvSpPr txBox="1"/>
+          <p:nvPr/>
+        </p:nvSpPr>
+        <p:spPr>
+          <a:xfrm>
+            <a:off x="10153650" y="2228850"/>
+            <a:ext cx="508000" cy="190500"/>
+          </a:xfrm>
+          <a:prstGeom prst="rect">
+            <a:avLst/>
+          </a:prstGeom>
+          <a:noFill/>
+        </p:spPr>
+        <p:txBody>
+          <a:bodyPr wrap="square" lIns="0" rIns="0" tIns="0" bIns="0" anchor="ctr">
+            <a:spAutoFit/>
+          </a:bodyPr>
+          <a:lstStyle/>
+          <a:p>
+            <a:pPr algn="ctr"/>
+            <a:r>
+              <a:rPr sz="1300" b="0" spc="80">
+                <a:solidFill>
+                  <a:srgbClr val="9A9AA2"/>
+                </a:solidFill>
+                <a:latin typeface="Courier New"/>
+              </a:rPr>
+              <a:t>05</a:t>
+            </a:r>
+          </a:p>
+        </p:txBody>
+      </p:sp>
+      <p:sp>
+        <p:nvSpPr>
+          <p:cNvPr id="112" name="TextBox 111"/>
+          <p:cNvSpPr txBox="1"/>
+          <p:nvPr/>
+        </p:nvSpPr>
+        <p:spPr>
+          <a:xfrm>
+            <a:off x="755650" y="2705100"/>
+            <a:ext cx="2032000" cy="215900"/>
+          </a:xfrm>
+          <a:prstGeom prst="rect">
+            <a:avLst/>
+          </a:prstGeom>
+          <a:noFill/>
+        </p:spPr>
+        <p:txBody>
+          <a:bodyPr wrap="square" lIns="0" rIns="0" tIns="0" bIns="0" anchor="ctr">
+            <a:spAutoFit/>
+          </a:bodyPr>
+          <a:lstStyle/>
+          <a:p>
+            <a:pPr algn="ctr"/>
+            <a:r>
+              <a:rPr sz="1700" b="0">
                 <a:solidFill>
                   <a:srgbClr val="ECECEE"/>
                 </a:solidFill>
-                <a:latin typeface="Arial"/>
+                <a:latin typeface="Poppins"/>
+              </a:rPr>
+              <a:t>Requirements</a:t>
+            </a:r>
+          </a:p>
+        </p:txBody>
+      </p:sp>
+      <p:sp>
+        <p:nvSpPr>
+          <p:cNvPr id="113" name="TextBox 112"/>
+          <p:cNvSpPr txBox="1"/>
+          <p:nvPr/>
+        </p:nvSpPr>
+        <p:spPr>
+          <a:xfrm>
+            <a:off x="2914650" y="2705100"/>
+            <a:ext cx="2032000" cy="215900"/>
+          </a:xfrm>
+          <a:prstGeom prst="rect">
+            <a:avLst/>
+          </a:prstGeom>
+          <a:noFill/>
+        </p:spPr>
+        <p:txBody>
+          <a:bodyPr wrap="square" lIns="0" rIns="0" tIns="0" bIns="0" anchor="ctr">
+            <a:spAutoFit/>
+          </a:bodyPr>
+          <a:lstStyle/>
+          <a:p>
+            <a:pPr algn="ctr"/>
+            <a:r>
+              <a:rPr sz="1700" b="0">
+                <a:solidFill>
+                  <a:srgbClr val="ECECEE"/>
+                </a:solidFill>
+                <a:latin typeface="Poppins"/>
               </a:rPr>
               <a:t>Feasibility</a:t>
             </a:r>
           </a:p>
         </p:txBody>
       </p:sp>
+      <p:sp>
+        <p:nvSpPr>
+          <p:cNvPr id="114" name="TextBox 113"/>
+          <p:cNvSpPr txBox="1"/>
+          <p:nvPr/>
+        </p:nvSpPr>
+        <p:spPr>
+          <a:xfrm>
+            <a:off x="5073650" y="2705100"/>
+            <a:ext cx="2032000" cy="215900"/>
+          </a:xfrm>
+          <a:prstGeom prst="rect">
+            <a:avLst/>
+          </a:prstGeom>
+          <a:noFill/>
+        </p:spPr>
+        <p:txBody>
+          <a:bodyPr wrap="square" lIns="0" rIns="0" tIns="0" bIns="0" anchor="ctr">
+            <a:spAutoFit/>
+          </a:bodyPr>
+          <a:lstStyle/>
+          <a:p>
+            <a:pPr algn="ctr"/>
+            <a:r>
+              <a:rPr sz="1700" b="0">
+                <a:solidFill>
+                  <a:srgbClr val="ECECEE"/>
+                </a:solidFill>
+                <a:latin typeface="Poppins"/>
+              </a:rPr>
+              <a:t>Compliance</a:t>
+            </a:r>
+          </a:p>
+        </p:txBody>
+      </p:sp>
+      <p:sp>
+        <p:nvSpPr>
+          <p:cNvPr id="115" name="TextBox 114"/>
+          <p:cNvSpPr txBox="1"/>
+          <p:nvPr/>
+        </p:nvSpPr>
+        <p:spPr>
+          <a:xfrm>
+            <a:off x="7232650" y="2705100"/>
+            <a:ext cx="2032000" cy="215900"/>
+          </a:xfrm>
+          <a:prstGeom prst="rect">
+            <a:avLst/>
+          </a:prstGeom>
+          <a:noFill/>
+        </p:spPr>
+        <p:txBody>
+          <a:bodyPr wrap="square" lIns="0" rIns="0" tIns="0" bIns="0" anchor="ctr">
+            <a:spAutoFit/>
+          </a:bodyPr>
+          <a:lstStyle/>
+          <a:p>
+            <a:pPr algn="ctr"/>
+            <a:r>
+              <a:rPr sz="1700" b="0">
+                <a:solidFill>
+                  <a:srgbClr val="ECECEE"/>
+                </a:solidFill>
+                <a:latin typeface="Poppins"/>
+              </a:rPr>
+              <a:t>Approval</a:t>
+            </a:r>
+          </a:p>
+        </p:txBody>
+      </p:sp>
+      <p:sp>
+        <p:nvSpPr>
+          <p:cNvPr id="116" name="TextBox 115"/>
+          <p:cNvSpPr txBox="1"/>
+          <p:nvPr/>
+        </p:nvSpPr>
+        <p:spPr>
+          <a:xfrm>
+            <a:off x="9391650" y="2705100"/>
+            <a:ext cx="2032000" cy="215900"/>
+          </a:xfrm>
+          <a:prstGeom prst="rect">
+            <a:avLst/>
+          </a:prstGeom>
+          <a:noFill/>
+        </p:spPr>
+        <p:txBody>
+          <a:bodyPr wrap="square" lIns="0" rIns="0" tIns="0" bIns="0" anchor="ctr">
+            <a:spAutoFit/>
+          </a:bodyPr>
+          <a:lstStyle/>
+          <a:p>
+            <a:pPr algn="ctr"/>
+            <a:r>
+              <a:rPr sz="1700" b="0">
+                <a:solidFill>
+                  <a:srgbClr val="ECECEE"/>
+                </a:solidFill>
+                <a:latin typeface="Poppins"/>
+              </a:rPr>
+              <a:t>Operations</a:t>
+            </a:r>
+          </a:p>
+        </p:txBody>
+      </p:sp>
       <p:pic>
         <p:nvPicPr>
-          <p:cNvPr id="107" name="Picture 106" descr="ic-handoff.png"/>
+          <p:cNvPr id="117" name="Picture 116" descr="ic-handoff.png"/>
           <p:cNvPicPr>
             <a:picLocks noChangeAspect="1"/>
           </p:cNvPicPr>
@@ -6441,8 +6971,8 @@
         </p:blipFill>
         <p:spPr>
           <a:xfrm>
-            <a:off x="2406650" y="2133600"/>
-            <a:ext cx="177800" cy="177800"/>
+            <a:off x="2590800" y="1905000"/>
+            <a:ext cx="139700" cy="139700"/>
           </a:xfrm>
           <a:prstGeom prst="rect">
             <a:avLst/>
@@ -6451,7 +6981,7 @@
       </p:pic>
       <p:pic>
         <p:nvPicPr>
-          <p:cNvPr id="108" name="Picture 107" descr="ic-doc.png"/>
+          <p:cNvPr id="118" name="Picture 117" descr="ic-doc.png"/>
           <p:cNvPicPr>
             <a:picLocks noChangeAspect="1"/>
           </p:cNvPicPr>
@@ -6465,8 +6995,8 @@
         </p:blipFill>
         <p:spPr>
           <a:xfrm>
-            <a:off x="2406650" y="2387600"/>
-            <a:ext cx="177800" cy="177800"/>
+            <a:off x="2781300" y="1905000"/>
+            <a:ext cx="139700" cy="139700"/>
           </a:xfrm>
           <a:prstGeom prst="rect">
             <a:avLst/>
@@ -6475,7 +7005,7 @@
       </p:pic>
       <p:pic>
         <p:nvPicPr>
-          <p:cNvPr id="109" name="Picture 108" descr="ic-wait.png"/>
+          <p:cNvPr id="119" name="Picture 118" descr="ic-wait.png"/>
           <p:cNvPicPr>
             <a:picLocks noChangeAspect="1"/>
           </p:cNvPicPr>
@@ -6489,96 +7019,17 @@
         </p:blipFill>
         <p:spPr>
           <a:xfrm>
-            <a:off x="2406650" y="2641600"/>
-            <a:ext cx="177800" cy="177800"/>
+            <a:off x="2971800" y="1905000"/>
+            <a:ext cx="139700" cy="139700"/>
           </a:xfrm>
           <a:prstGeom prst="rect">
             <a:avLst/>
           </a:prstGeom>
         </p:spPr>
       </p:pic>
-      <p:sp>
-        <p:nvSpPr>
-          <p:cNvPr id="110" name="Rectangle 109"/>
-          <p:cNvSpPr/>
-          <p:nvPr/>
-        </p:nvSpPr>
-        <p:spPr>
-          <a:xfrm>
-            <a:off x="5010150" y="1905000"/>
-            <a:ext cx="406400" cy="38100"/>
-          </a:xfrm>
-          <a:prstGeom prst="rect">
-            <a:avLst/>
-          </a:prstGeom>
-          <a:solidFill>
-            <a:srgbClr val="9A9AA2"/>
-          </a:solidFill>
-          <a:ln>
-            <a:noFill/>
-          </a:ln>
-          <a:effectLst/>
-        </p:spPr>
-        <p:style>
-          <a:lnRef idx="1">
-            <a:schemeClr val="accent1"/>
-          </a:lnRef>
-          <a:fillRef idx="3">
-            <a:schemeClr val="accent1"/>
-          </a:fillRef>
-          <a:effectRef idx="2">
-            <a:schemeClr val="accent1"/>
-          </a:effectRef>
-          <a:fontRef idx="minor">
-            <a:schemeClr val="lt1"/>
-          </a:fontRef>
-        </p:style>
-        <p:txBody>
-          <a:bodyPr rtlCol="0" anchor="ctr"/>
-          <a:lstStyle/>
-          <a:p>
-            <a:pPr algn="ctr"/>
-          </a:p>
-        </p:txBody>
-      </p:sp>
-      <p:sp>
-        <p:nvSpPr>
-          <p:cNvPr id="111" name="TextBox 110"/>
-          <p:cNvSpPr txBox="1"/>
-          <p:nvPr/>
-        </p:nvSpPr>
-        <p:spPr>
-          <a:xfrm>
-            <a:off x="5010150" y="2133600"/>
-            <a:ext cx="1492250" cy="317500"/>
-          </a:xfrm>
-          <a:prstGeom prst="rect">
-            <a:avLst/>
-          </a:prstGeom>
-          <a:noFill/>
-        </p:spPr>
-        <p:txBody>
-          <a:bodyPr wrap="square" lIns="0" rIns="0" tIns="0" bIns="0" anchor="ctr">
-            <a:spAutoFit/>
-          </a:bodyPr>
-          <a:lstStyle/>
-          <a:p>
-            <a:pPr algn="l"/>
-            <a:r>
-              <a:rPr sz="1900" b="0">
-                <a:solidFill>
-                  <a:srgbClr val="ECECEE"/>
-                </a:solidFill>
-                <a:latin typeface="Arial"/>
-              </a:rPr>
-              <a:t>Compliance</a:t>
-            </a:r>
-          </a:p>
-        </p:txBody>
-      </p:sp>
       <p:pic>
         <p:nvPicPr>
-          <p:cNvPr id="112" name="Picture 111" descr="ic-handoff.png"/>
+          <p:cNvPr id="120" name="Picture 119" descr="ic-handoff.png"/>
           <p:cNvPicPr>
             <a:picLocks noChangeAspect="1"/>
           </p:cNvPicPr>
@@ -6592,8 +7043,8 @@
         </p:blipFill>
         <p:spPr>
           <a:xfrm>
-            <a:off x="4565650" y="2133600"/>
-            <a:ext cx="177800" cy="177800"/>
+            <a:off x="4749800" y="1905000"/>
+            <a:ext cx="139700" cy="139700"/>
           </a:xfrm>
           <a:prstGeom prst="rect">
             <a:avLst/>
@@ -6602,7 +7053,7 @@
       </p:pic>
       <p:pic>
         <p:nvPicPr>
-          <p:cNvPr id="113" name="Picture 112" descr="ic-doc.png"/>
+          <p:cNvPr id="121" name="Picture 120" descr="ic-doc.png"/>
           <p:cNvPicPr>
             <a:picLocks noChangeAspect="1"/>
           </p:cNvPicPr>
@@ -6616,8 +7067,8 @@
         </p:blipFill>
         <p:spPr>
           <a:xfrm>
-            <a:off x="4565650" y="2387600"/>
-            <a:ext cx="177800" cy="177800"/>
+            <a:off x="4940300" y="1905000"/>
+            <a:ext cx="139700" cy="139700"/>
           </a:xfrm>
           <a:prstGeom prst="rect">
             <a:avLst/>
@@ -6626,7 +7077,7 @@
       </p:pic>
       <p:pic>
         <p:nvPicPr>
-          <p:cNvPr id="114" name="Picture 113" descr="ic-wait.png"/>
+          <p:cNvPr id="122" name="Picture 121" descr="ic-wait.png"/>
           <p:cNvPicPr>
             <a:picLocks noChangeAspect="1"/>
           </p:cNvPicPr>
@@ -6640,96 +7091,17 @@
         </p:blipFill>
         <p:spPr>
           <a:xfrm>
-            <a:off x="4565650" y="2641600"/>
-            <a:ext cx="177800" cy="177800"/>
+            <a:off x="5130800" y="1905000"/>
+            <a:ext cx="139700" cy="139700"/>
           </a:xfrm>
           <a:prstGeom prst="rect">
             <a:avLst/>
           </a:prstGeom>
         </p:spPr>
       </p:pic>
-      <p:sp>
-        <p:nvSpPr>
-          <p:cNvPr id="115" name="Rectangle 114"/>
-          <p:cNvSpPr/>
-          <p:nvPr/>
-        </p:nvSpPr>
-        <p:spPr>
-          <a:xfrm>
-            <a:off x="7169150" y="1905000"/>
-            <a:ext cx="406400" cy="38100"/>
-          </a:xfrm>
-          <a:prstGeom prst="rect">
-            <a:avLst/>
-          </a:prstGeom>
-          <a:solidFill>
-            <a:srgbClr val="9A9AA2"/>
-          </a:solidFill>
-          <a:ln>
-            <a:noFill/>
-          </a:ln>
-          <a:effectLst/>
-        </p:spPr>
-        <p:style>
-          <a:lnRef idx="1">
-            <a:schemeClr val="accent1"/>
-          </a:lnRef>
-          <a:fillRef idx="3">
-            <a:schemeClr val="accent1"/>
-          </a:fillRef>
-          <a:effectRef idx="2">
-            <a:schemeClr val="accent1"/>
-          </a:effectRef>
-          <a:fontRef idx="minor">
-            <a:schemeClr val="lt1"/>
-          </a:fontRef>
-        </p:style>
-        <p:txBody>
-          <a:bodyPr rtlCol="0" anchor="ctr"/>
-          <a:lstStyle/>
-          <a:p>
-            <a:pPr algn="ctr"/>
-          </a:p>
-        </p:txBody>
-      </p:sp>
-      <p:sp>
-        <p:nvSpPr>
-          <p:cNvPr id="116" name="TextBox 115"/>
-          <p:cNvSpPr txBox="1"/>
-          <p:nvPr/>
-        </p:nvSpPr>
-        <p:spPr>
-          <a:xfrm>
-            <a:off x="7169150" y="2133600"/>
-            <a:ext cx="1492250" cy="317500"/>
-          </a:xfrm>
-          <a:prstGeom prst="rect">
-            <a:avLst/>
-          </a:prstGeom>
-          <a:noFill/>
-        </p:spPr>
-        <p:txBody>
-          <a:bodyPr wrap="square" lIns="0" rIns="0" tIns="0" bIns="0" anchor="ctr">
-            <a:spAutoFit/>
-          </a:bodyPr>
-          <a:lstStyle/>
-          <a:p>
-            <a:pPr algn="l"/>
-            <a:r>
-              <a:rPr sz="1900" b="0">
-                <a:solidFill>
-                  <a:srgbClr val="ECECEE"/>
-                </a:solidFill>
-                <a:latin typeface="Arial"/>
-              </a:rPr>
-              <a:t>Approval</a:t>
-            </a:r>
-          </a:p>
-        </p:txBody>
-      </p:sp>
       <p:pic>
         <p:nvPicPr>
-          <p:cNvPr id="117" name="Picture 116" descr="ic-handoff.png"/>
+          <p:cNvPr id="123" name="Picture 122" descr="ic-handoff.png"/>
           <p:cNvPicPr>
             <a:picLocks noChangeAspect="1"/>
           </p:cNvPicPr>
@@ -6743,8 +7115,8 @@
         </p:blipFill>
         <p:spPr>
           <a:xfrm>
-            <a:off x="6724650" y="2133600"/>
-            <a:ext cx="177800" cy="177800"/>
+            <a:off x="6908800" y="1905000"/>
+            <a:ext cx="139700" cy="139700"/>
           </a:xfrm>
           <a:prstGeom prst="rect">
             <a:avLst/>
@@ -6753,7 +7125,7 @@
       </p:pic>
       <p:pic>
         <p:nvPicPr>
-          <p:cNvPr id="118" name="Picture 117" descr="ic-doc.png"/>
+          <p:cNvPr id="124" name="Picture 123" descr="ic-doc.png"/>
           <p:cNvPicPr>
             <a:picLocks noChangeAspect="1"/>
           </p:cNvPicPr>
@@ -6767,8 +7139,8 @@
         </p:blipFill>
         <p:spPr>
           <a:xfrm>
-            <a:off x="6724650" y="2387600"/>
-            <a:ext cx="177800" cy="177800"/>
+            <a:off x="7099300" y="1905000"/>
+            <a:ext cx="139700" cy="139700"/>
           </a:xfrm>
           <a:prstGeom prst="rect">
             <a:avLst/>
@@ -6777,7 +7149,7 @@
       </p:pic>
       <p:pic>
         <p:nvPicPr>
-          <p:cNvPr id="119" name="Picture 118" descr="ic-wait.png"/>
+          <p:cNvPr id="125" name="Picture 124" descr="ic-wait.png"/>
           <p:cNvPicPr>
             <a:picLocks noChangeAspect="1"/>
           </p:cNvPicPr>
@@ -6791,96 +7163,17 @@
         </p:blipFill>
         <p:spPr>
           <a:xfrm>
-            <a:off x="6724650" y="2641600"/>
-            <a:ext cx="177800" cy="177800"/>
+            <a:off x="7289800" y="1905000"/>
+            <a:ext cx="139700" cy="139700"/>
           </a:xfrm>
           <a:prstGeom prst="rect">
             <a:avLst/>
           </a:prstGeom>
         </p:spPr>
       </p:pic>
-      <p:sp>
-        <p:nvSpPr>
-          <p:cNvPr id="120" name="Rectangle 119"/>
-          <p:cNvSpPr/>
-          <p:nvPr/>
-        </p:nvSpPr>
-        <p:spPr>
-          <a:xfrm>
-            <a:off x="9328150" y="1905000"/>
-            <a:ext cx="406400" cy="38100"/>
-          </a:xfrm>
-          <a:prstGeom prst="rect">
-            <a:avLst/>
-          </a:prstGeom>
-          <a:solidFill>
-            <a:srgbClr val="9A9AA2"/>
-          </a:solidFill>
-          <a:ln>
-            <a:noFill/>
-          </a:ln>
-          <a:effectLst/>
-        </p:spPr>
-        <p:style>
-          <a:lnRef idx="1">
-            <a:schemeClr val="accent1"/>
-          </a:lnRef>
-          <a:fillRef idx="3">
-            <a:schemeClr val="accent1"/>
-          </a:fillRef>
-          <a:effectRef idx="2">
-            <a:schemeClr val="accent1"/>
-          </a:effectRef>
-          <a:fontRef idx="minor">
-            <a:schemeClr val="lt1"/>
-          </a:fontRef>
-        </p:style>
-        <p:txBody>
-          <a:bodyPr rtlCol="0" anchor="ctr"/>
-          <a:lstStyle/>
-          <a:p>
-            <a:pPr algn="ctr"/>
-          </a:p>
-        </p:txBody>
-      </p:sp>
-      <p:sp>
-        <p:nvSpPr>
-          <p:cNvPr id="121" name="TextBox 120"/>
-          <p:cNvSpPr txBox="1"/>
-          <p:nvPr/>
-        </p:nvSpPr>
-        <p:spPr>
-          <a:xfrm>
-            <a:off x="9328150" y="2133600"/>
-            <a:ext cx="1492250" cy="317500"/>
-          </a:xfrm>
-          <a:prstGeom prst="rect">
-            <a:avLst/>
-          </a:prstGeom>
-          <a:noFill/>
-        </p:spPr>
-        <p:txBody>
-          <a:bodyPr wrap="square" lIns="0" rIns="0" tIns="0" bIns="0" anchor="ctr">
-            <a:spAutoFit/>
-          </a:bodyPr>
-          <a:lstStyle/>
-          <a:p>
-            <a:pPr algn="l"/>
-            <a:r>
-              <a:rPr sz="1900" b="0">
-                <a:solidFill>
-                  <a:srgbClr val="ECECEE"/>
-                </a:solidFill>
-                <a:latin typeface="Arial"/>
-              </a:rPr>
-              <a:t>Operations</a:t>
-            </a:r>
-          </a:p>
-        </p:txBody>
-      </p:sp>
       <p:pic>
         <p:nvPicPr>
-          <p:cNvPr id="122" name="Picture 121" descr="ic-handoff.png"/>
+          <p:cNvPr id="126" name="Picture 125" descr="ic-handoff.png"/>
           <p:cNvPicPr>
             <a:picLocks noChangeAspect="1"/>
           </p:cNvPicPr>
@@ -6894,8 +7187,8 @@
         </p:blipFill>
         <p:spPr>
           <a:xfrm>
-            <a:off x="8883650" y="2133600"/>
-            <a:ext cx="177800" cy="177800"/>
+            <a:off x="9067800" y="1905000"/>
+            <a:ext cx="139700" cy="139700"/>
           </a:xfrm>
           <a:prstGeom prst="rect">
             <a:avLst/>
@@ -6904,7 +7197,7 @@
       </p:pic>
       <p:pic>
         <p:nvPicPr>
-          <p:cNvPr id="123" name="Picture 122" descr="ic-doc.png"/>
+          <p:cNvPr id="127" name="Picture 126" descr="ic-doc.png"/>
           <p:cNvPicPr>
             <a:picLocks noChangeAspect="1"/>
           </p:cNvPicPr>
@@ -6918,8 +7211,8 @@
         </p:blipFill>
         <p:spPr>
           <a:xfrm>
-            <a:off x="8883650" y="2387600"/>
-            <a:ext cx="177800" cy="177800"/>
+            <a:off x="9258300" y="1905000"/>
+            <a:ext cx="139700" cy="139700"/>
           </a:xfrm>
           <a:prstGeom prst="rect">
             <a:avLst/>
@@ -6928,7 +7221,7 @@
       </p:pic>
       <p:pic>
         <p:nvPicPr>
-          <p:cNvPr id="124" name="Picture 123" descr="ic-wait.png"/>
+          <p:cNvPr id="128" name="Picture 127" descr="ic-wait.png"/>
           <p:cNvPicPr>
             <a:picLocks noChangeAspect="1"/>
           </p:cNvPicPr>
@@ -6942,8 +7235,8 @@
         </p:blipFill>
         <p:spPr>
           <a:xfrm>
-            <a:off x="8883650" y="2641600"/>
-            <a:ext cx="177800" cy="177800"/>
+            <a:off x="9448800" y="1905000"/>
+            <a:ext cx="139700" cy="139700"/>
           </a:xfrm>
           <a:prstGeom prst="rect">
             <a:avLst/>
@@ -6952,13 +7245,13 @@
       </p:pic>
       <p:sp>
         <p:nvSpPr>
-          <p:cNvPr id="125" name="TextBox 124"/>
-          <p:cNvSpPr txBox="1"/>
-          <p:nvPr/>
-        </p:nvSpPr>
-        <p:spPr>
-          <a:xfrm>
-            <a:off x="698500" y="3048000"/>
+          <p:cNvPr id="129" name="TextBox 128"/>
+          <p:cNvSpPr txBox="1"/>
+          <p:nvPr/>
+        </p:nvSpPr>
+        <p:spPr>
+          <a:xfrm>
+            <a:off x="698500" y="3124200"/>
             <a:ext cx="9525000" cy="190500"/>
           </a:xfrm>
           <a:prstGeom prst="rect">
@@ -6978,7 +7271,7 @@
                 <a:solidFill>
                   <a:srgbClr val="9A9AA2"/>
                 </a:solidFill>
-                <a:latin typeface="Arial"/>
+                <a:latin typeface="Poppins"/>
               </a:rPr>
               <a:t>Five steps around the code. Every one of them a handoff, a document, a wait.</a:t>
             </a:r>
@@ -6987,13 +7280,13 @@
       </p:sp>
       <p:sp>
         <p:nvSpPr>
-          <p:cNvPr id="126" name="Rectangle 125"/>
+          <p:cNvPr id="130" name="Rectangle 129"/>
           <p:cNvSpPr/>
           <p:nvPr/>
         </p:nvSpPr>
         <p:spPr>
           <a:xfrm>
-            <a:off x="698500" y="3530600"/>
+            <a:off x="698500" y="3479800"/>
             <a:ext cx="10788650" cy="6350"/>
           </a:xfrm>
           <a:prstGeom prst="rect">
@@ -7031,14 +7324,14 @@
       </p:sp>
       <p:sp>
         <p:nvSpPr>
-          <p:cNvPr id="127" name="TextBox 126"/>
-          <p:cNvSpPr txBox="1"/>
-          <p:nvPr/>
-        </p:nvSpPr>
-        <p:spPr>
-          <a:xfrm>
-            <a:off x="698500" y="3733800"/>
-            <a:ext cx="9525000" cy="177800"/>
+          <p:cNvPr id="131" name="TextBox 130"/>
+          <p:cNvSpPr txBox="1"/>
+          <p:nvPr/>
+        </p:nvSpPr>
+        <p:spPr>
+          <a:xfrm>
+            <a:off x="698500" y="3670300"/>
+            <a:ext cx="9525000" cy="165100"/>
           </a:xfrm>
           <a:prstGeom prst="rect">
             <a:avLst/>
@@ -7066,13 +7359,13 @@
       </p:sp>
       <p:sp>
         <p:nvSpPr>
-          <p:cNvPr id="128" name="TextBox 127"/>
-          <p:cNvSpPr txBox="1"/>
-          <p:nvPr/>
-        </p:nvSpPr>
-        <p:spPr>
-          <a:xfrm>
-            <a:off x="698500" y="3975100"/>
+          <p:cNvPr id="132" name="TextBox 131"/>
+          <p:cNvSpPr txBox="1"/>
+          <p:nvPr/>
+        </p:nvSpPr>
+        <p:spPr>
+          <a:xfrm>
+            <a:off x="698500" y="3886200"/>
             <a:ext cx="5715000" cy="825500"/>
           </a:xfrm>
           <a:prstGeom prst="rect">
@@ -7087,20 +7380,20 @@
           <a:lstStyle/>
           <a:p>
             <a:r>
-              <a:rPr sz="6400" b="0">
+              <a:rPr sz="5400" b="0">
                 <a:solidFill>
                   <a:srgbClr val="FF6B3D"/>
                 </a:solidFill>
-                <a:latin typeface="Arial"/>
+                <a:latin typeface="Poppins"/>
               </a:rPr>
               <a:t>61</a:t>
             </a:r>
             <a:r>
-              <a:rPr sz="2600" b="0">
+              <a:rPr sz="2400" b="0">
                 <a:solidFill>
                   <a:srgbClr val="9A9AA2"/>
                 </a:solidFill>
-                <a:latin typeface="Arial"/>
+                <a:latin typeface="Poppins"/>
               </a:rPr>
               <a:t>%</a:t>
             </a:r>
@@ -7109,13 +7402,13 @@
       </p:sp>
       <p:sp>
         <p:nvSpPr>
-          <p:cNvPr id="129" name="TextBox 128"/>
-          <p:cNvSpPr txBox="1"/>
-          <p:nvPr/>
-        </p:nvSpPr>
-        <p:spPr>
-          <a:xfrm>
-            <a:off x="698500" y="4864100"/>
+          <p:cNvPr id="133" name="TextBox 132"/>
+          <p:cNvSpPr txBox="1"/>
+          <p:nvPr/>
+        </p:nvSpPr>
+        <p:spPr>
+          <a:xfrm>
+            <a:off x="698500" y="4851400"/>
             <a:ext cx="7620000" cy="190500"/>
           </a:xfrm>
           <a:prstGeom prst="rect">
@@ -7135,7 +7428,7 @@
                 <a:solidFill>
                   <a:srgbClr val="9A9AA2"/>
                 </a:solidFill>
-                <a:latin typeface="Arial"/>
+                <a:latin typeface="Poppins"/>
               </a:rPr>
               <a:t>of organizations see no EBIT impact from AI</a:t>
             </a:r>
@@ -7144,13 +7437,13 @@
       </p:sp>
       <p:sp>
         <p:nvSpPr>
-          <p:cNvPr id="130" name="Rectangle 129"/>
+          <p:cNvPr id="134" name="Rectangle 133"/>
           <p:cNvSpPr/>
           <p:nvPr/>
         </p:nvSpPr>
         <p:spPr>
           <a:xfrm>
-            <a:off x="698500" y="5270500"/>
+            <a:off x="698500" y="5156200"/>
             <a:ext cx="10788650" cy="6350"/>
           </a:xfrm>
           <a:prstGeom prst="rect">
@@ -7188,13 +7481,13 @@
       </p:sp>
       <p:sp>
         <p:nvSpPr>
-          <p:cNvPr id="131" name="TextBox 130"/>
-          <p:cNvSpPr txBox="1"/>
-          <p:nvPr/>
-        </p:nvSpPr>
-        <p:spPr>
-          <a:xfrm>
-            <a:off x="698500" y="5473700"/>
+          <p:cNvPr id="135" name="TextBox 134"/>
+          <p:cNvSpPr txBox="1"/>
+          <p:nvPr/>
+        </p:nvSpPr>
+        <p:spPr>
+          <a:xfrm>
+            <a:off x="698500" y="5321300"/>
             <a:ext cx="9906000" cy="215900"/>
           </a:xfrm>
           <a:prstGeom prst="rect">
@@ -7214,7 +7507,7 @@
                 <a:solidFill>
                   <a:srgbClr val="ECECEE"/>
                 </a:solidFill>
-                <a:latin typeface="Arial"/>
+                <a:latin typeface="Poppins"/>
               </a:rPr>
               <a:t>The expensive failures happen before a line of code.</a:t>
             </a:r>
@@ -7223,7 +7516,7 @@
                 <a:solidFill>
                   <a:srgbClr val="9A9AA2"/>
                 </a:solidFill>
-                <a:latin typeface="Arial"/>
+                <a:latin typeface="Poppins"/>
               </a:rPr>
               <a:t> That’s the part we automate.</a:t>
             </a:r>
@@ -7232,13 +7525,13 @@
       </p:sp>
       <p:sp>
         <p:nvSpPr>
-          <p:cNvPr id="132" name="TextBox 131"/>
-          <p:cNvSpPr txBox="1"/>
-          <p:nvPr/>
-        </p:nvSpPr>
-        <p:spPr>
-          <a:xfrm>
-            <a:off x="698500" y="5765800"/>
+          <p:cNvPr id="136" name="TextBox 135"/>
+          <p:cNvSpPr txBox="1"/>
+          <p:nvPr/>
+        </p:nvSpPr>
+        <p:spPr>
+          <a:xfrm>
+            <a:off x="698500" y="5588000"/>
             <a:ext cx="9525000" cy="152400"/>
           </a:xfrm>
           <a:prstGeom prst="rect">
@@ -7267,7 +7560,7 @@
       </p:sp>
       <p:pic>
         <p:nvPicPr>
-          <p:cNvPr id="133" name="Picture 132" descr="logo.png"/>
+          <p:cNvPr id="137" name="Picture 136" descr="logo.png"/>
           <p:cNvPicPr>
             <a:picLocks noChangeAspect="1"/>
           </p:cNvPicPr>
@@ -7368,20 +7661,20 @@
           <a:p>
             <a:pPr algn="l"/>
             <a:r>
-              <a:rPr sz="2800" b="1">
+              <a:rPr sz="2700" b="1">
                 <a:solidFill>
                   <a:srgbClr val="ECECEE"/>
                 </a:solidFill>
-                <a:latin typeface="Arial"/>
+                <a:latin typeface="Poppins"/>
               </a:rPr>
               <a:t>From idea to build-ready package.</a:t>
             </a:r>
             <a:r>
-              <a:rPr sz="2800" b="0">
+              <a:rPr sz="2700" b="0">
                 <a:solidFill>
                   <a:srgbClr val="9A9AA2"/>
                 </a:solidFill>
-                <a:latin typeface="Arial"/>
+                <a:latin typeface="Poppins"/>
               </a:rPr>
               <a:t> </a:t>
             </a:r>
@@ -7397,7 +7690,7 @@
         <p:spPr>
           <a:xfrm>
             <a:off x="8312150" y="622300"/>
-            <a:ext cx="3175000" cy="139700"/>
+            <a:ext cx="3175000" cy="152400"/>
           </a:xfrm>
           <a:prstGeom prst="rect">
             <a:avLst/>
@@ -7499,7 +7792,7 @@
                 <a:solidFill>
                   <a:srgbClr val="9A9AA2"/>
                 </a:solidFill>
-                <a:latin typeface="Arial"/>
+                <a:latin typeface="Poppins"/>
               </a:rPr>
               <a:t>One line, a human gate at every step. AI agents support every stage, </a:t>
             </a:r>
@@ -7508,7 +7801,7 @@
                 <a:solidFill>
                   <a:srgbClr val="ECECEE"/>
                 </a:solidFill>
-                <a:latin typeface="Arial"/>
+                <a:latin typeface="Poppins"/>
               </a:rPr>
               <a:t>Discover through AI Memory</a:t>
             </a:r>
@@ -7517,7 +7810,7 @@
                 <a:solidFill>
                   <a:srgbClr val="9A9AA2"/>
                 </a:solidFill>
-                <a:latin typeface="Arial"/>
+                <a:latin typeface="Poppins"/>
               </a:rPr>
               <a:t> — from first conversation to a build-ready package.</a:t>
             </a:r>
@@ -7526,48 +7819,13 @@
       </p:sp>
       <p:sp>
         <p:nvSpPr>
-          <p:cNvPr id="103" name="TextBox 102"/>
-          <p:cNvSpPr txBox="1"/>
-          <p:nvPr/>
-        </p:nvSpPr>
-        <p:spPr>
-          <a:xfrm>
-            <a:off x="698500" y="2387600"/>
-            <a:ext cx="5715000" cy="177800"/>
-          </a:xfrm>
-          <a:prstGeom prst="rect">
-            <a:avLst/>
-          </a:prstGeom>
-          <a:noFill/>
-        </p:spPr>
-        <p:txBody>
-          <a:bodyPr wrap="square" lIns="0" rIns="0" tIns="0" bIns="0" anchor="ctr">
-            <a:spAutoFit/>
-          </a:bodyPr>
-          <a:lstStyle/>
-          <a:p>
-            <a:pPr algn="l"/>
-            <a:r>
-              <a:rPr sz="1100" b="0" spc="300">
-                <a:solidFill>
-                  <a:srgbClr val="9A9AA2"/>
-                </a:solidFill>
-                <a:latin typeface="Courier New"/>
-              </a:rPr>
-              <a:t>IDEA TO BUILD-READY PACKAGE</a:t>
-            </a:r>
-          </a:p>
-        </p:txBody>
-      </p:sp>
-      <p:sp>
-        <p:nvSpPr>
-          <p:cNvPr id="104" name="Rectangle 103"/>
+          <p:cNvPr id="103" name="Rectangle 102"/>
           <p:cNvSpPr/>
           <p:nvPr/>
         </p:nvSpPr>
         <p:spPr>
           <a:xfrm>
-            <a:off x="698500" y="3556000"/>
+            <a:off x="698500" y="2794000"/>
             <a:ext cx="10788650" cy="6350"/>
           </a:xfrm>
           <a:prstGeom prst="rect">
@@ -7605,14 +7863,95 @@
       </p:sp>
       <p:sp>
         <p:nvSpPr>
-          <p:cNvPr id="105" name="Diamond 104"/>
+          <p:cNvPr id="104" name="Oval 103"/>
           <p:cNvSpPr/>
           <p:nvPr/>
         </p:nvSpPr>
         <p:spPr>
           <a:xfrm>
-            <a:off x="2800350" y="3505200"/>
-            <a:ext cx="101600" cy="101600"/>
+            <a:off x="1530350" y="2552700"/>
+            <a:ext cx="482600" cy="482600"/>
+          </a:xfrm>
+          <a:prstGeom prst="ellipse">
+            <a:avLst/>
+          </a:prstGeom>
+          <a:solidFill>
+            <a:srgbClr val="0E0E11"/>
+          </a:solidFill>
+          <a:ln w="15875">
+            <a:solidFill>
+              <a:srgbClr val="9A9AA2"/>
+            </a:solidFill>
+          </a:ln>
+          <a:effectLst/>
+        </p:spPr>
+        <p:style>
+          <a:lnRef idx="1">
+            <a:schemeClr val="accent1"/>
+          </a:lnRef>
+          <a:fillRef idx="3">
+            <a:schemeClr val="accent1"/>
+          </a:fillRef>
+          <a:effectRef idx="2">
+            <a:schemeClr val="accent1"/>
+          </a:effectRef>
+          <a:fontRef idx="minor">
+            <a:schemeClr val="lt1"/>
+          </a:fontRef>
+        </p:style>
+        <p:txBody>
+          <a:bodyPr rtlCol="0" anchor="ctr"/>
+          <a:lstStyle/>
+          <a:p>
+            <a:pPr algn="ctr"/>
+          </a:p>
+        </p:txBody>
+      </p:sp>
+      <p:sp>
+        <p:nvSpPr>
+          <p:cNvPr id="105" name="TextBox 104"/>
+          <p:cNvSpPr txBox="1"/>
+          <p:nvPr/>
+        </p:nvSpPr>
+        <p:spPr>
+          <a:xfrm>
+            <a:off x="1517650" y="2698750"/>
+            <a:ext cx="508000" cy="190500"/>
+          </a:xfrm>
+          <a:prstGeom prst="rect">
+            <a:avLst/>
+          </a:prstGeom>
+          <a:noFill/>
+        </p:spPr>
+        <p:txBody>
+          <a:bodyPr wrap="square" lIns="0" rIns="0" tIns="0" bIns="0" anchor="ctr">
+            <a:spAutoFit/>
+          </a:bodyPr>
+          <a:lstStyle/>
+          <a:p>
+            <a:pPr algn="ctr"/>
+            <a:r>
+              <a:rPr sz="1300" b="0" spc="80">
+                <a:solidFill>
+                  <a:srgbClr val="9A9AA2"/>
+                </a:solidFill>
+                <a:latin typeface="Courier New"/>
+              </a:rPr>
+              <a:t>01</a:t>
+            </a:r>
+          </a:p>
+        </p:txBody>
+      </p:sp>
+      <p:sp>
+        <p:nvSpPr>
+          <p:cNvPr id="106" name="Diamond 105"/>
+          <p:cNvSpPr/>
+          <p:nvPr/>
+        </p:nvSpPr>
+        <p:spPr>
+          <a:xfrm>
+            <a:off x="2800350" y="2743200"/>
+            <a:ext cx="95250" cy="95250"/>
           </a:xfrm>
           <a:prstGeom prst="diamond">
             <a:avLst/>
@@ -7649,14 +7988,95 @@
       </p:sp>
       <p:sp>
         <p:nvSpPr>
-          <p:cNvPr id="106" name="Diamond 105"/>
+          <p:cNvPr id="107" name="Oval 106"/>
           <p:cNvSpPr/>
           <p:nvPr/>
         </p:nvSpPr>
         <p:spPr>
           <a:xfrm>
-            <a:off x="4959350" y="3505200"/>
-            <a:ext cx="101600" cy="101600"/>
+            <a:off x="3689350" y="2552700"/>
+            <a:ext cx="482600" cy="482600"/>
+          </a:xfrm>
+          <a:prstGeom prst="ellipse">
+            <a:avLst/>
+          </a:prstGeom>
+          <a:solidFill>
+            <a:srgbClr val="0E0E11"/>
+          </a:solidFill>
+          <a:ln w="15875">
+            <a:solidFill>
+              <a:srgbClr val="9A9AA2"/>
+            </a:solidFill>
+          </a:ln>
+          <a:effectLst/>
+        </p:spPr>
+        <p:style>
+          <a:lnRef idx="1">
+            <a:schemeClr val="accent1"/>
+          </a:lnRef>
+          <a:fillRef idx="3">
+            <a:schemeClr val="accent1"/>
+          </a:fillRef>
+          <a:effectRef idx="2">
+            <a:schemeClr val="accent1"/>
+          </a:effectRef>
+          <a:fontRef idx="minor">
+            <a:schemeClr val="lt1"/>
+          </a:fontRef>
+        </p:style>
+        <p:txBody>
+          <a:bodyPr rtlCol="0" anchor="ctr"/>
+          <a:lstStyle/>
+          <a:p>
+            <a:pPr algn="ctr"/>
+          </a:p>
+        </p:txBody>
+      </p:sp>
+      <p:sp>
+        <p:nvSpPr>
+          <p:cNvPr id="108" name="TextBox 107"/>
+          <p:cNvSpPr txBox="1"/>
+          <p:nvPr/>
+        </p:nvSpPr>
+        <p:spPr>
+          <a:xfrm>
+            <a:off x="3676650" y="2698750"/>
+            <a:ext cx="508000" cy="190500"/>
+          </a:xfrm>
+          <a:prstGeom prst="rect">
+            <a:avLst/>
+          </a:prstGeom>
+          <a:noFill/>
+        </p:spPr>
+        <p:txBody>
+          <a:bodyPr wrap="square" lIns="0" rIns="0" tIns="0" bIns="0" anchor="ctr">
+            <a:spAutoFit/>
+          </a:bodyPr>
+          <a:lstStyle/>
+          <a:p>
+            <a:pPr algn="ctr"/>
+            <a:r>
+              <a:rPr sz="1300" b="0" spc="80">
+                <a:solidFill>
+                  <a:srgbClr val="9A9AA2"/>
+                </a:solidFill>
+                <a:latin typeface="Courier New"/>
+              </a:rPr>
+              <a:t>02</a:t>
+            </a:r>
+          </a:p>
+        </p:txBody>
+      </p:sp>
+      <p:sp>
+        <p:nvSpPr>
+          <p:cNvPr id="109" name="Diamond 108"/>
+          <p:cNvSpPr/>
+          <p:nvPr/>
+        </p:nvSpPr>
+        <p:spPr>
+          <a:xfrm>
+            <a:off x="4959350" y="2743200"/>
+            <a:ext cx="95250" cy="95250"/>
           </a:xfrm>
           <a:prstGeom prst="diamond">
             <a:avLst/>
@@ -7693,14 +8113,95 @@
       </p:sp>
       <p:sp>
         <p:nvSpPr>
-          <p:cNvPr id="107" name="Diamond 106"/>
+          <p:cNvPr id="110" name="Oval 109"/>
           <p:cNvSpPr/>
           <p:nvPr/>
         </p:nvSpPr>
         <p:spPr>
           <a:xfrm>
-            <a:off x="7118350" y="3505200"/>
-            <a:ext cx="101600" cy="101600"/>
+            <a:off x="5848350" y="2552700"/>
+            <a:ext cx="482600" cy="482600"/>
+          </a:xfrm>
+          <a:prstGeom prst="ellipse">
+            <a:avLst/>
+          </a:prstGeom>
+          <a:solidFill>
+            <a:srgbClr val="0E0E11"/>
+          </a:solidFill>
+          <a:ln w="15875">
+            <a:solidFill>
+              <a:srgbClr val="9A9AA2"/>
+            </a:solidFill>
+          </a:ln>
+          <a:effectLst/>
+        </p:spPr>
+        <p:style>
+          <a:lnRef idx="1">
+            <a:schemeClr val="accent1"/>
+          </a:lnRef>
+          <a:fillRef idx="3">
+            <a:schemeClr val="accent1"/>
+          </a:fillRef>
+          <a:effectRef idx="2">
+            <a:schemeClr val="accent1"/>
+          </a:effectRef>
+          <a:fontRef idx="minor">
+            <a:schemeClr val="lt1"/>
+          </a:fontRef>
+        </p:style>
+        <p:txBody>
+          <a:bodyPr rtlCol="0" anchor="ctr"/>
+          <a:lstStyle/>
+          <a:p>
+            <a:pPr algn="ctr"/>
+          </a:p>
+        </p:txBody>
+      </p:sp>
+      <p:sp>
+        <p:nvSpPr>
+          <p:cNvPr id="111" name="TextBox 110"/>
+          <p:cNvSpPr txBox="1"/>
+          <p:nvPr/>
+        </p:nvSpPr>
+        <p:spPr>
+          <a:xfrm>
+            <a:off x="5835650" y="2698750"/>
+            <a:ext cx="508000" cy="190500"/>
+          </a:xfrm>
+          <a:prstGeom prst="rect">
+            <a:avLst/>
+          </a:prstGeom>
+          <a:noFill/>
+        </p:spPr>
+        <p:txBody>
+          <a:bodyPr wrap="square" lIns="0" rIns="0" tIns="0" bIns="0" anchor="ctr">
+            <a:spAutoFit/>
+          </a:bodyPr>
+          <a:lstStyle/>
+          <a:p>
+            <a:pPr algn="ctr"/>
+            <a:r>
+              <a:rPr sz="1300" b="0" spc="80">
+                <a:solidFill>
+                  <a:srgbClr val="9A9AA2"/>
+                </a:solidFill>
+                <a:latin typeface="Courier New"/>
+              </a:rPr>
+              <a:t>03</a:t>
+            </a:r>
+          </a:p>
+        </p:txBody>
+      </p:sp>
+      <p:sp>
+        <p:nvSpPr>
+          <p:cNvPr id="112" name="Diamond 111"/>
+          <p:cNvSpPr/>
+          <p:nvPr/>
+        </p:nvSpPr>
+        <p:spPr>
+          <a:xfrm>
+            <a:off x="7118350" y="2743200"/>
+            <a:ext cx="95250" cy="95250"/>
           </a:xfrm>
           <a:prstGeom prst="diamond">
             <a:avLst/>
@@ -7737,14 +8238,95 @@
       </p:sp>
       <p:sp>
         <p:nvSpPr>
-          <p:cNvPr id="108" name="Diamond 107"/>
+          <p:cNvPr id="113" name="Oval 112"/>
           <p:cNvSpPr/>
           <p:nvPr/>
         </p:nvSpPr>
         <p:spPr>
           <a:xfrm>
-            <a:off x="9277350" y="3505200"/>
-            <a:ext cx="101600" cy="101600"/>
+            <a:off x="8007350" y="2552700"/>
+            <a:ext cx="482600" cy="482600"/>
+          </a:xfrm>
+          <a:prstGeom prst="ellipse">
+            <a:avLst/>
+          </a:prstGeom>
+          <a:solidFill>
+            <a:srgbClr val="0E0E11"/>
+          </a:solidFill>
+          <a:ln w="15875">
+            <a:solidFill>
+              <a:srgbClr val="9A9AA2"/>
+            </a:solidFill>
+          </a:ln>
+          <a:effectLst/>
+        </p:spPr>
+        <p:style>
+          <a:lnRef idx="1">
+            <a:schemeClr val="accent1"/>
+          </a:lnRef>
+          <a:fillRef idx="3">
+            <a:schemeClr val="accent1"/>
+          </a:fillRef>
+          <a:effectRef idx="2">
+            <a:schemeClr val="accent1"/>
+          </a:effectRef>
+          <a:fontRef idx="minor">
+            <a:schemeClr val="lt1"/>
+          </a:fontRef>
+        </p:style>
+        <p:txBody>
+          <a:bodyPr rtlCol="0" anchor="ctr"/>
+          <a:lstStyle/>
+          <a:p>
+            <a:pPr algn="ctr"/>
+          </a:p>
+        </p:txBody>
+      </p:sp>
+      <p:sp>
+        <p:nvSpPr>
+          <p:cNvPr id="114" name="TextBox 113"/>
+          <p:cNvSpPr txBox="1"/>
+          <p:nvPr/>
+        </p:nvSpPr>
+        <p:spPr>
+          <a:xfrm>
+            <a:off x="7994650" y="2698750"/>
+            <a:ext cx="508000" cy="190500"/>
+          </a:xfrm>
+          <a:prstGeom prst="rect">
+            <a:avLst/>
+          </a:prstGeom>
+          <a:noFill/>
+        </p:spPr>
+        <p:txBody>
+          <a:bodyPr wrap="square" lIns="0" rIns="0" tIns="0" bIns="0" anchor="ctr">
+            <a:spAutoFit/>
+          </a:bodyPr>
+          <a:lstStyle/>
+          <a:p>
+            <a:pPr algn="ctr"/>
+            <a:r>
+              <a:rPr sz="1300" b="0" spc="80">
+                <a:solidFill>
+                  <a:srgbClr val="9A9AA2"/>
+                </a:solidFill>
+                <a:latin typeface="Courier New"/>
+              </a:rPr>
+              <a:t>04</a:t>
+            </a:r>
+          </a:p>
+        </p:txBody>
+      </p:sp>
+      <p:sp>
+        <p:nvSpPr>
+          <p:cNvPr id="115" name="Diamond 114"/>
+          <p:cNvSpPr/>
+          <p:nvPr/>
+        </p:nvSpPr>
+        <p:spPr>
+          <a:xfrm>
+            <a:off x="9277350" y="2743200"/>
+            <a:ext cx="95250" cy="95250"/>
           </a:xfrm>
           <a:prstGeom prst="diamond">
             <a:avLst/>
@@ -7781,14 +8363,14 @@
       </p:sp>
       <p:sp>
         <p:nvSpPr>
-          <p:cNvPr id="109" name="Oval 108"/>
+          <p:cNvPr id="116" name="Oval 115"/>
           <p:cNvSpPr/>
           <p:nvPr/>
         </p:nvSpPr>
         <p:spPr>
           <a:xfrm>
-            <a:off x="1568450" y="3352800"/>
-            <a:ext cx="406400" cy="406400"/>
+            <a:off x="10166350" y="2552700"/>
+            <a:ext cx="482600" cy="482600"/>
           </a:xfrm>
           <a:prstGeom prst="ellipse">
             <a:avLst/>
@@ -7796,7 +8378,7 @@
           <a:solidFill>
             <a:srgbClr val="0E0E11"/>
           </a:solidFill>
-          <a:ln w="19050">
+          <a:ln w="15875">
             <a:solidFill>
               <a:srgbClr val="9A9AA2"/>
             </a:solidFill>
@@ -7827,14 +8409,14 @@
       </p:sp>
       <p:sp>
         <p:nvSpPr>
-          <p:cNvPr id="110" name="TextBox 109"/>
-          <p:cNvSpPr txBox="1"/>
-          <p:nvPr/>
-        </p:nvSpPr>
-        <p:spPr>
-          <a:xfrm>
-            <a:off x="1517650" y="3454400"/>
-            <a:ext cx="508000" cy="203200"/>
+          <p:cNvPr id="117" name="TextBox 116"/>
+          <p:cNvSpPr txBox="1"/>
+          <p:nvPr/>
+        </p:nvSpPr>
+        <p:spPr>
+          <a:xfrm>
+            <a:off x="10153650" y="2698750"/>
+            <a:ext cx="508000" cy="190500"/>
           </a:xfrm>
           <a:prstGeom prst="rect">
             <a:avLst/>
@@ -7849,27 +8431,27 @@
           <a:p>
             <a:pPr algn="ctr"/>
             <a:r>
-              <a:rPr sz="1300" b="0" spc="100">
+              <a:rPr sz="1300" b="0" spc="80">
                 <a:solidFill>
                   <a:srgbClr val="9A9AA2"/>
                 </a:solidFill>
                 <a:latin typeface="Courier New"/>
               </a:rPr>
-              <a:t>01</a:t>
-            </a:r>
-          </a:p>
-        </p:txBody>
-      </p:sp>
-      <p:sp>
-        <p:nvSpPr>
-          <p:cNvPr id="111" name="TextBox 110"/>
-          <p:cNvSpPr txBox="1"/>
-          <p:nvPr/>
-        </p:nvSpPr>
-        <p:spPr>
-          <a:xfrm>
-            <a:off x="819150" y="3860800"/>
-            <a:ext cx="1905000" cy="215900"/>
+              <a:t>05</a:t>
+            </a:r>
+          </a:p>
+        </p:txBody>
+      </p:sp>
+      <p:sp>
+        <p:nvSpPr>
+          <p:cNvPr id="118" name="TextBox 117"/>
+          <p:cNvSpPr txBox="1"/>
+          <p:nvPr/>
+        </p:nvSpPr>
+        <p:spPr>
+          <a:xfrm>
+            <a:off x="755650" y="3175000"/>
+            <a:ext cx="2032000" cy="215900"/>
           </a:xfrm>
           <a:prstGeom prst="rect">
             <a:avLst/>
@@ -7884,11 +8466,11 @@
           <a:p>
             <a:pPr algn="ctr"/>
             <a:r>
-              <a:rPr sz="1600" b="0">
+              <a:rPr sz="1700" b="0">
                 <a:solidFill>
                   <a:srgbClr val="ECECEE"/>
                 </a:solidFill>
-                <a:latin typeface="Arial"/>
+                <a:latin typeface="Poppins"/>
               </a:rPr>
               <a:t>Discover</a:t>
             </a:r>
@@ -7897,14 +8479,14 @@
       </p:sp>
       <p:sp>
         <p:nvSpPr>
-          <p:cNvPr id="112" name="TextBox 111"/>
-          <p:cNvSpPr txBox="1"/>
-          <p:nvPr/>
-        </p:nvSpPr>
-        <p:spPr>
-          <a:xfrm>
-            <a:off x="819150" y="4089400"/>
-            <a:ext cx="1905000" cy="165100"/>
+          <p:cNvPr id="119" name="TextBox 118"/>
+          <p:cNvSpPr txBox="1"/>
+          <p:nvPr/>
+        </p:nvSpPr>
+        <p:spPr>
+          <a:xfrm>
+            <a:off x="755650" y="3403600"/>
+            <a:ext cx="2032000" cy="165100"/>
           </a:xfrm>
           <a:prstGeom prst="rect">
             <a:avLst/>
@@ -7923,7 +8505,7 @@
                 <a:solidFill>
                   <a:srgbClr val="9A9AA2"/>
                 </a:solidFill>
-                <a:latin typeface="Arial"/>
+                <a:latin typeface="Poppins"/>
               </a:rPr>
               <a:t>from conversation</a:t>
             </a:r>
@@ -7932,25 +8514,303 @@
       </p:sp>
       <p:sp>
         <p:nvSpPr>
-          <p:cNvPr id="113" name="Oval 112"/>
+          <p:cNvPr id="120" name="TextBox 119"/>
+          <p:cNvSpPr txBox="1"/>
+          <p:nvPr/>
+        </p:nvSpPr>
+        <p:spPr>
+          <a:xfrm>
+            <a:off x="2914650" y="3175000"/>
+            <a:ext cx="2032000" cy="215900"/>
+          </a:xfrm>
+          <a:prstGeom prst="rect">
+            <a:avLst/>
+          </a:prstGeom>
+          <a:noFill/>
+        </p:spPr>
+        <p:txBody>
+          <a:bodyPr wrap="square" lIns="0" rIns="0" tIns="0" bIns="0" anchor="ctr">
+            <a:spAutoFit/>
+          </a:bodyPr>
+          <a:lstStyle/>
+          <a:p>
+            <a:pPr algn="ctr"/>
+            <a:r>
+              <a:rPr sz="1700" b="0">
+                <a:solidFill>
+                  <a:srgbClr val="ECECEE"/>
+                </a:solidFill>
+                <a:latin typeface="Poppins"/>
+              </a:rPr>
+              <a:t>Analyze</a:t>
+            </a:r>
+          </a:p>
+        </p:txBody>
+      </p:sp>
+      <p:sp>
+        <p:nvSpPr>
+          <p:cNvPr id="121" name="TextBox 120"/>
+          <p:cNvSpPr txBox="1"/>
+          <p:nvPr/>
+        </p:nvSpPr>
+        <p:spPr>
+          <a:xfrm>
+            <a:off x="2914650" y="3403600"/>
+            <a:ext cx="2032000" cy="165100"/>
+          </a:xfrm>
+          <a:prstGeom prst="rect">
+            <a:avLst/>
+          </a:prstGeom>
+          <a:noFill/>
+        </p:spPr>
+        <p:txBody>
+          <a:bodyPr wrap="square" lIns="0" rIns="0" tIns="0" bIns="0" anchor="ctr">
+            <a:spAutoFit/>
+          </a:bodyPr>
+          <a:lstStyle/>
+          <a:p>
+            <a:pPr algn="ctr"/>
+            <a:r>
+              <a:rPr sz="1200" b="0">
+                <a:solidFill>
+                  <a:srgbClr val="9A9AA2"/>
+                </a:solidFill>
+                <a:latin typeface="Poppins"/>
+              </a:rPr>
+              <a:t>scope + fit</a:t>
+            </a:r>
+          </a:p>
+        </p:txBody>
+      </p:sp>
+      <p:sp>
+        <p:nvSpPr>
+          <p:cNvPr id="122" name="TextBox 121"/>
+          <p:cNvSpPr txBox="1"/>
+          <p:nvPr/>
+        </p:nvSpPr>
+        <p:spPr>
+          <a:xfrm>
+            <a:off x="5073650" y="3175000"/>
+            <a:ext cx="2032000" cy="215900"/>
+          </a:xfrm>
+          <a:prstGeom prst="rect">
+            <a:avLst/>
+          </a:prstGeom>
+          <a:noFill/>
+        </p:spPr>
+        <p:txBody>
+          <a:bodyPr wrap="square" lIns="0" rIns="0" tIns="0" bIns="0" anchor="ctr">
+            <a:spAutoFit/>
+          </a:bodyPr>
+          <a:lstStyle/>
+          <a:p>
+            <a:pPr algn="ctr"/>
+            <a:r>
+              <a:rPr sz="1700" b="0">
+                <a:solidFill>
+                  <a:srgbClr val="ECECEE"/>
+                </a:solidFill>
+                <a:latin typeface="Poppins"/>
+              </a:rPr>
+              <a:t>Research</a:t>
+            </a:r>
+          </a:p>
+        </p:txBody>
+      </p:sp>
+      <p:sp>
+        <p:nvSpPr>
+          <p:cNvPr id="123" name="TextBox 122"/>
+          <p:cNvSpPr txBox="1"/>
+          <p:nvPr/>
+        </p:nvSpPr>
+        <p:spPr>
+          <a:xfrm>
+            <a:off x="5073650" y="3403600"/>
+            <a:ext cx="2032000" cy="165100"/>
+          </a:xfrm>
+          <a:prstGeom prst="rect">
+            <a:avLst/>
+          </a:prstGeom>
+          <a:noFill/>
+        </p:spPr>
+        <p:txBody>
+          <a:bodyPr wrap="square" lIns="0" rIns="0" tIns="0" bIns="0" anchor="ctr">
+            <a:spAutoFit/>
+          </a:bodyPr>
+          <a:lstStyle/>
+          <a:p>
+            <a:pPr algn="ctr"/>
+            <a:r>
+              <a:rPr sz="1200" b="0">
+                <a:solidFill>
+                  <a:srgbClr val="9A9AA2"/>
+                </a:solidFill>
+                <a:latin typeface="Poppins"/>
+              </a:rPr>
+              <a:t>cited, deep</a:t>
+            </a:r>
+          </a:p>
+        </p:txBody>
+      </p:sp>
+      <p:sp>
+        <p:nvSpPr>
+          <p:cNvPr id="124" name="TextBox 123"/>
+          <p:cNvSpPr txBox="1"/>
+          <p:nvPr/>
+        </p:nvSpPr>
+        <p:spPr>
+          <a:xfrm>
+            <a:off x="7232650" y="3175000"/>
+            <a:ext cx="2032000" cy="215900"/>
+          </a:xfrm>
+          <a:prstGeom prst="rect">
+            <a:avLst/>
+          </a:prstGeom>
+          <a:noFill/>
+        </p:spPr>
+        <p:txBody>
+          <a:bodyPr wrap="square" lIns="0" rIns="0" tIns="0" bIns="0" anchor="ctr">
+            <a:spAutoFit/>
+          </a:bodyPr>
+          <a:lstStyle/>
+          <a:p>
+            <a:pPr algn="ctr"/>
+            <a:r>
+              <a:rPr sz="1700" b="0">
+                <a:solidFill>
+                  <a:srgbClr val="ECECEE"/>
+                </a:solidFill>
+                <a:latin typeface="Poppins"/>
+              </a:rPr>
+              <a:t>Compliance</a:t>
+            </a:r>
+          </a:p>
+        </p:txBody>
+      </p:sp>
+      <p:sp>
+        <p:nvSpPr>
+          <p:cNvPr id="125" name="TextBox 124"/>
+          <p:cNvSpPr txBox="1"/>
+          <p:nvPr/>
+        </p:nvSpPr>
+        <p:spPr>
+          <a:xfrm>
+            <a:off x="7232650" y="3403600"/>
+            <a:ext cx="2032000" cy="165100"/>
+          </a:xfrm>
+          <a:prstGeom prst="rect">
+            <a:avLst/>
+          </a:prstGeom>
+          <a:noFill/>
+        </p:spPr>
+        <p:txBody>
+          <a:bodyPr wrap="square" lIns="0" rIns="0" tIns="0" bIns="0" anchor="ctr">
+            <a:spAutoFit/>
+          </a:bodyPr>
+          <a:lstStyle/>
+          <a:p>
+            <a:pPr algn="ctr"/>
+            <a:r>
+              <a:rPr sz="1200" b="0">
+                <a:solidFill>
+                  <a:srgbClr val="9A9AA2"/>
+                </a:solidFill>
+                <a:latin typeface="Poppins"/>
+              </a:rPr>
+              <a:t>pre-build gate</a:t>
+            </a:r>
+          </a:p>
+        </p:txBody>
+      </p:sp>
+      <p:sp>
+        <p:nvSpPr>
+          <p:cNvPr id="126" name="TextBox 125"/>
+          <p:cNvSpPr txBox="1"/>
+          <p:nvPr/>
+        </p:nvSpPr>
+        <p:spPr>
+          <a:xfrm>
+            <a:off x="9391650" y="3175000"/>
+            <a:ext cx="2032000" cy="215900"/>
+          </a:xfrm>
+          <a:prstGeom prst="rect">
+            <a:avLst/>
+          </a:prstGeom>
+          <a:noFill/>
+        </p:spPr>
+        <p:txBody>
+          <a:bodyPr wrap="square" lIns="0" rIns="0" tIns="0" bIns="0" anchor="ctr">
+            <a:spAutoFit/>
+          </a:bodyPr>
+          <a:lstStyle/>
+          <a:p>
+            <a:pPr algn="ctr"/>
+            <a:r>
+              <a:rPr sz="1700" b="0">
+                <a:solidFill>
+                  <a:srgbClr val="ECECEE"/>
+                </a:solidFill>
+                <a:latin typeface="Poppins"/>
+              </a:rPr>
+              <a:t>AI Memory</a:t>
+            </a:r>
+          </a:p>
+        </p:txBody>
+      </p:sp>
+      <p:sp>
+        <p:nvSpPr>
+          <p:cNvPr id="127" name="TextBox 126"/>
+          <p:cNvSpPr txBox="1"/>
+          <p:nvPr/>
+        </p:nvSpPr>
+        <p:spPr>
+          <a:xfrm>
+            <a:off x="9391650" y="3403600"/>
+            <a:ext cx="2032000" cy="165100"/>
+          </a:xfrm>
+          <a:prstGeom prst="rect">
+            <a:avLst/>
+          </a:prstGeom>
+          <a:noFill/>
+        </p:spPr>
+        <p:txBody>
+          <a:bodyPr wrap="square" lIns="0" rIns="0" tIns="0" bIns="0" anchor="ctr">
+            <a:spAutoFit/>
+          </a:bodyPr>
+          <a:lstStyle/>
+          <a:p>
+            <a:pPr algn="ctr"/>
+            <a:r>
+              <a:rPr sz="1200" b="0">
+                <a:solidFill>
+                  <a:srgbClr val="9A9AA2"/>
+                </a:solidFill>
+                <a:latin typeface="Poppins"/>
+              </a:rPr>
+              <a:t>patterns carried in</a:t>
+            </a:r>
+          </a:p>
+        </p:txBody>
+      </p:sp>
+      <p:sp>
+        <p:nvSpPr>
+          <p:cNvPr id="128" name="Diamond 127"/>
           <p:cNvSpPr/>
           <p:nvPr/>
         </p:nvSpPr>
         <p:spPr>
           <a:xfrm>
-            <a:off x="3727450" y="3352800"/>
-            <a:ext cx="406400" cy="406400"/>
-          </a:xfrm>
-          <a:prstGeom prst="ellipse">
+            <a:off x="692150" y="3898900"/>
+            <a:ext cx="95250" cy="95250"/>
+          </a:xfrm>
+          <a:prstGeom prst="diamond">
             <a:avLst/>
           </a:prstGeom>
           <a:solidFill>
-            <a:srgbClr val="0E0E11"/>
+            <a:srgbClr val="FF6B3D"/>
           </a:solidFill>
-          <a:ln w="19050">
-            <a:solidFill>
-              <a:srgbClr val="9A9AA2"/>
-            </a:solidFill>
+          <a:ln>
+            <a:noFill/>
           </a:ln>
           <a:effectLst/>
         </p:spPr>
@@ -7978,14 +8838,14 @@
       </p:sp>
       <p:sp>
         <p:nvSpPr>
-          <p:cNvPr id="114" name="TextBox 113"/>
-          <p:cNvSpPr txBox="1"/>
-          <p:nvPr/>
-        </p:nvSpPr>
-        <p:spPr>
-          <a:xfrm>
-            <a:off x="3676650" y="3454400"/>
-            <a:ext cx="508000" cy="203200"/>
+          <p:cNvPr id="129" name="TextBox 128"/>
+          <p:cNvSpPr txBox="1"/>
+          <p:nvPr/>
+        </p:nvSpPr>
+        <p:spPr>
+          <a:xfrm>
+            <a:off x="863600" y="3873500"/>
+            <a:ext cx="4445000" cy="165100"/>
           </a:xfrm>
           <a:prstGeom prst="rect">
             <a:avLst/>
@@ -7998,110 +8858,38 @@
           </a:bodyPr>
           <a:lstStyle/>
           <a:p>
-            <a:pPr algn="ctr"/>
-            <a:r>
-              <a:rPr sz="1300" b="0" spc="100">
+            <a:pPr algn="l"/>
+            <a:r>
+              <a:rPr sz="1100" b="0" spc="150">
                 <a:solidFill>
                   <a:srgbClr val="9A9AA2"/>
                 </a:solidFill>
                 <a:latin typeface="Courier New"/>
               </a:rPr>
-              <a:t>02</a:t>
-            </a:r>
-          </a:p>
-        </p:txBody>
-      </p:sp>
-      <p:sp>
-        <p:nvSpPr>
-          <p:cNvPr id="115" name="TextBox 114"/>
-          <p:cNvSpPr txBox="1"/>
-          <p:nvPr/>
-        </p:nvSpPr>
-        <p:spPr>
-          <a:xfrm>
-            <a:off x="2978150" y="3860800"/>
-            <a:ext cx="1905000" cy="215900"/>
-          </a:xfrm>
-          <a:prstGeom prst="rect">
-            <a:avLst/>
-          </a:prstGeom>
-          <a:noFill/>
-        </p:spPr>
-        <p:txBody>
-          <a:bodyPr wrap="square" lIns="0" rIns="0" tIns="0" bIns="0" anchor="ctr">
-            <a:spAutoFit/>
-          </a:bodyPr>
-          <a:lstStyle/>
-          <a:p>
-            <a:pPr algn="ctr"/>
-            <a:r>
-              <a:rPr sz="1600" b="0">
-                <a:solidFill>
-                  <a:srgbClr val="ECECEE"/>
-                </a:solidFill>
-                <a:latin typeface="Arial"/>
-              </a:rPr>
-              <a:t>Analyze</a:t>
-            </a:r>
-          </a:p>
-        </p:txBody>
-      </p:sp>
-      <p:sp>
-        <p:nvSpPr>
-          <p:cNvPr id="116" name="TextBox 115"/>
-          <p:cNvSpPr txBox="1"/>
-          <p:nvPr/>
-        </p:nvSpPr>
-        <p:spPr>
-          <a:xfrm>
-            <a:off x="2978150" y="4089400"/>
-            <a:ext cx="1905000" cy="165100"/>
-          </a:xfrm>
-          <a:prstGeom prst="rect">
-            <a:avLst/>
-          </a:prstGeom>
-          <a:noFill/>
-        </p:spPr>
-        <p:txBody>
-          <a:bodyPr wrap="square" lIns="0" rIns="0" tIns="0" bIns="0" anchor="ctr">
-            <a:spAutoFit/>
-          </a:bodyPr>
-          <a:lstStyle/>
-          <a:p>
-            <a:pPr algn="ctr"/>
-            <a:r>
-              <a:rPr sz="1200" b="0">
-                <a:solidFill>
-                  <a:srgbClr val="9A9AA2"/>
-                </a:solidFill>
-                <a:latin typeface="Arial"/>
-              </a:rPr>
-              <a:t>scope + fit</a:t>
-            </a:r>
-          </a:p>
-        </p:txBody>
-      </p:sp>
-      <p:sp>
-        <p:nvSpPr>
-          <p:cNvPr id="117" name="Oval 116"/>
+              <a:t>human gate at every transition</a:t>
+            </a:r>
+          </a:p>
+        </p:txBody>
+      </p:sp>
+      <p:sp>
+        <p:nvSpPr>
+          <p:cNvPr id="130" name="Rectangle 129"/>
           <p:cNvSpPr/>
           <p:nvPr/>
         </p:nvSpPr>
         <p:spPr>
           <a:xfrm>
-            <a:off x="5886450" y="3352800"/>
-            <a:ext cx="406400" cy="406400"/>
-          </a:xfrm>
-          <a:prstGeom prst="ellipse">
+            <a:off x="698500" y="4483100"/>
+            <a:ext cx="10788650" cy="6350"/>
+          </a:xfrm>
+          <a:prstGeom prst="rect">
             <a:avLst/>
           </a:prstGeom>
           <a:solidFill>
-            <a:srgbClr val="0E0E11"/>
+            <a:srgbClr val="2B2B2D"/>
           </a:solidFill>
-          <a:ln w="19050">
-            <a:solidFill>
-              <a:srgbClr val="9A9AA2"/>
-            </a:solidFill>
+          <a:ln>
+            <a:noFill/>
           </a:ln>
           <a:effectLst/>
         </p:spPr>
@@ -8129,14 +8917,14 @@
       </p:sp>
       <p:sp>
         <p:nvSpPr>
-          <p:cNvPr id="118" name="TextBox 117"/>
-          <p:cNvSpPr txBox="1"/>
-          <p:nvPr/>
-        </p:nvSpPr>
-        <p:spPr>
-          <a:xfrm>
-            <a:off x="5835650" y="3454400"/>
-            <a:ext cx="508000" cy="203200"/>
+          <p:cNvPr id="131" name="TextBox 130"/>
+          <p:cNvSpPr txBox="1"/>
+          <p:nvPr/>
+        </p:nvSpPr>
+        <p:spPr>
+          <a:xfrm>
+            <a:off x="698500" y="4673600"/>
+            <a:ext cx="5715000" cy="165100"/>
           </a:xfrm>
           <a:prstGeom prst="rect">
             <a:avLst/>
@@ -8149,438 +8937,22 @@
           </a:bodyPr>
           <a:lstStyle/>
           <a:p>
-            <a:pPr algn="ctr"/>
-            <a:r>
-              <a:rPr sz="1300" b="0" spc="100">
+            <a:pPr algn="l"/>
+            <a:r>
+              <a:rPr sz="1100" b="0" spc="300">
                 <a:solidFill>
                   <a:srgbClr val="9A9AA2"/>
                 </a:solidFill>
                 <a:latin typeface="Courier New"/>
               </a:rPr>
-              <a:t>03</a:t>
-            </a:r>
-          </a:p>
-        </p:txBody>
-      </p:sp>
-      <p:sp>
-        <p:nvSpPr>
-          <p:cNvPr id="119" name="TextBox 118"/>
-          <p:cNvSpPr txBox="1"/>
-          <p:nvPr/>
-        </p:nvSpPr>
-        <p:spPr>
-          <a:xfrm>
-            <a:off x="5137150" y="3860800"/>
-            <a:ext cx="1905000" cy="215900"/>
-          </a:xfrm>
-          <a:prstGeom prst="rect">
-            <a:avLst/>
-          </a:prstGeom>
-          <a:noFill/>
-        </p:spPr>
-        <p:txBody>
-          <a:bodyPr wrap="square" lIns="0" rIns="0" tIns="0" bIns="0" anchor="ctr">
-            <a:spAutoFit/>
-          </a:bodyPr>
-          <a:lstStyle/>
-          <a:p>
-            <a:pPr algn="ctr"/>
-            <a:r>
-              <a:rPr sz="1600" b="0">
-                <a:solidFill>
-                  <a:srgbClr val="ECECEE"/>
-                </a:solidFill>
-                <a:latin typeface="Arial"/>
-              </a:rPr>
-              <a:t>Research</a:t>
-            </a:r>
-          </a:p>
-        </p:txBody>
-      </p:sp>
-      <p:sp>
-        <p:nvSpPr>
-          <p:cNvPr id="120" name="TextBox 119"/>
-          <p:cNvSpPr txBox="1"/>
-          <p:nvPr/>
-        </p:nvSpPr>
-        <p:spPr>
-          <a:xfrm>
-            <a:off x="5137150" y="4089400"/>
-            <a:ext cx="1905000" cy="165100"/>
-          </a:xfrm>
-          <a:prstGeom prst="rect">
-            <a:avLst/>
-          </a:prstGeom>
-          <a:noFill/>
-        </p:spPr>
-        <p:txBody>
-          <a:bodyPr wrap="square" lIns="0" rIns="0" tIns="0" bIns="0" anchor="ctr">
-            <a:spAutoFit/>
-          </a:bodyPr>
-          <a:lstStyle/>
-          <a:p>
-            <a:pPr algn="ctr"/>
-            <a:r>
-              <a:rPr sz="1200" b="0">
-                <a:solidFill>
-                  <a:srgbClr val="9A9AA2"/>
-                </a:solidFill>
-                <a:latin typeface="Arial"/>
-              </a:rPr>
-              <a:t>cited, deep</a:t>
-            </a:r>
-          </a:p>
-        </p:txBody>
-      </p:sp>
-      <p:sp>
-        <p:nvSpPr>
-          <p:cNvPr id="121" name="Oval 120"/>
-          <p:cNvSpPr/>
-          <p:nvPr/>
-        </p:nvSpPr>
-        <p:spPr>
-          <a:xfrm>
-            <a:off x="8045450" y="3352800"/>
-            <a:ext cx="406400" cy="406400"/>
-          </a:xfrm>
-          <a:prstGeom prst="ellipse">
-            <a:avLst/>
-          </a:prstGeom>
-          <a:solidFill>
-            <a:srgbClr val="0E0E11"/>
-          </a:solidFill>
-          <a:ln w="19050">
-            <a:solidFill>
-              <a:srgbClr val="9A9AA2"/>
-            </a:solidFill>
-          </a:ln>
-          <a:effectLst/>
-        </p:spPr>
-        <p:style>
-          <a:lnRef idx="1">
-            <a:schemeClr val="accent1"/>
-          </a:lnRef>
-          <a:fillRef idx="3">
-            <a:schemeClr val="accent1"/>
-          </a:fillRef>
-          <a:effectRef idx="2">
-            <a:schemeClr val="accent1"/>
-          </a:effectRef>
-          <a:fontRef idx="minor">
-            <a:schemeClr val="lt1"/>
-          </a:fontRef>
-        </p:style>
-        <p:txBody>
-          <a:bodyPr rtlCol="0" anchor="ctr"/>
-          <a:lstStyle/>
-          <a:p>
-            <a:pPr algn="ctr"/>
-          </a:p>
-        </p:txBody>
-      </p:sp>
-      <p:sp>
-        <p:nvSpPr>
-          <p:cNvPr id="122" name="TextBox 121"/>
-          <p:cNvSpPr txBox="1"/>
-          <p:nvPr/>
-        </p:nvSpPr>
-        <p:spPr>
-          <a:xfrm>
-            <a:off x="7994650" y="3454400"/>
-            <a:ext cx="508000" cy="203200"/>
-          </a:xfrm>
-          <a:prstGeom prst="rect">
-            <a:avLst/>
-          </a:prstGeom>
-          <a:noFill/>
-        </p:spPr>
-        <p:txBody>
-          <a:bodyPr wrap="square" lIns="0" rIns="0" tIns="0" bIns="0" anchor="ctr">
-            <a:spAutoFit/>
-          </a:bodyPr>
-          <a:lstStyle/>
-          <a:p>
-            <a:pPr algn="ctr"/>
-            <a:r>
-              <a:rPr sz="1300" b="0" spc="100">
-                <a:solidFill>
-                  <a:srgbClr val="9A9AA2"/>
-                </a:solidFill>
-                <a:latin typeface="Courier New"/>
-              </a:rPr>
-              <a:t>04</a:t>
-            </a:r>
-          </a:p>
-        </p:txBody>
-      </p:sp>
-      <p:sp>
-        <p:nvSpPr>
-          <p:cNvPr id="123" name="TextBox 122"/>
-          <p:cNvSpPr txBox="1"/>
-          <p:nvPr/>
-        </p:nvSpPr>
-        <p:spPr>
-          <a:xfrm>
-            <a:off x="7296150" y="3860800"/>
-            <a:ext cx="1905000" cy="215900"/>
-          </a:xfrm>
-          <a:prstGeom prst="rect">
-            <a:avLst/>
-          </a:prstGeom>
-          <a:noFill/>
-        </p:spPr>
-        <p:txBody>
-          <a:bodyPr wrap="square" lIns="0" rIns="0" tIns="0" bIns="0" anchor="ctr">
-            <a:spAutoFit/>
-          </a:bodyPr>
-          <a:lstStyle/>
-          <a:p>
-            <a:pPr algn="ctr"/>
-            <a:r>
-              <a:rPr sz="1600" b="0">
-                <a:solidFill>
-                  <a:srgbClr val="ECECEE"/>
-                </a:solidFill>
-                <a:latin typeface="Arial"/>
-              </a:rPr>
-              <a:t>Compliance</a:t>
-            </a:r>
-          </a:p>
-        </p:txBody>
-      </p:sp>
-      <p:sp>
-        <p:nvSpPr>
-          <p:cNvPr id="124" name="TextBox 123"/>
-          <p:cNvSpPr txBox="1"/>
-          <p:nvPr/>
-        </p:nvSpPr>
-        <p:spPr>
-          <a:xfrm>
-            <a:off x="7296150" y="4089400"/>
-            <a:ext cx="1905000" cy="165100"/>
-          </a:xfrm>
-          <a:prstGeom prst="rect">
-            <a:avLst/>
-          </a:prstGeom>
-          <a:noFill/>
-        </p:spPr>
-        <p:txBody>
-          <a:bodyPr wrap="square" lIns="0" rIns="0" tIns="0" bIns="0" anchor="ctr">
-            <a:spAutoFit/>
-          </a:bodyPr>
-          <a:lstStyle/>
-          <a:p>
-            <a:pPr algn="ctr"/>
-            <a:r>
-              <a:rPr sz="1200" b="0">
-                <a:solidFill>
-                  <a:srgbClr val="9A9AA2"/>
-                </a:solidFill>
-                <a:latin typeface="Arial"/>
-              </a:rPr>
-              <a:t>pre-build gate</a:t>
-            </a:r>
-          </a:p>
-        </p:txBody>
-      </p:sp>
-      <p:sp>
-        <p:nvSpPr>
-          <p:cNvPr id="125" name="Oval 124"/>
-          <p:cNvSpPr/>
-          <p:nvPr/>
-        </p:nvSpPr>
-        <p:spPr>
-          <a:xfrm>
-            <a:off x="10204450" y="3352800"/>
-            <a:ext cx="406400" cy="406400"/>
-          </a:xfrm>
-          <a:prstGeom prst="ellipse">
-            <a:avLst/>
-          </a:prstGeom>
-          <a:solidFill>
-            <a:srgbClr val="0E0E11"/>
-          </a:solidFill>
-          <a:ln w="19050">
-            <a:solidFill>
-              <a:srgbClr val="9A9AA2"/>
-            </a:solidFill>
-          </a:ln>
-          <a:effectLst/>
-        </p:spPr>
-        <p:style>
-          <a:lnRef idx="1">
-            <a:schemeClr val="accent1"/>
-          </a:lnRef>
-          <a:fillRef idx="3">
-            <a:schemeClr val="accent1"/>
-          </a:fillRef>
-          <a:effectRef idx="2">
-            <a:schemeClr val="accent1"/>
-          </a:effectRef>
-          <a:fontRef idx="minor">
-            <a:schemeClr val="lt1"/>
-          </a:fontRef>
-        </p:style>
-        <p:txBody>
-          <a:bodyPr rtlCol="0" anchor="ctr"/>
-          <a:lstStyle/>
-          <a:p>
-            <a:pPr algn="ctr"/>
-          </a:p>
-        </p:txBody>
-      </p:sp>
-      <p:sp>
-        <p:nvSpPr>
-          <p:cNvPr id="126" name="TextBox 125"/>
-          <p:cNvSpPr txBox="1"/>
-          <p:nvPr/>
-        </p:nvSpPr>
-        <p:spPr>
-          <a:xfrm>
-            <a:off x="10153650" y="3454400"/>
-            <a:ext cx="508000" cy="203200"/>
-          </a:xfrm>
-          <a:prstGeom prst="rect">
-            <a:avLst/>
-          </a:prstGeom>
-          <a:noFill/>
-        </p:spPr>
-        <p:txBody>
-          <a:bodyPr wrap="square" lIns="0" rIns="0" tIns="0" bIns="0" anchor="ctr">
-            <a:spAutoFit/>
-          </a:bodyPr>
-          <a:lstStyle/>
-          <a:p>
-            <a:pPr algn="ctr"/>
-            <a:r>
-              <a:rPr sz="1300" b="0" spc="100">
-                <a:solidFill>
-                  <a:srgbClr val="9A9AA2"/>
-                </a:solidFill>
-                <a:latin typeface="Courier New"/>
-              </a:rPr>
-              <a:t>05</a:t>
-            </a:r>
-          </a:p>
-        </p:txBody>
-      </p:sp>
-      <p:sp>
-        <p:nvSpPr>
-          <p:cNvPr id="127" name="TextBox 126"/>
-          <p:cNvSpPr txBox="1"/>
-          <p:nvPr/>
-        </p:nvSpPr>
-        <p:spPr>
-          <a:xfrm>
-            <a:off x="9455150" y="3860800"/>
-            <a:ext cx="1905000" cy="215900"/>
-          </a:xfrm>
-          <a:prstGeom prst="rect">
-            <a:avLst/>
-          </a:prstGeom>
-          <a:noFill/>
-        </p:spPr>
-        <p:txBody>
-          <a:bodyPr wrap="square" lIns="0" rIns="0" tIns="0" bIns="0" anchor="ctr">
-            <a:spAutoFit/>
-          </a:bodyPr>
-          <a:lstStyle/>
-          <a:p>
-            <a:pPr algn="ctr"/>
-            <a:r>
-              <a:rPr sz="1600" b="0">
-                <a:solidFill>
-                  <a:srgbClr val="ECECEE"/>
-                </a:solidFill>
-                <a:latin typeface="Arial"/>
-              </a:rPr>
-              <a:t>AI Memory</a:t>
-            </a:r>
-          </a:p>
-        </p:txBody>
-      </p:sp>
-      <p:sp>
-        <p:nvSpPr>
-          <p:cNvPr id="128" name="TextBox 127"/>
-          <p:cNvSpPr txBox="1"/>
-          <p:nvPr/>
-        </p:nvSpPr>
-        <p:spPr>
-          <a:xfrm>
-            <a:off x="9455150" y="4089400"/>
-            <a:ext cx="1905000" cy="165100"/>
-          </a:xfrm>
-          <a:prstGeom prst="rect">
-            <a:avLst/>
-          </a:prstGeom>
-          <a:noFill/>
-        </p:spPr>
-        <p:txBody>
-          <a:bodyPr wrap="square" lIns="0" rIns="0" tIns="0" bIns="0" anchor="ctr">
-            <a:spAutoFit/>
-          </a:bodyPr>
-          <a:lstStyle/>
-          <a:p>
-            <a:pPr algn="ctr"/>
-            <a:r>
-              <a:rPr sz="1200" b="0">
-                <a:solidFill>
-                  <a:srgbClr val="9A9AA2"/>
-                </a:solidFill>
-                <a:latin typeface="Arial"/>
-              </a:rPr>
-              <a:t>patterns carried in</a:t>
-            </a:r>
-          </a:p>
-        </p:txBody>
-      </p:sp>
-      <p:sp>
-        <p:nvSpPr>
-          <p:cNvPr id="129" name="TextBox 128"/>
-          <p:cNvSpPr txBox="1"/>
-          <p:nvPr/>
-        </p:nvSpPr>
-        <p:spPr>
-          <a:xfrm>
-            <a:off x="698500" y="4699000"/>
-            <a:ext cx="7620000" cy="165100"/>
-          </a:xfrm>
-          <a:prstGeom prst="rect">
-            <a:avLst/>
-          </a:prstGeom>
-          <a:noFill/>
-        </p:spPr>
-        <p:txBody>
-          <a:bodyPr wrap="square" lIns="0" rIns="0" tIns="0" bIns="0" anchor="ctr">
-            <a:spAutoFit/>
-          </a:bodyPr>
-          <a:lstStyle/>
-          <a:p>
-            <a:pPr algn="l"/>
-            <a:r>
-              <a:rPr sz="1200" b="0">
-                <a:solidFill>
-                  <a:srgbClr val="FF6B3D"/>
-                </a:solidFill>
-                <a:latin typeface="Arial"/>
-              </a:rPr>
-              <a:t>◆</a:t>
-            </a:r>
-            <a:r>
-              <a:rPr sz="1100" b="0" spc="150">
-                <a:solidFill>
-                  <a:srgbClr val="9A9AA2"/>
-                </a:solidFill>
-                <a:latin typeface="Courier New"/>
-              </a:rPr>
-              <a:t>   human gate at every transition</a:t>
+              <a:t>IDEA TO BUILD-READY PACKAGE</a:t>
             </a:r>
           </a:p>
         </p:txBody>
       </p:sp>
       <p:pic>
         <p:nvPicPr>
-          <p:cNvPr id="130" name="Picture 129" descr="logo.png"/>
+          <p:cNvPr id="132" name="Picture 131" descr="logo.png"/>
           <p:cNvPicPr>
             <a:picLocks noChangeAspect="1"/>
           </p:cNvPicPr>
@@ -8681,20 +9053,20 @@
           <a:p>
             <a:pPr algn="l"/>
             <a:r>
-              <a:rPr sz="2800" b="1">
+              <a:rPr sz="2700" b="1">
                 <a:solidFill>
                   <a:srgbClr val="ECECEE"/>
                 </a:solidFill>
-                <a:latin typeface="Arial"/>
+                <a:latin typeface="Poppins"/>
               </a:rPr>
               <a:t>Our moat.</a:t>
             </a:r>
             <a:r>
-              <a:rPr sz="2800" b="0">
+              <a:rPr sz="2700" b="0">
                 <a:solidFill>
                   <a:srgbClr val="9A9AA2"/>
                 </a:solidFill>
-                <a:latin typeface="Arial"/>
+                <a:latin typeface="Poppins"/>
               </a:rPr>
               <a:t> Every build makes the next one safer.</a:t>
             </a:r>
@@ -8710,7 +9082,7 @@
         <p:spPr>
           <a:xfrm>
             <a:off x="8312150" y="622300"/>
-            <a:ext cx="3175000" cy="139700"/>
+            <a:ext cx="3175000" cy="152400"/>
           </a:xfrm>
           <a:prstGeom prst="rect">
             <a:avLst/>
@@ -8788,8 +9160,8 @@
         </p:nvSpPr>
         <p:spPr>
           <a:xfrm>
-            <a:off x="698500" y="1498600"/>
-            <a:ext cx="5715000" cy="317500"/>
+            <a:off x="698500" y="1473200"/>
+            <a:ext cx="749300" cy="292100"/>
           </a:xfrm>
           <a:prstGeom prst="rect">
             <a:avLst/>
@@ -8808,43 +9180,165 @@
                 <a:solidFill>
                   <a:srgbClr val="ECECEE"/>
                 </a:solidFill>
-                <a:latin typeface="Arial"/>
+                <a:latin typeface="Poppins"/>
               </a:rPr>
               <a:t>Build</a:t>
             </a:r>
-            <a:r>
-              <a:rPr sz="1600" b="0">
-                <a:solidFill>
-                  <a:srgbClr val="9A9AA2"/>
-                </a:solidFill>
-                <a:latin typeface="Arial"/>
-              </a:rPr>
-              <a:t>  ►  </a:t>
-            </a:r>
+          </a:p>
+        </p:txBody>
+      </p:sp>
+      <p:sp>
+        <p:nvSpPr>
+          <p:cNvPr id="105" name="Isosceles Triangle 104"/>
+          <p:cNvSpPr/>
+          <p:nvPr/>
+        </p:nvSpPr>
+        <p:spPr>
+          <a:xfrm rot="5400000">
+            <a:off x="1562100" y="1587500"/>
+            <a:ext cx="82550" cy="95250"/>
+          </a:xfrm>
+          <a:prstGeom prst="triangle">
+            <a:avLst/>
+          </a:prstGeom>
+          <a:solidFill>
+            <a:srgbClr val="9A9AA2"/>
+          </a:solidFill>
+          <a:ln>
+            <a:noFill/>
+          </a:ln>
+          <a:effectLst/>
+        </p:spPr>
+        <p:style>
+          <a:lnRef idx="1">
+            <a:schemeClr val="accent1"/>
+          </a:lnRef>
+          <a:fillRef idx="3">
+            <a:schemeClr val="accent1"/>
+          </a:fillRef>
+          <a:effectRef idx="2">
+            <a:schemeClr val="accent1"/>
+          </a:effectRef>
+          <a:fontRef idx="minor">
+            <a:schemeClr val="lt1"/>
+          </a:fontRef>
+        </p:style>
+        <p:txBody>
+          <a:bodyPr rtlCol="0" anchor="ctr"/>
+          <a:lstStyle/>
+          <a:p>
+            <a:pPr algn="ctr"/>
+          </a:p>
+        </p:txBody>
+      </p:sp>
+      <p:sp>
+        <p:nvSpPr>
+          <p:cNvPr id="106" name="TextBox 105"/>
+          <p:cNvSpPr txBox="1"/>
+          <p:nvPr/>
+        </p:nvSpPr>
+        <p:spPr>
+          <a:xfrm>
+            <a:off x="1835150" y="1473200"/>
+            <a:ext cx="1225550" cy="292100"/>
+          </a:xfrm>
+          <a:prstGeom prst="rect">
+            <a:avLst/>
+          </a:prstGeom>
+          <a:noFill/>
+        </p:spPr>
+        <p:txBody>
+          <a:bodyPr wrap="square" lIns="0" rIns="0" tIns="0" bIns="0" anchor="ctr">
+            <a:spAutoFit/>
+          </a:bodyPr>
+          <a:lstStyle/>
+          <a:p>
+            <a:pPr algn="l"/>
             <a:r>
               <a:rPr sz="2200" b="0">
                 <a:solidFill>
                   <a:srgbClr val="ECECEE"/>
                 </a:solidFill>
-                <a:latin typeface="Arial"/>
+                <a:latin typeface="Poppins"/>
               </a:rPr>
               <a:t>Capture</a:t>
             </a:r>
-            <a:r>
-              <a:rPr sz="1600" b="0">
-                <a:solidFill>
-                  <a:srgbClr val="9A9AA2"/>
-                </a:solidFill>
-                <a:latin typeface="Arial"/>
-              </a:rPr>
-              <a:t>  ►  </a:t>
-            </a:r>
+          </a:p>
+        </p:txBody>
+      </p:sp>
+      <p:sp>
+        <p:nvSpPr>
+          <p:cNvPr id="107" name="Isosceles Triangle 106"/>
+          <p:cNvSpPr/>
+          <p:nvPr/>
+        </p:nvSpPr>
+        <p:spPr>
+          <a:xfrm rot="5400000">
+            <a:off x="3175000" y="1587500"/>
+            <a:ext cx="82550" cy="95250"/>
+          </a:xfrm>
+          <a:prstGeom prst="triangle">
+            <a:avLst/>
+          </a:prstGeom>
+          <a:solidFill>
+            <a:srgbClr val="9A9AA2"/>
+          </a:solidFill>
+          <a:ln>
+            <a:noFill/>
+          </a:ln>
+          <a:effectLst/>
+        </p:spPr>
+        <p:style>
+          <a:lnRef idx="1">
+            <a:schemeClr val="accent1"/>
+          </a:lnRef>
+          <a:fillRef idx="3">
+            <a:schemeClr val="accent1"/>
+          </a:fillRef>
+          <a:effectRef idx="2">
+            <a:schemeClr val="accent1"/>
+          </a:effectRef>
+          <a:fontRef idx="minor">
+            <a:schemeClr val="lt1"/>
+          </a:fontRef>
+        </p:style>
+        <p:txBody>
+          <a:bodyPr rtlCol="0" anchor="ctr"/>
+          <a:lstStyle/>
+          <a:p>
+            <a:pPr algn="ctr"/>
+          </a:p>
+        </p:txBody>
+      </p:sp>
+      <p:sp>
+        <p:nvSpPr>
+          <p:cNvPr id="108" name="TextBox 107"/>
+          <p:cNvSpPr txBox="1"/>
+          <p:nvPr/>
+        </p:nvSpPr>
+        <p:spPr>
+          <a:xfrm>
+            <a:off x="3448050" y="1473200"/>
+            <a:ext cx="914400" cy="292100"/>
+          </a:xfrm>
+          <a:prstGeom prst="rect">
+            <a:avLst/>
+          </a:prstGeom>
+          <a:noFill/>
+        </p:spPr>
+        <p:txBody>
+          <a:bodyPr wrap="square" lIns="0" rIns="0" tIns="0" bIns="0" anchor="ctr">
+            <a:spAutoFit/>
+          </a:bodyPr>
+          <a:lstStyle/>
+          <a:p>
+            <a:pPr algn="l"/>
             <a:r>
               <a:rPr sz="2200" b="0">
                 <a:solidFill>
                   <a:srgbClr val="ECECEE"/>
                 </a:solidFill>
-                <a:latin typeface="Arial"/>
+                <a:latin typeface="Poppins"/>
               </a:rPr>
               <a:t>Reuse</a:t>
             </a:r>
@@ -8853,14 +9347,14 @@
       </p:sp>
       <p:sp>
         <p:nvSpPr>
-          <p:cNvPr id="105" name="TextBox 104"/>
-          <p:cNvSpPr txBox="1"/>
-          <p:nvPr/>
-        </p:nvSpPr>
-        <p:spPr>
-          <a:xfrm>
-            <a:off x="698500" y="1943100"/>
-            <a:ext cx="6858000" cy="787400"/>
+          <p:cNvPr id="109" name="TextBox 108"/>
+          <p:cNvSpPr txBox="1"/>
+          <p:nvPr/>
+        </p:nvSpPr>
+        <p:spPr>
+          <a:xfrm>
+            <a:off x="698500" y="1917700"/>
+            <a:ext cx="7874000" cy="736600"/>
           </a:xfrm>
           <a:prstGeom prst="rect">
             <a:avLst/>
@@ -8883,7 +9377,7 @@
                 <a:solidFill>
                   <a:srgbClr val="9A9AA2"/>
                 </a:solidFill>
-                <a:latin typeface="Arial"/>
+                <a:latin typeface="Poppins"/>
               </a:rPr>
               <a:t>Anyone can generate code. What compounds is what real production builds taught us — every project writes validated patterns and documented failures back into the library, and every next build queries it before a line of code is written.</a:t>
             </a:r>
@@ -8892,7 +9386,7 @@
       </p:sp>
       <p:sp>
         <p:nvSpPr>
-          <p:cNvPr id="106" name="Rectangle 105"/>
+          <p:cNvPr id="110" name="Rectangle 109"/>
           <p:cNvSpPr/>
           <p:nvPr/>
         </p:nvSpPr>
@@ -8936,14 +9430,14 @@
       </p:sp>
       <p:sp>
         <p:nvSpPr>
-          <p:cNvPr id="107" name="TextBox 106"/>
-          <p:cNvSpPr txBox="1"/>
-          <p:nvPr/>
-        </p:nvSpPr>
-        <p:spPr>
-          <a:xfrm>
-            <a:off x="698500" y="3060700"/>
-            <a:ext cx="4445000" cy="177800"/>
+          <p:cNvPr id="111" name="TextBox 110"/>
+          <p:cNvSpPr txBox="1"/>
+          <p:nvPr/>
+        </p:nvSpPr>
+        <p:spPr>
+          <a:xfrm>
+            <a:off x="698500" y="3073400"/>
+            <a:ext cx="4445000" cy="165100"/>
           </a:xfrm>
           <a:prstGeom prst="rect">
             <a:avLst/>
@@ -8971,14 +9465,14 @@
       </p:sp>
       <p:sp>
         <p:nvSpPr>
-          <p:cNvPr id="108" name="TextBox 107"/>
+          <p:cNvPr id="112" name="TextBox 111"/>
           <p:cNvSpPr txBox="1"/>
           <p:nvPr/>
         </p:nvSpPr>
         <p:spPr>
           <a:xfrm>
             <a:off x="698500" y="3365500"/>
-            <a:ext cx="2921000" cy="558800"/>
+            <a:ext cx="2921000" cy="533400"/>
           </a:xfrm>
           <a:prstGeom prst="rect">
             <a:avLst/>
@@ -8993,11 +9487,11 @@
           <a:p>
             <a:pPr algn="l"/>
             <a:r>
-              <a:rPr sz="4000" b="0">
+              <a:rPr sz="3800" b="0">
                 <a:solidFill>
                   <a:srgbClr val="ECECEE"/>
                 </a:solidFill>
-                <a:latin typeface="Arial"/>
+                <a:latin typeface="Poppins"/>
               </a:rPr>
               <a:t>Hundreds</a:t>
             </a:r>
@@ -9006,13 +9500,13 @@
       </p:sp>
       <p:sp>
         <p:nvSpPr>
-          <p:cNvPr id="109" name="TextBox 108"/>
-          <p:cNvSpPr txBox="1"/>
-          <p:nvPr/>
-        </p:nvSpPr>
-        <p:spPr>
-          <a:xfrm>
-            <a:off x="698500" y="3975100"/>
+          <p:cNvPr id="113" name="TextBox 112"/>
+          <p:cNvSpPr txBox="1"/>
+          <p:nvPr/>
+        </p:nvSpPr>
+        <p:spPr>
+          <a:xfrm>
+            <a:off x="698500" y="3962400"/>
             <a:ext cx="2921000" cy="190500"/>
           </a:xfrm>
           <a:prstGeom prst="rect">
@@ -9032,7 +9526,7 @@
                 <a:solidFill>
                   <a:srgbClr val="ECECEE"/>
                 </a:solidFill>
-                <a:latin typeface="Arial"/>
+                <a:latin typeface="Poppins"/>
               </a:rPr>
               <a:t>validated patterns</a:t>
             </a:r>
@@ -9041,14 +9535,14 @@
       </p:sp>
       <p:sp>
         <p:nvSpPr>
-          <p:cNvPr id="110" name="TextBox 109"/>
+          <p:cNvPr id="114" name="TextBox 113"/>
           <p:cNvSpPr txBox="1"/>
           <p:nvPr/>
         </p:nvSpPr>
         <p:spPr>
           <a:xfrm>
             <a:off x="3746500" y="3365500"/>
-            <a:ext cx="3048000" cy="558800"/>
+            <a:ext cx="3048000" cy="533400"/>
           </a:xfrm>
           <a:prstGeom prst="rect">
             <a:avLst/>
@@ -9063,11 +9557,11 @@
           <a:p>
             <a:pPr algn="l"/>
             <a:r>
-              <a:rPr sz="4000" b="0">
+              <a:rPr sz="3800" b="0">
                 <a:solidFill>
                   <a:srgbClr val="FF6B3D"/>
                 </a:solidFill>
-                <a:latin typeface="Arial"/>
+                <a:latin typeface="Poppins"/>
               </a:rPr>
               <a:t>Thousands</a:t>
             </a:r>
@@ -9076,13 +9570,13 @@
       </p:sp>
       <p:sp>
         <p:nvSpPr>
-          <p:cNvPr id="111" name="TextBox 110"/>
-          <p:cNvSpPr txBox="1"/>
-          <p:nvPr/>
-        </p:nvSpPr>
-        <p:spPr>
-          <a:xfrm>
-            <a:off x="3746500" y="3975100"/>
+          <p:cNvPr id="115" name="TextBox 114"/>
+          <p:cNvSpPr txBox="1"/>
+          <p:nvPr/>
+        </p:nvSpPr>
+        <p:spPr>
+          <a:xfrm>
+            <a:off x="3746500" y="3962400"/>
             <a:ext cx="3048000" cy="190500"/>
           </a:xfrm>
           <a:prstGeom prst="rect">
@@ -9102,7 +9596,7 @@
                 <a:solidFill>
                   <a:srgbClr val="ECECEE"/>
                 </a:solidFill>
-                <a:latin typeface="Arial"/>
+                <a:latin typeface="Poppins"/>
               </a:rPr>
               <a:t>documented anti-patterns</a:t>
             </a:r>
@@ -9111,7 +9605,7 @@
       </p:sp>
       <p:sp>
         <p:nvSpPr>
-          <p:cNvPr id="112" name="TextBox 111"/>
+          <p:cNvPr id="116" name="TextBox 115"/>
           <p:cNvSpPr txBox="1"/>
           <p:nvPr/>
         </p:nvSpPr>
@@ -9137,7 +9631,7 @@
                 <a:solidFill>
                   <a:srgbClr val="9A9AA2"/>
                 </a:solidFill>
-                <a:latin typeface="Arial"/>
+                <a:latin typeface="Poppins"/>
               </a:rPr>
               <a:t>The LEARN loop from the chain is what fills this library.</a:t>
             </a:r>
@@ -9146,7 +9640,7 @@
       </p:sp>
       <p:sp>
         <p:nvSpPr>
-          <p:cNvPr id="113" name="Rectangle 112"/>
+          <p:cNvPr id="117" name="Rectangle 116"/>
           <p:cNvSpPr/>
           <p:nvPr/>
         </p:nvSpPr>
@@ -9190,7 +9684,7 @@
       </p:sp>
       <p:sp>
         <p:nvSpPr>
-          <p:cNvPr id="114" name="Rectangle 113"/>
+          <p:cNvPr id="118" name="Rectangle 117"/>
           <p:cNvSpPr/>
           <p:nvPr/>
         </p:nvSpPr>
@@ -9234,14 +9728,14 @@
       </p:sp>
       <p:sp>
         <p:nvSpPr>
-          <p:cNvPr id="115" name="TextBox 114"/>
-          <p:cNvSpPr txBox="1"/>
-          <p:nvPr/>
-        </p:nvSpPr>
-        <p:spPr>
-          <a:xfrm>
-            <a:off x="7493000" y="3187700"/>
-            <a:ext cx="3683000" cy="139700"/>
+          <p:cNvPr id="119" name="TextBox 118"/>
+          <p:cNvSpPr txBox="1"/>
+          <p:nvPr/>
+        </p:nvSpPr>
+        <p:spPr>
+          <a:xfrm>
+            <a:off x="7493000" y="3200400"/>
+            <a:ext cx="3683000" cy="152400"/>
           </a:xfrm>
           <a:prstGeom prst="rect">
             <a:avLst/>
@@ -9269,13 +9763,13 @@
       </p:sp>
       <p:sp>
         <p:nvSpPr>
-          <p:cNvPr id="116" name="TextBox 115"/>
-          <p:cNvSpPr txBox="1"/>
-          <p:nvPr/>
-        </p:nvSpPr>
-        <p:spPr>
-          <a:xfrm>
-            <a:off x="7493000" y="3479800"/>
+          <p:cNvPr id="120" name="TextBox 119"/>
+          <p:cNvSpPr txBox="1"/>
+          <p:nvPr/>
+        </p:nvSpPr>
+        <p:spPr>
+          <a:xfrm>
+            <a:off x="7493000" y="3505200"/>
             <a:ext cx="3683000" cy="177800"/>
           </a:xfrm>
           <a:prstGeom prst="rect">
@@ -9295,7 +9789,7 @@
                 <a:solidFill>
                   <a:srgbClr val="FF6B3D"/>
                 </a:solidFill>
-                <a:latin typeface="Arial"/>
+                <a:latin typeface="Poppins"/>
               </a:rPr>
               <a:t>Earned, not bought.</a:t>
             </a:r>
@@ -9304,14 +9798,14 @@
       </p:sp>
       <p:sp>
         <p:nvSpPr>
-          <p:cNvPr id="117" name="TextBox 116"/>
-          <p:cNvSpPr txBox="1"/>
-          <p:nvPr/>
-        </p:nvSpPr>
-        <p:spPr>
-          <a:xfrm>
-            <a:off x="7493000" y="3683000"/>
-            <a:ext cx="3683000" cy="368300"/>
+          <p:cNvPr id="121" name="TextBox 120"/>
+          <p:cNvSpPr txBox="1"/>
+          <p:nvPr/>
+        </p:nvSpPr>
+        <p:spPr>
+          <a:xfrm>
+            <a:off x="7493000" y="3708400"/>
+            <a:ext cx="3683000" cy="406400"/>
           </a:xfrm>
           <a:prstGeom prst="rect">
             <a:avLst/>
@@ -9334,7 +9828,7 @@
                 <a:solidFill>
                   <a:srgbClr val="9A9AA2"/>
                 </a:solidFill>
-                <a:latin typeface="Arial"/>
+                <a:latin typeface="Poppins"/>
               </a:rPr>
               <a:t>The library only grows by running real production builds.</a:t>
             </a:r>
@@ -9343,13 +9837,13 @@
       </p:sp>
       <p:sp>
         <p:nvSpPr>
-          <p:cNvPr id="118" name="TextBox 117"/>
-          <p:cNvSpPr txBox="1"/>
-          <p:nvPr/>
-        </p:nvSpPr>
-        <p:spPr>
-          <a:xfrm>
-            <a:off x="7493000" y="4165600"/>
+          <p:cNvPr id="122" name="TextBox 121"/>
+          <p:cNvSpPr txBox="1"/>
+          <p:nvPr/>
+        </p:nvSpPr>
+        <p:spPr>
+          <a:xfrm>
+            <a:off x="7493000" y="4178300"/>
             <a:ext cx="3683000" cy="177800"/>
           </a:xfrm>
           <a:prstGeom prst="rect">
@@ -9369,7 +9863,7 @@
                 <a:solidFill>
                   <a:srgbClr val="FF6B3D"/>
                 </a:solidFill>
-                <a:latin typeface="Arial"/>
+                <a:latin typeface="Poppins"/>
               </a:rPr>
               <a:t>It compounds.</a:t>
             </a:r>
@@ -9378,14 +9872,14 @@
       </p:sp>
       <p:sp>
         <p:nvSpPr>
-          <p:cNvPr id="119" name="TextBox 118"/>
-          <p:cNvSpPr txBox="1"/>
-          <p:nvPr/>
-        </p:nvSpPr>
-        <p:spPr>
-          <a:xfrm>
-            <a:off x="7493000" y="4368800"/>
-            <a:ext cx="3683000" cy="368300"/>
+          <p:cNvPr id="123" name="TextBox 122"/>
+          <p:cNvSpPr txBox="1"/>
+          <p:nvPr/>
+        </p:nvSpPr>
+        <p:spPr>
+          <a:xfrm>
+            <a:off x="7493000" y="4381500"/>
+            <a:ext cx="3683000" cy="406400"/>
           </a:xfrm>
           <a:prstGeom prst="rect">
             <a:avLst/>
@@ -9408,7 +9902,7 @@
                 <a:solidFill>
                   <a:srgbClr val="9A9AA2"/>
                 </a:solidFill>
-                <a:latin typeface="Arial"/>
+                <a:latin typeface="Poppins"/>
               </a:rPr>
               <a:t>Every project makes the next estimate, gate and build safer.</a:t>
             </a:r>
@@ -9417,7 +9911,7 @@
       </p:sp>
       <p:sp>
         <p:nvSpPr>
-          <p:cNvPr id="120" name="TextBox 119"/>
+          <p:cNvPr id="124" name="TextBox 123"/>
           <p:cNvSpPr txBox="1"/>
           <p:nvPr/>
         </p:nvSpPr>
@@ -9443,7 +9937,7 @@
                 <a:solidFill>
                   <a:srgbClr val="FF6B3D"/>
                 </a:solidFill>
-                <a:latin typeface="Arial"/>
+                <a:latin typeface="Poppins"/>
               </a:rPr>
               <a:t>Capital can’t copy it.</a:t>
             </a:r>
@@ -9452,14 +9946,14 @@
       </p:sp>
       <p:sp>
         <p:nvSpPr>
-          <p:cNvPr id="121" name="TextBox 120"/>
+          <p:cNvPr id="125" name="TextBox 124"/>
           <p:cNvSpPr txBox="1"/>
           <p:nvPr/>
         </p:nvSpPr>
         <p:spPr>
           <a:xfrm>
             <a:off x="7493000" y="5054600"/>
-            <a:ext cx="3683000" cy="368300"/>
+            <a:ext cx="3683000" cy="406400"/>
           </a:xfrm>
           <a:prstGeom prst="rect">
             <a:avLst/>
@@ -9482,7 +9976,7 @@
                 <a:solidFill>
                   <a:srgbClr val="9A9AA2"/>
                 </a:solidFill>
-                <a:latin typeface="Arial"/>
+                <a:latin typeface="Poppins"/>
               </a:rPr>
               <a:t>A bigger round buys code, not failures already survived.</a:t>
             </a:r>
@@ -9491,7 +9985,7 @@
       </p:sp>
       <p:pic>
         <p:nvPicPr>
-          <p:cNvPr id="122" name="Picture 121" descr="logo.png"/>
+          <p:cNvPr id="126" name="Picture 125" descr="logo.png"/>
           <p:cNvPicPr>
             <a:picLocks noChangeAspect="1"/>
           </p:cNvPicPr>

--- a/deck/Pitch_Deck_AthenaRun_v2.pptx
+++ b/deck/Pitch_Deck_AthenaRun_v2.pptx
@@ -12,10 +12,11 @@
     <p:sldId id="257" r:id="rId9"/>
     <p:sldId id="258" r:id="rId10"/>
     <p:sldId id="265" r:id="rId17"/>
+    <p:sldId id="266" r:id="rId18"/>
     <p:sldId id="259" r:id="rId11"/>
-    <p:sldId id="266" r:id="rId18"/>
     <p:sldId id="267" r:id="rId19"/>
     <p:sldId id="268" r:id="rId20"/>
+    <p:sldId id="269" r:id="rId21"/>
     <p:sldId id="260" r:id="rId12"/>
     <p:sldId id="261" r:id="rId13"/>
     <p:sldId id="262" r:id="rId14"/>
@@ -4369,7 +4370,7 @@
                 </a:solidFill>
                 <a:latin typeface="Poppins"/>
               </a:rPr>
-              <a:t>References.</a:t>
+              <a:t>The full lifecycle.</a:t>
             </a:r>
             <a:r>
               <a:rPr sz="2700" b="0">
@@ -4378,7 +4379,7 @@
                 </a:solidFill>
                 <a:latin typeface="Poppins"/>
               </a:rPr>
-              <a:t> Three builds, three problems.</a:t>
+              <a:t> Six phases, eight stages, one chain.</a:t>
             </a:r>
           </a:p>
         </p:txBody>
@@ -4413,7 +4414,7 @@
                 </a:solidFill>
                 <a:latin typeface="Courier New"/>
               </a:rPr>
-              <a:t>06 — References</a:t>
+              <a:t>05 — Lifecycle</a:t>
             </a:r>
           </a:p>
         </p:txBody>
@@ -4470,8 +4471,8 @@
         </p:nvSpPr>
         <p:spPr>
           <a:xfrm>
-            <a:off x="698500" y="1320800"/>
-            <a:ext cx="8890000" cy="190500"/>
+            <a:off x="698500" y="1244600"/>
+            <a:ext cx="9398000" cy="482600"/>
           </a:xfrm>
           <a:prstGeom prst="rect">
             <a:avLst/>
@@ -4484,7 +4485,11 @@
           </a:bodyPr>
           <a:lstStyle/>
           <a:p>
-            <a:pPr algn="l"/>
+            <a:pPr algn="l">
+              <a:lnSpc>
+                <a:spcPts val="1900"/>
+              </a:lnSpc>
+            </a:pPr>
             <a:r>
               <a:rPr sz="1400" b="0">
                 <a:solidFill>
@@ -4492,7 +4497,16 @@
                 </a:solidFill>
                 <a:latin typeface="Poppins"/>
               </a:rPr>
-              <a:t>Shipped software, not pilots. Each one replaced a process that was running manually.</a:t>
+              <a:t>Planning through maintenance — the classic software lifecycle, run end to end by agents, with a </a:t>
+            </a:r>
+            <a:r>
+              <a:rPr sz="1400" b="1">
+                <a:solidFill>
+                  <a:srgbClr val="ECECEE"/>
+                </a:solidFill>
+                <a:latin typeface="Poppins"/>
+              </a:rPr>
+              <a:t>human gate at every handover.</a:t>
             </a:r>
           </a:p>
         </p:txBody>
@@ -4504,9 +4518,9 @@
           <p:nvPr/>
         </p:nvSpPr>
         <p:spPr>
-          <a:xfrm>
-            <a:off x="698500" y="1828800"/>
-            <a:ext cx="10788650" cy="6350"/>
+          <a:xfrm rot="1800000">
+            <a:off x="3987800" y="3136900"/>
+            <a:ext cx="1073150" cy="6350"/>
           </a:xfrm>
           <a:prstGeom prst="rect">
             <a:avLst/>
@@ -4543,20 +4557,20 @@
       </p:sp>
       <p:sp>
         <p:nvSpPr>
-          <p:cNvPr id="8" name="Rectangle 7"/>
+          <p:cNvPr id="8" name="Isosceles Triangle 7"/>
           <p:cNvSpPr/>
           <p:nvPr/>
         </p:nvSpPr>
         <p:spPr>
-          <a:xfrm>
-            <a:off x="698500" y="2159000"/>
-            <a:ext cx="3302000" cy="2857500"/>
-          </a:xfrm>
-          <a:prstGeom prst="rect">
+          <a:xfrm rot="7200000">
+            <a:off x="4711700" y="3225800"/>
+            <a:ext cx="76200" cy="76200"/>
+          </a:xfrm>
+          <a:prstGeom prst="triangle">
             <a:avLst/>
           </a:prstGeom>
           <a:solidFill>
-            <a:srgbClr val="161619"/>
+            <a:srgbClr val="5A5A60"/>
           </a:solidFill>
           <a:ln>
             <a:noFill/>
@@ -4585,303 +4599,22 @@
           </a:p>
         </p:txBody>
       </p:sp>
-      <p:pic>
-        <p:nvPicPr>
-          <p:cNvPr id="9" name="Picture 8" descr="ic-chart.png"/>
-          <p:cNvPicPr>
-            <a:picLocks noChangeAspect="1"/>
-          </p:cNvPicPr>
-          <p:nvPr/>
-        </p:nvPicPr>
-        <p:blipFill>
-          <a:blip r:embed="rId3"/>
-          <a:stretch>
-            <a:fillRect/>
-          </a:stretch>
-        </p:blipFill>
-        <p:spPr>
-          <a:xfrm>
-            <a:off x="952500" y="2400300"/>
-            <a:ext cx="215900" cy="215900"/>
-          </a:xfrm>
-          <a:prstGeom prst="rect">
-            <a:avLst/>
-          </a:prstGeom>
-        </p:spPr>
-      </p:pic>
-      <p:sp>
-        <p:nvSpPr>
-          <p:cNvPr id="10" name="TextBox 9"/>
-          <p:cNvSpPr txBox="1"/>
-          <p:nvPr/>
-        </p:nvSpPr>
-        <p:spPr>
-          <a:xfrm>
-            <a:off x="952500" y="2717800"/>
-            <a:ext cx="2794000" cy="279400"/>
-          </a:xfrm>
-          <a:prstGeom prst="rect">
-            <a:avLst/>
-          </a:prstGeom>
-          <a:noFill/>
-        </p:spPr>
-        <p:txBody>
-          <a:bodyPr wrap="square" lIns="0" rIns="0" tIns="0" bIns="0" anchor="ctr">
-            <a:spAutoFit/>
-          </a:bodyPr>
-          <a:lstStyle/>
-          <a:p>
-            <a:pPr algn="l"/>
-            <a:r>
-              <a:rPr sz="2000" b="0">
-                <a:solidFill>
-                  <a:srgbClr val="ECECEE"/>
-                </a:solidFill>
-                <a:latin typeface="Poppins"/>
-              </a:rPr>
-              <a:t>CFO App</a:t>
-            </a:r>
-          </a:p>
-        </p:txBody>
-      </p:sp>
-      <p:sp>
-        <p:nvSpPr>
-          <p:cNvPr id="11" name="TextBox 10"/>
-          <p:cNvSpPr txBox="1"/>
-          <p:nvPr/>
-        </p:nvSpPr>
-        <p:spPr>
-          <a:xfrm>
-            <a:off x="952500" y="3175000"/>
-            <a:ext cx="2794000" cy="127000"/>
-          </a:xfrm>
-          <a:prstGeom prst="rect">
-            <a:avLst/>
-          </a:prstGeom>
-          <a:noFill/>
-        </p:spPr>
-        <p:txBody>
-          <a:bodyPr wrap="square" lIns="0" rIns="0" tIns="0" bIns="0" anchor="ctr">
-            <a:spAutoFit/>
-          </a:bodyPr>
-          <a:lstStyle/>
-          <a:p>
-            <a:pPr algn="l"/>
-            <a:r>
-              <a:rPr sz="900" b="0" spc="200">
-                <a:solidFill>
-                  <a:srgbClr val="9A9AA2"/>
-                </a:solidFill>
-                <a:latin typeface="Courier New"/>
-              </a:rPr>
-              <a:t>CLIENT / SECTOR</a:t>
-            </a:r>
-          </a:p>
-        </p:txBody>
-      </p:sp>
-      <p:sp>
-        <p:nvSpPr>
-          <p:cNvPr id="12" name="TextBox 11"/>
-          <p:cNvSpPr txBox="1"/>
-          <p:nvPr/>
-        </p:nvSpPr>
-        <p:spPr>
-          <a:xfrm>
-            <a:off x="952500" y="3340100"/>
-            <a:ext cx="2794000" cy="342900"/>
-          </a:xfrm>
-          <a:prstGeom prst="rect">
-            <a:avLst/>
-          </a:prstGeom>
-          <a:noFill/>
-        </p:spPr>
-        <p:txBody>
-          <a:bodyPr wrap="square" lIns="0" rIns="0" tIns="0" bIns="0" anchor="ctr">
-            <a:spAutoFit/>
-          </a:bodyPr>
-          <a:lstStyle/>
-          <a:p>
-            <a:pPr algn="l">
-              <a:lnSpc>
-                <a:spcPts val="1600"/>
-              </a:lnSpc>
-            </a:pPr>
-            <a:r>
-              <a:rPr sz="1300" b="0">
-                <a:solidFill>
-                  <a:srgbClr val="FF6B3D"/>
-                </a:solidFill>
-                <a:latin typeface="Poppins"/>
-              </a:rPr>
-              <a:t>[Kunde oder Branche]</a:t>
-            </a:r>
-          </a:p>
-        </p:txBody>
-      </p:sp>
-      <p:sp>
-        <p:nvSpPr>
-          <p:cNvPr id="13" name="TextBox 12"/>
-          <p:cNvSpPr txBox="1"/>
-          <p:nvPr/>
-        </p:nvSpPr>
-        <p:spPr>
-          <a:xfrm>
-            <a:off x="952500" y="3759200"/>
-            <a:ext cx="2794000" cy="127000"/>
-          </a:xfrm>
-          <a:prstGeom prst="rect">
-            <a:avLst/>
-          </a:prstGeom>
-          <a:noFill/>
-        </p:spPr>
-        <p:txBody>
-          <a:bodyPr wrap="square" lIns="0" rIns="0" tIns="0" bIns="0" anchor="ctr">
-            <a:spAutoFit/>
-          </a:bodyPr>
-          <a:lstStyle/>
-          <a:p>
-            <a:pPr algn="l"/>
-            <a:r>
-              <a:rPr sz="900" b="0" spc="200">
-                <a:solidFill>
-                  <a:srgbClr val="9A9AA2"/>
-                </a:solidFill>
-                <a:latin typeface="Courier New"/>
-              </a:rPr>
-              <a:t>WHAT WE BUILT</a:t>
-            </a:r>
-          </a:p>
-        </p:txBody>
-      </p:sp>
-      <p:sp>
-        <p:nvSpPr>
-          <p:cNvPr id="14" name="TextBox 13"/>
-          <p:cNvSpPr txBox="1"/>
-          <p:nvPr/>
-        </p:nvSpPr>
-        <p:spPr>
-          <a:xfrm>
-            <a:off x="952500" y="3924300"/>
-            <a:ext cx="2794000" cy="342900"/>
-          </a:xfrm>
-          <a:prstGeom prst="rect">
-            <a:avLst/>
-          </a:prstGeom>
-          <a:noFill/>
-        </p:spPr>
-        <p:txBody>
-          <a:bodyPr wrap="square" lIns="0" rIns="0" tIns="0" bIns="0" anchor="ctr">
-            <a:spAutoFit/>
-          </a:bodyPr>
-          <a:lstStyle/>
-          <a:p>
-            <a:pPr algn="l">
-              <a:lnSpc>
-                <a:spcPts val="1600"/>
-              </a:lnSpc>
-            </a:pPr>
-            <a:r>
-              <a:rPr sz="1300" b="0">
-                <a:solidFill>
-                  <a:srgbClr val="FF6B3D"/>
-                </a:solidFill>
-                <a:latin typeface="Poppins"/>
-              </a:rPr>
-              <a:t>[was gebaut wurde]</a:t>
-            </a:r>
-          </a:p>
-        </p:txBody>
-      </p:sp>
-      <p:sp>
-        <p:nvSpPr>
-          <p:cNvPr id="15" name="TextBox 14"/>
-          <p:cNvSpPr txBox="1"/>
-          <p:nvPr/>
-        </p:nvSpPr>
-        <p:spPr>
-          <a:xfrm>
-            <a:off x="952500" y="4343400"/>
-            <a:ext cx="2794000" cy="127000"/>
-          </a:xfrm>
-          <a:prstGeom prst="rect">
-            <a:avLst/>
-          </a:prstGeom>
-          <a:noFill/>
-        </p:spPr>
-        <p:txBody>
-          <a:bodyPr wrap="square" lIns="0" rIns="0" tIns="0" bIns="0" anchor="ctr">
-            <a:spAutoFit/>
-          </a:bodyPr>
-          <a:lstStyle/>
-          <a:p>
-            <a:pPr algn="l"/>
-            <a:r>
-              <a:rPr sz="900" b="0" spc="200">
-                <a:solidFill>
-                  <a:srgbClr val="9A9AA2"/>
-                </a:solidFill>
-                <a:latin typeface="Courier New"/>
-              </a:rPr>
-              <a:t>RESULT</a:t>
-            </a:r>
-          </a:p>
-        </p:txBody>
-      </p:sp>
-      <p:sp>
-        <p:nvSpPr>
-          <p:cNvPr id="16" name="TextBox 15"/>
-          <p:cNvSpPr txBox="1"/>
-          <p:nvPr/>
-        </p:nvSpPr>
-        <p:spPr>
-          <a:xfrm>
-            <a:off x="952500" y="4508500"/>
-            <a:ext cx="2794000" cy="342900"/>
-          </a:xfrm>
-          <a:prstGeom prst="rect">
-            <a:avLst/>
-          </a:prstGeom>
-          <a:noFill/>
-        </p:spPr>
-        <p:txBody>
-          <a:bodyPr wrap="square" lIns="0" rIns="0" tIns="0" bIns="0" anchor="ctr">
-            <a:spAutoFit/>
-          </a:bodyPr>
-          <a:lstStyle/>
-          <a:p>
-            <a:pPr algn="l">
-              <a:lnSpc>
-                <a:spcPts val="1600"/>
-              </a:lnSpc>
-            </a:pPr>
-            <a:r>
-              <a:rPr sz="1300" b="0">
-                <a:solidFill>
-                  <a:srgbClr val="FF6B3D"/>
-                </a:solidFill>
-                <a:latin typeface="Poppins"/>
-              </a:rPr>
-              <a:t>[Ergebnis in einer Zeile]</a:t>
-            </a:r>
-          </a:p>
-        </p:txBody>
-      </p:sp>
-      <p:sp>
-        <p:nvSpPr>
-          <p:cNvPr id="17" name="Rectangle 16"/>
+      <p:sp>
+        <p:nvSpPr>
+          <p:cNvPr id="9" name="Diamond 8"/>
           <p:cNvSpPr/>
           <p:nvPr/>
         </p:nvSpPr>
         <p:spPr>
           <a:xfrm>
-            <a:off x="4318000" y="2159000"/>
-            <a:ext cx="3302000" cy="2857500"/>
-          </a:xfrm>
-          <a:prstGeom prst="rect">
+            <a:off x="4483100" y="3092450"/>
+            <a:ext cx="88900" cy="88900"/>
+          </a:xfrm>
+          <a:prstGeom prst="diamond">
             <a:avLst/>
           </a:prstGeom>
           <a:solidFill>
-            <a:srgbClr val="161619"/>
+            <a:srgbClr val="FF6B3D"/>
           </a:solidFill>
           <a:ln>
             <a:noFill/>
@@ -4910,303 +4643,22 @@
           </a:p>
         </p:txBody>
       </p:sp>
-      <p:pic>
-        <p:nvPicPr>
-          <p:cNvPr id="18" name="Picture 17" descr="ic-funnel.png"/>
-          <p:cNvPicPr>
-            <a:picLocks noChangeAspect="1"/>
-          </p:cNvPicPr>
-          <p:nvPr/>
-        </p:nvPicPr>
-        <p:blipFill>
-          <a:blip r:embed="rId4"/>
-          <a:stretch>
-            <a:fillRect/>
-          </a:stretch>
-        </p:blipFill>
-        <p:spPr>
-          <a:xfrm>
-            <a:off x="4572000" y="2400300"/>
-            <a:ext cx="215900" cy="215900"/>
-          </a:xfrm>
-          <a:prstGeom prst="rect">
-            <a:avLst/>
-          </a:prstGeom>
-        </p:spPr>
-      </p:pic>
-      <p:sp>
-        <p:nvSpPr>
-          <p:cNvPr id="19" name="TextBox 18"/>
-          <p:cNvSpPr txBox="1"/>
-          <p:nvPr/>
-        </p:nvSpPr>
-        <p:spPr>
-          <a:xfrm>
-            <a:off x="4572000" y="2717800"/>
-            <a:ext cx="2794000" cy="279400"/>
-          </a:xfrm>
-          <a:prstGeom prst="rect">
-            <a:avLst/>
-          </a:prstGeom>
-          <a:noFill/>
-        </p:spPr>
-        <p:txBody>
-          <a:bodyPr wrap="square" lIns="0" rIns="0" tIns="0" bIns="0" anchor="ctr">
-            <a:spAutoFit/>
-          </a:bodyPr>
-          <a:lstStyle/>
-          <a:p>
-            <a:pPr algn="l"/>
-            <a:r>
-              <a:rPr sz="2000" b="0">
-                <a:solidFill>
-                  <a:srgbClr val="ECECEE"/>
-                </a:solidFill>
-                <a:latin typeface="Poppins"/>
-              </a:rPr>
-              <a:t>Lead Generation</a:t>
-            </a:r>
-          </a:p>
-        </p:txBody>
-      </p:sp>
-      <p:sp>
-        <p:nvSpPr>
-          <p:cNvPr id="20" name="TextBox 19"/>
-          <p:cNvSpPr txBox="1"/>
-          <p:nvPr/>
-        </p:nvSpPr>
-        <p:spPr>
-          <a:xfrm>
-            <a:off x="4572000" y="3175000"/>
-            <a:ext cx="2794000" cy="127000"/>
-          </a:xfrm>
-          <a:prstGeom prst="rect">
-            <a:avLst/>
-          </a:prstGeom>
-          <a:noFill/>
-        </p:spPr>
-        <p:txBody>
-          <a:bodyPr wrap="square" lIns="0" rIns="0" tIns="0" bIns="0" anchor="ctr">
-            <a:spAutoFit/>
-          </a:bodyPr>
-          <a:lstStyle/>
-          <a:p>
-            <a:pPr algn="l"/>
-            <a:r>
-              <a:rPr sz="900" b="0" spc="200">
-                <a:solidFill>
-                  <a:srgbClr val="9A9AA2"/>
-                </a:solidFill>
-                <a:latin typeface="Courier New"/>
-              </a:rPr>
-              <a:t>CLIENT / SECTOR</a:t>
-            </a:r>
-          </a:p>
-        </p:txBody>
-      </p:sp>
-      <p:sp>
-        <p:nvSpPr>
-          <p:cNvPr id="21" name="TextBox 20"/>
-          <p:cNvSpPr txBox="1"/>
-          <p:nvPr/>
-        </p:nvSpPr>
-        <p:spPr>
-          <a:xfrm>
-            <a:off x="4572000" y="3340100"/>
-            <a:ext cx="2794000" cy="342900"/>
-          </a:xfrm>
-          <a:prstGeom prst="rect">
-            <a:avLst/>
-          </a:prstGeom>
-          <a:noFill/>
-        </p:spPr>
-        <p:txBody>
-          <a:bodyPr wrap="square" lIns="0" rIns="0" tIns="0" bIns="0" anchor="ctr">
-            <a:spAutoFit/>
-          </a:bodyPr>
-          <a:lstStyle/>
-          <a:p>
-            <a:pPr algn="l">
-              <a:lnSpc>
-                <a:spcPts val="1600"/>
-              </a:lnSpc>
-            </a:pPr>
-            <a:r>
-              <a:rPr sz="1300" b="0">
-                <a:solidFill>
-                  <a:srgbClr val="FF6B3D"/>
-                </a:solidFill>
-                <a:latin typeface="Poppins"/>
-              </a:rPr>
-              <a:t>[Kunde oder Branche]</a:t>
-            </a:r>
-          </a:p>
-        </p:txBody>
-      </p:sp>
-      <p:sp>
-        <p:nvSpPr>
-          <p:cNvPr id="22" name="TextBox 21"/>
-          <p:cNvSpPr txBox="1"/>
-          <p:nvPr/>
-        </p:nvSpPr>
-        <p:spPr>
-          <a:xfrm>
-            <a:off x="4572000" y="3759200"/>
-            <a:ext cx="2794000" cy="127000"/>
-          </a:xfrm>
-          <a:prstGeom prst="rect">
-            <a:avLst/>
-          </a:prstGeom>
-          <a:noFill/>
-        </p:spPr>
-        <p:txBody>
-          <a:bodyPr wrap="square" lIns="0" rIns="0" tIns="0" bIns="0" anchor="ctr">
-            <a:spAutoFit/>
-          </a:bodyPr>
-          <a:lstStyle/>
-          <a:p>
-            <a:pPr algn="l"/>
-            <a:r>
-              <a:rPr sz="900" b="0" spc="200">
-                <a:solidFill>
-                  <a:srgbClr val="9A9AA2"/>
-                </a:solidFill>
-                <a:latin typeface="Courier New"/>
-              </a:rPr>
-              <a:t>WHAT WE BUILT</a:t>
-            </a:r>
-          </a:p>
-        </p:txBody>
-      </p:sp>
-      <p:sp>
-        <p:nvSpPr>
-          <p:cNvPr id="23" name="TextBox 22"/>
-          <p:cNvSpPr txBox="1"/>
-          <p:nvPr/>
-        </p:nvSpPr>
-        <p:spPr>
-          <a:xfrm>
-            <a:off x="4572000" y="3924300"/>
-            <a:ext cx="2794000" cy="342900"/>
-          </a:xfrm>
-          <a:prstGeom prst="rect">
-            <a:avLst/>
-          </a:prstGeom>
-          <a:noFill/>
-        </p:spPr>
-        <p:txBody>
-          <a:bodyPr wrap="square" lIns="0" rIns="0" tIns="0" bIns="0" anchor="ctr">
-            <a:spAutoFit/>
-          </a:bodyPr>
-          <a:lstStyle/>
-          <a:p>
-            <a:pPr algn="l">
-              <a:lnSpc>
-                <a:spcPts val="1600"/>
-              </a:lnSpc>
-            </a:pPr>
-            <a:r>
-              <a:rPr sz="1300" b="0">
-                <a:solidFill>
-                  <a:srgbClr val="FF6B3D"/>
-                </a:solidFill>
-                <a:latin typeface="Poppins"/>
-              </a:rPr>
-              <a:t>[was gebaut wurde]</a:t>
-            </a:r>
-          </a:p>
-        </p:txBody>
-      </p:sp>
-      <p:sp>
-        <p:nvSpPr>
-          <p:cNvPr id="24" name="TextBox 23"/>
-          <p:cNvSpPr txBox="1"/>
-          <p:nvPr/>
-        </p:nvSpPr>
-        <p:spPr>
-          <a:xfrm>
-            <a:off x="4572000" y="4343400"/>
-            <a:ext cx="2794000" cy="127000"/>
-          </a:xfrm>
-          <a:prstGeom prst="rect">
-            <a:avLst/>
-          </a:prstGeom>
-          <a:noFill/>
-        </p:spPr>
-        <p:txBody>
-          <a:bodyPr wrap="square" lIns="0" rIns="0" tIns="0" bIns="0" anchor="ctr">
-            <a:spAutoFit/>
-          </a:bodyPr>
-          <a:lstStyle/>
-          <a:p>
-            <a:pPr algn="l"/>
-            <a:r>
-              <a:rPr sz="900" b="0" spc="200">
-                <a:solidFill>
-                  <a:srgbClr val="9A9AA2"/>
-                </a:solidFill>
-                <a:latin typeface="Courier New"/>
-              </a:rPr>
-              <a:t>RESULT</a:t>
-            </a:r>
-          </a:p>
-        </p:txBody>
-      </p:sp>
-      <p:sp>
-        <p:nvSpPr>
-          <p:cNvPr id="25" name="TextBox 24"/>
-          <p:cNvSpPr txBox="1"/>
-          <p:nvPr/>
-        </p:nvSpPr>
-        <p:spPr>
-          <a:xfrm>
-            <a:off x="4572000" y="4508500"/>
-            <a:ext cx="2794000" cy="342900"/>
-          </a:xfrm>
-          <a:prstGeom prst="rect">
-            <a:avLst/>
-          </a:prstGeom>
-          <a:noFill/>
-        </p:spPr>
-        <p:txBody>
-          <a:bodyPr wrap="square" lIns="0" rIns="0" tIns="0" bIns="0" anchor="ctr">
-            <a:spAutoFit/>
-          </a:bodyPr>
-          <a:lstStyle/>
-          <a:p>
-            <a:pPr algn="l">
-              <a:lnSpc>
-                <a:spcPts val="1600"/>
-              </a:lnSpc>
-            </a:pPr>
-            <a:r>
-              <a:rPr sz="1300" b="0">
-                <a:solidFill>
-                  <a:srgbClr val="FF6B3D"/>
-                </a:solidFill>
-                <a:latin typeface="Poppins"/>
-              </a:rPr>
-              <a:t>[Ergebnis in einer Zeile]</a:t>
-            </a:r>
-          </a:p>
-        </p:txBody>
-      </p:sp>
-      <p:sp>
-        <p:nvSpPr>
-          <p:cNvPr id="26" name="Rectangle 25"/>
+      <p:sp>
+        <p:nvSpPr>
+          <p:cNvPr id="10" name="Rectangle 9"/>
           <p:cNvSpPr/>
           <p:nvPr/>
         </p:nvSpPr>
         <p:spPr>
-          <a:xfrm>
-            <a:off x="7937500" y="2159000"/>
-            <a:ext cx="3302000" cy="2857500"/>
+          <a:xfrm rot="5400000">
+            <a:off x="4457700" y="3943350"/>
+            <a:ext cx="1079500" cy="6350"/>
           </a:xfrm>
           <a:prstGeom prst="rect">
             <a:avLst/>
           </a:prstGeom>
           <a:solidFill>
-            <a:srgbClr val="161619"/>
+            <a:srgbClr val="2B2B2D"/>
           </a:solidFill>
           <a:ln>
             <a:noFill/>
@@ -5235,332 +4687,2011 @@
           </a:p>
         </p:txBody>
       </p:sp>
+      <p:sp>
+        <p:nvSpPr>
+          <p:cNvPr id="11" name="Isosceles Triangle 10"/>
+          <p:cNvSpPr/>
+          <p:nvPr/>
+        </p:nvSpPr>
+        <p:spPr>
+          <a:xfrm rot="10800000">
+            <a:off x="4959350" y="4165600"/>
+            <a:ext cx="76200" cy="76200"/>
+          </a:xfrm>
+          <a:prstGeom prst="triangle">
+            <a:avLst/>
+          </a:prstGeom>
+          <a:solidFill>
+            <a:srgbClr val="5A5A60"/>
+          </a:solidFill>
+          <a:ln>
+            <a:noFill/>
+          </a:ln>
+          <a:effectLst/>
+        </p:spPr>
+        <p:style>
+          <a:lnRef idx="1">
+            <a:schemeClr val="accent1"/>
+          </a:lnRef>
+          <a:fillRef idx="3">
+            <a:schemeClr val="accent1"/>
+          </a:fillRef>
+          <a:effectRef idx="2">
+            <a:schemeClr val="accent1"/>
+          </a:effectRef>
+          <a:fontRef idx="minor">
+            <a:schemeClr val="lt1"/>
+          </a:fontRef>
+        </p:style>
+        <p:txBody>
+          <a:bodyPr rtlCol="0" anchor="ctr"/>
+          <a:lstStyle/>
+          <a:p>
+            <a:pPr algn="ctr"/>
+          </a:p>
+        </p:txBody>
+      </p:sp>
+      <p:sp>
+        <p:nvSpPr>
+          <p:cNvPr id="12" name="Diamond 11"/>
+          <p:cNvSpPr/>
+          <p:nvPr/>
+        </p:nvSpPr>
+        <p:spPr>
+          <a:xfrm>
+            <a:off x="4953000" y="3905250"/>
+            <a:ext cx="88900" cy="88900"/>
+          </a:xfrm>
+          <a:prstGeom prst="diamond">
+            <a:avLst/>
+          </a:prstGeom>
+          <a:solidFill>
+            <a:srgbClr val="FF6B3D"/>
+          </a:solidFill>
+          <a:ln>
+            <a:noFill/>
+          </a:ln>
+          <a:effectLst/>
+        </p:spPr>
+        <p:style>
+          <a:lnRef idx="1">
+            <a:schemeClr val="accent1"/>
+          </a:lnRef>
+          <a:fillRef idx="3">
+            <a:schemeClr val="accent1"/>
+          </a:fillRef>
+          <a:effectRef idx="2">
+            <a:schemeClr val="accent1"/>
+          </a:effectRef>
+          <a:fontRef idx="minor">
+            <a:schemeClr val="lt1"/>
+          </a:fontRef>
+        </p:style>
+        <p:txBody>
+          <a:bodyPr rtlCol="0" anchor="ctr"/>
+          <a:lstStyle/>
+          <a:p>
+            <a:pPr algn="ctr"/>
+          </a:p>
+        </p:txBody>
+      </p:sp>
+      <p:sp>
+        <p:nvSpPr>
+          <p:cNvPr id="13" name="Rectangle 12"/>
+          <p:cNvSpPr/>
+          <p:nvPr/>
+        </p:nvSpPr>
+        <p:spPr>
+          <a:xfrm rot="9000000">
+            <a:off x="3987800" y="4756150"/>
+            <a:ext cx="1073150" cy="6350"/>
+          </a:xfrm>
+          <a:prstGeom prst="rect">
+            <a:avLst/>
+          </a:prstGeom>
+          <a:solidFill>
+            <a:srgbClr val="2B2B2D"/>
+          </a:solidFill>
+          <a:ln>
+            <a:noFill/>
+          </a:ln>
+          <a:effectLst/>
+        </p:spPr>
+        <p:style>
+          <a:lnRef idx="1">
+            <a:schemeClr val="accent1"/>
+          </a:lnRef>
+          <a:fillRef idx="3">
+            <a:schemeClr val="accent1"/>
+          </a:fillRef>
+          <a:effectRef idx="2">
+            <a:schemeClr val="accent1"/>
+          </a:effectRef>
+          <a:fontRef idx="minor">
+            <a:schemeClr val="lt1"/>
+          </a:fontRef>
+        </p:style>
+        <p:txBody>
+          <a:bodyPr rtlCol="0" anchor="ctr"/>
+          <a:lstStyle/>
+          <a:p>
+            <a:pPr algn="ctr"/>
+          </a:p>
+        </p:txBody>
+      </p:sp>
+      <p:sp>
+        <p:nvSpPr>
+          <p:cNvPr id="14" name="Isosceles Triangle 13"/>
+          <p:cNvSpPr/>
+          <p:nvPr/>
+        </p:nvSpPr>
+        <p:spPr>
+          <a:xfrm rot="14400000">
+            <a:off x="4267200" y="4845050"/>
+            <a:ext cx="76200" cy="76200"/>
+          </a:xfrm>
+          <a:prstGeom prst="triangle">
+            <a:avLst/>
+          </a:prstGeom>
+          <a:solidFill>
+            <a:srgbClr val="5A5A60"/>
+          </a:solidFill>
+          <a:ln>
+            <a:noFill/>
+          </a:ln>
+          <a:effectLst/>
+        </p:spPr>
+        <p:style>
+          <a:lnRef idx="1">
+            <a:schemeClr val="accent1"/>
+          </a:lnRef>
+          <a:fillRef idx="3">
+            <a:schemeClr val="accent1"/>
+          </a:fillRef>
+          <a:effectRef idx="2">
+            <a:schemeClr val="accent1"/>
+          </a:effectRef>
+          <a:fontRef idx="minor">
+            <a:schemeClr val="lt1"/>
+          </a:fontRef>
+        </p:style>
+        <p:txBody>
+          <a:bodyPr rtlCol="0" anchor="ctr"/>
+          <a:lstStyle/>
+          <a:p>
+            <a:pPr algn="ctr"/>
+          </a:p>
+        </p:txBody>
+      </p:sp>
+      <p:sp>
+        <p:nvSpPr>
+          <p:cNvPr id="15" name="Diamond 14"/>
+          <p:cNvSpPr/>
+          <p:nvPr/>
+        </p:nvSpPr>
+        <p:spPr>
+          <a:xfrm>
+            <a:off x="4483100" y="4711700"/>
+            <a:ext cx="88900" cy="88900"/>
+          </a:xfrm>
+          <a:prstGeom prst="diamond">
+            <a:avLst/>
+          </a:prstGeom>
+          <a:solidFill>
+            <a:srgbClr val="FF6B3D"/>
+          </a:solidFill>
+          <a:ln>
+            <a:noFill/>
+          </a:ln>
+          <a:effectLst/>
+        </p:spPr>
+        <p:style>
+          <a:lnRef idx="1">
+            <a:schemeClr val="accent1"/>
+          </a:lnRef>
+          <a:fillRef idx="3">
+            <a:schemeClr val="accent1"/>
+          </a:fillRef>
+          <a:effectRef idx="2">
+            <a:schemeClr val="accent1"/>
+          </a:effectRef>
+          <a:fontRef idx="minor">
+            <a:schemeClr val="lt1"/>
+          </a:fontRef>
+        </p:style>
+        <p:txBody>
+          <a:bodyPr rtlCol="0" anchor="ctr"/>
+          <a:lstStyle/>
+          <a:p>
+            <a:pPr algn="ctr"/>
+          </a:p>
+        </p:txBody>
+      </p:sp>
+      <p:sp>
+        <p:nvSpPr>
+          <p:cNvPr id="16" name="Rectangle 15"/>
+          <p:cNvSpPr/>
+          <p:nvPr/>
+        </p:nvSpPr>
+        <p:spPr>
+          <a:xfrm rot="12600000">
+            <a:off x="3054350" y="4756150"/>
+            <a:ext cx="1079500" cy="6350"/>
+          </a:xfrm>
+          <a:prstGeom prst="rect">
+            <a:avLst/>
+          </a:prstGeom>
+          <a:solidFill>
+            <a:srgbClr val="2B2B2D"/>
+          </a:solidFill>
+          <a:ln>
+            <a:noFill/>
+          </a:ln>
+          <a:effectLst/>
+        </p:spPr>
+        <p:style>
+          <a:lnRef idx="1">
+            <a:schemeClr val="accent1"/>
+          </a:lnRef>
+          <a:fillRef idx="3">
+            <a:schemeClr val="accent1"/>
+          </a:fillRef>
+          <a:effectRef idx="2">
+            <a:schemeClr val="accent1"/>
+          </a:effectRef>
+          <a:fontRef idx="minor">
+            <a:schemeClr val="lt1"/>
+          </a:fontRef>
+        </p:style>
+        <p:txBody>
+          <a:bodyPr rtlCol="0" anchor="ctr"/>
+          <a:lstStyle/>
+          <a:p>
+            <a:pPr algn="ctr"/>
+          </a:p>
+        </p:txBody>
+      </p:sp>
+      <p:sp>
+        <p:nvSpPr>
+          <p:cNvPr id="17" name="Isosceles Triangle 16"/>
+          <p:cNvSpPr/>
+          <p:nvPr/>
+        </p:nvSpPr>
+        <p:spPr>
+          <a:xfrm rot="18000000">
+            <a:off x="3333750" y="4591050"/>
+            <a:ext cx="76200" cy="76200"/>
+          </a:xfrm>
+          <a:prstGeom prst="triangle">
+            <a:avLst/>
+          </a:prstGeom>
+          <a:solidFill>
+            <a:srgbClr val="5A5A60"/>
+          </a:solidFill>
+          <a:ln>
+            <a:noFill/>
+          </a:ln>
+          <a:effectLst/>
+        </p:spPr>
+        <p:style>
+          <a:lnRef idx="1">
+            <a:schemeClr val="accent1"/>
+          </a:lnRef>
+          <a:fillRef idx="3">
+            <a:schemeClr val="accent1"/>
+          </a:fillRef>
+          <a:effectRef idx="2">
+            <a:schemeClr val="accent1"/>
+          </a:effectRef>
+          <a:fontRef idx="minor">
+            <a:schemeClr val="lt1"/>
+          </a:fontRef>
+        </p:style>
+        <p:txBody>
+          <a:bodyPr rtlCol="0" anchor="ctr"/>
+          <a:lstStyle/>
+          <a:p>
+            <a:pPr algn="ctr"/>
+          </a:p>
+        </p:txBody>
+      </p:sp>
+      <p:sp>
+        <p:nvSpPr>
+          <p:cNvPr id="18" name="Diamond 17"/>
+          <p:cNvSpPr/>
+          <p:nvPr/>
+        </p:nvSpPr>
+        <p:spPr>
+          <a:xfrm>
+            <a:off x="3549650" y="4711700"/>
+            <a:ext cx="88900" cy="88900"/>
+          </a:xfrm>
+          <a:prstGeom prst="diamond">
+            <a:avLst/>
+          </a:prstGeom>
+          <a:solidFill>
+            <a:srgbClr val="FF6B3D"/>
+          </a:solidFill>
+          <a:ln>
+            <a:noFill/>
+          </a:ln>
+          <a:effectLst/>
+        </p:spPr>
+        <p:style>
+          <a:lnRef idx="1">
+            <a:schemeClr val="accent1"/>
+          </a:lnRef>
+          <a:fillRef idx="3">
+            <a:schemeClr val="accent1"/>
+          </a:fillRef>
+          <a:effectRef idx="2">
+            <a:schemeClr val="accent1"/>
+          </a:effectRef>
+          <a:fontRef idx="minor">
+            <a:schemeClr val="lt1"/>
+          </a:fontRef>
+        </p:style>
+        <p:txBody>
+          <a:bodyPr rtlCol="0" anchor="ctr"/>
+          <a:lstStyle/>
+          <a:p>
+            <a:pPr algn="ctr"/>
+          </a:p>
+        </p:txBody>
+      </p:sp>
+      <p:sp>
+        <p:nvSpPr>
+          <p:cNvPr id="19" name="Rectangle 18"/>
+          <p:cNvSpPr/>
+          <p:nvPr/>
+        </p:nvSpPr>
+        <p:spPr>
+          <a:xfrm rot="16200000">
+            <a:off x="2584450" y="3943350"/>
+            <a:ext cx="1079500" cy="6350"/>
+          </a:xfrm>
+          <a:prstGeom prst="rect">
+            <a:avLst/>
+          </a:prstGeom>
+          <a:solidFill>
+            <a:srgbClr val="2B2B2D"/>
+          </a:solidFill>
+          <a:ln>
+            <a:noFill/>
+          </a:ln>
+          <a:effectLst/>
+        </p:spPr>
+        <p:style>
+          <a:lnRef idx="1">
+            <a:schemeClr val="accent1"/>
+          </a:lnRef>
+          <a:fillRef idx="3">
+            <a:schemeClr val="accent1"/>
+          </a:fillRef>
+          <a:effectRef idx="2">
+            <a:schemeClr val="accent1"/>
+          </a:effectRef>
+          <a:fontRef idx="minor">
+            <a:schemeClr val="lt1"/>
+          </a:fontRef>
+        </p:style>
+        <p:txBody>
+          <a:bodyPr rtlCol="0" anchor="ctr"/>
+          <a:lstStyle/>
+          <a:p>
+            <a:pPr algn="ctr"/>
+          </a:p>
+        </p:txBody>
+      </p:sp>
+      <p:sp>
+        <p:nvSpPr>
+          <p:cNvPr id="20" name="Isosceles Triangle 19"/>
+          <p:cNvSpPr/>
+          <p:nvPr/>
+        </p:nvSpPr>
+        <p:spPr>
+          <a:xfrm rot="0">
+            <a:off x="3086100" y="3651250"/>
+            <a:ext cx="76200" cy="76200"/>
+          </a:xfrm>
+          <a:prstGeom prst="triangle">
+            <a:avLst/>
+          </a:prstGeom>
+          <a:solidFill>
+            <a:srgbClr val="5A5A60"/>
+          </a:solidFill>
+          <a:ln>
+            <a:noFill/>
+          </a:ln>
+          <a:effectLst/>
+        </p:spPr>
+        <p:style>
+          <a:lnRef idx="1">
+            <a:schemeClr val="accent1"/>
+          </a:lnRef>
+          <a:fillRef idx="3">
+            <a:schemeClr val="accent1"/>
+          </a:fillRef>
+          <a:effectRef idx="2">
+            <a:schemeClr val="accent1"/>
+          </a:effectRef>
+          <a:fontRef idx="minor">
+            <a:schemeClr val="lt1"/>
+          </a:fontRef>
+        </p:style>
+        <p:txBody>
+          <a:bodyPr rtlCol="0" anchor="ctr"/>
+          <a:lstStyle/>
+          <a:p>
+            <a:pPr algn="ctr"/>
+          </a:p>
+        </p:txBody>
+      </p:sp>
+      <p:sp>
+        <p:nvSpPr>
+          <p:cNvPr id="21" name="Diamond 20"/>
+          <p:cNvSpPr/>
+          <p:nvPr/>
+        </p:nvSpPr>
+        <p:spPr>
+          <a:xfrm>
+            <a:off x="3079750" y="3905250"/>
+            <a:ext cx="88900" cy="88900"/>
+          </a:xfrm>
+          <a:prstGeom prst="diamond">
+            <a:avLst/>
+          </a:prstGeom>
+          <a:solidFill>
+            <a:srgbClr val="FF6B3D"/>
+          </a:solidFill>
+          <a:ln>
+            <a:noFill/>
+          </a:ln>
+          <a:effectLst/>
+        </p:spPr>
+        <p:style>
+          <a:lnRef idx="1">
+            <a:schemeClr val="accent1"/>
+          </a:lnRef>
+          <a:fillRef idx="3">
+            <a:schemeClr val="accent1"/>
+          </a:fillRef>
+          <a:effectRef idx="2">
+            <a:schemeClr val="accent1"/>
+          </a:effectRef>
+          <a:fontRef idx="minor">
+            <a:schemeClr val="lt1"/>
+          </a:fontRef>
+        </p:style>
+        <p:txBody>
+          <a:bodyPr rtlCol="0" anchor="ctr"/>
+          <a:lstStyle/>
+          <a:p>
+            <a:pPr algn="ctr"/>
+          </a:p>
+        </p:txBody>
+      </p:sp>
+      <p:sp>
+        <p:nvSpPr>
+          <p:cNvPr id="22" name="Rectangle 21"/>
+          <p:cNvSpPr/>
+          <p:nvPr/>
+        </p:nvSpPr>
+        <p:spPr>
+          <a:xfrm rot="19800000">
+            <a:off x="3054350" y="3136900"/>
+            <a:ext cx="1073150" cy="6350"/>
+          </a:xfrm>
+          <a:prstGeom prst="rect">
+            <a:avLst/>
+          </a:prstGeom>
+          <a:solidFill>
+            <a:srgbClr val="2B2B2D"/>
+          </a:solidFill>
+          <a:ln>
+            <a:noFill/>
+          </a:ln>
+          <a:effectLst/>
+        </p:spPr>
+        <p:style>
+          <a:lnRef idx="1">
+            <a:schemeClr val="accent1"/>
+          </a:lnRef>
+          <a:fillRef idx="3">
+            <a:schemeClr val="accent1"/>
+          </a:fillRef>
+          <a:effectRef idx="2">
+            <a:schemeClr val="accent1"/>
+          </a:effectRef>
+          <a:fontRef idx="minor">
+            <a:schemeClr val="lt1"/>
+          </a:fontRef>
+        </p:style>
+        <p:txBody>
+          <a:bodyPr rtlCol="0" anchor="ctr"/>
+          <a:lstStyle/>
+          <a:p>
+            <a:pPr algn="ctr"/>
+          </a:p>
+        </p:txBody>
+      </p:sp>
+      <p:sp>
+        <p:nvSpPr>
+          <p:cNvPr id="23" name="Isosceles Triangle 22"/>
+          <p:cNvSpPr/>
+          <p:nvPr/>
+        </p:nvSpPr>
+        <p:spPr>
+          <a:xfrm rot="3600000">
+            <a:off x="3778250" y="2971800"/>
+            <a:ext cx="76200" cy="76200"/>
+          </a:xfrm>
+          <a:prstGeom prst="triangle">
+            <a:avLst/>
+          </a:prstGeom>
+          <a:solidFill>
+            <a:srgbClr val="5A5A60"/>
+          </a:solidFill>
+          <a:ln>
+            <a:noFill/>
+          </a:ln>
+          <a:effectLst/>
+        </p:spPr>
+        <p:style>
+          <a:lnRef idx="1">
+            <a:schemeClr val="accent1"/>
+          </a:lnRef>
+          <a:fillRef idx="3">
+            <a:schemeClr val="accent1"/>
+          </a:fillRef>
+          <a:effectRef idx="2">
+            <a:schemeClr val="accent1"/>
+          </a:effectRef>
+          <a:fontRef idx="minor">
+            <a:schemeClr val="lt1"/>
+          </a:fontRef>
+        </p:style>
+        <p:txBody>
+          <a:bodyPr rtlCol="0" anchor="ctr"/>
+          <a:lstStyle/>
+          <a:p>
+            <a:pPr algn="ctr"/>
+          </a:p>
+        </p:txBody>
+      </p:sp>
+      <p:sp>
+        <p:nvSpPr>
+          <p:cNvPr id="24" name="Diamond 23"/>
+          <p:cNvSpPr/>
+          <p:nvPr/>
+        </p:nvSpPr>
+        <p:spPr>
+          <a:xfrm>
+            <a:off x="3549650" y="3092450"/>
+            <a:ext cx="88900" cy="88900"/>
+          </a:xfrm>
+          <a:prstGeom prst="diamond">
+            <a:avLst/>
+          </a:prstGeom>
+          <a:solidFill>
+            <a:srgbClr val="FF6B3D"/>
+          </a:solidFill>
+          <a:ln>
+            <a:noFill/>
+          </a:ln>
+          <a:effectLst/>
+        </p:spPr>
+        <p:style>
+          <a:lnRef idx="1">
+            <a:schemeClr val="accent1"/>
+          </a:lnRef>
+          <a:fillRef idx="3">
+            <a:schemeClr val="accent1"/>
+          </a:fillRef>
+          <a:effectRef idx="2">
+            <a:schemeClr val="accent1"/>
+          </a:effectRef>
+          <a:fontRef idx="minor">
+            <a:schemeClr val="lt1"/>
+          </a:fontRef>
+        </p:style>
+        <p:txBody>
+          <a:bodyPr rtlCol="0" anchor="ctr"/>
+          <a:lstStyle/>
+          <a:p>
+            <a:pPr algn="ctr"/>
+          </a:p>
+        </p:txBody>
+      </p:sp>
+      <p:sp>
+        <p:nvSpPr>
+          <p:cNvPr id="25" name="Oval 24"/>
+          <p:cNvSpPr/>
+          <p:nvPr/>
+        </p:nvSpPr>
+        <p:spPr>
+          <a:xfrm>
+            <a:off x="3835400" y="2641600"/>
+            <a:ext cx="457200" cy="457200"/>
+          </a:xfrm>
+          <a:prstGeom prst="ellipse">
+            <a:avLst/>
+          </a:prstGeom>
+          <a:solidFill>
+            <a:srgbClr val="0E0E11"/>
+          </a:solidFill>
+          <a:ln w="15875">
+            <a:solidFill>
+              <a:srgbClr val="9A9AA2"/>
+            </a:solidFill>
+          </a:ln>
+          <a:effectLst/>
+        </p:spPr>
+        <p:style>
+          <a:lnRef idx="1">
+            <a:schemeClr val="accent1"/>
+          </a:lnRef>
+          <a:fillRef idx="3">
+            <a:schemeClr val="accent1"/>
+          </a:fillRef>
+          <a:effectRef idx="2">
+            <a:schemeClr val="accent1"/>
+          </a:effectRef>
+          <a:fontRef idx="minor">
+            <a:schemeClr val="lt1"/>
+          </a:fontRef>
+        </p:style>
+        <p:txBody>
+          <a:bodyPr rtlCol="0" anchor="ctr"/>
+          <a:lstStyle/>
+          <a:p>
+            <a:pPr algn="ctr"/>
+          </a:p>
+        </p:txBody>
+      </p:sp>
+      <p:sp>
+        <p:nvSpPr>
+          <p:cNvPr id="26" name="TextBox 25"/>
+          <p:cNvSpPr txBox="1"/>
+          <p:nvPr/>
+        </p:nvSpPr>
+        <p:spPr>
+          <a:xfrm>
+            <a:off x="3810000" y="2774950"/>
+            <a:ext cx="508000" cy="190500"/>
+          </a:xfrm>
+          <a:prstGeom prst="rect">
+            <a:avLst/>
+          </a:prstGeom>
+          <a:noFill/>
+        </p:spPr>
+        <p:txBody>
+          <a:bodyPr wrap="square" lIns="0" rIns="0" tIns="0" bIns="0" anchor="ctr">
+            <a:spAutoFit/>
+          </a:bodyPr>
+          <a:lstStyle/>
+          <a:p>
+            <a:pPr algn="ctr"/>
+            <a:r>
+              <a:rPr sz="1300" b="0" spc="80">
+                <a:solidFill>
+                  <a:srgbClr val="9A9AA2"/>
+                </a:solidFill>
+                <a:latin typeface="Courier New"/>
+              </a:rPr>
+              <a:t>01</a:t>
+            </a:r>
+          </a:p>
+        </p:txBody>
+      </p:sp>
+      <p:sp>
+        <p:nvSpPr>
+          <p:cNvPr id="27" name="Oval 26"/>
+          <p:cNvSpPr/>
+          <p:nvPr/>
+        </p:nvSpPr>
+        <p:spPr>
+          <a:xfrm>
+            <a:off x="4768850" y="3181350"/>
+            <a:ext cx="457200" cy="457200"/>
+          </a:xfrm>
+          <a:prstGeom prst="ellipse">
+            <a:avLst/>
+          </a:prstGeom>
+          <a:solidFill>
+            <a:srgbClr val="0E0E11"/>
+          </a:solidFill>
+          <a:ln w="15875">
+            <a:solidFill>
+              <a:srgbClr val="9A9AA2"/>
+            </a:solidFill>
+          </a:ln>
+          <a:effectLst/>
+        </p:spPr>
+        <p:style>
+          <a:lnRef idx="1">
+            <a:schemeClr val="accent1"/>
+          </a:lnRef>
+          <a:fillRef idx="3">
+            <a:schemeClr val="accent1"/>
+          </a:fillRef>
+          <a:effectRef idx="2">
+            <a:schemeClr val="accent1"/>
+          </a:effectRef>
+          <a:fontRef idx="minor">
+            <a:schemeClr val="lt1"/>
+          </a:fontRef>
+        </p:style>
+        <p:txBody>
+          <a:bodyPr rtlCol="0" anchor="ctr"/>
+          <a:lstStyle/>
+          <a:p>
+            <a:pPr algn="ctr"/>
+          </a:p>
+        </p:txBody>
+      </p:sp>
+      <p:sp>
+        <p:nvSpPr>
+          <p:cNvPr id="28" name="TextBox 27"/>
+          <p:cNvSpPr txBox="1"/>
+          <p:nvPr/>
+        </p:nvSpPr>
+        <p:spPr>
+          <a:xfrm>
+            <a:off x="4743450" y="3314700"/>
+            <a:ext cx="508000" cy="190500"/>
+          </a:xfrm>
+          <a:prstGeom prst="rect">
+            <a:avLst/>
+          </a:prstGeom>
+          <a:noFill/>
+        </p:spPr>
+        <p:txBody>
+          <a:bodyPr wrap="square" lIns="0" rIns="0" tIns="0" bIns="0" anchor="ctr">
+            <a:spAutoFit/>
+          </a:bodyPr>
+          <a:lstStyle/>
+          <a:p>
+            <a:pPr algn="ctr"/>
+            <a:r>
+              <a:rPr sz="1300" b="0" spc="80">
+                <a:solidFill>
+                  <a:srgbClr val="9A9AA2"/>
+                </a:solidFill>
+                <a:latin typeface="Courier New"/>
+              </a:rPr>
+              <a:t>02</a:t>
+            </a:r>
+          </a:p>
+        </p:txBody>
+      </p:sp>
+      <p:sp>
+        <p:nvSpPr>
+          <p:cNvPr id="29" name="Oval 28"/>
+          <p:cNvSpPr/>
+          <p:nvPr/>
+        </p:nvSpPr>
+        <p:spPr>
+          <a:xfrm>
+            <a:off x="4768850" y="4260850"/>
+            <a:ext cx="457200" cy="457200"/>
+          </a:xfrm>
+          <a:prstGeom prst="ellipse">
+            <a:avLst/>
+          </a:prstGeom>
+          <a:solidFill>
+            <a:srgbClr val="0E0E11"/>
+          </a:solidFill>
+          <a:ln w="15875">
+            <a:solidFill>
+              <a:srgbClr val="9A9AA2"/>
+            </a:solidFill>
+          </a:ln>
+          <a:effectLst/>
+        </p:spPr>
+        <p:style>
+          <a:lnRef idx="1">
+            <a:schemeClr val="accent1"/>
+          </a:lnRef>
+          <a:fillRef idx="3">
+            <a:schemeClr val="accent1"/>
+          </a:fillRef>
+          <a:effectRef idx="2">
+            <a:schemeClr val="accent1"/>
+          </a:effectRef>
+          <a:fontRef idx="minor">
+            <a:schemeClr val="lt1"/>
+          </a:fontRef>
+        </p:style>
+        <p:txBody>
+          <a:bodyPr rtlCol="0" anchor="ctr"/>
+          <a:lstStyle/>
+          <a:p>
+            <a:pPr algn="ctr"/>
+          </a:p>
+        </p:txBody>
+      </p:sp>
+      <p:sp>
+        <p:nvSpPr>
+          <p:cNvPr id="30" name="TextBox 29"/>
+          <p:cNvSpPr txBox="1"/>
+          <p:nvPr/>
+        </p:nvSpPr>
+        <p:spPr>
+          <a:xfrm>
+            <a:off x="4743450" y="4394200"/>
+            <a:ext cx="508000" cy="190500"/>
+          </a:xfrm>
+          <a:prstGeom prst="rect">
+            <a:avLst/>
+          </a:prstGeom>
+          <a:noFill/>
+        </p:spPr>
+        <p:txBody>
+          <a:bodyPr wrap="square" lIns="0" rIns="0" tIns="0" bIns="0" anchor="ctr">
+            <a:spAutoFit/>
+          </a:bodyPr>
+          <a:lstStyle/>
+          <a:p>
+            <a:pPr algn="ctr"/>
+            <a:r>
+              <a:rPr sz="1300" b="0" spc="80">
+                <a:solidFill>
+                  <a:srgbClr val="9A9AA2"/>
+                </a:solidFill>
+                <a:latin typeface="Courier New"/>
+              </a:rPr>
+              <a:t>03</a:t>
+            </a:r>
+          </a:p>
+        </p:txBody>
+      </p:sp>
+      <p:sp>
+        <p:nvSpPr>
+          <p:cNvPr id="31" name="Oval 30"/>
+          <p:cNvSpPr/>
+          <p:nvPr/>
+        </p:nvSpPr>
+        <p:spPr>
+          <a:xfrm>
+            <a:off x="3835400" y="4800600"/>
+            <a:ext cx="457200" cy="457200"/>
+          </a:xfrm>
+          <a:prstGeom prst="ellipse">
+            <a:avLst/>
+          </a:prstGeom>
+          <a:solidFill>
+            <a:srgbClr val="0E0E11"/>
+          </a:solidFill>
+          <a:ln w="15875">
+            <a:solidFill>
+              <a:srgbClr val="9A9AA2"/>
+            </a:solidFill>
+          </a:ln>
+          <a:effectLst/>
+        </p:spPr>
+        <p:style>
+          <a:lnRef idx="1">
+            <a:schemeClr val="accent1"/>
+          </a:lnRef>
+          <a:fillRef idx="3">
+            <a:schemeClr val="accent1"/>
+          </a:fillRef>
+          <a:effectRef idx="2">
+            <a:schemeClr val="accent1"/>
+          </a:effectRef>
+          <a:fontRef idx="minor">
+            <a:schemeClr val="lt1"/>
+          </a:fontRef>
+        </p:style>
+        <p:txBody>
+          <a:bodyPr rtlCol="0" anchor="ctr"/>
+          <a:lstStyle/>
+          <a:p>
+            <a:pPr algn="ctr"/>
+          </a:p>
+        </p:txBody>
+      </p:sp>
+      <p:sp>
+        <p:nvSpPr>
+          <p:cNvPr id="32" name="TextBox 31"/>
+          <p:cNvSpPr txBox="1"/>
+          <p:nvPr/>
+        </p:nvSpPr>
+        <p:spPr>
+          <a:xfrm>
+            <a:off x="3810000" y="4933950"/>
+            <a:ext cx="508000" cy="190500"/>
+          </a:xfrm>
+          <a:prstGeom prst="rect">
+            <a:avLst/>
+          </a:prstGeom>
+          <a:noFill/>
+        </p:spPr>
+        <p:txBody>
+          <a:bodyPr wrap="square" lIns="0" rIns="0" tIns="0" bIns="0" anchor="ctr">
+            <a:spAutoFit/>
+          </a:bodyPr>
+          <a:lstStyle/>
+          <a:p>
+            <a:pPr algn="ctr"/>
+            <a:r>
+              <a:rPr sz="1300" b="0" spc="80">
+                <a:solidFill>
+                  <a:srgbClr val="9A9AA2"/>
+                </a:solidFill>
+                <a:latin typeface="Courier New"/>
+              </a:rPr>
+              <a:t>04</a:t>
+            </a:r>
+          </a:p>
+        </p:txBody>
+      </p:sp>
+      <p:sp>
+        <p:nvSpPr>
+          <p:cNvPr id="33" name="Oval 32"/>
+          <p:cNvSpPr/>
+          <p:nvPr/>
+        </p:nvSpPr>
+        <p:spPr>
+          <a:xfrm>
+            <a:off x="2895600" y="4260850"/>
+            <a:ext cx="457200" cy="457200"/>
+          </a:xfrm>
+          <a:prstGeom prst="ellipse">
+            <a:avLst/>
+          </a:prstGeom>
+          <a:solidFill>
+            <a:srgbClr val="0E0E11"/>
+          </a:solidFill>
+          <a:ln w="15875">
+            <a:solidFill>
+              <a:srgbClr val="9A9AA2"/>
+            </a:solidFill>
+          </a:ln>
+          <a:effectLst/>
+        </p:spPr>
+        <p:style>
+          <a:lnRef idx="1">
+            <a:schemeClr val="accent1"/>
+          </a:lnRef>
+          <a:fillRef idx="3">
+            <a:schemeClr val="accent1"/>
+          </a:fillRef>
+          <a:effectRef idx="2">
+            <a:schemeClr val="accent1"/>
+          </a:effectRef>
+          <a:fontRef idx="minor">
+            <a:schemeClr val="lt1"/>
+          </a:fontRef>
+        </p:style>
+        <p:txBody>
+          <a:bodyPr rtlCol="0" anchor="ctr"/>
+          <a:lstStyle/>
+          <a:p>
+            <a:pPr algn="ctr"/>
+          </a:p>
+        </p:txBody>
+      </p:sp>
+      <p:sp>
+        <p:nvSpPr>
+          <p:cNvPr id="34" name="TextBox 33"/>
+          <p:cNvSpPr txBox="1"/>
+          <p:nvPr/>
+        </p:nvSpPr>
+        <p:spPr>
+          <a:xfrm>
+            <a:off x="2870200" y="4394200"/>
+            <a:ext cx="508000" cy="190500"/>
+          </a:xfrm>
+          <a:prstGeom prst="rect">
+            <a:avLst/>
+          </a:prstGeom>
+          <a:noFill/>
+        </p:spPr>
+        <p:txBody>
+          <a:bodyPr wrap="square" lIns="0" rIns="0" tIns="0" bIns="0" anchor="ctr">
+            <a:spAutoFit/>
+          </a:bodyPr>
+          <a:lstStyle/>
+          <a:p>
+            <a:pPr algn="ctr"/>
+            <a:r>
+              <a:rPr sz="1300" b="0" spc="80">
+                <a:solidFill>
+                  <a:srgbClr val="9A9AA2"/>
+                </a:solidFill>
+                <a:latin typeface="Courier New"/>
+              </a:rPr>
+              <a:t>05</a:t>
+            </a:r>
+          </a:p>
+        </p:txBody>
+      </p:sp>
+      <p:sp>
+        <p:nvSpPr>
+          <p:cNvPr id="35" name="Oval 34"/>
+          <p:cNvSpPr/>
+          <p:nvPr/>
+        </p:nvSpPr>
+        <p:spPr>
+          <a:xfrm>
+            <a:off x="2895600" y="3181350"/>
+            <a:ext cx="457200" cy="457200"/>
+          </a:xfrm>
+          <a:prstGeom prst="ellipse">
+            <a:avLst/>
+          </a:prstGeom>
+          <a:solidFill>
+            <a:srgbClr val="0E0E11"/>
+          </a:solidFill>
+          <a:ln w="15875">
+            <a:solidFill>
+              <a:srgbClr val="9A9AA2"/>
+            </a:solidFill>
+          </a:ln>
+          <a:effectLst/>
+        </p:spPr>
+        <p:style>
+          <a:lnRef idx="1">
+            <a:schemeClr val="accent1"/>
+          </a:lnRef>
+          <a:fillRef idx="3">
+            <a:schemeClr val="accent1"/>
+          </a:fillRef>
+          <a:effectRef idx="2">
+            <a:schemeClr val="accent1"/>
+          </a:effectRef>
+          <a:fontRef idx="minor">
+            <a:schemeClr val="lt1"/>
+          </a:fontRef>
+        </p:style>
+        <p:txBody>
+          <a:bodyPr rtlCol="0" anchor="ctr"/>
+          <a:lstStyle/>
+          <a:p>
+            <a:pPr algn="ctr"/>
+          </a:p>
+        </p:txBody>
+      </p:sp>
+      <p:sp>
+        <p:nvSpPr>
+          <p:cNvPr id="36" name="TextBox 35"/>
+          <p:cNvSpPr txBox="1"/>
+          <p:nvPr/>
+        </p:nvSpPr>
+        <p:spPr>
+          <a:xfrm>
+            <a:off x="2870200" y="3314700"/>
+            <a:ext cx="508000" cy="190500"/>
+          </a:xfrm>
+          <a:prstGeom prst="rect">
+            <a:avLst/>
+          </a:prstGeom>
+          <a:noFill/>
+        </p:spPr>
+        <p:txBody>
+          <a:bodyPr wrap="square" lIns="0" rIns="0" tIns="0" bIns="0" anchor="ctr">
+            <a:spAutoFit/>
+          </a:bodyPr>
+          <a:lstStyle/>
+          <a:p>
+            <a:pPr algn="ctr"/>
+            <a:r>
+              <a:rPr sz="1300" b="0" spc="80">
+                <a:solidFill>
+                  <a:srgbClr val="9A9AA2"/>
+                </a:solidFill>
+                <a:latin typeface="Courier New"/>
+              </a:rPr>
+              <a:t>06</a:t>
+            </a:r>
+          </a:p>
+        </p:txBody>
+      </p:sp>
+      <p:sp>
+        <p:nvSpPr>
+          <p:cNvPr id="37" name="TextBox 36"/>
+          <p:cNvSpPr txBox="1"/>
+          <p:nvPr/>
+        </p:nvSpPr>
+        <p:spPr>
+          <a:xfrm>
+            <a:off x="2984500" y="2349500"/>
+            <a:ext cx="2159000" cy="203200"/>
+          </a:xfrm>
+          <a:prstGeom prst="rect">
+            <a:avLst/>
+          </a:prstGeom>
+          <a:noFill/>
+        </p:spPr>
+        <p:txBody>
+          <a:bodyPr wrap="square" lIns="0" rIns="0" tIns="0" bIns="0" anchor="ctr">
+            <a:spAutoFit/>
+          </a:bodyPr>
+          <a:lstStyle/>
+          <a:p>
+            <a:pPr algn="ctr"/>
+            <a:r>
+              <a:rPr sz="1700" b="0">
+                <a:solidFill>
+                  <a:srgbClr val="ECECEE"/>
+                </a:solidFill>
+                <a:latin typeface="Poppins"/>
+              </a:rPr>
+              <a:t>Planning</a:t>
+            </a:r>
+          </a:p>
+        </p:txBody>
+      </p:sp>
+      <p:sp>
+        <p:nvSpPr>
+          <p:cNvPr id="38" name="TextBox 37"/>
+          <p:cNvSpPr txBox="1"/>
+          <p:nvPr/>
+        </p:nvSpPr>
+        <p:spPr>
+          <a:xfrm>
+            <a:off x="5340350" y="3308350"/>
+            <a:ext cx="1905000" cy="203200"/>
+          </a:xfrm>
+          <a:prstGeom prst="rect">
+            <a:avLst/>
+          </a:prstGeom>
+          <a:noFill/>
+        </p:spPr>
+        <p:txBody>
+          <a:bodyPr wrap="square" lIns="0" rIns="0" tIns="0" bIns="0" anchor="ctr">
+            <a:spAutoFit/>
+          </a:bodyPr>
+          <a:lstStyle/>
+          <a:p>
+            <a:pPr algn="l"/>
+            <a:r>
+              <a:rPr sz="1700" b="0">
+                <a:solidFill>
+                  <a:srgbClr val="ECECEE"/>
+                </a:solidFill>
+                <a:latin typeface="Poppins"/>
+              </a:rPr>
+              <a:t>Analysis</a:t>
+            </a:r>
+          </a:p>
+        </p:txBody>
+      </p:sp>
+      <p:sp>
+        <p:nvSpPr>
+          <p:cNvPr id="39" name="TextBox 38"/>
+          <p:cNvSpPr txBox="1"/>
+          <p:nvPr/>
+        </p:nvSpPr>
+        <p:spPr>
+          <a:xfrm>
+            <a:off x="5340350" y="4387850"/>
+            <a:ext cx="1905000" cy="203200"/>
+          </a:xfrm>
+          <a:prstGeom prst="rect">
+            <a:avLst/>
+          </a:prstGeom>
+          <a:noFill/>
+        </p:spPr>
+        <p:txBody>
+          <a:bodyPr wrap="square" lIns="0" rIns="0" tIns="0" bIns="0" anchor="ctr">
+            <a:spAutoFit/>
+          </a:bodyPr>
+          <a:lstStyle/>
+          <a:p>
+            <a:pPr algn="l"/>
+            <a:r>
+              <a:rPr sz="1700" b="0">
+                <a:solidFill>
+                  <a:srgbClr val="ECECEE"/>
+                </a:solidFill>
+                <a:latin typeface="Poppins"/>
+              </a:rPr>
+              <a:t>Design</a:t>
+            </a:r>
+          </a:p>
+        </p:txBody>
+      </p:sp>
+      <p:sp>
+        <p:nvSpPr>
+          <p:cNvPr id="40" name="TextBox 39"/>
+          <p:cNvSpPr txBox="1"/>
+          <p:nvPr/>
+        </p:nvSpPr>
+        <p:spPr>
+          <a:xfrm>
+            <a:off x="2984500" y="5359400"/>
+            <a:ext cx="2159000" cy="203200"/>
+          </a:xfrm>
+          <a:prstGeom prst="rect">
+            <a:avLst/>
+          </a:prstGeom>
+          <a:noFill/>
+        </p:spPr>
+        <p:txBody>
+          <a:bodyPr wrap="square" lIns="0" rIns="0" tIns="0" bIns="0" anchor="ctr">
+            <a:spAutoFit/>
+          </a:bodyPr>
+          <a:lstStyle/>
+          <a:p>
+            <a:pPr algn="ctr"/>
+            <a:r>
+              <a:rPr sz="1700" b="0">
+                <a:solidFill>
+                  <a:srgbClr val="ECECEE"/>
+                </a:solidFill>
+                <a:latin typeface="Poppins"/>
+              </a:rPr>
+              <a:t>Implementation</a:t>
+            </a:r>
+          </a:p>
+        </p:txBody>
+      </p:sp>
+      <p:sp>
+        <p:nvSpPr>
+          <p:cNvPr id="41" name="TextBox 40"/>
+          <p:cNvSpPr txBox="1"/>
+          <p:nvPr/>
+        </p:nvSpPr>
+        <p:spPr>
+          <a:xfrm>
+            <a:off x="876300" y="4387850"/>
+            <a:ext cx="1905000" cy="203200"/>
+          </a:xfrm>
+          <a:prstGeom prst="rect">
+            <a:avLst/>
+          </a:prstGeom>
+          <a:noFill/>
+        </p:spPr>
+        <p:txBody>
+          <a:bodyPr wrap="square" lIns="0" rIns="0" tIns="0" bIns="0" anchor="ctr">
+            <a:spAutoFit/>
+          </a:bodyPr>
+          <a:lstStyle/>
+          <a:p>
+            <a:pPr algn="r"/>
+            <a:r>
+              <a:rPr sz="1700" b="0">
+                <a:solidFill>
+                  <a:srgbClr val="ECECEE"/>
+                </a:solidFill>
+                <a:latin typeface="Poppins"/>
+              </a:rPr>
+              <a:t>Testing</a:t>
+            </a:r>
+          </a:p>
+        </p:txBody>
+      </p:sp>
+      <p:sp>
+        <p:nvSpPr>
+          <p:cNvPr id="42" name="TextBox 41"/>
+          <p:cNvSpPr txBox="1"/>
+          <p:nvPr/>
+        </p:nvSpPr>
+        <p:spPr>
+          <a:xfrm>
+            <a:off x="876300" y="3308350"/>
+            <a:ext cx="1905000" cy="203200"/>
+          </a:xfrm>
+          <a:prstGeom prst="rect">
+            <a:avLst/>
+          </a:prstGeom>
+          <a:noFill/>
+        </p:spPr>
+        <p:txBody>
+          <a:bodyPr wrap="square" lIns="0" rIns="0" tIns="0" bIns="0" anchor="ctr">
+            <a:spAutoFit/>
+          </a:bodyPr>
+          <a:lstStyle/>
+          <a:p>
+            <a:pPr algn="r"/>
+            <a:r>
+              <a:rPr sz="1700" b="0">
+                <a:solidFill>
+                  <a:srgbClr val="ECECEE"/>
+                </a:solidFill>
+                <a:latin typeface="Poppins"/>
+              </a:rPr>
+              <a:t>Maintenance</a:t>
+            </a:r>
+          </a:p>
+        </p:txBody>
+      </p:sp>
+      <p:sp>
+        <p:nvSpPr>
+          <p:cNvPr id="43" name="TextBox 42"/>
+          <p:cNvSpPr txBox="1"/>
+          <p:nvPr/>
+        </p:nvSpPr>
+        <p:spPr>
+          <a:xfrm>
+            <a:off x="3048000" y="3784600"/>
+            <a:ext cx="2032000" cy="152400"/>
+          </a:xfrm>
+          <a:prstGeom prst="rect">
+            <a:avLst/>
+          </a:prstGeom>
+          <a:noFill/>
+        </p:spPr>
+        <p:txBody>
+          <a:bodyPr wrap="square" lIns="0" rIns="0" tIns="0" bIns="0" anchor="ctr">
+            <a:spAutoFit/>
+          </a:bodyPr>
+          <a:lstStyle/>
+          <a:p>
+            <a:pPr algn="ctr"/>
+            <a:r>
+              <a:rPr sz="1000" b="0" spc="300">
+                <a:solidFill>
+                  <a:srgbClr val="9A9AA2"/>
+                </a:solidFill>
+                <a:latin typeface="Courier New"/>
+              </a:rPr>
+              <a:t>ALL SIX PHASES</a:t>
+            </a:r>
+          </a:p>
+        </p:txBody>
+      </p:sp>
+      <p:sp>
+        <p:nvSpPr>
+          <p:cNvPr id="44" name="TextBox 43"/>
+          <p:cNvSpPr txBox="1"/>
+          <p:nvPr/>
+        </p:nvSpPr>
+        <p:spPr>
+          <a:xfrm>
+            <a:off x="3048000" y="3962400"/>
+            <a:ext cx="2032000" cy="215900"/>
+          </a:xfrm>
+          <a:prstGeom prst="rect">
+            <a:avLst/>
+          </a:prstGeom>
+          <a:noFill/>
+        </p:spPr>
+        <p:txBody>
+          <a:bodyPr wrap="square" lIns="0" rIns="0" tIns="0" bIns="0" anchor="ctr">
+            <a:spAutoFit/>
+          </a:bodyPr>
+          <a:lstStyle/>
+          <a:p>
+            <a:pPr algn="ctr"/>
+            <a:r>
+              <a:rPr sz="1900" b="0">
+                <a:solidFill>
+                  <a:srgbClr val="ECECEE"/>
+                </a:solidFill>
+                <a:latin typeface="Poppins"/>
+              </a:rPr>
+              <a:t>agent-run</a:t>
+            </a:r>
+          </a:p>
+        </p:txBody>
+      </p:sp>
+      <p:sp>
+        <p:nvSpPr>
+          <p:cNvPr id="45" name="Diamond 44"/>
+          <p:cNvSpPr/>
+          <p:nvPr/>
+        </p:nvSpPr>
+        <p:spPr>
+          <a:xfrm>
+            <a:off x="2508250" y="5924550"/>
+            <a:ext cx="88900" cy="88900"/>
+          </a:xfrm>
+          <a:prstGeom prst="diamond">
+            <a:avLst/>
+          </a:prstGeom>
+          <a:solidFill>
+            <a:srgbClr val="FF6B3D"/>
+          </a:solidFill>
+          <a:ln>
+            <a:noFill/>
+          </a:ln>
+          <a:effectLst/>
+        </p:spPr>
+        <p:style>
+          <a:lnRef idx="1">
+            <a:schemeClr val="accent1"/>
+          </a:lnRef>
+          <a:fillRef idx="3">
+            <a:schemeClr val="accent1"/>
+          </a:fillRef>
+          <a:effectRef idx="2">
+            <a:schemeClr val="accent1"/>
+          </a:effectRef>
+          <a:fontRef idx="minor">
+            <a:schemeClr val="lt1"/>
+          </a:fontRef>
+        </p:style>
+        <p:txBody>
+          <a:bodyPr rtlCol="0" anchor="ctr"/>
+          <a:lstStyle/>
+          <a:p>
+            <a:pPr algn="ctr"/>
+          </a:p>
+        </p:txBody>
+      </p:sp>
+      <p:sp>
+        <p:nvSpPr>
+          <p:cNvPr id="46" name="TextBox 45"/>
+          <p:cNvSpPr txBox="1"/>
+          <p:nvPr/>
+        </p:nvSpPr>
+        <p:spPr>
+          <a:xfrm>
+            <a:off x="2679700" y="5892800"/>
+            <a:ext cx="3810000" cy="165100"/>
+          </a:xfrm>
+          <a:prstGeom prst="rect">
+            <a:avLst/>
+          </a:prstGeom>
+          <a:noFill/>
+        </p:spPr>
+        <p:txBody>
+          <a:bodyPr wrap="square" lIns="0" rIns="0" tIns="0" bIns="0" anchor="ctr">
+            <a:spAutoFit/>
+          </a:bodyPr>
+          <a:lstStyle/>
+          <a:p>
+            <a:pPr algn="l"/>
+            <a:r>
+              <a:rPr sz="1100" b="0" spc="150">
+                <a:solidFill>
+                  <a:srgbClr val="9A9AA2"/>
+                </a:solidFill>
+                <a:latin typeface="Courier New"/>
+              </a:rPr>
+              <a:t>human gate at every handover</a:t>
+            </a:r>
+          </a:p>
+        </p:txBody>
+      </p:sp>
+      <p:sp>
+        <p:nvSpPr>
+          <p:cNvPr id="47" name="Rectangle 46"/>
+          <p:cNvSpPr/>
+          <p:nvPr/>
+        </p:nvSpPr>
+        <p:spPr>
+          <a:xfrm>
+            <a:off x="6934200" y="2095500"/>
+            <a:ext cx="6350" cy="3619500"/>
+          </a:xfrm>
+          <a:prstGeom prst="rect">
+            <a:avLst/>
+          </a:prstGeom>
+          <a:solidFill>
+            <a:srgbClr val="1F1F22"/>
+          </a:solidFill>
+          <a:ln>
+            <a:noFill/>
+          </a:ln>
+          <a:effectLst/>
+        </p:spPr>
+        <p:style>
+          <a:lnRef idx="1">
+            <a:schemeClr val="accent1"/>
+          </a:lnRef>
+          <a:fillRef idx="3">
+            <a:schemeClr val="accent1"/>
+          </a:fillRef>
+          <a:effectRef idx="2">
+            <a:schemeClr val="accent1"/>
+          </a:effectRef>
+          <a:fontRef idx="minor">
+            <a:schemeClr val="lt1"/>
+          </a:fontRef>
+        </p:style>
+        <p:txBody>
+          <a:bodyPr rtlCol="0" anchor="ctr"/>
+          <a:lstStyle/>
+          <a:p>
+            <a:pPr algn="ctr"/>
+          </a:p>
+        </p:txBody>
+      </p:sp>
+      <p:sp>
+        <p:nvSpPr>
+          <p:cNvPr id="48" name="TextBox 47"/>
+          <p:cNvSpPr txBox="1"/>
+          <p:nvPr/>
+        </p:nvSpPr>
+        <p:spPr>
+          <a:xfrm>
+            <a:off x="7239000" y="2159000"/>
+            <a:ext cx="4445000" cy="165100"/>
+          </a:xfrm>
+          <a:prstGeom prst="rect">
+            <a:avLst/>
+          </a:prstGeom>
+          <a:noFill/>
+        </p:spPr>
+        <p:txBody>
+          <a:bodyPr wrap="square" lIns="0" rIns="0" tIns="0" bIns="0" anchor="ctr">
+            <a:spAutoFit/>
+          </a:bodyPr>
+          <a:lstStyle/>
+          <a:p>
+            <a:pPr algn="l"/>
+            <a:r>
+              <a:rPr sz="1100" b="0" spc="250">
+                <a:solidFill>
+                  <a:srgbClr val="9A9AA2"/>
+                </a:solidFill>
+                <a:latin typeface="Courier New"/>
+              </a:rPr>
+              <a:t>SDLC PHASE  ·  CHAIN STAGE</a:t>
+            </a:r>
+          </a:p>
+        </p:txBody>
+      </p:sp>
+      <p:sp>
+        <p:nvSpPr>
+          <p:cNvPr id="49" name="TextBox 48"/>
+          <p:cNvSpPr txBox="1"/>
+          <p:nvPr/>
+        </p:nvSpPr>
+        <p:spPr>
+          <a:xfrm>
+            <a:off x="7239000" y="2527300"/>
+            <a:ext cx="4248150" cy="190500"/>
+          </a:xfrm>
+          <a:prstGeom prst="rect">
+            <a:avLst/>
+          </a:prstGeom>
+          <a:noFill/>
+        </p:spPr>
+        <p:txBody>
+          <a:bodyPr wrap="square" lIns="0" rIns="0" tIns="0" bIns="0" anchor="ctr">
+            <a:spAutoFit/>
+          </a:bodyPr>
+          <a:lstStyle/>
+          <a:p>
+            <a:pPr algn="l"/>
+            <a:r>
+              <a:rPr sz="1600" b="0">
+                <a:solidFill>
+                  <a:srgbClr val="ECECEE"/>
+                </a:solidFill>
+                <a:latin typeface="Poppins"/>
+              </a:rPr>
+              <a:t>Planning</a:t>
+            </a:r>
+          </a:p>
+        </p:txBody>
+      </p:sp>
+      <p:sp>
+        <p:nvSpPr>
+          <p:cNvPr id="50" name="TextBox 49"/>
+          <p:cNvSpPr txBox="1"/>
+          <p:nvPr/>
+        </p:nvSpPr>
+        <p:spPr>
+          <a:xfrm>
+            <a:off x="7239000" y="2730500"/>
+            <a:ext cx="4248150" cy="165100"/>
+          </a:xfrm>
+          <a:prstGeom prst="rect">
+            <a:avLst/>
+          </a:prstGeom>
+          <a:noFill/>
+        </p:spPr>
+        <p:txBody>
+          <a:bodyPr wrap="square" lIns="0" rIns="0" tIns="0" bIns="0" anchor="ctr">
+            <a:spAutoFit/>
+          </a:bodyPr>
+          <a:lstStyle/>
+          <a:p>
+            <a:pPr algn="l"/>
+            <a:r>
+              <a:rPr sz="1100" b="0" spc="80">
+                <a:solidFill>
+                  <a:srgbClr val="9A9AA2"/>
+                </a:solidFill>
+                <a:latin typeface="Courier New"/>
+              </a:rPr>
+              <a:t>01 Discover  ·  02 Analyze</a:t>
+            </a:r>
+          </a:p>
+        </p:txBody>
+      </p:sp>
+      <p:sp>
+        <p:nvSpPr>
+          <p:cNvPr id="51" name="TextBox 50"/>
+          <p:cNvSpPr txBox="1"/>
+          <p:nvPr/>
+        </p:nvSpPr>
+        <p:spPr>
+          <a:xfrm>
+            <a:off x="7239000" y="3060700"/>
+            <a:ext cx="4248150" cy="190500"/>
+          </a:xfrm>
+          <a:prstGeom prst="rect">
+            <a:avLst/>
+          </a:prstGeom>
+          <a:noFill/>
+        </p:spPr>
+        <p:txBody>
+          <a:bodyPr wrap="square" lIns="0" rIns="0" tIns="0" bIns="0" anchor="ctr">
+            <a:spAutoFit/>
+          </a:bodyPr>
+          <a:lstStyle/>
+          <a:p>
+            <a:pPr algn="l"/>
+            <a:r>
+              <a:rPr sz="1600" b="0">
+                <a:solidFill>
+                  <a:srgbClr val="ECECEE"/>
+                </a:solidFill>
+                <a:latin typeface="Poppins"/>
+              </a:rPr>
+              <a:t>Analysis</a:t>
+            </a:r>
+          </a:p>
+        </p:txBody>
+      </p:sp>
+      <p:sp>
+        <p:nvSpPr>
+          <p:cNvPr id="52" name="TextBox 51"/>
+          <p:cNvSpPr txBox="1"/>
+          <p:nvPr/>
+        </p:nvSpPr>
+        <p:spPr>
+          <a:xfrm>
+            <a:off x="7239000" y="3263900"/>
+            <a:ext cx="4248150" cy="165100"/>
+          </a:xfrm>
+          <a:prstGeom prst="rect">
+            <a:avLst/>
+          </a:prstGeom>
+          <a:noFill/>
+        </p:spPr>
+        <p:txBody>
+          <a:bodyPr wrap="square" lIns="0" rIns="0" tIns="0" bIns="0" anchor="ctr">
+            <a:spAutoFit/>
+          </a:bodyPr>
+          <a:lstStyle/>
+          <a:p>
+            <a:pPr algn="l"/>
+            <a:r>
+              <a:rPr sz="1100" b="0" spc="80">
+                <a:solidFill>
+                  <a:srgbClr val="9A9AA2"/>
+                </a:solidFill>
+                <a:latin typeface="Courier New"/>
+              </a:rPr>
+              <a:t>03 Research</a:t>
+            </a:r>
+          </a:p>
+        </p:txBody>
+      </p:sp>
+      <p:sp>
+        <p:nvSpPr>
+          <p:cNvPr id="53" name="TextBox 52"/>
+          <p:cNvSpPr txBox="1"/>
+          <p:nvPr/>
+        </p:nvSpPr>
+        <p:spPr>
+          <a:xfrm>
+            <a:off x="7239000" y="3594100"/>
+            <a:ext cx="4248150" cy="190500"/>
+          </a:xfrm>
+          <a:prstGeom prst="rect">
+            <a:avLst/>
+          </a:prstGeom>
+          <a:noFill/>
+        </p:spPr>
+        <p:txBody>
+          <a:bodyPr wrap="square" lIns="0" rIns="0" tIns="0" bIns="0" anchor="ctr">
+            <a:spAutoFit/>
+          </a:bodyPr>
+          <a:lstStyle/>
+          <a:p>
+            <a:pPr algn="l"/>
+            <a:r>
+              <a:rPr sz="1600" b="0">
+                <a:solidFill>
+                  <a:srgbClr val="ECECEE"/>
+                </a:solidFill>
+                <a:latin typeface="Poppins"/>
+              </a:rPr>
+              <a:t>Design</a:t>
+            </a:r>
+          </a:p>
+        </p:txBody>
+      </p:sp>
+      <p:sp>
+        <p:nvSpPr>
+          <p:cNvPr id="54" name="TextBox 53"/>
+          <p:cNvSpPr txBox="1"/>
+          <p:nvPr/>
+        </p:nvSpPr>
+        <p:spPr>
+          <a:xfrm>
+            <a:off x="7239000" y="3797300"/>
+            <a:ext cx="4248150" cy="165100"/>
+          </a:xfrm>
+          <a:prstGeom prst="rect">
+            <a:avLst/>
+          </a:prstGeom>
+          <a:noFill/>
+        </p:spPr>
+        <p:txBody>
+          <a:bodyPr wrap="square" lIns="0" rIns="0" tIns="0" bIns="0" anchor="ctr">
+            <a:spAutoFit/>
+          </a:bodyPr>
+          <a:lstStyle/>
+          <a:p>
+            <a:pPr algn="l"/>
+            <a:r>
+              <a:rPr sz="1100" b="0" spc="80">
+                <a:solidFill>
+                  <a:srgbClr val="9A9AA2"/>
+                </a:solidFill>
+                <a:latin typeface="Courier New"/>
+              </a:rPr>
+              <a:t>04 Compliance  ·  05 AI Memory</a:t>
+            </a:r>
+          </a:p>
+        </p:txBody>
+      </p:sp>
+      <p:sp>
+        <p:nvSpPr>
+          <p:cNvPr id="55" name="TextBox 54"/>
+          <p:cNvSpPr txBox="1"/>
+          <p:nvPr/>
+        </p:nvSpPr>
+        <p:spPr>
+          <a:xfrm>
+            <a:off x="7239000" y="4127500"/>
+            <a:ext cx="4248150" cy="190500"/>
+          </a:xfrm>
+          <a:prstGeom prst="rect">
+            <a:avLst/>
+          </a:prstGeom>
+          <a:noFill/>
+        </p:spPr>
+        <p:txBody>
+          <a:bodyPr wrap="square" lIns="0" rIns="0" tIns="0" bIns="0" anchor="ctr">
+            <a:spAutoFit/>
+          </a:bodyPr>
+          <a:lstStyle/>
+          <a:p>
+            <a:pPr algn="l"/>
+            <a:r>
+              <a:rPr sz="1600" b="0">
+                <a:solidFill>
+                  <a:srgbClr val="ECECEE"/>
+                </a:solidFill>
+                <a:latin typeface="Poppins"/>
+              </a:rPr>
+              <a:t>Implementation</a:t>
+            </a:r>
+          </a:p>
+        </p:txBody>
+      </p:sp>
+      <p:sp>
+        <p:nvSpPr>
+          <p:cNvPr id="56" name="TextBox 55"/>
+          <p:cNvSpPr txBox="1"/>
+          <p:nvPr/>
+        </p:nvSpPr>
+        <p:spPr>
+          <a:xfrm>
+            <a:off x="7239000" y="4330700"/>
+            <a:ext cx="4248150" cy="165100"/>
+          </a:xfrm>
+          <a:prstGeom prst="rect">
+            <a:avLst/>
+          </a:prstGeom>
+          <a:noFill/>
+        </p:spPr>
+        <p:txBody>
+          <a:bodyPr wrap="square" lIns="0" rIns="0" tIns="0" bIns="0" anchor="ctr">
+            <a:spAutoFit/>
+          </a:bodyPr>
+          <a:lstStyle/>
+          <a:p>
+            <a:pPr algn="l"/>
+            <a:r>
+              <a:rPr sz="1100" b="0" spc="80">
+                <a:solidFill>
+                  <a:srgbClr val="9A9AA2"/>
+                </a:solidFill>
+                <a:latin typeface="Courier New"/>
+              </a:rPr>
+              <a:t>06 Build</a:t>
+            </a:r>
+          </a:p>
+        </p:txBody>
+      </p:sp>
+      <p:sp>
+        <p:nvSpPr>
+          <p:cNvPr id="57" name="TextBox 56"/>
+          <p:cNvSpPr txBox="1"/>
+          <p:nvPr/>
+        </p:nvSpPr>
+        <p:spPr>
+          <a:xfrm>
+            <a:off x="7239000" y="4660900"/>
+            <a:ext cx="4248150" cy="190500"/>
+          </a:xfrm>
+          <a:prstGeom prst="rect">
+            <a:avLst/>
+          </a:prstGeom>
+          <a:noFill/>
+        </p:spPr>
+        <p:txBody>
+          <a:bodyPr wrap="square" lIns="0" rIns="0" tIns="0" bIns="0" anchor="ctr">
+            <a:spAutoFit/>
+          </a:bodyPr>
+          <a:lstStyle/>
+          <a:p>
+            <a:pPr algn="l"/>
+            <a:r>
+              <a:rPr sz="1600" b="0">
+                <a:solidFill>
+                  <a:srgbClr val="ECECEE"/>
+                </a:solidFill>
+                <a:latin typeface="Poppins"/>
+              </a:rPr>
+              <a:t>Testing</a:t>
+            </a:r>
+          </a:p>
+        </p:txBody>
+      </p:sp>
+      <p:sp>
+        <p:nvSpPr>
+          <p:cNvPr id="58" name="TextBox 57"/>
+          <p:cNvSpPr txBox="1"/>
+          <p:nvPr/>
+        </p:nvSpPr>
+        <p:spPr>
+          <a:xfrm>
+            <a:off x="7239000" y="4864100"/>
+            <a:ext cx="4248150" cy="165100"/>
+          </a:xfrm>
+          <a:prstGeom prst="rect">
+            <a:avLst/>
+          </a:prstGeom>
+          <a:noFill/>
+        </p:spPr>
+        <p:txBody>
+          <a:bodyPr wrap="square" lIns="0" rIns="0" tIns="0" bIns="0" anchor="ctr">
+            <a:spAutoFit/>
+          </a:bodyPr>
+          <a:lstStyle/>
+          <a:p>
+            <a:pPr algn="l"/>
+            <a:r>
+              <a:rPr sz="1100" b="0" spc="80">
+                <a:solidFill>
+                  <a:srgbClr val="9A9AA2"/>
+                </a:solidFill>
+                <a:latin typeface="Courier New"/>
+              </a:rPr>
+              <a:t>07 Release</a:t>
+            </a:r>
+          </a:p>
+        </p:txBody>
+      </p:sp>
+      <p:sp>
+        <p:nvSpPr>
+          <p:cNvPr id="59" name="TextBox 58"/>
+          <p:cNvSpPr txBox="1"/>
+          <p:nvPr/>
+        </p:nvSpPr>
+        <p:spPr>
+          <a:xfrm>
+            <a:off x="7239000" y="5194300"/>
+            <a:ext cx="4248150" cy="190500"/>
+          </a:xfrm>
+          <a:prstGeom prst="rect">
+            <a:avLst/>
+          </a:prstGeom>
+          <a:noFill/>
+        </p:spPr>
+        <p:txBody>
+          <a:bodyPr wrap="square" lIns="0" rIns="0" tIns="0" bIns="0" anchor="ctr">
+            <a:spAutoFit/>
+          </a:bodyPr>
+          <a:lstStyle/>
+          <a:p>
+            <a:pPr algn="l"/>
+            <a:r>
+              <a:rPr sz="1600" b="0">
+                <a:solidFill>
+                  <a:srgbClr val="ECECEE"/>
+                </a:solidFill>
+                <a:latin typeface="Poppins"/>
+              </a:rPr>
+              <a:t>Maintenance</a:t>
+            </a:r>
+          </a:p>
+        </p:txBody>
+      </p:sp>
+      <p:sp>
+        <p:nvSpPr>
+          <p:cNvPr id="60" name="TextBox 59"/>
+          <p:cNvSpPr txBox="1"/>
+          <p:nvPr/>
+        </p:nvSpPr>
+        <p:spPr>
+          <a:xfrm>
+            <a:off x="7239000" y="5397500"/>
+            <a:ext cx="4248150" cy="165100"/>
+          </a:xfrm>
+          <a:prstGeom prst="rect">
+            <a:avLst/>
+          </a:prstGeom>
+          <a:noFill/>
+        </p:spPr>
+        <p:txBody>
+          <a:bodyPr wrap="square" lIns="0" rIns="0" tIns="0" bIns="0" anchor="ctr">
+            <a:spAutoFit/>
+          </a:bodyPr>
+          <a:lstStyle/>
+          <a:p>
+            <a:pPr algn="l"/>
+            <a:r>
+              <a:rPr sz="1100" b="0" spc="80">
+                <a:solidFill>
+                  <a:srgbClr val="9A9AA2"/>
+                </a:solidFill>
+                <a:latin typeface="Courier New"/>
+              </a:rPr>
+              <a:t>08 Operate</a:t>
+            </a:r>
+          </a:p>
+        </p:txBody>
+      </p:sp>
+      <p:sp>
+        <p:nvSpPr>
+          <p:cNvPr id="61" name="TextBox 60"/>
+          <p:cNvSpPr txBox="1"/>
+          <p:nvPr/>
+        </p:nvSpPr>
+        <p:spPr>
+          <a:xfrm>
+            <a:off x="7239000" y="5727700"/>
+            <a:ext cx="4248150" cy="165100"/>
+          </a:xfrm>
+          <a:prstGeom prst="rect">
+            <a:avLst/>
+          </a:prstGeom>
+          <a:noFill/>
+        </p:spPr>
+        <p:txBody>
+          <a:bodyPr wrap="square" lIns="0" rIns="0" tIns="0" bIns="0" anchor="ctr">
+            <a:spAutoFit/>
+          </a:bodyPr>
+          <a:lstStyle/>
+          <a:p>
+            <a:pPr algn="l"/>
+            <a:r>
+              <a:rPr sz="1200" b="0">
+                <a:solidFill>
+                  <a:srgbClr val="9A9AA2"/>
+                </a:solidFill>
+                <a:latin typeface="Poppins"/>
+              </a:rPr>
+              <a:t>All eight chain stages map onto the six classic phases.</a:t>
+            </a:r>
+          </a:p>
+        </p:txBody>
+      </p:sp>
       <p:pic>
         <p:nvPicPr>
-          <p:cNvPr id="27" name="Picture 26" descr="ic-bubble.png"/>
+          <p:cNvPr id="62" name="Picture 61" descr="logo.png"/>
           <p:cNvPicPr>
             <a:picLocks noChangeAspect="1"/>
           </p:cNvPicPr>
           <p:nvPr/>
         </p:nvPicPr>
         <p:blipFill>
-          <a:blip r:embed="rId5"/>
-          <a:stretch>
-            <a:fillRect/>
-          </a:stretch>
-        </p:blipFill>
-        <p:spPr>
-          <a:xfrm>
-            <a:off x="8191500" y="2400300"/>
-            <a:ext cx="215900" cy="215900"/>
-          </a:xfrm>
-          <a:prstGeom prst="rect">
-            <a:avLst/>
-          </a:prstGeom>
-        </p:spPr>
-      </p:pic>
-      <p:sp>
-        <p:nvSpPr>
-          <p:cNvPr id="28" name="TextBox 27"/>
-          <p:cNvSpPr txBox="1"/>
-          <p:nvPr/>
-        </p:nvSpPr>
-        <p:spPr>
-          <a:xfrm>
-            <a:off x="8191500" y="2717800"/>
-            <a:ext cx="2794000" cy="279400"/>
-          </a:xfrm>
-          <a:prstGeom prst="rect">
-            <a:avLst/>
-          </a:prstGeom>
-          <a:noFill/>
-        </p:spPr>
-        <p:txBody>
-          <a:bodyPr wrap="square" lIns="0" rIns="0" tIns="0" bIns="0" anchor="ctr">
-            <a:spAutoFit/>
-          </a:bodyPr>
-          <a:lstStyle/>
-          <a:p>
-            <a:pPr algn="l"/>
-            <a:r>
-              <a:rPr sz="2000" b="0">
-                <a:solidFill>
-                  <a:srgbClr val="ECECEE"/>
-                </a:solidFill>
-                <a:latin typeface="Poppins"/>
-              </a:rPr>
-              <a:t>Board Assistant</a:t>
-            </a:r>
-          </a:p>
-        </p:txBody>
-      </p:sp>
-      <p:sp>
-        <p:nvSpPr>
-          <p:cNvPr id="29" name="TextBox 28"/>
-          <p:cNvSpPr txBox="1"/>
-          <p:nvPr/>
-        </p:nvSpPr>
-        <p:spPr>
-          <a:xfrm>
-            <a:off x="8191500" y="3175000"/>
-            <a:ext cx="2794000" cy="127000"/>
-          </a:xfrm>
-          <a:prstGeom prst="rect">
-            <a:avLst/>
-          </a:prstGeom>
-          <a:noFill/>
-        </p:spPr>
-        <p:txBody>
-          <a:bodyPr wrap="square" lIns="0" rIns="0" tIns="0" bIns="0" anchor="ctr">
-            <a:spAutoFit/>
-          </a:bodyPr>
-          <a:lstStyle/>
-          <a:p>
-            <a:pPr algn="l"/>
-            <a:r>
-              <a:rPr sz="900" b="0" spc="200">
-                <a:solidFill>
-                  <a:srgbClr val="9A9AA2"/>
-                </a:solidFill>
-                <a:latin typeface="Courier New"/>
-              </a:rPr>
-              <a:t>CLIENT / SECTOR</a:t>
-            </a:r>
-          </a:p>
-        </p:txBody>
-      </p:sp>
-      <p:sp>
-        <p:nvSpPr>
-          <p:cNvPr id="30" name="TextBox 29"/>
-          <p:cNvSpPr txBox="1"/>
-          <p:nvPr/>
-        </p:nvSpPr>
-        <p:spPr>
-          <a:xfrm>
-            <a:off x="8191500" y="3340100"/>
-            <a:ext cx="2794000" cy="342900"/>
-          </a:xfrm>
-          <a:prstGeom prst="rect">
-            <a:avLst/>
-          </a:prstGeom>
-          <a:noFill/>
-        </p:spPr>
-        <p:txBody>
-          <a:bodyPr wrap="square" lIns="0" rIns="0" tIns="0" bIns="0" anchor="ctr">
-            <a:spAutoFit/>
-          </a:bodyPr>
-          <a:lstStyle/>
-          <a:p>
-            <a:pPr algn="l">
-              <a:lnSpc>
-                <a:spcPts val="1600"/>
-              </a:lnSpc>
-            </a:pPr>
-            <a:r>
-              <a:rPr sz="1300" b="0">
-                <a:solidFill>
-                  <a:srgbClr val="FF6B3D"/>
-                </a:solidFill>
-                <a:latin typeface="Poppins"/>
-              </a:rPr>
-              <a:t>[Kunde oder Branche]</a:t>
-            </a:r>
-          </a:p>
-        </p:txBody>
-      </p:sp>
-      <p:sp>
-        <p:nvSpPr>
-          <p:cNvPr id="31" name="TextBox 30"/>
-          <p:cNvSpPr txBox="1"/>
-          <p:nvPr/>
-        </p:nvSpPr>
-        <p:spPr>
-          <a:xfrm>
-            <a:off x="8191500" y="3759200"/>
-            <a:ext cx="2794000" cy="127000"/>
-          </a:xfrm>
-          <a:prstGeom prst="rect">
-            <a:avLst/>
-          </a:prstGeom>
-          <a:noFill/>
-        </p:spPr>
-        <p:txBody>
-          <a:bodyPr wrap="square" lIns="0" rIns="0" tIns="0" bIns="0" anchor="ctr">
-            <a:spAutoFit/>
-          </a:bodyPr>
-          <a:lstStyle/>
-          <a:p>
-            <a:pPr algn="l"/>
-            <a:r>
-              <a:rPr sz="900" b="0" spc="200">
-                <a:solidFill>
-                  <a:srgbClr val="9A9AA2"/>
-                </a:solidFill>
-                <a:latin typeface="Courier New"/>
-              </a:rPr>
-              <a:t>WHAT WE BUILT</a:t>
-            </a:r>
-          </a:p>
-        </p:txBody>
-      </p:sp>
-      <p:sp>
-        <p:nvSpPr>
-          <p:cNvPr id="32" name="TextBox 31"/>
-          <p:cNvSpPr txBox="1"/>
-          <p:nvPr/>
-        </p:nvSpPr>
-        <p:spPr>
-          <a:xfrm>
-            <a:off x="8191500" y="3924300"/>
-            <a:ext cx="2794000" cy="342900"/>
-          </a:xfrm>
-          <a:prstGeom prst="rect">
-            <a:avLst/>
-          </a:prstGeom>
-          <a:noFill/>
-        </p:spPr>
-        <p:txBody>
-          <a:bodyPr wrap="square" lIns="0" rIns="0" tIns="0" bIns="0" anchor="ctr">
-            <a:spAutoFit/>
-          </a:bodyPr>
-          <a:lstStyle/>
-          <a:p>
-            <a:pPr algn="l">
-              <a:lnSpc>
-                <a:spcPts val="1600"/>
-              </a:lnSpc>
-            </a:pPr>
-            <a:r>
-              <a:rPr sz="1300" b="0">
-                <a:solidFill>
-                  <a:srgbClr val="FF6B3D"/>
-                </a:solidFill>
-                <a:latin typeface="Poppins"/>
-              </a:rPr>
-              <a:t>[was gebaut wurde]</a:t>
-            </a:r>
-          </a:p>
-        </p:txBody>
-      </p:sp>
-      <p:sp>
-        <p:nvSpPr>
-          <p:cNvPr id="33" name="TextBox 32"/>
-          <p:cNvSpPr txBox="1"/>
-          <p:nvPr/>
-        </p:nvSpPr>
-        <p:spPr>
-          <a:xfrm>
-            <a:off x="8191500" y="4343400"/>
-            <a:ext cx="2794000" cy="127000"/>
-          </a:xfrm>
-          <a:prstGeom prst="rect">
-            <a:avLst/>
-          </a:prstGeom>
-          <a:noFill/>
-        </p:spPr>
-        <p:txBody>
-          <a:bodyPr wrap="square" lIns="0" rIns="0" tIns="0" bIns="0" anchor="ctr">
-            <a:spAutoFit/>
-          </a:bodyPr>
-          <a:lstStyle/>
-          <a:p>
-            <a:pPr algn="l"/>
-            <a:r>
-              <a:rPr sz="900" b="0" spc="200">
-                <a:solidFill>
-                  <a:srgbClr val="9A9AA2"/>
-                </a:solidFill>
-                <a:latin typeface="Courier New"/>
-              </a:rPr>
-              <a:t>RESULT</a:t>
-            </a:r>
-          </a:p>
-        </p:txBody>
-      </p:sp>
-      <p:sp>
-        <p:nvSpPr>
-          <p:cNvPr id="34" name="TextBox 33"/>
-          <p:cNvSpPr txBox="1"/>
-          <p:nvPr/>
-        </p:nvSpPr>
-        <p:spPr>
-          <a:xfrm>
-            <a:off x="8191500" y="4508500"/>
-            <a:ext cx="2794000" cy="342900"/>
-          </a:xfrm>
-          <a:prstGeom prst="rect">
-            <a:avLst/>
-          </a:prstGeom>
-          <a:noFill/>
-        </p:spPr>
-        <p:txBody>
-          <a:bodyPr wrap="square" lIns="0" rIns="0" tIns="0" bIns="0" anchor="ctr">
-            <a:spAutoFit/>
-          </a:bodyPr>
-          <a:lstStyle/>
-          <a:p>
-            <a:pPr algn="l">
-              <a:lnSpc>
-                <a:spcPts val="1600"/>
-              </a:lnSpc>
-            </a:pPr>
-            <a:r>
-              <a:rPr sz="1300" b="0">
-                <a:solidFill>
-                  <a:srgbClr val="FF6B3D"/>
-                </a:solidFill>
-                <a:latin typeface="Poppins"/>
-              </a:rPr>
-              <a:t>[Ergebnis in einer Zeile]</a:t>
-            </a:r>
-          </a:p>
-        </p:txBody>
-      </p:sp>
-      <p:sp>
-        <p:nvSpPr>
-          <p:cNvPr id="35" name="TextBox 34"/>
-          <p:cNvSpPr txBox="1"/>
-          <p:nvPr/>
-        </p:nvSpPr>
-        <p:spPr>
-          <a:xfrm>
-            <a:off x="698500" y="5257800"/>
-            <a:ext cx="9525000" cy="152400"/>
-          </a:xfrm>
-          <a:prstGeom prst="rect">
-            <a:avLst/>
-          </a:prstGeom>
-          <a:noFill/>
-        </p:spPr>
-        <p:txBody>
-          <a:bodyPr wrap="square" lIns="0" rIns="0" tIns="0" bIns="0" anchor="ctr">
-            <a:spAutoFit/>
-          </a:bodyPr>
-          <a:lstStyle/>
-          <a:p>
-            <a:pPr algn="l"/>
-            <a:r>
-              <a:rPr sz="1000" b="0">
-                <a:solidFill>
-                  <a:srgbClr val="FF6B3D"/>
-                </a:solidFill>
-                <a:latin typeface="Courier New"/>
-              </a:rPr>
-              <a:t>PLACEHOLDER — replace the three bracketed fields per tile before this deck goes to an investor.</a:t>
-            </a:r>
-          </a:p>
-        </p:txBody>
-      </p:sp>
-      <p:pic>
-        <p:nvPicPr>
-          <p:cNvPr id="36" name="Picture 35" descr="logo.png"/>
-          <p:cNvPicPr>
-            <a:picLocks noChangeAspect="1"/>
-          </p:cNvPicPr>
-          <p:nvPr/>
-        </p:nvPicPr>
-        <p:blipFill>
-          <a:blip r:embed="rId6"/>
+          <a:blip r:embed="rId3"/>
           <a:stretch>
             <a:fillRect/>
           </a:stretch>
@@ -5647,7 +6778,7 @@
                 </a:solidFill>
                 <a:latin typeface="Poppins"/>
               </a:rPr>
-              <a:t>One question.</a:t>
+              <a:t>References.</a:t>
             </a:r>
             <a:r>
               <a:rPr sz="2700" b="0">
@@ -5656,7 +6787,7 @@
                 </a:solidFill>
                 <a:latin typeface="Poppins"/>
               </a:rPr>
-              <a:t> </a:t>
+              <a:t> Three builds, three problems.</a:t>
             </a:r>
           </a:p>
         </p:txBody>
@@ -5691,7 +6822,7 @@
                 </a:solidFill>
                 <a:latin typeface="Courier New"/>
               </a:rPr>
-              <a:t>07 — One question</a:t>
+              <a:t>07 — References</a:t>
             </a:r>
           </a:p>
         </p:txBody>
@@ -5748,8 +6879,8 @@
         </p:nvSpPr>
         <p:spPr>
           <a:xfrm>
-            <a:off x="698500" y="1854200"/>
-            <a:ext cx="8890000" cy="203200"/>
+            <a:off x="698500" y="1320800"/>
+            <a:ext cx="8890000" cy="190500"/>
           </a:xfrm>
           <a:prstGeom prst="rect">
             <a:avLst/>
@@ -5770,21 +6901,133 @@
                 </a:solidFill>
                 <a:latin typeface="Poppins"/>
               </a:rPr>
-              <a:t>Ich lasse Ihnen eine Frage da, keinen Prospekt.</a:t>
-            </a:r>
-          </a:p>
-        </p:txBody>
-      </p:sp>
-      <p:sp>
-        <p:nvSpPr>
-          <p:cNvPr id="7" name="TextBox 6"/>
-          <p:cNvSpPr txBox="1"/>
-          <p:nvPr/>
-        </p:nvSpPr>
-        <p:spPr>
-          <a:xfrm>
-            <a:off x="698500" y="2209800"/>
-            <a:ext cx="10287000" cy="1651000"/>
+              <a:t>Shipped software, not pilots. Each one replaced a process that was running manually.</a:t>
+            </a:r>
+          </a:p>
+        </p:txBody>
+      </p:sp>
+      <p:sp>
+        <p:nvSpPr>
+          <p:cNvPr id="7" name="Rectangle 6"/>
+          <p:cNvSpPr/>
+          <p:nvPr/>
+        </p:nvSpPr>
+        <p:spPr>
+          <a:xfrm>
+            <a:off x="698500" y="1828800"/>
+            <a:ext cx="10788650" cy="6350"/>
+          </a:xfrm>
+          <a:prstGeom prst="rect">
+            <a:avLst/>
+          </a:prstGeom>
+          <a:solidFill>
+            <a:srgbClr val="2B2B2D"/>
+          </a:solidFill>
+          <a:ln>
+            <a:noFill/>
+          </a:ln>
+          <a:effectLst/>
+        </p:spPr>
+        <p:style>
+          <a:lnRef idx="1">
+            <a:schemeClr val="accent1"/>
+          </a:lnRef>
+          <a:fillRef idx="3">
+            <a:schemeClr val="accent1"/>
+          </a:fillRef>
+          <a:effectRef idx="2">
+            <a:schemeClr val="accent1"/>
+          </a:effectRef>
+          <a:fontRef idx="minor">
+            <a:schemeClr val="lt1"/>
+          </a:fontRef>
+        </p:style>
+        <p:txBody>
+          <a:bodyPr rtlCol="0" anchor="ctr"/>
+          <a:lstStyle/>
+          <a:p>
+            <a:pPr algn="ctr"/>
+          </a:p>
+        </p:txBody>
+      </p:sp>
+      <p:sp>
+        <p:nvSpPr>
+          <p:cNvPr id="8" name="Rectangle 7"/>
+          <p:cNvSpPr/>
+          <p:nvPr/>
+        </p:nvSpPr>
+        <p:spPr>
+          <a:xfrm>
+            <a:off x="698500" y="2159000"/>
+            <a:ext cx="3302000" cy="2857500"/>
+          </a:xfrm>
+          <a:prstGeom prst="rect">
+            <a:avLst/>
+          </a:prstGeom>
+          <a:solidFill>
+            <a:srgbClr val="161619"/>
+          </a:solidFill>
+          <a:ln>
+            <a:noFill/>
+          </a:ln>
+          <a:effectLst/>
+        </p:spPr>
+        <p:style>
+          <a:lnRef idx="1">
+            <a:schemeClr val="accent1"/>
+          </a:lnRef>
+          <a:fillRef idx="3">
+            <a:schemeClr val="accent1"/>
+          </a:fillRef>
+          <a:effectRef idx="2">
+            <a:schemeClr val="accent1"/>
+          </a:effectRef>
+          <a:fontRef idx="minor">
+            <a:schemeClr val="lt1"/>
+          </a:fontRef>
+        </p:style>
+        <p:txBody>
+          <a:bodyPr rtlCol="0" anchor="ctr"/>
+          <a:lstStyle/>
+          <a:p>
+            <a:pPr algn="ctr"/>
+          </a:p>
+        </p:txBody>
+      </p:sp>
+      <p:pic>
+        <p:nvPicPr>
+          <p:cNvPr id="9" name="Picture 8" descr="ic-chart.png"/>
+          <p:cNvPicPr>
+            <a:picLocks noChangeAspect="1"/>
+          </p:cNvPicPr>
+          <p:nvPr/>
+        </p:nvPicPr>
+        <p:blipFill>
+          <a:blip r:embed="rId3"/>
+          <a:stretch>
+            <a:fillRect/>
+          </a:stretch>
+        </p:blipFill>
+        <p:spPr>
+          <a:xfrm>
+            <a:off x="952500" y="2400300"/>
+            <a:ext cx="215900" cy="215900"/>
+          </a:xfrm>
+          <a:prstGeom prst="rect">
+            <a:avLst/>
+          </a:prstGeom>
+        </p:spPr>
+      </p:pic>
+      <p:sp>
+        <p:nvSpPr>
+          <p:cNvPr id="10" name="TextBox 9"/>
+          <p:cNvSpPr txBox="1"/>
+          <p:nvPr/>
+        </p:nvSpPr>
+        <p:spPr>
+          <a:xfrm>
+            <a:off x="952500" y="2717800"/>
+            <a:ext cx="2794000" cy="279400"/>
           </a:xfrm>
           <a:prstGeom prst="rect">
             <a:avLst/>
@@ -5797,51 +7040,64 @@
           </a:bodyPr>
           <a:lstStyle/>
           <a:p>
-            <a:pPr algn="l">
-              <a:lnSpc>
-                <a:spcPts val="4400"/>
-              </a:lnSpc>
-            </a:pPr>
-            <a:r>
-              <a:rPr sz="3300" b="0">
+            <a:pPr algn="l"/>
+            <a:r>
+              <a:rPr sz="2000" b="0">
                 <a:solidFill>
                   <a:srgbClr val="ECECEE"/>
                 </a:solidFill>
                 <a:latin typeface="Poppins"/>
               </a:rPr>
-              <a:t>Welcher Prozess bei Ihnen läuft heute in </a:t>
-            </a:r>
-            <a:r>
-              <a:rPr sz="3300" b="0">
-                <a:solidFill>
-                  <a:srgbClr val="FF6B3D"/>
-                </a:solidFill>
-                <a:latin typeface="Poppins"/>
-              </a:rPr>
-              <a:t>Excel</a:t>
-            </a:r>
-            <a:r>
-              <a:rPr sz="3300" b="0">
-                <a:solidFill>
-                  <a:srgbClr val="ECECEE"/>
-                </a:solidFill>
-                <a:latin typeface="Poppins"/>
-              </a:rPr>
-              <a:t> und sollte es seit einem Jahr nicht mehr?</a:t>
-            </a:r>
-          </a:p>
-        </p:txBody>
-      </p:sp>
-      <p:sp>
-        <p:nvSpPr>
-          <p:cNvPr id="8" name="TextBox 7"/>
-          <p:cNvSpPr txBox="1"/>
-          <p:nvPr/>
-        </p:nvSpPr>
-        <p:spPr>
-          <a:xfrm>
-            <a:off x="698500" y="4241800"/>
-            <a:ext cx="8890000" cy="508000"/>
+              <a:t>CFO App</a:t>
+            </a:r>
+          </a:p>
+        </p:txBody>
+      </p:sp>
+      <p:sp>
+        <p:nvSpPr>
+          <p:cNvPr id="11" name="TextBox 10"/>
+          <p:cNvSpPr txBox="1"/>
+          <p:nvPr/>
+        </p:nvSpPr>
+        <p:spPr>
+          <a:xfrm>
+            <a:off x="952500" y="3175000"/>
+            <a:ext cx="2794000" cy="127000"/>
+          </a:xfrm>
+          <a:prstGeom prst="rect">
+            <a:avLst/>
+          </a:prstGeom>
+          <a:noFill/>
+        </p:spPr>
+        <p:txBody>
+          <a:bodyPr wrap="square" lIns="0" rIns="0" tIns="0" bIns="0" anchor="ctr">
+            <a:spAutoFit/>
+          </a:bodyPr>
+          <a:lstStyle/>
+          <a:p>
+            <a:pPr algn="l"/>
+            <a:r>
+              <a:rPr sz="900" b="0" spc="200">
+                <a:solidFill>
+                  <a:srgbClr val="9A9AA2"/>
+                </a:solidFill>
+                <a:latin typeface="Courier New"/>
+              </a:rPr>
+              <a:t>CLIENT / SECTOR</a:t>
+            </a:r>
+          </a:p>
+        </p:txBody>
+      </p:sp>
+      <p:sp>
+        <p:nvSpPr>
+          <p:cNvPr id="12" name="TextBox 11"/>
+          <p:cNvSpPr txBox="1"/>
+          <p:nvPr/>
+        </p:nvSpPr>
+        <p:spPr>
+          <a:xfrm>
+            <a:off x="952500" y="3340100"/>
+            <a:ext cx="2794000" cy="342900"/>
           </a:xfrm>
           <a:prstGeom prst="rect">
             <a:avLst/>
@@ -5860,27 +7116,27 @@
               </a:lnSpc>
             </a:pPr>
             <a:r>
-              <a:rPr sz="1200" b="0">
-                <a:solidFill>
-                  <a:srgbClr val="9A9AA2"/>
+              <a:rPr sz="1300" b="0">
+                <a:solidFill>
+                  <a:srgbClr val="FF6B3D"/>
                 </a:solidFill>
                 <a:latin typeface="Poppins"/>
               </a:rPr>
-              <a:t>Wenn Ihnen dazu gerade etwas eingefallen ist — sprechen Sie mich an. Wir machen daraus eine Anwendung. Und wenn Ihnen zwanzig einfallen, reden wir über die Plattform statt über die Anwendung.</a:t>
-            </a:r>
-          </a:p>
-        </p:txBody>
-      </p:sp>
-      <p:sp>
-        <p:nvSpPr>
-          <p:cNvPr id="9" name="TextBox 8"/>
-          <p:cNvSpPr txBox="1"/>
-          <p:nvPr/>
-        </p:nvSpPr>
-        <p:spPr>
-          <a:xfrm>
-            <a:off x="7042150" y="6032500"/>
-            <a:ext cx="4445000" cy="165100"/>
+              <a:t>[Kunde oder Branche]</a:t>
+            </a:r>
+          </a:p>
+        </p:txBody>
+      </p:sp>
+      <p:sp>
+        <p:nvSpPr>
+          <p:cNvPr id="13" name="TextBox 12"/>
+          <p:cNvSpPr txBox="1"/>
+          <p:nvPr/>
+        </p:nvSpPr>
+        <p:spPr>
+          <a:xfrm>
+            <a:off x="952500" y="3759200"/>
+            <a:ext cx="2794000" cy="127000"/>
           </a:xfrm>
           <a:prstGeom prst="rect">
             <a:avLst/>
@@ -5893,29 +7149,827 @@
           </a:bodyPr>
           <a:lstStyle/>
           <a:p>
-            <a:pPr algn="r"/>
-            <a:r>
-              <a:rPr sz="1000" b="0">
+            <a:pPr algn="l"/>
+            <a:r>
+              <a:rPr sz="900" b="0" spc="200">
+                <a:solidFill>
+                  <a:srgbClr val="9A9AA2"/>
+                </a:solidFill>
+                <a:latin typeface="Courier New"/>
+              </a:rPr>
+              <a:t>WHAT WE BUILT</a:t>
+            </a:r>
+          </a:p>
+        </p:txBody>
+      </p:sp>
+      <p:sp>
+        <p:nvSpPr>
+          <p:cNvPr id="14" name="TextBox 13"/>
+          <p:cNvSpPr txBox="1"/>
+          <p:nvPr/>
+        </p:nvSpPr>
+        <p:spPr>
+          <a:xfrm>
+            <a:off x="952500" y="3924300"/>
+            <a:ext cx="2794000" cy="342900"/>
+          </a:xfrm>
+          <a:prstGeom prst="rect">
+            <a:avLst/>
+          </a:prstGeom>
+          <a:noFill/>
+        </p:spPr>
+        <p:txBody>
+          <a:bodyPr wrap="square" lIns="0" rIns="0" tIns="0" bIns="0" anchor="ctr">
+            <a:spAutoFit/>
+          </a:bodyPr>
+          <a:lstStyle/>
+          <a:p>
+            <a:pPr algn="l">
+              <a:lnSpc>
+                <a:spcPts val="1600"/>
+              </a:lnSpc>
+            </a:pPr>
+            <a:r>
+              <a:rPr sz="1300" b="0">
                 <a:solidFill>
                   <a:srgbClr val="FF6B3D"/>
                 </a:solidFill>
+                <a:latin typeface="Poppins"/>
+              </a:rPr>
+              <a:t>[was gebaut wurde]</a:t>
+            </a:r>
+          </a:p>
+        </p:txBody>
+      </p:sp>
+      <p:sp>
+        <p:nvSpPr>
+          <p:cNvPr id="15" name="TextBox 14"/>
+          <p:cNvSpPr txBox="1"/>
+          <p:nvPr/>
+        </p:nvSpPr>
+        <p:spPr>
+          <a:xfrm>
+            <a:off x="952500" y="4343400"/>
+            <a:ext cx="2794000" cy="127000"/>
+          </a:xfrm>
+          <a:prstGeom prst="rect">
+            <a:avLst/>
+          </a:prstGeom>
+          <a:noFill/>
+        </p:spPr>
+        <p:txBody>
+          <a:bodyPr wrap="square" lIns="0" rIns="0" tIns="0" bIns="0" anchor="ctr">
+            <a:spAutoFit/>
+          </a:bodyPr>
+          <a:lstStyle/>
+          <a:p>
+            <a:pPr algn="l"/>
+            <a:r>
+              <a:rPr sz="900" b="0" spc="200">
+                <a:solidFill>
+                  <a:srgbClr val="9A9AA2"/>
+                </a:solidFill>
                 <a:latin typeface="Courier New"/>
               </a:rPr>
-              <a:t>[Name · E-Mail · Telefon]</a:t>
-            </a:r>
+              <a:t>RESULT</a:t>
+            </a:r>
+          </a:p>
+        </p:txBody>
+      </p:sp>
+      <p:sp>
+        <p:nvSpPr>
+          <p:cNvPr id="16" name="TextBox 15"/>
+          <p:cNvSpPr txBox="1"/>
+          <p:nvPr/>
+        </p:nvSpPr>
+        <p:spPr>
+          <a:xfrm>
+            <a:off x="952500" y="4508500"/>
+            <a:ext cx="2794000" cy="342900"/>
+          </a:xfrm>
+          <a:prstGeom prst="rect">
+            <a:avLst/>
+          </a:prstGeom>
+          <a:noFill/>
+        </p:spPr>
+        <p:txBody>
+          <a:bodyPr wrap="square" lIns="0" rIns="0" tIns="0" bIns="0" anchor="ctr">
+            <a:spAutoFit/>
+          </a:bodyPr>
+          <a:lstStyle/>
+          <a:p>
+            <a:pPr algn="l">
+              <a:lnSpc>
+                <a:spcPts val="1600"/>
+              </a:lnSpc>
+            </a:pPr>
+            <a:r>
+              <a:rPr sz="1300" b="0">
+                <a:solidFill>
+                  <a:srgbClr val="FF6B3D"/>
+                </a:solidFill>
+                <a:latin typeface="Poppins"/>
+              </a:rPr>
+              <a:t>[Ergebnis in einer Zeile]</a:t>
+            </a:r>
+          </a:p>
+        </p:txBody>
+      </p:sp>
+      <p:sp>
+        <p:nvSpPr>
+          <p:cNvPr id="17" name="Rectangle 16"/>
+          <p:cNvSpPr/>
+          <p:nvPr/>
+        </p:nvSpPr>
+        <p:spPr>
+          <a:xfrm>
+            <a:off x="4318000" y="2159000"/>
+            <a:ext cx="3302000" cy="2857500"/>
+          </a:xfrm>
+          <a:prstGeom prst="rect">
+            <a:avLst/>
+          </a:prstGeom>
+          <a:solidFill>
+            <a:srgbClr val="161619"/>
+          </a:solidFill>
+          <a:ln>
+            <a:noFill/>
+          </a:ln>
+          <a:effectLst/>
+        </p:spPr>
+        <p:style>
+          <a:lnRef idx="1">
+            <a:schemeClr val="accent1"/>
+          </a:lnRef>
+          <a:fillRef idx="3">
+            <a:schemeClr val="accent1"/>
+          </a:fillRef>
+          <a:effectRef idx="2">
+            <a:schemeClr val="accent1"/>
+          </a:effectRef>
+          <a:fontRef idx="minor">
+            <a:schemeClr val="lt1"/>
+          </a:fontRef>
+        </p:style>
+        <p:txBody>
+          <a:bodyPr rtlCol="0" anchor="ctr"/>
+          <a:lstStyle/>
+          <a:p>
+            <a:pPr algn="ctr"/>
           </a:p>
         </p:txBody>
       </p:sp>
       <p:pic>
         <p:nvPicPr>
-          <p:cNvPr id="10" name="Picture 9" descr="logo.png"/>
+          <p:cNvPr id="18" name="Picture 17" descr="ic-funnel.png"/>
           <p:cNvPicPr>
             <a:picLocks noChangeAspect="1"/>
           </p:cNvPicPr>
           <p:nvPr/>
         </p:nvPicPr>
         <p:blipFill>
-          <a:blip r:embed="rId3"/>
+          <a:blip r:embed="rId4"/>
+          <a:stretch>
+            <a:fillRect/>
+          </a:stretch>
+        </p:blipFill>
+        <p:spPr>
+          <a:xfrm>
+            <a:off x="4572000" y="2400300"/>
+            <a:ext cx="215900" cy="215900"/>
+          </a:xfrm>
+          <a:prstGeom prst="rect">
+            <a:avLst/>
+          </a:prstGeom>
+        </p:spPr>
+      </p:pic>
+      <p:sp>
+        <p:nvSpPr>
+          <p:cNvPr id="19" name="TextBox 18"/>
+          <p:cNvSpPr txBox="1"/>
+          <p:nvPr/>
+        </p:nvSpPr>
+        <p:spPr>
+          <a:xfrm>
+            <a:off x="4572000" y="2717800"/>
+            <a:ext cx="2794000" cy="279400"/>
+          </a:xfrm>
+          <a:prstGeom prst="rect">
+            <a:avLst/>
+          </a:prstGeom>
+          <a:noFill/>
+        </p:spPr>
+        <p:txBody>
+          <a:bodyPr wrap="square" lIns="0" rIns="0" tIns="0" bIns="0" anchor="ctr">
+            <a:spAutoFit/>
+          </a:bodyPr>
+          <a:lstStyle/>
+          <a:p>
+            <a:pPr algn="l"/>
+            <a:r>
+              <a:rPr sz="2000" b="0">
+                <a:solidFill>
+                  <a:srgbClr val="ECECEE"/>
+                </a:solidFill>
+                <a:latin typeface="Poppins"/>
+              </a:rPr>
+              <a:t>Lead Generation</a:t>
+            </a:r>
+          </a:p>
+        </p:txBody>
+      </p:sp>
+      <p:sp>
+        <p:nvSpPr>
+          <p:cNvPr id="20" name="TextBox 19"/>
+          <p:cNvSpPr txBox="1"/>
+          <p:nvPr/>
+        </p:nvSpPr>
+        <p:spPr>
+          <a:xfrm>
+            <a:off x="4572000" y="3175000"/>
+            <a:ext cx="2794000" cy="127000"/>
+          </a:xfrm>
+          <a:prstGeom prst="rect">
+            <a:avLst/>
+          </a:prstGeom>
+          <a:noFill/>
+        </p:spPr>
+        <p:txBody>
+          <a:bodyPr wrap="square" lIns="0" rIns="0" tIns="0" bIns="0" anchor="ctr">
+            <a:spAutoFit/>
+          </a:bodyPr>
+          <a:lstStyle/>
+          <a:p>
+            <a:pPr algn="l"/>
+            <a:r>
+              <a:rPr sz="900" b="0" spc="200">
+                <a:solidFill>
+                  <a:srgbClr val="9A9AA2"/>
+                </a:solidFill>
+                <a:latin typeface="Courier New"/>
+              </a:rPr>
+              <a:t>CLIENT / SECTOR</a:t>
+            </a:r>
+          </a:p>
+        </p:txBody>
+      </p:sp>
+      <p:sp>
+        <p:nvSpPr>
+          <p:cNvPr id="21" name="TextBox 20"/>
+          <p:cNvSpPr txBox="1"/>
+          <p:nvPr/>
+        </p:nvSpPr>
+        <p:spPr>
+          <a:xfrm>
+            <a:off x="4572000" y="3340100"/>
+            <a:ext cx="2794000" cy="342900"/>
+          </a:xfrm>
+          <a:prstGeom prst="rect">
+            <a:avLst/>
+          </a:prstGeom>
+          <a:noFill/>
+        </p:spPr>
+        <p:txBody>
+          <a:bodyPr wrap="square" lIns="0" rIns="0" tIns="0" bIns="0" anchor="ctr">
+            <a:spAutoFit/>
+          </a:bodyPr>
+          <a:lstStyle/>
+          <a:p>
+            <a:pPr algn="l">
+              <a:lnSpc>
+                <a:spcPts val="1600"/>
+              </a:lnSpc>
+            </a:pPr>
+            <a:r>
+              <a:rPr sz="1300" b="0">
+                <a:solidFill>
+                  <a:srgbClr val="FF6B3D"/>
+                </a:solidFill>
+                <a:latin typeface="Poppins"/>
+              </a:rPr>
+              <a:t>[Kunde oder Branche]</a:t>
+            </a:r>
+          </a:p>
+        </p:txBody>
+      </p:sp>
+      <p:sp>
+        <p:nvSpPr>
+          <p:cNvPr id="22" name="TextBox 21"/>
+          <p:cNvSpPr txBox="1"/>
+          <p:nvPr/>
+        </p:nvSpPr>
+        <p:spPr>
+          <a:xfrm>
+            <a:off x="4572000" y="3759200"/>
+            <a:ext cx="2794000" cy="127000"/>
+          </a:xfrm>
+          <a:prstGeom prst="rect">
+            <a:avLst/>
+          </a:prstGeom>
+          <a:noFill/>
+        </p:spPr>
+        <p:txBody>
+          <a:bodyPr wrap="square" lIns="0" rIns="0" tIns="0" bIns="0" anchor="ctr">
+            <a:spAutoFit/>
+          </a:bodyPr>
+          <a:lstStyle/>
+          <a:p>
+            <a:pPr algn="l"/>
+            <a:r>
+              <a:rPr sz="900" b="0" spc="200">
+                <a:solidFill>
+                  <a:srgbClr val="9A9AA2"/>
+                </a:solidFill>
+                <a:latin typeface="Courier New"/>
+              </a:rPr>
+              <a:t>WHAT WE BUILT</a:t>
+            </a:r>
+          </a:p>
+        </p:txBody>
+      </p:sp>
+      <p:sp>
+        <p:nvSpPr>
+          <p:cNvPr id="23" name="TextBox 22"/>
+          <p:cNvSpPr txBox="1"/>
+          <p:nvPr/>
+        </p:nvSpPr>
+        <p:spPr>
+          <a:xfrm>
+            <a:off x="4572000" y="3924300"/>
+            <a:ext cx="2794000" cy="342900"/>
+          </a:xfrm>
+          <a:prstGeom prst="rect">
+            <a:avLst/>
+          </a:prstGeom>
+          <a:noFill/>
+        </p:spPr>
+        <p:txBody>
+          <a:bodyPr wrap="square" lIns="0" rIns="0" tIns="0" bIns="0" anchor="ctr">
+            <a:spAutoFit/>
+          </a:bodyPr>
+          <a:lstStyle/>
+          <a:p>
+            <a:pPr algn="l">
+              <a:lnSpc>
+                <a:spcPts val="1600"/>
+              </a:lnSpc>
+            </a:pPr>
+            <a:r>
+              <a:rPr sz="1300" b="0">
+                <a:solidFill>
+                  <a:srgbClr val="FF6B3D"/>
+                </a:solidFill>
+                <a:latin typeface="Poppins"/>
+              </a:rPr>
+              <a:t>[was gebaut wurde]</a:t>
+            </a:r>
+          </a:p>
+        </p:txBody>
+      </p:sp>
+      <p:sp>
+        <p:nvSpPr>
+          <p:cNvPr id="24" name="TextBox 23"/>
+          <p:cNvSpPr txBox="1"/>
+          <p:nvPr/>
+        </p:nvSpPr>
+        <p:spPr>
+          <a:xfrm>
+            <a:off x="4572000" y="4343400"/>
+            <a:ext cx="2794000" cy="127000"/>
+          </a:xfrm>
+          <a:prstGeom prst="rect">
+            <a:avLst/>
+          </a:prstGeom>
+          <a:noFill/>
+        </p:spPr>
+        <p:txBody>
+          <a:bodyPr wrap="square" lIns="0" rIns="0" tIns="0" bIns="0" anchor="ctr">
+            <a:spAutoFit/>
+          </a:bodyPr>
+          <a:lstStyle/>
+          <a:p>
+            <a:pPr algn="l"/>
+            <a:r>
+              <a:rPr sz="900" b="0" spc="200">
+                <a:solidFill>
+                  <a:srgbClr val="9A9AA2"/>
+                </a:solidFill>
+                <a:latin typeface="Courier New"/>
+              </a:rPr>
+              <a:t>RESULT</a:t>
+            </a:r>
+          </a:p>
+        </p:txBody>
+      </p:sp>
+      <p:sp>
+        <p:nvSpPr>
+          <p:cNvPr id="25" name="TextBox 24"/>
+          <p:cNvSpPr txBox="1"/>
+          <p:nvPr/>
+        </p:nvSpPr>
+        <p:spPr>
+          <a:xfrm>
+            <a:off x="4572000" y="4508500"/>
+            <a:ext cx="2794000" cy="342900"/>
+          </a:xfrm>
+          <a:prstGeom prst="rect">
+            <a:avLst/>
+          </a:prstGeom>
+          <a:noFill/>
+        </p:spPr>
+        <p:txBody>
+          <a:bodyPr wrap="square" lIns="0" rIns="0" tIns="0" bIns="0" anchor="ctr">
+            <a:spAutoFit/>
+          </a:bodyPr>
+          <a:lstStyle/>
+          <a:p>
+            <a:pPr algn="l">
+              <a:lnSpc>
+                <a:spcPts val="1600"/>
+              </a:lnSpc>
+            </a:pPr>
+            <a:r>
+              <a:rPr sz="1300" b="0">
+                <a:solidFill>
+                  <a:srgbClr val="FF6B3D"/>
+                </a:solidFill>
+                <a:latin typeface="Poppins"/>
+              </a:rPr>
+              <a:t>[Ergebnis in einer Zeile]</a:t>
+            </a:r>
+          </a:p>
+        </p:txBody>
+      </p:sp>
+      <p:sp>
+        <p:nvSpPr>
+          <p:cNvPr id="26" name="Rectangle 25"/>
+          <p:cNvSpPr/>
+          <p:nvPr/>
+        </p:nvSpPr>
+        <p:spPr>
+          <a:xfrm>
+            <a:off x="7937500" y="2159000"/>
+            <a:ext cx="3302000" cy="2857500"/>
+          </a:xfrm>
+          <a:prstGeom prst="rect">
+            <a:avLst/>
+          </a:prstGeom>
+          <a:solidFill>
+            <a:srgbClr val="161619"/>
+          </a:solidFill>
+          <a:ln>
+            <a:noFill/>
+          </a:ln>
+          <a:effectLst/>
+        </p:spPr>
+        <p:style>
+          <a:lnRef idx="1">
+            <a:schemeClr val="accent1"/>
+          </a:lnRef>
+          <a:fillRef idx="3">
+            <a:schemeClr val="accent1"/>
+          </a:fillRef>
+          <a:effectRef idx="2">
+            <a:schemeClr val="accent1"/>
+          </a:effectRef>
+          <a:fontRef idx="minor">
+            <a:schemeClr val="lt1"/>
+          </a:fontRef>
+        </p:style>
+        <p:txBody>
+          <a:bodyPr rtlCol="0" anchor="ctr"/>
+          <a:lstStyle/>
+          <a:p>
+            <a:pPr algn="ctr"/>
+          </a:p>
+        </p:txBody>
+      </p:sp>
+      <p:pic>
+        <p:nvPicPr>
+          <p:cNvPr id="27" name="Picture 26" descr="ic-bubble.png"/>
+          <p:cNvPicPr>
+            <a:picLocks noChangeAspect="1"/>
+          </p:cNvPicPr>
+          <p:nvPr/>
+        </p:nvPicPr>
+        <p:blipFill>
+          <a:blip r:embed="rId5"/>
+          <a:stretch>
+            <a:fillRect/>
+          </a:stretch>
+        </p:blipFill>
+        <p:spPr>
+          <a:xfrm>
+            <a:off x="8191500" y="2400300"/>
+            <a:ext cx="215900" cy="215900"/>
+          </a:xfrm>
+          <a:prstGeom prst="rect">
+            <a:avLst/>
+          </a:prstGeom>
+        </p:spPr>
+      </p:pic>
+      <p:sp>
+        <p:nvSpPr>
+          <p:cNvPr id="28" name="TextBox 27"/>
+          <p:cNvSpPr txBox="1"/>
+          <p:nvPr/>
+        </p:nvSpPr>
+        <p:spPr>
+          <a:xfrm>
+            <a:off x="8191500" y="2717800"/>
+            <a:ext cx="2794000" cy="279400"/>
+          </a:xfrm>
+          <a:prstGeom prst="rect">
+            <a:avLst/>
+          </a:prstGeom>
+          <a:noFill/>
+        </p:spPr>
+        <p:txBody>
+          <a:bodyPr wrap="square" lIns="0" rIns="0" tIns="0" bIns="0" anchor="ctr">
+            <a:spAutoFit/>
+          </a:bodyPr>
+          <a:lstStyle/>
+          <a:p>
+            <a:pPr algn="l"/>
+            <a:r>
+              <a:rPr sz="2000" b="0">
+                <a:solidFill>
+                  <a:srgbClr val="ECECEE"/>
+                </a:solidFill>
+                <a:latin typeface="Poppins"/>
+              </a:rPr>
+              <a:t>Board Assistant</a:t>
+            </a:r>
+          </a:p>
+        </p:txBody>
+      </p:sp>
+      <p:sp>
+        <p:nvSpPr>
+          <p:cNvPr id="29" name="TextBox 28"/>
+          <p:cNvSpPr txBox="1"/>
+          <p:nvPr/>
+        </p:nvSpPr>
+        <p:spPr>
+          <a:xfrm>
+            <a:off x="8191500" y="3175000"/>
+            <a:ext cx="2794000" cy="127000"/>
+          </a:xfrm>
+          <a:prstGeom prst="rect">
+            <a:avLst/>
+          </a:prstGeom>
+          <a:noFill/>
+        </p:spPr>
+        <p:txBody>
+          <a:bodyPr wrap="square" lIns="0" rIns="0" tIns="0" bIns="0" anchor="ctr">
+            <a:spAutoFit/>
+          </a:bodyPr>
+          <a:lstStyle/>
+          <a:p>
+            <a:pPr algn="l"/>
+            <a:r>
+              <a:rPr sz="900" b="0" spc="200">
+                <a:solidFill>
+                  <a:srgbClr val="9A9AA2"/>
+                </a:solidFill>
+                <a:latin typeface="Courier New"/>
+              </a:rPr>
+              <a:t>CLIENT / SECTOR</a:t>
+            </a:r>
+          </a:p>
+        </p:txBody>
+      </p:sp>
+      <p:sp>
+        <p:nvSpPr>
+          <p:cNvPr id="30" name="TextBox 29"/>
+          <p:cNvSpPr txBox="1"/>
+          <p:nvPr/>
+        </p:nvSpPr>
+        <p:spPr>
+          <a:xfrm>
+            <a:off x="8191500" y="3340100"/>
+            <a:ext cx="2794000" cy="342900"/>
+          </a:xfrm>
+          <a:prstGeom prst="rect">
+            <a:avLst/>
+          </a:prstGeom>
+          <a:noFill/>
+        </p:spPr>
+        <p:txBody>
+          <a:bodyPr wrap="square" lIns="0" rIns="0" tIns="0" bIns="0" anchor="ctr">
+            <a:spAutoFit/>
+          </a:bodyPr>
+          <a:lstStyle/>
+          <a:p>
+            <a:pPr algn="l">
+              <a:lnSpc>
+                <a:spcPts val="1600"/>
+              </a:lnSpc>
+            </a:pPr>
+            <a:r>
+              <a:rPr sz="1300" b="0">
+                <a:solidFill>
+                  <a:srgbClr val="FF6B3D"/>
+                </a:solidFill>
+                <a:latin typeface="Poppins"/>
+              </a:rPr>
+              <a:t>[Kunde oder Branche]</a:t>
+            </a:r>
+          </a:p>
+        </p:txBody>
+      </p:sp>
+      <p:sp>
+        <p:nvSpPr>
+          <p:cNvPr id="31" name="TextBox 30"/>
+          <p:cNvSpPr txBox="1"/>
+          <p:nvPr/>
+        </p:nvSpPr>
+        <p:spPr>
+          <a:xfrm>
+            <a:off x="8191500" y="3759200"/>
+            <a:ext cx="2794000" cy="127000"/>
+          </a:xfrm>
+          <a:prstGeom prst="rect">
+            <a:avLst/>
+          </a:prstGeom>
+          <a:noFill/>
+        </p:spPr>
+        <p:txBody>
+          <a:bodyPr wrap="square" lIns="0" rIns="0" tIns="0" bIns="0" anchor="ctr">
+            <a:spAutoFit/>
+          </a:bodyPr>
+          <a:lstStyle/>
+          <a:p>
+            <a:pPr algn="l"/>
+            <a:r>
+              <a:rPr sz="900" b="0" spc="200">
+                <a:solidFill>
+                  <a:srgbClr val="9A9AA2"/>
+                </a:solidFill>
+                <a:latin typeface="Courier New"/>
+              </a:rPr>
+              <a:t>WHAT WE BUILT</a:t>
+            </a:r>
+          </a:p>
+        </p:txBody>
+      </p:sp>
+      <p:sp>
+        <p:nvSpPr>
+          <p:cNvPr id="32" name="TextBox 31"/>
+          <p:cNvSpPr txBox="1"/>
+          <p:nvPr/>
+        </p:nvSpPr>
+        <p:spPr>
+          <a:xfrm>
+            <a:off x="8191500" y="3924300"/>
+            <a:ext cx="2794000" cy="342900"/>
+          </a:xfrm>
+          <a:prstGeom prst="rect">
+            <a:avLst/>
+          </a:prstGeom>
+          <a:noFill/>
+        </p:spPr>
+        <p:txBody>
+          <a:bodyPr wrap="square" lIns="0" rIns="0" tIns="0" bIns="0" anchor="ctr">
+            <a:spAutoFit/>
+          </a:bodyPr>
+          <a:lstStyle/>
+          <a:p>
+            <a:pPr algn="l">
+              <a:lnSpc>
+                <a:spcPts val="1600"/>
+              </a:lnSpc>
+            </a:pPr>
+            <a:r>
+              <a:rPr sz="1300" b="0">
+                <a:solidFill>
+                  <a:srgbClr val="FF6B3D"/>
+                </a:solidFill>
+                <a:latin typeface="Poppins"/>
+              </a:rPr>
+              <a:t>[was gebaut wurde]</a:t>
+            </a:r>
+          </a:p>
+        </p:txBody>
+      </p:sp>
+      <p:sp>
+        <p:nvSpPr>
+          <p:cNvPr id="33" name="TextBox 32"/>
+          <p:cNvSpPr txBox="1"/>
+          <p:nvPr/>
+        </p:nvSpPr>
+        <p:spPr>
+          <a:xfrm>
+            <a:off x="8191500" y="4343400"/>
+            <a:ext cx="2794000" cy="127000"/>
+          </a:xfrm>
+          <a:prstGeom prst="rect">
+            <a:avLst/>
+          </a:prstGeom>
+          <a:noFill/>
+        </p:spPr>
+        <p:txBody>
+          <a:bodyPr wrap="square" lIns="0" rIns="0" tIns="0" bIns="0" anchor="ctr">
+            <a:spAutoFit/>
+          </a:bodyPr>
+          <a:lstStyle/>
+          <a:p>
+            <a:pPr algn="l"/>
+            <a:r>
+              <a:rPr sz="900" b="0" spc="200">
+                <a:solidFill>
+                  <a:srgbClr val="9A9AA2"/>
+                </a:solidFill>
+                <a:latin typeface="Courier New"/>
+              </a:rPr>
+              <a:t>RESULT</a:t>
+            </a:r>
+          </a:p>
+        </p:txBody>
+      </p:sp>
+      <p:sp>
+        <p:nvSpPr>
+          <p:cNvPr id="34" name="TextBox 33"/>
+          <p:cNvSpPr txBox="1"/>
+          <p:nvPr/>
+        </p:nvSpPr>
+        <p:spPr>
+          <a:xfrm>
+            <a:off x="8191500" y="4508500"/>
+            <a:ext cx="2794000" cy="342900"/>
+          </a:xfrm>
+          <a:prstGeom prst="rect">
+            <a:avLst/>
+          </a:prstGeom>
+          <a:noFill/>
+        </p:spPr>
+        <p:txBody>
+          <a:bodyPr wrap="square" lIns="0" rIns="0" tIns="0" bIns="0" anchor="ctr">
+            <a:spAutoFit/>
+          </a:bodyPr>
+          <a:lstStyle/>
+          <a:p>
+            <a:pPr algn="l">
+              <a:lnSpc>
+                <a:spcPts val="1600"/>
+              </a:lnSpc>
+            </a:pPr>
+            <a:r>
+              <a:rPr sz="1300" b="0">
+                <a:solidFill>
+                  <a:srgbClr val="FF6B3D"/>
+                </a:solidFill>
+                <a:latin typeface="Poppins"/>
+              </a:rPr>
+              <a:t>[Ergebnis in einer Zeile]</a:t>
+            </a:r>
+          </a:p>
+        </p:txBody>
+      </p:sp>
+      <p:sp>
+        <p:nvSpPr>
+          <p:cNvPr id="35" name="TextBox 34"/>
+          <p:cNvSpPr txBox="1"/>
+          <p:nvPr/>
+        </p:nvSpPr>
+        <p:spPr>
+          <a:xfrm>
+            <a:off x="698500" y="5257800"/>
+            <a:ext cx="9525000" cy="152400"/>
+          </a:xfrm>
+          <a:prstGeom prst="rect">
+            <a:avLst/>
+          </a:prstGeom>
+          <a:noFill/>
+        </p:spPr>
+        <p:txBody>
+          <a:bodyPr wrap="square" lIns="0" rIns="0" tIns="0" bIns="0" anchor="ctr">
+            <a:spAutoFit/>
+          </a:bodyPr>
+          <a:lstStyle/>
+          <a:p>
+            <a:pPr algn="l"/>
+            <a:r>
+              <a:rPr sz="1000" b="0">
+                <a:solidFill>
+                  <a:srgbClr val="FF6B3D"/>
+                </a:solidFill>
+                <a:latin typeface="Courier New"/>
+              </a:rPr>
+              <a:t>PLACEHOLDER — replace the three bracketed fields per tile before this deck goes to an investor.</a:t>
+            </a:r>
+          </a:p>
+        </p:txBody>
+      </p:sp>
+      <p:pic>
+        <p:nvPicPr>
+          <p:cNvPr id="36" name="Picture 35" descr="logo.png"/>
+          <p:cNvPicPr>
+            <a:picLocks noChangeAspect="1"/>
+          </p:cNvPicPr>
+          <p:nvPr/>
+        </p:nvPicPr>
+        <p:blipFill>
+          <a:blip r:embed="rId6"/>
           <a:stretch>
             <a:fillRect/>
           </a:stretch>
@@ -6002,7 +8056,7 @@
                 </a:solidFill>
                 <a:latin typeface="Poppins"/>
               </a:rPr>
-              <a:t>Further questions.</a:t>
+              <a:t>One question.</a:t>
             </a:r>
             <a:r>
               <a:rPr sz="2700" b="0">
@@ -6046,7 +8100,362 @@
                 </a:solidFill>
                 <a:latin typeface="Courier New"/>
               </a:rPr>
-              <a:t>08 — Appendix</a:t>
+              <a:t>08 — One question</a:t>
+            </a:r>
+          </a:p>
+        </p:txBody>
+      </p:sp>
+      <p:sp>
+        <p:nvSpPr>
+          <p:cNvPr id="5" name="Rectangle 4"/>
+          <p:cNvSpPr/>
+          <p:nvPr/>
+        </p:nvSpPr>
+        <p:spPr>
+          <a:xfrm>
+            <a:off x="698500" y="1092200"/>
+            <a:ext cx="10788650" cy="6350"/>
+          </a:xfrm>
+          <a:prstGeom prst="rect">
+            <a:avLst/>
+          </a:prstGeom>
+          <a:solidFill>
+            <a:srgbClr val="2B2B2D"/>
+          </a:solidFill>
+          <a:ln>
+            <a:noFill/>
+          </a:ln>
+          <a:effectLst/>
+        </p:spPr>
+        <p:style>
+          <a:lnRef idx="1">
+            <a:schemeClr val="accent1"/>
+          </a:lnRef>
+          <a:fillRef idx="3">
+            <a:schemeClr val="accent1"/>
+          </a:fillRef>
+          <a:effectRef idx="2">
+            <a:schemeClr val="accent1"/>
+          </a:effectRef>
+          <a:fontRef idx="minor">
+            <a:schemeClr val="lt1"/>
+          </a:fontRef>
+        </p:style>
+        <p:txBody>
+          <a:bodyPr rtlCol="0" anchor="ctr"/>
+          <a:lstStyle/>
+          <a:p>
+            <a:pPr algn="ctr"/>
+          </a:p>
+        </p:txBody>
+      </p:sp>
+      <p:sp>
+        <p:nvSpPr>
+          <p:cNvPr id="6" name="TextBox 5"/>
+          <p:cNvSpPr txBox="1"/>
+          <p:nvPr/>
+        </p:nvSpPr>
+        <p:spPr>
+          <a:xfrm>
+            <a:off x="698500" y="1854200"/>
+            <a:ext cx="8890000" cy="203200"/>
+          </a:xfrm>
+          <a:prstGeom prst="rect">
+            <a:avLst/>
+          </a:prstGeom>
+          <a:noFill/>
+        </p:spPr>
+        <p:txBody>
+          <a:bodyPr wrap="square" lIns="0" rIns="0" tIns="0" bIns="0" anchor="ctr">
+            <a:spAutoFit/>
+          </a:bodyPr>
+          <a:lstStyle/>
+          <a:p>
+            <a:pPr algn="l"/>
+            <a:r>
+              <a:rPr sz="1400" b="0">
+                <a:solidFill>
+                  <a:srgbClr val="9A9AA2"/>
+                </a:solidFill>
+                <a:latin typeface="Poppins"/>
+              </a:rPr>
+              <a:t>Ich lasse Ihnen eine Frage da, keinen Prospekt.</a:t>
+            </a:r>
+          </a:p>
+        </p:txBody>
+      </p:sp>
+      <p:sp>
+        <p:nvSpPr>
+          <p:cNvPr id="7" name="TextBox 6"/>
+          <p:cNvSpPr txBox="1"/>
+          <p:nvPr/>
+        </p:nvSpPr>
+        <p:spPr>
+          <a:xfrm>
+            <a:off x="698500" y="2209800"/>
+            <a:ext cx="10287000" cy="1651000"/>
+          </a:xfrm>
+          <a:prstGeom prst="rect">
+            <a:avLst/>
+          </a:prstGeom>
+          <a:noFill/>
+        </p:spPr>
+        <p:txBody>
+          <a:bodyPr wrap="square" lIns="0" rIns="0" tIns="0" bIns="0" anchor="ctr">
+            <a:spAutoFit/>
+          </a:bodyPr>
+          <a:lstStyle/>
+          <a:p>
+            <a:pPr algn="l">
+              <a:lnSpc>
+                <a:spcPts val="4400"/>
+              </a:lnSpc>
+            </a:pPr>
+            <a:r>
+              <a:rPr sz="3300" b="0">
+                <a:solidFill>
+                  <a:srgbClr val="ECECEE"/>
+                </a:solidFill>
+                <a:latin typeface="Poppins"/>
+              </a:rPr>
+              <a:t>Welcher Prozess bei Ihnen läuft heute in </a:t>
+            </a:r>
+            <a:r>
+              <a:rPr sz="3300" b="0">
+                <a:solidFill>
+                  <a:srgbClr val="FF6B3D"/>
+                </a:solidFill>
+                <a:latin typeface="Poppins"/>
+              </a:rPr>
+              <a:t>Excel</a:t>
+            </a:r>
+            <a:r>
+              <a:rPr sz="3300" b="0">
+                <a:solidFill>
+                  <a:srgbClr val="ECECEE"/>
+                </a:solidFill>
+                <a:latin typeface="Poppins"/>
+              </a:rPr>
+              <a:t> und sollte es seit einem Jahr nicht mehr?</a:t>
+            </a:r>
+          </a:p>
+        </p:txBody>
+      </p:sp>
+      <p:sp>
+        <p:nvSpPr>
+          <p:cNvPr id="8" name="TextBox 7"/>
+          <p:cNvSpPr txBox="1"/>
+          <p:nvPr/>
+        </p:nvSpPr>
+        <p:spPr>
+          <a:xfrm>
+            <a:off x="698500" y="4241800"/>
+            <a:ext cx="8890000" cy="508000"/>
+          </a:xfrm>
+          <a:prstGeom prst="rect">
+            <a:avLst/>
+          </a:prstGeom>
+          <a:noFill/>
+        </p:spPr>
+        <p:txBody>
+          <a:bodyPr wrap="square" lIns="0" rIns="0" tIns="0" bIns="0" anchor="ctr">
+            <a:spAutoFit/>
+          </a:bodyPr>
+          <a:lstStyle/>
+          <a:p>
+            <a:pPr algn="l">
+              <a:lnSpc>
+                <a:spcPts val="1600"/>
+              </a:lnSpc>
+            </a:pPr>
+            <a:r>
+              <a:rPr sz="1200" b="0">
+                <a:solidFill>
+                  <a:srgbClr val="9A9AA2"/>
+                </a:solidFill>
+                <a:latin typeface="Poppins"/>
+              </a:rPr>
+              <a:t>Wenn Ihnen dazu gerade etwas eingefallen ist — sprechen Sie mich an. Wir machen daraus eine Anwendung. Und wenn Ihnen zwanzig einfallen, reden wir über die Plattform statt über die Anwendung.</a:t>
+            </a:r>
+          </a:p>
+        </p:txBody>
+      </p:sp>
+      <p:sp>
+        <p:nvSpPr>
+          <p:cNvPr id="9" name="TextBox 8"/>
+          <p:cNvSpPr txBox="1"/>
+          <p:nvPr/>
+        </p:nvSpPr>
+        <p:spPr>
+          <a:xfrm>
+            <a:off x="7042150" y="6032500"/>
+            <a:ext cx="4445000" cy="165100"/>
+          </a:xfrm>
+          <a:prstGeom prst="rect">
+            <a:avLst/>
+          </a:prstGeom>
+          <a:noFill/>
+        </p:spPr>
+        <p:txBody>
+          <a:bodyPr wrap="square" lIns="0" rIns="0" tIns="0" bIns="0" anchor="ctr">
+            <a:spAutoFit/>
+          </a:bodyPr>
+          <a:lstStyle/>
+          <a:p>
+            <a:pPr algn="r"/>
+            <a:r>
+              <a:rPr sz="1000" b="0">
+                <a:solidFill>
+                  <a:srgbClr val="FF6B3D"/>
+                </a:solidFill>
+                <a:latin typeface="Courier New"/>
+              </a:rPr>
+              <a:t>[Name · E-Mail · Telefon]</a:t>
+            </a:r>
+          </a:p>
+        </p:txBody>
+      </p:sp>
+      <p:pic>
+        <p:nvPicPr>
+          <p:cNvPr id="10" name="Picture 9" descr="logo.png"/>
+          <p:cNvPicPr>
+            <a:picLocks noChangeAspect="1"/>
+          </p:cNvPicPr>
+          <p:nvPr/>
+        </p:nvPicPr>
+        <p:blipFill>
+          <a:blip r:embed="rId3"/>
+          <a:stretch>
+            <a:fillRect/>
+          </a:stretch>
+        </p:blipFill>
+        <p:spPr>
+          <a:xfrm>
+            <a:off x="635000" y="6438900"/>
+            <a:ext cx="1079500" cy="254000"/>
+          </a:xfrm>
+          <a:prstGeom prst="rect">
+            <a:avLst/>
+          </a:prstGeom>
+        </p:spPr>
+      </p:pic>
+    </p:spTree>
+  </p:cSld>
+  <p:clrMapOvr>
+    <a:masterClrMapping/>
+  </p:clrMapOvr>
+</p:sld>
+</file>
+
+<file path=ppt/slides/slide14.xml><?xml version="1.0" encoding="utf-8"?>
+<p:sld xmlns:a="http://schemas.openxmlformats.org/drawingml/2006/main" xmlns:p="http://schemas.openxmlformats.org/presentationml/2006/main" xmlns:r="http://schemas.openxmlformats.org/officeDocument/2006/relationships">
+  <p:cSld>
+    <p:spTree>
+      <p:nvGrpSpPr>
+        <p:cNvPr id="1" name=""/>
+        <p:cNvGrpSpPr/>
+        <p:nvPr/>
+      </p:nvGrpSpPr>
+      <p:grpSpPr/>
+      <p:pic>
+        <p:nvPicPr>
+          <p:cNvPr id="2" name="Picture 1" descr="image.png"/>
+          <p:cNvPicPr>
+            <a:picLocks noChangeAspect="1"/>
+          </p:cNvPicPr>
+          <p:nvPr/>
+        </p:nvPicPr>
+        <p:blipFill>
+          <a:blip r:embed="rId2"/>
+          <a:stretch>
+            <a:fillRect/>
+          </a:stretch>
+        </p:blipFill>
+        <p:spPr>
+          <a:xfrm>
+            <a:off x="0" y="0"/>
+            <a:ext cx="12192000" cy="6858000"/>
+          </a:xfrm>
+          <a:prstGeom prst="rect">
+            <a:avLst/>
+          </a:prstGeom>
+        </p:spPr>
+      </p:pic>
+      <p:sp>
+        <p:nvSpPr>
+          <p:cNvPr id="3" name="TextBox 2"/>
+          <p:cNvSpPr txBox="1"/>
+          <p:nvPr/>
+        </p:nvSpPr>
+        <p:spPr>
+          <a:xfrm>
+            <a:off x="698500" y="571500"/>
+            <a:ext cx="9906000" cy="393700"/>
+          </a:xfrm>
+          <a:prstGeom prst="rect">
+            <a:avLst/>
+          </a:prstGeom>
+          <a:noFill/>
+        </p:spPr>
+        <p:txBody>
+          <a:bodyPr wrap="square" lIns="0" rIns="0" tIns="0" bIns="0" anchor="ctr">
+            <a:spAutoFit/>
+          </a:bodyPr>
+          <a:lstStyle/>
+          <a:p>
+            <a:pPr algn="l"/>
+            <a:r>
+              <a:rPr sz="2700" b="1">
+                <a:solidFill>
+                  <a:srgbClr val="ECECEE"/>
+                </a:solidFill>
+                <a:latin typeface="Poppins"/>
+              </a:rPr>
+              <a:t>Further questions.</a:t>
+            </a:r>
+            <a:r>
+              <a:rPr sz="2700" b="0">
+                <a:solidFill>
+                  <a:srgbClr val="9A9AA2"/>
+                </a:solidFill>
+                <a:latin typeface="Poppins"/>
+              </a:rPr>
+              <a:t> </a:t>
+            </a:r>
+          </a:p>
+        </p:txBody>
+      </p:sp>
+      <p:sp>
+        <p:nvSpPr>
+          <p:cNvPr id="4" name="TextBox 3"/>
+          <p:cNvSpPr txBox="1"/>
+          <p:nvPr/>
+        </p:nvSpPr>
+        <p:spPr>
+          <a:xfrm>
+            <a:off x="8312150" y="622300"/>
+            <a:ext cx="3175000" cy="152400"/>
+          </a:xfrm>
+          <a:prstGeom prst="rect">
+            <a:avLst/>
+          </a:prstGeom>
+          <a:noFill/>
+        </p:spPr>
+        <p:txBody>
+          <a:bodyPr wrap="square" lIns="0" rIns="0" tIns="0" bIns="0" anchor="ctr">
+            <a:spAutoFit/>
+          </a:bodyPr>
+          <a:lstStyle/>
+          <a:p>
+            <a:pPr algn="r"/>
+            <a:r>
+              <a:rPr sz="1100" b="0" spc="120">
+                <a:solidFill>
+                  <a:srgbClr val="9A9AA2"/>
+                </a:solidFill>
+                <a:latin typeface="Courier New"/>
+              </a:rPr>
+              <a:t>09 — Appendix</a:t>
             </a:r>
           </a:p>
         </p:txBody>
@@ -9103,7 +11512,7 @@
                 </a:solidFill>
                 <a:latin typeface="Courier New"/>
               </a:rPr>
-              <a:t>05 — The moat</a:t>
+              <a:t>06 — The moat</a:t>
             </a:r>
           </a:p>
         </p:txBody>

--- a/deck/Pitch_Deck_AthenaRun_v2.pptx
+++ b/deck/Pitch_Deck_AthenaRun_v2.pptx
@@ -4379,7 +4379,7 @@
                 </a:solidFill>
                 <a:latin typeface="Poppins"/>
               </a:rPr>
-              <a:t> Six phases, eight stages, one chain.</a:t>
+              <a:t> Every phase has an agent.</a:t>
             </a:r>
           </a:p>
         </p:txBody>
@@ -4519,8 +4519,8 @@
         </p:nvSpPr>
         <p:spPr>
           <a:xfrm rot="1800000">
-            <a:off x="3987800" y="3136900"/>
-            <a:ext cx="1073150" cy="6350"/>
+            <a:off x="3841750" y="3098800"/>
+            <a:ext cx="1365250" cy="6350"/>
           </a:xfrm>
           <a:prstGeom prst="rect">
             <a:avLst/>
@@ -4563,8 +4563,8 @@
         </p:nvSpPr>
         <p:spPr>
           <a:xfrm rot="7200000">
-            <a:off x="4711700" y="3225800"/>
-            <a:ext cx="76200" cy="76200"/>
+            <a:off x="4787900" y="3232150"/>
+            <a:ext cx="88900" cy="88900"/>
           </a:xfrm>
           <a:prstGeom prst="triangle">
             <a:avLst/>
@@ -4607,8 +4607,8 @@
         </p:nvSpPr>
         <p:spPr>
           <a:xfrm>
-            <a:off x="4483100" y="3092450"/>
-            <a:ext cx="88900" cy="88900"/>
+            <a:off x="4476750" y="3048000"/>
+            <a:ext cx="101600" cy="101600"/>
           </a:xfrm>
           <a:prstGeom prst="diamond">
             <a:avLst/>
@@ -4651,8 +4651,8 @@
         </p:nvSpPr>
         <p:spPr>
           <a:xfrm rot="5400000">
-            <a:off x="4457700" y="3943350"/>
-            <a:ext cx="1079500" cy="6350"/>
+            <a:off x="4432300" y="4121150"/>
+            <a:ext cx="1365250" cy="6350"/>
           </a:xfrm>
           <a:prstGeom prst="rect">
             <a:avLst/>
@@ -4695,8 +4695,8 @@
         </p:nvSpPr>
         <p:spPr>
           <a:xfrm rot="10800000">
-            <a:off x="4959350" y="4165600"/>
-            <a:ext cx="76200" cy="76200"/>
+            <a:off x="5073650" y="4432300"/>
+            <a:ext cx="88900" cy="88900"/>
           </a:xfrm>
           <a:prstGeom prst="triangle">
             <a:avLst/>
@@ -4739,8 +4739,8 @@
         </p:nvSpPr>
         <p:spPr>
           <a:xfrm>
-            <a:off x="4953000" y="3905250"/>
-            <a:ext cx="88900" cy="88900"/>
+            <a:off x="5067300" y="4076700"/>
+            <a:ext cx="101600" cy="101600"/>
           </a:xfrm>
           <a:prstGeom prst="diamond">
             <a:avLst/>
@@ -4783,8 +4783,8 @@
         </p:nvSpPr>
         <p:spPr>
           <a:xfrm rot="9000000">
-            <a:off x="3987800" y="4756150"/>
-            <a:ext cx="1073150" cy="6350"/>
+            <a:off x="3841750" y="5143500"/>
+            <a:ext cx="1365250" cy="6350"/>
           </a:xfrm>
           <a:prstGeom prst="rect">
             <a:avLst/>
@@ -4827,8 +4827,8 @@
         </p:nvSpPr>
         <p:spPr>
           <a:xfrm rot="14400000">
-            <a:off x="4267200" y="4845050"/>
-            <a:ext cx="76200" cy="76200"/>
+            <a:off x="4171950" y="5283200"/>
+            <a:ext cx="88900" cy="88900"/>
           </a:xfrm>
           <a:prstGeom prst="triangle">
             <a:avLst/>
@@ -4871,8 +4871,8 @@
         </p:nvSpPr>
         <p:spPr>
           <a:xfrm>
-            <a:off x="4483100" y="4711700"/>
-            <a:ext cx="88900" cy="88900"/>
+            <a:off x="4476750" y="5099050"/>
+            <a:ext cx="101600" cy="101600"/>
           </a:xfrm>
           <a:prstGeom prst="diamond">
             <a:avLst/>
@@ -4915,8 +4915,8 @@
         </p:nvSpPr>
         <p:spPr>
           <a:xfrm rot="12600000">
-            <a:off x="3054350" y="4756150"/>
-            <a:ext cx="1079500" cy="6350"/>
+            <a:off x="2660650" y="5143500"/>
+            <a:ext cx="1365250" cy="6350"/>
           </a:xfrm>
           <a:prstGeom prst="rect">
             <a:avLst/>
@@ -4959,8 +4959,8 @@
         </p:nvSpPr>
         <p:spPr>
           <a:xfrm rot="18000000">
-            <a:off x="3333750" y="4591050"/>
-            <a:ext cx="76200" cy="76200"/>
+            <a:off x="2990850" y="4927600"/>
+            <a:ext cx="88900" cy="88900"/>
           </a:xfrm>
           <a:prstGeom prst="triangle">
             <a:avLst/>
@@ -5003,8 +5003,8 @@
         </p:nvSpPr>
         <p:spPr>
           <a:xfrm>
-            <a:off x="3549650" y="4711700"/>
-            <a:ext cx="88900" cy="88900"/>
+            <a:off x="3289300" y="5099050"/>
+            <a:ext cx="101600" cy="101600"/>
           </a:xfrm>
           <a:prstGeom prst="diamond">
             <a:avLst/>
@@ -5047,8 +5047,8 @@
         </p:nvSpPr>
         <p:spPr>
           <a:xfrm rot="16200000">
-            <a:off x="2584450" y="3943350"/>
-            <a:ext cx="1079500" cy="6350"/>
+            <a:off x="2070100" y="4121150"/>
+            <a:ext cx="1365250" cy="6350"/>
           </a:xfrm>
           <a:prstGeom prst="rect">
             <a:avLst/>
@@ -5090,9 +5090,9 @@
           <p:nvPr/>
         </p:nvSpPr>
         <p:spPr>
-          <a:xfrm rot="0">
-            <a:off x="3086100" y="3651250"/>
-            <a:ext cx="76200" cy="76200"/>
+          <a:xfrm>
+            <a:off x="2705100" y="3727450"/>
+            <a:ext cx="88900" cy="88900"/>
           </a:xfrm>
           <a:prstGeom prst="triangle">
             <a:avLst/>
@@ -5135,8 +5135,8 @@
         </p:nvSpPr>
         <p:spPr>
           <a:xfrm>
-            <a:off x="3079750" y="3905250"/>
-            <a:ext cx="88900" cy="88900"/>
+            <a:off x="2698750" y="4076700"/>
+            <a:ext cx="101600" cy="101600"/>
           </a:xfrm>
           <a:prstGeom prst="diamond">
             <a:avLst/>
@@ -5179,8 +5179,8 @@
         </p:nvSpPr>
         <p:spPr>
           <a:xfrm rot="19800000">
-            <a:off x="3054350" y="3136900"/>
-            <a:ext cx="1073150" cy="6350"/>
+            <a:off x="2660650" y="3098800"/>
+            <a:ext cx="1365250" cy="6350"/>
           </a:xfrm>
           <a:prstGeom prst="rect">
             <a:avLst/>
@@ -5223,8 +5223,8 @@
         </p:nvSpPr>
         <p:spPr>
           <a:xfrm rot="3600000">
-            <a:off x="3778250" y="2971800"/>
-            <a:ext cx="76200" cy="76200"/>
+            <a:off x="3606800" y="2876550"/>
+            <a:ext cx="88900" cy="88900"/>
           </a:xfrm>
           <a:prstGeom prst="triangle">
             <a:avLst/>
@@ -5267,8 +5267,8 @@
         </p:nvSpPr>
         <p:spPr>
           <a:xfrm>
-            <a:off x="3549650" y="3092450"/>
-            <a:ext cx="88900" cy="88900"/>
+            <a:off x="3289300" y="3048000"/>
+            <a:ext cx="101600" cy="101600"/>
           </a:xfrm>
           <a:prstGeom prst="diamond">
             <a:avLst/>
@@ -5311,8 +5311,8 @@
         </p:nvSpPr>
         <p:spPr>
           <a:xfrm>
-            <a:off x="3835400" y="2641600"/>
-            <a:ext cx="457200" cy="457200"/>
+            <a:off x="3657600" y="2482850"/>
+            <a:ext cx="558800" cy="558800"/>
           </a:xfrm>
           <a:prstGeom prst="ellipse">
             <a:avLst/>
@@ -5357,8 +5357,8 @@
         </p:nvSpPr>
         <p:spPr>
           <a:xfrm>
-            <a:off x="3810000" y="2774950"/>
-            <a:ext cx="508000" cy="190500"/>
+            <a:off x="3683000" y="2660650"/>
+            <a:ext cx="508000" cy="203200"/>
           </a:xfrm>
           <a:prstGeom prst="rect">
             <a:avLst/>
@@ -5373,7 +5373,7 @@
           <a:p>
             <a:pPr algn="ctr"/>
             <a:r>
-              <a:rPr sz="1300" b="0" spc="80">
+              <a:rPr sz="1400" b="0" spc="80">
                 <a:solidFill>
                   <a:srgbClr val="9A9AA2"/>
                 </a:solidFill>
@@ -5392,8 +5392,8 @@
         </p:nvSpPr>
         <p:spPr>
           <a:xfrm>
-            <a:off x="4768850" y="3181350"/>
-            <a:ext cx="457200" cy="457200"/>
+            <a:off x="4838700" y="3162300"/>
+            <a:ext cx="558800" cy="558800"/>
           </a:xfrm>
           <a:prstGeom prst="ellipse">
             <a:avLst/>
@@ -5438,8 +5438,8 @@
         </p:nvSpPr>
         <p:spPr>
           <a:xfrm>
-            <a:off x="4743450" y="3314700"/>
-            <a:ext cx="508000" cy="190500"/>
+            <a:off x="4864100" y="3340100"/>
+            <a:ext cx="508000" cy="203200"/>
           </a:xfrm>
           <a:prstGeom prst="rect">
             <a:avLst/>
@@ -5454,7 +5454,7 @@
           <a:p>
             <a:pPr algn="ctr"/>
             <a:r>
-              <a:rPr sz="1300" b="0" spc="80">
+              <a:rPr sz="1400" b="0" spc="80">
                 <a:solidFill>
                   <a:srgbClr val="9A9AA2"/>
                 </a:solidFill>
@@ -5473,8 +5473,8 @@
         </p:nvSpPr>
         <p:spPr>
           <a:xfrm>
-            <a:off x="4768850" y="4260850"/>
-            <a:ext cx="457200" cy="457200"/>
+            <a:off x="4838700" y="4527550"/>
+            <a:ext cx="558800" cy="558800"/>
           </a:xfrm>
           <a:prstGeom prst="ellipse">
             <a:avLst/>
@@ -5519,8 +5519,8 @@
         </p:nvSpPr>
         <p:spPr>
           <a:xfrm>
-            <a:off x="4743450" y="4394200"/>
-            <a:ext cx="508000" cy="190500"/>
+            <a:off x="4864100" y="4705350"/>
+            <a:ext cx="508000" cy="203200"/>
           </a:xfrm>
           <a:prstGeom prst="rect">
             <a:avLst/>
@@ -5535,7 +5535,7 @@
           <a:p>
             <a:pPr algn="ctr"/>
             <a:r>
-              <a:rPr sz="1300" b="0" spc="80">
+              <a:rPr sz="1400" b="0" spc="80">
                 <a:solidFill>
                   <a:srgbClr val="9A9AA2"/>
                 </a:solidFill>
@@ -5554,8 +5554,8 @@
         </p:nvSpPr>
         <p:spPr>
           <a:xfrm>
-            <a:off x="3835400" y="4800600"/>
-            <a:ext cx="457200" cy="457200"/>
+            <a:off x="3657600" y="5213350"/>
+            <a:ext cx="558800" cy="558800"/>
           </a:xfrm>
           <a:prstGeom prst="ellipse">
             <a:avLst/>
@@ -5600,8 +5600,8 @@
         </p:nvSpPr>
         <p:spPr>
           <a:xfrm>
-            <a:off x="3810000" y="4933950"/>
-            <a:ext cx="508000" cy="190500"/>
+            <a:off x="3683000" y="5391150"/>
+            <a:ext cx="508000" cy="203200"/>
           </a:xfrm>
           <a:prstGeom prst="rect">
             <a:avLst/>
@@ -5616,7 +5616,7 @@
           <a:p>
             <a:pPr algn="ctr"/>
             <a:r>
-              <a:rPr sz="1300" b="0" spc="80">
+              <a:rPr sz="1400" b="0" spc="80">
                 <a:solidFill>
                   <a:srgbClr val="9A9AA2"/>
                 </a:solidFill>
@@ -5635,8 +5635,8 @@
         </p:nvSpPr>
         <p:spPr>
           <a:xfrm>
-            <a:off x="2895600" y="4260850"/>
-            <a:ext cx="457200" cy="457200"/>
+            <a:off x="2470150" y="4527550"/>
+            <a:ext cx="558800" cy="558800"/>
           </a:xfrm>
           <a:prstGeom prst="ellipse">
             <a:avLst/>
@@ -5681,8 +5681,8 @@
         </p:nvSpPr>
         <p:spPr>
           <a:xfrm>
-            <a:off x="2870200" y="4394200"/>
-            <a:ext cx="508000" cy="190500"/>
+            <a:off x="2495550" y="4705350"/>
+            <a:ext cx="508000" cy="203200"/>
           </a:xfrm>
           <a:prstGeom prst="rect">
             <a:avLst/>
@@ -5697,7 +5697,7 @@
           <a:p>
             <a:pPr algn="ctr"/>
             <a:r>
-              <a:rPr sz="1300" b="0" spc="80">
+              <a:rPr sz="1400" b="0" spc="80">
                 <a:solidFill>
                   <a:srgbClr val="9A9AA2"/>
                 </a:solidFill>
@@ -5716,8 +5716,8 @@
         </p:nvSpPr>
         <p:spPr>
           <a:xfrm>
-            <a:off x="2895600" y="3181350"/>
-            <a:ext cx="457200" cy="457200"/>
+            <a:off x="2470150" y="3162300"/>
+            <a:ext cx="558800" cy="558800"/>
           </a:xfrm>
           <a:prstGeom prst="ellipse">
             <a:avLst/>
@@ -5762,8 +5762,8 @@
         </p:nvSpPr>
         <p:spPr>
           <a:xfrm>
-            <a:off x="2870200" y="3314700"/>
-            <a:ext cx="508000" cy="190500"/>
+            <a:off x="2495550" y="3340100"/>
+            <a:ext cx="508000" cy="203200"/>
           </a:xfrm>
           <a:prstGeom prst="rect">
             <a:avLst/>
@@ -5778,7 +5778,7 @@
           <a:p>
             <a:pPr algn="ctr"/>
             <a:r>
-              <a:rPr sz="1300" b="0" spc="80">
+              <a:rPr sz="1400" b="0" spc="80">
                 <a:solidFill>
                   <a:srgbClr val="9A9AA2"/>
                 </a:solidFill>
@@ -5797,8 +5797,8 @@
         </p:nvSpPr>
         <p:spPr>
           <a:xfrm>
-            <a:off x="2984500" y="2349500"/>
-            <a:ext cx="2159000" cy="203200"/>
+            <a:off x="2667000" y="2178050"/>
+            <a:ext cx="2540000" cy="215900"/>
           </a:xfrm>
           <a:prstGeom prst="rect">
             <a:avLst/>
@@ -5813,7 +5813,7 @@
           <a:p>
             <a:pPr algn="ctr"/>
             <a:r>
-              <a:rPr sz="1700" b="0">
+              <a:rPr sz="1800" b="0">
                 <a:solidFill>
                   <a:srgbClr val="ECECEE"/>
                 </a:solidFill>
@@ -5832,8 +5832,8 @@
         </p:nvSpPr>
         <p:spPr>
           <a:xfrm>
-            <a:off x="5340350" y="3308350"/>
-            <a:ext cx="1905000" cy="203200"/>
+            <a:off x="5537200" y="3333750"/>
+            <a:ext cx="2032000" cy="215900"/>
           </a:xfrm>
           <a:prstGeom prst="rect">
             <a:avLst/>
@@ -5848,7 +5848,7 @@
           <a:p>
             <a:pPr algn="l"/>
             <a:r>
-              <a:rPr sz="1700" b="0">
+              <a:rPr sz="1800" b="0">
                 <a:solidFill>
                   <a:srgbClr val="ECECEE"/>
                 </a:solidFill>
@@ -5867,8 +5867,8 @@
         </p:nvSpPr>
         <p:spPr>
           <a:xfrm>
-            <a:off x="5340350" y="4387850"/>
-            <a:ext cx="1905000" cy="203200"/>
+            <a:off x="5537200" y="4699000"/>
+            <a:ext cx="2032000" cy="215900"/>
           </a:xfrm>
           <a:prstGeom prst="rect">
             <a:avLst/>
@@ -5883,7 +5883,7 @@
           <a:p>
             <a:pPr algn="l"/>
             <a:r>
-              <a:rPr sz="1700" b="0">
+              <a:rPr sz="1800" b="0">
                 <a:solidFill>
                   <a:srgbClr val="ECECEE"/>
                 </a:solidFill>
@@ -5902,8 +5902,8 @@
         </p:nvSpPr>
         <p:spPr>
           <a:xfrm>
-            <a:off x="2984500" y="5359400"/>
-            <a:ext cx="2159000" cy="203200"/>
+            <a:off x="2667000" y="5873750"/>
+            <a:ext cx="2540000" cy="215900"/>
           </a:xfrm>
           <a:prstGeom prst="rect">
             <a:avLst/>
@@ -5918,7 +5918,7 @@
           <a:p>
             <a:pPr algn="ctr"/>
             <a:r>
-              <a:rPr sz="1700" b="0">
+              <a:rPr sz="1800" b="0">
                 <a:solidFill>
                   <a:srgbClr val="ECECEE"/>
                 </a:solidFill>
@@ -5937,8 +5937,8 @@
         </p:nvSpPr>
         <p:spPr>
           <a:xfrm>
-            <a:off x="876300" y="4387850"/>
-            <a:ext cx="1905000" cy="203200"/>
+            <a:off x="298450" y="4699000"/>
+            <a:ext cx="2032000" cy="215900"/>
           </a:xfrm>
           <a:prstGeom prst="rect">
             <a:avLst/>
@@ -5953,7 +5953,7 @@
           <a:p>
             <a:pPr algn="r"/>
             <a:r>
-              <a:rPr sz="1700" b="0">
+              <a:rPr sz="1800" b="0">
                 <a:solidFill>
                   <a:srgbClr val="ECECEE"/>
                 </a:solidFill>
@@ -5972,8 +5972,8 @@
         </p:nvSpPr>
         <p:spPr>
           <a:xfrm>
-            <a:off x="876300" y="3308350"/>
-            <a:ext cx="1905000" cy="203200"/>
+            <a:off x="298450" y="3333750"/>
+            <a:ext cx="2032000" cy="215900"/>
           </a:xfrm>
           <a:prstGeom prst="rect">
             <a:avLst/>
@@ -5988,7 +5988,7 @@
           <a:p>
             <a:pPr algn="r"/>
             <a:r>
-              <a:rPr sz="1700" b="0">
+              <a:rPr sz="1800" b="0">
                 <a:solidFill>
                   <a:srgbClr val="ECECEE"/>
                 </a:solidFill>
@@ -6007,8 +6007,8 @@
         </p:nvSpPr>
         <p:spPr>
           <a:xfrm>
-            <a:off x="3048000" y="3784600"/>
-            <a:ext cx="2032000" cy="152400"/>
+            <a:off x="2667000" y="3937000"/>
+            <a:ext cx="2540000" cy="165100"/>
           </a:xfrm>
           <a:prstGeom prst="rect">
             <a:avLst/>
@@ -6023,7 +6023,7 @@
           <a:p>
             <a:pPr algn="ctr"/>
             <a:r>
-              <a:rPr sz="1000" b="0" spc="300">
+              <a:rPr sz="1000" b="0" spc="200">
                 <a:solidFill>
                   <a:srgbClr val="9A9AA2"/>
                 </a:solidFill>
@@ -6042,8 +6042,8 @@
         </p:nvSpPr>
         <p:spPr>
           <a:xfrm>
-            <a:off x="3048000" y="3962400"/>
-            <a:ext cx="2032000" cy="215900"/>
+            <a:off x="2667000" y="4140200"/>
+            <a:ext cx="2540000" cy="241300"/>
           </a:xfrm>
           <a:prstGeom prst="rect">
             <a:avLst/>
@@ -6058,7 +6058,7 @@
           <a:p>
             <a:pPr algn="ctr"/>
             <a:r>
-              <a:rPr sz="1900" b="0">
+              <a:rPr sz="2100" b="0">
                 <a:solidFill>
                   <a:srgbClr val="ECECEE"/>
                 </a:solidFill>
@@ -6071,14 +6071,513 @@
       </p:sp>
       <p:sp>
         <p:nvSpPr>
-          <p:cNvPr id="45" name="Diamond 44"/>
+          <p:cNvPr id="45" name="Rectangle 44"/>
           <p:cNvSpPr/>
           <p:nvPr/>
         </p:nvSpPr>
         <p:spPr>
           <a:xfrm>
-            <a:off x="2508250" y="5924550"/>
-            <a:ext cx="88900" cy="88900"/>
+            <a:off x="6921500" y="2095500"/>
+            <a:ext cx="6350" cy="3810000"/>
+          </a:xfrm>
+          <a:prstGeom prst="rect">
+            <a:avLst/>
+          </a:prstGeom>
+          <a:solidFill>
+            <a:srgbClr val="1F1F22"/>
+          </a:solidFill>
+          <a:ln>
+            <a:noFill/>
+          </a:ln>
+          <a:effectLst/>
+        </p:spPr>
+        <p:style>
+          <a:lnRef idx="1">
+            <a:schemeClr val="accent1"/>
+          </a:lnRef>
+          <a:fillRef idx="3">
+            <a:schemeClr val="accent1"/>
+          </a:fillRef>
+          <a:effectRef idx="2">
+            <a:schemeClr val="accent1"/>
+          </a:effectRef>
+          <a:fontRef idx="minor">
+            <a:schemeClr val="lt1"/>
+          </a:fontRef>
+        </p:style>
+        <p:txBody>
+          <a:bodyPr rtlCol="0" anchor="ctr"/>
+          <a:lstStyle/>
+          <a:p>
+            <a:pPr algn="ctr"/>
+          </a:p>
+        </p:txBody>
+      </p:sp>
+      <p:sp>
+        <p:nvSpPr>
+          <p:cNvPr id="46" name="TextBox 45"/>
+          <p:cNvSpPr txBox="1"/>
+          <p:nvPr/>
+        </p:nvSpPr>
+        <p:spPr>
+          <a:xfrm>
+            <a:off x="7302500" y="2184400"/>
+            <a:ext cx="4445000" cy="165100"/>
+          </a:xfrm>
+          <a:prstGeom prst="rect">
+            <a:avLst/>
+          </a:prstGeom>
+          <a:noFill/>
+        </p:spPr>
+        <p:txBody>
+          <a:bodyPr wrap="square" lIns="0" rIns="0" tIns="0" bIns="0" anchor="ctr">
+            <a:spAutoFit/>
+          </a:bodyPr>
+          <a:lstStyle/>
+          <a:p>
+            <a:pPr algn="l"/>
+            <a:r>
+              <a:rPr sz="1100" b="0" spc="250">
+                <a:solidFill>
+                  <a:srgbClr val="9A9AA2"/>
+                </a:solidFill>
+                <a:latin typeface="Courier New"/>
+              </a:rPr>
+              <a:t>ONE AGENT PER PHASE</a:t>
+            </a:r>
+          </a:p>
+        </p:txBody>
+      </p:sp>
+      <p:sp>
+        <p:nvSpPr>
+          <p:cNvPr id="47" name="TextBox 46"/>
+          <p:cNvSpPr txBox="1"/>
+          <p:nvPr/>
+        </p:nvSpPr>
+        <p:spPr>
+          <a:xfrm>
+            <a:off x="7302500" y="2540000"/>
+            <a:ext cx="4184650" cy="190500"/>
+          </a:xfrm>
+          <a:prstGeom prst="rect">
+            <a:avLst/>
+          </a:prstGeom>
+          <a:noFill/>
+        </p:spPr>
+        <p:txBody>
+          <a:bodyPr wrap="square" lIns="0" rIns="0" tIns="0" bIns="0" anchor="ctr">
+            <a:spAutoFit/>
+          </a:bodyPr>
+          <a:lstStyle/>
+          <a:p>
+            <a:pPr algn="l"/>
+            <a:r>
+              <a:rPr sz="1600" b="0">
+                <a:solidFill>
+                  <a:srgbClr val="ECECEE"/>
+                </a:solidFill>
+                <a:latin typeface="Poppins"/>
+              </a:rPr>
+              <a:t>Planning agent</a:t>
+            </a:r>
+          </a:p>
+        </p:txBody>
+      </p:sp>
+      <p:sp>
+        <p:nvSpPr>
+          <p:cNvPr id="48" name="TextBox 47"/>
+          <p:cNvSpPr txBox="1"/>
+          <p:nvPr/>
+        </p:nvSpPr>
+        <p:spPr>
+          <a:xfrm>
+            <a:off x="7302500" y="2755900"/>
+            <a:ext cx="4184650" cy="190500"/>
+          </a:xfrm>
+          <a:prstGeom prst="rect">
+            <a:avLst/>
+          </a:prstGeom>
+          <a:noFill/>
+        </p:spPr>
+        <p:txBody>
+          <a:bodyPr wrap="square" lIns="0" rIns="0" tIns="0" bIns="0" anchor="ctr">
+            <a:spAutoFit/>
+          </a:bodyPr>
+          <a:lstStyle/>
+          <a:p>
+            <a:pPr algn="l"/>
+            <a:r>
+              <a:rPr sz="1250" b="0">
+                <a:solidFill>
+                  <a:srgbClr val="9A9AA2"/>
+                </a:solidFill>
+                <a:latin typeface="Poppins"/>
+              </a:rPr>
+              <a:t>scope from first conversation, feasibility and fit</a:t>
+            </a:r>
+          </a:p>
+        </p:txBody>
+      </p:sp>
+      <p:sp>
+        <p:nvSpPr>
+          <p:cNvPr id="49" name="TextBox 48"/>
+          <p:cNvSpPr txBox="1"/>
+          <p:nvPr/>
+        </p:nvSpPr>
+        <p:spPr>
+          <a:xfrm>
+            <a:off x="7302500" y="3098800"/>
+            <a:ext cx="4184650" cy="190500"/>
+          </a:xfrm>
+          <a:prstGeom prst="rect">
+            <a:avLst/>
+          </a:prstGeom>
+          <a:noFill/>
+        </p:spPr>
+        <p:txBody>
+          <a:bodyPr wrap="square" lIns="0" rIns="0" tIns="0" bIns="0" anchor="ctr">
+            <a:spAutoFit/>
+          </a:bodyPr>
+          <a:lstStyle/>
+          <a:p>
+            <a:pPr algn="l"/>
+            <a:r>
+              <a:rPr sz="1600" b="0">
+                <a:solidFill>
+                  <a:srgbClr val="ECECEE"/>
+                </a:solidFill>
+                <a:latin typeface="Poppins"/>
+              </a:rPr>
+              <a:t>Analysis agent</a:t>
+            </a:r>
+          </a:p>
+        </p:txBody>
+      </p:sp>
+      <p:sp>
+        <p:nvSpPr>
+          <p:cNvPr id="50" name="TextBox 49"/>
+          <p:cNvSpPr txBox="1"/>
+          <p:nvPr/>
+        </p:nvSpPr>
+        <p:spPr>
+          <a:xfrm>
+            <a:off x="7302500" y="3314700"/>
+            <a:ext cx="4184650" cy="190500"/>
+          </a:xfrm>
+          <a:prstGeom prst="rect">
+            <a:avLst/>
+          </a:prstGeom>
+          <a:noFill/>
+        </p:spPr>
+        <p:txBody>
+          <a:bodyPr wrap="square" lIns="0" rIns="0" tIns="0" bIns="0" anchor="ctr">
+            <a:spAutoFit/>
+          </a:bodyPr>
+          <a:lstStyle/>
+          <a:p>
+            <a:pPr algn="l"/>
+            <a:r>
+              <a:rPr sz="1250" b="0">
+                <a:solidFill>
+                  <a:srgbClr val="9A9AA2"/>
+                </a:solidFill>
+                <a:latin typeface="Poppins"/>
+              </a:rPr>
+              <a:t>cited, deep research into the requirements</a:t>
+            </a:r>
+          </a:p>
+        </p:txBody>
+      </p:sp>
+      <p:sp>
+        <p:nvSpPr>
+          <p:cNvPr id="51" name="TextBox 50"/>
+          <p:cNvSpPr txBox="1"/>
+          <p:nvPr/>
+        </p:nvSpPr>
+        <p:spPr>
+          <a:xfrm>
+            <a:off x="7302500" y="3657600"/>
+            <a:ext cx="4184650" cy="190500"/>
+          </a:xfrm>
+          <a:prstGeom prst="rect">
+            <a:avLst/>
+          </a:prstGeom>
+          <a:noFill/>
+        </p:spPr>
+        <p:txBody>
+          <a:bodyPr wrap="square" lIns="0" rIns="0" tIns="0" bIns="0" anchor="ctr">
+            <a:spAutoFit/>
+          </a:bodyPr>
+          <a:lstStyle/>
+          <a:p>
+            <a:pPr algn="l"/>
+            <a:r>
+              <a:rPr sz="1600" b="0">
+                <a:solidFill>
+                  <a:srgbClr val="ECECEE"/>
+                </a:solidFill>
+                <a:latin typeface="Poppins"/>
+              </a:rPr>
+              <a:t>Design agent</a:t>
+            </a:r>
+          </a:p>
+        </p:txBody>
+      </p:sp>
+      <p:sp>
+        <p:nvSpPr>
+          <p:cNvPr id="52" name="TextBox 51"/>
+          <p:cNvSpPr txBox="1"/>
+          <p:nvPr/>
+        </p:nvSpPr>
+        <p:spPr>
+          <a:xfrm>
+            <a:off x="7302500" y="3873500"/>
+            <a:ext cx="4184650" cy="190500"/>
+          </a:xfrm>
+          <a:prstGeom prst="rect">
+            <a:avLst/>
+          </a:prstGeom>
+          <a:noFill/>
+        </p:spPr>
+        <p:txBody>
+          <a:bodyPr wrap="square" lIns="0" rIns="0" tIns="0" bIns="0" anchor="ctr">
+            <a:spAutoFit/>
+          </a:bodyPr>
+          <a:lstStyle/>
+          <a:p>
+            <a:pPr algn="l"/>
+            <a:r>
+              <a:rPr sz="1250" b="0">
+                <a:solidFill>
+                  <a:srgbClr val="9A9AA2"/>
+                </a:solidFill>
+                <a:latin typeface="Poppins"/>
+              </a:rPr>
+              <a:t>architecture, checked at the compliance gate</a:t>
+            </a:r>
+          </a:p>
+        </p:txBody>
+      </p:sp>
+      <p:sp>
+        <p:nvSpPr>
+          <p:cNvPr id="53" name="TextBox 52"/>
+          <p:cNvSpPr txBox="1"/>
+          <p:nvPr/>
+        </p:nvSpPr>
+        <p:spPr>
+          <a:xfrm>
+            <a:off x="7302500" y="4216400"/>
+            <a:ext cx="4184650" cy="190500"/>
+          </a:xfrm>
+          <a:prstGeom prst="rect">
+            <a:avLst/>
+          </a:prstGeom>
+          <a:noFill/>
+        </p:spPr>
+        <p:txBody>
+          <a:bodyPr wrap="square" lIns="0" rIns="0" tIns="0" bIns="0" anchor="ctr">
+            <a:spAutoFit/>
+          </a:bodyPr>
+          <a:lstStyle/>
+          <a:p>
+            <a:pPr algn="l"/>
+            <a:r>
+              <a:rPr sz="1600" b="0">
+                <a:solidFill>
+                  <a:srgbClr val="ECECEE"/>
+                </a:solidFill>
+                <a:latin typeface="Poppins"/>
+              </a:rPr>
+              <a:t>Build agent</a:t>
+            </a:r>
+          </a:p>
+        </p:txBody>
+      </p:sp>
+      <p:sp>
+        <p:nvSpPr>
+          <p:cNvPr id="54" name="TextBox 53"/>
+          <p:cNvSpPr txBox="1"/>
+          <p:nvPr/>
+        </p:nvSpPr>
+        <p:spPr>
+          <a:xfrm>
+            <a:off x="7302500" y="4432300"/>
+            <a:ext cx="4184650" cy="190500"/>
+          </a:xfrm>
+          <a:prstGeom prst="rect">
+            <a:avLst/>
+          </a:prstGeom>
+          <a:noFill/>
+        </p:spPr>
+        <p:txBody>
+          <a:bodyPr wrap="square" lIns="0" rIns="0" tIns="0" bIns="0" anchor="ctr">
+            <a:spAutoFit/>
+          </a:bodyPr>
+          <a:lstStyle/>
+          <a:p>
+            <a:pPr algn="l"/>
+            <a:r>
+              <a:rPr sz="1250" b="0">
+                <a:solidFill>
+                  <a:srgbClr val="9A9AA2"/>
+                </a:solidFill>
+                <a:latin typeface="Poppins"/>
+              </a:rPr>
+              <a:t>implementation with code review</a:t>
+            </a:r>
+          </a:p>
+        </p:txBody>
+      </p:sp>
+      <p:sp>
+        <p:nvSpPr>
+          <p:cNvPr id="55" name="TextBox 54"/>
+          <p:cNvSpPr txBox="1"/>
+          <p:nvPr/>
+        </p:nvSpPr>
+        <p:spPr>
+          <a:xfrm>
+            <a:off x="7302500" y="4775200"/>
+            <a:ext cx="4184650" cy="190500"/>
+          </a:xfrm>
+          <a:prstGeom prst="rect">
+            <a:avLst/>
+          </a:prstGeom>
+          <a:noFill/>
+        </p:spPr>
+        <p:txBody>
+          <a:bodyPr wrap="square" lIns="0" rIns="0" tIns="0" bIns="0" anchor="ctr">
+            <a:spAutoFit/>
+          </a:bodyPr>
+          <a:lstStyle/>
+          <a:p>
+            <a:pPr algn="l"/>
+            <a:r>
+              <a:rPr sz="1600" b="0">
+                <a:solidFill>
+                  <a:srgbClr val="ECECEE"/>
+                </a:solidFill>
+                <a:latin typeface="Poppins"/>
+              </a:rPr>
+              <a:t>Test agent</a:t>
+            </a:r>
+          </a:p>
+        </p:txBody>
+      </p:sp>
+      <p:sp>
+        <p:nvSpPr>
+          <p:cNvPr id="56" name="TextBox 55"/>
+          <p:cNvSpPr txBox="1"/>
+          <p:nvPr/>
+        </p:nvSpPr>
+        <p:spPr>
+          <a:xfrm>
+            <a:off x="7302500" y="4991100"/>
+            <a:ext cx="4184650" cy="190500"/>
+          </a:xfrm>
+          <a:prstGeom prst="rect">
+            <a:avLst/>
+          </a:prstGeom>
+          <a:noFill/>
+        </p:spPr>
+        <p:txBody>
+          <a:bodyPr wrap="square" lIns="0" rIns="0" tIns="0" bIns="0" anchor="ctr">
+            <a:spAutoFit/>
+          </a:bodyPr>
+          <a:lstStyle/>
+          <a:p>
+            <a:pPr algn="l"/>
+            <a:r>
+              <a:rPr sz="1250" b="0">
+                <a:solidFill>
+                  <a:srgbClr val="9A9AA2"/>
+                </a:solidFill>
+                <a:latin typeface="Poppins"/>
+              </a:rPr>
+              <a:t>verification before the release approval</a:t>
+            </a:r>
+          </a:p>
+        </p:txBody>
+      </p:sp>
+      <p:sp>
+        <p:nvSpPr>
+          <p:cNvPr id="57" name="TextBox 56"/>
+          <p:cNvSpPr txBox="1"/>
+          <p:nvPr/>
+        </p:nvSpPr>
+        <p:spPr>
+          <a:xfrm>
+            <a:off x="7302500" y="5334000"/>
+            <a:ext cx="4184650" cy="190500"/>
+          </a:xfrm>
+          <a:prstGeom prst="rect">
+            <a:avLst/>
+          </a:prstGeom>
+          <a:noFill/>
+        </p:spPr>
+        <p:txBody>
+          <a:bodyPr wrap="square" lIns="0" rIns="0" tIns="0" bIns="0" anchor="ctr">
+            <a:spAutoFit/>
+          </a:bodyPr>
+          <a:lstStyle/>
+          <a:p>
+            <a:pPr algn="l"/>
+            <a:r>
+              <a:rPr sz="1600" b="0">
+                <a:solidFill>
+                  <a:srgbClr val="ECECEE"/>
+                </a:solidFill>
+                <a:latin typeface="Poppins"/>
+              </a:rPr>
+              <a:t>Operations agent</a:t>
+            </a:r>
+          </a:p>
+        </p:txBody>
+      </p:sp>
+      <p:sp>
+        <p:nvSpPr>
+          <p:cNvPr id="58" name="TextBox 57"/>
+          <p:cNvSpPr txBox="1"/>
+          <p:nvPr/>
+        </p:nvSpPr>
+        <p:spPr>
+          <a:xfrm>
+            <a:off x="7302500" y="5549900"/>
+            <a:ext cx="4184650" cy="190500"/>
+          </a:xfrm>
+          <a:prstGeom prst="rect">
+            <a:avLst/>
+          </a:prstGeom>
+          <a:noFill/>
+        </p:spPr>
+        <p:txBody>
+          <a:bodyPr wrap="square" lIns="0" rIns="0" tIns="0" bIns="0" anchor="ctr">
+            <a:spAutoFit/>
+          </a:bodyPr>
+          <a:lstStyle/>
+          <a:p>
+            <a:pPr algn="l"/>
+            <a:r>
+              <a:rPr sz="1250" b="0">
+                <a:solidFill>
+                  <a:srgbClr val="9A9AA2"/>
+                </a:solidFill>
+                <a:latin typeface="Poppins"/>
+              </a:rPr>
+              <a:t>monitoring, patterns back to the library</a:t>
+            </a:r>
+          </a:p>
+        </p:txBody>
+      </p:sp>
+      <p:sp>
+        <p:nvSpPr>
+          <p:cNvPr id="59" name="Diamond 58"/>
+          <p:cNvSpPr/>
+          <p:nvPr/>
+        </p:nvSpPr>
+        <p:spPr>
+          <a:xfrm>
+            <a:off x="7296150" y="5956300"/>
+            <a:ext cx="101600" cy="101600"/>
           </a:xfrm>
           <a:prstGeom prst="diamond">
             <a:avLst/>
@@ -6115,14 +6614,14 @@
       </p:sp>
       <p:sp>
         <p:nvSpPr>
-          <p:cNvPr id="46" name="TextBox 45"/>
-          <p:cNvSpPr txBox="1"/>
-          <p:nvPr/>
-        </p:nvSpPr>
-        <p:spPr>
-          <a:xfrm>
-            <a:off x="2679700" y="5892800"/>
-            <a:ext cx="3810000" cy="165100"/>
+          <p:cNvPr id="60" name="TextBox 59"/>
+          <p:cNvSpPr txBox="1"/>
+          <p:nvPr/>
+        </p:nvSpPr>
+        <p:spPr>
+          <a:xfrm>
+            <a:off x="7493000" y="5930900"/>
+            <a:ext cx="4064000" cy="165100"/>
           </a:xfrm>
           <a:prstGeom prst="rect">
             <a:avLst/>
@@ -6148,543 +6647,9 @@
           </a:p>
         </p:txBody>
       </p:sp>
-      <p:sp>
-        <p:nvSpPr>
-          <p:cNvPr id="47" name="Rectangle 46"/>
-          <p:cNvSpPr/>
-          <p:nvPr/>
-        </p:nvSpPr>
-        <p:spPr>
-          <a:xfrm>
-            <a:off x="6934200" y="2095500"/>
-            <a:ext cx="6350" cy="3619500"/>
-          </a:xfrm>
-          <a:prstGeom prst="rect">
-            <a:avLst/>
-          </a:prstGeom>
-          <a:solidFill>
-            <a:srgbClr val="1F1F22"/>
-          </a:solidFill>
-          <a:ln>
-            <a:noFill/>
-          </a:ln>
-          <a:effectLst/>
-        </p:spPr>
-        <p:style>
-          <a:lnRef idx="1">
-            <a:schemeClr val="accent1"/>
-          </a:lnRef>
-          <a:fillRef idx="3">
-            <a:schemeClr val="accent1"/>
-          </a:fillRef>
-          <a:effectRef idx="2">
-            <a:schemeClr val="accent1"/>
-          </a:effectRef>
-          <a:fontRef idx="minor">
-            <a:schemeClr val="lt1"/>
-          </a:fontRef>
-        </p:style>
-        <p:txBody>
-          <a:bodyPr rtlCol="0" anchor="ctr"/>
-          <a:lstStyle/>
-          <a:p>
-            <a:pPr algn="ctr"/>
-          </a:p>
-        </p:txBody>
-      </p:sp>
-      <p:sp>
-        <p:nvSpPr>
-          <p:cNvPr id="48" name="TextBox 47"/>
-          <p:cNvSpPr txBox="1"/>
-          <p:nvPr/>
-        </p:nvSpPr>
-        <p:spPr>
-          <a:xfrm>
-            <a:off x="7239000" y="2159000"/>
-            <a:ext cx="4445000" cy="165100"/>
-          </a:xfrm>
-          <a:prstGeom prst="rect">
-            <a:avLst/>
-          </a:prstGeom>
-          <a:noFill/>
-        </p:spPr>
-        <p:txBody>
-          <a:bodyPr wrap="square" lIns="0" rIns="0" tIns="0" bIns="0" anchor="ctr">
-            <a:spAutoFit/>
-          </a:bodyPr>
-          <a:lstStyle/>
-          <a:p>
-            <a:pPr algn="l"/>
-            <a:r>
-              <a:rPr sz="1100" b="0" spc="250">
-                <a:solidFill>
-                  <a:srgbClr val="9A9AA2"/>
-                </a:solidFill>
-                <a:latin typeface="Courier New"/>
-              </a:rPr>
-              <a:t>SDLC PHASE  ·  CHAIN STAGE</a:t>
-            </a:r>
-          </a:p>
-        </p:txBody>
-      </p:sp>
-      <p:sp>
-        <p:nvSpPr>
-          <p:cNvPr id="49" name="TextBox 48"/>
-          <p:cNvSpPr txBox="1"/>
-          <p:nvPr/>
-        </p:nvSpPr>
-        <p:spPr>
-          <a:xfrm>
-            <a:off x="7239000" y="2527300"/>
-            <a:ext cx="4248150" cy="190500"/>
-          </a:xfrm>
-          <a:prstGeom prst="rect">
-            <a:avLst/>
-          </a:prstGeom>
-          <a:noFill/>
-        </p:spPr>
-        <p:txBody>
-          <a:bodyPr wrap="square" lIns="0" rIns="0" tIns="0" bIns="0" anchor="ctr">
-            <a:spAutoFit/>
-          </a:bodyPr>
-          <a:lstStyle/>
-          <a:p>
-            <a:pPr algn="l"/>
-            <a:r>
-              <a:rPr sz="1600" b="0">
-                <a:solidFill>
-                  <a:srgbClr val="ECECEE"/>
-                </a:solidFill>
-                <a:latin typeface="Poppins"/>
-              </a:rPr>
-              <a:t>Planning</a:t>
-            </a:r>
-          </a:p>
-        </p:txBody>
-      </p:sp>
-      <p:sp>
-        <p:nvSpPr>
-          <p:cNvPr id="50" name="TextBox 49"/>
-          <p:cNvSpPr txBox="1"/>
-          <p:nvPr/>
-        </p:nvSpPr>
-        <p:spPr>
-          <a:xfrm>
-            <a:off x="7239000" y="2730500"/>
-            <a:ext cx="4248150" cy="165100"/>
-          </a:xfrm>
-          <a:prstGeom prst="rect">
-            <a:avLst/>
-          </a:prstGeom>
-          <a:noFill/>
-        </p:spPr>
-        <p:txBody>
-          <a:bodyPr wrap="square" lIns="0" rIns="0" tIns="0" bIns="0" anchor="ctr">
-            <a:spAutoFit/>
-          </a:bodyPr>
-          <a:lstStyle/>
-          <a:p>
-            <a:pPr algn="l"/>
-            <a:r>
-              <a:rPr sz="1100" b="0" spc="80">
-                <a:solidFill>
-                  <a:srgbClr val="9A9AA2"/>
-                </a:solidFill>
-                <a:latin typeface="Courier New"/>
-              </a:rPr>
-              <a:t>01 Discover  ·  02 Analyze</a:t>
-            </a:r>
-          </a:p>
-        </p:txBody>
-      </p:sp>
-      <p:sp>
-        <p:nvSpPr>
-          <p:cNvPr id="51" name="TextBox 50"/>
-          <p:cNvSpPr txBox="1"/>
-          <p:nvPr/>
-        </p:nvSpPr>
-        <p:spPr>
-          <a:xfrm>
-            <a:off x="7239000" y="3060700"/>
-            <a:ext cx="4248150" cy="190500"/>
-          </a:xfrm>
-          <a:prstGeom prst="rect">
-            <a:avLst/>
-          </a:prstGeom>
-          <a:noFill/>
-        </p:spPr>
-        <p:txBody>
-          <a:bodyPr wrap="square" lIns="0" rIns="0" tIns="0" bIns="0" anchor="ctr">
-            <a:spAutoFit/>
-          </a:bodyPr>
-          <a:lstStyle/>
-          <a:p>
-            <a:pPr algn="l"/>
-            <a:r>
-              <a:rPr sz="1600" b="0">
-                <a:solidFill>
-                  <a:srgbClr val="ECECEE"/>
-                </a:solidFill>
-                <a:latin typeface="Poppins"/>
-              </a:rPr>
-              <a:t>Analysis</a:t>
-            </a:r>
-          </a:p>
-        </p:txBody>
-      </p:sp>
-      <p:sp>
-        <p:nvSpPr>
-          <p:cNvPr id="52" name="TextBox 51"/>
-          <p:cNvSpPr txBox="1"/>
-          <p:nvPr/>
-        </p:nvSpPr>
-        <p:spPr>
-          <a:xfrm>
-            <a:off x="7239000" y="3263900"/>
-            <a:ext cx="4248150" cy="165100"/>
-          </a:xfrm>
-          <a:prstGeom prst="rect">
-            <a:avLst/>
-          </a:prstGeom>
-          <a:noFill/>
-        </p:spPr>
-        <p:txBody>
-          <a:bodyPr wrap="square" lIns="0" rIns="0" tIns="0" bIns="0" anchor="ctr">
-            <a:spAutoFit/>
-          </a:bodyPr>
-          <a:lstStyle/>
-          <a:p>
-            <a:pPr algn="l"/>
-            <a:r>
-              <a:rPr sz="1100" b="0" spc="80">
-                <a:solidFill>
-                  <a:srgbClr val="9A9AA2"/>
-                </a:solidFill>
-                <a:latin typeface="Courier New"/>
-              </a:rPr>
-              <a:t>03 Research</a:t>
-            </a:r>
-          </a:p>
-        </p:txBody>
-      </p:sp>
-      <p:sp>
-        <p:nvSpPr>
-          <p:cNvPr id="53" name="TextBox 52"/>
-          <p:cNvSpPr txBox="1"/>
-          <p:nvPr/>
-        </p:nvSpPr>
-        <p:spPr>
-          <a:xfrm>
-            <a:off x="7239000" y="3594100"/>
-            <a:ext cx="4248150" cy="190500"/>
-          </a:xfrm>
-          <a:prstGeom prst="rect">
-            <a:avLst/>
-          </a:prstGeom>
-          <a:noFill/>
-        </p:spPr>
-        <p:txBody>
-          <a:bodyPr wrap="square" lIns="0" rIns="0" tIns="0" bIns="0" anchor="ctr">
-            <a:spAutoFit/>
-          </a:bodyPr>
-          <a:lstStyle/>
-          <a:p>
-            <a:pPr algn="l"/>
-            <a:r>
-              <a:rPr sz="1600" b="0">
-                <a:solidFill>
-                  <a:srgbClr val="ECECEE"/>
-                </a:solidFill>
-                <a:latin typeface="Poppins"/>
-              </a:rPr>
-              <a:t>Design</a:t>
-            </a:r>
-          </a:p>
-        </p:txBody>
-      </p:sp>
-      <p:sp>
-        <p:nvSpPr>
-          <p:cNvPr id="54" name="TextBox 53"/>
-          <p:cNvSpPr txBox="1"/>
-          <p:nvPr/>
-        </p:nvSpPr>
-        <p:spPr>
-          <a:xfrm>
-            <a:off x="7239000" y="3797300"/>
-            <a:ext cx="4248150" cy="165100"/>
-          </a:xfrm>
-          <a:prstGeom prst="rect">
-            <a:avLst/>
-          </a:prstGeom>
-          <a:noFill/>
-        </p:spPr>
-        <p:txBody>
-          <a:bodyPr wrap="square" lIns="0" rIns="0" tIns="0" bIns="0" anchor="ctr">
-            <a:spAutoFit/>
-          </a:bodyPr>
-          <a:lstStyle/>
-          <a:p>
-            <a:pPr algn="l"/>
-            <a:r>
-              <a:rPr sz="1100" b="0" spc="80">
-                <a:solidFill>
-                  <a:srgbClr val="9A9AA2"/>
-                </a:solidFill>
-                <a:latin typeface="Courier New"/>
-              </a:rPr>
-              <a:t>04 Compliance  ·  05 AI Memory</a:t>
-            </a:r>
-          </a:p>
-        </p:txBody>
-      </p:sp>
-      <p:sp>
-        <p:nvSpPr>
-          <p:cNvPr id="55" name="TextBox 54"/>
-          <p:cNvSpPr txBox="1"/>
-          <p:nvPr/>
-        </p:nvSpPr>
-        <p:spPr>
-          <a:xfrm>
-            <a:off x="7239000" y="4127500"/>
-            <a:ext cx="4248150" cy="190500"/>
-          </a:xfrm>
-          <a:prstGeom prst="rect">
-            <a:avLst/>
-          </a:prstGeom>
-          <a:noFill/>
-        </p:spPr>
-        <p:txBody>
-          <a:bodyPr wrap="square" lIns="0" rIns="0" tIns="0" bIns="0" anchor="ctr">
-            <a:spAutoFit/>
-          </a:bodyPr>
-          <a:lstStyle/>
-          <a:p>
-            <a:pPr algn="l"/>
-            <a:r>
-              <a:rPr sz="1600" b="0">
-                <a:solidFill>
-                  <a:srgbClr val="ECECEE"/>
-                </a:solidFill>
-                <a:latin typeface="Poppins"/>
-              </a:rPr>
-              <a:t>Implementation</a:t>
-            </a:r>
-          </a:p>
-        </p:txBody>
-      </p:sp>
-      <p:sp>
-        <p:nvSpPr>
-          <p:cNvPr id="56" name="TextBox 55"/>
-          <p:cNvSpPr txBox="1"/>
-          <p:nvPr/>
-        </p:nvSpPr>
-        <p:spPr>
-          <a:xfrm>
-            <a:off x="7239000" y="4330700"/>
-            <a:ext cx="4248150" cy="165100"/>
-          </a:xfrm>
-          <a:prstGeom prst="rect">
-            <a:avLst/>
-          </a:prstGeom>
-          <a:noFill/>
-        </p:spPr>
-        <p:txBody>
-          <a:bodyPr wrap="square" lIns="0" rIns="0" tIns="0" bIns="0" anchor="ctr">
-            <a:spAutoFit/>
-          </a:bodyPr>
-          <a:lstStyle/>
-          <a:p>
-            <a:pPr algn="l"/>
-            <a:r>
-              <a:rPr sz="1100" b="0" spc="80">
-                <a:solidFill>
-                  <a:srgbClr val="9A9AA2"/>
-                </a:solidFill>
-                <a:latin typeface="Courier New"/>
-              </a:rPr>
-              <a:t>06 Build</a:t>
-            </a:r>
-          </a:p>
-        </p:txBody>
-      </p:sp>
-      <p:sp>
-        <p:nvSpPr>
-          <p:cNvPr id="57" name="TextBox 56"/>
-          <p:cNvSpPr txBox="1"/>
-          <p:nvPr/>
-        </p:nvSpPr>
-        <p:spPr>
-          <a:xfrm>
-            <a:off x="7239000" y="4660900"/>
-            <a:ext cx="4248150" cy="190500"/>
-          </a:xfrm>
-          <a:prstGeom prst="rect">
-            <a:avLst/>
-          </a:prstGeom>
-          <a:noFill/>
-        </p:spPr>
-        <p:txBody>
-          <a:bodyPr wrap="square" lIns="0" rIns="0" tIns="0" bIns="0" anchor="ctr">
-            <a:spAutoFit/>
-          </a:bodyPr>
-          <a:lstStyle/>
-          <a:p>
-            <a:pPr algn="l"/>
-            <a:r>
-              <a:rPr sz="1600" b="0">
-                <a:solidFill>
-                  <a:srgbClr val="ECECEE"/>
-                </a:solidFill>
-                <a:latin typeface="Poppins"/>
-              </a:rPr>
-              <a:t>Testing</a:t>
-            </a:r>
-          </a:p>
-        </p:txBody>
-      </p:sp>
-      <p:sp>
-        <p:nvSpPr>
-          <p:cNvPr id="58" name="TextBox 57"/>
-          <p:cNvSpPr txBox="1"/>
-          <p:nvPr/>
-        </p:nvSpPr>
-        <p:spPr>
-          <a:xfrm>
-            <a:off x="7239000" y="4864100"/>
-            <a:ext cx="4248150" cy="165100"/>
-          </a:xfrm>
-          <a:prstGeom prst="rect">
-            <a:avLst/>
-          </a:prstGeom>
-          <a:noFill/>
-        </p:spPr>
-        <p:txBody>
-          <a:bodyPr wrap="square" lIns="0" rIns="0" tIns="0" bIns="0" anchor="ctr">
-            <a:spAutoFit/>
-          </a:bodyPr>
-          <a:lstStyle/>
-          <a:p>
-            <a:pPr algn="l"/>
-            <a:r>
-              <a:rPr sz="1100" b="0" spc="80">
-                <a:solidFill>
-                  <a:srgbClr val="9A9AA2"/>
-                </a:solidFill>
-                <a:latin typeface="Courier New"/>
-              </a:rPr>
-              <a:t>07 Release</a:t>
-            </a:r>
-          </a:p>
-        </p:txBody>
-      </p:sp>
-      <p:sp>
-        <p:nvSpPr>
-          <p:cNvPr id="59" name="TextBox 58"/>
-          <p:cNvSpPr txBox="1"/>
-          <p:nvPr/>
-        </p:nvSpPr>
-        <p:spPr>
-          <a:xfrm>
-            <a:off x="7239000" y="5194300"/>
-            <a:ext cx="4248150" cy="190500"/>
-          </a:xfrm>
-          <a:prstGeom prst="rect">
-            <a:avLst/>
-          </a:prstGeom>
-          <a:noFill/>
-        </p:spPr>
-        <p:txBody>
-          <a:bodyPr wrap="square" lIns="0" rIns="0" tIns="0" bIns="0" anchor="ctr">
-            <a:spAutoFit/>
-          </a:bodyPr>
-          <a:lstStyle/>
-          <a:p>
-            <a:pPr algn="l"/>
-            <a:r>
-              <a:rPr sz="1600" b="0">
-                <a:solidFill>
-                  <a:srgbClr val="ECECEE"/>
-                </a:solidFill>
-                <a:latin typeface="Poppins"/>
-              </a:rPr>
-              <a:t>Maintenance</a:t>
-            </a:r>
-          </a:p>
-        </p:txBody>
-      </p:sp>
-      <p:sp>
-        <p:nvSpPr>
-          <p:cNvPr id="60" name="TextBox 59"/>
-          <p:cNvSpPr txBox="1"/>
-          <p:nvPr/>
-        </p:nvSpPr>
-        <p:spPr>
-          <a:xfrm>
-            <a:off x="7239000" y="5397500"/>
-            <a:ext cx="4248150" cy="165100"/>
-          </a:xfrm>
-          <a:prstGeom prst="rect">
-            <a:avLst/>
-          </a:prstGeom>
-          <a:noFill/>
-        </p:spPr>
-        <p:txBody>
-          <a:bodyPr wrap="square" lIns="0" rIns="0" tIns="0" bIns="0" anchor="ctr">
-            <a:spAutoFit/>
-          </a:bodyPr>
-          <a:lstStyle/>
-          <a:p>
-            <a:pPr algn="l"/>
-            <a:r>
-              <a:rPr sz="1100" b="0" spc="80">
-                <a:solidFill>
-                  <a:srgbClr val="9A9AA2"/>
-                </a:solidFill>
-                <a:latin typeface="Courier New"/>
-              </a:rPr>
-              <a:t>08 Operate</a:t>
-            </a:r>
-          </a:p>
-        </p:txBody>
-      </p:sp>
-      <p:sp>
-        <p:nvSpPr>
-          <p:cNvPr id="61" name="TextBox 60"/>
-          <p:cNvSpPr txBox="1"/>
-          <p:nvPr/>
-        </p:nvSpPr>
-        <p:spPr>
-          <a:xfrm>
-            <a:off x="7239000" y="5727700"/>
-            <a:ext cx="4248150" cy="165100"/>
-          </a:xfrm>
-          <a:prstGeom prst="rect">
-            <a:avLst/>
-          </a:prstGeom>
-          <a:noFill/>
-        </p:spPr>
-        <p:txBody>
-          <a:bodyPr wrap="square" lIns="0" rIns="0" tIns="0" bIns="0" anchor="ctr">
-            <a:spAutoFit/>
-          </a:bodyPr>
-          <a:lstStyle/>
-          <a:p>
-            <a:pPr algn="l"/>
-            <a:r>
-              <a:rPr sz="1200" b="0">
-                <a:solidFill>
-                  <a:srgbClr val="9A9AA2"/>
-                </a:solidFill>
-                <a:latin typeface="Poppins"/>
-              </a:rPr>
-              <a:t>All eight chain stages map onto the six classic phases.</a:t>
-            </a:r>
-          </a:p>
-        </p:txBody>
-      </p:sp>
       <p:pic>
         <p:nvPicPr>
-          <p:cNvPr id="62" name="Picture 61" descr="logo.png"/>
+          <p:cNvPr id="61" name="Picture 60" descr="logo.png"/>
           <p:cNvPicPr>
             <a:picLocks noChangeAspect="1"/>
           </p:cNvPicPr>

--- a/deck/Pitch_Deck_AthenaRun_v2.pptx
+++ b/deck/Pitch_Deck_AthenaRun_v2.pptx
@@ -13,10 +13,11 @@
     <p:sldId id="258" r:id="rId10"/>
     <p:sldId id="265" r:id="rId17"/>
     <p:sldId id="266" r:id="rId18"/>
+    <p:sldId id="267" r:id="rId19"/>
     <p:sldId id="259" r:id="rId11"/>
-    <p:sldId id="267" r:id="rId19"/>
     <p:sldId id="268" r:id="rId20"/>
     <p:sldId id="269" r:id="rId21"/>
+    <p:sldId id="270" r:id="rId22"/>
     <p:sldId id="260" r:id="rId12"/>
     <p:sldId id="261" r:id="rId13"/>
     <p:sldId id="262" r:id="rId14"/>
@@ -6743,7 +6744,7 @@
                 </a:solidFill>
                 <a:latin typeface="Poppins"/>
               </a:rPr>
-              <a:t>References.</a:t>
+              <a:t>The payoff.</a:t>
             </a:r>
             <a:r>
               <a:rPr sz="2700" b="0">
@@ -6752,7 +6753,7 @@
                 </a:solidFill>
                 <a:latin typeface="Poppins"/>
               </a:rPr>
-              <a:t> Three builds, three problems.</a:t>
+              <a:t> Fewer people. A better starting point.</a:t>
             </a:r>
           </a:p>
         </p:txBody>
@@ -6787,7 +6788,7 @@
                 </a:solidFill>
                 <a:latin typeface="Courier New"/>
               </a:rPr>
-              <a:t>07 — References</a:t>
+              <a:t>06 — The payoff</a:t>
             </a:r>
           </a:p>
         </p:txBody>
@@ -6844,8 +6845,8 @@
         </p:nvSpPr>
         <p:spPr>
           <a:xfrm>
-            <a:off x="698500" y="1320800"/>
-            <a:ext cx="8890000" cy="190500"/>
+            <a:off x="698500" y="1244600"/>
+            <a:ext cx="9652000" cy="254000"/>
           </a:xfrm>
           <a:prstGeom prst="rect">
             <a:avLst/>
@@ -6866,20 +6867,493 @@
                 </a:solidFill>
                 <a:latin typeface="Poppins"/>
               </a:rPr>
-              <a:t>Shipped software, not pilots. Each one replaced a process that was running manually.</a:t>
-            </a:r>
-          </a:p>
-        </p:txBody>
-      </p:sp>
-      <p:sp>
-        <p:nvSpPr>
-          <p:cNvPr id="7" name="Rectangle 6"/>
+              <a:t>The chain does the work that used to need a team — every project starts on what the last one learned.</a:t>
+            </a:r>
+          </a:p>
+        </p:txBody>
+      </p:sp>
+      <p:sp>
+        <p:nvSpPr>
+          <p:cNvPr id="7" name="TextBox 6"/>
+          <p:cNvSpPr txBox="1"/>
+          <p:nvPr/>
+        </p:nvSpPr>
+        <p:spPr>
+          <a:xfrm>
+            <a:off x="698500" y="1879600"/>
+            <a:ext cx="4445000" cy="165100"/>
+          </a:xfrm>
+          <a:prstGeom prst="rect">
+            <a:avLst/>
+          </a:prstGeom>
+          <a:noFill/>
+        </p:spPr>
+        <p:txBody>
+          <a:bodyPr wrap="square" lIns="0" rIns="0" tIns="0" bIns="0" anchor="ctr">
+            <a:spAutoFit/>
+          </a:bodyPr>
+          <a:lstStyle/>
+          <a:p>
+            <a:pPr algn="l"/>
+            <a:r>
+              <a:rPr sz="1100" b="0" spc="250">
+                <a:solidFill>
+                  <a:srgbClr val="9A9AA2"/>
+                </a:solidFill>
+                <a:latin typeface="Courier New"/>
+              </a:rPr>
+              <a:t>A TYPICAL PROJECT TEAM</a:t>
+            </a:r>
+          </a:p>
+        </p:txBody>
+      </p:sp>
+      <p:sp>
+        <p:nvSpPr>
+          <p:cNvPr id="8" name="Rounded Rectangle 7"/>
           <p:cNvSpPr/>
           <p:nvPr/>
         </p:nvSpPr>
         <p:spPr>
           <a:xfrm>
-            <a:off x="698500" y="1828800"/>
+            <a:off x="698500" y="2197100"/>
+            <a:ext cx="2025650" cy="355600"/>
+          </a:xfrm>
+          <a:prstGeom prst="roundRect">
+            <a:avLst/>
+          </a:prstGeom>
+          <a:solidFill>
+            <a:srgbClr val="161619"/>
+          </a:solidFill>
+          <a:ln w="15875">
+            <a:solidFill>
+              <a:srgbClr val="9A9AA2"/>
+            </a:solidFill>
+          </a:ln>
+          <a:effectLst/>
+        </p:spPr>
+        <p:style>
+          <a:lnRef idx="1">
+            <a:schemeClr val="accent1"/>
+          </a:lnRef>
+          <a:fillRef idx="3">
+            <a:schemeClr val="accent1"/>
+          </a:fillRef>
+          <a:effectRef idx="2">
+            <a:schemeClr val="accent1"/>
+          </a:effectRef>
+          <a:fontRef idx="minor">
+            <a:schemeClr val="lt1"/>
+          </a:fontRef>
+        </p:style>
+        <p:txBody>
+          <a:bodyPr rtlCol="0" anchor="ctr"/>
+          <a:lstStyle/>
+          <a:p>
+            <a:pPr algn="ctr"/>
+          </a:p>
+        </p:txBody>
+      </p:sp>
+      <p:sp>
+        <p:nvSpPr>
+          <p:cNvPr id="9" name="TextBox 8"/>
+          <p:cNvSpPr txBox="1"/>
+          <p:nvPr/>
+        </p:nvSpPr>
+        <p:spPr>
+          <a:xfrm>
+            <a:off x="698500" y="2197100"/>
+            <a:ext cx="2025650" cy="355600"/>
+          </a:xfrm>
+          <a:prstGeom prst="rect">
+            <a:avLst/>
+          </a:prstGeom>
+          <a:noFill/>
+        </p:spPr>
+        <p:txBody>
+          <a:bodyPr wrap="square" lIns="0" rIns="0" tIns="0" bIns="0" anchor="ctr">
+            <a:spAutoFit/>
+          </a:bodyPr>
+          <a:lstStyle/>
+          <a:p>
+            <a:pPr algn="ctr"/>
+            <a:r>
+              <a:rPr sz="1400" b="0">
+                <a:solidFill>
+                  <a:srgbClr val="9A9AA2"/>
+                </a:solidFill>
+                <a:latin typeface="Poppins"/>
+              </a:rPr>
+              <a:t>Business Analyst</a:t>
+            </a:r>
+          </a:p>
+        </p:txBody>
+      </p:sp>
+      <p:sp>
+        <p:nvSpPr>
+          <p:cNvPr id="10" name="Rounded Rectangle 9"/>
+          <p:cNvSpPr/>
+          <p:nvPr/>
+        </p:nvSpPr>
+        <p:spPr>
+          <a:xfrm>
+            <a:off x="2851150" y="2197100"/>
+            <a:ext cx="1339850" cy="355600"/>
+          </a:xfrm>
+          <a:prstGeom prst="roundRect">
+            <a:avLst/>
+          </a:prstGeom>
+          <a:solidFill>
+            <a:srgbClr val="161619"/>
+          </a:solidFill>
+          <a:ln w="15875">
+            <a:solidFill>
+              <a:srgbClr val="9A9AA2"/>
+            </a:solidFill>
+          </a:ln>
+          <a:effectLst/>
+        </p:spPr>
+        <p:style>
+          <a:lnRef idx="1">
+            <a:schemeClr val="accent1"/>
+          </a:lnRef>
+          <a:fillRef idx="3">
+            <a:schemeClr val="accent1"/>
+          </a:fillRef>
+          <a:effectRef idx="2">
+            <a:schemeClr val="accent1"/>
+          </a:effectRef>
+          <a:fontRef idx="minor">
+            <a:schemeClr val="lt1"/>
+          </a:fontRef>
+        </p:style>
+        <p:txBody>
+          <a:bodyPr rtlCol="0" anchor="ctr"/>
+          <a:lstStyle/>
+          <a:p>
+            <a:pPr algn="ctr"/>
+          </a:p>
+        </p:txBody>
+      </p:sp>
+      <p:sp>
+        <p:nvSpPr>
+          <p:cNvPr id="11" name="TextBox 10"/>
+          <p:cNvSpPr txBox="1"/>
+          <p:nvPr/>
+        </p:nvSpPr>
+        <p:spPr>
+          <a:xfrm>
+            <a:off x="2851150" y="2197100"/>
+            <a:ext cx="1339850" cy="355600"/>
+          </a:xfrm>
+          <a:prstGeom prst="rect">
+            <a:avLst/>
+          </a:prstGeom>
+          <a:noFill/>
+        </p:spPr>
+        <p:txBody>
+          <a:bodyPr wrap="square" lIns="0" rIns="0" tIns="0" bIns="0" anchor="ctr">
+            <a:spAutoFit/>
+          </a:bodyPr>
+          <a:lstStyle/>
+          <a:p>
+            <a:pPr algn="ctr"/>
+            <a:r>
+              <a:rPr sz="1400" b="0">
+                <a:solidFill>
+                  <a:srgbClr val="9A9AA2"/>
+                </a:solidFill>
+                <a:latin typeface="Poppins"/>
+              </a:rPr>
+              <a:t>Designer</a:t>
+            </a:r>
+          </a:p>
+        </p:txBody>
+      </p:sp>
+      <p:sp>
+        <p:nvSpPr>
+          <p:cNvPr id="12" name="Rounded Rectangle 11"/>
+          <p:cNvSpPr/>
+          <p:nvPr/>
+        </p:nvSpPr>
+        <p:spPr>
+          <a:xfrm>
+            <a:off x="4324350" y="2197100"/>
+            <a:ext cx="1454150" cy="355600"/>
+          </a:xfrm>
+          <a:prstGeom prst="roundRect">
+            <a:avLst/>
+          </a:prstGeom>
+          <a:solidFill>
+            <a:srgbClr val="161619"/>
+          </a:solidFill>
+          <a:ln w="15875">
+            <a:solidFill>
+              <a:srgbClr val="9A9AA2"/>
+            </a:solidFill>
+          </a:ln>
+          <a:effectLst/>
+        </p:spPr>
+        <p:style>
+          <a:lnRef idx="1">
+            <a:schemeClr val="accent1"/>
+          </a:lnRef>
+          <a:fillRef idx="3">
+            <a:schemeClr val="accent1"/>
+          </a:fillRef>
+          <a:effectRef idx="2">
+            <a:schemeClr val="accent1"/>
+          </a:effectRef>
+          <a:fontRef idx="minor">
+            <a:schemeClr val="lt1"/>
+          </a:fontRef>
+        </p:style>
+        <p:txBody>
+          <a:bodyPr rtlCol="0" anchor="ctr"/>
+          <a:lstStyle/>
+          <a:p>
+            <a:pPr algn="ctr"/>
+          </a:p>
+        </p:txBody>
+      </p:sp>
+      <p:sp>
+        <p:nvSpPr>
+          <p:cNvPr id="13" name="TextBox 12"/>
+          <p:cNvSpPr txBox="1"/>
+          <p:nvPr/>
+        </p:nvSpPr>
+        <p:spPr>
+          <a:xfrm>
+            <a:off x="4324350" y="2197100"/>
+            <a:ext cx="1454150" cy="355600"/>
+          </a:xfrm>
+          <a:prstGeom prst="rect">
+            <a:avLst/>
+          </a:prstGeom>
+          <a:noFill/>
+        </p:spPr>
+        <p:txBody>
+          <a:bodyPr wrap="square" lIns="0" rIns="0" tIns="0" bIns="0" anchor="ctr">
+            <a:spAutoFit/>
+          </a:bodyPr>
+          <a:lstStyle/>
+          <a:p>
+            <a:pPr algn="ctr"/>
+            <a:r>
+              <a:rPr sz="1400" b="0">
+                <a:solidFill>
+                  <a:srgbClr val="9A9AA2"/>
+                </a:solidFill>
+                <a:latin typeface="Poppins"/>
+              </a:rPr>
+              <a:t>Developer</a:t>
+            </a:r>
+          </a:p>
+        </p:txBody>
+      </p:sp>
+      <p:sp>
+        <p:nvSpPr>
+          <p:cNvPr id="14" name="Isosceles Triangle 13"/>
+          <p:cNvSpPr/>
+          <p:nvPr/>
+        </p:nvSpPr>
+        <p:spPr>
+          <a:xfrm rot="5400000">
+            <a:off x="6026150" y="2292350"/>
+            <a:ext cx="165100" cy="165100"/>
+          </a:xfrm>
+          <a:prstGeom prst="triangle">
+            <a:avLst/>
+          </a:prstGeom>
+          <a:solidFill>
+            <a:srgbClr val="5A5A60"/>
+          </a:solidFill>
+          <a:ln>
+            <a:noFill/>
+          </a:ln>
+          <a:effectLst/>
+        </p:spPr>
+        <p:style>
+          <a:lnRef idx="1">
+            <a:schemeClr val="accent1"/>
+          </a:lnRef>
+          <a:fillRef idx="3">
+            <a:schemeClr val="accent1"/>
+          </a:fillRef>
+          <a:effectRef idx="2">
+            <a:schemeClr val="accent1"/>
+          </a:effectRef>
+          <a:fontRef idx="minor">
+            <a:schemeClr val="lt1"/>
+          </a:fontRef>
+        </p:style>
+        <p:txBody>
+          <a:bodyPr rtlCol="0" anchor="ctr"/>
+          <a:lstStyle/>
+          <a:p>
+            <a:pPr algn="ctr"/>
+          </a:p>
+        </p:txBody>
+      </p:sp>
+      <p:sp>
+        <p:nvSpPr>
+          <p:cNvPr id="15" name="TextBox 14"/>
+          <p:cNvSpPr txBox="1"/>
+          <p:nvPr/>
+        </p:nvSpPr>
+        <p:spPr>
+          <a:xfrm>
+            <a:off x="6604000" y="1879600"/>
+            <a:ext cx="4445000" cy="165100"/>
+          </a:xfrm>
+          <a:prstGeom prst="rect">
+            <a:avLst/>
+          </a:prstGeom>
+          <a:noFill/>
+        </p:spPr>
+        <p:txBody>
+          <a:bodyPr wrap="square" lIns="0" rIns="0" tIns="0" bIns="0" anchor="ctr">
+            <a:spAutoFit/>
+          </a:bodyPr>
+          <a:lstStyle/>
+          <a:p>
+            <a:pPr algn="l"/>
+            <a:r>
+              <a:rPr sz="1100" b="0" spc="250">
+                <a:solidFill>
+                  <a:srgbClr val="FF6B3D"/>
+                </a:solidFill>
+                <a:latin typeface="Courier New"/>
+              </a:rPr>
+              <a:t>WITH ATHENARUN</a:t>
+            </a:r>
+          </a:p>
+        </p:txBody>
+      </p:sp>
+      <p:sp>
+        <p:nvSpPr>
+          <p:cNvPr id="16" name="Rounded Rectangle 15"/>
+          <p:cNvSpPr/>
+          <p:nvPr/>
+        </p:nvSpPr>
+        <p:spPr>
+          <a:xfrm>
+            <a:off x="6604000" y="2197100"/>
+            <a:ext cx="1955800" cy="355600"/>
+          </a:xfrm>
+          <a:prstGeom prst="roundRect">
+            <a:avLst/>
+          </a:prstGeom>
+          <a:solidFill>
+            <a:srgbClr val="161619"/>
+          </a:solidFill>
+          <a:ln w="15875">
+            <a:solidFill>
+              <a:srgbClr val="FF6B3D"/>
+            </a:solidFill>
+          </a:ln>
+          <a:effectLst/>
+        </p:spPr>
+        <p:style>
+          <a:lnRef idx="1">
+            <a:schemeClr val="accent1"/>
+          </a:lnRef>
+          <a:fillRef idx="3">
+            <a:schemeClr val="accent1"/>
+          </a:fillRef>
+          <a:effectRef idx="2">
+            <a:schemeClr val="accent1"/>
+          </a:effectRef>
+          <a:fontRef idx="minor">
+            <a:schemeClr val="lt1"/>
+          </a:fontRef>
+        </p:style>
+        <p:txBody>
+          <a:bodyPr rtlCol="0" anchor="ctr"/>
+          <a:lstStyle/>
+          <a:p>
+            <a:pPr algn="ctr"/>
+          </a:p>
+        </p:txBody>
+      </p:sp>
+      <p:sp>
+        <p:nvSpPr>
+          <p:cNvPr id="17" name="TextBox 16"/>
+          <p:cNvSpPr txBox="1"/>
+          <p:nvPr/>
+        </p:nvSpPr>
+        <p:spPr>
+          <a:xfrm>
+            <a:off x="6604000" y="2197100"/>
+            <a:ext cx="1955800" cy="355600"/>
+          </a:xfrm>
+          <a:prstGeom prst="rect">
+            <a:avLst/>
+          </a:prstGeom>
+          <a:noFill/>
+        </p:spPr>
+        <p:txBody>
+          <a:bodyPr wrap="square" lIns="0" rIns="0" tIns="0" bIns="0" anchor="ctr">
+            <a:spAutoFit/>
+          </a:bodyPr>
+          <a:lstStyle/>
+          <a:p>
+            <a:pPr algn="ctr"/>
+            <a:r>
+              <a:rPr sz="1500" b="0">
+                <a:solidFill>
+                  <a:srgbClr val="FF6B3D"/>
+                </a:solidFill>
+                <a:latin typeface="Poppins"/>
+              </a:rPr>
+              <a:t>One developer</a:t>
+            </a:r>
+          </a:p>
+        </p:txBody>
+      </p:sp>
+      <p:sp>
+        <p:nvSpPr>
+          <p:cNvPr id="18" name="TextBox 17"/>
+          <p:cNvSpPr txBox="1"/>
+          <p:nvPr/>
+        </p:nvSpPr>
+        <p:spPr>
+          <a:xfrm>
+            <a:off x="6604000" y="2692400"/>
+            <a:ext cx="4445000" cy="165100"/>
+          </a:xfrm>
+          <a:prstGeom prst="rect">
+            <a:avLst/>
+          </a:prstGeom>
+          <a:noFill/>
+        </p:spPr>
+        <p:txBody>
+          <a:bodyPr wrap="square" lIns="0" rIns="0" tIns="0" bIns="0" anchor="ctr">
+            <a:spAutoFit/>
+          </a:bodyPr>
+          <a:lstStyle/>
+          <a:p>
+            <a:pPr algn="l"/>
+            <a:r>
+              <a:rPr sz="1250" b="0">
+                <a:solidFill>
+                  <a:srgbClr val="9A9AA2"/>
+                </a:solidFill>
+                <a:latin typeface="Poppins"/>
+              </a:rPr>
+              <a:t>+ agents on all six lifecycle phases</a:t>
+            </a:r>
+          </a:p>
+        </p:txBody>
+      </p:sp>
+      <p:sp>
+        <p:nvSpPr>
+          <p:cNvPr id="19" name="Rectangle 18"/>
+          <p:cNvSpPr/>
+          <p:nvPr/>
+        </p:nvSpPr>
+        <p:spPr>
+          <a:xfrm>
+            <a:off x="698500" y="3302000"/>
             <a:ext cx="10788650" cy="6350"/>
           </a:xfrm>
           <a:prstGeom prst="rect">
@@ -6915,53 +7389,9 @@
           </a:p>
         </p:txBody>
       </p:sp>
-      <p:sp>
-        <p:nvSpPr>
-          <p:cNvPr id="8" name="Rectangle 7"/>
-          <p:cNvSpPr/>
-          <p:nvPr/>
-        </p:nvSpPr>
-        <p:spPr>
-          <a:xfrm>
-            <a:off x="698500" y="2159000"/>
-            <a:ext cx="3302000" cy="2857500"/>
-          </a:xfrm>
-          <a:prstGeom prst="rect">
-            <a:avLst/>
-          </a:prstGeom>
-          <a:solidFill>
-            <a:srgbClr val="161619"/>
-          </a:solidFill>
-          <a:ln>
-            <a:noFill/>
-          </a:ln>
-          <a:effectLst/>
-        </p:spPr>
-        <p:style>
-          <a:lnRef idx="1">
-            <a:schemeClr val="accent1"/>
-          </a:lnRef>
-          <a:fillRef idx="3">
-            <a:schemeClr val="accent1"/>
-          </a:fillRef>
-          <a:effectRef idx="2">
-            <a:schemeClr val="accent1"/>
-          </a:effectRef>
-          <a:fontRef idx="minor">
-            <a:schemeClr val="lt1"/>
-          </a:fontRef>
-        </p:style>
-        <p:txBody>
-          <a:bodyPr rtlCol="0" anchor="ctr"/>
-          <a:lstStyle/>
-          <a:p>
-            <a:pPr algn="ctr"/>
-          </a:p>
-        </p:txBody>
-      </p:sp>
       <p:pic>
         <p:nvPicPr>
-          <p:cNvPr id="9" name="Picture 8" descr="ic-chart.png"/>
+          <p:cNvPr id="20" name="Picture 19" descr="ic-people.png"/>
           <p:cNvPicPr>
             <a:picLocks noChangeAspect="1"/>
           </p:cNvPicPr>
@@ -6975,8 +7405,8 @@
         </p:blipFill>
         <p:spPr>
           <a:xfrm>
-            <a:off x="952500" y="2400300"/>
-            <a:ext cx="215900" cy="215900"/>
+            <a:off x="698500" y="3594100"/>
+            <a:ext cx="279400" cy="279400"/>
           </a:xfrm>
           <a:prstGeom prst="rect">
             <a:avLst/>
@@ -6985,14 +7415,14 @@
       </p:pic>
       <p:sp>
         <p:nvSpPr>
-          <p:cNvPr id="10" name="TextBox 9"/>
-          <p:cNvSpPr txBox="1"/>
-          <p:nvPr/>
-        </p:nvSpPr>
-        <p:spPr>
-          <a:xfrm>
-            <a:off x="952500" y="2717800"/>
-            <a:ext cx="2794000" cy="279400"/>
+          <p:cNvPr id="21" name="TextBox 20"/>
+          <p:cNvSpPr txBox="1"/>
+          <p:nvPr/>
+        </p:nvSpPr>
+        <p:spPr>
+          <a:xfrm>
+            <a:off x="698500" y="4013200"/>
+            <a:ext cx="3302000" cy="228600"/>
           </a:xfrm>
           <a:prstGeom prst="rect">
             <a:avLst/>
@@ -7007,27 +7437,27 @@
           <a:p>
             <a:pPr algn="l"/>
             <a:r>
-              <a:rPr sz="2000" b="0">
+              <a:rPr sz="1800" b="0">
                 <a:solidFill>
                   <a:srgbClr val="ECECEE"/>
                 </a:solidFill>
                 <a:latin typeface="Poppins"/>
               </a:rPr>
-              <a:t>CFO App</a:t>
-            </a:r>
-          </a:p>
-        </p:txBody>
-      </p:sp>
-      <p:sp>
-        <p:nvSpPr>
-          <p:cNvPr id="11" name="TextBox 10"/>
-          <p:cNvSpPr txBox="1"/>
-          <p:nvPr/>
-        </p:nvSpPr>
-        <p:spPr>
-          <a:xfrm>
-            <a:off x="952500" y="3175000"/>
-            <a:ext cx="2794000" cy="127000"/>
+              <a:t>Fewer roles per project</a:t>
+            </a:r>
+          </a:p>
+        </p:txBody>
+      </p:sp>
+      <p:sp>
+        <p:nvSpPr>
+          <p:cNvPr id="22" name="TextBox 21"/>
+          <p:cNvSpPr txBox="1"/>
+          <p:nvPr/>
+        </p:nvSpPr>
+        <p:spPr>
+          <a:xfrm>
+            <a:off x="698500" y="4394200"/>
+            <a:ext cx="3302000" cy="736600"/>
           </a:xfrm>
           <a:prstGeom prst="rect">
             <a:avLst/>
@@ -7040,253 +7470,26 @@
           </a:bodyPr>
           <a:lstStyle/>
           <a:p>
-            <a:pPr algn="l"/>
-            <a:r>
-              <a:rPr sz="900" b="0" spc="200">
-                <a:solidFill>
-                  <a:srgbClr val="9A9AA2"/>
-                </a:solidFill>
-                <a:latin typeface="Courier New"/>
-              </a:rPr>
-              <a:t>CLIENT / SECTOR</a:t>
-            </a:r>
-          </a:p>
-        </p:txBody>
-      </p:sp>
-      <p:sp>
-        <p:nvSpPr>
-          <p:cNvPr id="12" name="TextBox 11"/>
-          <p:cNvSpPr txBox="1"/>
-          <p:nvPr/>
-        </p:nvSpPr>
-        <p:spPr>
-          <a:xfrm>
-            <a:off x="952500" y="3340100"/>
-            <a:ext cx="2794000" cy="342900"/>
-          </a:xfrm>
-          <a:prstGeom prst="rect">
-            <a:avLst/>
-          </a:prstGeom>
-          <a:noFill/>
-        </p:spPr>
-        <p:txBody>
-          <a:bodyPr wrap="square" lIns="0" rIns="0" tIns="0" bIns="0" anchor="ctr">
-            <a:spAutoFit/>
-          </a:bodyPr>
-          <a:lstStyle/>
-          <a:p>
             <a:pPr algn="l">
               <a:lnSpc>
-                <a:spcPts val="1600"/>
+                <a:spcPts val="1900"/>
               </a:lnSpc>
             </a:pPr>
             <a:r>
               <a:rPr sz="1300" b="0">
                 <a:solidFill>
-                  <a:srgbClr val="FF6B3D"/>
+                  <a:srgbClr val="9A9AA2"/>
                 </a:solidFill>
                 <a:latin typeface="Poppins"/>
               </a:rPr>
-              <a:t>[Kunde oder Branche]</a:t>
-            </a:r>
-          </a:p>
-        </p:txBody>
-      </p:sp>
-      <p:sp>
-        <p:nvSpPr>
-          <p:cNvPr id="13" name="TextBox 12"/>
-          <p:cNvSpPr txBox="1"/>
-          <p:nvPr/>
-        </p:nvSpPr>
-        <p:spPr>
-          <a:xfrm>
-            <a:off x="952500" y="3759200"/>
-            <a:ext cx="2794000" cy="127000"/>
-          </a:xfrm>
-          <a:prstGeom prst="rect">
-            <a:avLst/>
-          </a:prstGeom>
-          <a:noFill/>
-        </p:spPr>
-        <p:txBody>
-          <a:bodyPr wrap="square" lIns="0" rIns="0" tIns="0" bIns="0" anchor="ctr">
-            <a:spAutoFit/>
-          </a:bodyPr>
-          <a:lstStyle/>
-          <a:p>
-            <a:pPr algn="l"/>
-            <a:r>
-              <a:rPr sz="900" b="0" spc="200">
-                <a:solidFill>
-                  <a:srgbClr val="9A9AA2"/>
-                </a:solidFill>
-                <a:latin typeface="Courier New"/>
-              </a:rPr>
-              <a:t>WHAT WE BUILT</a:t>
-            </a:r>
-          </a:p>
-        </p:txBody>
-      </p:sp>
-      <p:sp>
-        <p:nvSpPr>
-          <p:cNvPr id="14" name="TextBox 13"/>
-          <p:cNvSpPr txBox="1"/>
-          <p:nvPr/>
-        </p:nvSpPr>
-        <p:spPr>
-          <a:xfrm>
-            <a:off x="952500" y="3924300"/>
-            <a:ext cx="2794000" cy="342900"/>
-          </a:xfrm>
-          <a:prstGeom prst="rect">
-            <a:avLst/>
-          </a:prstGeom>
-          <a:noFill/>
-        </p:spPr>
-        <p:txBody>
-          <a:bodyPr wrap="square" lIns="0" rIns="0" tIns="0" bIns="0" anchor="ctr">
-            <a:spAutoFit/>
-          </a:bodyPr>
-          <a:lstStyle/>
-          <a:p>
-            <a:pPr algn="l">
-              <a:lnSpc>
-                <a:spcPts val="1600"/>
-              </a:lnSpc>
-            </a:pPr>
-            <a:r>
-              <a:rPr sz="1300" b="0">
-                <a:solidFill>
-                  <a:srgbClr val="FF6B3D"/>
-                </a:solidFill>
-                <a:latin typeface="Poppins"/>
-              </a:rPr>
-              <a:t>[was gebaut wurde]</a:t>
-            </a:r>
-          </a:p>
-        </p:txBody>
-      </p:sp>
-      <p:sp>
-        <p:nvSpPr>
-          <p:cNvPr id="15" name="TextBox 14"/>
-          <p:cNvSpPr txBox="1"/>
-          <p:nvPr/>
-        </p:nvSpPr>
-        <p:spPr>
-          <a:xfrm>
-            <a:off x="952500" y="4343400"/>
-            <a:ext cx="2794000" cy="127000"/>
-          </a:xfrm>
-          <a:prstGeom prst="rect">
-            <a:avLst/>
-          </a:prstGeom>
-          <a:noFill/>
-        </p:spPr>
-        <p:txBody>
-          <a:bodyPr wrap="square" lIns="0" rIns="0" tIns="0" bIns="0" anchor="ctr">
-            <a:spAutoFit/>
-          </a:bodyPr>
-          <a:lstStyle/>
-          <a:p>
-            <a:pPr algn="l"/>
-            <a:r>
-              <a:rPr sz="900" b="0" spc="200">
-                <a:solidFill>
-                  <a:srgbClr val="9A9AA2"/>
-                </a:solidFill>
-                <a:latin typeface="Courier New"/>
-              </a:rPr>
-              <a:t>RESULT</a:t>
-            </a:r>
-          </a:p>
-        </p:txBody>
-      </p:sp>
-      <p:sp>
-        <p:nvSpPr>
-          <p:cNvPr id="16" name="TextBox 15"/>
-          <p:cNvSpPr txBox="1"/>
-          <p:nvPr/>
-        </p:nvSpPr>
-        <p:spPr>
-          <a:xfrm>
-            <a:off x="952500" y="4508500"/>
-            <a:ext cx="2794000" cy="342900"/>
-          </a:xfrm>
-          <a:prstGeom prst="rect">
-            <a:avLst/>
-          </a:prstGeom>
-          <a:noFill/>
-        </p:spPr>
-        <p:txBody>
-          <a:bodyPr wrap="square" lIns="0" rIns="0" tIns="0" bIns="0" anchor="ctr">
-            <a:spAutoFit/>
-          </a:bodyPr>
-          <a:lstStyle/>
-          <a:p>
-            <a:pPr algn="l">
-              <a:lnSpc>
-                <a:spcPts val="1600"/>
-              </a:lnSpc>
-            </a:pPr>
-            <a:r>
-              <a:rPr sz="1300" b="0">
-                <a:solidFill>
-                  <a:srgbClr val="FF6B3D"/>
-                </a:solidFill>
-                <a:latin typeface="Poppins"/>
-              </a:rPr>
-              <a:t>[Ergebnis in einer Zeile]</a:t>
-            </a:r>
-          </a:p>
-        </p:txBody>
-      </p:sp>
-      <p:sp>
-        <p:nvSpPr>
-          <p:cNvPr id="17" name="Rectangle 16"/>
-          <p:cNvSpPr/>
-          <p:nvPr/>
-        </p:nvSpPr>
-        <p:spPr>
-          <a:xfrm>
-            <a:off x="4318000" y="2159000"/>
-            <a:ext cx="3302000" cy="2857500"/>
-          </a:xfrm>
-          <a:prstGeom prst="rect">
-            <a:avLst/>
-          </a:prstGeom>
-          <a:solidFill>
-            <a:srgbClr val="161619"/>
-          </a:solidFill>
-          <a:ln>
-            <a:noFill/>
-          </a:ln>
-          <a:effectLst/>
-        </p:spPr>
-        <p:style>
-          <a:lnRef idx="1">
-            <a:schemeClr val="accent1"/>
-          </a:lnRef>
-          <a:fillRef idx="3">
-            <a:schemeClr val="accent1"/>
-          </a:fillRef>
-          <a:effectRef idx="2">
-            <a:schemeClr val="accent1"/>
-          </a:effectRef>
-          <a:fontRef idx="minor">
-            <a:schemeClr val="lt1"/>
-          </a:fontRef>
-        </p:style>
-        <p:txBody>
-          <a:bodyPr rtlCol="0" anchor="ctr"/>
-          <a:lstStyle/>
-          <a:p>
-            <a:pPr algn="ctr"/>
+              <a:t>Eliminates or reduces business analyst, designer and developer headcount on every project.</a:t>
+            </a:r>
           </a:p>
         </p:txBody>
       </p:sp>
       <p:pic>
         <p:nvPicPr>
-          <p:cNvPr id="18" name="Picture 17" descr="ic-funnel.png"/>
+          <p:cNvPr id="23" name="Picture 22" descr="ic-person.png"/>
           <p:cNvPicPr>
             <a:picLocks noChangeAspect="1"/>
           </p:cNvPicPr>
@@ -7300,8 +7503,8 @@
         </p:blipFill>
         <p:spPr>
           <a:xfrm>
-            <a:off x="4572000" y="2400300"/>
-            <a:ext cx="215900" cy="215900"/>
+            <a:off x="4318000" y="3594100"/>
+            <a:ext cx="279400" cy="279400"/>
           </a:xfrm>
           <a:prstGeom prst="rect">
             <a:avLst/>
@@ -7310,14 +7513,14 @@
       </p:pic>
       <p:sp>
         <p:nvSpPr>
-          <p:cNvPr id="19" name="TextBox 18"/>
-          <p:cNvSpPr txBox="1"/>
-          <p:nvPr/>
-        </p:nvSpPr>
-        <p:spPr>
-          <a:xfrm>
-            <a:off x="4572000" y="2717800"/>
-            <a:ext cx="2794000" cy="279400"/>
+          <p:cNvPr id="24" name="TextBox 23"/>
+          <p:cNvSpPr txBox="1"/>
+          <p:nvPr/>
+        </p:nvSpPr>
+        <p:spPr>
+          <a:xfrm>
+            <a:off x="4318000" y="4013200"/>
+            <a:ext cx="3302000" cy="228600"/>
           </a:xfrm>
           <a:prstGeom prst="rect">
             <a:avLst/>
@@ -7332,27 +7535,27 @@
           <a:p>
             <a:pPr algn="l"/>
             <a:r>
-              <a:rPr sz="2000" b="0">
+              <a:rPr sz="1800" b="0">
                 <a:solidFill>
                   <a:srgbClr val="ECECEE"/>
                 </a:solidFill>
                 <a:latin typeface="Poppins"/>
               </a:rPr>
-              <a:t>Lead Generation</a:t>
-            </a:r>
-          </a:p>
-        </p:txBody>
-      </p:sp>
-      <p:sp>
-        <p:nvSpPr>
-          <p:cNvPr id="20" name="TextBox 19"/>
-          <p:cNvSpPr txBox="1"/>
-          <p:nvPr/>
-        </p:nvSpPr>
-        <p:spPr>
-          <a:xfrm>
-            <a:off x="4572000" y="3175000"/>
-            <a:ext cx="2794000" cy="127000"/>
+              <a:t>One developer, internally</a:t>
+            </a:r>
+          </a:p>
+        </p:txBody>
+      </p:sp>
+      <p:sp>
+        <p:nvSpPr>
+          <p:cNvPr id="25" name="TextBox 24"/>
+          <p:cNvSpPr txBox="1"/>
+          <p:nvPr/>
+        </p:nvSpPr>
+        <p:spPr>
+          <a:xfrm>
+            <a:off x="4318000" y="4394200"/>
+            <a:ext cx="3302000" cy="736600"/>
           </a:xfrm>
           <a:prstGeom prst="rect">
             <a:avLst/>
@@ -7365,253 +7568,26 @@
           </a:bodyPr>
           <a:lstStyle/>
           <a:p>
-            <a:pPr algn="l"/>
-            <a:r>
-              <a:rPr sz="900" b="0" spc="200">
-                <a:solidFill>
-                  <a:srgbClr val="9A9AA2"/>
-                </a:solidFill>
-                <a:latin typeface="Courier New"/>
-              </a:rPr>
-              <a:t>CLIENT / SECTOR</a:t>
-            </a:r>
-          </a:p>
-        </p:txBody>
-      </p:sp>
-      <p:sp>
-        <p:nvSpPr>
-          <p:cNvPr id="21" name="TextBox 20"/>
-          <p:cNvSpPr txBox="1"/>
-          <p:nvPr/>
-        </p:nvSpPr>
-        <p:spPr>
-          <a:xfrm>
-            <a:off x="4572000" y="3340100"/>
-            <a:ext cx="2794000" cy="342900"/>
-          </a:xfrm>
-          <a:prstGeom prst="rect">
-            <a:avLst/>
-          </a:prstGeom>
-          <a:noFill/>
-        </p:spPr>
-        <p:txBody>
-          <a:bodyPr wrap="square" lIns="0" rIns="0" tIns="0" bIns="0" anchor="ctr">
-            <a:spAutoFit/>
-          </a:bodyPr>
-          <a:lstStyle/>
-          <a:p>
             <a:pPr algn="l">
               <a:lnSpc>
-                <a:spcPts val="1600"/>
+                <a:spcPts val="1900"/>
               </a:lnSpc>
             </a:pPr>
             <a:r>
               <a:rPr sz="1300" b="0">
                 <a:solidFill>
-                  <a:srgbClr val="FF6B3D"/>
+                  <a:srgbClr val="9A9AA2"/>
                 </a:solidFill>
                 <a:latin typeface="Poppins"/>
               </a:rPr>
-              <a:t>[Kunde oder Branche]</a:t>
-            </a:r>
-          </a:p>
-        </p:txBody>
-      </p:sp>
-      <p:sp>
-        <p:nvSpPr>
-          <p:cNvPr id="22" name="TextBox 21"/>
-          <p:cNvSpPr txBox="1"/>
-          <p:nvPr/>
-        </p:nvSpPr>
-        <p:spPr>
-          <a:xfrm>
-            <a:off x="4572000" y="3759200"/>
-            <a:ext cx="2794000" cy="127000"/>
-          </a:xfrm>
-          <a:prstGeom prst="rect">
-            <a:avLst/>
-          </a:prstGeom>
-          <a:noFill/>
-        </p:spPr>
-        <p:txBody>
-          <a:bodyPr wrap="square" lIns="0" rIns="0" tIns="0" bIns="0" anchor="ctr">
-            <a:spAutoFit/>
-          </a:bodyPr>
-          <a:lstStyle/>
-          <a:p>
-            <a:pPr algn="l"/>
-            <a:r>
-              <a:rPr sz="900" b="0" spc="200">
-                <a:solidFill>
-                  <a:srgbClr val="9A9AA2"/>
-                </a:solidFill>
-                <a:latin typeface="Courier New"/>
-              </a:rPr>
-              <a:t>WHAT WE BUILT</a:t>
-            </a:r>
-          </a:p>
-        </p:txBody>
-      </p:sp>
-      <p:sp>
-        <p:nvSpPr>
-          <p:cNvPr id="23" name="TextBox 22"/>
-          <p:cNvSpPr txBox="1"/>
-          <p:nvPr/>
-        </p:nvSpPr>
-        <p:spPr>
-          <a:xfrm>
-            <a:off x="4572000" y="3924300"/>
-            <a:ext cx="2794000" cy="342900"/>
-          </a:xfrm>
-          <a:prstGeom prst="rect">
-            <a:avLst/>
-          </a:prstGeom>
-          <a:noFill/>
-        </p:spPr>
-        <p:txBody>
-          <a:bodyPr wrap="square" lIns="0" rIns="0" tIns="0" bIns="0" anchor="ctr">
-            <a:spAutoFit/>
-          </a:bodyPr>
-          <a:lstStyle/>
-          <a:p>
-            <a:pPr algn="l">
-              <a:lnSpc>
-                <a:spcPts val="1600"/>
-              </a:lnSpc>
-            </a:pPr>
-            <a:r>
-              <a:rPr sz="1300" b="0">
-                <a:solidFill>
-                  <a:srgbClr val="FF6B3D"/>
-                </a:solidFill>
-                <a:latin typeface="Poppins"/>
-              </a:rPr>
-              <a:t>[was gebaut wurde]</a:t>
-            </a:r>
-          </a:p>
-        </p:txBody>
-      </p:sp>
-      <p:sp>
-        <p:nvSpPr>
-          <p:cNvPr id="24" name="TextBox 23"/>
-          <p:cNvSpPr txBox="1"/>
-          <p:nvPr/>
-        </p:nvSpPr>
-        <p:spPr>
-          <a:xfrm>
-            <a:off x="4572000" y="4343400"/>
-            <a:ext cx="2794000" cy="127000"/>
-          </a:xfrm>
-          <a:prstGeom prst="rect">
-            <a:avLst/>
-          </a:prstGeom>
-          <a:noFill/>
-        </p:spPr>
-        <p:txBody>
-          <a:bodyPr wrap="square" lIns="0" rIns="0" tIns="0" bIns="0" anchor="ctr">
-            <a:spAutoFit/>
-          </a:bodyPr>
-          <a:lstStyle/>
-          <a:p>
-            <a:pPr algn="l"/>
-            <a:r>
-              <a:rPr sz="900" b="0" spc="200">
-                <a:solidFill>
-                  <a:srgbClr val="9A9AA2"/>
-                </a:solidFill>
-                <a:latin typeface="Courier New"/>
-              </a:rPr>
-              <a:t>RESULT</a:t>
-            </a:r>
-          </a:p>
-        </p:txBody>
-      </p:sp>
-      <p:sp>
-        <p:nvSpPr>
-          <p:cNvPr id="25" name="TextBox 24"/>
-          <p:cNvSpPr txBox="1"/>
-          <p:nvPr/>
-        </p:nvSpPr>
-        <p:spPr>
-          <a:xfrm>
-            <a:off x="4572000" y="4508500"/>
-            <a:ext cx="2794000" cy="342900"/>
-          </a:xfrm>
-          <a:prstGeom prst="rect">
-            <a:avLst/>
-          </a:prstGeom>
-          <a:noFill/>
-        </p:spPr>
-        <p:txBody>
-          <a:bodyPr wrap="square" lIns="0" rIns="0" tIns="0" bIns="0" anchor="ctr">
-            <a:spAutoFit/>
-          </a:bodyPr>
-          <a:lstStyle/>
-          <a:p>
-            <a:pPr algn="l">
-              <a:lnSpc>
-                <a:spcPts val="1600"/>
-              </a:lnSpc>
-            </a:pPr>
-            <a:r>
-              <a:rPr sz="1300" b="0">
-                <a:solidFill>
-                  <a:srgbClr val="FF6B3D"/>
-                </a:solidFill>
-                <a:latin typeface="Poppins"/>
-              </a:rPr>
-              <a:t>[Ergebnis in einer Zeile]</a:t>
-            </a:r>
-          </a:p>
-        </p:txBody>
-      </p:sp>
-      <p:sp>
-        <p:nvSpPr>
-          <p:cNvPr id="26" name="Rectangle 25"/>
-          <p:cNvSpPr/>
-          <p:nvPr/>
-        </p:nvSpPr>
-        <p:spPr>
-          <a:xfrm>
-            <a:off x="7937500" y="2159000"/>
-            <a:ext cx="3302000" cy="2857500"/>
-          </a:xfrm>
-          <a:prstGeom prst="rect">
-            <a:avLst/>
-          </a:prstGeom>
-          <a:solidFill>
-            <a:srgbClr val="161619"/>
-          </a:solidFill>
-          <a:ln>
-            <a:noFill/>
-          </a:ln>
-          <a:effectLst/>
-        </p:spPr>
-        <p:style>
-          <a:lnRef idx="1">
-            <a:schemeClr val="accent1"/>
-          </a:lnRef>
-          <a:fillRef idx="3">
-            <a:schemeClr val="accent1"/>
-          </a:fillRef>
-          <a:effectRef idx="2">
-            <a:schemeClr val="accent1"/>
-          </a:effectRef>
-          <a:fontRef idx="minor">
-            <a:schemeClr val="lt1"/>
-          </a:fontRef>
-        </p:style>
-        <p:txBody>
-          <a:bodyPr rtlCol="0" anchor="ctr"/>
-          <a:lstStyle/>
-          <a:p>
-            <a:pPr algn="ctr"/>
+              <a:t>AthenaRun runs its own projects with a single developer.</a:t>
+            </a:r>
           </a:p>
         </p:txBody>
       </p:sp>
       <p:pic>
         <p:nvPicPr>
-          <p:cNvPr id="27" name="Picture 26" descr="ic-bubble.png"/>
+          <p:cNvPr id="26" name="Picture 25" descr="ic-layers.png"/>
           <p:cNvPicPr>
             <a:picLocks noChangeAspect="1"/>
           </p:cNvPicPr>
@@ -7625,8 +7601,8 @@
         </p:blipFill>
         <p:spPr>
           <a:xfrm>
-            <a:off x="8191500" y="2400300"/>
-            <a:ext cx="215900" cy="215900"/>
+            <a:off x="7937500" y="3594100"/>
+            <a:ext cx="279400" cy="279400"/>
           </a:xfrm>
           <a:prstGeom prst="rect">
             <a:avLst/>
@@ -7635,14 +7611,14 @@
       </p:pic>
       <p:sp>
         <p:nvSpPr>
-          <p:cNvPr id="28" name="TextBox 27"/>
-          <p:cNvSpPr txBox="1"/>
-          <p:nvPr/>
-        </p:nvSpPr>
-        <p:spPr>
-          <a:xfrm>
-            <a:off x="8191500" y="2717800"/>
-            <a:ext cx="2794000" cy="279400"/>
+          <p:cNvPr id="27" name="TextBox 26"/>
+          <p:cNvSpPr txBox="1"/>
+          <p:nvPr/>
+        </p:nvSpPr>
+        <p:spPr>
+          <a:xfrm>
+            <a:off x="7937500" y="4013200"/>
+            <a:ext cx="3302000" cy="228600"/>
           </a:xfrm>
           <a:prstGeom prst="rect">
             <a:avLst/>
@@ -7657,27 +7633,27 @@
           <a:p>
             <a:pPr algn="l"/>
             <a:r>
-              <a:rPr sz="2000" b="0">
+              <a:rPr sz="1800" b="0">
                 <a:solidFill>
                   <a:srgbClr val="ECECEE"/>
                 </a:solidFill>
                 <a:latin typeface="Poppins"/>
               </a:rPr>
-              <a:t>Board Assistant</a:t>
-            </a:r>
-          </a:p>
-        </p:txBody>
-      </p:sp>
-      <p:sp>
-        <p:nvSpPr>
-          <p:cNvPr id="29" name="TextBox 28"/>
-          <p:cNvSpPr txBox="1"/>
-          <p:nvPr/>
-        </p:nvSpPr>
-        <p:spPr>
-          <a:xfrm>
-            <a:off x="8191500" y="3175000"/>
-            <a:ext cx="2794000" cy="127000"/>
+              <a:t>A head start on day one</a:t>
+            </a:r>
+          </a:p>
+        </p:txBody>
+      </p:sp>
+      <p:sp>
+        <p:nvSpPr>
+          <p:cNvPr id="28" name="TextBox 27"/>
+          <p:cNvSpPr txBox="1"/>
+          <p:nvPr/>
+        </p:nvSpPr>
+        <p:spPr>
+          <a:xfrm>
+            <a:off x="7937500" y="4394200"/>
+            <a:ext cx="3302000" cy="736600"/>
           </a:xfrm>
           <a:prstGeom prst="rect">
             <a:avLst/>
@@ -7690,16 +7666,64 @@
           </a:bodyPr>
           <a:lstStyle/>
           <a:p>
-            <a:pPr algn="l"/>
-            <a:r>
-              <a:rPr sz="900" b="0" spc="200">
+            <a:pPr algn="l">
+              <a:lnSpc>
+                <a:spcPts val="1900"/>
+              </a:lnSpc>
+            </a:pPr>
+            <a:r>
+              <a:rPr sz="1300" b="0">
                 <a:solidFill>
                   <a:srgbClr val="9A9AA2"/>
                 </a:solidFill>
-                <a:latin typeface="Courier New"/>
-              </a:rPr>
-              <a:t>CLIENT / SECTOR</a:t>
-            </a:r>
+                <a:latin typeface="Poppins"/>
+              </a:rPr>
+              <a:t>Customers inherit validated best practices and documented failure learnings from the first build.</a:t>
+            </a:r>
+          </a:p>
+        </p:txBody>
+      </p:sp>
+      <p:sp>
+        <p:nvSpPr>
+          <p:cNvPr id="29" name="Rectangle 28"/>
+          <p:cNvSpPr/>
+          <p:nvPr/>
+        </p:nvSpPr>
+        <p:spPr>
+          <a:xfrm>
+            <a:off x="698500" y="5207000"/>
+            <a:ext cx="10788650" cy="6350"/>
+          </a:xfrm>
+          <a:prstGeom prst="rect">
+            <a:avLst/>
+          </a:prstGeom>
+          <a:solidFill>
+            <a:srgbClr val="2B2B2D"/>
+          </a:solidFill>
+          <a:ln>
+            <a:noFill/>
+          </a:ln>
+          <a:effectLst/>
+        </p:spPr>
+        <p:style>
+          <a:lnRef idx="1">
+            <a:schemeClr val="accent1"/>
+          </a:lnRef>
+          <a:fillRef idx="3">
+            <a:schemeClr val="accent1"/>
+          </a:fillRef>
+          <a:effectRef idx="2">
+            <a:schemeClr val="accent1"/>
+          </a:effectRef>
+          <a:fontRef idx="minor">
+            <a:schemeClr val="lt1"/>
+          </a:fontRef>
+        </p:style>
+        <p:txBody>
+          <a:bodyPr rtlCol="0" anchor="ctr"/>
+          <a:lstStyle/>
+          <a:p>
+            <a:pPr algn="ctr"/>
           </a:p>
         </p:txBody>
       </p:sp>
@@ -7711,8 +7735,8 @@
         </p:nvSpPr>
         <p:spPr>
           <a:xfrm>
-            <a:off x="8191500" y="3340100"/>
-            <a:ext cx="2794000" cy="342900"/>
+            <a:off x="698500" y="5410200"/>
+            <a:ext cx="9906000" cy="215900"/>
           </a:xfrm>
           <a:prstGeom prst="rect">
             <a:avLst/>
@@ -7725,209 +7749,31 @@
           </a:bodyPr>
           <a:lstStyle/>
           <a:p>
-            <a:pPr algn="l">
-              <a:lnSpc>
-                <a:spcPts val="1600"/>
-              </a:lnSpc>
-            </a:pPr>
-            <a:r>
-              <a:rPr sz="1300" b="0">
-                <a:solidFill>
-                  <a:srgbClr val="FF6B3D"/>
+            <a:pPr algn="l"/>
+            <a:r>
+              <a:rPr sz="1600" b="1">
+                <a:solidFill>
+                  <a:srgbClr val="ECECEE"/>
                 </a:solidFill>
                 <a:latin typeface="Poppins"/>
               </a:rPr>
-              <a:t>[Kunde oder Branche]</a:t>
-            </a:r>
-          </a:p>
-        </p:txBody>
-      </p:sp>
-      <p:sp>
-        <p:nvSpPr>
-          <p:cNvPr id="31" name="TextBox 30"/>
-          <p:cNvSpPr txBox="1"/>
-          <p:nvPr/>
-        </p:nvSpPr>
-        <p:spPr>
-          <a:xfrm>
-            <a:off x="8191500" y="3759200"/>
-            <a:ext cx="2794000" cy="127000"/>
-          </a:xfrm>
-          <a:prstGeom prst="rect">
-            <a:avLst/>
-          </a:prstGeom>
-          <a:noFill/>
-        </p:spPr>
-        <p:txBody>
-          <a:bodyPr wrap="square" lIns="0" rIns="0" tIns="0" bIns="0" anchor="ctr">
-            <a:spAutoFit/>
-          </a:bodyPr>
-          <a:lstStyle/>
-          <a:p>
-            <a:pPr algn="l"/>
-            <a:r>
-              <a:rPr sz="900" b="0" spc="200">
+              <a:t>Same scope, a fraction of the team.</a:t>
+            </a:r>
+            <a:r>
+              <a:rPr sz="1600" b="0">
                 <a:solidFill>
                   <a:srgbClr val="9A9AA2"/>
                 </a:solidFill>
-                <a:latin typeface="Courier New"/>
-              </a:rPr>
-              <a:t>WHAT WE BUILT</a:t>
-            </a:r>
-          </a:p>
-        </p:txBody>
-      </p:sp>
-      <p:sp>
-        <p:nvSpPr>
-          <p:cNvPr id="32" name="TextBox 31"/>
-          <p:cNvSpPr txBox="1"/>
-          <p:nvPr/>
-        </p:nvSpPr>
-        <p:spPr>
-          <a:xfrm>
-            <a:off x="8191500" y="3924300"/>
-            <a:ext cx="2794000" cy="342900"/>
-          </a:xfrm>
-          <a:prstGeom prst="rect">
-            <a:avLst/>
-          </a:prstGeom>
-          <a:noFill/>
-        </p:spPr>
-        <p:txBody>
-          <a:bodyPr wrap="square" lIns="0" rIns="0" tIns="0" bIns="0" anchor="ctr">
-            <a:spAutoFit/>
-          </a:bodyPr>
-          <a:lstStyle/>
-          <a:p>
-            <a:pPr algn="l">
-              <a:lnSpc>
-                <a:spcPts val="1600"/>
-              </a:lnSpc>
-            </a:pPr>
-            <a:r>
-              <a:rPr sz="1300" b="0">
-                <a:solidFill>
-                  <a:srgbClr val="FF6B3D"/>
-                </a:solidFill>
                 <a:latin typeface="Poppins"/>
               </a:rPr>
-              <a:t>[was gebaut wurde]</a:t>
-            </a:r>
-          </a:p>
-        </p:txBody>
-      </p:sp>
-      <p:sp>
-        <p:nvSpPr>
-          <p:cNvPr id="33" name="TextBox 32"/>
-          <p:cNvSpPr txBox="1"/>
-          <p:nvPr/>
-        </p:nvSpPr>
-        <p:spPr>
-          <a:xfrm>
-            <a:off x="8191500" y="4343400"/>
-            <a:ext cx="2794000" cy="127000"/>
-          </a:xfrm>
-          <a:prstGeom prst="rect">
-            <a:avLst/>
-          </a:prstGeom>
-          <a:noFill/>
-        </p:spPr>
-        <p:txBody>
-          <a:bodyPr wrap="square" lIns="0" rIns="0" tIns="0" bIns="0" anchor="ctr">
-            <a:spAutoFit/>
-          </a:bodyPr>
-          <a:lstStyle/>
-          <a:p>
-            <a:pPr algn="l"/>
-            <a:r>
-              <a:rPr sz="900" b="0" spc="200">
-                <a:solidFill>
-                  <a:srgbClr val="9A9AA2"/>
-                </a:solidFill>
-                <a:latin typeface="Courier New"/>
-              </a:rPr>
-              <a:t>RESULT</a:t>
-            </a:r>
-          </a:p>
-        </p:txBody>
-      </p:sp>
-      <p:sp>
-        <p:nvSpPr>
-          <p:cNvPr id="34" name="TextBox 33"/>
-          <p:cNvSpPr txBox="1"/>
-          <p:nvPr/>
-        </p:nvSpPr>
-        <p:spPr>
-          <a:xfrm>
-            <a:off x="8191500" y="4508500"/>
-            <a:ext cx="2794000" cy="342900"/>
-          </a:xfrm>
-          <a:prstGeom prst="rect">
-            <a:avLst/>
-          </a:prstGeom>
-          <a:noFill/>
-        </p:spPr>
-        <p:txBody>
-          <a:bodyPr wrap="square" lIns="0" rIns="0" tIns="0" bIns="0" anchor="ctr">
-            <a:spAutoFit/>
-          </a:bodyPr>
-          <a:lstStyle/>
-          <a:p>
-            <a:pPr algn="l">
-              <a:lnSpc>
-                <a:spcPts val="1600"/>
-              </a:lnSpc>
-            </a:pPr>
-            <a:r>
-              <a:rPr sz="1300" b="0">
-                <a:solidFill>
-                  <a:srgbClr val="FF6B3D"/>
-                </a:solidFill>
-                <a:latin typeface="Poppins"/>
-              </a:rPr>
-              <a:t>[Ergebnis in einer Zeile]</a:t>
-            </a:r>
-          </a:p>
-        </p:txBody>
-      </p:sp>
-      <p:sp>
-        <p:nvSpPr>
-          <p:cNvPr id="35" name="TextBox 34"/>
-          <p:cNvSpPr txBox="1"/>
-          <p:nvPr/>
-        </p:nvSpPr>
-        <p:spPr>
-          <a:xfrm>
-            <a:off x="698500" y="5257800"/>
-            <a:ext cx="9525000" cy="152400"/>
-          </a:xfrm>
-          <a:prstGeom prst="rect">
-            <a:avLst/>
-          </a:prstGeom>
-          <a:noFill/>
-        </p:spPr>
-        <p:txBody>
-          <a:bodyPr wrap="square" lIns="0" rIns="0" tIns="0" bIns="0" anchor="ctr">
-            <a:spAutoFit/>
-          </a:bodyPr>
-          <a:lstStyle/>
-          <a:p>
-            <a:pPr algn="l"/>
-            <a:r>
-              <a:rPr sz="1000" b="0">
-                <a:solidFill>
-                  <a:srgbClr val="FF6B3D"/>
-                </a:solidFill>
-                <a:latin typeface="Courier New"/>
-              </a:rPr>
-              <a:t>PLACEHOLDER — replace the three bracketed fields per tile before this deck goes to an investor.</a:t>
+              <a:t>  The library is what makes that safe.</a:t>
             </a:r>
           </a:p>
         </p:txBody>
       </p:sp>
       <p:pic>
         <p:nvPicPr>
-          <p:cNvPr id="36" name="Picture 35" descr="logo.png"/>
+          <p:cNvPr id="31" name="Picture 30" descr="logo.png"/>
           <p:cNvPicPr>
             <a:picLocks noChangeAspect="1"/>
           </p:cNvPicPr>
@@ -8021,7 +7867,7 @@
                 </a:solidFill>
                 <a:latin typeface="Poppins"/>
               </a:rPr>
-              <a:t>One question.</a:t>
+              <a:t>References.</a:t>
             </a:r>
             <a:r>
               <a:rPr sz="2700" b="0">
@@ -8030,7 +7876,7 @@
                 </a:solidFill>
                 <a:latin typeface="Poppins"/>
               </a:rPr>
-              <a:t> </a:t>
+              <a:t> Three builds, three problems.</a:t>
             </a:r>
           </a:p>
         </p:txBody>
@@ -8065,7 +7911,7 @@
                 </a:solidFill>
                 <a:latin typeface="Courier New"/>
               </a:rPr>
-              <a:t>08 — One question</a:t>
+              <a:t>08 — References</a:t>
             </a:r>
           </a:p>
         </p:txBody>
@@ -8122,8 +7968,8 @@
         </p:nvSpPr>
         <p:spPr>
           <a:xfrm>
-            <a:off x="698500" y="1854200"/>
-            <a:ext cx="8890000" cy="203200"/>
+            <a:off x="698500" y="1320800"/>
+            <a:ext cx="8890000" cy="190500"/>
           </a:xfrm>
           <a:prstGeom prst="rect">
             <a:avLst/>
@@ -8144,21 +7990,133 @@
                 </a:solidFill>
                 <a:latin typeface="Poppins"/>
               </a:rPr>
-              <a:t>Ich lasse Ihnen eine Frage da, keinen Prospekt.</a:t>
-            </a:r>
-          </a:p>
-        </p:txBody>
-      </p:sp>
-      <p:sp>
-        <p:nvSpPr>
-          <p:cNvPr id="7" name="TextBox 6"/>
-          <p:cNvSpPr txBox="1"/>
-          <p:nvPr/>
-        </p:nvSpPr>
-        <p:spPr>
-          <a:xfrm>
-            <a:off x="698500" y="2209800"/>
-            <a:ext cx="10287000" cy="1651000"/>
+              <a:t>Shipped software, not pilots. Each one replaced a process that was running manually.</a:t>
+            </a:r>
+          </a:p>
+        </p:txBody>
+      </p:sp>
+      <p:sp>
+        <p:nvSpPr>
+          <p:cNvPr id="7" name="Rectangle 6"/>
+          <p:cNvSpPr/>
+          <p:nvPr/>
+        </p:nvSpPr>
+        <p:spPr>
+          <a:xfrm>
+            <a:off x="698500" y="1828800"/>
+            <a:ext cx="10788650" cy="6350"/>
+          </a:xfrm>
+          <a:prstGeom prst="rect">
+            <a:avLst/>
+          </a:prstGeom>
+          <a:solidFill>
+            <a:srgbClr val="2B2B2D"/>
+          </a:solidFill>
+          <a:ln>
+            <a:noFill/>
+          </a:ln>
+          <a:effectLst/>
+        </p:spPr>
+        <p:style>
+          <a:lnRef idx="1">
+            <a:schemeClr val="accent1"/>
+          </a:lnRef>
+          <a:fillRef idx="3">
+            <a:schemeClr val="accent1"/>
+          </a:fillRef>
+          <a:effectRef idx="2">
+            <a:schemeClr val="accent1"/>
+          </a:effectRef>
+          <a:fontRef idx="minor">
+            <a:schemeClr val="lt1"/>
+          </a:fontRef>
+        </p:style>
+        <p:txBody>
+          <a:bodyPr rtlCol="0" anchor="ctr"/>
+          <a:lstStyle/>
+          <a:p>
+            <a:pPr algn="ctr"/>
+          </a:p>
+        </p:txBody>
+      </p:sp>
+      <p:sp>
+        <p:nvSpPr>
+          <p:cNvPr id="8" name="Rectangle 7"/>
+          <p:cNvSpPr/>
+          <p:nvPr/>
+        </p:nvSpPr>
+        <p:spPr>
+          <a:xfrm>
+            <a:off x="698500" y="2159000"/>
+            <a:ext cx="3302000" cy="2857500"/>
+          </a:xfrm>
+          <a:prstGeom prst="rect">
+            <a:avLst/>
+          </a:prstGeom>
+          <a:solidFill>
+            <a:srgbClr val="161619"/>
+          </a:solidFill>
+          <a:ln>
+            <a:noFill/>
+          </a:ln>
+          <a:effectLst/>
+        </p:spPr>
+        <p:style>
+          <a:lnRef idx="1">
+            <a:schemeClr val="accent1"/>
+          </a:lnRef>
+          <a:fillRef idx="3">
+            <a:schemeClr val="accent1"/>
+          </a:fillRef>
+          <a:effectRef idx="2">
+            <a:schemeClr val="accent1"/>
+          </a:effectRef>
+          <a:fontRef idx="minor">
+            <a:schemeClr val="lt1"/>
+          </a:fontRef>
+        </p:style>
+        <p:txBody>
+          <a:bodyPr rtlCol="0" anchor="ctr"/>
+          <a:lstStyle/>
+          <a:p>
+            <a:pPr algn="ctr"/>
+          </a:p>
+        </p:txBody>
+      </p:sp>
+      <p:pic>
+        <p:nvPicPr>
+          <p:cNvPr id="9" name="Picture 8" descr="ic-chart.png"/>
+          <p:cNvPicPr>
+            <a:picLocks noChangeAspect="1"/>
+          </p:cNvPicPr>
+          <p:nvPr/>
+        </p:nvPicPr>
+        <p:blipFill>
+          <a:blip r:embed="rId3"/>
+          <a:stretch>
+            <a:fillRect/>
+          </a:stretch>
+        </p:blipFill>
+        <p:spPr>
+          <a:xfrm>
+            <a:off x="952500" y="2400300"/>
+            <a:ext cx="215900" cy="215900"/>
+          </a:xfrm>
+          <a:prstGeom prst="rect">
+            <a:avLst/>
+          </a:prstGeom>
+        </p:spPr>
+      </p:pic>
+      <p:sp>
+        <p:nvSpPr>
+          <p:cNvPr id="10" name="TextBox 9"/>
+          <p:cNvSpPr txBox="1"/>
+          <p:nvPr/>
+        </p:nvSpPr>
+        <p:spPr>
+          <a:xfrm>
+            <a:off x="952500" y="2717800"/>
+            <a:ext cx="2794000" cy="279400"/>
           </a:xfrm>
           <a:prstGeom prst="rect">
             <a:avLst/>
@@ -8171,51 +8129,64 @@
           </a:bodyPr>
           <a:lstStyle/>
           <a:p>
-            <a:pPr algn="l">
-              <a:lnSpc>
-                <a:spcPts val="4400"/>
-              </a:lnSpc>
-            </a:pPr>
-            <a:r>
-              <a:rPr sz="3300" b="0">
+            <a:pPr algn="l"/>
+            <a:r>
+              <a:rPr sz="2000" b="0">
                 <a:solidFill>
                   <a:srgbClr val="ECECEE"/>
                 </a:solidFill>
                 <a:latin typeface="Poppins"/>
               </a:rPr>
-              <a:t>Welcher Prozess bei Ihnen läuft heute in </a:t>
-            </a:r>
-            <a:r>
-              <a:rPr sz="3300" b="0">
-                <a:solidFill>
-                  <a:srgbClr val="FF6B3D"/>
-                </a:solidFill>
-                <a:latin typeface="Poppins"/>
-              </a:rPr>
-              <a:t>Excel</a:t>
-            </a:r>
-            <a:r>
-              <a:rPr sz="3300" b="0">
-                <a:solidFill>
-                  <a:srgbClr val="ECECEE"/>
-                </a:solidFill>
-                <a:latin typeface="Poppins"/>
-              </a:rPr>
-              <a:t> und sollte es seit einem Jahr nicht mehr?</a:t>
-            </a:r>
-          </a:p>
-        </p:txBody>
-      </p:sp>
-      <p:sp>
-        <p:nvSpPr>
-          <p:cNvPr id="8" name="TextBox 7"/>
-          <p:cNvSpPr txBox="1"/>
-          <p:nvPr/>
-        </p:nvSpPr>
-        <p:spPr>
-          <a:xfrm>
-            <a:off x="698500" y="4241800"/>
-            <a:ext cx="8890000" cy="508000"/>
+              <a:t>CFO App</a:t>
+            </a:r>
+          </a:p>
+        </p:txBody>
+      </p:sp>
+      <p:sp>
+        <p:nvSpPr>
+          <p:cNvPr id="11" name="TextBox 10"/>
+          <p:cNvSpPr txBox="1"/>
+          <p:nvPr/>
+        </p:nvSpPr>
+        <p:spPr>
+          <a:xfrm>
+            <a:off x="952500" y="3175000"/>
+            <a:ext cx="2794000" cy="127000"/>
+          </a:xfrm>
+          <a:prstGeom prst="rect">
+            <a:avLst/>
+          </a:prstGeom>
+          <a:noFill/>
+        </p:spPr>
+        <p:txBody>
+          <a:bodyPr wrap="square" lIns="0" rIns="0" tIns="0" bIns="0" anchor="ctr">
+            <a:spAutoFit/>
+          </a:bodyPr>
+          <a:lstStyle/>
+          <a:p>
+            <a:pPr algn="l"/>
+            <a:r>
+              <a:rPr sz="900" b="0" spc="200">
+                <a:solidFill>
+                  <a:srgbClr val="9A9AA2"/>
+                </a:solidFill>
+                <a:latin typeface="Courier New"/>
+              </a:rPr>
+              <a:t>CLIENT / SECTOR</a:t>
+            </a:r>
+          </a:p>
+        </p:txBody>
+      </p:sp>
+      <p:sp>
+        <p:nvSpPr>
+          <p:cNvPr id="12" name="TextBox 11"/>
+          <p:cNvSpPr txBox="1"/>
+          <p:nvPr/>
+        </p:nvSpPr>
+        <p:spPr>
+          <a:xfrm>
+            <a:off x="952500" y="3340100"/>
+            <a:ext cx="2794000" cy="342900"/>
           </a:xfrm>
           <a:prstGeom prst="rect">
             <a:avLst/>
@@ -8234,27 +8205,27 @@
               </a:lnSpc>
             </a:pPr>
             <a:r>
-              <a:rPr sz="1200" b="0">
-                <a:solidFill>
-                  <a:srgbClr val="9A9AA2"/>
+              <a:rPr sz="1300" b="0">
+                <a:solidFill>
+                  <a:srgbClr val="FF6B3D"/>
                 </a:solidFill>
                 <a:latin typeface="Poppins"/>
               </a:rPr>
-              <a:t>Wenn Ihnen dazu gerade etwas eingefallen ist — sprechen Sie mich an. Wir machen daraus eine Anwendung. Und wenn Ihnen zwanzig einfallen, reden wir über die Plattform statt über die Anwendung.</a:t>
-            </a:r>
-          </a:p>
-        </p:txBody>
-      </p:sp>
-      <p:sp>
-        <p:nvSpPr>
-          <p:cNvPr id="9" name="TextBox 8"/>
-          <p:cNvSpPr txBox="1"/>
-          <p:nvPr/>
-        </p:nvSpPr>
-        <p:spPr>
-          <a:xfrm>
-            <a:off x="7042150" y="6032500"/>
-            <a:ext cx="4445000" cy="165100"/>
+              <a:t>[Kunde oder Branche]</a:t>
+            </a:r>
+          </a:p>
+        </p:txBody>
+      </p:sp>
+      <p:sp>
+        <p:nvSpPr>
+          <p:cNvPr id="13" name="TextBox 12"/>
+          <p:cNvSpPr txBox="1"/>
+          <p:nvPr/>
+        </p:nvSpPr>
+        <p:spPr>
+          <a:xfrm>
+            <a:off x="952500" y="3759200"/>
+            <a:ext cx="2794000" cy="127000"/>
           </a:xfrm>
           <a:prstGeom prst="rect">
             <a:avLst/>
@@ -8267,29 +8238,827 @@
           </a:bodyPr>
           <a:lstStyle/>
           <a:p>
-            <a:pPr algn="r"/>
-            <a:r>
-              <a:rPr sz="1000" b="0">
+            <a:pPr algn="l"/>
+            <a:r>
+              <a:rPr sz="900" b="0" spc="200">
+                <a:solidFill>
+                  <a:srgbClr val="9A9AA2"/>
+                </a:solidFill>
+                <a:latin typeface="Courier New"/>
+              </a:rPr>
+              <a:t>WHAT WE BUILT</a:t>
+            </a:r>
+          </a:p>
+        </p:txBody>
+      </p:sp>
+      <p:sp>
+        <p:nvSpPr>
+          <p:cNvPr id="14" name="TextBox 13"/>
+          <p:cNvSpPr txBox="1"/>
+          <p:nvPr/>
+        </p:nvSpPr>
+        <p:spPr>
+          <a:xfrm>
+            <a:off x="952500" y="3924300"/>
+            <a:ext cx="2794000" cy="342900"/>
+          </a:xfrm>
+          <a:prstGeom prst="rect">
+            <a:avLst/>
+          </a:prstGeom>
+          <a:noFill/>
+        </p:spPr>
+        <p:txBody>
+          <a:bodyPr wrap="square" lIns="0" rIns="0" tIns="0" bIns="0" anchor="ctr">
+            <a:spAutoFit/>
+          </a:bodyPr>
+          <a:lstStyle/>
+          <a:p>
+            <a:pPr algn="l">
+              <a:lnSpc>
+                <a:spcPts val="1600"/>
+              </a:lnSpc>
+            </a:pPr>
+            <a:r>
+              <a:rPr sz="1300" b="0">
                 <a:solidFill>
                   <a:srgbClr val="FF6B3D"/>
                 </a:solidFill>
+                <a:latin typeface="Poppins"/>
+              </a:rPr>
+              <a:t>[was gebaut wurde]</a:t>
+            </a:r>
+          </a:p>
+        </p:txBody>
+      </p:sp>
+      <p:sp>
+        <p:nvSpPr>
+          <p:cNvPr id="15" name="TextBox 14"/>
+          <p:cNvSpPr txBox="1"/>
+          <p:nvPr/>
+        </p:nvSpPr>
+        <p:spPr>
+          <a:xfrm>
+            <a:off x="952500" y="4343400"/>
+            <a:ext cx="2794000" cy="127000"/>
+          </a:xfrm>
+          <a:prstGeom prst="rect">
+            <a:avLst/>
+          </a:prstGeom>
+          <a:noFill/>
+        </p:spPr>
+        <p:txBody>
+          <a:bodyPr wrap="square" lIns="0" rIns="0" tIns="0" bIns="0" anchor="ctr">
+            <a:spAutoFit/>
+          </a:bodyPr>
+          <a:lstStyle/>
+          <a:p>
+            <a:pPr algn="l"/>
+            <a:r>
+              <a:rPr sz="900" b="0" spc="200">
+                <a:solidFill>
+                  <a:srgbClr val="9A9AA2"/>
+                </a:solidFill>
                 <a:latin typeface="Courier New"/>
               </a:rPr>
-              <a:t>[Name · E-Mail · Telefon]</a:t>
-            </a:r>
+              <a:t>RESULT</a:t>
+            </a:r>
+          </a:p>
+        </p:txBody>
+      </p:sp>
+      <p:sp>
+        <p:nvSpPr>
+          <p:cNvPr id="16" name="TextBox 15"/>
+          <p:cNvSpPr txBox="1"/>
+          <p:nvPr/>
+        </p:nvSpPr>
+        <p:spPr>
+          <a:xfrm>
+            <a:off x="952500" y="4508500"/>
+            <a:ext cx="2794000" cy="342900"/>
+          </a:xfrm>
+          <a:prstGeom prst="rect">
+            <a:avLst/>
+          </a:prstGeom>
+          <a:noFill/>
+        </p:spPr>
+        <p:txBody>
+          <a:bodyPr wrap="square" lIns="0" rIns="0" tIns="0" bIns="0" anchor="ctr">
+            <a:spAutoFit/>
+          </a:bodyPr>
+          <a:lstStyle/>
+          <a:p>
+            <a:pPr algn="l">
+              <a:lnSpc>
+                <a:spcPts val="1600"/>
+              </a:lnSpc>
+            </a:pPr>
+            <a:r>
+              <a:rPr sz="1300" b="0">
+                <a:solidFill>
+                  <a:srgbClr val="FF6B3D"/>
+                </a:solidFill>
+                <a:latin typeface="Poppins"/>
+              </a:rPr>
+              <a:t>[Ergebnis in einer Zeile]</a:t>
+            </a:r>
+          </a:p>
+        </p:txBody>
+      </p:sp>
+      <p:sp>
+        <p:nvSpPr>
+          <p:cNvPr id="17" name="Rectangle 16"/>
+          <p:cNvSpPr/>
+          <p:nvPr/>
+        </p:nvSpPr>
+        <p:spPr>
+          <a:xfrm>
+            <a:off x="4318000" y="2159000"/>
+            <a:ext cx="3302000" cy="2857500"/>
+          </a:xfrm>
+          <a:prstGeom prst="rect">
+            <a:avLst/>
+          </a:prstGeom>
+          <a:solidFill>
+            <a:srgbClr val="161619"/>
+          </a:solidFill>
+          <a:ln>
+            <a:noFill/>
+          </a:ln>
+          <a:effectLst/>
+        </p:spPr>
+        <p:style>
+          <a:lnRef idx="1">
+            <a:schemeClr val="accent1"/>
+          </a:lnRef>
+          <a:fillRef idx="3">
+            <a:schemeClr val="accent1"/>
+          </a:fillRef>
+          <a:effectRef idx="2">
+            <a:schemeClr val="accent1"/>
+          </a:effectRef>
+          <a:fontRef idx="minor">
+            <a:schemeClr val="lt1"/>
+          </a:fontRef>
+        </p:style>
+        <p:txBody>
+          <a:bodyPr rtlCol="0" anchor="ctr"/>
+          <a:lstStyle/>
+          <a:p>
+            <a:pPr algn="ctr"/>
           </a:p>
         </p:txBody>
       </p:sp>
       <p:pic>
         <p:nvPicPr>
-          <p:cNvPr id="10" name="Picture 9" descr="logo.png"/>
+          <p:cNvPr id="18" name="Picture 17" descr="ic-funnel.png"/>
           <p:cNvPicPr>
             <a:picLocks noChangeAspect="1"/>
           </p:cNvPicPr>
           <p:nvPr/>
         </p:nvPicPr>
         <p:blipFill>
-          <a:blip r:embed="rId3"/>
+          <a:blip r:embed="rId4"/>
+          <a:stretch>
+            <a:fillRect/>
+          </a:stretch>
+        </p:blipFill>
+        <p:spPr>
+          <a:xfrm>
+            <a:off x="4572000" y="2400300"/>
+            <a:ext cx="215900" cy="215900"/>
+          </a:xfrm>
+          <a:prstGeom prst="rect">
+            <a:avLst/>
+          </a:prstGeom>
+        </p:spPr>
+      </p:pic>
+      <p:sp>
+        <p:nvSpPr>
+          <p:cNvPr id="19" name="TextBox 18"/>
+          <p:cNvSpPr txBox="1"/>
+          <p:nvPr/>
+        </p:nvSpPr>
+        <p:spPr>
+          <a:xfrm>
+            <a:off x="4572000" y="2717800"/>
+            <a:ext cx="2794000" cy="279400"/>
+          </a:xfrm>
+          <a:prstGeom prst="rect">
+            <a:avLst/>
+          </a:prstGeom>
+          <a:noFill/>
+        </p:spPr>
+        <p:txBody>
+          <a:bodyPr wrap="square" lIns="0" rIns="0" tIns="0" bIns="0" anchor="ctr">
+            <a:spAutoFit/>
+          </a:bodyPr>
+          <a:lstStyle/>
+          <a:p>
+            <a:pPr algn="l"/>
+            <a:r>
+              <a:rPr sz="2000" b="0">
+                <a:solidFill>
+                  <a:srgbClr val="ECECEE"/>
+                </a:solidFill>
+                <a:latin typeface="Poppins"/>
+              </a:rPr>
+              <a:t>Lead Generation</a:t>
+            </a:r>
+          </a:p>
+        </p:txBody>
+      </p:sp>
+      <p:sp>
+        <p:nvSpPr>
+          <p:cNvPr id="20" name="TextBox 19"/>
+          <p:cNvSpPr txBox="1"/>
+          <p:nvPr/>
+        </p:nvSpPr>
+        <p:spPr>
+          <a:xfrm>
+            <a:off x="4572000" y="3175000"/>
+            <a:ext cx="2794000" cy="127000"/>
+          </a:xfrm>
+          <a:prstGeom prst="rect">
+            <a:avLst/>
+          </a:prstGeom>
+          <a:noFill/>
+        </p:spPr>
+        <p:txBody>
+          <a:bodyPr wrap="square" lIns="0" rIns="0" tIns="0" bIns="0" anchor="ctr">
+            <a:spAutoFit/>
+          </a:bodyPr>
+          <a:lstStyle/>
+          <a:p>
+            <a:pPr algn="l"/>
+            <a:r>
+              <a:rPr sz="900" b="0" spc="200">
+                <a:solidFill>
+                  <a:srgbClr val="9A9AA2"/>
+                </a:solidFill>
+                <a:latin typeface="Courier New"/>
+              </a:rPr>
+              <a:t>CLIENT / SECTOR</a:t>
+            </a:r>
+          </a:p>
+        </p:txBody>
+      </p:sp>
+      <p:sp>
+        <p:nvSpPr>
+          <p:cNvPr id="21" name="TextBox 20"/>
+          <p:cNvSpPr txBox="1"/>
+          <p:nvPr/>
+        </p:nvSpPr>
+        <p:spPr>
+          <a:xfrm>
+            <a:off x="4572000" y="3340100"/>
+            <a:ext cx="2794000" cy="342900"/>
+          </a:xfrm>
+          <a:prstGeom prst="rect">
+            <a:avLst/>
+          </a:prstGeom>
+          <a:noFill/>
+        </p:spPr>
+        <p:txBody>
+          <a:bodyPr wrap="square" lIns="0" rIns="0" tIns="0" bIns="0" anchor="ctr">
+            <a:spAutoFit/>
+          </a:bodyPr>
+          <a:lstStyle/>
+          <a:p>
+            <a:pPr algn="l">
+              <a:lnSpc>
+                <a:spcPts val="1600"/>
+              </a:lnSpc>
+            </a:pPr>
+            <a:r>
+              <a:rPr sz="1300" b="0">
+                <a:solidFill>
+                  <a:srgbClr val="FF6B3D"/>
+                </a:solidFill>
+                <a:latin typeface="Poppins"/>
+              </a:rPr>
+              <a:t>[Kunde oder Branche]</a:t>
+            </a:r>
+          </a:p>
+        </p:txBody>
+      </p:sp>
+      <p:sp>
+        <p:nvSpPr>
+          <p:cNvPr id="22" name="TextBox 21"/>
+          <p:cNvSpPr txBox="1"/>
+          <p:nvPr/>
+        </p:nvSpPr>
+        <p:spPr>
+          <a:xfrm>
+            <a:off x="4572000" y="3759200"/>
+            <a:ext cx="2794000" cy="127000"/>
+          </a:xfrm>
+          <a:prstGeom prst="rect">
+            <a:avLst/>
+          </a:prstGeom>
+          <a:noFill/>
+        </p:spPr>
+        <p:txBody>
+          <a:bodyPr wrap="square" lIns="0" rIns="0" tIns="0" bIns="0" anchor="ctr">
+            <a:spAutoFit/>
+          </a:bodyPr>
+          <a:lstStyle/>
+          <a:p>
+            <a:pPr algn="l"/>
+            <a:r>
+              <a:rPr sz="900" b="0" spc="200">
+                <a:solidFill>
+                  <a:srgbClr val="9A9AA2"/>
+                </a:solidFill>
+                <a:latin typeface="Courier New"/>
+              </a:rPr>
+              <a:t>WHAT WE BUILT</a:t>
+            </a:r>
+          </a:p>
+        </p:txBody>
+      </p:sp>
+      <p:sp>
+        <p:nvSpPr>
+          <p:cNvPr id="23" name="TextBox 22"/>
+          <p:cNvSpPr txBox="1"/>
+          <p:nvPr/>
+        </p:nvSpPr>
+        <p:spPr>
+          <a:xfrm>
+            <a:off x="4572000" y="3924300"/>
+            <a:ext cx="2794000" cy="342900"/>
+          </a:xfrm>
+          <a:prstGeom prst="rect">
+            <a:avLst/>
+          </a:prstGeom>
+          <a:noFill/>
+        </p:spPr>
+        <p:txBody>
+          <a:bodyPr wrap="square" lIns="0" rIns="0" tIns="0" bIns="0" anchor="ctr">
+            <a:spAutoFit/>
+          </a:bodyPr>
+          <a:lstStyle/>
+          <a:p>
+            <a:pPr algn="l">
+              <a:lnSpc>
+                <a:spcPts val="1600"/>
+              </a:lnSpc>
+            </a:pPr>
+            <a:r>
+              <a:rPr sz="1300" b="0">
+                <a:solidFill>
+                  <a:srgbClr val="FF6B3D"/>
+                </a:solidFill>
+                <a:latin typeface="Poppins"/>
+              </a:rPr>
+              <a:t>[was gebaut wurde]</a:t>
+            </a:r>
+          </a:p>
+        </p:txBody>
+      </p:sp>
+      <p:sp>
+        <p:nvSpPr>
+          <p:cNvPr id="24" name="TextBox 23"/>
+          <p:cNvSpPr txBox="1"/>
+          <p:nvPr/>
+        </p:nvSpPr>
+        <p:spPr>
+          <a:xfrm>
+            <a:off x="4572000" y="4343400"/>
+            <a:ext cx="2794000" cy="127000"/>
+          </a:xfrm>
+          <a:prstGeom prst="rect">
+            <a:avLst/>
+          </a:prstGeom>
+          <a:noFill/>
+        </p:spPr>
+        <p:txBody>
+          <a:bodyPr wrap="square" lIns="0" rIns="0" tIns="0" bIns="0" anchor="ctr">
+            <a:spAutoFit/>
+          </a:bodyPr>
+          <a:lstStyle/>
+          <a:p>
+            <a:pPr algn="l"/>
+            <a:r>
+              <a:rPr sz="900" b="0" spc="200">
+                <a:solidFill>
+                  <a:srgbClr val="9A9AA2"/>
+                </a:solidFill>
+                <a:latin typeface="Courier New"/>
+              </a:rPr>
+              <a:t>RESULT</a:t>
+            </a:r>
+          </a:p>
+        </p:txBody>
+      </p:sp>
+      <p:sp>
+        <p:nvSpPr>
+          <p:cNvPr id="25" name="TextBox 24"/>
+          <p:cNvSpPr txBox="1"/>
+          <p:nvPr/>
+        </p:nvSpPr>
+        <p:spPr>
+          <a:xfrm>
+            <a:off x="4572000" y="4508500"/>
+            <a:ext cx="2794000" cy="342900"/>
+          </a:xfrm>
+          <a:prstGeom prst="rect">
+            <a:avLst/>
+          </a:prstGeom>
+          <a:noFill/>
+        </p:spPr>
+        <p:txBody>
+          <a:bodyPr wrap="square" lIns="0" rIns="0" tIns="0" bIns="0" anchor="ctr">
+            <a:spAutoFit/>
+          </a:bodyPr>
+          <a:lstStyle/>
+          <a:p>
+            <a:pPr algn="l">
+              <a:lnSpc>
+                <a:spcPts val="1600"/>
+              </a:lnSpc>
+            </a:pPr>
+            <a:r>
+              <a:rPr sz="1300" b="0">
+                <a:solidFill>
+                  <a:srgbClr val="FF6B3D"/>
+                </a:solidFill>
+                <a:latin typeface="Poppins"/>
+              </a:rPr>
+              <a:t>[Ergebnis in einer Zeile]</a:t>
+            </a:r>
+          </a:p>
+        </p:txBody>
+      </p:sp>
+      <p:sp>
+        <p:nvSpPr>
+          <p:cNvPr id="26" name="Rectangle 25"/>
+          <p:cNvSpPr/>
+          <p:nvPr/>
+        </p:nvSpPr>
+        <p:spPr>
+          <a:xfrm>
+            <a:off x="7937500" y="2159000"/>
+            <a:ext cx="3302000" cy="2857500"/>
+          </a:xfrm>
+          <a:prstGeom prst="rect">
+            <a:avLst/>
+          </a:prstGeom>
+          <a:solidFill>
+            <a:srgbClr val="161619"/>
+          </a:solidFill>
+          <a:ln>
+            <a:noFill/>
+          </a:ln>
+          <a:effectLst/>
+        </p:spPr>
+        <p:style>
+          <a:lnRef idx="1">
+            <a:schemeClr val="accent1"/>
+          </a:lnRef>
+          <a:fillRef idx="3">
+            <a:schemeClr val="accent1"/>
+          </a:fillRef>
+          <a:effectRef idx="2">
+            <a:schemeClr val="accent1"/>
+          </a:effectRef>
+          <a:fontRef idx="minor">
+            <a:schemeClr val="lt1"/>
+          </a:fontRef>
+        </p:style>
+        <p:txBody>
+          <a:bodyPr rtlCol="0" anchor="ctr"/>
+          <a:lstStyle/>
+          <a:p>
+            <a:pPr algn="ctr"/>
+          </a:p>
+        </p:txBody>
+      </p:sp>
+      <p:pic>
+        <p:nvPicPr>
+          <p:cNvPr id="27" name="Picture 26" descr="ic-bubble.png"/>
+          <p:cNvPicPr>
+            <a:picLocks noChangeAspect="1"/>
+          </p:cNvPicPr>
+          <p:nvPr/>
+        </p:nvPicPr>
+        <p:blipFill>
+          <a:blip r:embed="rId5"/>
+          <a:stretch>
+            <a:fillRect/>
+          </a:stretch>
+        </p:blipFill>
+        <p:spPr>
+          <a:xfrm>
+            <a:off x="8191500" y="2400300"/>
+            <a:ext cx="215900" cy="215900"/>
+          </a:xfrm>
+          <a:prstGeom prst="rect">
+            <a:avLst/>
+          </a:prstGeom>
+        </p:spPr>
+      </p:pic>
+      <p:sp>
+        <p:nvSpPr>
+          <p:cNvPr id="28" name="TextBox 27"/>
+          <p:cNvSpPr txBox="1"/>
+          <p:nvPr/>
+        </p:nvSpPr>
+        <p:spPr>
+          <a:xfrm>
+            <a:off x="8191500" y="2717800"/>
+            <a:ext cx="2794000" cy="279400"/>
+          </a:xfrm>
+          <a:prstGeom prst="rect">
+            <a:avLst/>
+          </a:prstGeom>
+          <a:noFill/>
+        </p:spPr>
+        <p:txBody>
+          <a:bodyPr wrap="square" lIns="0" rIns="0" tIns="0" bIns="0" anchor="ctr">
+            <a:spAutoFit/>
+          </a:bodyPr>
+          <a:lstStyle/>
+          <a:p>
+            <a:pPr algn="l"/>
+            <a:r>
+              <a:rPr sz="2000" b="0">
+                <a:solidFill>
+                  <a:srgbClr val="ECECEE"/>
+                </a:solidFill>
+                <a:latin typeface="Poppins"/>
+              </a:rPr>
+              <a:t>Board Assistant</a:t>
+            </a:r>
+          </a:p>
+        </p:txBody>
+      </p:sp>
+      <p:sp>
+        <p:nvSpPr>
+          <p:cNvPr id="29" name="TextBox 28"/>
+          <p:cNvSpPr txBox="1"/>
+          <p:nvPr/>
+        </p:nvSpPr>
+        <p:spPr>
+          <a:xfrm>
+            <a:off x="8191500" y="3175000"/>
+            <a:ext cx="2794000" cy="127000"/>
+          </a:xfrm>
+          <a:prstGeom prst="rect">
+            <a:avLst/>
+          </a:prstGeom>
+          <a:noFill/>
+        </p:spPr>
+        <p:txBody>
+          <a:bodyPr wrap="square" lIns="0" rIns="0" tIns="0" bIns="0" anchor="ctr">
+            <a:spAutoFit/>
+          </a:bodyPr>
+          <a:lstStyle/>
+          <a:p>
+            <a:pPr algn="l"/>
+            <a:r>
+              <a:rPr sz="900" b="0" spc="200">
+                <a:solidFill>
+                  <a:srgbClr val="9A9AA2"/>
+                </a:solidFill>
+                <a:latin typeface="Courier New"/>
+              </a:rPr>
+              <a:t>CLIENT / SECTOR</a:t>
+            </a:r>
+          </a:p>
+        </p:txBody>
+      </p:sp>
+      <p:sp>
+        <p:nvSpPr>
+          <p:cNvPr id="30" name="TextBox 29"/>
+          <p:cNvSpPr txBox="1"/>
+          <p:nvPr/>
+        </p:nvSpPr>
+        <p:spPr>
+          <a:xfrm>
+            <a:off x="8191500" y="3340100"/>
+            <a:ext cx="2794000" cy="342900"/>
+          </a:xfrm>
+          <a:prstGeom prst="rect">
+            <a:avLst/>
+          </a:prstGeom>
+          <a:noFill/>
+        </p:spPr>
+        <p:txBody>
+          <a:bodyPr wrap="square" lIns="0" rIns="0" tIns="0" bIns="0" anchor="ctr">
+            <a:spAutoFit/>
+          </a:bodyPr>
+          <a:lstStyle/>
+          <a:p>
+            <a:pPr algn="l">
+              <a:lnSpc>
+                <a:spcPts val="1600"/>
+              </a:lnSpc>
+            </a:pPr>
+            <a:r>
+              <a:rPr sz="1300" b="0">
+                <a:solidFill>
+                  <a:srgbClr val="FF6B3D"/>
+                </a:solidFill>
+                <a:latin typeface="Poppins"/>
+              </a:rPr>
+              <a:t>[Kunde oder Branche]</a:t>
+            </a:r>
+          </a:p>
+        </p:txBody>
+      </p:sp>
+      <p:sp>
+        <p:nvSpPr>
+          <p:cNvPr id="31" name="TextBox 30"/>
+          <p:cNvSpPr txBox="1"/>
+          <p:nvPr/>
+        </p:nvSpPr>
+        <p:spPr>
+          <a:xfrm>
+            <a:off x="8191500" y="3759200"/>
+            <a:ext cx="2794000" cy="127000"/>
+          </a:xfrm>
+          <a:prstGeom prst="rect">
+            <a:avLst/>
+          </a:prstGeom>
+          <a:noFill/>
+        </p:spPr>
+        <p:txBody>
+          <a:bodyPr wrap="square" lIns="0" rIns="0" tIns="0" bIns="0" anchor="ctr">
+            <a:spAutoFit/>
+          </a:bodyPr>
+          <a:lstStyle/>
+          <a:p>
+            <a:pPr algn="l"/>
+            <a:r>
+              <a:rPr sz="900" b="0" spc="200">
+                <a:solidFill>
+                  <a:srgbClr val="9A9AA2"/>
+                </a:solidFill>
+                <a:latin typeface="Courier New"/>
+              </a:rPr>
+              <a:t>WHAT WE BUILT</a:t>
+            </a:r>
+          </a:p>
+        </p:txBody>
+      </p:sp>
+      <p:sp>
+        <p:nvSpPr>
+          <p:cNvPr id="32" name="TextBox 31"/>
+          <p:cNvSpPr txBox="1"/>
+          <p:nvPr/>
+        </p:nvSpPr>
+        <p:spPr>
+          <a:xfrm>
+            <a:off x="8191500" y="3924300"/>
+            <a:ext cx="2794000" cy="342900"/>
+          </a:xfrm>
+          <a:prstGeom prst="rect">
+            <a:avLst/>
+          </a:prstGeom>
+          <a:noFill/>
+        </p:spPr>
+        <p:txBody>
+          <a:bodyPr wrap="square" lIns="0" rIns="0" tIns="0" bIns="0" anchor="ctr">
+            <a:spAutoFit/>
+          </a:bodyPr>
+          <a:lstStyle/>
+          <a:p>
+            <a:pPr algn="l">
+              <a:lnSpc>
+                <a:spcPts val="1600"/>
+              </a:lnSpc>
+            </a:pPr>
+            <a:r>
+              <a:rPr sz="1300" b="0">
+                <a:solidFill>
+                  <a:srgbClr val="FF6B3D"/>
+                </a:solidFill>
+                <a:latin typeface="Poppins"/>
+              </a:rPr>
+              <a:t>[was gebaut wurde]</a:t>
+            </a:r>
+          </a:p>
+        </p:txBody>
+      </p:sp>
+      <p:sp>
+        <p:nvSpPr>
+          <p:cNvPr id="33" name="TextBox 32"/>
+          <p:cNvSpPr txBox="1"/>
+          <p:nvPr/>
+        </p:nvSpPr>
+        <p:spPr>
+          <a:xfrm>
+            <a:off x="8191500" y="4343400"/>
+            <a:ext cx="2794000" cy="127000"/>
+          </a:xfrm>
+          <a:prstGeom prst="rect">
+            <a:avLst/>
+          </a:prstGeom>
+          <a:noFill/>
+        </p:spPr>
+        <p:txBody>
+          <a:bodyPr wrap="square" lIns="0" rIns="0" tIns="0" bIns="0" anchor="ctr">
+            <a:spAutoFit/>
+          </a:bodyPr>
+          <a:lstStyle/>
+          <a:p>
+            <a:pPr algn="l"/>
+            <a:r>
+              <a:rPr sz="900" b="0" spc="200">
+                <a:solidFill>
+                  <a:srgbClr val="9A9AA2"/>
+                </a:solidFill>
+                <a:latin typeface="Courier New"/>
+              </a:rPr>
+              <a:t>RESULT</a:t>
+            </a:r>
+          </a:p>
+        </p:txBody>
+      </p:sp>
+      <p:sp>
+        <p:nvSpPr>
+          <p:cNvPr id="34" name="TextBox 33"/>
+          <p:cNvSpPr txBox="1"/>
+          <p:nvPr/>
+        </p:nvSpPr>
+        <p:spPr>
+          <a:xfrm>
+            <a:off x="8191500" y="4508500"/>
+            <a:ext cx="2794000" cy="342900"/>
+          </a:xfrm>
+          <a:prstGeom prst="rect">
+            <a:avLst/>
+          </a:prstGeom>
+          <a:noFill/>
+        </p:spPr>
+        <p:txBody>
+          <a:bodyPr wrap="square" lIns="0" rIns="0" tIns="0" bIns="0" anchor="ctr">
+            <a:spAutoFit/>
+          </a:bodyPr>
+          <a:lstStyle/>
+          <a:p>
+            <a:pPr algn="l">
+              <a:lnSpc>
+                <a:spcPts val="1600"/>
+              </a:lnSpc>
+            </a:pPr>
+            <a:r>
+              <a:rPr sz="1300" b="0">
+                <a:solidFill>
+                  <a:srgbClr val="FF6B3D"/>
+                </a:solidFill>
+                <a:latin typeface="Poppins"/>
+              </a:rPr>
+              <a:t>[Ergebnis in einer Zeile]</a:t>
+            </a:r>
+          </a:p>
+        </p:txBody>
+      </p:sp>
+      <p:sp>
+        <p:nvSpPr>
+          <p:cNvPr id="35" name="TextBox 34"/>
+          <p:cNvSpPr txBox="1"/>
+          <p:nvPr/>
+        </p:nvSpPr>
+        <p:spPr>
+          <a:xfrm>
+            <a:off x="698500" y="5257800"/>
+            <a:ext cx="9525000" cy="152400"/>
+          </a:xfrm>
+          <a:prstGeom prst="rect">
+            <a:avLst/>
+          </a:prstGeom>
+          <a:noFill/>
+        </p:spPr>
+        <p:txBody>
+          <a:bodyPr wrap="square" lIns="0" rIns="0" tIns="0" bIns="0" anchor="ctr">
+            <a:spAutoFit/>
+          </a:bodyPr>
+          <a:lstStyle/>
+          <a:p>
+            <a:pPr algn="l"/>
+            <a:r>
+              <a:rPr sz="1000" b="0">
+                <a:solidFill>
+                  <a:srgbClr val="FF6B3D"/>
+                </a:solidFill>
+                <a:latin typeface="Courier New"/>
+              </a:rPr>
+              <a:t>PLACEHOLDER — replace the three bracketed fields per tile before this deck goes to an investor.</a:t>
+            </a:r>
+          </a:p>
+        </p:txBody>
+      </p:sp>
+      <p:pic>
+        <p:nvPicPr>
+          <p:cNvPr id="36" name="Picture 35" descr="logo.png"/>
+          <p:cNvPicPr>
+            <a:picLocks noChangeAspect="1"/>
+          </p:cNvPicPr>
+          <p:nvPr/>
+        </p:nvPicPr>
+        <p:blipFill>
+          <a:blip r:embed="rId6"/>
           <a:stretch>
             <a:fillRect/>
           </a:stretch>
@@ -8376,7 +9145,7 @@
                 </a:solidFill>
                 <a:latin typeface="Poppins"/>
               </a:rPr>
-              <a:t>Further questions.</a:t>
+              <a:t>One question.</a:t>
             </a:r>
             <a:r>
               <a:rPr sz="2700" b="0">
@@ -8420,7 +9189,362 @@
                 </a:solidFill>
                 <a:latin typeface="Courier New"/>
               </a:rPr>
-              <a:t>09 — Appendix</a:t>
+              <a:t>09 — One question</a:t>
+            </a:r>
+          </a:p>
+        </p:txBody>
+      </p:sp>
+      <p:sp>
+        <p:nvSpPr>
+          <p:cNvPr id="5" name="Rectangle 4"/>
+          <p:cNvSpPr/>
+          <p:nvPr/>
+        </p:nvSpPr>
+        <p:spPr>
+          <a:xfrm>
+            <a:off x="698500" y="1092200"/>
+            <a:ext cx="10788650" cy="6350"/>
+          </a:xfrm>
+          <a:prstGeom prst="rect">
+            <a:avLst/>
+          </a:prstGeom>
+          <a:solidFill>
+            <a:srgbClr val="2B2B2D"/>
+          </a:solidFill>
+          <a:ln>
+            <a:noFill/>
+          </a:ln>
+          <a:effectLst/>
+        </p:spPr>
+        <p:style>
+          <a:lnRef idx="1">
+            <a:schemeClr val="accent1"/>
+          </a:lnRef>
+          <a:fillRef idx="3">
+            <a:schemeClr val="accent1"/>
+          </a:fillRef>
+          <a:effectRef idx="2">
+            <a:schemeClr val="accent1"/>
+          </a:effectRef>
+          <a:fontRef idx="minor">
+            <a:schemeClr val="lt1"/>
+          </a:fontRef>
+        </p:style>
+        <p:txBody>
+          <a:bodyPr rtlCol="0" anchor="ctr"/>
+          <a:lstStyle/>
+          <a:p>
+            <a:pPr algn="ctr"/>
+          </a:p>
+        </p:txBody>
+      </p:sp>
+      <p:sp>
+        <p:nvSpPr>
+          <p:cNvPr id="6" name="TextBox 5"/>
+          <p:cNvSpPr txBox="1"/>
+          <p:nvPr/>
+        </p:nvSpPr>
+        <p:spPr>
+          <a:xfrm>
+            <a:off x="698500" y="1854200"/>
+            <a:ext cx="8890000" cy="203200"/>
+          </a:xfrm>
+          <a:prstGeom prst="rect">
+            <a:avLst/>
+          </a:prstGeom>
+          <a:noFill/>
+        </p:spPr>
+        <p:txBody>
+          <a:bodyPr wrap="square" lIns="0" rIns="0" tIns="0" bIns="0" anchor="ctr">
+            <a:spAutoFit/>
+          </a:bodyPr>
+          <a:lstStyle/>
+          <a:p>
+            <a:pPr algn="l"/>
+            <a:r>
+              <a:rPr sz="1400" b="0">
+                <a:solidFill>
+                  <a:srgbClr val="9A9AA2"/>
+                </a:solidFill>
+                <a:latin typeface="Poppins"/>
+              </a:rPr>
+              <a:t>Ich lasse Ihnen eine Frage da, keinen Prospekt.</a:t>
+            </a:r>
+          </a:p>
+        </p:txBody>
+      </p:sp>
+      <p:sp>
+        <p:nvSpPr>
+          <p:cNvPr id="7" name="TextBox 6"/>
+          <p:cNvSpPr txBox="1"/>
+          <p:nvPr/>
+        </p:nvSpPr>
+        <p:spPr>
+          <a:xfrm>
+            <a:off x="698500" y="2209800"/>
+            <a:ext cx="10287000" cy="1651000"/>
+          </a:xfrm>
+          <a:prstGeom prst="rect">
+            <a:avLst/>
+          </a:prstGeom>
+          <a:noFill/>
+        </p:spPr>
+        <p:txBody>
+          <a:bodyPr wrap="square" lIns="0" rIns="0" tIns="0" bIns="0" anchor="ctr">
+            <a:spAutoFit/>
+          </a:bodyPr>
+          <a:lstStyle/>
+          <a:p>
+            <a:pPr algn="l">
+              <a:lnSpc>
+                <a:spcPts val="4400"/>
+              </a:lnSpc>
+            </a:pPr>
+            <a:r>
+              <a:rPr sz="3300" b="0">
+                <a:solidFill>
+                  <a:srgbClr val="ECECEE"/>
+                </a:solidFill>
+                <a:latin typeface="Poppins"/>
+              </a:rPr>
+              <a:t>Welcher Prozess bei Ihnen läuft heute in </a:t>
+            </a:r>
+            <a:r>
+              <a:rPr sz="3300" b="0">
+                <a:solidFill>
+                  <a:srgbClr val="FF6B3D"/>
+                </a:solidFill>
+                <a:latin typeface="Poppins"/>
+              </a:rPr>
+              <a:t>Excel</a:t>
+            </a:r>
+            <a:r>
+              <a:rPr sz="3300" b="0">
+                <a:solidFill>
+                  <a:srgbClr val="ECECEE"/>
+                </a:solidFill>
+                <a:latin typeface="Poppins"/>
+              </a:rPr>
+              <a:t> und sollte es seit einem Jahr nicht mehr?</a:t>
+            </a:r>
+          </a:p>
+        </p:txBody>
+      </p:sp>
+      <p:sp>
+        <p:nvSpPr>
+          <p:cNvPr id="8" name="TextBox 7"/>
+          <p:cNvSpPr txBox="1"/>
+          <p:nvPr/>
+        </p:nvSpPr>
+        <p:spPr>
+          <a:xfrm>
+            <a:off x="698500" y="4241800"/>
+            <a:ext cx="8890000" cy="508000"/>
+          </a:xfrm>
+          <a:prstGeom prst="rect">
+            <a:avLst/>
+          </a:prstGeom>
+          <a:noFill/>
+        </p:spPr>
+        <p:txBody>
+          <a:bodyPr wrap="square" lIns="0" rIns="0" tIns="0" bIns="0" anchor="ctr">
+            <a:spAutoFit/>
+          </a:bodyPr>
+          <a:lstStyle/>
+          <a:p>
+            <a:pPr algn="l">
+              <a:lnSpc>
+                <a:spcPts val="1600"/>
+              </a:lnSpc>
+            </a:pPr>
+            <a:r>
+              <a:rPr sz="1200" b="0">
+                <a:solidFill>
+                  <a:srgbClr val="9A9AA2"/>
+                </a:solidFill>
+                <a:latin typeface="Poppins"/>
+              </a:rPr>
+              <a:t>Wenn Ihnen dazu gerade etwas eingefallen ist — sprechen Sie mich an. Wir machen daraus eine Anwendung. Und wenn Ihnen zwanzig einfallen, reden wir über die Plattform statt über die Anwendung.</a:t>
+            </a:r>
+          </a:p>
+        </p:txBody>
+      </p:sp>
+      <p:sp>
+        <p:nvSpPr>
+          <p:cNvPr id="9" name="TextBox 8"/>
+          <p:cNvSpPr txBox="1"/>
+          <p:nvPr/>
+        </p:nvSpPr>
+        <p:spPr>
+          <a:xfrm>
+            <a:off x="7042150" y="6032500"/>
+            <a:ext cx="4445000" cy="165100"/>
+          </a:xfrm>
+          <a:prstGeom prst="rect">
+            <a:avLst/>
+          </a:prstGeom>
+          <a:noFill/>
+        </p:spPr>
+        <p:txBody>
+          <a:bodyPr wrap="square" lIns="0" rIns="0" tIns="0" bIns="0" anchor="ctr">
+            <a:spAutoFit/>
+          </a:bodyPr>
+          <a:lstStyle/>
+          <a:p>
+            <a:pPr algn="r"/>
+            <a:r>
+              <a:rPr sz="1000" b="0">
+                <a:solidFill>
+                  <a:srgbClr val="FF6B3D"/>
+                </a:solidFill>
+                <a:latin typeface="Courier New"/>
+              </a:rPr>
+              <a:t>[Name · E-Mail · Telefon]</a:t>
+            </a:r>
+          </a:p>
+        </p:txBody>
+      </p:sp>
+      <p:pic>
+        <p:nvPicPr>
+          <p:cNvPr id="10" name="Picture 9" descr="logo.png"/>
+          <p:cNvPicPr>
+            <a:picLocks noChangeAspect="1"/>
+          </p:cNvPicPr>
+          <p:nvPr/>
+        </p:nvPicPr>
+        <p:blipFill>
+          <a:blip r:embed="rId3"/>
+          <a:stretch>
+            <a:fillRect/>
+          </a:stretch>
+        </p:blipFill>
+        <p:spPr>
+          <a:xfrm>
+            <a:off x="635000" y="6438900"/>
+            <a:ext cx="1079500" cy="254000"/>
+          </a:xfrm>
+          <a:prstGeom prst="rect">
+            <a:avLst/>
+          </a:prstGeom>
+        </p:spPr>
+      </p:pic>
+    </p:spTree>
+  </p:cSld>
+  <p:clrMapOvr>
+    <a:masterClrMapping/>
+  </p:clrMapOvr>
+</p:sld>
+</file>
+
+<file path=ppt/slides/slide15.xml><?xml version="1.0" encoding="utf-8"?>
+<p:sld xmlns:a="http://schemas.openxmlformats.org/drawingml/2006/main" xmlns:p="http://schemas.openxmlformats.org/presentationml/2006/main" xmlns:r="http://schemas.openxmlformats.org/officeDocument/2006/relationships">
+  <p:cSld>
+    <p:spTree>
+      <p:nvGrpSpPr>
+        <p:cNvPr id="1" name=""/>
+        <p:cNvGrpSpPr/>
+        <p:nvPr/>
+      </p:nvGrpSpPr>
+      <p:grpSpPr/>
+      <p:pic>
+        <p:nvPicPr>
+          <p:cNvPr id="2" name="Picture 1" descr="image.png"/>
+          <p:cNvPicPr>
+            <a:picLocks noChangeAspect="1"/>
+          </p:cNvPicPr>
+          <p:nvPr/>
+        </p:nvPicPr>
+        <p:blipFill>
+          <a:blip r:embed="rId2"/>
+          <a:stretch>
+            <a:fillRect/>
+          </a:stretch>
+        </p:blipFill>
+        <p:spPr>
+          <a:xfrm>
+            <a:off x="0" y="0"/>
+            <a:ext cx="12192000" cy="6858000"/>
+          </a:xfrm>
+          <a:prstGeom prst="rect">
+            <a:avLst/>
+          </a:prstGeom>
+        </p:spPr>
+      </p:pic>
+      <p:sp>
+        <p:nvSpPr>
+          <p:cNvPr id="3" name="TextBox 2"/>
+          <p:cNvSpPr txBox="1"/>
+          <p:nvPr/>
+        </p:nvSpPr>
+        <p:spPr>
+          <a:xfrm>
+            <a:off x="698500" y="571500"/>
+            <a:ext cx="9906000" cy="393700"/>
+          </a:xfrm>
+          <a:prstGeom prst="rect">
+            <a:avLst/>
+          </a:prstGeom>
+          <a:noFill/>
+        </p:spPr>
+        <p:txBody>
+          <a:bodyPr wrap="square" lIns="0" rIns="0" tIns="0" bIns="0" anchor="ctr">
+            <a:spAutoFit/>
+          </a:bodyPr>
+          <a:lstStyle/>
+          <a:p>
+            <a:pPr algn="l"/>
+            <a:r>
+              <a:rPr sz="2700" b="1">
+                <a:solidFill>
+                  <a:srgbClr val="ECECEE"/>
+                </a:solidFill>
+                <a:latin typeface="Poppins"/>
+              </a:rPr>
+              <a:t>Further questions.</a:t>
+            </a:r>
+            <a:r>
+              <a:rPr sz="2700" b="0">
+                <a:solidFill>
+                  <a:srgbClr val="9A9AA2"/>
+                </a:solidFill>
+                <a:latin typeface="Poppins"/>
+              </a:rPr>
+              <a:t> </a:t>
+            </a:r>
+          </a:p>
+        </p:txBody>
+      </p:sp>
+      <p:sp>
+        <p:nvSpPr>
+          <p:cNvPr id="4" name="TextBox 3"/>
+          <p:cNvSpPr txBox="1"/>
+          <p:nvPr/>
+        </p:nvSpPr>
+        <p:spPr>
+          <a:xfrm>
+            <a:off x="8312150" y="622300"/>
+            <a:ext cx="3175000" cy="152400"/>
+          </a:xfrm>
+          <a:prstGeom prst="rect">
+            <a:avLst/>
+          </a:prstGeom>
+          <a:noFill/>
+        </p:spPr>
+        <p:txBody>
+          <a:bodyPr wrap="square" lIns="0" rIns="0" tIns="0" bIns="0" anchor="ctr">
+            <a:spAutoFit/>
+          </a:bodyPr>
+          <a:lstStyle/>
+          <a:p>
+            <a:pPr algn="r"/>
+            <a:r>
+              <a:rPr sz="1100" b="0" spc="120">
+                <a:solidFill>
+                  <a:srgbClr val="9A9AA2"/>
+                </a:solidFill>
+                <a:latin typeface="Courier New"/>
+              </a:rPr>
+              <a:t>10 — Appendix</a:t>
             </a:r>
           </a:p>
         </p:txBody>
@@ -11477,7 +12601,7 @@
                 </a:solidFill>
                 <a:latin typeface="Courier New"/>
               </a:rPr>
-              <a:t>06 — The moat</a:t>
+              <a:t>07 — The moat</a:t>
             </a:r>
           </a:p>
         </p:txBody>

--- a/deck/Pitch_Deck_AthenaRun_v2.pptx
+++ b/deck/Pitch_Deck_AthenaRun_v2.pptx
@@ -3399,8 +3399,8 @@
         </p:nvSpPr>
         <p:spPr>
           <a:xfrm>
-            <a:off x="4419600" y="2552700"/>
-            <a:ext cx="482600" cy="482600"/>
+            <a:off x="4381500" y="2514600"/>
+            <a:ext cx="558800" cy="558800"/>
           </a:xfrm>
           <a:prstGeom prst="ellipse">
             <a:avLst/>
@@ -3437,16 +3437,40 @@
           </a:p>
         </p:txBody>
       </p:sp>
-      <p:sp>
-        <p:nvSpPr>
-          <p:cNvPr id="16" name="TextBox 15"/>
-          <p:cNvSpPr txBox="1"/>
-          <p:nvPr/>
-        </p:nvSpPr>
-        <p:spPr>
-          <a:xfrm>
-            <a:off x="4406900" y="2698750"/>
-            <a:ext cx="508000" cy="190500"/>
+      <p:pic>
+        <p:nvPicPr>
+          <p:cNvPr id="16" name="Picture 15" descr="ic-code.png"/>
+          <p:cNvPicPr>
+            <a:picLocks noChangeAspect="1"/>
+          </p:cNvPicPr>
+          <p:nvPr/>
+        </p:nvPicPr>
+        <p:blipFill>
+          <a:blip r:embed="rId3"/>
+          <a:stretch>
+            <a:fillRect/>
+          </a:stretch>
+        </p:blipFill>
+        <p:spPr>
+          <a:xfrm>
+            <a:off x="4546600" y="2679700"/>
+            <a:ext cx="228600" cy="228600"/>
+          </a:xfrm>
+          <a:prstGeom prst="rect">
+            <a:avLst/>
+          </a:prstGeom>
+        </p:spPr>
+      </p:pic>
+      <p:sp>
+        <p:nvSpPr>
+          <p:cNvPr id="17" name="TextBox 16"/>
+          <p:cNvSpPr txBox="1"/>
+          <p:nvPr/>
+        </p:nvSpPr>
+        <p:spPr>
+          <a:xfrm>
+            <a:off x="4406900" y="2349500"/>
+            <a:ext cx="508000" cy="152400"/>
           </a:xfrm>
           <a:prstGeom prst="rect">
             <a:avLst/>
@@ -3461,7 +3485,7 @@
           <a:p>
             <a:pPr algn="ctr"/>
             <a:r>
-              <a:rPr sz="1300" b="0" spc="80">
+              <a:rPr sz="1100" b="0" spc="80">
                 <a:solidFill>
                   <a:srgbClr val="9A9AA2"/>
                 </a:solidFill>
@@ -3474,7 +3498,7 @@
       </p:sp>
       <p:sp>
         <p:nvSpPr>
-          <p:cNvPr id="17" name="Diamond 16"/>
+          <p:cNvPr id="18" name="Diamond 17"/>
           <p:cNvSpPr/>
           <p:nvPr/>
         </p:nvSpPr>
@@ -3518,14 +3542,14 @@
       </p:sp>
       <p:sp>
         <p:nvSpPr>
-          <p:cNvPr id="18" name="Oval 17"/>
+          <p:cNvPr id="19" name="Oval 18"/>
           <p:cNvSpPr/>
           <p:nvPr/>
         </p:nvSpPr>
         <p:spPr>
           <a:xfrm>
-            <a:off x="7150100" y="2552700"/>
-            <a:ext cx="482600" cy="482600"/>
+            <a:off x="7112000" y="2514600"/>
+            <a:ext cx="558800" cy="558800"/>
           </a:xfrm>
           <a:prstGeom prst="ellipse">
             <a:avLst/>
@@ -3562,16 +3586,40 @@
           </a:p>
         </p:txBody>
       </p:sp>
-      <p:sp>
-        <p:nvSpPr>
-          <p:cNvPr id="19" name="TextBox 18"/>
-          <p:cNvSpPr txBox="1"/>
-          <p:nvPr/>
-        </p:nvSpPr>
-        <p:spPr>
-          <a:xfrm>
-            <a:off x="7137400" y="2698750"/>
-            <a:ext cx="508000" cy="190500"/>
+      <p:pic>
+        <p:nvPicPr>
+          <p:cNvPr id="20" name="Picture 19" descr="ic-ship.png"/>
+          <p:cNvPicPr>
+            <a:picLocks noChangeAspect="1"/>
+          </p:cNvPicPr>
+          <p:nvPr/>
+        </p:nvPicPr>
+        <p:blipFill>
+          <a:blip r:embed="rId4"/>
+          <a:stretch>
+            <a:fillRect/>
+          </a:stretch>
+        </p:blipFill>
+        <p:spPr>
+          <a:xfrm>
+            <a:off x="7277100" y="2679700"/>
+            <a:ext cx="228600" cy="228600"/>
+          </a:xfrm>
+          <a:prstGeom prst="rect">
+            <a:avLst/>
+          </a:prstGeom>
+        </p:spPr>
+      </p:pic>
+      <p:sp>
+        <p:nvSpPr>
+          <p:cNvPr id="21" name="TextBox 20"/>
+          <p:cNvSpPr txBox="1"/>
+          <p:nvPr/>
+        </p:nvSpPr>
+        <p:spPr>
+          <a:xfrm>
+            <a:off x="7137400" y="2349500"/>
+            <a:ext cx="508000" cy="152400"/>
           </a:xfrm>
           <a:prstGeom prst="rect">
             <a:avLst/>
@@ -3586,7 +3634,7 @@
           <a:p>
             <a:pPr algn="ctr"/>
             <a:r>
-              <a:rPr sz="1300" b="0" spc="80">
+              <a:rPr sz="1100" b="0" spc="80">
                 <a:solidFill>
                   <a:srgbClr val="9A9AA2"/>
                 </a:solidFill>
@@ -3599,7 +3647,7 @@
       </p:sp>
       <p:sp>
         <p:nvSpPr>
-          <p:cNvPr id="20" name="Diamond 19"/>
+          <p:cNvPr id="22" name="Diamond 21"/>
           <p:cNvSpPr/>
           <p:nvPr/>
         </p:nvSpPr>
@@ -3643,14 +3691,14 @@
       </p:sp>
       <p:sp>
         <p:nvSpPr>
-          <p:cNvPr id="21" name="Oval 20"/>
+          <p:cNvPr id="23" name="Oval 22"/>
           <p:cNvSpPr/>
           <p:nvPr/>
         </p:nvSpPr>
         <p:spPr>
           <a:xfrm>
-            <a:off x="9880600" y="2552700"/>
-            <a:ext cx="482600" cy="482600"/>
+            <a:off x="9842500" y="2514600"/>
+            <a:ext cx="558800" cy="558800"/>
           </a:xfrm>
           <a:prstGeom prst="ellipse">
             <a:avLst/>
@@ -3687,16 +3735,40 @@
           </a:p>
         </p:txBody>
       </p:sp>
-      <p:sp>
-        <p:nvSpPr>
-          <p:cNvPr id="22" name="TextBox 21"/>
-          <p:cNvSpPr txBox="1"/>
-          <p:nvPr/>
-        </p:nvSpPr>
-        <p:spPr>
-          <a:xfrm>
-            <a:off x="9867900" y="2698750"/>
-            <a:ext cx="508000" cy="190500"/>
+      <p:pic>
+        <p:nvPicPr>
+          <p:cNvPr id="24" name="Picture 23" descr="ic-gauge.png"/>
+          <p:cNvPicPr>
+            <a:picLocks noChangeAspect="1"/>
+          </p:cNvPicPr>
+          <p:nvPr/>
+        </p:nvPicPr>
+        <p:blipFill>
+          <a:blip r:embed="rId5"/>
+          <a:stretch>
+            <a:fillRect/>
+          </a:stretch>
+        </p:blipFill>
+        <p:spPr>
+          <a:xfrm>
+            <a:off x="10007600" y="2679700"/>
+            <a:ext cx="228600" cy="228600"/>
+          </a:xfrm>
+          <a:prstGeom prst="rect">
+            <a:avLst/>
+          </a:prstGeom>
+        </p:spPr>
+      </p:pic>
+      <p:sp>
+        <p:nvSpPr>
+          <p:cNvPr id="25" name="TextBox 24"/>
+          <p:cNvSpPr txBox="1"/>
+          <p:nvPr/>
+        </p:nvSpPr>
+        <p:spPr>
+          <a:xfrm>
+            <a:off x="9867900" y="2349500"/>
+            <a:ext cx="508000" cy="152400"/>
           </a:xfrm>
           <a:prstGeom prst="rect">
             <a:avLst/>
@@ -3711,7 +3783,7 @@
           <a:p>
             <a:pPr algn="ctr"/>
             <a:r>
-              <a:rPr sz="1300" b="0" spc="80">
+              <a:rPr sz="1100" b="0" spc="80">
                 <a:solidFill>
                   <a:srgbClr val="9A9AA2"/>
                 </a:solidFill>
@@ -3724,13 +3796,13 @@
       </p:sp>
       <p:sp>
         <p:nvSpPr>
-          <p:cNvPr id="23" name="TextBox 22"/>
-          <p:cNvSpPr txBox="1"/>
-          <p:nvPr/>
-        </p:nvSpPr>
-        <p:spPr>
-          <a:xfrm>
-            <a:off x="3644900" y="3175000"/>
+          <p:cNvPr id="26" name="TextBox 25"/>
+          <p:cNvSpPr txBox="1"/>
+          <p:nvPr/>
+        </p:nvSpPr>
+        <p:spPr>
+          <a:xfrm>
+            <a:off x="3644900" y="3213100"/>
             <a:ext cx="2032000" cy="215900"/>
           </a:xfrm>
           <a:prstGeom prst="rect">
@@ -3759,13 +3831,13 @@
       </p:sp>
       <p:sp>
         <p:nvSpPr>
-          <p:cNvPr id="24" name="TextBox 23"/>
-          <p:cNvSpPr txBox="1"/>
-          <p:nvPr/>
-        </p:nvSpPr>
-        <p:spPr>
-          <a:xfrm>
-            <a:off x="3644900" y="3403600"/>
+          <p:cNvPr id="27" name="TextBox 26"/>
+          <p:cNvSpPr txBox="1"/>
+          <p:nvPr/>
+        </p:nvSpPr>
+        <p:spPr>
+          <a:xfrm>
+            <a:off x="3644900" y="3517900"/>
             <a:ext cx="2032000" cy="165100"/>
           </a:xfrm>
           <a:prstGeom prst="rect">
@@ -3794,13 +3866,13 @@
       </p:sp>
       <p:sp>
         <p:nvSpPr>
-          <p:cNvPr id="25" name="TextBox 24"/>
-          <p:cNvSpPr txBox="1"/>
-          <p:nvPr/>
-        </p:nvSpPr>
-        <p:spPr>
-          <a:xfrm>
-            <a:off x="6375400" y="3175000"/>
+          <p:cNvPr id="28" name="TextBox 27"/>
+          <p:cNvSpPr txBox="1"/>
+          <p:nvPr/>
+        </p:nvSpPr>
+        <p:spPr>
+          <a:xfrm>
+            <a:off x="6375400" y="3213100"/>
             <a:ext cx="2032000" cy="215900"/>
           </a:xfrm>
           <a:prstGeom prst="rect">
@@ -3829,13 +3901,13 @@
       </p:sp>
       <p:sp>
         <p:nvSpPr>
-          <p:cNvPr id="26" name="TextBox 25"/>
-          <p:cNvSpPr txBox="1"/>
-          <p:nvPr/>
-        </p:nvSpPr>
-        <p:spPr>
-          <a:xfrm>
-            <a:off x="6375400" y="3403600"/>
+          <p:cNvPr id="29" name="TextBox 28"/>
+          <p:cNvSpPr txBox="1"/>
+          <p:nvPr/>
+        </p:nvSpPr>
+        <p:spPr>
+          <a:xfrm>
+            <a:off x="6375400" y="3517900"/>
             <a:ext cx="2032000" cy="165100"/>
           </a:xfrm>
           <a:prstGeom prst="rect">
@@ -3864,13 +3936,13 @@
       </p:sp>
       <p:sp>
         <p:nvSpPr>
-          <p:cNvPr id="27" name="TextBox 26"/>
-          <p:cNvSpPr txBox="1"/>
-          <p:nvPr/>
-        </p:nvSpPr>
-        <p:spPr>
-          <a:xfrm>
-            <a:off x="9105900" y="3175000"/>
+          <p:cNvPr id="30" name="TextBox 29"/>
+          <p:cNvSpPr txBox="1"/>
+          <p:nvPr/>
+        </p:nvSpPr>
+        <p:spPr>
+          <a:xfrm>
+            <a:off x="9105900" y="3213100"/>
             <a:ext cx="2032000" cy="215900"/>
           </a:xfrm>
           <a:prstGeom prst="rect">
@@ -3899,13 +3971,13 @@
       </p:sp>
       <p:sp>
         <p:nvSpPr>
-          <p:cNvPr id="28" name="TextBox 27"/>
-          <p:cNvSpPr txBox="1"/>
-          <p:nvPr/>
-        </p:nvSpPr>
-        <p:spPr>
-          <a:xfrm>
-            <a:off x="9105900" y="3403600"/>
+          <p:cNvPr id="31" name="TextBox 30"/>
+          <p:cNvSpPr txBox="1"/>
+          <p:nvPr/>
+        </p:nvSpPr>
+        <p:spPr>
+          <a:xfrm>
+            <a:off x="9105900" y="3517900"/>
             <a:ext cx="2032000" cy="165100"/>
           </a:xfrm>
           <a:prstGeom prst="rect">
@@ -3934,7 +4006,7 @@
       </p:sp>
       <p:sp>
         <p:nvSpPr>
-          <p:cNvPr id="29" name="Diamond 28"/>
+          <p:cNvPr id="32" name="Diamond 31"/>
           <p:cNvSpPr/>
           <p:nvPr/>
         </p:nvSpPr>
@@ -3978,7 +4050,7 @@
       </p:sp>
       <p:sp>
         <p:nvSpPr>
-          <p:cNvPr id="30" name="Rectangle 29"/>
+          <p:cNvPr id="33" name="Rectangle 32"/>
           <p:cNvSpPr/>
           <p:nvPr/>
         </p:nvSpPr>
@@ -4022,7 +4094,7 @@
       </p:sp>
       <p:sp>
         <p:nvSpPr>
-          <p:cNvPr id="31" name="Rectangle 30"/>
+          <p:cNvPr id="34" name="Rectangle 33"/>
           <p:cNvSpPr/>
           <p:nvPr/>
         </p:nvSpPr>
@@ -4066,7 +4138,7 @@
       </p:sp>
       <p:sp>
         <p:nvSpPr>
-          <p:cNvPr id="32" name="Rectangle 31"/>
+          <p:cNvPr id="35" name="Rectangle 34"/>
           <p:cNvSpPr/>
           <p:nvPr/>
         </p:nvSpPr>
@@ -4110,7 +4182,7 @@
       </p:sp>
       <p:sp>
         <p:nvSpPr>
-          <p:cNvPr id="33" name="Isosceles Triangle 32"/>
+          <p:cNvPr id="36" name="Isosceles Triangle 35"/>
           <p:cNvSpPr/>
           <p:nvPr/>
         </p:nvSpPr>
@@ -4154,7 +4226,7 @@
       </p:sp>
       <p:sp>
         <p:nvSpPr>
-          <p:cNvPr id="34" name="TextBox 33"/>
+          <p:cNvPr id="37" name="TextBox 36"/>
           <p:cNvSpPr txBox="1"/>
           <p:nvPr/>
         </p:nvSpPr>
@@ -4198,7 +4270,7 @@
       </p:sp>
       <p:sp>
         <p:nvSpPr>
-          <p:cNvPr id="35" name="Rectangle 34"/>
+          <p:cNvPr id="38" name="Rectangle 37"/>
           <p:cNvSpPr/>
           <p:nvPr/>
         </p:nvSpPr>
@@ -4242,7 +4314,7 @@
       </p:sp>
       <p:sp>
         <p:nvSpPr>
-          <p:cNvPr id="36" name="TextBox 35"/>
+          <p:cNvPr id="39" name="TextBox 38"/>
           <p:cNvSpPr txBox="1"/>
           <p:nvPr/>
         </p:nvSpPr>
@@ -4277,14 +4349,14 @@
       </p:sp>
       <p:pic>
         <p:nvPicPr>
-          <p:cNvPr id="37" name="Picture 36" descr="logo.png"/>
+          <p:cNvPr id="40" name="Picture 39" descr="logo.png"/>
           <p:cNvPicPr>
             <a:picLocks noChangeAspect="1"/>
           </p:cNvPicPr>
           <p:nvPr/>
         </p:nvPicPr>
         <p:blipFill>
-          <a:blip r:embed="rId3"/>
+          <a:blip r:embed="rId6"/>
           <a:stretch>
             <a:fillRect/>
           </a:stretch>
@@ -5350,41 +5422,30 @@
           </a:p>
         </p:txBody>
       </p:sp>
-      <p:sp>
-        <p:nvSpPr>
-          <p:cNvPr id="26" name="TextBox 25"/>
-          <p:cNvSpPr txBox="1"/>
-          <p:nvPr/>
-        </p:nvSpPr>
-        <p:spPr>
-          <a:xfrm>
-            <a:off x="3683000" y="2660650"/>
-            <a:ext cx="508000" cy="203200"/>
-          </a:xfrm>
-          <a:prstGeom prst="rect">
-            <a:avLst/>
-          </a:prstGeom>
-          <a:noFill/>
-        </p:spPr>
-        <p:txBody>
-          <a:bodyPr wrap="square" lIns="0" rIns="0" tIns="0" bIns="0" anchor="ctr">
-            <a:spAutoFit/>
-          </a:bodyPr>
-          <a:lstStyle/>
-          <a:p>
-            <a:pPr algn="ctr"/>
-            <a:r>
-              <a:rPr sz="1400" b="0" spc="80">
-                <a:solidFill>
-                  <a:srgbClr val="9A9AA2"/>
-                </a:solidFill>
-                <a:latin typeface="Courier New"/>
-              </a:rPr>
-              <a:t>01</a:t>
-            </a:r>
-          </a:p>
-        </p:txBody>
-      </p:sp>
+      <p:pic>
+        <p:nvPicPr>
+          <p:cNvPr id="26" name="Picture 25" descr="ic-target.png"/>
+          <p:cNvPicPr>
+            <a:picLocks noChangeAspect="1"/>
+          </p:cNvPicPr>
+          <p:nvPr/>
+        </p:nvPicPr>
+        <p:blipFill>
+          <a:blip r:embed="rId3"/>
+          <a:stretch>
+            <a:fillRect/>
+          </a:stretch>
+        </p:blipFill>
+        <p:spPr>
+          <a:xfrm>
+            <a:off x="3816350" y="2641600"/>
+            <a:ext cx="241300" cy="241300"/>
+          </a:xfrm>
+          <a:prstGeom prst="rect">
+            <a:avLst/>
+          </a:prstGeom>
+        </p:spPr>
+      </p:pic>
       <p:sp>
         <p:nvSpPr>
           <p:cNvPr id="27" name="Oval 26"/>
@@ -5431,41 +5492,30 @@
           </a:p>
         </p:txBody>
       </p:sp>
-      <p:sp>
-        <p:nvSpPr>
-          <p:cNvPr id="28" name="TextBox 27"/>
-          <p:cNvSpPr txBox="1"/>
-          <p:nvPr/>
-        </p:nvSpPr>
-        <p:spPr>
-          <a:xfrm>
-            <a:off x="4864100" y="3340100"/>
-            <a:ext cx="508000" cy="203200"/>
-          </a:xfrm>
-          <a:prstGeom prst="rect">
-            <a:avLst/>
-          </a:prstGeom>
-          <a:noFill/>
-        </p:spPr>
-        <p:txBody>
-          <a:bodyPr wrap="square" lIns="0" rIns="0" tIns="0" bIns="0" anchor="ctr">
-            <a:spAutoFit/>
-          </a:bodyPr>
-          <a:lstStyle/>
-          <a:p>
-            <a:pPr algn="ctr"/>
-            <a:r>
-              <a:rPr sz="1400" b="0" spc="80">
-                <a:solidFill>
-                  <a:srgbClr val="9A9AA2"/>
-                </a:solidFill>
-                <a:latin typeface="Courier New"/>
-              </a:rPr>
-              <a:t>02</a:t>
-            </a:r>
-          </a:p>
-        </p:txBody>
-      </p:sp>
+      <p:pic>
+        <p:nvPicPr>
+          <p:cNvPr id="28" name="Picture 27" descr="ic-search.png"/>
+          <p:cNvPicPr>
+            <a:picLocks noChangeAspect="1"/>
+          </p:cNvPicPr>
+          <p:nvPr/>
+        </p:nvPicPr>
+        <p:blipFill>
+          <a:blip r:embed="rId4"/>
+          <a:stretch>
+            <a:fillRect/>
+          </a:stretch>
+        </p:blipFill>
+        <p:spPr>
+          <a:xfrm>
+            <a:off x="4997450" y="3321050"/>
+            <a:ext cx="241300" cy="241300"/>
+          </a:xfrm>
+          <a:prstGeom prst="rect">
+            <a:avLst/>
+          </a:prstGeom>
+        </p:spPr>
+      </p:pic>
       <p:sp>
         <p:nvSpPr>
           <p:cNvPr id="29" name="Oval 28"/>
@@ -5512,41 +5562,30 @@
           </a:p>
         </p:txBody>
       </p:sp>
-      <p:sp>
-        <p:nvSpPr>
-          <p:cNvPr id="30" name="TextBox 29"/>
-          <p:cNvSpPr txBox="1"/>
-          <p:nvPr/>
-        </p:nvSpPr>
-        <p:spPr>
-          <a:xfrm>
-            <a:off x="4864100" y="4705350"/>
-            <a:ext cx="508000" cy="203200"/>
-          </a:xfrm>
-          <a:prstGeom prst="rect">
-            <a:avLst/>
-          </a:prstGeom>
-          <a:noFill/>
-        </p:spPr>
-        <p:txBody>
-          <a:bodyPr wrap="square" lIns="0" rIns="0" tIns="0" bIns="0" anchor="ctr">
-            <a:spAutoFit/>
-          </a:bodyPr>
-          <a:lstStyle/>
-          <a:p>
-            <a:pPr algn="ctr"/>
-            <a:r>
-              <a:rPr sz="1400" b="0" spc="80">
-                <a:solidFill>
-                  <a:srgbClr val="9A9AA2"/>
-                </a:solidFill>
-                <a:latin typeface="Courier New"/>
-              </a:rPr>
-              <a:t>03</a:t>
-            </a:r>
-          </a:p>
-        </p:txBody>
-      </p:sp>
+      <p:pic>
+        <p:nvPicPr>
+          <p:cNvPr id="30" name="Picture 29" descr="ic-layout.png"/>
+          <p:cNvPicPr>
+            <a:picLocks noChangeAspect="1"/>
+          </p:cNvPicPr>
+          <p:nvPr/>
+        </p:nvPicPr>
+        <p:blipFill>
+          <a:blip r:embed="rId5"/>
+          <a:stretch>
+            <a:fillRect/>
+          </a:stretch>
+        </p:blipFill>
+        <p:spPr>
+          <a:xfrm>
+            <a:off x="4997450" y="4686300"/>
+            <a:ext cx="241300" cy="241300"/>
+          </a:xfrm>
+          <a:prstGeom prst="rect">
+            <a:avLst/>
+          </a:prstGeom>
+        </p:spPr>
+      </p:pic>
       <p:sp>
         <p:nvSpPr>
           <p:cNvPr id="31" name="Oval 30"/>
@@ -5593,41 +5632,30 @@
           </a:p>
         </p:txBody>
       </p:sp>
-      <p:sp>
-        <p:nvSpPr>
-          <p:cNvPr id="32" name="TextBox 31"/>
-          <p:cNvSpPr txBox="1"/>
-          <p:nvPr/>
-        </p:nvSpPr>
-        <p:spPr>
-          <a:xfrm>
-            <a:off x="3683000" y="5391150"/>
-            <a:ext cx="508000" cy="203200"/>
-          </a:xfrm>
-          <a:prstGeom prst="rect">
-            <a:avLst/>
-          </a:prstGeom>
-          <a:noFill/>
-        </p:spPr>
-        <p:txBody>
-          <a:bodyPr wrap="square" lIns="0" rIns="0" tIns="0" bIns="0" anchor="ctr">
-            <a:spAutoFit/>
-          </a:bodyPr>
-          <a:lstStyle/>
-          <a:p>
-            <a:pPr algn="ctr"/>
-            <a:r>
-              <a:rPr sz="1400" b="0" spc="80">
-                <a:solidFill>
-                  <a:srgbClr val="9A9AA2"/>
-                </a:solidFill>
-                <a:latin typeface="Courier New"/>
-              </a:rPr>
-              <a:t>04</a:t>
-            </a:r>
-          </a:p>
-        </p:txBody>
-      </p:sp>
+      <p:pic>
+        <p:nvPicPr>
+          <p:cNvPr id="32" name="Picture 31" descr="ic-code.png"/>
+          <p:cNvPicPr>
+            <a:picLocks noChangeAspect="1"/>
+          </p:cNvPicPr>
+          <p:nvPr/>
+        </p:nvPicPr>
+        <p:blipFill>
+          <a:blip r:embed="rId6"/>
+          <a:stretch>
+            <a:fillRect/>
+          </a:stretch>
+        </p:blipFill>
+        <p:spPr>
+          <a:xfrm>
+            <a:off x="3816350" y="5372100"/>
+            <a:ext cx="241300" cy="241300"/>
+          </a:xfrm>
+          <a:prstGeom prst="rect">
+            <a:avLst/>
+          </a:prstGeom>
+        </p:spPr>
+      </p:pic>
       <p:sp>
         <p:nvSpPr>
           <p:cNvPr id="33" name="Oval 32"/>
@@ -5674,41 +5702,30 @@
           </a:p>
         </p:txBody>
       </p:sp>
-      <p:sp>
-        <p:nvSpPr>
-          <p:cNvPr id="34" name="TextBox 33"/>
-          <p:cNvSpPr txBox="1"/>
-          <p:nvPr/>
-        </p:nvSpPr>
-        <p:spPr>
-          <a:xfrm>
-            <a:off x="2495550" y="4705350"/>
-            <a:ext cx="508000" cy="203200"/>
-          </a:xfrm>
-          <a:prstGeom prst="rect">
-            <a:avLst/>
-          </a:prstGeom>
-          <a:noFill/>
-        </p:spPr>
-        <p:txBody>
-          <a:bodyPr wrap="square" lIns="0" rIns="0" tIns="0" bIns="0" anchor="ctr">
-            <a:spAutoFit/>
-          </a:bodyPr>
-          <a:lstStyle/>
-          <a:p>
-            <a:pPr algn="ctr"/>
-            <a:r>
-              <a:rPr sz="1400" b="0" spc="80">
-                <a:solidFill>
-                  <a:srgbClr val="9A9AA2"/>
-                </a:solidFill>
-                <a:latin typeface="Courier New"/>
-              </a:rPr>
-              <a:t>05</a:t>
-            </a:r>
-          </a:p>
-        </p:txBody>
-      </p:sp>
+      <p:pic>
+        <p:nvPicPr>
+          <p:cNvPr id="34" name="Picture 33" descr="ic-checklist.png"/>
+          <p:cNvPicPr>
+            <a:picLocks noChangeAspect="1"/>
+          </p:cNvPicPr>
+          <p:nvPr/>
+        </p:nvPicPr>
+        <p:blipFill>
+          <a:blip r:embed="rId7"/>
+          <a:stretch>
+            <a:fillRect/>
+          </a:stretch>
+        </p:blipFill>
+        <p:spPr>
+          <a:xfrm>
+            <a:off x="2628900" y="4686300"/>
+            <a:ext cx="241300" cy="241300"/>
+          </a:xfrm>
+          <a:prstGeom prst="rect">
+            <a:avLst/>
+          </a:prstGeom>
+        </p:spPr>
+      </p:pic>
       <p:sp>
         <p:nvSpPr>
           <p:cNvPr id="35" name="Oval 34"/>
@@ -5755,16 +5772,40 @@
           </a:p>
         </p:txBody>
       </p:sp>
-      <p:sp>
-        <p:nvSpPr>
-          <p:cNvPr id="36" name="TextBox 35"/>
-          <p:cNvSpPr txBox="1"/>
-          <p:nvPr/>
-        </p:nvSpPr>
-        <p:spPr>
-          <a:xfrm>
-            <a:off x="2495550" y="3340100"/>
-            <a:ext cx="508000" cy="203200"/>
+      <p:pic>
+        <p:nvPicPr>
+          <p:cNvPr id="36" name="Picture 35" descr="ic-refresh.png"/>
+          <p:cNvPicPr>
+            <a:picLocks noChangeAspect="1"/>
+          </p:cNvPicPr>
+          <p:nvPr/>
+        </p:nvPicPr>
+        <p:blipFill>
+          <a:blip r:embed="rId8"/>
+          <a:stretch>
+            <a:fillRect/>
+          </a:stretch>
+        </p:blipFill>
+        <p:spPr>
+          <a:xfrm>
+            <a:off x="2628900" y="3321050"/>
+            <a:ext cx="241300" cy="241300"/>
+          </a:xfrm>
+          <a:prstGeom prst="rect">
+            <a:avLst/>
+          </a:prstGeom>
+        </p:spPr>
+      </p:pic>
+      <p:sp>
+        <p:nvSpPr>
+          <p:cNvPr id="37" name="TextBox 36"/>
+          <p:cNvSpPr txBox="1"/>
+          <p:nvPr/>
+        </p:nvSpPr>
+        <p:spPr>
+          <a:xfrm>
+            <a:off x="2667000" y="2178050"/>
+            <a:ext cx="2540000" cy="215900"/>
           </a:xfrm>
           <a:prstGeom prst="rect">
             <a:avLst/>
@@ -5779,27 +5820,36 @@
           <a:p>
             <a:pPr algn="ctr"/>
             <a:r>
-              <a:rPr sz="1400" b="0" spc="80">
+              <a:rPr sz="1100" b="0" spc="80">
                 <a:solidFill>
                   <a:srgbClr val="9A9AA2"/>
                 </a:solidFill>
                 <a:latin typeface="Courier New"/>
               </a:rPr>
-              <a:t>06</a:t>
-            </a:r>
-          </a:p>
-        </p:txBody>
-      </p:sp>
-      <p:sp>
-        <p:nvSpPr>
-          <p:cNvPr id="37" name="TextBox 36"/>
-          <p:cNvSpPr txBox="1"/>
-          <p:nvPr/>
-        </p:nvSpPr>
-        <p:spPr>
-          <a:xfrm>
-            <a:off x="2667000" y="2178050"/>
-            <a:ext cx="2540000" cy="215900"/>
+              <a:t>01  </a:t>
+            </a:r>
+            <a:r>
+              <a:rPr sz="1800" b="0">
+                <a:solidFill>
+                  <a:srgbClr val="ECECEE"/>
+                </a:solidFill>
+                <a:latin typeface="Poppins"/>
+              </a:rPr>
+              <a:t>Planning</a:t>
+            </a:r>
+          </a:p>
+        </p:txBody>
+      </p:sp>
+      <p:sp>
+        <p:nvSpPr>
+          <p:cNvPr id="38" name="TextBox 37"/>
+          <p:cNvSpPr txBox="1"/>
+          <p:nvPr/>
+        </p:nvSpPr>
+        <p:spPr>
+          <a:xfrm>
+            <a:off x="5537200" y="3333750"/>
+            <a:ext cx="2032000" cy="215900"/>
           </a:xfrm>
           <a:prstGeom prst="rect">
             <a:avLst/>
@@ -5812,7 +5862,16 @@
           </a:bodyPr>
           <a:lstStyle/>
           <a:p>
-            <a:pPr algn="ctr"/>
+            <a:pPr algn="l"/>
+            <a:r>
+              <a:rPr sz="1100" b="0" spc="80">
+                <a:solidFill>
+                  <a:srgbClr val="9A9AA2"/>
+                </a:solidFill>
+                <a:latin typeface="Courier New"/>
+              </a:rPr>
+              <a:t>02  </a:t>
+            </a:r>
             <a:r>
               <a:rPr sz="1800" b="0">
                 <a:solidFill>
@@ -5820,20 +5879,20 @@
                 </a:solidFill>
                 <a:latin typeface="Poppins"/>
               </a:rPr>
-              <a:t>Planning</a:t>
-            </a:r>
-          </a:p>
-        </p:txBody>
-      </p:sp>
-      <p:sp>
-        <p:nvSpPr>
-          <p:cNvPr id="38" name="TextBox 37"/>
-          <p:cNvSpPr txBox="1"/>
-          <p:nvPr/>
-        </p:nvSpPr>
-        <p:spPr>
-          <a:xfrm>
-            <a:off x="5537200" y="3333750"/>
+              <a:t>Analysis</a:t>
+            </a:r>
+          </a:p>
+        </p:txBody>
+      </p:sp>
+      <p:sp>
+        <p:nvSpPr>
+          <p:cNvPr id="39" name="TextBox 38"/>
+          <p:cNvSpPr txBox="1"/>
+          <p:nvPr/>
+        </p:nvSpPr>
+        <p:spPr>
+          <a:xfrm>
+            <a:off x="5537200" y="4699000"/>
             <a:ext cx="2032000" cy="215900"/>
           </a:xfrm>
           <a:prstGeom prst="rect">
@@ -5849,27 +5908,36 @@
           <a:p>
             <a:pPr algn="l"/>
             <a:r>
+              <a:rPr sz="1100" b="0" spc="80">
+                <a:solidFill>
+                  <a:srgbClr val="9A9AA2"/>
+                </a:solidFill>
+                <a:latin typeface="Courier New"/>
+              </a:rPr>
+              <a:t>03  </a:t>
+            </a:r>
+            <a:r>
               <a:rPr sz="1800" b="0">
                 <a:solidFill>
                   <a:srgbClr val="ECECEE"/>
                 </a:solidFill>
                 <a:latin typeface="Poppins"/>
               </a:rPr>
-              <a:t>Analysis</a:t>
-            </a:r>
-          </a:p>
-        </p:txBody>
-      </p:sp>
-      <p:sp>
-        <p:nvSpPr>
-          <p:cNvPr id="39" name="TextBox 38"/>
-          <p:cNvSpPr txBox="1"/>
-          <p:nvPr/>
-        </p:nvSpPr>
-        <p:spPr>
-          <a:xfrm>
-            <a:off x="5537200" y="4699000"/>
-            <a:ext cx="2032000" cy="215900"/>
+              <a:t>Design</a:t>
+            </a:r>
+          </a:p>
+        </p:txBody>
+      </p:sp>
+      <p:sp>
+        <p:nvSpPr>
+          <p:cNvPr id="40" name="TextBox 39"/>
+          <p:cNvSpPr txBox="1"/>
+          <p:nvPr/>
+        </p:nvSpPr>
+        <p:spPr>
+          <a:xfrm>
+            <a:off x="2667000" y="5873750"/>
+            <a:ext cx="2540000" cy="215900"/>
           </a:xfrm>
           <a:prstGeom prst="rect">
             <a:avLst/>
@@ -5882,7 +5950,16 @@
           </a:bodyPr>
           <a:lstStyle/>
           <a:p>
-            <a:pPr algn="l"/>
+            <a:pPr algn="ctr"/>
+            <a:r>
+              <a:rPr sz="1100" b="0" spc="80">
+                <a:solidFill>
+                  <a:srgbClr val="9A9AA2"/>
+                </a:solidFill>
+                <a:latin typeface="Courier New"/>
+              </a:rPr>
+              <a:t>04  </a:t>
+            </a:r>
             <a:r>
               <a:rPr sz="1800" b="0">
                 <a:solidFill>
@@ -5890,21 +5967,21 @@
                 </a:solidFill>
                 <a:latin typeface="Poppins"/>
               </a:rPr>
-              <a:t>Design</a:t>
-            </a:r>
-          </a:p>
-        </p:txBody>
-      </p:sp>
-      <p:sp>
-        <p:nvSpPr>
-          <p:cNvPr id="40" name="TextBox 39"/>
-          <p:cNvSpPr txBox="1"/>
-          <p:nvPr/>
-        </p:nvSpPr>
-        <p:spPr>
-          <a:xfrm>
-            <a:off x="2667000" y="5873750"/>
-            <a:ext cx="2540000" cy="215900"/>
+              <a:t>Implementation</a:t>
+            </a:r>
+          </a:p>
+        </p:txBody>
+      </p:sp>
+      <p:sp>
+        <p:nvSpPr>
+          <p:cNvPr id="41" name="TextBox 40"/>
+          <p:cNvSpPr txBox="1"/>
+          <p:nvPr/>
+        </p:nvSpPr>
+        <p:spPr>
+          <a:xfrm>
+            <a:off x="298450" y="4699000"/>
+            <a:ext cx="2032000" cy="215900"/>
           </a:xfrm>
           <a:prstGeom prst="rect">
             <a:avLst/>
@@ -5917,7 +5994,16 @@
           </a:bodyPr>
           <a:lstStyle/>
           <a:p>
-            <a:pPr algn="ctr"/>
+            <a:pPr algn="r"/>
+            <a:r>
+              <a:rPr sz="1100" b="0" spc="80">
+                <a:solidFill>
+                  <a:srgbClr val="9A9AA2"/>
+                </a:solidFill>
+                <a:latin typeface="Courier New"/>
+              </a:rPr>
+              <a:t>05  </a:t>
+            </a:r>
             <a:r>
               <a:rPr sz="1800" b="0">
                 <a:solidFill>
@@ -5925,20 +6011,20 @@
                 </a:solidFill>
                 <a:latin typeface="Poppins"/>
               </a:rPr>
-              <a:t>Implementation</a:t>
-            </a:r>
-          </a:p>
-        </p:txBody>
-      </p:sp>
-      <p:sp>
-        <p:nvSpPr>
-          <p:cNvPr id="41" name="TextBox 40"/>
-          <p:cNvSpPr txBox="1"/>
-          <p:nvPr/>
-        </p:nvSpPr>
-        <p:spPr>
-          <a:xfrm>
-            <a:off x="298450" y="4699000"/>
+              <a:t>Testing</a:t>
+            </a:r>
+          </a:p>
+        </p:txBody>
+      </p:sp>
+      <p:sp>
+        <p:nvSpPr>
+          <p:cNvPr id="42" name="TextBox 41"/>
+          <p:cNvSpPr txBox="1"/>
+          <p:nvPr/>
+        </p:nvSpPr>
+        <p:spPr>
+          <a:xfrm>
+            <a:off x="298450" y="3333750"/>
             <a:ext cx="2032000" cy="215900"/>
           </a:xfrm>
           <a:prstGeom prst="rect">
@@ -5954,40 +6040,14 @@
           <a:p>
             <a:pPr algn="r"/>
             <a:r>
-              <a:rPr sz="1800" b="0">
-                <a:solidFill>
-                  <a:srgbClr val="ECECEE"/>
-                </a:solidFill>
-                <a:latin typeface="Poppins"/>
-              </a:rPr>
-              <a:t>Testing</a:t>
-            </a:r>
-          </a:p>
-        </p:txBody>
-      </p:sp>
-      <p:sp>
-        <p:nvSpPr>
-          <p:cNvPr id="42" name="TextBox 41"/>
-          <p:cNvSpPr txBox="1"/>
-          <p:nvPr/>
-        </p:nvSpPr>
-        <p:spPr>
-          <a:xfrm>
-            <a:off x="298450" y="3333750"/>
-            <a:ext cx="2032000" cy="215900"/>
-          </a:xfrm>
-          <a:prstGeom prst="rect">
-            <a:avLst/>
-          </a:prstGeom>
-          <a:noFill/>
-        </p:spPr>
-        <p:txBody>
-          <a:bodyPr wrap="square" lIns="0" rIns="0" tIns="0" bIns="0" anchor="ctr">
-            <a:spAutoFit/>
-          </a:bodyPr>
-          <a:lstStyle/>
-          <a:p>
-            <a:pPr algn="r"/>
+              <a:rPr sz="1100" b="0" spc="80">
+                <a:solidFill>
+                  <a:srgbClr val="9A9AA2"/>
+                </a:solidFill>
+                <a:latin typeface="Courier New"/>
+              </a:rPr>
+              <a:t>06  </a:t>
+            </a:r>
             <a:r>
               <a:rPr sz="1800" b="0">
                 <a:solidFill>
@@ -6657,7 +6717,7 @@
           <p:nvPr/>
         </p:nvPicPr>
         <p:blipFill>
-          <a:blip r:embed="rId3"/>
+          <a:blip r:embed="rId9"/>
           <a:stretch>
             <a:fillRect/>
           </a:stretch>
@@ -7312,14 +7372,60 @@
       </p:sp>
       <p:sp>
         <p:nvSpPr>
-          <p:cNvPr id="18" name="TextBox 17"/>
-          <p:cNvSpPr txBox="1"/>
-          <p:nvPr/>
-        </p:nvSpPr>
-        <p:spPr>
-          <a:xfrm>
-            <a:off x="6604000" y="2692400"/>
-            <a:ext cx="4445000" cy="165100"/>
+          <p:cNvPr id="18" name="Rounded Rectangle 17"/>
+          <p:cNvSpPr/>
+          <p:nvPr/>
+        </p:nvSpPr>
+        <p:spPr>
+          <a:xfrm>
+            <a:off x="8686800" y="2197100"/>
+            <a:ext cx="2273300" cy="355600"/>
+          </a:xfrm>
+          <a:prstGeom prst="roundRect">
+            <a:avLst/>
+          </a:prstGeom>
+          <a:solidFill>
+            <a:srgbClr val="161619"/>
+          </a:solidFill>
+          <a:ln w="15875">
+            <a:solidFill>
+              <a:srgbClr val="FF6B3D"/>
+            </a:solidFill>
+          </a:ln>
+          <a:effectLst/>
+        </p:spPr>
+        <p:style>
+          <a:lnRef idx="1">
+            <a:schemeClr val="accent1"/>
+          </a:lnRef>
+          <a:fillRef idx="3">
+            <a:schemeClr val="accent1"/>
+          </a:fillRef>
+          <a:effectRef idx="2">
+            <a:schemeClr val="accent1"/>
+          </a:effectRef>
+          <a:fontRef idx="minor">
+            <a:schemeClr val="lt1"/>
+          </a:fontRef>
+        </p:style>
+        <p:txBody>
+          <a:bodyPr rtlCol="0" anchor="ctr"/>
+          <a:lstStyle/>
+          <a:p>
+            <a:pPr algn="ctr"/>
+          </a:p>
+        </p:txBody>
+      </p:sp>
+      <p:sp>
+        <p:nvSpPr>
+          <p:cNvPr id="19" name="TextBox 18"/>
+          <p:cNvSpPr txBox="1"/>
+          <p:nvPr/>
+        </p:nvSpPr>
+        <p:spPr>
+          <a:xfrm>
+            <a:off x="8686800" y="2197100"/>
+            <a:ext cx="2273300" cy="355600"/>
           </a:xfrm>
           <a:prstGeom prst="rect">
             <a:avLst/>
@@ -7332,6 +7438,41 @@
           </a:bodyPr>
           <a:lstStyle/>
           <a:p>
+            <a:pPr algn="ctr"/>
+            <a:r>
+              <a:rPr sz="1500" b="0">
+                <a:solidFill>
+                  <a:srgbClr val="FF6B3D"/>
+                </a:solidFill>
+                <a:latin typeface="Poppins"/>
+              </a:rPr>
+              <a:t>or a business user</a:t>
+            </a:r>
+          </a:p>
+        </p:txBody>
+      </p:sp>
+      <p:sp>
+        <p:nvSpPr>
+          <p:cNvPr id="20" name="TextBox 19"/>
+          <p:cNvSpPr txBox="1"/>
+          <p:nvPr/>
+        </p:nvSpPr>
+        <p:spPr>
+          <a:xfrm>
+            <a:off x="6604000" y="2692400"/>
+            <a:ext cx="4826000" cy="165100"/>
+          </a:xfrm>
+          <a:prstGeom prst="rect">
+            <a:avLst/>
+          </a:prstGeom>
+          <a:noFill/>
+        </p:spPr>
+        <p:txBody>
+          <a:bodyPr wrap="square" lIns="0" rIns="0" tIns="0" bIns="0" anchor="ctr">
+            <a:spAutoFit/>
+          </a:bodyPr>
+          <a:lstStyle/>
+          <a:p>
             <a:pPr algn="l"/>
             <a:r>
               <a:rPr sz="1250" b="0">
@@ -7347,7 +7488,7 @@
       </p:sp>
       <p:sp>
         <p:nvSpPr>
-          <p:cNvPr id="19" name="Rectangle 18"/>
+          <p:cNvPr id="21" name="Rectangle 20"/>
           <p:cNvSpPr/>
           <p:nvPr/>
         </p:nvSpPr>
@@ -7391,7 +7532,7 @@
       </p:sp>
       <p:pic>
         <p:nvPicPr>
-          <p:cNvPr id="20" name="Picture 19" descr="ic-people.png"/>
+          <p:cNvPr id="22" name="Picture 21" descr="ic-people.png"/>
           <p:cNvPicPr>
             <a:picLocks noChangeAspect="1"/>
           </p:cNvPicPr>
@@ -7405,8 +7546,8 @@
         </p:blipFill>
         <p:spPr>
           <a:xfrm>
-            <a:off x="698500" y="3594100"/>
-            <a:ext cx="279400" cy="279400"/>
+            <a:off x="698500" y="3530600"/>
+            <a:ext cx="215900" cy="215900"/>
           </a:xfrm>
           <a:prstGeom prst="rect">
             <a:avLst/>
@@ -7415,14 +7556,14 @@
       </p:pic>
       <p:sp>
         <p:nvSpPr>
-          <p:cNvPr id="21" name="TextBox 20"/>
-          <p:cNvSpPr txBox="1"/>
-          <p:nvPr/>
-        </p:nvSpPr>
-        <p:spPr>
-          <a:xfrm>
-            <a:off x="698500" y="4013200"/>
-            <a:ext cx="3302000" cy="228600"/>
+          <p:cNvPr id="23" name="TextBox 22"/>
+          <p:cNvSpPr txBox="1"/>
+          <p:nvPr/>
+        </p:nvSpPr>
+        <p:spPr>
+          <a:xfrm>
+            <a:off x="1054100" y="3505200"/>
+            <a:ext cx="2857500" cy="266700"/>
           </a:xfrm>
           <a:prstGeom prst="rect">
             <a:avLst/>
@@ -7437,7 +7578,7 @@
           <a:p>
             <a:pPr algn="l"/>
             <a:r>
-              <a:rPr sz="1800" b="0">
+              <a:rPr sz="1700" b="0">
                 <a:solidFill>
                   <a:srgbClr val="ECECEE"/>
                 </a:solidFill>
@@ -7450,14 +7591,14 @@
       </p:sp>
       <p:sp>
         <p:nvSpPr>
-          <p:cNvPr id="22" name="TextBox 21"/>
-          <p:cNvSpPr txBox="1"/>
-          <p:nvPr/>
-        </p:nvSpPr>
-        <p:spPr>
-          <a:xfrm>
-            <a:off x="698500" y="4394200"/>
-            <a:ext cx="3302000" cy="736600"/>
+          <p:cNvPr id="24" name="TextBox 23"/>
+          <p:cNvSpPr txBox="1"/>
+          <p:nvPr/>
+        </p:nvSpPr>
+        <p:spPr>
+          <a:xfrm>
+            <a:off x="4064000" y="3505200"/>
+            <a:ext cx="7423150" cy="266700"/>
           </a:xfrm>
           <a:prstGeom prst="rect">
             <a:avLst/>
@@ -7470,11 +7611,7 @@
           </a:bodyPr>
           <a:lstStyle/>
           <a:p>
-            <a:pPr algn="l">
-              <a:lnSpc>
-                <a:spcPts val="1900"/>
-              </a:lnSpc>
-            </a:pPr>
+            <a:pPr algn="l"/>
             <a:r>
               <a:rPr sz="1300" b="0">
                 <a:solidFill>
@@ -7482,14 +7619,14 @@
                 </a:solidFill>
                 <a:latin typeface="Poppins"/>
               </a:rPr>
-              <a:t>Eliminates or reduces business analyst, designer and developer headcount on every project.</a:t>
+              <a:t>Eliminates or reduces business analyst, designer and developer headcount per project.</a:t>
             </a:r>
           </a:p>
         </p:txBody>
       </p:sp>
       <p:pic>
         <p:nvPicPr>
-          <p:cNvPr id="23" name="Picture 22" descr="ic-person.png"/>
+          <p:cNvPr id="25" name="Picture 24" descr="ic-person.png"/>
           <p:cNvPicPr>
             <a:picLocks noChangeAspect="1"/>
           </p:cNvPicPr>
@@ -7503,8 +7640,8 @@
         </p:blipFill>
         <p:spPr>
           <a:xfrm>
-            <a:off x="4318000" y="3594100"/>
-            <a:ext cx="279400" cy="279400"/>
+            <a:off x="698500" y="4000500"/>
+            <a:ext cx="215900" cy="215900"/>
           </a:xfrm>
           <a:prstGeom prst="rect">
             <a:avLst/>
@@ -7513,14 +7650,14 @@
       </p:pic>
       <p:sp>
         <p:nvSpPr>
-          <p:cNvPr id="24" name="TextBox 23"/>
-          <p:cNvSpPr txBox="1"/>
-          <p:nvPr/>
-        </p:nvSpPr>
-        <p:spPr>
-          <a:xfrm>
-            <a:off x="4318000" y="4013200"/>
-            <a:ext cx="3302000" cy="228600"/>
+          <p:cNvPr id="26" name="TextBox 25"/>
+          <p:cNvSpPr txBox="1"/>
+          <p:nvPr/>
+        </p:nvSpPr>
+        <p:spPr>
+          <a:xfrm>
+            <a:off x="1054100" y="3975100"/>
+            <a:ext cx="2857500" cy="266700"/>
           </a:xfrm>
           <a:prstGeom prst="rect">
             <a:avLst/>
@@ -7535,7 +7672,7 @@
           <a:p>
             <a:pPr algn="l"/>
             <a:r>
-              <a:rPr sz="1800" b="0">
+              <a:rPr sz="1700" b="0">
                 <a:solidFill>
                   <a:srgbClr val="ECECEE"/>
                 </a:solidFill>
@@ -7548,14 +7685,14 @@
       </p:sp>
       <p:sp>
         <p:nvSpPr>
-          <p:cNvPr id="25" name="TextBox 24"/>
-          <p:cNvSpPr txBox="1"/>
-          <p:nvPr/>
-        </p:nvSpPr>
-        <p:spPr>
-          <a:xfrm>
-            <a:off x="4318000" y="4394200"/>
-            <a:ext cx="3302000" cy="736600"/>
+          <p:cNvPr id="27" name="TextBox 26"/>
+          <p:cNvSpPr txBox="1"/>
+          <p:nvPr/>
+        </p:nvSpPr>
+        <p:spPr>
+          <a:xfrm>
+            <a:off x="4064000" y="3975100"/>
+            <a:ext cx="7423150" cy="266700"/>
           </a:xfrm>
           <a:prstGeom prst="rect">
             <a:avLst/>
@@ -7568,11 +7705,7 @@
           </a:bodyPr>
           <a:lstStyle/>
           <a:p>
-            <a:pPr algn="l">
-              <a:lnSpc>
-                <a:spcPts val="1900"/>
-              </a:lnSpc>
-            </a:pPr>
+            <a:pPr algn="l"/>
             <a:r>
               <a:rPr sz="1300" b="0">
                 <a:solidFill>
@@ -7587,7 +7720,7 @@
       </p:sp>
       <p:pic>
         <p:nvPicPr>
-          <p:cNvPr id="26" name="Picture 25" descr="ic-layers.png"/>
+          <p:cNvPr id="28" name="Picture 27" descr="ic-window.png"/>
           <p:cNvPicPr>
             <a:picLocks noChangeAspect="1"/>
           </p:cNvPicPr>
@@ -7601,8 +7734,8 @@
         </p:blipFill>
         <p:spPr>
           <a:xfrm>
-            <a:off x="7937500" y="3594100"/>
-            <a:ext cx="279400" cy="279400"/>
+            <a:off x="698500" y="4470400"/>
+            <a:ext cx="215900" cy="215900"/>
           </a:xfrm>
           <a:prstGeom prst="rect">
             <a:avLst/>
@@ -7611,14 +7744,14 @@
       </p:pic>
       <p:sp>
         <p:nvSpPr>
-          <p:cNvPr id="27" name="TextBox 26"/>
-          <p:cNvSpPr txBox="1"/>
-          <p:nvPr/>
-        </p:nvSpPr>
-        <p:spPr>
-          <a:xfrm>
-            <a:off x="7937500" y="4013200"/>
-            <a:ext cx="3302000" cy="228600"/>
+          <p:cNvPr id="29" name="TextBox 28"/>
+          <p:cNvSpPr txBox="1"/>
+          <p:nvPr/>
+        </p:nvSpPr>
+        <p:spPr>
+          <a:xfrm>
+            <a:off x="1054100" y="4445000"/>
+            <a:ext cx="2857500" cy="266700"/>
           </a:xfrm>
           <a:prstGeom prst="rect">
             <a:avLst/>
@@ -7633,27 +7766,27 @@
           <a:p>
             <a:pPr algn="l"/>
             <a:r>
-              <a:rPr sz="1800" b="0">
+              <a:rPr sz="1700" b="0">
                 <a:solidFill>
                   <a:srgbClr val="ECECEE"/>
                 </a:solidFill>
                 <a:latin typeface="Poppins"/>
               </a:rPr>
-              <a:t>A head start on day one</a:t>
-            </a:r>
-          </a:p>
-        </p:txBody>
-      </p:sp>
-      <p:sp>
-        <p:nvSpPr>
-          <p:cNvPr id="28" name="TextBox 27"/>
-          <p:cNvSpPr txBox="1"/>
-          <p:nvPr/>
-        </p:nvSpPr>
-        <p:spPr>
-          <a:xfrm>
-            <a:off x="7937500" y="4394200"/>
-            <a:ext cx="3302000" cy="736600"/>
+              <a:t>A business user can run it</a:t>
+            </a:r>
+          </a:p>
+        </p:txBody>
+      </p:sp>
+      <p:sp>
+        <p:nvSpPr>
+          <p:cNvPr id="30" name="TextBox 29"/>
+          <p:cNvSpPr txBox="1"/>
+          <p:nvPr/>
+        </p:nvSpPr>
+        <p:spPr>
+          <a:xfrm>
+            <a:off x="4064000" y="4445000"/>
+            <a:ext cx="7423150" cy="266700"/>
           </a:xfrm>
           <a:prstGeom prst="rect">
             <a:avLst/>
@@ -7666,11 +7799,7 @@
           </a:bodyPr>
           <a:lstStyle/>
           <a:p>
-            <a:pPr algn="l">
-              <a:lnSpc>
-                <a:spcPts val="1900"/>
-              </a:lnSpc>
-            </a:pPr>
+            <a:pPr algn="l"/>
             <a:r>
               <a:rPr sz="1300" b="0">
                 <a:solidFill>
@@ -7678,20 +7807,114 @@
                 </a:solidFill>
                 <a:latin typeface="Poppins"/>
               </a:rPr>
-              <a:t>Customers inherit validated best practices and documented failure learnings from the first build.</a:t>
-            </a:r>
-          </a:p>
-        </p:txBody>
-      </p:sp>
-      <p:sp>
-        <p:nvSpPr>
-          <p:cNvPr id="29" name="Rectangle 28"/>
+              <a:t>The platform is operated by the business, not only by engineers.</a:t>
+            </a:r>
+          </a:p>
+        </p:txBody>
+      </p:sp>
+      <p:pic>
+        <p:nvPicPr>
+          <p:cNvPr id="31" name="Picture 30" descr="ic-layers.png"/>
+          <p:cNvPicPr>
+            <a:picLocks noChangeAspect="1"/>
+          </p:cNvPicPr>
+          <p:nvPr/>
+        </p:nvPicPr>
+        <p:blipFill>
+          <a:blip r:embed="rId6"/>
+          <a:stretch>
+            <a:fillRect/>
+          </a:stretch>
+        </p:blipFill>
+        <p:spPr>
+          <a:xfrm>
+            <a:off x="698500" y="4940300"/>
+            <a:ext cx="215900" cy="215900"/>
+          </a:xfrm>
+          <a:prstGeom prst="rect">
+            <a:avLst/>
+          </a:prstGeom>
+        </p:spPr>
+      </p:pic>
+      <p:sp>
+        <p:nvSpPr>
+          <p:cNvPr id="32" name="TextBox 31"/>
+          <p:cNvSpPr txBox="1"/>
+          <p:nvPr/>
+        </p:nvSpPr>
+        <p:spPr>
+          <a:xfrm>
+            <a:off x="1054100" y="4914900"/>
+            <a:ext cx="2857500" cy="266700"/>
+          </a:xfrm>
+          <a:prstGeom prst="rect">
+            <a:avLst/>
+          </a:prstGeom>
+          <a:noFill/>
+        </p:spPr>
+        <p:txBody>
+          <a:bodyPr wrap="square" lIns="0" rIns="0" tIns="0" bIns="0" anchor="ctr">
+            <a:spAutoFit/>
+          </a:bodyPr>
+          <a:lstStyle/>
+          <a:p>
+            <a:pPr algn="l"/>
+            <a:r>
+              <a:rPr sz="1700" b="0">
+                <a:solidFill>
+                  <a:srgbClr val="ECECEE"/>
+                </a:solidFill>
+                <a:latin typeface="Poppins"/>
+              </a:rPr>
+              <a:t>A head start on day one</a:t>
+            </a:r>
+          </a:p>
+        </p:txBody>
+      </p:sp>
+      <p:sp>
+        <p:nvSpPr>
+          <p:cNvPr id="33" name="TextBox 32"/>
+          <p:cNvSpPr txBox="1"/>
+          <p:nvPr/>
+        </p:nvSpPr>
+        <p:spPr>
+          <a:xfrm>
+            <a:off x="4064000" y="4914900"/>
+            <a:ext cx="7423150" cy="266700"/>
+          </a:xfrm>
+          <a:prstGeom prst="rect">
+            <a:avLst/>
+          </a:prstGeom>
+          <a:noFill/>
+        </p:spPr>
+        <p:txBody>
+          <a:bodyPr wrap="square" lIns="0" rIns="0" tIns="0" bIns="0" anchor="ctr">
+            <a:spAutoFit/>
+          </a:bodyPr>
+          <a:lstStyle/>
+          <a:p>
+            <a:pPr algn="l"/>
+            <a:r>
+              <a:rPr sz="1300" b="0">
+                <a:solidFill>
+                  <a:srgbClr val="9A9AA2"/>
+                </a:solidFill>
+                <a:latin typeface="Poppins"/>
+              </a:rPr>
+              <a:t>Customers inherit best practices and documented failure learnings from the first build.</a:t>
+            </a:r>
+          </a:p>
+        </p:txBody>
+      </p:sp>
+      <p:sp>
+        <p:nvSpPr>
+          <p:cNvPr id="34" name="Rectangle 33"/>
           <p:cNvSpPr/>
           <p:nvPr/>
         </p:nvSpPr>
         <p:spPr>
           <a:xfrm>
-            <a:off x="698500" y="5207000"/>
+            <a:off x="698500" y="5270500"/>
             <a:ext cx="10788650" cy="6350"/>
           </a:xfrm>
           <a:prstGeom prst="rect">
@@ -7729,14 +7952,14 @@
       </p:sp>
       <p:sp>
         <p:nvSpPr>
-          <p:cNvPr id="30" name="TextBox 29"/>
-          <p:cNvSpPr txBox="1"/>
-          <p:nvPr/>
-        </p:nvSpPr>
-        <p:spPr>
-          <a:xfrm>
-            <a:off x="698500" y="5410200"/>
-            <a:ext cx="9906000" cy="215900"/>
+          <p:cNvPr id="35" name="TextBox 34"/>
+          <p:cNvSpPr txBox="1"/>
+          <p:nvPr/>
+        </p:nvSpPr>
+        <p:spPr>
+          <a:xfrm>
+            <a:off x="698500" y="5473700"/>
+            <a:ext cx="10160000" cy="215900"/>
           </a:xfrm>
           <a:prstGeom prst="rect">
             <a:avLst/>
@@ -7773,14 +7996,14 @@
       </p:sp>
       <p:pic>
         <p:nvPicPr>
-          <p:cNvPr id="31" name="Picture 30" descr="logo.png"/>
+          <p:cNvPr id="36" name="Picture 35" descr="logo.png"/>
           <p:cNvPicPr>
             <a:picLocks noChangeAspect="1"/>
           </p:cNvPicPr>
           <p:nvPr/>
         </p:nvPicPr>
         <p:blipFill>
-          <a:blip r:embed="rId6"/>
+          <a:blip r:embed="rId7"/>
           <a:stretch>
             <a:fillRect/>
           </a:stretch>
@@ -9881,8 +10104,8 @@
         </p:nvSpPr>
         <p:spPr>
           <a:xfrm>
-            <a:off x="1530350" y="2082800"/>
-            <a:ext cx="482600" cy="482600"/>
+            <a:off x="1492250" y="2044700"/>
+            <a:ext cx="558800" cy="558800"/>
           </a:xfrm>
           <a:prstGeom prst="ellipse">
             <a:avLst/>
@@ -9919,41 +10142,30 @@
           </a:p>
         </p:txBody>
       </p:sp>
-      <p:sp>
-        <p:nvSpPr>
-          <p:cNvPr id="103" name="TextBox 102"/>
-          <p:cNvSpPr txBox="1"/>
-          <p:nvPr/>
-        </p:nvSpPr>
-        <p:spPr>
-          <a:xfrm>
-            <a:off x="1517650" y="2228850"/>
-            <a:ext cx="508000" cy="190500"/>
-          </a:xfrm>
-          <a:prstGeom prst="rect">
-            <a:avLst/>
-          </a:prstGeom>
-          <a:noFill/>
-        </p:spPr>
-        <p:txBody>
-          <a:bodyPr wrap="square" lIns="0" rIns="0" tIns="0" bIns="0" anchor="ctr">
-            <a:spAutoFit/>
-          </a:bodyPr>
-          <a:lstStyle/>
-          <a:p>
-            <a:pPr algn="ctr"/>
-            <a:r>
-              <a:rPr sz="1300" b="0" spc="80">
-                <a:solidFill>
-                  <a:srgbClr val="9A9AA2"/>
-                </a:solidFill>
-                <a:latin typeface="Courier New"/>
-              </a:rPr>
-              <a:t>01</a:t>
-            </a:r>
-          </a:p>
-        </p:txBody>
-      </p:sp>
+      <p:pic>
+        <p:nvPicPr>
+          <p:cNvPr id="103" name="Picture 102" descr="ic-person-node.png"/>
+          <p:cNvPicPr>
+            <a:picLocks noChangeAspect="1"/>
+          </p:cNvPicPr>
+          <p:nvPr/>
+        </p:nvPicPr>
+        <p:blipFill>
+          <a:blip r:embed="rId3"/>
+          <a:stretch>
+            <a:fillRect/>
+          </a:stretch>
+        </p:blipFill>
+        <p:spPr>
+          <a:xfrm>
+            <a:off x="1657350" y="2209800"/>
+            <a:ext cx="228600" cy="228600"/>
+          </a:xfrm>
+          <a:prstGeom prst="rect">
+            <a:avLst/>
+          </a:prstGeom>
+        </p:spPr>
+      </p:pic>
       <p:sp>
         <p:nvSpPr>
           <p:cNvPr id="104" name="Oval 103"/>
@@ -9962,8 +10174,8 @@
         </p:nvSpPr>
         <p:spPr>
           <a:xfrm>
-            <a:off x="3689350" y="2082800"/>
-            <a:ext cx="482600" cy="482600"/>
+            <a:off x="3651250" y="2044700"/>
+            <a:ext cx="558800" cy="558800"/>
           </a:xfrm>
           <a:prstGeom prst="ellipse">
             <a:avLst/>
@@ -10000,41 +10212,30 @@
           </a:p>
         </p:txBody>
       </p:sp>
-      <p:sp>
-        <p:nvSpPr>
-          <p:cNvPr id="105" name="TextBox 104"/>
-          <p:cNvSpPr txBox="1"/>
-          <p:nvPr/>
-        </p:nvSpPr>
-        <p:spPr>
-          <a:xfrm>
-            <a:off x="3676650" y="2228850"/>
-            <a:ext cx="508000" cy="190500"/>
-          </a:xfrm>
-          <a:prstGeom prst="rect">
-            <a:avLst/>
-          </a:prstGeom>
-          <a:noFill/>
-        </p:spPr>
-        <p:txBody>
-          <a:bodyPr wrap="square" lIns="0" rIns="0" tIns="0" bIns="0" anchor="ctr">
-            <a:spAutoFit/>
-          </a:bodyPr>
-          <a:lstStyle/>
-          <a:p>
-            <a:pPr algn="ctr"/>
-            <a:r>
-              <a:rPr sz="1300" b="0" spc="80">
-                <a:solidFill>
-                  <a:srgbClr val="9A9AA2"/>
-                </a:solidFill>
-                <a:latin typeface="Courier New"/>
-              </a:rPr>
-              <a:t>02</a:t>
-            </a:r>
-          </a:p>
-        </p:txBody>
-      </p:sp>
+      <p:pic>
+        <p:nvPicPr>
+          <p:cNvPr id="105" name="Picture 104" descr="ic-person-node.png"/>
+          <p:cNvPicPr>
+            <a:picLocks noChangeAspect="1"/>
+          </p:cNvPicPr>
+          <p:nvPr/>
+        </p:nvPicPr>
+        <p:blipFill>
+          <a:blip r:embed="rId3"/>
+          <a:stretch>
+            <a:fillRect/>
+          </a:stretch>
+        </p:blipFill>
+        <p:spPr>
+          <a:xfrm>
+            <a:off x="3816350" y="2209800"/>
+            <a:ext cx="228600" cy="228600"/>
+          </a:xfrm>
+          <a:prstGeom prst="rect">
+            <a:avLst/>
+          </a:prstGeom>
+        </p:spPr>
+      </p:pic>
       <p:sp>
         <p:nvSpPr>
           <p:cNvPr id="106" name="Oval 105"/>
@@ -10043,8 +10244,8 @@
         </p:nvSpPr>
         <p:spPr>
           <a:xfrm>
-            <a:off x="5848350" y="2082800"/>
-            <a:ext cx="482600" cy="482600"/>
+            <a:off x="5810250" y="2044700"/>
+            <a:ext cx="558800" cy="558800"/>
           </a:xfrm>
           <a:prstGeom prst="ellipse">
             <a:avLst/>
@@ -10081,41 +10282,30 @@
           </a:p>
         </p:txBody>
       </p:sp>
-      <p:sp>
-        <p:nvSpPr>
-          <p:cNvPr id="107" name="TextBox 106"/>
-          <p:cNvSpPr txBox="1"/>
-          <p:nvPr/>
-        </p:nvSpPr>
-        <p:spPr>
-          <a:xfrm>
-            <a:off x="5835650" y="2228850"/>
-            <a:ext cx="508000" cy="190500"/>
-          </a:xfrm>
-          <a:prstGeom prst="rect">
-            <a:avLst/>
-          </a:prstGeom>
-          <a:noFill/>
-        </p:spPr>
-        <p:txBody>
-          <a:bodyPr wrap="square" lIns="0" rIns="0" tIns="0" bIns="0" anchor="ctr">
-            <a:spAutoFit/>
-          </a:bodyPr>
-          <a:lstStyle/>
-          <a:p>
-            <a:pPr algn="ctr"/>
-            <a:r>
-              <a:rPr sz="1300" b="0" spc="80">
-                <a:solidFill>
-                  <a:srgbClr val="9A9AA2"/>
-                </a:solidFill>
-                <a:latin typeface="Courier New"/>
-              </a:rPr>
-              <a:t>03</a:t>
-            </a:r>
-          </a:p>
-        </p:txBody>
-      </p:sp>
+      <p:pic>
+        <p:nvPicPr>
+          <p:cNvPr id="107" name="Picture 106" descr="ic-person-node.png"/>
+          <p:cNvPicPr>
+            <a:picLocks noChangeAspect="1"/>
+          </p:cNvPicPr>
+          <p:nvPr/>
+        </p:nvPicPr>
+        <p:blipFill>
+          <a:blip r:embed="rId3"/>
+          <a:stretch>
+            <a:fillRect/>
+          </a:stretch>
+        </p:blipFill>
+        <p:spPr>
+          <a:xfrm>
+            <a:off x="5975350" y="2209800"/>
+            <a:ext cx="228600" cy="228600"/>
+          </a:xfrm>
+          <a:prstGeom prst="rect">
+            <a:avLst/>
+          </a:prstGeom>
+        </p:spPr>
+      </p:pic>
       <p:sp>
         <p:nvSpPr>
           <p:cNvPr id="108" name="Oval 107"/>
@@ -10124,8 +10314,8 @@
         </p:nvSpPr>
         <p:spPr>
           <a:xfrm>
-            <a:off x="8007350" y="2082800"/>
-            <a:ext cx="482600" cy="482600"/>
+            <a:off x="7969250" y="2044700"/>
+            <a:ext cx="558800" cy="558800"/>
           </a:xfrm>
           <a:prstGeom prst="ellipse">
             <a:avLst/>
@@ -10162,41 +10352,30 @@
           </a:p>
         </p:txBody>
       </p:sp>
-      <p:sp>
-        <p:nvSpPr>
-          <p:cNvPr id="109" name="TextBox 108"/>
-          <p:cNvSpPr txBox="1"/>
-          <p:nvPr/>
-        </p:nvSpPr>
-        <p:spPr>
-          <a:xfrm>
-            <a:off x="7994650" y="2228850"/>
-            <a:ext cx="508000" cy="190500"/>
-          </a:xfrm>
-          <a:prstGeom prst="rect">
-            <a:avLst/>
-          </a:prstGeom>
-          <a:noFill/>
-        </p:spPr>
-        <p:txBody>
-          <a:bodyPr wrap="square" lIns="0" rIns="0" tIns="0" bIns="0" anchor="ctr">
-            <a:spAutoFit/>
-          </a:bodyPr>
-          <a:lstStyle/>
-          <a:p>
-            <a:pPr algn="ctr"/>
-            <a:r>
-              <a:rPr sz="1300" b="0" spc="80">
-                <a:solidFill>
-                  <a:srgbClr val="9A9AA2"/>
-                </a:solidFill>
-                <a:latin typeface="Courier New"/>
-              </a:rPr>
-              <a:t>04</a:t>
-            </a:r>
-          </a:p>
-        </p:txBody>
-      </p:sp>
+      <p:pic>
+        <p:nvPicPr>
+          <p:cNvPr id="109" name="Picture 108" descr="ic-person-node.png"/>
+          <p:cNvPicPr>
+            <a:picLocks noChangeAspect="1"/>
+          </p:cNvPicPr>
+          <p:nvPr/>
+        </p:nvPicPr>
+        <p:blipFill>
+          <a:blip r:embed="rId3"/>
+          <a:stretch>
+            <a:fillRect/>
+          </a:stretch>
+        </p:blipFill>
+        <p:spPr>
+          <a:xfrm>
+            <a:off x="8134350" y="2209800"/>
+            <a:ext cx="228600" cy="228600"/>
+          </a:xfrm>
+          <a:prstGeom prst="rect">
+            <a:avLst/>
+          </a:prstGeom>
+        </p:spPr>
+      </p:pic>
       <p:sp>
         <p:nvSpPr>
           <p:cNvPr id="110" name="Oval 109"/>
@@ -10205,8 +10384,8 @@
         </p:nvSpPr>
         <p:spPr>
           <a:xfrm>
-            <a:off x="10166350" y="2082800"/>
-            <a:ext cx="482600" cy="482600"/>
+            <a:off x="10128250" y="2044700"/>
+            <a:ext cx="558800" cy="558800"/>
           </a:xfrm>
           <a:prstGeom prst="ellipse">
             <a:avLst/>
@@ -10243,219 +10422,9 @@
           </a:p>
         </p:txBody>
       </p:sp>
-      <p:sp>
-        <p:nvSpPr>
-          <p:cNvPr id="111" name="TextBox 110"/>
-          <p:cNvSpPr txBox="1"/>
-          <p:nvPr/>
-        </p:nvSpPr>
-        <p:spPr>
-          <a:xfrm>
-            <a:off x="10153650" y="2228850"/>
-            <a:ext cx="508000" cy="190500"/>
-          </a:xfrm>
-          <a:prstGeom prst="rect">
-            <a:avLst/>
-          </a:prstGeom>
-          <a:noFill/>
-        </p:spPr>
-        <p:txBody>
-          <a:bodyPr wrap="square" lIns="0" rIns="0" tIns="0" bIns="0" anchor="ctr">
-            <a:spAutoFit/>
-          </a:bodyPr>
-          <a:lstStyle/>
-          <a:p>
-            <a:pPr algn="ctr"/>
-            <a:r>
-              <a:rPr sz="1300" b="0" spc="80">
-                <a:solidFill>
-                  <a:srgbClr val="9A9AA2"/>
-                </a:solidFill>
-                <a:latin typeface="Courier New"/>
-              </a:rPr>
-              <a:t>05</a:t>
-            </a:r>
-          </a:p>
-        </p:txBody>
-      </p:sp>
-      <p:sp>
-        <p:nvSpPr>
-          <p:cNvPr id="112" name="TextBox 111"/>
-          <p:cNvSpPr txBox="1"/>
-          <p:nvPr/>
-        </p:nvSpPr>
-        <p:spPr>
-          <a:xfrm>
-            <a:off x="755650" y="2705100"/>
-            <a:ext cx="2032000" cy="215900"/>
-          </a:xfrm>
-          <a:prstGeom prst="rect">
-            <a:avLst/>
-          </a:prstGeom>
-          <a:noFill/>
-        </p:spPr>
-        <p:txBody>
-          <a:bodyPr wrap="square" lIns="0" rIns="0" tIns="0" bIns="0" anchor="ctr">
-            <a:spAutoFit/>
-          </a:bodyPr>
-          <a:lstStyle/>
-          <a:p>
-            <a:pPr algn="ctr"/>
-            <a:r>
-              <a:rPr sz="1700" b="0">
-                <a:solidFill>
-                  <a:srgbClr val="ECECEE"/>
-                </a:solidFill>
-                <a:latin typeface="Poppins"/>
-              </a:rPr>
-              <a:t>Requirements</a:t>
-            </a:r>
-          </a:p>
-        </p:txBody>
-      </p:sp>
-      <p:sp>
-        <p:nvSpPr>
-          <p:cNvPr id="113" name="TextBox 112"/>
-          <p:cNvSpPr txBox="1"/>
-          <p:nvPr/>
-        </p:nvSpPr>
-        <p:spPr>
-          <a:xfrm>
-            <a:off x="2914650" y="2705100"/>
-            <a:ext cx="2032000" cy="215900"/>
-          </a:xfrm>
-          <a:prstGeom prst="rect">
-            <a:avLst/>
-          </a:prstGeom>
-          <a:noFill/>
-        </p:spPr>
-        <p:txBody>
-          <a:bodyPr wrap="square" lIns="0" rIns="0" tIns="0" bIns="0" anchor="ctr">
-            <a:spAutoFit/>
-          </a:bodyPr>
-          <a:lstStyle/>
-          <a:p>
-            <a:pPr algn="ctr"/>
-            <a:r>
-              <a:rPr sz="1700" b="0">
-                <a:solidFill>
-                  <a:srgbClr val="ECECEE"/>
-                </a:solidFill>
-                <a:latin typeface="Poppins"/>
-              </a:rPr>
-              <a:t>Feasibility</a:t>
-            </a:r>
-          </a:p>
-        </p:txBody>
-      </p:sp>
-      <p:sp>
-        <p:nvSpPr>
-          <p:cNvPr id="114" name="TextBox 113"/>
-          <p:cNvSpPr txBox="1"/>
-          <p:nvPr/>
-        </p:nvSpPr>
-        <p:spPr>
-          <a:xfrm>
-            <a:off x="5073650" y="2705100"/>
-            <a:ext cx="2032000" cy="215900"/>
-          </a:xfrm>
-          <a:prstGeom prst="rect">
-            <a:avLst/>
-          </a:prstGeom>
-          <a:noFill/>
-        </p:spPr>
-        <p:txBody>
-          <a:bodyPr wrap="square" lIns="0" rIns="0" tIns="0" bIns="0" anchor="ctr">
-            <a:spAutoFit/>
-          </a:bodyPr>
-          <a:lstStyle/>
-          <a:p>
-            <a:pPr algn="ctr"/>
-            <a:r>
-              <a:rPr sz="1700" b="0">
-                <a:solidFill>
-                  <a:srgbClr val="ECECEE"/>
-                </a:solidFill>
-                <a:latin typeface="Poppins"/>
-              </a:rPr>
-              <a:t>Compliance</a:t>
-            </a:r>
-          </a:p>
-        </p:txBody>
-      </p:sp>
-      <p:sp>
-        <p:nvSpPr>
-          <p:cNvPr id="115" name="TextBox 114"/>
-          <p:cNvSpPr txBox="1"/>
-          <p:nvPr/>
-        </p:nvSpPr>
-        <p:spPr>
-          <a:xfrm>
-            <a:off x="7232650" y="2705100"/>
-            <a:ext cx="2032000" cy="215900"/>
-          </a:xfrm>
-          <a:prstGeom prst="rect">
-            <a:avLst/>
-          </a:prstGeom>
-          <a:noFill/>
-        </p:spPr>
-        <p:txBody>
-          <a:bodyPr wrap="square" lIns="0" rIns="0" tIns="0" bIns="0" anchor="ctr">
-            <a:spAutoFit/>
-          </a:bodyPr>
-          <a:lstStyle/>
-          <a:p>
-            <a:pPr algn="ctr"/>
-            <a:r>
-              <a:rPr sz="1700" b="0">
-                <a:solidFill>
-                  <a:srgbClr val="ECECEE"/>
-                </a:solidFill>
-                <a:latin typeface="Poppins"/>
-              </a:rPr>
-              <a:t>Approval</a:t>
-            </a:r>
-          </a:p>
-        </p:txBody>
-      </p:sp>
-      <p:sp>
-        <p:nvSpPr>
-          <p:cNvPr id="116" name="TextBox 115"/>
-          <p:cNvSpPr txBox="1"/>
-          <p:nvPr/>
-        </p:nvSpPr>
-        <p:spPr>
-          <a:xfrm>
-            <a:off x="9391650" y="2705100"/>
-            <a:ext cx="2032000" cy="215900"/>
-          </a:xfrm>
-          <a:prstGeom prst="rect">
-            <a:avLst/>
-          </a:prstGeom>
-          <a:noFill/>
-        </p:spPr>
-        <p:txBody>
-          <a:bodyPr wrap="square" lIns="0" rIns="0" tIns="0" bIns="0" anchor="ctr">
-            <a:spAutoFit/>
-          </a:bodyPr>
-          <a:lstStyle/>
-          <a:p>
-            <a:pPr algn="ctr"/>
-            <a:r>
-              <a:rPr sz="1700" b="0">
-                <a:solidFill>
-                  <a:srgbClr val="ECECEE"/>
-                </a:solidFill>
-                <a:latin typeface="Poppins"/>
-              </a:rPr>
-              <a:t>Operations</a:t>
-            </a:r>
-          </a:p>
-        </p:txBody>
-      </p:sp>
       <p:pic>
         <p:nvPicPr>
-          <p:cNvPr id="117" name="Picture 116" descr="ic-handoff.png"/>
+          <p:cNvPr id="111" name="Picture 110" descr="ic-person-node.png"/>
           <p:cNvPicPr>
             <a:picLocks noChangeAspect="1"/>
           </p:cNvPicPr>
@@ -10469,8 +10438,207 @@
         </p:blipFill>
         <p:spPr>
           <a:xfrm>
-            <a:off x="2590800" y="1905000"/>
-            <a:ext cx="139700" cy="139700"/>
+            <a:off x="10293350" y="2209800"/>
+            <a:ext cx="228600" cy="228600"/>
+          </a:xfrm>
+          <a:prstGeom prst="rect">
+            <a:avLst/>
+          </a:prstGeom>
+        </p:spPr>
+      </p:pic>
+      <p:sp>
+        <p:nvSpPr>
+          <p:cNvPr id="112" name="TextBox 111"/>
+          <p:cNvSpPr txBox="1"/>
+          <p:nvPr/>
+        </p:nvSpPr>
+        <p:spPr>
+          <a:xfrm>
+            <a:off x="755650" y="2743200"/>
+            <a:ext cx="2032000" cy="215900"/>
+          </a:xfrm>
+          <a:prstGeom prst="rect">
+            <a:avLst/>
+          </a:prstGeom>
+          <a:noFill/>
+        </p:spPr>
+        <p:txBody>
+          <a:bodyPr wrap="square" lIns="0" rIns="0" tIns="0" bIns="0" anchor="ctr">
+            <a:spAutoFit/>
+          </a:bodyPr>
+          <a:lstStyle/>
+          <a:p>
+            <a:pPr algn="ctr"/>
+            <a:r>
+              <a:rPr sz="1700" b="0">
+                <a:solidFill>
+                  <a:srgbClr val="ECECEE"/>
+                </a:solidFill>
+                <a:latin typeface="Poppins"/>
+              </a:rPr>
+              <a:t>Requirements</a:t>
+            </a:r>
+          </a:p>
+        </p:txBody>
+      </p:sp>
+      <p:sp>
+        <p:nvSpPr>
+          <p:cNvPr id="113" name="TextBox 112"/>
+          <p:cNvSpPr txBox="1"/>
+          <p:nvPr/>
+        </p:nvSpPr>
+        <p:spPr>
+          <a:xfrm>
+            <a:off x="2914650" y="2743200"/>
+            <a:ext cx="2032000" cy="215900"/>
+          </a:xfrm>
+          <a:prstGeom prst="rect">
+            <a:avLst/>
+          </a:prstGeom>
+          <a:noFill/>
+        </p:spPr>
+        <p:txBody>
+          <a:bodyPr wrap="square" lIns="0" rIns="0" tIns="0" bIns="0" anchor="ctr">
+            <a:spAutoFit/>
+          </a:bodyPr>
+          <a:lstStyle/>
+          <a:p>
+            <a:pPr algn="ctr"/>
+            <a:r>
+              <a:rPr sz="1700" b="0">
+                <a:solidFill>
+                  <a:srgbClr val="ECECEE"/>
+                </a:solidFill>
+                <a:latin typeface="Poppins"/>
+              </a:rPr>
+              <a:t>Feasibility</a:t>
+            </a:r>
+          </a:p>
+        </p:txBody>
+      </p:sp>
+      <p:sp>
+        <p:nvSpPr>
+          <p:cNvPr id="114" name="TextBox 113"/>
+          <p:cNvSpPr txBox="1"/>
+          <p:nvPr/>
+        </p:nvSpPr>
+        <p:spPr>
+          <a:xfrm>
+            <a:off x="5073650" y="2743200"/>
+            <a:ext cx="2032000" cy="215900"/>
+          </a:xfrm>
+          <a:prstGeom prst="rect">
+            <a:avLst/>
+          </a:prstGeom>
+          <a:noFill/>
+        </p:spPr>
+        <p:txBody>
+          <a:bodyPr wrap="square" lIns="0" rIns="0" tIns="0" bIns="0" anchor="ctr">
+            <a:spAutoFit/>
+          </a:bodyPr>
+          <a:lstStyle/>
+          <a:p>
+            <a:pPr algn="ctr"/>
+            <a:r>
+              <a:rPr sz="1700" b="0">
+                <a:solidFill>
+                  <a:srgbClr val="ECECEE"/>
+                </a:solidFill>
+                <a:latin typeface="Poppins"/>
+              </a:rPr>
+              <a:t>Compliance</a:t>
+            </a:r>
+          </a:p>
+        </p:txBody>
+      </p:sp>
+      <p:sp>
+        <p:nvSpPr>
+          <p:cNvPr id="115" name="TextBox 114"/>
+          <p:cNvSpPr txBox="1"/>
+          <p:nvPr/>
+        </p:nvSpPr>
+        <p:spPr>
+          <a:xfrm>
+            <a:off x="7232650" y="2743200"/>
+            <a:ext cx="2032000" cy="215900"/>
+          </a:xfrm>
+          <a:prstGeom prst="rect">
+            <a:avLst/>
+          </a:prstGeom>
+          <a:noFill/>
+        </p:spPr>
+        <p:txBody>
+          <a:bodyPr wrap="square" lIns="0" rIns="0" tIns="0" bIns="0" anchor="ctr">
+            <a:spAutoFit/>
+          </a:bodyPr>
+          <a:lstStyle/>
+          <a:p>
+            <a:pPr algn="ctr"/>
+            <a:r>
+              <a:rPr sz="1700" b="0">
+                <a:solidFill>
+                  <a:srgbClr val="ECECEE"/>
+                </a:solidFill>
+                <a:latin typeface="Poppins"/>
+              </a:rPr>
+              <a:t>Approval</a:t>
+            </a:r>
+          </a:p>
+        </p:txBody>
+      </p:sp>
+      <p:sp>
+        <p:nvSpPr>
+          <p:cNvPr id="116" name="TextBox 115"/>
+          <p:cNvSpPr txBox="1"/>
+          <p:nvPr/>
+        </p:nvSpPr>
+        <p:spPr>
+          <a:xfrm>
+            <a:off x="9391650" y="2743200"/>
+            <a:ext cx="2032000" cy="215900"/>
+          </a:xfrm>
+          <a:prstGeom prst="rect">
+            <a:avLst/>
+          </a:prstGeom>
+          <a:noFill/>
+        </p:spPr>
+        <p:txBody>
+          <a:bodyPr wrap="square" lIns="0" rIns="0" tIns="0" bIns="0" anchor="ctr">
+            <a:spAutoFit/>
+          </a:bodyPr>
+          <a:lstStyle/>
+          <a:p>
+            <a:pPr algn="ctr"/>
+            <a:r>
+              <a:rPr sz="1700" b="0">
+                <a:solidFill>
+                  <a:srgbClr val="ECECEE"/>
+                </a:solidFill>
+                <a:latin typeface="Poppins"/>
+              </a:rPr>
+              <a:t>Operations</a:t>
+            </a:r>
+          </a:p>
+        </p:txBody>
+      </p:sp>
+      <p:pic>
+        <p:nvPicPr>
+          <p:cNvPr id="117" name="Picture 116" descr="ic-handoff.png"/>
+          <p:cNvPicPr>
+            <a:picLocks noChangeAspect="1"/>
+          </p:cNvPicPr>
+          <p:nvPr/>
+        </p:nvPicPr>
+        <p:blipFill>
+          <a:blip r:embed="rId4"/>
+          <a:stretch>
+            <a:fillRect/>
+          </a:stretch>
+        </p:blipFill>
+        <p:spPr>
+          <a:xfrm>
+            <a:off x="2514600" y="2241550"/>
+            <a:ext cx="165100" cy="165100"/>
           </a:xfrm>
           <a:prstGeom prst="rect">
             <a:avLst/>
@@ -10486,15 +10654,15 @@
           <p:nvPr/>
         </p:nvPicPr>
         <p:blipFill>
-          <a:blip r:embed="rId4"/>
+          <a:blip r:embed="rId5"/>
           <a:stretch>
             <a:fillRect/>
           </a:stretch>
         </p:blipFill>
         <p:spPr>
           <a:xfrm>
-            <a:off x="2781300" y="1905000"/>
-            <a:ext cx="139700" cy="139700"/>
+            <a:off x="2743200" y="2241550"/>
+            <a:ext cx="165100" cy="165100"/>
           </a:xfrm>
           <a:prstGeom prst="rect">
             <a:avLst/>
@@ -10510,15 +10678,15 @@
           <p:nvPr/>
         </p:nvPicPr>
         <p:blipFill>
-          <a:blip r:embed="rId5"/>
+          <a:blip r:embed="rId6"/>
           <a:stretch>
             <a:fillRect/>
           </a:stretch>
         </p:blipFill>
         <p:spPr>
           <a:xfrm>
-            <a:off x="2971800" y="1905000"/>
-            <a:ext cx="139700" cy="139700"/>
+            <a:off x="2971800" y="2241550"/>
+            <a:ext cx="165100" cy="165100"/>
           </a:xfrm>
           <a:prstGeom prst="rect">
             <a:avLst/>
@@ -10534,15 +10702,15 @@
           <p:nvPr/>
         </p:nvPicPr>
         <p:blipFill>
-          <a:blip r:embed="rId3"/>
+          <a:blip r:embed="rId4"/>
           <a:stretch>
             <a:fillRect/>
           </a:stretch>
         </p:blipFill>
         <p:spPr>
           <a:xfrm>
-            <a:off x="4749800" y="1905000"/>
-            <a:ext cx="139700" cy="139700"/>
+            <a:off x="4673600" y="2241550"/>
+            <a:ext cx="165100" cy="165100"/>
           </a:xfrm>
           <a:prstGeom prst="rect">
             <a:avLst/>
@@ -10558,15 +10726,15 @@
           <p:nvPr/>
         </p:nvPicPr>
         <p:blipFill>
-          <a:blip r:embed="rId4"/>
+          <a:blip r:embed="rId5"/>
           <a:stretch>
             <a:fillRect/>
           </a:stretch>
         </p:blipFill>
         <p:spPr>
           <a:xfrm>
-            <a:off x="4940300" y="1905000"/>
-            <a:ext cx="139700" cy="139700"/>
+            <a:off x="4902200" y="2241550"/>
+            <a:ext cx="165100" cy="165100"/>
           </a:xfrm>
           <a:prstGeom prst="rect">
             <a:avLst/>
@@ -10582,15 +10750,15 @@
           <p:nvPr/>
         </p:nvPicPr>
         <p:blipFill>
-          <a:blip r:embed="rId5"/>
+          <a:blip r:embed="rId6"/>
           <a:stretch>
             <a:fillRect/>
           </a:stretch>
         </p:blipFill>
         <p:spPr>
           <a:xfrm>
-            <a:off x="5130800" y="1905000"/>
-            <a:ext cx="139700" cy="139700"/>
+            <a:off x="5130800" y="2241550"/>
+            <a:ext cx="165100" cy="165100"/>
           </a:xfrm>
           <a:prstGeom prst="rect">
             <a:avLst/>
@@ -10606,15 +10774,15 @@
           <p:nvPr/>
         </p:nvPicPr>
         <p:blipFill>
-          <a:blip r:embed="rId3"/>
+          <a:blip r:embed="rId4"/>
           <a:stretch>
             <a:fillRect/>
           </a:stretch>
         </p:blipFill>
         <p:spPr>
           <a:xfrm>
-            <a:off x="6908800" y="1905000"/>
-            <a:ext cx="139700" cy="139700"/>
+            <a:off x="6832600" y="2241550"/>
+            <a:ext cx="165100" cy="165100"/>
           </a:xfrm>
           <a:prstGeom prst="rect">
             <a:avLst/>
@@ -10630,15 +10798,15 @@
           <p:nvPr/>
         </p:nvPicPr>
         <p:blipFill>
-          <a:blip r:embed="rId4"/>
+          <a:blip r:embed="rId5"/>
           <a:stretch>
             <a:fillRect/>
           </a:stretch>
         </p:blipFill>
         <p:spPr>
           <a:xfrm>
-            <a:off x="7099300" y="1905000"/>
-            <a:ext cx="139700" cy="139700"/>
+            <a:off x="7061200" y="2241550"/>
+            <a:ext cx="165100" cy="165100"/>
           </a:xfrm>
           <a:prstGeom prst="rect">
             <a:avLst/>
@@ -10654,15 +10822,15 @@
           <p:nvPr/>
         </p:nvPicPr>
         <p:blipFill>
-          <a:blip r:embed="rId5"/>
+          <a:blip r:embed="rId6"/>
           <a:stretch>
             <a:fillRect/>
           </a:stretch>
         </p:blipFill>
         <p:spPr>
           <a:xfrm>
-            <a:off x="7289800" y="1905000"/>
-            <a:ext cx="139700" cy="139700"/>
+            <a:off x="7289800" y="2241550"/>
+            <a:ext cx="165100" cy="165100"/>
           </a:xfrm>
           <a:prstGeom prst="rect">
             <a:avLst/>
@@ -10678,15 +10846,15 @@
           <p:nvPr/>
         </p:nvPicPr>
         <p:blipFill>
-          <a:blip r:embed="rId3"/>
+          <a:blip r:embed="rId4"/>
           <a:stretch>
             <a:fillRect/>
           </a:stretch>
         </p:blipFill>
         <p:spPr>
           <a:xfrm>
-            <a:off x="9067800" y="1905000"/>
-            <a:ext cx="139700" cy="139700"/>
+            <a:off x="8991600" y="2241550"/>
+            <a:ext cx="165100" cy="165100"/>
           </a:xfrm>
           <a:prstGeom prst="rect">
             <a:avLst/>
@@ -10702,15 +10870,15 @@
           <p:nvPr/>
         </p:nvPicPr>
         <p:blipFill>
-          <a:blip r:embed="rId4"/>
+          <a:blip r:embed="rId5"/>
           <a:stretch>
             <a:fillRect/>
           </a:stretch>
         </p:blipFill>
         <p:spPr>
           <a:xfrm>
-            <a:off x="9258300" y="1905000"/>
-            <a:ext cx="139700" cy="139700"/>
+            <a:off x="9220200" y="2241550"/>
+            <a:ext cx="165100" cy="165100"/>
           </a:xfrm>
           <a:prstGeom prst="rect">
             <a:avLst/>
@@ -10726,15 +10894,15 @@
           <p:nvPr/>
         </p:nvPicPr>
         <p:blipFill>
-          <a:blip r:embed="rId5"/>
+          <a:blip r:embed="rId6"/>
           <a:stretch>
             <a:fillRect/>
           </a:stretch>
         </p:blipFill>
         <p:spPr>
           <a:xfrm>
-            <a:off x="9448800" y="1905000"/>
-            <a:ext cx="139700" cy="139700"/>
+            <a:off x="9448800" y="2241550"/>
+            <a:ext cx="165100" cy="165100"/>
           </a:xfrm>
           <a:prstGeom prst="rect">
             <a:avLst/>
@@ -10749,7 +10917,7 @@
         </p:nvSpPr>
         <p:spPr>
           <a:xfrm>
-            <a:off x="698500" y="3124200"/>
+            <a:off x="698500" y="3175000"/>
             <a:ext cx="9525000" cy="190500"/>
           </a:xfrm>
           <a:prstGeom prst="rect">
@@ -10784,7 +10952,7 @@
         </p:nvSpPr>
         <p:spPr>
           <a:xfrm>
-            <a:off x="698500" y="3479800"/>
+            <a:off x="698500" y="3530600"/>
             <a:ext cx="10788650" cy="6350"/>
           </a:xfrm>
           <a:prstGeom prst="rect">
@@ -10828,7 +10996,7 @@
         </p:nvSpPr>
         <p:spPr>
           <a:xfrm>
-            <a:off x="698500" y="3670300"/>
+            <a:off x="698500" y="3721100"/>
             <a:ext cx="9525000" cy="165100"/>
           </a:xfrm>
           <a:prstGeom prst="rect">
@@ -10863,7 +11031,7 @@
         </p:nvSpPr>
         <p:spPr>
           <a:xfrm>
-            <a:off x="698500" y="3886200"/>
+            <a:off x="698500" y="3937000"/>
             <a:ext cx="5715000" cy="825500"/>
           </a:xfrm>
           <a:prstGeom prst="rect">
@@ -10906,7 +11074,7 @@
         </p:nvSpPr>
         <p:spPr>
           <a:xfrm>
-            <a:off x="698500" y="4851400"/>
+            <a:off x="698500" y="4902200"/>
             <a:ext cx="7620000" cy="190500"/>
           </a:xfrm>
           <a:prstGeom prst="rect">
@@ -11065,7 +11233,7 @@
           <p:nvPr/>
         </p:nvPicPr>
         <p:blipFill>
-          <a:blip r:embed="rId6"/>
+          <a:blip r:embed="rId7"/>
           <a:stretch>
             <a:fillRect/>
           </a:stretch>
@@ -11367,8 +11535,8 @@
         </p:nvSpPr>
         <p:spPr>
           <a:xfrm>
-            <a:off x="1530350" y="2552700"/>
-            <a:ext cx="482600" cy="482600"/>
+            <a:off x="1492250" y="2514600"/>
+            <a:ext cx="558800" cy="558800"/>
           </a:xfrm>
           <a:prstGeom prst="ellipse">
             <a:avLst/>
@@ -11405,16 +11573,40 @@
           </a:p>
         </p:txBody>
       </p:sp>
-      <p:sp>
-        <p:nvSpPr>
-          <p:cNvPr id="105" name="TextBox 104"/>
-          <p:cNvSpPr txBox="1"/>
-          <p:nvPr/>
-        </p:nvSpPr>
-        <p:spPr>
-          <a:xfrm>
-            <a:off x="1517650" y="2698750"/>
-            <a:ext cx="508000" cy="190500"/>
+      <p:pic>
+        <p:nvPicPr>
+          <p:cNvPr id="105" name="Picture 104" descr="ic-chat.png"/>
+          <p:cNvPicPr>
+            <a:picLocks noChangeAspect="1"/>
+          </p:cNvPicPr>
+          <p:nvPr/>
+        </p:nvPicPr>
+        <p:blipFill>
+          <a:blip r:embed="rId3"/>
+          <a:stretch>
+            <a:fillRect/>
+          </a:stretch>
+        </p:blipFill>
+        <p:spPr>
+          <a:xfrm>
+            <a:off x="1657350" y="2679700"/>
+            <a:ext cx="228600" cy="228600"/>
+          </a:xfrm>
+          <a:prstGeom prst="rect">
+            <a:avLst/>
+          </a:prstGeom>
+        </p:spPr>
+      </p:pic>
+      <p:sp>
+        <p:nvSpPr>
+          <p:cNvPr id="106" name="TextBox 105"/>
+          <p:cNvSpPr txBox="1"/>
+          <p:nvPr/>
+        </p:nvSpPr>
+        <p:spPr>
+          <a:xfrm>
+            <a:off x="1517650" y="2349500"/>
+            <a:ext cx="508000" cy="152400"/>
           </a:xfrm>
           <a:prstGeom prst="rect">
             <a:avLst/>
@@ -11429,7 +11621,7 @@
           <a:p>
             <a:pPr algn="ctr"/>
             <a:r>
-              <a:rPr sz="1300" b="0" spc="80">
+              <a:rPr sz="1100" b="0" spc="80">
                 <a:solidFill>
                   <a:srgbClr val="9A9AA2"/>
                 </a:solidFill>
@@ -11442,7 +11634,7 @@
       </p:sp>
       <p:sp>
         <p:nvSpPr>
-          <p:cNvPr id="106" name="Diamond 105"/>
+          <p:cNvPr id="107" name="Diamond 106"/>
           <p:cNvSpPr/>
           <p:nvPr/>
         </p:nvSpPr>
@@ -11486,14 +11678,14 @@
       </p:sp>
       <p:sp>
         <p:nvSpPr>
-          <p:cNvPr id="107" name="Oval 106"/>
+          <p:cNvPr id="108" name="Oval 107"/>
           <p:cNvSpPr/>
           <p:nvPr/>
         </p:nvSpPr>
         <p:spPr>
           <a:xfrm>
-            <a:off x="3689350" y="2552700"/>
-            <a:ext cx="482600" cy="482600"/>
+            <a:off x="3651250" y="2514600"/>
+            <a:ext cx="558800" cy="558800"/>
           </a:xfrm>
           <a:prstGeom prst="ellipse">
             <a:avLst/>
@@ -11530,16 +11722,40 @@
           </a:p>
         </p:txBody>
       </p:sp>
-      <p:sp>
-        <p:nvSpPr>
-          <p:cNvPr id="108" name="TextBox 107"/>
-          <p:cNvSpPr txBox="1"/>
-          <p:nvPr/>
-        </p:nvSpPr>
-        <p:spPr>
-          <a:xfrm>
-            <a:off x="3676650" y="2698750"/>
-            <a:ext cx="508000" cy="190500"/>
+      <p:pic>
+        <p:nvPicPr>
+          <p:cNvPr id="109" name="Picture 108" descr="ic-search.png"/>
+          <p:cNvPicPr>
+            <a:picLocks noChangeAspect="1"/>
+          </p:cNvPicPr>
+          <p:nvPr/>
+        </p:nvPicPr>
+        <p:blipFill>
+          <a:blip r:embed="rId4"/>
+          <a:stretch>
+            <a:fillRect/>
+          </a:stretch>
+        </p:blipFill>
+        <p:spPr>
+          <a:xfrm>
+            <a:off x="3816350" y="2679700"/>
+            <a:ext cx="228600" cy="228600"/>
+          </a:xfrm>
+          <a:prstGeom prst="rect">
+            <a:avLst/>
+          </a:prstGeom>
+        </p:spPr>
+      </p:pic>
+      <p:sp>
+        <p:nvSpPr>
+          <p:cNvPr id="110" name="TextBox 109"/>
+          <p:cNvSpPr txBox="1"/>
+          <p:nvPr/>
+        </p:nvSpPr>
+        <p:spPr>
+          <a:xfrm>
+            <a:off x="3676650" y="2349500"/>
+            <a:ext cx="508000" cy="152400"/>
           </a:xfrm>
           <a:prstGeom prst="rect">
             <a:avLst/>
@@ -11554,7 +11770,7 @@
           <a:p>
             <a:pPr algn="ctr"/>
             <a:r>
-              <a:rPr sz="1300" b="0" spc="80">
+              <a:rPr sz="1100" b="0" spc="80">
                 <a:solidFill>
                   <a:srgbClr val="9A9AA2"/>
                 </a:solidFill>
@@ -11567,7 +11783,7 @@
       </p:sp>
       <p:sp>
         <p:nvSpPr>
-          <p:cNvPr id="109" name="Diamond 108"/>
+          <p:cNvPr id="111" name="Diamond 110"/>
           <p:cNvSpPr/>
           <p:nvPr/>
         </p:nvSpPr>
@@ -11611,14 +11827,14 @@
       </p:sp>
       <p:sp>
         <p:nvSpPr>
-          <p:cNvPr id="110" name="Oval 109"/>
+          <p:cNvPr id="112" name="Oval 111"/>
           <p:cNvSpPr/>
           <p:nvPr/>
         </p:nvSpPr>
         <p:spPr>
           <a:xfrm>
-            <a:off x="5848350" y="2552700"/>
-            <a:ext cx="482600" cy="482600"/>
+            <a:off x="5810250" y="2514600"/>
+            <a:ext cx="558800" cy="558800"/>
           </a:xfrm>
           <a:prstGeom prst="ellipse">
             <a:avLst/>
@@ -11655,16 +11871,40 @@
           </a:p>
         </p:txBody>
       </p:sp>
-      <p:sp>
-        <p:nvSpPr>
-          <p:cNvPr id="111" name="TextBox 110"/>
-          <p:cNvSpPr txBox="1"/>
-          <p:nvPr/>
-        </p:nvSpPr>
-        <p:spPr>
-          <a:xfrm>
-            <a:off x="5835650" y="2698750"/>
-            <a:ext cx="508000" cy="190500"/>
+      <p:pic>
+        <p:nvPicPr>
+          <p:cNvPr id="113" name="Picture 112" descr="ic-book.png"/>
+          <p:cNvPicPr>
+            <a:picLocks noChangeAspect="1"/>
+          </p:cNvPicPr>
+          <p:nvPr/>
+        </p:nvPicPr>
+        <p:blipFill>
+          <a:blip r:embed="rId5"/>
+          <a:stretch>
+            <a:fillRect/>
+          </a:stretch>
+        </p:blipFill>
+        <p:spPr>
+          <a:xfrm>
+            <a:off x="5975350" y="2679700"/>
+            <a:ext cx="228600" cy="228600"/>
+          </a:xfrm>
+          <a:prstGeom prst="rect">
+            <a:avLst/>
+          </a:prstGeom>
+        </p:spPr>
+      </p:pic>
+      <p:sp>
+        <p:nvSpPr>
+          <p:cNvPr id="114" name="TextBox 113"/>
+          <p:cNvSpPr txBox="1"/>
+          <p:nvPr/>
+        </p:nvSpPr>
+        <p:spPr>
+          <a:xfrm>
+            <a:off x="5835650" y="2349500"/>
+            <a:ext cx="508000" cy="152400"/>
           </a:xfrm>
           <a:prstGeom prst="rect">
             <a:avLst/>
@@ -11679,7 +11919,7 @@
           <a:p>
             <a:pPr algn="ctr"/>
             <a:r>
-              <a:rPr sz="1300" b="0" spc="80">
+              <a:rPr sz="1100" b="0" spc="80">
                 <a:solidFill>
                   <a:srgbClr val="9A9AA2"/>
                 </a:solidFill>
@@ -11692,7 +11932,7 @@
       </p:sp>
       <p:sp>
         <p:nvSpPr>
-          <p:cNvPr id="112" name="Diamond 111"/>
+          <p:cNvPr id="115" name="Diamond 114"/>
           <p:cNvSpPr/>
           <p:nvPr/>
         </p:nvSpPr>
@@ -11736,14 +11976,14 @@
       </p:sp>
       <p:sp>
         <p:nvSpPr>
-          <p:cNvPr id="113" name="Oval 112"/>
+          <p:cNvPr id="116" name="Oval 115"/>
           <p:cNvSpPr/>
           <p:nvPr/>
         </p:nvSpPr>
         <p:spPr>
           <a:xfrm>
-            <a:off x="8007350" y="2552700"/>
-            <a:ext cx="482600" cy="482600"/>
+            <a:off x="7969250" y="2514600"/>
+            <a:ext cx="558800" cy="558800"/>
           </a:xfrm>
           <a:prstGeom prst="ellipse">
             <a:avLst/>
@@ -11780,16 +12020,40 @@
           </a:p>
         </p:txBody>
       </p:sp>
-      <p:sp>
-        <p:nvSpPr>
-          <p:cNvPr id="114" name="TextBox 113"/>
-          <p:cNvSpPr txBox="1"/>
-          <p:nvPr/>
-        </p:nvSpPr>
-        <p:spPr>
-          <a:xfrm>
-            <a:off x="7994650" y="2698750"/>
-            <a:ext cx="508000" cy="190500"/>
+      <p:pic>
+        <p:nvPicPr>
+          <p:cNvPr id="117" name="Picture 116" descr="ic-shield.png"/>
+          <p:cNvPicPr>
+            <a:picLocks noChangeAspect="1"/>
+          </p:cNvPicPr>
+          <p:nvPr/>
+        </p:nvPicPr>
+        <p:blipFill>
+          <a:blip r:embed="rId6"/>
+          <a:stretch>
+            <a:fillRect/>
+          </a:stretch>
+        </p:blipFill>
+        <p:spPr>
+          <a:xfrm>
+            <a:off x="8134350" y="2679700"/>
+            <a:ext cx="228600" cy="228600"/>
+          </a:xfrm>
+          <a:prstGeom prst="rect">
+            <a:avLst/>
+          </a:prstGeom>
+        </p:spPr>
+      </p:pic>
+      <p:sp>
+        <p:nvSpPr>
+          <p:cNvPr id="118" name="TextBox 117"/>
+          <p:cNvSpPr txBox="1"/>
+          <p:nvPr/>
+        </p:nvSpPr>
+        <p:spPr>
+          <a:xfrm>
+            <a:off x="7994650" y="2349500"/>
+            <a:ext cx="508000" cy="152400"/>
           </a:xfrm>
           <a:prstGeom prst="rect">
             <a:avLst/>
@@ -11804,7 +12068,7 @@
           <a:p>
             <a:pPr algn="ctr"/>
             <a:r>
-              <a:rPr sz="1300" b="0" spc="80">
+              <a:rPr sz="1100" b="0" spc="80">
                 <a:solidFill>
                   <a:srgbClr val="9A9AA2"/>
                 </a:solidFill>
@@ -11817,7 +12081,7 @@
       </p:sp>
       <p:sp>
         <p:nvSpPr>
-          <p:cNvPr id="115" name="Diamond 114"/>
+          <p:cNvPr id="119" name="Diamond 118"/>
           <p:cNvSpPr/>
           <p:nvPr/>
         </p:nvSpPr>
@@ -11861,14 +12125,14 @@
       </p:sp>
       <p:sp>
         <p:nvSpPr>
-          <p:cNvPr id="116" name="Oval 115"/>
+          <p:cNvPr id="120" name="Oval 119"/>
           <p:cNvSpPr/>
           <p:nvPr/>
         </p:nvSpPr>
         <p:spPr>
           <a:xfrm>
-            <a:off x="10166350" y="2552700"/>
-            <a:ext cx="482600" cy="482600"/>
+            <a:off x="10128250" y="2514600"/>
+            <a:ext cx="558800" cy="558800"/>
           </a:xfrm>
           <a:prstGeom prst="ellipse">
             <a:avLst/>
@@ -11905,16 +12169,40 @@
           </a:p>
         </p:txBody>
       </p:sp>
-      <p:sp>
-        <p:nvSpPr>
-          <p:cNvPr id="117" name="TextBox 116"/>
-          <p:cNvSpPr txBox="1"/>
-          <p:nvPr/>
-        </p:nvSpPr>
-        <p:spPr>
-          <a:xfrm>
-            <a:off x="10153650" y="2698750"/>
-            <a:ext cx="508000" cy="190500"/>
+      <p:pic>
+        <p:nvPicPr>
+          <p:cNvPr id="121" name="Picture 120" descr="ic-db.png"/>
+          <p:cNvPicPr>
+            <a:picLocks noChangeAspect="1"/>
+          </p:cNvPicPr>
+          <p:nvPr/>
+        </p:nvPicPr>
+        <p:blipFill>
+          <a:blip r:embed="rId7"/>
+          <a:stretch>
+            <a:fillRect/>
+          </a:stretch>
+        </p:blipFill>
+        <p:spPr>
+          <a:xfrm>
+            <a:off x="10293350" y="2679700"/>
+            <a:ext cx="228600" cy="228600"/>
+          </a:xfrm>
+          <a:prstGeom prst="rect">
+            <a:avLst/>
+          </a:prstGeom>
+        </p:spPr>
+      </p:pic>
+      <p:sp>
+        <p:nvSpPr>
+          <p:cNvPr id="122" name="TextBox 121"/>
+          <p:cNvSpPr txBox="1"/>
+          <p:nvPr/>
+        </p:nvSpPr>
+        <p:spPr>
+          <a:xfrm>
+            <a:off x="10153650" y="2349500"/>
+            <a:ext cx="508000" cy="152400"/>
           </a:xfrm>
           <a:prstGeom prst="rect">
             <a:avLst/>
@@ -11929,7 +12217,7 @@
           <a:p>
             <a:pPr algn="ctr"/>
             <a:r>
-              <a:rPr sz="1300" b="0" spc="80">
+              <a:rPr sz="1100" b="0" spc="80">
                 <a:solidFill>
                   <a:srgbClr val="9A9AA2"/>
                 </a:solidFill>
@@ -11942,13 +12230,13 @@
       </p:sp>
       <p:sp>
         <p:nvSpPr>
-          <p:cNvPr id="118" name="TextBox 117"/>
-          <p:cNvSpPr txBox="1"/>
-          <p:nvPr/>
-        </p:nvSpPr>
-        <p:spPr>
-          <a:xfrm>
-            <a:off x="755650" y="3175000"/>
+          <p:cNvPr id="123" name="TextBox 122"/>
+          <p:cNvSpPr txBox="1"/>
+          <p:nvPr/>
+        </p:nvSpPr>
+        <p:spPr>
+          <a:xfrm>
+            <a:off x="755650" y="3213100"/>
             <a:ext cx="2032000" cy="215900"/>
           </a:xfrm>
           <a:prstGeom prst="rect">
@@ -11977,13 +12265,13 @@
       </p:sp>
       <p:sp>
         <p:nvSpPr>
-          <p:cNvPr id="119" name="TextBox 118"/>
-          <p:cNvSpPr txBox="1"/>
-          <p:nvPr/>
-        </p:nvSpPr>
-        <p:spPr>
-          <a:xfrm>
-            <a:off x="755650" y="3403600"/>
+          <p:cNvPr id="124" name="TextBox 123"/>
+          <p:cNvSpPr txBox="1"/>
+          <p:nvPr/>
+        </p:nvSpPr>
+        <p:spPr>
+          <a:xfrm>
+            <a:off x="755650" y="3517900"/>
             <a:ext cx="2032000" cy="165100"/>
           </a:xfrm>
           <a:prstGeom prst="rect">
@@ -12012,13 +12300,13 @@
       </p:sp>
       <p:sp>
         <p:nvSpPr>
-          <p:cNvPr id="120" name="TextBox 119"/>
-          <p:cNvSpPr txBox="1"/>
-          <p:nvPr/>
-        </p:nvSpPr>
-        <p:spPr>
-          <a:xfrm>
-            <a:off x="2914650" y="3175000"/>
+          <p:cNvPr id="125" name="TextBox 124"/>
+          <p:cNvSpPr txBox="1"/>
+          <p:nvPr/>
+        </p:nvSpPr>
+        <p:spPr>
+          <a:xfrm>
+            <a:off x="2914650" y="3213100"/>
             <a:ext cx="2032000" cy="215900"/>
           </a:xfrm>
           <a:prstGeom prst="rect">
@@ -12047,13 +12335,13 @@
       </p:sp>
       <p:sp>
         <p:nvSpPr>
-          <p:cNvPr id="121" name="TextBox 120"/>
-          <p:cNvSpPr txBox="1"/>
-          <p:nvPr/>
-        </p:nvSpPr>
-        <p:spPr>
-          <a:xfrm>
-            <a:off x="2914650" y="3403600"/>
+          <p:cNvPr id="126" name="TextBox 125"/>
+          <p:cNvSpPr txBox="1"/>
+          <p:nvPr/>
+        </p:nvSpPr>
+        <p:spPr>
+          <a:xfrm>
+            <a:off x="2914650" y="3517900"/>
             <a:ext cx="2032000" cy="165100"/>
           </a:xfrm>
           <a:prstGeom prst="rect">
@@ -12082,13 +12370,13 @@
       </p:sp>
       <p:sp>
         <p:nvSpPr>
-          <p:cNvPr id="122" name="TextBox 121"/>
-          <p:cNvSpPr txBox="1"/>
-          <p:nvPr/>
-        </p:nvSpPr>
-        <p:spPr>
-          <a:xfrm>
-            <a:off x="5073650" y="3175000"/>
+          <p:cNvPr id="127" name="TextBox 126"/>
+          <p:cNvSpPr txBox="1"/>
+          <p:nvPr/>
+        </p:nvSpPr>
+        <p:spPr>
+          <a:xfrm>
+            <a:off x="5073650" y="3213100"/>
             <a:ext cx="2032000" cy="215900"/>
           </a:xfrm>
           <a:prstGeom prst="rect">
@@ -12117,13 +12405,13 @@
       </p:sp>
       <p:sp>
         <p:nvSpPr>
-          <p:cNvPr id="123" name="TextBox 122"/>
-          <p:cNvSpPr txBox="1"/>
-          <p:nvPr/>
-        </p:nvSpPr>
-        <p:spPr>
-          <a:xfrm>
-            <a:off x="5073650" y="3403600"/>
+          <p:cNvPr id="128" name="TextBox 127"/>
+          <p:cNvSpPr txBox="1"/>
+          <p:nvPr/>
+        </p:nvSpPr>
+        <p:spPr>
+          <a:xfrm>
+            <a:off x="5073650" y="3517900"/>
             <a:ext cx="2032000" cy="165100"/>
           </a:xfrm>
           <a:prstGeom prst="rect">
@@ -12152,13 +12440,13 @@
       </p:sp>
       <p:sp>
         <p:nvSpPr>
-          <p:cNvPr id="124" name="TextBox 123"/>
-          <p:cNvSpPr txBox="1"/>
-          <p:nvPr/>
-        </p:nvSpPr>
-        <p:spPr>
-          <a:xfrm>
-            <a:off x="7232650" y="3175000"/>
+          <p:cNvPr id="129" name="TextBox 128"/>
+          <p:cNvSpPr txBox="1"/>
+          <p:nvPr/>
+        </p:nvSpPr>
+        <p:spPr>
+          <a:xfrm>
+            <a:off x="7232650" y="3213100"/>
             <a:ext cx="2032000" cy="215900"/>
           </a:xfrm>
           <a:prstGeom prst="rect">
@@ -12187,13 +12475,13 @@
       </p:sp>
       <p:sp>
         <p:nvSpPr>
-          <p:cNvPr id="125" name="TextBox 124"/>
-          <p:cNvSpPr txBox="1"/>
-          <p:nvPr/>
-        </p:nvSpPr>
-        <p:spPr>
-          <a:xfrm>
-            <a:off x="7232650" y="3403600"/>
+          <p:cNvPr id="130" name="TextBox 129"/>
+          <p:cNvSpPr txBox="1"/>
+          <p:nvPr/>
+        </p:nvSpPr>
+        <p:spPr>
+          <a:xfrm>
+            <a:off x="7232650" y="3517900"/>
             <a:ext cx="2032000" cy="165100"/>
           </a:xfrm>
           <a:prstGeom prst="rect">
@@ -12222,13 +12510,13 @@
       </p:sp>
       <p:sp>
         <p:nvSpPr>
-          <p:cNvPr id="126" name="TextBox 125"/>
-          <p:cNvSpPr txBox="1"/>
-          <p:nvPr/>
-        </p:nvSpPr>
-        <p:spPr>
-          <a:xfrm>
-            <a:off x="9391650" y="3175000"/>
+          <p:cNvPr id="131" name="TextBox 130"/>
+          <p:cNvSpPr txBox="1"/>
+          <p:nvPr/>
+        </p:nvSpPr>
+        <p:spPr>
+          <a:xfrm>
+            <a:off x="9391650" y="3213100"/>
             <a:ext cx="2032000" cy="215900"/>
           </a:xfrm>
           <a:prstGeom prst="rect">
@@ -12257,13 +12545,13 @@
       </p:sp>
       <p:sp>
         <p:nvSpPr>
-          <p:cNvPr id="127" name="TextBox 126"/>
-          <p:cNvSpPr txBox="1"/>
-          <p:nvPr/>
-        </p:nvSpPr>
-        <p:spPr>
-          <a:xfrm>
-            <a:off x="9391650" y="3403600"/>
+          <p:cNvPr id="132" name="TextBox 131"/>
+          <p:cNvSpPr txBox="1"/>
+          <p:nvPr/>
+        </p:nvSpPr>
+        <p:spPr>
+          <a:xfrm>
+            <a:off x="9391650" y="3517900"/>
             <a:ext cx="2032000" cy="165100"/>
           </a:xfrm>
           <a:prstGeom prst="rect">
@@ -12292,7 +12580,7 @@
       </p:sp>
       <p:sp>
         <p:nvSpPr>
-          <p:cNvPr id="128" name="Diamond 127"/>
+          <p:cNvPr id="133" name="Diamond 132"/>
           <p:cNvSpPr/>
           <p:nvPr/>
         </p:nvSpPr>
@@ -12336,7 +12624,7 @@
       </p:sp>
       <p:sp>
         <p:nvSpPr>
-          <p:cNvPr id="129" name="TextBox 128"/>
+          <p:cNvPr id="134" name="TextBox 133"/>
           <p:cNvSpPr txBox="1"/>
           <p:nvPr/>
         </p:nvSpPr>
@@ -12371,7 +12659,7 @@
       </p:sp>
       <p:sp>
         <p:nvSpPr>
-          <p:cNvPr id="130" name="Rectangle 129"/>
+          <p:cNvPr id="135" name="Rectangle 134"/>
           <p:cNvSpPr/>
           <p:nvPr/>
         </p:nvSpPr>
@@ -12415,7 +12703,7 @@
       </p:sp>
       <p:sp>
         <p:nvSpPr>
-          <p:cNvPr id="131" name="TextBox 130"/>
+          <p:cNvPr id="136" name="TextBox 135"/>
           <p:cNvSpPr txBox="1"/>
           <p:nvPr/>
         </p:nvSpPr>
@@ -12450,14 +12738,14 @@
       </p:sp>
       <p:pic>
         <p:nvPicPr>
-          <p:cNvPr id="132" name="Picture 131" descr="logo.png"/>
+          <p:cNvPr id="137" name="Picture 136" descr="logo.png"/>
           <p:cNvPicPr>
             <a:picLocks noChangeAspect="1"/>
           </p:cNvPicPr>
           <p:nvPr/>
         </p:nvPicPr>
         <p:blipFill>
-          <a:blip r:embed="rId3"/>
+          <a:blip r:embed="rId8"/>
           <a:stretch>
             <a:fillRect/>
           </a:stretch>
